--- a/downloads/presentations/modules/arc-230.pptx
+++ b/downloads/presentations/modules/arc-230.pptx
@@ -3613,13 +3613,11 @@
             </a:avLst>
           </a:prstGeom>
           <a:solidFill>
-            <a:srgbClr val="FFFFFF">
-              <a:alpha val="88000"/>
-            </a:srgbClr>
+            <a:srgbClr val="FFFFFF"/>
           </a:solidFill>
           <a:ln w="12700">
             <a:solidFill>
-              <a:srgbClr val="D6E8F2"/>
+              <a:srgbClr val="B9D7E6"/>
             </a:solidFill>
             <a:prstDash val="solid"/>
           </a:ln>
@@ -3627,30 +3625,42 @@
       </p:sp>
       <p:sp>
         <p:nvSpPr>
-          <p:cNvPr id="14" name="Shape 12"/>
-          <p:cNvSpPr/>
-          <p:nvPr/>
-        </p:nvSpPr>
-        <p:spPr>
-          <a:xfrm>
-            <a:off x="7927848" y="3319272"/>
-            <a:ext cx="792480" cy="749808"/>
-          </a:xfrm>
-          <a:prstGeom prst="roundRect">
-            <a:avLst>
-              <a:gd name="adj" fmla="val 14634"/>
-            </a:avLst>
-          </a:prstGeom>
-          <a:solidFill>
-            <a:srgbClr val="0068B7"/>
-          </a:solidFill>
-          <a:ln w="12700">
-            <a:solidFill>
-              <a:srgbClr val="0068B7"/>
-            </a:solidFill>
-            <a:prstDash val="solid"/>
-          </a:ln>
-        </p:spPr>
+          <p:cNvPr id="14" name="Text 12"/>
+          <p:cNvSpPr/>
+          <p:nvPr/>
+        </p:nvSpPr>
+        <p:spPr>
+          <a:xfrm>
+            <a:off x="7799832" y="2935224"/>
+            <a:ext cx="3145536" cy="256032"/>
+          </a:xfrm>
+          <a:prstGeom prst="rect">
+            <a:avLst/>
+          </a:prstGeom>
+          <a:noFill/>
+          <a:ln/>
+        </p:spPr>
+        <p:txBody>
+          <a:bodyPr wrap="square" lIns="0" tIns="0" rIns="0" bIns="0" rtlCol="0" anchor="ctr"/>
+          <a:lstStyle/>
+          <a:p>
+            <a:pPr indent="0" marL="0">
+              <a:buNone/>
+            </a:pPr>
+            <a:r>
+              <a:rPr lang="en-US" sz="1300" b="1" dirty="0">
+                <a:solidFill>
+                  <a:srgbClr val="0068B7"/>
+                </a:solidFill>
+                <a:latin typeface="Aptos" pitchFamily="34" charset="0"/>
+                <a:ea typeface="Aptos" pitchFamily="34" charset="-122"/>
+                <a:cs typeface="Aptos" pitchFamily="34" charset="-120"/>
+              </a:rPr>
+              <a:t>Concept checkpoints</a:t>
+            </a:r>
+            <a:endParaRPr lang="en-US" sz="1300" dirty="0"/>
+          </a:p>
+        </p:txBody>
       </p:sp>
       <p:sp>
         <p:nvSpPr>
@@ -3660,240 +3670,53 @@
         </p:nvSpPr>
         <p:spPr>
           <a:xfrm>
-            <a:off x="8001000" y="3511296"/>
-            <a:ext cx="646176" cy="310896"/>
-          </a:xfrm>
-          <a:prstGeom prst="rect">
-            <a:avLst/>
-          </a:prstGeom>
-          <a:noFill/>
-          <a:ln/>
-        </p:spPr>
-        <p:txBody>
-          <a:bodyPr wrap="square" lIns="0" tIns="0" rIns="0" bIns="0" rtlCol="0" anchor="ctr">
+            <a:off x="7818120" y="3300984"/>
+            <a:ext cx="3090672" cy="877824"/>
+          </a:xfrm>
+          <a:prstGeom prst="rect">
+            <a:avLst/>
+          </a:prstGeom>
+          <a:noFill/>
+          <a:ln/>
+        </p:spPr>
+        <p:txBody>
+          <a:bodyPr wrap="square" lIns="254" tIns="254" rIns="254" bIns="254" rtlCol="0" anchor="t">
             <a:normAutofit/>
           </a:bodyPr>
           <a:lstStyle/>
           <a:p>
-            <a:pPr algn="ctr" indent="0" marL="0">
-              <a:buNone/>
-            </a:pPr>
-            <a:r>
-              <a:rPr lang="en-US" sz="1500" b="1" dirty="0">
-                <a:solidFill>
-                  <a:srgbClr val="FFFFFF"/>
-                </a:solidFill>
-                <a:latin typeface="Aptos" pitchFamily="34" charset="0"/>
-                <a:ea typeface="Aptos" pitchFamily="34" charset="-122"/>
-                <a:cs typeface="Aptos" pitchFamily="34" charset="-120"/>
-              </a:rPr>
-              <a:t>Plan</a:t>
-            </a:r>
-            <a:endParaRPr lang="en-US" sz="1500" dirty="0"/>
+            <a:r>
+              <a:rPr lang="en-US" sz="1380" dirty="0">
+                <a:solidFill>
+                  <a:srgbClr val="17364A"/>
+                </a:solidFill>
+                <a:latin typeface="Aptos" pitchFamily="34" charset="0"/>
+                <a:ea typeface="Aptos" pitchFamily="34" charset="-122"/>
+                <a:cs typeface="Aptos" pitchFamily="34" charset="-120"/>
+              </a:rPr>
+              <a:t>Electronic Reporting and Surveillance Distribution supports the distribution of reporting.</a:t>
+            </a:r>
+            <a:endParaRPr lang="en-US" sz="1380" dirty="0"/>
+          </a:p>
+          <a:p>
+            <a:r>
+              <a:rPr lang="en-US" sz="1380" dirty="0">
+                <a:solidFill>
+                  <a:srgbClr val="17364A"/>
+                </a:solidFill>
+                <a:latin typeface="Aptos" pitchFamily="34" charset="0"/>
+                <a:ea typeface="Aptos" pitchFamily="34" charset="-122"/>
+                <a:cs typeface="Aptos" pitchFamily="34" charset="-120"/>
+              </a:rPr>
+              <a:t>These components are essential to reliable and current triggering.</a:t>
+            </a:r>
+            <a:endParaRPr lang="en-US" sz="1380" dirty="0"/>
           </a:p>
         </p:txBody>
       </p:sp>
       <p:sp>
         <p:nvSpPr>
           <p:cNvPr id="16" name="Shape 14"/>
-          <p:cNvSpPr/>
-          <p:nvPr/>
-        </p:nvSpPr>
-        <p:spPr>
-          <a:xfrm>
-            <a:off x="8976360" y="3319272"/>
-            <a:ext cx="792480" cy="749808"/>
-          </a:xfrm>
-          <a:prstGeom prst="roundRect">
-            <a:avLst>
-              <a:gd name="adj" fmla="val 14634"/>
-            </a:avLst>
-          </a:prstGeom>
-          <a:solidFill>
-            <a:srgbClr val="2F8A28"/>
-          </a:solidFill>
-          <a:ln w="12700">
-            <a:solidFill>
-              <a:srgbClr val="2F8A28"/>
-            </a:solidFill>
-            <a:prstDash val="solid"/>
-          </a:ln>
-        </p:spPr>
-      </p:sp>
-      <p:sp>
-        <p:nvSpPr>
-          <p:cNvPr id="17" name="Text 15"/>
-          <p:cNvSpPr/>
-          <p:nvPr/>
-        </p:nvSpPr>
-        <p:spPr>
-          <a:xfrm>
-            <a:off x="9049512" y="3511296"/>
-            <a:ext cx="646176" cy="310896"/>
-          </a:xfrm>
-          <a:prstGeom prst="rect">
-            <a:avLst/>
-          </a:prstGeom>
-          <a:noFill/>
-          <a:ln/>
-        </p:spPr>
-        <p:txBody>
-          <a:bodyPr wrap="square" lIns="0" tIns="0" rIns="0" bIns="0" rtlCol="0" anchor="ctr">
-            <a:normAutofit/>
-          </a:bodyPr>
-          <a:lstStyle/>
-          <a:p>
-            <a:pPr algn="ctr" indent="0" marL="0">
-              <a:buNone/>
-            </a:pPr>
-            <a:r>
-              <a:rPr lang="en-US" sz="1500" b="1" dirty="0">
-                <a:solidFill>
-                  <a:srgbClr val="FFFFFF"/>
-                </a:solidFill>
-                <a:latin typeface="Aptos" pitchFamily="34" charset="0"/>
-                <a:ea typeface="Aptos" pitchFamily="34" charset="-122"/>
-                <a:cs typeface="Aptos" pitchFamily="34" charset="-120"/>
-              </a:rPr>
-              <a:t>Do</a:t>
-            </a:r>
-            <a:endParaRPr lang="en-US" sz="1500" dirty="0"/>
-          </a:p>
-        </p:txBody>
-      </p:sp>
-      <p:sp>
-        <p:nvSpPr>
-          <p:cNvPr id="18" name="Shape 16"/>
-          <p:cNvSpPr/>
-          <p:nvPr/>
-        </p:nvSpPr>
-        <p:spPr>
-          <a:xfrm>
-            <a:off x="10024872" y="3319272"/>
-            <a:ext cx="792480" cy="749808"/>
-          </a:xfrm>
-          <a:prstGeom prst="roundRect">
-            <a:avLst>
-              <a:gd name="adj" fmla="val 14634"/>
-            </a:avLst>
-          </a:prstGeom>
-          <a:solidFill>
-            <a:srgbClr val="D69A2D"/>
-          </a:solidFill>
-          <a:ln w="12700">
-            <a:solidFill>
-              <a:srgbClr val="D69A2D"/>
-            </a:solidFill>
-            <a:prstDash val="solid"/>
-          </a:ln>
-        </p:spPr>
-      </p:sp>
-      <p:sp>
-        <p:nvSpPr>
-          <p:cNvPr id="19" name="Text 17"/>
-          <p:cNvSpPr/>
-          <p:nvPr/>
-        </p:nvSpPr>
-        <p:spPr>
-          <a:xfrm>
-            <a:off x="10098024" y="3511296"/>
-            <a:ext cx="646176" cy="310896"/>
-          </a:xfrm>
-          <a:prstGeom prst="rect">
-            <a:avLst/>
-          </a:prstGeom>
-          <a:noFill/>
-          <a:ln/>
-        </p:spPr>
-        <p:txBody>
-          <a:bodyPr wrap="square" lIns="0" tIns="0" rIns="0" bIns="0" rtlCol="0" anchor="ctr">
-            <a:normAutofit/>
-          </a:bodyPr>
-          <a:lstStyle/>
-          <a:p>
-            <a:pPr algn="ctr" indent="0" marL="0">
-              <a:buNone/>
-            </a:pPr>
-            <a:r>
-              <a:rPr lang="en-US" sz="1500" b="1" dirty="0">
-                <a:solidFill>
-                  <a:srgbClr val="FFFFFF"/>
-                </a:solidFill>
-                <a:latin typeface="Aptos" pitchFamily="34" charset="0"/>
-                <a:ea typeface="Aptos" pitchFamily="34" charset="-122"/>
-                <a:cs typeface="Aptos" pitchFamily="34" charset="-120"/>
-              </a:rPr>
-              <a:t>Review</a:t>
-            </a:r>
-            <a:endParaRPr lang="en-US" sz="1500" dirty="0"/>
-          </a:p>
-        </p:txBody>
-      </p:sp>
-      <p:sp>
-        <p:nvSpPr>
-          <p:cNvPr id="20" name="Shape 18"/>
-          <p:cNvSpPr/>
-          <p:nvPr/>
-        </p:nvSpPr>
-        <p:spPr>
-          <a:xfrm>
-            <a:off x="8293608" y="4389120"/>
-            <a:ext cx="2157984" cy="0"/>
-          </a:xfrm>
-          <a:prstGeom prst="line">
-            <a:avLst/>
-          </a:prstGeom>
-          <a:noFill/>
-          <a:ln w="25400">
-            <a:solidFill>
-              <a:srgbClr val="8ABBD8"/>
-            </a:solidFill>
-            <a:prstDash val="solid"/>
-          </a:ln>
-        </p:spPr>
-      </p:sp>
-      <p:sp>
-        <p:nvSpPr>
-          <p:cNvPr id="21" name="Text 19"/>
-          <p:cNvSpPr/>
-          <p:nvPr/>
-        </p:nvSpPr>
-        <p:spPr>
-          <a:xfrm>
-            <a:off x="7909560" y="3977640"/>
-            <a:ext cx="2926080" cy="182880"/>
-          </a:xfrm>
-          <a:prstGeom prst="rect">
-            <a:avLst/>
-          </a:prstGeom>
-          <a:noFill/>
-          <a:ln/>
-        </p:spPr>
-        <p:txBody>
-          <a:bodyPr wrap="square" lIns="0" tIns="0" rIns="0" bIns="0" rtlCol="0" anchor="ctr"/>
-          <a:lstStyle/>
-          <a:p>
-            <a:pPr algn="ctr" indent="0" marL="0">
-              <a:buNone/>
-            </a:pPr>
-            <a:r>
-              <a:rPr lang="en-US" sz="1000" dirty="0">
-                <a:solidFill>
-                  <a:srgbClr val="003A63"/>
-                </a:solidFill>
-                <a:latin typeface="Aptos" pitchFamily="34" charset="0"/>
-                <a:ea typeface="Aptos" pitchFamily="34" charset="-122"/>
-                <a:cs typeface="Aptos" pitchFamily="34" charset="-120"/>
-              </a:rPr>
-              <a:t>Dependencies visible</a:t>
-            </a:r>
-            <a:endParaRPr lang="en-US" sz="1000" dirty="0"/>
-          </a:p>
-        </p:txBody>
-      </p:sp>
-      <p:sp>
-        <p:nvSpPr>
-          <p:cNvPr id="22" name="Shape 20"/>
           <p:cNvSpPr/>
           <p:nvPr/>
         </p:nvSpPr>
@@ -3920,7 +3743,7 @@
       </p:sp>
       <p:sp>
         <p:nvSpPr>
-          <p:cNvPr id="23" name="Text 21"/>
+          <p:cNvPr id="17" name="Text 15"/>
           <p:cNvSpPr/>
           <p:nvPr/>
         </p:nvSpPr>
@@ -3959,7 +3782,7 @@
       </p:sp>
       <p:sp>
         <p:nvSpPr>
-          <p:cNvPr id="24" name="Text 22"/>
+          <p:cNvPr id="18" name="Text 16"/>
           <p:cNvSpPr/>
           <p:nvPr/>
         </p:nvSpPr>
@@ -4467,13 +4290,11 @@
             </a:avLst>
           </a:prstGeom>
           <a:solidFill>
-            <a:srgbClr val="FFFFFF">
-              <a:alpha val="88000"/>
-            </a:srgbClr>
+            <a:srgbClr val="FFFFFF"/>
           </a:solidFill>
           <a:ln w="12700">
             <a:solidFill>
-              <a:srgbClr val="D6E8F2"/>
+              <a:srgbClr val="B9D7E6"/>
             </a:solidFill>
             <a:prstDash val="solid"/>
           </a:ln>
@@ -4481,30 +4302,42 @@
       </p:sp>
       <p:sp>
         <p:nvSpPr>
-          <p:cNvPr id="14" name="Shape 12"/>
-          <p:cNvSpPr/>
-          <p:nvPr/>
-        </p:nvSpPr>
-        <p:spPr>
-          <a:xfrm>
-            <a:off x="7927848" y="3319272"/>
-            <a:ext cx="792480" cy="749808"/>
-          </a:xfrm>
-          <a:prstGeom prst="roundRect">
-            <a:avLst>
-              <a:gd name="adj" fmla="val 14634"/>
-            </a:avLst>
-          </a:prstGeom>
-          <a:solidFill>
-            <a:srgbClr val="0068B7"/>
-          </a:solidFill>
-          <a:ln w="12700">
-            <a:solidFill>
-              <a:srgbClr val="0068B7"/>
-            </a:solidFill>
-            <a:prstDash val="solid"/>
-          </a:ln>
-        </p:spPr>
+          <p:cNvPr id="14" name="Text 12"/>
+          <p:cNvSpPr/>
+          <p:nvPr/>
+        </p:nvSpPr>
+        <p:spPr>
+          <a:xfrm>
+            <a:off x="7799832" y="2935224"/>
+            <a:ext cx="3145536" cy="256032"/>
+          </a:xfrm>
+          <a:prstGeom prst="rect">
+            <a:avLst/>
+          </a:prstGeom>
+          <a:noFill/>
+          <a:ln/>
+        </p:spPr>
+        <p:txBody>
+          <a:bodyPr wrap="square" lIns="0" tIns="0" rIns="0" bIns="0" rtlCol="0" anchor="ctr"/>
+          <a:lstStyle/>
+          <a:p>
+            <a:pPr indent="0" marL="0">
+              <a:buNone/>
+            </a:pPr>
+            <a:r>
+              <a:rPr lang="en-US" sz="1300" b="1" dirty="0">
+                <a:solidFill>
+                  <a:srgbClr val="0068B7"/>
+                </a:solidFill>
+                <a:latin typeface="Aptos" pitchFamily="34" charset="0"/>
+                <a:ea typeface="Aptos" pitchFamily="34" charset="-122"/>
+                <a:cs typeface="Aptos" pitchFamily="34" charset="-120"/>
+              </a:rPr>
+              <a:t>Concept checkpoints</a:t>
+            </a:r>
+            <a:endParaRPr lang="en-US" sz="1300" dirty="0"/>
+          </a:p>
+        </p:txBody>
       </p:sp>
       <p:sp>
         <p:nvSpPr>
@@ -4514,240 +4347,67 @@
         </p:nvSpPr>
         <p:spPr>
           <a:xfrm>
-            <a:off x="8001000" y="3511296"/>
-            <a:ext cx="646176" cy="310896"/>
-          </a:xfrm>
-          <a:prstGeom prst="rect">
-            <a:avLst/>
-          </a:prstGeom>
-          <a:noFill/>
-          <a:ln/>
-        </p:spPr>
-        <p:txBody>
-          <a:bodyPr wrap="square" lIns="0" tIns="0" rIns="0" bIns="0" rtlCol="0" anchor="ctr">
+            <a:off x="7818120" y="3300984"/>
+            <a:ext cx="3090672" cy="877824"/>
+          </a:xfrm>
+          <a:prstGeom prst="rect">
+            <a:avLst/>
+          </a:prstGeom>
+          <a:noFill/>
+          <a:ln/>
+        </p:spPr>
+        <p:txBody>
+          <a:bodyPr wrap="square" lIns="254" tIns="254" rIns="254" bIns="254" rtlCol="0" anchor="t">
             <a:normAutofit/>
           </a:bodyPr>
           <a:lstStyle/>
           <a:p>
-            <a:pPr algn="ctr" indent="0" marL="0">
-              <a:buNone/>
-            </a:pPr>
-            <a:r>
-              <a:rPr lang="en-US" sz="1500" b="1" dirty="0">
-                <a:solidFill>
-                  <a:srgbClr val="FFFFFF"/>
-                </a:solidFill>
-                <a:latin typeface="Aptos" pitchFamily="34" charset="0"/>
-                <a:ea typeface="Aptos" pitchFamily="34" charset="-122"/>
-                <a:cs typeface="Aptos" pitchFamily="34" charset="-120"/>
-              </a:rPr>
-              <a:t>Plan</a:t>
-            </a:r>
-            <a:endParaRPr lang="en-US" sz="1500" dirty="0"/>
+            <a:r>
+              <a:rPr lang="en-US" sz="1380" dirty="0">
+                <a:solidFill>
+                  <a:srgbClr val="17364A"/>
+                </a:solidFill>
+                <a:latin typeface="Aptos" pitchFamily="34" charset="0"/>
+                <a:ea typeface="Aptos" pitchFamily="34" charset="-122"/>
+                <a:cs typeface="Aptos" pitchFamily="34" charset="-120"/>
+              </a:rPr>
+              <a:t>A jurisdiction may receive eICRs for a reportable condition and want AI to create an.</a:t>
+            </a:r>
+            <a:endParaRPr lang="en-US" sz="1380" dirty="0"/>
+          </a:p>
+          <a:p>
+            <a:r>
+              <a:rPr lang="en-US" sz="1380" dirty="0">
+                <a:solidFill>
+                  <a:srgbClr val="17364A"/>
+                </a:solidFill>
+                <a:latin typeface="Aptos" pitchFamily="34" charset="0"/>
+                <a:ea typeface="Aptos" pitchFamily="34" charset="-122"/>
+                <a:cs typeface="Aptos" pitchFamily="34" charset="-120"/>
+              </a:rPr>
+              <a:t>The tool could highlight the suspected condition, key dates, lab evidence, symptoms,.</a:t>
+            </a:r>
+            <a:endParaRPr lang="en-US" sz="1380" dirty="0"/>
+          </a:p>
+          <a:p>
+            <a:r>
+              <a:rPr lang="en-US" sz="1380" dirty="0">
+                <a:solidFill>
+                  <a:srgbClr val="17364A"/>
+                </a:solidFill>
+                <a:latin typeface="Aptos" pitchFamily="34" charset="0"/>
+                <a:ea typeface="Aptos" pitchFamily="34" charset="-122"/>
+                <a:cs typeface="Aptos" pitchFamily="34" charset="-120"/>
+              </a:rPr>
+              <a:t>Another jurisdiction may want to use AI to triage incoming eICRs by urgency.</a:t>
+            </a:r>
+            <a:endParaRPr lang="en-US" sz="1380" dirty="0"/>
           </a:p>
         </p:txBody>
       </p:sp>
       <p:sp>
         <p:nvSpPr>
           <p:cNvPr id="16" name="Shape 14"/>
-          <p:cNvSpPr/>
-          <p:nvPr/>
-        </p:nvSpPr>
-        <p:spPr>
-          <a:xfrm>
-            <a:off x="8976360" y="3319272"/>
-            <a:ext cx="792480" cy="749808"/>
-          </a:xfrm>
-          <a:prstGeom prst="roundRect">
-            <a:avLst>
-              <a:gd name="adj" fmla="val 14634"/>
-            </a:avLst>
-          </a:prstGeom>
-          <a:solidFill>
-            <a:srgbClr val="2F8A28"/>
-          </a:solidFill>
-          <a:ln w="12700">
-            <a:solidFill>
-              <a:srgbClr val="2F8A28"/>
-            </a:solidFill>
-            <a:prstDash val="solid"/>
-          </a:ln>
-        </p:spPr>
-      </p:sp>
-      <p:sp>
-        <p:nvSpPr>
-          <p:cNvPr id="17" name="Text 15"/>
-          <p:cNvSpPr/>
-          <p:nvPr/>
-        </p:nvSpPr>
-        <p:spPr>
-          <a:xfrm>
-            <a:off x="9049512" y="3511296"/>
-            <a:ext cx="646176" cy="310896"/>
-          </a:xfrm>
-          <a:prstGeom prst="rect">
-            <a:avLst/>
-          </a:prstGeom>
-          <a:noFill/>
-          <a:ln/>
-        </p:spPr>
-        <p:txBody>
-          <a:bodyPr wrap="square" lIns="0" tIns="0" rIns="0" bIns="0" rtlCol="0" anchor="ctr">
-            <a:normAutofit/>
-          </a:bodyPr>
-          <a:lstStyle/>
-          <a:p>
-            <a:pPr algn="ctr" indent="0" marL="0">
-              <a:buNone/>
-            </a:pPr>
-            <a:r>
-              <a:rPr lang="en-US" sz="1500" b="1" dirty="0">
-                <a:solidFill>
-                  <a:srgbClr val="FFFFFF"/>
-                </a:solidFill>
-                <a:latin typeface="Aptos" pitchFamily="34" charset="0"/>
-                <a:ea typeface="Aptos" pitchFamily="34" charset="-122"/>
-                <a:cs typeface="Aptos" pitchFamily="34" charset="-120"/>
-              </a:rPr>
-              <a:t>Do</a:t>
-            </a:r>
-            <a:endParaRPr lang="en-US" sz="1500" dirty="0"/>
-          </a:p>
-        </p:txBody>
-      </p:sp>
-      <p:sp>
-        <p:nvSpPr>
-          <p:cNvPr id="18" name="Shape 16"/>
-          <p:cNvSpPr/>
-          <p:nvPr/>
-        </p:nvSpPr>
-        <p:spPr>
-          <a:xfrm>
-            <a:off x="10024872" y="3319272"/>
-            <a:ext cx="792480" cy="749808"/>
-          </a:xfrm>
-          <a:prstGeom prst="roundRect">
-            <a:avLst>
-              <a:gd name="adj" fmla="val 14634"/>
-            </a:avLst>
-          </a:prstGeom>
-          <a:solidFill>
-            <a:srgbClr val="D69A2D"/>
-          </a:solidFill>
-          <a:ln w="12700">
-            <a:solidFill>
-              <a:srgbClr val="D69A2D"/>
-            </a:solidFill>
-            <a:prstDash val="solid"/>
-          </a:ln>
-        </p:spPr>
-      </p:sp>
-      <p:sp>
-        <p:nvSpPr>
-          <p:cNvPr id="19" name="Text 17"/>
-          <p:cNvSpPr/>
-          <p:nvPr/>
-        </p:nvSpPr>
-        <p:spPr>
-          <a:xfrm>
-            <a:off x="10098024" y="3511296"/>
-            <a:ext cx="646176" cy="310896"/>
-          </a:xfrm>
-          <a:prstGeom prst="rect">
-            <a:avLst/>
-          </a:prstGeom>
-          <a:noFill/>
-          <a:ln/>
-        </p:spPr>
-        <p:txBody>
-          <a:bodyPr wrap="square" lIns="0" tIns="0" rIns="0" bIns="0" rtlCol="0" anchor="ctr">
-            <a:normAutofit/>
-          </a:bodyPr>
-          <a:lstStyle/>
-          <a:p>
-            <a:pPr algn="ctr" indent="0" marL="0">
-              <a:buNone/>
-            </a:pPr>
-            <a:r>
-              <a:rPr lang="en-US" sz="1500" b="1" dirty="0">
-                <a:solidFill>
-                  <a:srgbClr val="FFFFFF"/>
-                </a:solidFill>
-                <a:latin typeface="Aptos" pitchFamily="34" charset="0"/>
-                <a:ea typeface="Aptos" pitchFamily="34" charset="-122"/>
-                <a:cs typeface="Aptos" pitchFamily="34" charset="-120"/>
-              </a:rPr>
-              <a:t>Review</a:t>
-            </a:r>
-            <a:endParaRPr lang="en-US" sz="1500" dirty="0"/>
-          </a:p>
-        </p:txBody>
-      </p:sp>
-      <p:sp>
-        <p:nvSpPr>
-          <p:cNvPr id="20" name="Shape 18"/>
-          <p:cNvSpPr/>
-          <p:nvPr/>
-        </p:nvSpPr>
-        <p:spPr>
-          <a:xfrm>
-            <a:off x="8293608" y="4389120"/>
-            <a:ext cx="2157984" cy="0"/>
-          </a:xfrm>
-          <a:prstGeom prst="line">
-            <a:avLst/>
-          </a:prstGeom>
-          <a:noFill/>
-          <a:ln w="25400">
-            <a:solidFill>
-              <a:srgbClr val="8ABBD8"/>
-            </a:solidFill>
-            <a:prstDash val="solid"/>
-          </a:ln>
-        </p:spPr>
-      </p:sp>
-      <p:sp>
-        <p:nvSpPr>
-          <p:cNvPr id="21" name="Text 19"/>
-          <p:cNvSpPr/>
-          <p:nvPr/>
-        </p:nvSpPr>
-        <p:spPr>
-          <a:xfrm>
-            <a:off x="7909560" y="3977640"/>
-            <a:ext cx="2926080" cy="182880"/>
-          </a:xfrm>
-          <a:prstGeom prst="rect">
-            <a:avLst/>
-          </a:prstGeom>
-          <a:noFill/>
-          <a:ln/>
-        </p:spPr>
-        <p:txBody>
-          <a:bodyPr wrap="square" lIns="0" tIns="0" rIns="0" bIns="0" rtlCol="0" anchor="ctr"/>
-          <a:lstStyle/>
-          <a:p>
-            <a:pPr algn="ctr" indent="0" marL="0">
-              <a:buNone/>
-            </a:pPr>
-            <a:r>
-              <a:rPr lang="en-US" sz="1000" dirty="0">
-                <a:solidFill>
-                  <a:srgbClr val="003A63"/>
-                </a:solidFill>
-                <a:latin typeface="Aptos" pitchFamily="34" charset="0"/>
-                <a:ea typeface="Aptos" pitchFamily="34" charset="-122"/>
-                <a:cs typeface="Aptos" pitchFamily="34" charset="-120"/>
-              </a:rPr>
-              <a:t>Dependencies visible</a:t>
-            </a:r>
-            <a:endParaRPr lang="en-US" sz="1000" dirty="0"/>
-          </a:p>
-        </p:txBody>
-      </p:sp>
-      <p:sp>
-        <p:nvSpPr>
-          <p:cNvPr id="22" name="Shape 20"/>
           <p:cNvSpPr/>
           <p:nvPr/>
         </p:nvSpPr>
@@ -4774,7 +4434,7 @@
       </p:sp>
       <p:sp>
         <p:nvSpPr>
-          <p:cNvPr id="23" name="Text 21"/>
+          <p:cNvPr id="17" name="Text 15"/>
           <p:cNvSpPr/>
           <p:nvPr/>
         </p:nvSpPr>
@@ -4813,7 +4473,7 @@
       </p:sp>
       <p:sp>
         <p:nvSpPr>
-          <p:cNvPr id="24" name="Text 22"/>
+          <p:cNvPr id="18" name="Text 16"/>
           <p:cNvSpPr/>
           <p:nvPr/>
         </p:nvSpPr>
@@ -5321,13 +4981,11 @@
             </a:avLst>
           </a:prstGeom>
           <a:solidFill>
-            <a:srgbClr val="FFFFFF">
-              <a:alpha val="88000"/>
-            </a:srgbClr>
+            <a:srgbClr val="FFFFFF"/>
           </a:solidFill>
           <a:ln w="12700">
             <a:solidFill>
-              <a:srgbClr val="D6E8F2"/>
+              <a:srgbClr val="B9D7E6"/>
             </a:solidFill>
             <a:prstDash val="solid"/>
           </a:ln>
@@ -5335,30 +4993,42 @@
       </p:sp>
       <p:sp>
         <p:nvSpPr>
-          <p:cNvPr id="14" name="Shape 12"/>
-          <p:cNvSpPr/>
-          <p:nvPr/>
-        </p:nvSpPr>
-        <p:spPr>
-          <a:xfrm>
-            <a:off x="7927848" y="3319272"/>
-            <a:ext cx="792480" cy="749808"/>
-          </a:xfrm>
-          <a:prstGeom prst="roundRect">
-            <a:avLst>
-              <a:gd name="adj" fmla="val 14634"/>
-            </a:avLst>
-          </a:prstGeom>
-          <a:solidFill>
-            <a:srgbClr val="0068B7"/>
-          </a:solidFill>
-          <a:ln w="12700">
-            <a:solidFill>
-              <a:srgbClr val="0068B7"/>
-            </a:solidFill>
-            <a:prstDash val="solid"/>
-          </a:ln>
-        </p:spPr>
+          <p:cNvPr id="14" name="Text 12"/>
+          <p:cNvSpPr/>
+          <p:nvPr/>
+        </p:nvSpPr>
+        <p:spPr>
+          <a:xfrm>
+            <a:off x="7799832" y="2935224"/>
+            <a:ext cx="3145536" cy="256032"/>
+          </a:xfrm>
+          <a:prstGeom prst="rect">
+            <a:avLst/>
+          </a:prstGeom>
+          <a:noFill/>
+          <a:ln/>
+        </p:spPr>
+        <p:txBody>
+          <a:bodyPr wrap="square" lIns="0" tIns="0" rIns="0" bIns="0" rtlCol="0" anchor="ctr"/>
+          <a:lstStyle/>
+          <a:p>
+            <a:pPr indent="0" marL="0">
+              <a:buNone/>
+            </a:pPr>
+            <a:r>
+              <a:rPr lang="en-US" sz="1300" b="1" dirty="0">
+                <a:solidFill>
+                  <a:srgbClr val="0068B7"/>
+                </a:solidFill>
+                <a:latin typeface="Aptos" pitchFamily="34" charset="0"/>
+                <a:ea typeface="Aptos" pitchFamily="34" charset="-122"/>
+                <a:cs typeface="Aptos" pitchFamily="34" charset="-120"/>
+              </a:rPr>
+              <a:t>Concept checkpoints</a:t>
+            </a:r>
+            <a:endParaRPr lang="en-US" sz="1300" dirty="0"/>
+          </a:p>
+        </p:txBody>
       </p:sp>
       <p:sp>
         <p:nvSpPr>
@@ -5368,240 +5038,67 @@
         </p:nvSpPr>
         <p:spPr>
           <a:xfrm>
-            <a:off x="8001000" y="3511296"/>
-            <a:ext cx="646176" cy="310896"/>
-          </a:xfrm>
-          <a:prstGeom prst="rect">
-            <a:avLst/>
-          </a:prstGeom>
-          <a:noFill/>
-          <a:ln/>
-        </p:spPr>
-        <p:txBody>
-          <a:bodyPr wrap="square" lIns="0" tIns="0" rIns="0" bIns="0" rtlCol="0" anchor="ctr">
+            <a:off x="7818120" y="3300984"/>
+            <a:ext cx="3090672" cy="877824"/>
+          </a:xfrm>
+          <a:prstGeom prst="rect">
+            <a:avLst/>
+          </a:prstGeom>
+          <a:noFill/>
+          <a:ln/>
+        </p:spPr>
+        <p:txBody>
+          <a:bodyPr wrap="square" lIns="254" tIns="254" rIns="254" bIns="254" rtlCol="0" anchor="t">
             <a:normAutofit/>
           </a:bodyPr>
           <a:lstStyle/>
           <a:p>
-            <a:pPr algn="ctr" indent="0" marL="0">
-              <a:buNone/>
-            </a:pPr>
-            <a:r>
-              <a:rPr lang="en-US" sz="1500" b="1" dirty="0">
-                <a:solidFill>
-                  <a:srgbClr val="FFFFFF"/>
-                </a:solidFill>
-                <a:latin typeface="Aptos" pitchFamily="34" charset="0"/>
-                <a:ea typeface="Aptos" pitchFamily="34" charset="-122"/>
-                <a:cs typeface="Aptos" pitchFamily="34" charset="-120"/>
-              </a:rPr>
-              <a:t>Plan</a:t>
-            </a:r>
-            <a:endParaRPr lang="en-US" sz="1500" dirty="0"/>
+            <a:r>
+              <a:rPr lang="en-US" sz="1380" dirty="0">
+                <a:solidFill>
+                  <a:srgbClr val="17364A"/>
+                </a:solidFill>
+                <a:latin typeface="Aptos" pitchFamily="34" charset="0"/>
+                <a:ea typeface="Aptos" pitchFamily="34" charset="-122"/>
+                <a:cs typeface="Aptos" pitchFamily="34" charset="-120"/>
+              </a:rPr>
+              <a:t>The eICR is generated and transmitted through an exchange process to the appropriate.</a:t>
+            </a:r>
+            <a:endParaRPr lang="en-US" sz="1380" dirty="0"/>
+          </a:p>
+          <a:p>
+            <a:r>
+              <a:rPr lang="en-US" sz="1380" dirty="0">
+                <a:solidFill>
+                  <a:srgbClr val="17364A"/>
+                </a:solidFill>
+                <a:latin typeface="Aptos" pitchFamily="34" charset="0"/>
+                <a:ea typeface="Aptos" pitchFamily="34" charset="-122"/>
+                <a:cs typeface="Aptos" pitchFamily="34" charset="-120"/>
+              </a:rPr>
+              <a:t>Public health systems then receive, parse, route, review, and incorporate the information.</a:t>
+            </a:r>
+            <a:endParaRPr lang="en-US" sz="1380" dirty="0"/>
+          </a:p>
+          <a:p>
+            <a:r>
+              <a:rPr lang="en-US" sz="1380" dirty="0">
+                <a:solidFill>
+                  <a:srgbClr val="17364A"/>
+                </a:solidFill>
+                <a:latin typeface="Aptos" pitchFamily="34" charset="0"/>
+                <a:ea typeface="Aptos" pitchFamily="34" charset="-122"/>
+                <a:cs typeface="Aptos" pitchFamily="34" charset="-120"/>
+              </a:rPr>
+              <a:t>AI readiness depends on several technical questions.</a:t>
+            </a:r>
+            <a:endParaRPr lang="en-US" sz="1380" dirty="0"/>
           </a:p>
         </p:txBody>
       </p:sp>
       <p:sp>
         <p:nvSpPr>
           <p:cNvPr id="16" name="Shape 14"/>
-          <p:cNvSpPr/>
-          <p:nvPr/>
-        </p:nvSpPr>
-        <p:spPr>
-          <a:xfrm>
-            <a:off x="8976360" y="3319272"/>
-            <a:ext cx="792480" cy="749808"/>
-          </a:xfrm>
-          <a:prstGeom prst="roundRect">
-            <a:avLst>
-              <a:gd name="adj" fmla="val 14634"/>
-            </a:avLst>
-          </a:prstGeom>
-          <a:solidFill>
-            <a:srgbClr val="2F8A28"/>
-          </a:solidFill>
-          <a:ln w="12700">
-            <a:solidFill>
-              <a:srgbClr val="2F8A28"/>
-            </a:solidFill>
-            <a:prstDash val="solid"/>
-          </a:ln>
-        </p:spPr>
-      </p:sp>
-      <p:sp>
-        <p:nvSpPr>
-          <p:cNvPr id="17" name="Text 15"/>
-          <p:cNvSpPr/>
-          <p:nvPr/>
-        </p:nvSpPr>
-        <p:spPr>
-          <a:xfrm>
-            <a:off x="9049512" y="3511296"/>
-            <a:ext cx="646176" cy="310896"/>
-          </a:xfrm>
-          <a:prstGeom prst="rect">
-            <a:avLst/>
-          </a:prstGeom>
-          <a:noFill/>
-          <a:ln/>
-        </p:spPr>
-        <p:txBody>
-          <a:bodyPr wrap="square" lIns="0" tIns="0" rIns="0" bIns="0" rtlCol="0" anchor="ctr">
-            <a:normAutofit/>
-          </a:bodyPr>
-          <a:lstStyle/>
-          <a:p>
-            <a:pPr algn="ctr" indent="0" marL="0">
-              <a:buNone/>
-            </a:pPr>
-            <a:r>
-              <a:rPr lang="en-US" sz="1500" b="1" dirty="0">
-                <a:solidFill>
-                  <a:srgbClr val="FFFFFF"/>
-                </a:solidFill>
-                <a:latin typeface="Aptos" pitchFamily="34" charset="0"/>
-                <a:ea typeface="Aptos" pitchFamily="34" charset="-122"/>
-                <a:cs typeface="Aptos" pitchFamily="34" charset="-120"/>
-              </a:rPr>
-              <a:t>Do</a:t>
-            </a:r>
-            <a:endParaRPr lang="en-US" sz="1500" dirty="0"/>
-          </a:p>
-        </p:txBody>
-      </p:sp>
-      <p:sp>
-        <p:nvSpPr>
-          <p:cNvPr id="18" name="Shape 16"/>
-          <p:cNvSpPr/>
-          <p:nvPr/>
-        </p:nvSpPr>
-        <p:spPr>
-          <a:xfrm>
-            <a:off x="10024872" y="3319272"/>
-            <a:ext cx="792480" cy="749808"/>
-          </a:xfrm>
-          <a:prstGeom prst="roundRect">
-            <a:avLst>
-              <a:gd name="adj" fmla="val 14634"/>
-            </a:avLst>
-          </a:prstGeom>
-          <a:solidFill>
-            <a:srgbClr val="D69A2D"/>
-          </a:solidFill>
-          <a:ln w="12700">
-            <a:solidFill>
-              <a:srgbClr val="D69A2D"/>
-            </a:solidFill>
-            <a:prstDash val="solid"/>
-          </a:ln>
-        </p:spPr>
-      </p:sp>
-      <p:sp>
-        <p:nvSpPr>
-          <p:cNvPr id="19" name="Text 17"/>
-          <p:cNvSpPr/>
-          <p:nvPr/>
-        </p:nvSpPr>
-        <p:spPr>
-          <a:xfrm>
-            <a:off x="10098024" y="3511296"/>
-            <a:ext cx="646176" cy="310896"/>
-          </a:xfrm>
-          <a:prstGeom prst="rect">
-            <a:avLst/>
-          </a:prstGeom>
-          <a:noFill/>
-          <a:ln/>
-        </p:spPr>
-        <p:txBody>
-          <a:bodyPr wrap="square" lIns="0" tIns="0" rIns="0" bIns="0" rtlCol="0" anchor="ctr">
-            <a:normAutofit/>
-          </a:bodyPr>
-          <a:lstStyle/>
-          <a:p>
-            <a:pPr algn="ctr" indent="0" marL="0">
-              <a:buNone/>
-            </a:pPr>
-            <a:r>
-              <a:rPr lang="en-US" sz="1500" b="1" dirty="0">
-                <a:solidFill>
-                  <a:srgbClr val="FFFFFF"/>
-                </a:solidFill>
-                <a:latin typeface="Aptos" pitchFamily="34" charset="0"/>
-                <a:ea typeface="Aptos" pitchFamily="34" charset="-122"/>
-                <a:cs typeface="Aptos" pitchFamily="34" charset="-120"/>
-              </a:rPr>
-              <a:t>Review</a:t>
-            </a:r>
-            <a:endParaRPr lang="en-US" sz="1500" dirty="0"/>
-          </a:p>
-        </p:txBody>
-      </p:sp>
-      <p:sp>
-        <p:nvSpPr>
-          <p:cNvPr id="20" name="Shape 18"/>
-          <p:cNvSpPr/>
-          <p:nvPr/>
-        </p:nvSpPr>
-        <p:spPr>
-          <a:xfrm>
-            <a:off x="8293608" y="4389120"/>
-            <a:ext cx="2157984" cy="0"/>
-          </a:xfrm>
-          <a:prstGeom prst="line">
-            <a:avLst/>
-          </a:prstGeom>
-          <a:noFill/>
-          <a:ln w="25400">
-            <a:solidFill>
-              <a:srgbClr val="8ABBD8"/>
-            </a:solidFill>
-            <a:prstDash val="solid"/>
-          </a:ln>
-        </p:spPr>
-      </p:sp>
-      <p:sp>
-        <p:nvSpPr>
-          <p:cNvPr id="21" name="Text 19"/>
-          <p:cNvSpPr/>
-          <p:nvPr/>
-        </p:nvSpPr>
-        <p:spPr>
-          <a:xfrm>
-            <a:off x="7909560" y="3977640"/>
-            <a:ext cx="2926080" cy="182880"/>
-          </a:xfrm>
-          <a:prstGeom prst="rect">
-            <a:avLst/>
-          </a:prstGeom>
-          <a:noFill/>
-          <a:ln/>
-        </p:spPr>
-        <p:txBody>
-          <a:bodyPr wrap="square" lIns="0" tIns="0" rIns="0" bIns="0" rtlCol="0" anchor="ctr"/>
-          <a:lstStyle/>
-          <a:p>
-            <a:pPr algn="ctr" indent="0" marL="0">
-              <a:buNone/>
-            </a:pPr>
-            <a:r>
-              <a:rPr lang="en-US" sz="1000" dirty="0">
-                <a:solidFill>
-                  <a:srgbClr val="003A63"/>
-                </a:solidFill>
-                <a:latin typeface="Aptos" pitchFamily="34" charset="0"/>
-                <a:ea typeface="Aptos" pitchFamily="34" charset="-122"/>
-                <a:cs typeface="Aptos" pitchFamily="34" charset="-120"/>
-              </a:rPr>
-              <a:t>Dependencies visible</a:t>
-            </a:r>
-            <a:endParaRPr lang="en-US" sz="1000" dirty="0"/>
-          </a:p>
-        </p:txBody>
-      </p:sp>
-      <p:sp>
-        <p:nvSpPr>
-          <p:cNvPr id="22" name="Shape 20"/>
           <p:cNvSpPr/>
           <p:nvPr/>
         </p:nvSpPr>
@@ -5628,7 +5125,7 @@
       </p:sp>
       <p:sp>
         <p:nvSpPr>
-          <p:cNvPr id="23" name="Text 21"/>
+          <p:cNvPr id="17" name="Text 15"/>
           <p:cNvSpPr/>
           <p:nvPr/>
         </p:nvSpPr>
@@ -5667,7 +5164,7 @@
       </p:sp>
       <p:sp>
         <p:nvSpPr>
-          <p:cNvPr id="24" name="Text 22"/>
+          <p:cNvPr id="18" name="Text 16"/>
           <p:cNvSpPr/>
           <p:nvPr/>
         </p:nvSpPr>
@@ -6175,13 +5672,11 @@
             </a:avLst>
           </a:prstGeom>
           <a:solidFill>
-            <a:srgbClr val="FFFFFF">
-              <a:alpha val="88000"/>
-            </a:srgbClr>
+            <a:srgbClr val="FFFFFF"/>
           </a:solidFill>
           <a:ln w="12700">
             <a:solidFill>
-              <a:srgbClr val="D6E8F2"/>
+              <a:srgbClr val="B9D7E6"/>
             </a:solidFill>
             <a:prstDash val="solid"/>
           </a:ln>
@@ -6189,26 +5684,42 @@
       </p:sp>
       <p:sp>
         <p:nvSpPr>
-          <p:cNvPr id="14" name="Shape 12"/>
-          <p:cNvSpPr/>
-          <p:nvPr/>
-        </p:nvSpPr>
-        <p:spPr>
-          <a:xfrm>
-            <a:off x="8046720" y="3108960"/>
-            <a:ext cx="2651760" cy="896112"/>
-          </a:xfrm>
-          <a:prstGeom prst="arc">
-            <a:avLst/>
-          </a:prstGeom>
-          <a:noFill/>
-          <a:ln w="25400">
-            <a:solidFill>
-              <a:srgbClr val="0068B7"/>
-            </a:solidFill>
-            <a:prstDash val="solid"/>
-          </a:ln>
-        </p:spPr>
+          <p:cNvPr id="14" name="Text 12"/>
+          <p:cNvSpPr/>
+          <p:nvPr/>
+        </p:nvSpPr>
+        <p:spPr>
+          <a:xfrm>
+            <a:off x="7799832" y="2935224"/>
+            <a:ext cx="3145536" cy="256032"/>
+          </a:xfrm>
+          <a:prstGeom prst="rect">
+            <a:avLst/>
+          </a:prstGeom>
+          <a:noFill/>
+          <a:ln/>
+        </p:spPr>
+        <p:txBody>
+          <a:bodyPr wrap="square" lIns="0" tIns="0" rIns="0" bIns="0" rtlCol="0" anchor="ctr"/>
+          <a:lstStyle/>
+          <a:p>
+            <a:pPr indent="0" marL="0">
+              <a:buNone/>
+            </a:pPr>
+            <a:r>
+              <a:rPr lang="en-US" sz="1300" b="1" dirty="0">
+                <a:solidFill>
+                  <a:srgbClr val="0068B7"/>
+                </a:solidFill>
+                <a:latin typeface="Aptos" pitchFamily="34" charset="0"/>
+                <a:ea typeface="Aptos" pitchFamily="34" charset="-122"/>
+                <a:cs typeface="Aptos" pitchFamily="34" charset="-120"/>
+              </a:rPr>
+              <a:t>Concept checkpoints</a:t>
+            </a:r>
+            <a:endParaRPr lang="en-US" sz="1300" dirty="0"/>
+          </a:p>
+        </p:txBody>
       </p:sp>
       <p:sp>
         <p:nvSpPr>
@@ -6218,102 +5729,67 @@
         </p:nvSpPr>
         <p:spPr>
           <a:xfrm>
-            <a:off x="7909560" y="3099816"/>
-            <a:ext cx="2926080" cy="256032"/>
-          </a:xfrm>
-          <a:prstGeom prst="rect">
-            <a:avLst/>
-          </a:prstGeom>
-          <a:noFill/>
-          <a:ln/>
-        </p:spPr>
-        <p:txBody>
-          <a:bodyPr wrap="square" lIns="0" tIns="0" rIns="0" bIns="0" rtlCol="0" anchor="ctr"/>
-          <a:lstStyle/>
-          <a:p>
-            <a:pPr algn="ctr" indent="0" marL="0">
-              <a:buNone/>
-            </a:pPr>
-            <a:r>
-              <a:rPr lang="en-US" sz="1500" b="1" dirty="0">
-                <a:solidFill>
-                  <a:srgbClr val="003A63"/>
-                </a:solidFill>
-                <a:latin typeface="Aptos" pitchFamily="34" charset="0"/>
-                <a:ea typeface="Aptos" pitchFamily="34" charset="-122"/>
-                <a:cs typeface="Aptos" pitchFamily="34" charset="-120"/>
-              </a:rPr>
-              <a:t>Risk</a:t>
-            </a:r>
-            <a:endParaRPr lang="en-US" sz="1500" dirty="0"/>
+            <a:off x="7818120" y="3300984"/>
+            <a:ext cx="3090672" cy="877824"/>
+          </a:xfrm>
+          <a:prstGeom prst="rect">
+            <a:avLst/>
+          </a:prstGeom>
+          <a:noFill/>
+          <a:ln/>
+        </p:spPr>
+        <p:txBody>
+          <a:bodyPr wrap="square" lIns="254" tIns="254" rIns="254" bIns="254" rtlCol="0" anchor="t">
+            <a:normAutofit/>
+          </a:bodyPr>
+          <a:lstStyle/>
+          <a:p>
+            <a:r>
+              <a:rPr lang="en-US" sz="1380" dirty="0">
+                <a:solidFill>
+                  <a:srgbClr val="17364A"/>
+                </a:solidFill>
+                <a:latin typeface="Aptos" pitchFamily="34" charset="0"/>
+                <a:ea typeface="Aptos" pitchFamily="34" charset="-122"/>
+                <a:cs typeface="Aptos" pitchFamily="34" charset="-120"/>
+              </a:rPr>
+              <a:t>If trigger value sets or reporting criteria are outdated, the workflow may generate.</a:t>
+            </a:r>
+            <a:endParaRPr lang="en-US" sz="1380" dirty="0"/>
+          </a:p>
+          <a:p>
+            <a:r>
+              <a:rPr lang="en-US" sz="1380" dirty="0">
+                <a:solidFill>
+                  <a:srgbClr val="17364A"/>
+                </a:solidFill>
+                <a:latin typeface="Aptos" pitchFamily="34" charset="0"/>
+                <a:ea typeface="Aptos" pitchFamily="34" charset="-122"/>
+                <a:cs typeface="Aptos" pitchFamily="34" charset="-120"/>
+              </a:rPr>
+              <a:t>Unsupported summaries.</a:t>
+            </a:r>
+            <a:endParaRPr lang="en-US" sz="1380" dirty="0"/>
+          </a:p>
+          <a:p>
+            <a:r>
+              <a:rPr lang="en-US" sz="1380" dirty="0">
+                <a:solidFill>
+                  <a:srgbClr val="17364A"/>
+                </a:solidFill>
+                <a:latin typeface="Aptos" pitchFamily="34" charset="0"/>
+                <a:ea typeface="Aptos" pitchFamily="34" charset="-122"/>
+                <a:cs typeface="Aptos" pitchFamily="34" charset="-120"/>
+              </a:rPr>
+              <a:t>Generative AI summaries may include statements not supported by the eICR.</a:t>
+            </a:r>
+            <a:endParaRPr lang="en-US" sz="1380" dirty="0"/>
           </a:p>
         </p:txBody>
       </p:sp>
       <p:sp>
         <p:nvSpPr>
           <p:cNvPr id="16" name="Shape 14"/>
-          <p:cNvSpPr/>
-          <p:nvPr/>
-        </p:nvSpPr>
-        <p:spPr>
-          <a:xfrm>
-            <a:off x="8366760" y="3639312"/>
-            <a:ext cx="2011680" cy="0"/>
-          </a:xfrm>
-          <a:prstGeom prst="line">
-            <a:avLst/>
-          </a:prstGeom>
-          <a:noFill/>
-          <a:ln w="63500">
-            <a:solidFill>
-              <a:srgbClr val="2F8A28"/>
-            </a:solidFill>
-            <a:prstDash val="solid"/>
-          </a:ln>
-        </p:spPr>
-      </p:sp>
-      <p:sp>
-        <p:nvSpPr>
-          <p:cNvPr id="17" name="Text 15"/>
-          <p:cNvSpPr/>
-          <p:nvPr/>
-        </p:nvSpPr>
-        <p:spPr>
-          <a:xfrm>
-            <a:off x="7909560" y="3849624"/>
-            <a:ext cx="2926080" cy="164592"/>
-          </a:xfrm>
-          <a:prstGeom prst="rect">
-            <a:avLst/>
-          </a:prstGeom>
-          <a:noFill/>
-          <a:ln/>
-        </p:spPr>
-        <p:txBody>
-          <a:bodyPr wrap="square" lIns="0" tIns="0" rIns="0" bIns="0" rtlCol="0" anchor="ctr"/>
-          <a:lstStyle/>
-          <a:p>
-            <a:pPr algn="ctr" indent="0" marL="0">
-              <a:buNone/>
-            </a:pPr>
-            <a:r>
-              <a:rPr lang="en-US" sz="900" dirty="0">
-                <a:solidFill>
-                  <a:srgbClr val="003A63"/>
-                </a:solidFill>
-                <a:latin typeface="Aptos" pitchFamily="34" charset="0"/>
-                <a:ea typeface="Aptos" pitchFamily="34" charset="-122"/>
-                <a:cs typeface="Aptos" pitchFamily="34" charset="-120"/>
-              </a:rPr>
-              <a:t>Human review</a:t>
-            </a:r>
-            <a:endParaRPr lang="en-US" sz="900" dirty="0"/>
-          </a:p>
-        </p:txBody>
-      </p:sp>
-      <p:sp>
-        <p:nvSpPr>
-          <p:cNvPr id="18" name="Shape 16"/>
           <p:cNvSpPr/>
           <p:nvPr/>
         </p:nvSpPr>
@@ -6340,7 +5816,7 @@
       </p:sp>
       <p:sp>
         <p:nvSpPr>
-          <p:cNvPr id="19" name="Text 17"/>
+          <p:cNvPr id="17" name="Text 15"/>
           <p:cNvSpPr/>
           <p:nvPr/>
         </p:nvSpPr>
@@ -6379,7 +5855,7 @@
       </p:sp>
       <p:sp>
         <p:nvSpPr>
-          <p:cNvPr id="20" name="Text 18"/>
+          <p:cNvPr id="18" name="Text 16"/>
           <p:cNvSpPr/>
           <p:nvPr/>
         </p:nvSpPr>
@@ -6887,13 +6363,11 @@
             </a:avLst>
           </a:prstGeom>
           <a:solidFill>
-            <a:srgbClr val="FFFFFF">
-              <a:alpha val="88000"/>
-            </a:srgbClr>
+            <a:srgbClr val="FFFFFF"/>
           </a:solidFill>
           <a:ln w="12700">
             <a:solidFill>
-              <a:srgbClr val="D6E8F2"/>
+              <a:srgbClr val="B9D7E6"/>
             </a:solidFill>
             <a:prstDash val="solid"/>
           </a:ln>
@@ -6901,26 +6375,42 @@
       </p:sp>
       <p:sp>
         <p:nvSpPr>
-          <p:cNvPr id="14" name="Shape 12"/>
-          <p:cNvSpPr/>
-          <p:nvPr/>
-        </p:nvSpPr>
-        <p:spPr>
-          <a:xfrm>
-            <a:off x="8046720" y="3108960"/>
-            <a:ext cx="2651760" cy="896112"/>
-          </a:xfrm>
-          <a:prstGeom prst="arc">
-            <a:avLst/>
-          </a:prstGeom>
-          <a:noFill/>
-          <a:ln w="25400">
-            <a:solidFill>
-              <a:srgbClr val="0068B7"/>
-            </a:solidFill>
-            <a:prstDash val="solid"/>
-          </a:ln>
-        </p:spPr>
+          <p:cNvPr id="14" name="Text 12"/>
+          <p:cNvSpPr/>
+          <p:nvPr/>
+        </p:nvSpPr>
+        <p:spPr>
+          <a:xfrm>
+            <a:off x="7799832" y="2935224"/>
+            <a:ext cx="3145536" cy="256032"/>
+          </a:xfrm>
+          <a:prstGeom prst="rect">
+            <a:avLst/>
+          </a:prstGeom>
+          <a:noFill/>
+          <a:ln/>
+        </p:spPr>
+        <p:txBody>
+          <a:bodyPr wrap="square" lIns="0" tIns="0" rIns="0" bIns="0" rtlCol="0" anchor="ctr"/>
+          <a:lstStyle/>
+          <a:p>
+            <a:pPr indent="0" marL="0">
+              <a:buNone/>
+            </a:pPr>
+            <a:r>
+              <a:rPr lang="en-US" sz="1300" b="1" dirty="0">
+                <a:solidFill>
+                  <a:srgbClr val="0068B7"/>
+                </a:solidFill>
+                <a:latin typeface="Aptos" pitchFamily="34" charset="0"/>
+                <a:ea typeface="Aptos" pitchFamily="34" charset="-122"/>
+                <a:cs typeface="Aptos" pitchFamily="34" charset="-120"/>
+              </a:rPr>
+              <a:t>Concept checkpoints</a:t>
+            </a:r>
+            <a:endParaRPr lang="en-US" sz="1300" dirty="0"/>
+          </a:p>
+        </p:txBody>
       </p:sp>
       <p:sp>
         <p:nvSpPr>
@@ -6930,102 +6420,67 @@
         </p:nvSpPr>
         <p:spPr>
           <a:xfrm>
-            <a:off x="7909560" y="3099816"/>
-            <a:ext cx="2926080" cy="256032"/>
-          </a:xfrm>
-          <a:prstGeom prst="rect">
-            <a:avLst/>
-          </a:prstGeom>
-          <a:noFill/>
-          <a:ln/>
-        </p:spPr>
-        <p:txBody>
-          <a:bodyPr wrap="square" lIns="0" tIns="0" rIns="0" bIns="0" rtlCol="0" anchor="ctr"/>
-          <a:lstStyle/>
-          <a:p>
-            <a:pPr algn="ctr" indent="0" marL="0">
-              <a:buNone/>
-            </a:pPr>
-            <a:r>
-              <a:rPr lang="en-US" sz="1500" b="1" dirty="0">
-                <a:solidFill>
-                  <a:srgbClr val="003A63"/>
-                </a:solidFill>
-                <a:latin typeface="Aptos" pitchFamily="34" charset="0"/>
-                <a:ea typeface="Aptos" pitchFamily="34" charset="-122"/>
-                <a:cs typeface="Aptos" pitchFamily="34" charset="-120"/>
-              </a:rPr>
-              <a:t>Risk</a:t>
-            </a:r>
-            <a:endParaRPr lang="en-US" sz="1500" dirty="0"/>
+            <a:off x="7818120" y="3300984"/>
+            <a:ext cx="3090672" cy="877824"/>
+          </a:xfrm>
+          <a:prstGeom prst="rect">
+            <a:avLst/>
+          </a:prstGeom>
+          <a:noFill/>
+          <a:ln/>
+        </p:spPr>
+        <p:txBody>
+          <a:bodyPr wrap="square" lIns="254" tIns="254" rIns="254" bIns="254" rtlCol="0" anchor="t">
+            <a:normAutofit/>
+          </a:bodyPr>
+          <a:lstStyle/>
+          <a:p>
+            <a:r>
+              <a:rPr lang="en-US" sz="1380" dirty="0">
+                <a:solidFill>
+                  <a:srgbClr val="17364A"/>
+                </a:solidFill>
+                <a:latin typeface="Aptos" pitchFamily="34" charset="0"/>
+                <a:ea typeface="Aptos" pitchFamily="34" charset="-122"/>
+                <a:cs typeface="Aptos" pitchFamily="34" charset="-120"/>
+              </a:rPr>
+              <a:t>Routing errors.</a:t>
+            </a:r>
+            <a:endParaRPr lang="en-US" sz="1380" dirty="0"/>
+          </a:p>
+          <a:p>
+            <a:r>
+              <a:rPr lang="en-US" sz="1380" dirty="0">
+                <a:solidFill>
+                  <a:srgbClr val="17364A"/>
+                </a:solidFill>
+                <a:latin typeface="Aptos" pitchFamily="34" charset="0"/>
+                <a:ea typeface="Aptos" pitchFamily="34" charset="-122"/>
+                <a:cs typeface="Aptos" pitchFamily="34" charset="-120"/>
+              </a:rPr>
+              <a:t>Incorrect jurisdiction or program routing can delay response.</a:t>
+            </a:r>
+            <a:endParaRPr lang="en-US" sz="1380" dirty="0"/>
+          </a:p>
+          <a:p>
+            <a:r>
+              <a:rPr lang="en-US" sz="1380" dirty="0">
+                <a:solidFill>
+                  <a:srgbClr val="17364A"/>
+                </a:solidFill>
+                <a:latin typeface="Aptos" pitchFamily="34" charset="0"/>
+                <a:ea typeface="Aptos" pitchFamily="34" charset="-122"/>
+                <a:cs typeface="Aptos" pitchFamily="34" charset="-120"/>
+              </a:rPr>
+              <a:t>Guardrails include routing validation, exception queues, and escalation procedures.</a:t>
+            </a:r>
+            <a:endParaRPr lang="en-US" sz="1380" dirty="0"/>
           </a:p>
         </p:txBody>
       </p:sp>
       <p:sp>
         <p:nvSpPr>
           <p:cNvPr id="16" name="Shape 14"/>
-          <p:cNvSpPr/>
-          <p:nvPr/>
-        </p:nvSpPr>
-        <p:spPr>
-          <a:xfrm>
-            <a:off x="8366760" y="3639312"/>
-            <a:ext cx="2011680" cy="0"/>
-          </a:xfrm>
-          <a:prstGeom prst="line">
-            <a:avLst/>
-          </a:prstGeom>
-          <a:noFill/>
-          <a:ln w="63500">
-            <a:solidFill>
-              <a:srgbClr val="2F8A28"/>
-            </a:solidFill>
-            <a:prstDash val="solid"/>
-          </a:ln>
-        </p:spPr>
-      </p:sp>
-      <p:sp>
-        <p:nvSpPr>
-          <p:cNvPr id="17" name="Text 15"/>
-          <p:cNvSpPr/>
-          <p:nvPr/>
-        </p:nvSpPr>
-        <p:spPr>
-          <a:xfrm>
-            <a:off x="7909560" y="3849624"/>
-            <a:ext cx="2926080" cy="164592"/>
-          </a:xfrm>
-          <a:prstGeom prst="rect">
-            <a:avLst/>
-          </a:prstGeom>
-          <a:noFill/>
-          <a:ln/>
-        </p:spPr>
-        <p:txBody>
-          <a:bodyPr wrap="square" lIns="0" tIns="0" rIns="0" bIns="0" rtlCol="0" anchor="ctr"/>
-          <a:lstStyle/>
-          <a:p>
-            <a:pPr algn="ctr" indent="0" marL="0">
-              <a:buNone/>
-            </a:pPr>
-            <a:r>
-              <a:rPr lang="en-US" sz="900" dirty="0">
-                <a:solidFill>
-                  <a:srgbClr val="003A63"/>
-                </a:solidFill>
-                <a:latin typeface="Aptos" pitchFamily="34" charset="0"/>
-                <a:ea typeface="Aptos" pitchFamily="34" charset="-122"/>
-                <a:cs typeface="Aptos" pitchFamily="34" charset="-120"/>
-              </a:rPr>
-              <a:t>Human review</a:t>
-            </a:r>
-            <a:endParaRPr lang="en-US" sz="900" dirty="0"/>
-          </a:p>
-        </p:txBody>
-      </p:sp>
-      <p:sp>
-        <p:nvSpPr>
-          <p:cNvPr id="18" name="Shape 16"/>
           <p:cNvSpPr/>
           <p:nvPr/>
         </p:nvSpPr>
@@ -7052,7 +6507,7 @@
       </p:sp>
       <p:sp>
         <p:nvSpPr>
-          <p:cNvPr id="19" name="Text 17"/>
+          <p:cNvPr id="17" name="Text 15"/>
           <p:cNvSpPr/>
           <p:nvPr/>
         </p:nvSpPr>
@@ -7091,7 +6546,7 @@
       </p:sp>
       <p:sp>
         <p:nvSpPr>
-          <p:cNvPr id="20" name="Text 18"/>
+          <p:cNvPr id="18" name="Text 16"/>
           <p:cNvSpPr/>
           <p:nvPr/>
         </p:nvSpPr>
@@ -7599,13 +7054,11 @@
             </a:avLst>
           </a:prstGeom>
           <a:solidFill>
-            <a:srgbClr val="FFFFFF">
-              <a:alpha val="88000"/>
-            </a:srgbClr>
+            <a:srgbClr val="FFFFFF"/>
           </a:solidFill>
           <a:ln w="12700">
             <a:solidFill>
-              <a:srgbClr val="D6E8F2"/>
+              <a:srgbClr val="B9D7E6"/>
             </a:solidFill>
             <a:prstDash val="solid"/>
           </a:ln>
@@ -7613,30 +7066,42 @@
       </p:sp>
       <p:sp>
         <p:nvSpPr>
-          <p:cNvPr id="14" name="Shape 12"/>
-          <p:cNvSpPr/>
-          <p:nvPr/>
-        </p:nvSpPr>
-        <p:spPr>
-          <a:xfrm>
-            <a:off x="7927848" y="3319272"/>
-            <a:ext cx="792480" cy="749808"/>
-          </a:xfrm>
-          <a:prstGeom prst="roundRect">
-            <a:avLst>
-              <a:gd name="adj" fmla="val 14634"/>
-            </a:avLst>
-          </a:prstGeom>
-          <a:solidFill>
-            <a:srgbClr val="0068B7"/>
-          </a:solidFill>
-          <a:ln w="12700">
-            <a:solidFill>
-              <a:srgbClr val="0068B7"/>
-            </a:solidFill>
-            <a:prstDash val="solid"/>
-          </a:ln>
-        </p:spPr>
+          <p:cNvPr id="14" name="Text 12"/>
+          <p:cNvSpPr/>
+          <p:nvPr/>
+        </p:nvSpPr>
+        <p:spPr>
+          <a:xfrm>
+            <a:off x="7799832" y="2935224"/>
+            <a:ext cx="3145536" cy="256032"/>
+          </a:xfrm>
+          <a:prstGeom prst="rect">
+            <a:avLst/>
+          </a:prstGeom>
+          <a:noFill/>
+          <a:ln/>
+        </p:spPr>
+        <p:txBody>
+          <a:bodyPr wrap="square" lIns="0" tIns="0" rIns="0" bIns="0" rtlCol="0" anchor="ctr"/>
+          <a:lstStyle/>
+          <a:p>
+            <a:pPr indent="0" marL="0">
+              <a:buNone/>
+            </a:pPr>
+            <a:r>
+              <a:rPr lang="en-US" sz="1300" b="1" dirty="0">
+                <a:solidFill>
+                  <a:srgbClr val="0068B7"/>
+                </a:solidFill>
+                <a:latin typeface="Aptos" pitchFamily="34" charset="0"/>
+                <a:ea typeface="Aptos" pitchFamily="34" charset="-122"/>
+                <a:cs typeface="Aptos" pitchFamily="34" charset="-120"/>
+              </a:rPr>
+              <a:t>Concept checkpoints</a:t>
+            </a:r>
+            <a:endParaRPr lang="en-US" sz="1300" dirty="0"/>
+          </a:p>
+        </p:txBody>
       </p:sp>
       <p:sp>
         <p:nvSpPr>
@@ -7646,240 +7111,67 @@
         </p:nvSpPr>
         <p:spPr>
           <a:xfrm>
-            <a:off x="8001000" y="3511296"/>
-            <a:ext cx="646176" cy="310896"/>
-          </a:xfrm>
-          <a:prstGeom prst="rect">
-            <a:avLst/>
-          </a:prstGeom>
-          <a:noFill/>
-          <a:ln/>
-        </p:spPr>
-        <p:txBody>
-          <a:bodyPr wrap="square" lIns="0" tIns="0" rIns="0" bIns="0" rtlCol="0" anchor="ctr">
+            <a:off x="7818120" y="3300984"/>
+            <a:ext cx="3090672" cy="877824"/>
+          </a:xfrm>
+          <a:prstGeom prst="rect">
+            <a:avLst/>
+          </a:prstGeom>
+          <a:noFill/>
+          <a:ln/>
+        </p:spPr>
+        <p:txBody>
+          <a:bodyPr wrap="square" lIns="254" tIns="254" rIns="254" bIns="254" rtlCol="0" anchor="t">
             <a:normAutofit/>
           </a:bodyPr>
           <a:lstStyle/>
           <a:p>
-            <a:pPr algn="ctr" indent="0" marL="0">
-              <a:buNone/>
-            </a:pPr>
-            <a:r>
-              <a:rPr lang="en-US" sz="1500" b="1" dirty="0">
-                <a:solidFill>
-                  <a:srgbClr val="FFFFFF"/>
-                </a:solidFill>
-                <a:latin typeface="Aptos" pitchFamily="34" charset="0"/>
-                <a:ea typeface="Aptos" pitchFamily="34" charset="-122"/>
-                <a:cs typeface="Aptos" pitchFamily="34" charset="-120"/>
-              </a:rPr>
-              <a:t>Plan</a:t>
-            </a:r>
-            <a:endParaRPr lang="en-US" sz="1500" dirty="0"/>
+            <a:r>
+              <a:rPr lang="en-US" sz="1380" dirty="0">
+                <a:solidFill>
+                  <a:srgbClr val="17364A"/>
+                </a:solidFill>
+                <a:latin typeface="Aptos" pitchFamily="34" charset="0"/>
+                <a:ea typeface="Aptos" pitchFamily="34" charset="-122"/>
+                <a:cs typeface="Aptos" pitchFamily="34" charset="-120"/>
+              </a:rPr>
+              <a:t>Predictive models may support prioritization, but only after validation against public.</a:t>
+            </a:r>
+            <a:endParaRPr lang="en-US" sz="1380" dirty="0"/>
+          </a:p>
+          <a:p>
+            <a:r>
+              <a:rPr lang="en-US" sz="1380" dirty="0">
+                <a:solidFill>
+                  <a:srgbClr val="17364A"/>
+                </a:solidFill>
+                <a:latin typeface="Aptos" pitchFamily="34" charset="0"/>
+                <a:ea typeface="Aptos" pitchFamily="34" charset="-122"/>
+                <a:cs typeface="Aptos" pitchFamily="34" charset="-120"/>
+              </a:rPr>
+              <a:t>RAG may provide disease-specific guidance to investigators, but document sources must be.</a:t>
+            </a:r>
+            <a:endParaRPr lang="en-US" sz="1380" dirty="0"/>
+          </a:p>
+          <a:p>
+            <a:r>
+              <a:rPr lang="en-US" sz="1380" dirty="0">
+                <a:solidFill>
+                  <a:srgbClr val="17364A"/>
+                </a:solidFill>
+                <a:latin typeface="Aptos" pitchFamily="34" charset="0"/>
+                <a:ea typeface="Aptos" pitchFamily="34" charset="-122"/>
+                <a:cs typeface="Aptos" pitchFamily="34" charset="-120"/>
+              </a:rPr>
+              <a:t>Agentic AI could create follow-up tasks, but task creation should be constrained and.</a:t>
+            </a:r>
+            <a:endParaRPr lang="en-US" sz="1380" dirty="0"/>
           </a:p>
         </p:txBody>
       </p:sp>
       <p:sp>
         <p:nvSpPr>
           <p:cNvPr id="16" name="Shape 14"/>
-          <p:cNvSpPr/>
-          <p:nvPr/>
-        </p:nvSpPr>
-        <p:spPr>
-          <a:xfrm>
-            <a:off x="8976360" y="3319272"/>
-            <a:ext cx="792480" cy="749808"/>
-          </a:xfrm>
-          <a:prstGeom prst="roundRect">
-            <a:avLst>
-              <a:gd name="adj" fmla="val 14634"/>
-            </a:avLst>
-          </a:prstGeom>
-          <a:solidFill>
-            <a:srgbClr val="2F8A28"/>
-          </a:solidFill>
-          <a:ln w="12700">
-            <a:solidFill>
-              <a:srgbClr val="2F8A28"/>
-            </a:solidFill>
-            <a:prstDash val="solid"/>
-          </a:ln>
-        </p:spPr>
-      </p:sp>
-      <p:sp>
-        <p:nvSpPr>
-          <p:cNvPr id="17" name="Text 15"/>
-          <p:cNvSpPr/>
-          <p:nvPr/>
-        </p:nvSpPr>
-        <p:spPr>
-          <a:xfrm>
-            <a:off x="9049512" y="3511296"/>
-            <a:ext cx="646176" cy="310896"/>
-          </a:xfrm>
-          <a:prstGeom prst="rect">
-            <a:avLst/>
-          </a:prstGeom>
-          <a:noFill/>
-          <a:ln/>
-        </p:spPr>
-        <p:txBody>
-          <a:bodyPr wrap="square" lIns="0" tIns="0" rIns="0" bIns="0" rtlCol="0" anchor="ctr">
-            <a:normAutofit/>
-          </a:bodyPr>
-          <a:lstStyle/>
-          <a:p>
-            <a:pPr algn="ctr" indent="0" marL="0">
-              <a:buNone/>
-            </a:pPr>
-            <a:r>
-              <a:rPr lang="en-US" sz="1500" b="1" dirty="0">
-                <a:solidFill>
-                  <a:srgbClr val="FFFFFF"/>
-                </a:solidFill>
-                <a:latin typeface="Aptos" pitchFamily="34" charset="0"/>
-                <a:ea typeface="Aptos" pitchFamily="34" charset="-122"/>
-                <a:cs typeface="Aptos" pitchFamily="34" charset="-120"/>
-              </a:rPr>
-              <a:t>Do</a:t>
-            </a:r>
-            <a:endParaRPr lang="en-US" sz="1500" dirty="0"/>
-          </a:p>
-        </p:txBody>
-      </p:sp>
-      <p:sp>
-        <p:nvSpPr>
-          <p:cNvPr id="18" name="Shape 16"/>
-          <p:cNvSpPr/>
-          <p:nvPr/>
-        </p:nvSpPr>
-        <p:spPr>
-          <a:xfrm>
-            <a:off x="10024872" y="3319272"/>
-            <a:ext cx="792480" cy="749808"/>
-          </a:xfrm>
-          <a:prstGeom prst="roundRect">
-            <a:avLst>
-              <a:gd name="adj" fmla="val 14634"/>
-            </a:avLst>
-          </a:prstGeom>
-          <a:solidFill>
-            <a:srgbClr val="D69A2D"/>
-          </a:solidFill>
-          <a:ln w="12700">
-            <a:solidFill>
-              <a:srgbClr val="D69A2D"/>
-            </a:solidFill>
-            <a:prstDash val="solid"/>
-          </a:ln>
-        </p:spPr>
-      </p:sp>
-      <p:sp>
-        <p:nvSpPr>
-          <p:cNvPr id="19" name="Text 17"/>
-          <p:cNvSpPr/>
-          <p:nvPr/>
-        </p:nvSpPr>
-        <p:spPr>
-          <a:xfrm>
-            <a:off x="10098024" y="3511296"/>
-            <a:ext cx="646176" cy="310896"/>
-          </a:xfrm>
-          <a:prstGeom prst="rect">
-            <a:avLst/>
-          </a:prstGeom>
-          <a:noFill/>
-          <a:ln/>
-        </p:spPr>
-        <p:txBody>
-          <a:bodyPr wrap="square" lIns="0" tIns="0" rIns="0" bIns="0" rtlCol="0" anchor="ctr">
-            <a:normAutofit/>
-          </a:bodyPr>
-          <a:lstStyle/>
-          <a:p>
-            <a:pPr algn="ctr" indent="0" marL="0">
-              <a:buNone/>
-            </a:pPr>
-            <a:r>
-              <a:rPr lang="en-US" sz="1500" b="1" dirty="0">
-                <a:solidFill>
-                  <a:srgbClr val="FFFFFF"/>
-                </a:solidFill>
-                <a:latin typeface="Aptos" pitchFamily="34" charset="0"/>
-                <a:ea typeface="Aptos" pitchFamily="34" charset="-122"/>
-                <a:cs typeface="Aptos" pitchFamily="34" charset="-120"/>
-              </a:rPr>
-              <a:t>Review</a:t>
-            </a:r>
-            <a:endParaRPr lang="en-US" sz="1500" dirty="0"/>
-          </a:p>
-        </p:txBody>
-      </p:sp>
-      <p:sp>
-        <p:nvSpPr>
-          <p:cNvPr id="20" name="Shape 18"/>
-          <p:cNvSpPr/>
-          <p:nvPr/>
-        </p:nvSpPr>
-        <p:spPr>
-          <a:xfrm>
-            <a:off x="8293608" y="4389120"/>
-            <a:ext cx="2157984" cy="0"/>
-          </a:xfrm>
-          <a:prstGeom prst="line">
-            <a:avLst/>
-          </a:prstGeom>
-          <a:noFill/>
-          <a:ln w="25400">
-            <a:solidFill>
-              <a:srgbClr val="8ABBD8"/>
-            </a:solidFill>
-            <a:prstDash val="solid"/>
-          </a:ln>
-        </p:spPr>
-      </p:sp>
-      <p:sp>
-        <p:nvSpPr>
-          <p:cNvPr id="21" name="Text 19"/>
-          <p:cNvSpPr/>
-          <p:nvPr/>
-        </p:nvSpPr>
-        <p:spPr>
-          <a:xfrm>
-            <a:off x="7909560" y="3977640"/>
-            <a:ext cx="2926080" cy="182880"/>
-          </a:xfrm>
-          <a:prstGeom prst="rect">
-            <a:avLst/>
-          </a:prstGeom>
-          <a:noFill/>
-          <a:ln/>
-        </p:spPr>
-        <p:txBody>
-          <a:bodyPr wrap="square" lIns="0" tIns="0" rIns="0" bIns="0" rtlCol="0" anchor="ctr"/>
-          <a:lstStyle/>
-          <a:p>
-            <a:pPr algn="ctr" indent="0" marL="0">
-              <a:buNone/>
-            </a:pPr>
-            <a:r>
-              <a:rPr lang="en-US" sz="1000" dirty="0">
-                <a:solidFill>
-                  <a:srgbClr val="003A63"/>
-                </a:solidFill>
-                <a:latin typeface="Aptos" pitchFamily="34" charset="0"/>
-                <a:ea typeface="Aptos" pitchFamily="34" charset="-122"/>
-                <a:cs typeface="Aptos" pitchFamily="34" charset="-120"/>
-              </a:rPr>
-              <a:t>Dependencies visible</a:t>
-            </a:r>
-            <a:endParaRPr lang="en-US" sz="1000" dirty="0"/>
-          </a:p>
-        </p:txBody>
-      </p:sp>
-      <p:sp>
-        <p:nvSpPr>
-          <p:cNvPr id="22" name="Shape 20"/>
           <p:cNvSpPr/>
           <p:nvPr/>
         </p:nvSpPr>
@@ -7906,7 +7198,7 @@
       </p:sp>
       <p:sp>
         <p:nvSpPr>
-          <p:cNvPr id="23" name="Text 21"/>
+          <p:cNvPr id="17" name="Text 15"/>
           <p:cNvSpPr/>
           <p:nvPr/>
         </p:nvSpPr>
@@ -7945,7 +7237,7 @@
       </p:sp>
       <p:sp>
         <p:nvSpPr>
-          <p:cNvPr id="24" name="Text 22"/>
+          <p:cNvPr id="18" name="Text 16"/>
           <p:cNvSpPr/>
           <p:nvPr/>
         </p:nvSpPr>
@@ -8453,13 +7745,11 @@
             </a:avLst>
           </a:prstGeom>
           <a:solidFill>
-            <a:srgbClr val="FFFFFF">
-              <a:alpha val="88000"/>
-            </a:srgbClr>
+            <a:srgbClr val="FFFFFF"/>
           </a:solidFill>
           <a:ln w="12700">
             <a:solidFill>
-              <a:srgbClr val="D6E8F2"/>
+              <a:srgbClr val="B9D7E6"/>
             </a:solidFill>
             <a:prstDash val="solid"/>
           </a:ln>
@@ -8467,30 +7757,42 @@
       </p:sp>
       <p:sp>
         <p:nvSpPr>
-          <p:cNvPr id="14" name="Shape 12"/>
-          <p:cNvSpPr/>
-          <p:nvPr/>
-        </p:nvSpPr>
-        <p:spPr>
-          <a:xfrm>
-            <a:off x="7927848" y="3319272"/>
-            <a:ext cx="792480" cy="749808"/>
-          </a:xfrm>
-          <a:prstGeom prst="roundRect">
-            <a:avLst>
-              <a:gd name="adj" fmla="val 14634"/>
-            </a:avLst>
-          </a:prstGeom>
-          <a:solidFill>
-            <a:srgbClr val="0068B7"/>
-          </a:solidFill>
-          <a:ln w="12700">
-            <a:solidFill>
-              <a:srgbClr val="0068B7"/>
-            </a:solidFill>
-            <a:prstDash val="solid"/>
-          </a:ln>
-        </p:spPr>
+          <p:cNvPr id="14" name="Text 12"/>
+          <p:cNvSpPr/>
+          <p:nvPr/>
+        </p:nvSpPr>
+        <p:spPr>
+          <a:xfrm>
+            <a:off x="7799832" y="2935224"/>
+            <a:ext cx="3145536" cy="256032"/>
+          </a:xfrm>
+          <a:prstGeom prst="rect">
+            <a:avLst/>
+          </a:prstGeom>
+          <a:noFill/>
+          <a:ln/>
+        </p:spPr>
+        <p:txBody>
+          <a:bodyPr wrap="square" lIns="0" tIns="0" rIns="0" bIns="0" rtlCol="0" anchor="ctr"/>
+          <a:lstStyle/>
+          <a:p>
+            <a:pPr indent="0" marL="0">
+              <a:buNone/>
+            </a:pPr>
+            <a:r>
+              <a:rPr lang="en-US" sz="1300" b="1" dirty="0">
+                <a:solidFill>
+                  <a:srgbClr val="0068B7"/>
+                </a:solidFill>
+                <a:latin typeface="Aptos" pitchFamily="34" charset="0"/>
+                <a:ea typeface="Aptos" pitchFamily="34" charset="-122"/>
+                <a:cs typeface="Aptos" pitchFamily="34" charset="-120"/>
+              </a:rPr>
+              <a:t>Concept checkpoints</a:t>
+            </a:r>
+            <a:endParaRPr lang="en-US" sz="1300" dirty="0"/>
+          </a:p>
+        </p:txBody>
       </p:sp>
       <p:sp>
         <p:nvSpPr>
@@ -8500,240 +7802,67 @@
         </p:nvSpPr>
         <p:spPr>
           <a:xfrm>
-            <a:off x="8001000" y="3511296"/>
-            <a:ext cx="646176" cy="310896"/>
-          </a:xfrm>
-          <a:prstGeom prst="rect">
-            <a:avLst/>
-          </a:prstGeom>
-          <a:noFill/>
-          <a:ln/>
-        </p:spPr>
-        <p:txBody>
-          <a:bodyPr wrap="square" lIns="0" tIns="0" rIns="0" bIns="0" rtlCol="0" anchor="ctr">
+            <a:off x="7818120" y="3300984"/>
+            <a:ext cx="3090672" cy="877824"/>
+          </a:xfrm>
+          <a:prstGeom prst="rect">
+            <a:avLst/>
+          </a:prstGeom>
+          <a:noFill/>
+          <a:ln/>
+        </p:spPr>
+        <p:txBody>
+          <a:bodyPr wrap="square" lIns="254" tIns="254" rIns="254" bIns="254" rtlCol="0" anchor="t">
             <a:normAutofit/>
           </a:bodyPr>
           <a:lstStyle/>
           <a:p>
-            <a:pPr algn="ctr" indent="0" marL="0">
-              <a:buNone/>
-            </a:pPr>
-            <a:r>
-              <a:rPr lang="en-US" sz="1500" b="1" dirty="0">
-                <a:solidFill>
-                  <a:srgbClr val="FFFFFF"/>
-                </a:solidFill>
-                <a:latin typeface="Aptos" pitchFamily="34" charset="0"/>
-                <a:ea typeface="Aptos" pitchFamily="34" charset="-122"/>
-                <a:cs typeface="Aptos" pitchFamily="34" charset="-120"/>
-              </a:rPr>
-              <a:t>Plan</a:t>
-            </a:r>
-            <a:endParaRPr lang="en-US" sz="1500" dirty="0"/>
+            <a:r>
+              <a:rPr lang="en-US" sz="1380" dirty="0">
+                <a:solidFill>
+                  <a:srgbClr val="17364A"/>
+                </a:solidFill>
+                <a:latin typeface="Aptos" pitchFamily="34" charset="0"/>
+                <a:ea typeface="Aptos" pitchFamily="34" charset="-122"/>
+                <a:cs typeface="Aptos" pitchFamily="34" charset="-120"/>
+              </a:rPr>
+              <a:t>Where does your agency receive, review, or process case reports today?</a:t>
+            </a:r>
+            <a:endParaRPr lang="en-US" sz="1380" dirty="0"/>
+          </a:p>
+          <a:p>
+            <a:r>
+              <a:rPr lang="en-US" sz="1380" dirty="0">
+                <a:solidFill>
+                  <a:srgbClr val="17364A"/>
+                </a:solidFill>
+                <a:latin typeface="Aptos" pitchFamily="34" charset="0"/>
+                <a:ea typeface="Aptos" pitchFamily="34" charset="-122"/>
+                <a:cs typeface="Aptos" pitchFamily="34" charset="-120"/>
+              </a:rPr>
+              <a:t>Which steps are automated and which remain manual?</a:t>
+            </a:r>
+            <a:endParaRPr lang="en-US" sz="1380" dirty="0"/>
+          </a:p>
+          <a:p>
+            <a:r>
+              <a:rPr lang="en-US" sz="1380" dirty="0">
+                <a:solidFill>
+                  <a:srgbClr val="17364A"/>
+                </a:solidFill>
+                <a:latin typeface="Aptos" pitchFamily="34" charset="0"/>
+                <a:ea typeface="Aptos" pitchFamily="34" charset="-122"/>
+                <a:cs typeface="Aptos" pitchFamily="34" charset="-120"/>
+              </a:rPr>
+              <a:t>Where are timeliness, completeness, routing, or duplication problems most common?</a:t>
+            </a:r>
+            <a:endParaRPr lang="en-US" sz="1380" dirty="0"/>
           </a:p>
         </p:txBody>
       </p:sp>
       <p:sp>
         <p:nvSpPr>
           <p:cNvPr id="16" name="Shape 14"/>
-          <p:cNvSpPr/>
-          <p:nvPr/>
-        </p:nvSpPr>
-        <p:spPr>
-          <a:xfrm>
-            <a:off x="8976360" y="3319272"/>
-            <a:ext cx="792480" cy="749808"/>
-          </a:xfrm>
-          <a:prstGeom prst="roundRect">
-            <a:avLst>
-              <a:gd name="adj" fmla="val 14634"/>
-            </a:avLst>
-          </a:prstGeom>
-          <a:solidFill>
-            <a:srgbClr val="2F8A28"/>
-          </a:solidFill>
-          <a:ln w="12700">
-            <a:solidFill>
-              <a:srgbClr val="2F8A28"/>
-            </a:solidFill>
-            <a:prstDash val="solid"/>
-          </a:ln>
-        </p:spPr>
-      </p:sp>
-      <p:sp>
-        <p:nvSpPr>
-          <p:cNvPr id="17" name="Text 15"/>
-          <p:cNvSpPr/>
-          <p:nvPr/>
-        </p:nvSpPr>
-        <p:spPr>
-          <a:xfrm>
-            <a:off x="9049512" y="3511296"/>
-            <a:ext cx="646176" cy="310896"/>
-          </a:xfrm>
-          <a:prstGeom prst="rect">
-            <a:avLst/>
-          </a:prstGeom>
-          <a:noFill/>
-          <a:ln/>
-        </p:spPr>
-        <p:txBody>
-          <a:bodyPr wrap="square" lIns="0" tIns="0" rIns="0" bIns="0" rtlCol="0" anchor="ctr">
-            <a:normAutofit/>
-          </a:bodyPr>
-          <a:lstStyle/>
-          <a:p>
-            <a:pPr algn="ctr" indent="0" marL="0">
-              <a:buNone/>
-            </a:pPr>
-            <a:r>
-              <a:rPr lang="en-US" sz="1500" b="1" dirty="0">
-                <a:solidFill>
-                  <a:srgbClr val="FFFFFF"/>
-                </a:solidFill>
-                <a:latin typeface="Aptos" pitchFamily="34" charset="0"/>
-                <a:ea typeface="Aptos" pitchFamily="34" charset="-122"/>
-                <a:cs typeface="Aptos" pitchFamily="34" charset="-120"/>
-              </a:rPr>
-              <a:t>Do</a:t>
-            </a:r>
-            <a:endParaRPr lang="en-US" sz="1500" dirty="0"/>
-          </a:p>
-        </p:txBody>
-      </p:sp>
-      <p:sp>
-        <p:nvSpPr>
-          <p:cNvPr id="18" name="Shape 16"/>
-          <p:cNvSpPr/>
-          <p:nvPr/>
-        </p:nvSpPr>
-        <p:spPr>
-          <a:xfrm>
-            <a:off x="10024872" y="3319272"/>
-            <a:ext cx="792480" cy="749808"/>
-          </a:xfrm>
-          <a:prstGeom prst="roundRect">
-            <a:avLst>
-              <a:gd name="adj" fmla="val 14634"/>
-            </a:avLst>
-          </a:prstGeom>
-          <a:solidFill>
-            <a:srgbClr val="D69A2D"/>
-          </a:solidFill>
-          <a:ln w="12700">
-            <a:solidFill>
-              <a:srgbClr val="D69A2D"/>
-            </a:solidFill>
-            <a:prstDash val="solid"/>
-          </a:ln>
-        </p:spPr>
-      </p:sp>
-      <p:sp>
-        <p:nvSpPr>
-          <p:cNvPr id="19" name="Text 17"/>
-          <p:cNvSpPr/>
-          <p:nvPr/>
-        </p:nvSpPr>
-        <p:spPr>
-          <a:xfrm>
-            <a:off x="10098024" y="3511296"/>
-            <a:ext cx="646176" cy="310896"/>
-          </a:xfrm>
-          <a:prstGeom prst="rect">
-            <a:avLst/>
-          </a:prstGeom>
-          <a:noFill/>
-          <a:ln/>
-        </p:spPr>
-        <p:txBody>
-          <a:bodyPr wrap="square" lIns="0" tIns="0" rIns="0" bIns="0" rtlCol="0" anchor="ctr">
-            <a:normAutofit/>
-          </a:bodyPr>
-          <a:lstStyle/>
-          <a:p>
-            <a:pPr algn="ctr" indent="0" marL="0">
-              <a:buNone/>
-            </a:pPr>
-            <a:r>
-              <a:rPr lang="en-US" sz="1500" b="1" dirty="0">
-                <a:solidFill>
-                  <a:srgbClr val="FFFFFF"/>
-                </a:solidFill>
-                <a:latin typeface="Aptos" pitchFamily="34" charset="0"/>
-                <a:ea typeface="Aptos" pitchFamily="34" charset="-122"/>
-                <a:cs typeface="Aptos" pitchFamily="34" charset="-120"/>
-              </a:rPr>
-              <a:t>Review</a:t>
-            </a:r>
-            <a:endParaRPr lang="en-US" sz="1500" dirty="0"/>
-          </a:p>
-        </p:txBody>
-      </p:sp>
-      <p:sp>
-        <p:nvSpPr>
-          <p:cNvPr id="20" name="Shape 18"/>
-          <p:cNvSpPr/>
-          <p:nvPr/>
-        </p:nvSpPr>
-        <p:spPr>
-          <a:xfrm>
-            <a:off x="8293608" y="4389120"/>
-            <a:ext cx="2157984" cy="0"/>
-          </a:xfrm>
-          <a:prstGeom prst="line">
-            <a:avLst/>
-          </a:prstGeom>
-          <a:noFill/>
-          <a:ln w="25400">
-            <a:solidFill>
-              <a:srgbClr val="8ABBD8"/>
-            </a:solidFill>
-            <a:prstDash val="solid"/>
-          </a:ln>
-        </p:spPr>
-      </p:sp>
-      <p:sp>
-        <p:nvSpPr>
-          <p:cNvPr id="21" name="Text 19"/>
-          <p:cNvSpPr/>
-          <p:nvPr/>
-        </p:nvSpPr>
-        <p:spPr>
-          <a:xfrm>
-            <a:off x="7909560" y="3977640"/>
-            <a:ext cx="2926080" cy="182880"/>
-          </a:xfrm>
-          <a:prstGeom prst="rect">
-            <a:avLst/>
-          </a:prstGeom>
-          <a:noFill/>
-          <a:ln/>
-        </p:spPr>
-        <p:txBody>
-          <a:bodyPr wrap="square" lIns="0" tIns="0" rIns="0" bIns="0" rtlCol="0" anchor="ctr"/>
-          <a:lstStyle/>
-          <a:p>
-            <a:pPr algn="ctr" indent="0" marL="0">
-              <a:buNone/>
-            </a:pPr>
-            <a:r>
-              <a:rPr lang="en-US" sz="1000" dirty="0">
-                <a:solidFill>
-                  <a:srgbClr val="003A63"/>
-                </a:solidFill>
-                <a:latin typeface="Aptos" pitchFamily="34" charset="0"/>
-                <a:ea typeface="Aptos" pitchFamily="34" charset="-122"/>
-                <a:cs typeface="Aptos" pitchFamily="34" charset="-120"/>
-              </a:rPr>
-              <a:t>Dependencies visible</a:t>
-            </a:r>
-            <a:endParaRPr lang="en-US" sz="1000" dirty="0"/>
-          </a:p>
-        </p:txBody>
-      </p:sp>
-      <p:sp>
-        <p:nvSpPr>
-          <p:cNvPr id="22" name="Shape 20"/>
           <p:cNvSpPr/>
           <p:nvPr/>
         </p:nvSpPr>
@@ -8760,7 +7889,7 @@
       </p:sp>
       <p:sp>
         <p:nvSpPr>
-          <p:cNvPr id="23" name="Text 21"/>
+          <p:cNvPr id="17" name="Text 15"/>
           <p:cNvSpPr/>
           <p:nvPr/>
         </p:nvSpPr>
@@ -8799,7 +7928,7 @@
       </p:sp>
       <p:sp>
         <p:nvSpPr>
-          <p:cNvPr id="24" name="Text 22"/>
+          <p:cNvPr id="18" name="Text 16"/>
           <p:cNvSpPr/>
           <p:nvPr/>
         </p:nvSpPr>
@@ -9293,13 +8422,11 @@
             </a:avLst>
           </a:prstGeom>
           <a:solidFill>
-            <a:srgbClr val="FFFFFF">
-              <a:alpha val="88000"/>
-            </a:srgbClr>
+            <a:srgbClr val="FFFFFF"/>
           </a:solidFill>
           <a:ln w="12700">
             <a:solidFill>
-              <a:srgbClr val="D6E8F2"/>
+              <a:srgbClr val="B9D7E6"/>
             </a:solidFill>
             <a:prstDash val="solid"/>
           </a:ln>
@@ -9307,30 +8434,42 @@
       </p:sp>
       <p:sp>
         <p:nvSpPr>
-          <p:cNvPr id="14" name="Shape 12"/>
-          <p:cNvSpPr/>
-          <p:nvPr/>
-        </p:nvSpPr>
-        <p:spPr>
-          <a:xfrm>
-            <a:off x="7927848" y="3319272"/>
-            <a:ext cx="792480" cy="749808"/>
-          </a:xfrm>
-          <a:prstGeom prst="roundRect">
-            <a:avLst>
-              <a:gd name="adj" fmla="val 14634"/>
-            </a:avLst>
-          </a:prstGeom>
-          <a:solidFill>
-            <a:srgbClr val="0068B7"/>
-          </a:solidFill>
-          <a:ln w="12700">
-            <a:solidFill>
-              <a:srgbClr val="0068B7"/>
-            </a:solidFill>
-            <a:prstDash val="solid"/>
-          </a:ln>
-        </p:spPr>
+          <p:cNvPr id="14" name="Text 12"/>
+          <p:cNvSpPr/>
+          <p:nvPr/>
+        </p:nvSpPr>
+        <p:spPr>
+          <a:xfrm>
+            <a:off x="7799832" y="2935224"/>
+            <a:ext cx="3145536" cy="256032"/>
+          </a:xfrm>
+          <a:prstGeom prst="rect">
+            <a:avLst/>
+          </a:prstGeom>
+          <a:noFill/>
+          <a:ln/>
+        </p:spPr>
+        <p:txBody>
+          <a:bodyPr wrap="square" lIns="0" tIns="0" rIns="0" bIns="0" rtlCol="0" anchor="ctr"/>
+          <a:lstStyle/>
+          <a:p>
+            <a:pPr indent="0" marL="0">
+              <a:buNone/>
+            </a:pPr>
+            <a:r>
+              <a:rPr lang="en-US" sz="1300" b="1" dirty="0">
+                <a:solidFill>
+                  <a:srgbClr val="0068B7"/>
+                </a:solidFill>
+                <a:latin typeface="Aptos" pitchFamily="34" charset="0"/>
+                <a:ea typeface="Aptos" pitchFamily="34" charset="-122"/>
+                <a:cs typeface="Aptos" pitchFamily="34" charset="-120"/>
+              </a:rPr>
+              <a:t>Concept checkpoints</a:t>
+            </a:r>
+            <a:endParaRPr lang="en-US" sz="1300" dirty="0"/>
+          </a:p>
+        </p:txBody>
       </p:sp>
       <p:sp>
         <p:nvSpPr>
@@ -9340,240 +8479,53 @@
         </p:nvSpPr>
         <p:spPr>
           <a:xfrm>
-            <a:off x="8001000" y="3511296"/>
-            <a:ext cx="646176" cy="310896"/>
-          </a:xfrm>
-          <a:prstGeom prst="rect">
-            <a:avLst/>
-          </a:prstGeom>
-          <a:noFill/>
-          <a:ln/>
-        </p:spPr>
-        <p:txBody>
-          <a:bodyPr wrap="square" lIns="0" tIns="0" rIns="0" bIns="0" rtlCol="0" anchor="ctr">
+            <a:off x="7818120" y="3300984"/>
+            <a:ext cx="3090672" cy="877824"/>
+          </a:xfrm>
+          <a:prstGeom prst="rect">
+            <a:avLst/>
+          </a:prstGeom>
+          <a:noFill/>
+          <a:ln/>
+        </p:spPr>
+        <p:txBody>
+          <a:bodyPr wrap="square" lIns="254" tIns="254" rIns="254" bIns="254" rtlCol="0" anchor="t">
             <a:normAutofit/>
           </a:bodyPr>
           <a:lstStyle/>
           <a:p>
-            <a:pPr algn="ctr" indent="0" marL="0">
-              <a:buNone/>
-            </a:pPr>
-            <a:r>
-              <a:rPr lang="en-US" sz="1500" b="1" dirty="0">
-                <a:solidFill>
-                  <a:srgbClr val="FFFFFF"/>
-                </a:solidFill>
-                <a:latin typeface="Aptos" pitchFamily="34" charset="0"/>
-                <a:ea typeface="Aptos" pitchFamily="34" charset="-122"/>
-                <a:cs typeface="Aptos" pitchFamily="34" charset="-120"/>
-              </a:rPr>
-              <a:t>Plan</a:t>
-            </a:r>
-            <a:endParaRPr lang="en-US" sz="1500" dirty="0"/>
+            <a:r>
+              <a:rPr lang="en-US" sz="1380" dirty="0">
+                <a:solidFill>
+                  <a:srgbClr val="17364A"/>
+                </a:solidFill>
+                <a:latin typeface="Aptos" pitchFamily="34" charset="0"/>
+                <a:ea typeface="Aptos" pitchFamily="34" charset="-122"/>
+                <a:cs typeface="Aptos" pitchFamily="34" charset="-120"/>
+              </a:rPr>
+              <a:t>Which eCR tasks could AI support safely?</a:t>
+            </a:r>
+            <a:endParaRPr lang="en-US" sz="1380" dirty="0"/>
+          </a:p>
+          <a:p>
+            <a:r>
+              <a:rPr lang="en-US" sz="1380" dirty="0">
+                <a:solidFill>
+                  <a:srgbClr val="17364A"/>
+                </a:solidFill>
+                <a:latin typeface="Aptos" pitchFamily="34" charset="0"/>
+                <a:ea typeface="Aptos" pitchFamily="34" charset="-122"/>
+                <a:cs typeface="Aptos" pitchFamily="34" charset="-120"/>
+              </a:rPr>
+              <a:t>Which tasks require human review, legal authority, or epidemiologic judgment?</a:t>
+            </a:r>
+            <a:endParaRPr lang="en-US" sz="1380" dirty="0"/>
           </a:p>
         </p:txBody>
       </p:sp>
       <p:sp>
         <p:nvSpPr>
           <p:cNvPr id="16" name="Shape 14"/>
-          <p:cNvSpPr/>
-          <p:nvPr/>
-        </p:nvSpPr>
-        <p:spPr>
-          <a:xfrm>
-            <a:off x="8976360" y="3319272"/>
-            <a:ext cx="792480" cy="749808"/>
-          </a:xfrm>
-          <a:prstGeom prst="roundRect">
-            <a:avLst>
-              <a:gd name="adj" fmla="val 14634"/>
-            </a:avLst>
-          </a:prstGeom>
-          <a:solidFill>
-            <a:srgbClr val="2F8A28"/>
-          </a:solidFill>
-          <a:ln w="12700">
-            <a:solidFill>
-              <a:srgbClr val="2F8A28"/>
-            </a:solidFill>
-            <a:prstDash val="solid"/>
-          </a:ln>
-        </p:spPr>
-      </p:sp>
-      <p:sp>
-        <p:nvSpPr>
-          <p:cNvPr id="17" name="Text 15"/>
-          <p:cNvSpPr/>
-          <p:nvPr/>
-        </p:nvSpPr>
-        <p:spPr>
-          <a:xfrm>
-            <a:off x="9049512" y="3511296"/>
-            <a:ext cx="646176" cy="310896"/>
-          </a:xfrm>
-          <a:prstGeom prst="rect">
-            <a:avLst/>
-          </a:prstGeom>
-          <a:noFill/>
-          <a:ln/>
-        </p:spPr>
-        <p:txBody>
-          <a:bodyPr wrap="square" lIns="0" tIns="0" rIns="0" bIns="0" rtlCol="0" anchor="ctr">
-            <a:normAutofit/>
-          </a:bodyPr>
-          <a:lstStyle/>
-          <a:p>
-            <a:pPr algn="ctr" indent="0" marL="0">
-              <a:buNone/>
-            </a:pPr>
-            <a:r>
-              <a:rPr lang="en-US" sz="1500" b="1" dirty="0">
-                <a:solidFill>
-                  <a:srgbClr val="FFFFFF"/>
-                </a:solidFill>
-                <a:latin typeface="Aptos" pitchFamily="34" charset="0"/>
-                <a:ea typeface="Aptos" pitchFamily="34" charset="-122"/>
-                <a:cs typeface="Aptos" pitchFamily="34" charset="-120"/>
-              </a:rPr>
-              <a:t>Do</a:t>
-            </a:r>
-            <a:endParaRPr lang="en-US" sz="1500" dirty="0"/>
-          </a:p>
-        </p:txBody>
-      </p:sp>
-      <p:sp>
-        <p:nvSpPr>
-          <p:cNvPr id="18" name="Shape 16"/>
-          <p:cNvSpPr/>
-          <p:nvPr/>
-        </p:nvSpPr>
-        <p:spPr>
-          <a:xfrm>
-            <a:off x="10024872" y="3319272"/>
-            <a:ext cx="792480" cy="749808"/>
-          </a:xfrm>
-          <a:prstGeom prst="roundRect">
-            <a:avLst>
-              <a:gd name="adj" fmla="val 14634"/>
-            </a:avLst>
-          </a:prstGeom>
-          <a:solidFill>
-            <a:srgbClr val="D69A2D"/>
-          </a:solidFill>
-          <a:ln w="12700">
-            <a:solidFill>
-              <a:srgbClr val="D69A2D"/>
-            </a:solidFill>
-            <a:prstDash val="solid"/>
-          </a:ln>
-        </p:spPr>
-      </p:sp>
-      <p:sp>
-        <p:nvSpPr>
-          <p:cNvPr id="19" name="Text 17"/>
-          <p:cNvSpPr/>
-          <p:nvPr/>
-        </p:nvSpPr>
-        <p:spPr>
-          <a:xfrm>
-            <a:off x="10098024" y="3511296"/>
-            <a:ext cx="646176" cy="310896"/>
-          </a:xfrm>
-          <a:prstGeom prst="rect">
-            <a:avLst/>
-          </a:prstGeom>
-          <a:noFill/>
-          <a:ln/>
-        </p:spPr>
-        <p:txBody>
-          <a:bodyPr wrap="square" lIns="0" tIns="0" rIns="0" bIns="0" rtlCol="0" anchor="ctr">
-            <a:normAutofit/>
-          </a:bodyPr>
-          <a:lstStyle/>
-          <a:p>
-            <a:pPr algn="ctr" indent="0" marL="0">
-              <a:buNone/>
-            </a:pPr>
-            <a:r>
-              <a:rPr lang="en-US" sz="1500" b="1" dirty="0">
-                <a:solidFill>
-                  <a:srgbClr val="FFFFFF"/>
-                </a:solidFill>
-                <a:latin typeface="Aptos" pitchFamily="34" charset="0"/>
-                <a:ea typeface="Aptos" pitchFamily="34" charset="-122"/>
-                <a:cs typeface="Aptos" pitchFamily="34" charset="-120"/>
-              </a:rPr>
-              <a:t>Review</a:t>
-            </a:r>
-            <a:endParaRPr lang="en-US" sz="1500" dirty="0"/>
-          </a:p>
-        </p:txBody>
-      </p:sp>
-      <p:sp>
-        <p:nvSpPr>
-          <p:cNvPr id="20" name="Shape 18"/>
-          <p:cNvSpPr/>
-          <p:nvPr/>
-        </p:nvSpPr>
-        <p:spPr>
-          <a:xfrm>
-            <a:off x="8293608" y="4389120"/>
-            <a:ext cx="2157984" cy="0"/>
-          </a:xfrm>
-          <a:prstGeom prst="line">
-            <a:avLst/>
-          </a:prstGeom>
-          <a:noFill/>
-          <a:ln w="25400">
-            <a:solidFill>
-              <a:srgbClr val="8ABBD8"/>
-            </a:solidFill>
-            <a:prstDash val="solid"/>
-          </a:ln>
-        </p:spPr>
-      </p:sp>
-      <p:sp>
-        <p:nvSpPr>
-          <p:cNvPr id="21" name="Text 19"/>
-          <p:cNvSpPr/>
-          <p:nvPr/>
-        </p:nvSpPr>
-        <p:spPr>
-          <a:xfrm>
-            <a:off x="7909560" y="3977640"/>
-            <a:ext cx="2926080" cy="182880"/>
-          </a:xfrm>
-          <a:prstGeom prst="rect">
-            <a:avLst/>
-          </a:prstGeom>
-          <a:noFill/>
-          <a:ln/>
-        </p:spPr>
-        <p:txBody>
-          <a:bodyPr wrap="square" lIns="0" tIns="0" rIns="0" bIns="0" rtlCol="0" anchor="ctr"/>
-          <a:lstStyle/>
-          <a:p>
-            <a:pPr algn="ctr" indent="0" marL="0">
-              <a:buNone/>
-            </a:pPr>
-            <a:r>
-              <a:rPr lang="en-US" sz="1000" dirty="0">
-                <a:solidFill>
-                  <a:srgbClr val="003A63"/>
-                </a:solidFill>
-                <a:latin typeface="Aptos" pitchFamily="34" charset="0"/>
-                <a:ea typeface="Aptos" pitchFamily="34" charset="-122"/>
-                <a:cs typeface="Aptos" pitchFamily="34" charset="-120"/>
-              </a:rPr>
-              <a:t>Dependencies visible</a:t>
-            </a:r>
-            <a:endParaRPr lang="en-US" sz="1000" dirty="0"/>
-          </a:p>
-        </p:txBody>
-      </p:sp>
-      <p:sp>
-        <p:nvSpPr>
-          <p:cNvPr id="22" name="Shape 20"/>
           <p:cNvSpPr/>
           <p:nvPr/>
         </p:nvSpPr>
@@ -9600,7 +8552,7 @@
       </p:sp>
       <p:sp>
         <p:nvSpPr>
-          <p:cNvPr id="23" name="Text 21"/>
+          <p:cNvPr id="17" name="Text 15"/>
           <p:cNvSpPr/>
           <p:nvPr/>
         </p:nvSpPr>
@@ -9639,7 +8591,7 @@
       </p:sp>
       <p:sp>
         <p:nvSpPr>
-          <p:cNvPr id="24" name="Text 22"/>
+          <p:cNvPr id="18" name="Text 16"/>
           <p:cNvSpPr/>
           <p:nvPr/>
         </p:nvSpPr>
@@ -10133,13 +9085,11 @@
             </a:avLst>
           </a:prstGeom>
           <a:solidFill>
-            <a:srgbClr val="FFFFFF">
-              <a:alpha val="88000"/>
-            </a:srgbClr>
+            <a:srgbClr val="FFFFFF"/>
           </a:solidFill>
           <a:ln w="12700">
             <a:solidFill>
-              <a:srgbClr val="D6E8F2"/>
+              <a:srgbClr val="B9D7E6"/>
             </a:solidFill>
             <a:prstDash val="solid"/>
           </a:ln>
@@ -10147,30 +9097,42 @@
       </p:sp>
       <p:sp>
         <p:nvSpPr>
-          <p:cNvPr id="14" name="Shape 12"/>
-          <p:cNvSpPr/>
-          <p:nvPr/>
-        </p:nvSpPr>
-        <p:spPr>
-          <a:xfrm>
-            <a:off x="7927848" y="3319272"/>
-            <a:ext cx="792480" cy="749808"/>
-          </a:xfrm>
-          <a:prstGeom prst="roundRect">
-            <a:avLst>
-              <a:gd name="adj" fmla="val 14634"/>
-            </a:avLst>
-          </a:prstGeom>
-          <a:solidFill>
-            <a:srgbClr val="0068B7"/>
-          </a:solidFill>
-          <a:ln w="12700">
-            <a:solidFill>
-              <a:srgbClr val="0068B7"/>
-            </a:solidFill>
-            <a:prstDash val="solid"/>
-          </a:ln>
-        </p:spPr>
+          <p:cNvPr id="14" name="Text 12"/>
+          <p:cNvSpPr/>
+          <p:nvPr/>
+        </p:nvSpPr>
+        <p:spPr>
+          <a:xfrm>
+            <a:off x="7799832" y="2935224"/>
+            <a:ext cx="3145536" cy="256032"/>
+          </a:xfrm>
+          <a:prstGeom prst="rect">
+            <a:avLst/>
+          </a:prstGeom>
+          <a:noFill/>
+          <a:ln/>
+        </p:spPr>
+        <p:txBody>
+          <a:bodyPr wrap="square" lIns="0" tIns="0" rIns="0" bIns="0" rtlCol="0" anchor="ctr"/>
+          <a:lstStyle/>
+          <a:p>
+            <a:pPr indent="0" marL="0">
+              <a:buNone/>
+            </a:pPr>
+            <a:r>
+              <a:rPr lang="en-US" sz="1300" b="1" dirty="0">
+                <a:solidFill>
+                  <a:srgbClr val="0068B7"/>
+                </a:solidFill>
+                <a:latin typeface="Aptos" pitchFamily="34" charset="0"/>
+                <a:ea typeface="Aptos" pitchFamily="34" charset="-122"/>
+                <a:cs typeface="Aptos" pitchFamily="34" charset="-120"/>
+              </a:rPr>
+              <a:t>Concept checkpoints</a:t>
+            </a:r>
+            <a:endParaRPr lang="en-US" sz="1300" dirty="0"/>
+          </a:p>
+        </p:txBody>
       </p:sp>
       <p:sp>
         <p:nvSpPr>
@@ -10180,240 +9142,53 @@
         </p:nvSpPr>
         <p:spPr>
           <a:xfrm>
-            <a:off x="8001000" y="3511296"/>
-            <a:ext cx="646176" cy="310896"/>
-          </a:xfrm>
-          <a:prstGeom prst="rect">
-            <a:avLst/>
-          </a:prstGeom>
-          <a:noFill/>
-          <a:ln/>
-        </p:spPr>
-        <p:txBody>
-          <a:bodyPr wrap="square" lIns="0" tIns="0" rIns="0" bIns="0" rtlCol="0" anchor="ctr">
+            <a:off x="7818120" y="3300984"/>
+            <a:ext cx="3090672" cy="877824"/>
+          </a:xfrm>
+          <a:prstGeom prst="rect">
+            <a:avLst/>
+          </a:prstGeom>
+          <a:noFill/>
+          <a:ln/>
+        </p:spPr>
+        <p:txBody>
+          <a:bodyPr wrap="square" lIns="254" tIns="254" rIns="254" bIns="254" rtlCol="0" anchor="t">
             <a:normAutofit/>
           </a:bodyPr>
           <a:lstStyle/>
           <a:p>
-            <a:pPr algn="ctr" indent="0" marL="0">
-              <a:buNone/>
-            </a:pPr>
-            <a:r>
-              <a:rPr lang="en-US" sz="1500" b="1" dirty="0">
-                <a:solidFill>
-                  <a:srgbClr val="FFFFFF"/>
-                </a:solidFill>
-                <a:latin typeface="Aptos" pitchFamily="34" charset="0"/>
-                <a:ea typeface="Aptos" pitchFamily="34" charset="-122"/>
-                <a:cs typeface="Aptos" pitchFamily="34" charset="-120"/>
-              </a:rPr>
-              <a:t>Plan</a:t>
-            </a:r>
-            <a:endParaRPr lang="en-US" sz="1500" dirty="0"/>
+            <a:r>
+              <a:rPr lang="en-US" sz="1380" dirty="0">
+                <a:solidFill>
+                  <a:srgbClr val="17364A"/>
+                </a:solidFill>
+                <a:latin typeface="Aptos" pitchFamily="34" charset="0"/>
+                <a:ea typeface="Aptos" pitchFamily="34" charset="-122"/>
+                <a:cs typeface="Aptos" pitchFamily="34" charset="-120"/>
+              </a:rPr>
+              <a:t>Create an AI-readiness review for one eCR workflow.</a:t>
+            </a:r>
+            <a:endParaRPr lang="en-US" sz="1380" dirty="0"/>
+          </a:p>
+          <a:p>
+            <a:r>
+              <a:rPr lang="en-US" sz="1380" dirty="0">
+                <a:solidFill>
+                  <a:srgbClr val="17364A"/>
+                </a:solidFill>
+                <a:latin typeface="Aptos" pitchFamily="34" charset="0"/>
+                <a:ea typeface="Aptos" pitchFamily="34" charset="-122"/>
+                <a:cs typeface="Aptos" pitchFamily="34" charset="-120"/>
+              </a:rPr>
+              <a:t>Map the current workflow, identify data elements required for review, describe common data.</a:t>
+            </a:r>
+            <a:endParaRPr lang="en-US" sz="1380" dirty="0"/>
           </a:p>
         </p:txBody>
       </p:sp>
       <p:sp>
         <p:nvSpPr>
           <p:cNvPr id="16" name="Shape 14"/>
-          <p:cNvSpPr/>
-          <p:nvPr/>
-        </p:nvSpPr>
-        <p:spPr>
-          <a:xfrm>
-            <a:off x="8976360" y="3319272"/>
-            <a:ext cx="792480" cy="749808"/>
-          </a:xfrm>
-          <a:prstGeom prst="roundRect">
-            <a:avLst>
-              <a:gd name="adj" fmla="val 14634"/>
-            </a:avLst>
-          </a:prstGeom>
-          <a:solidFill>
-            <a:srgbClr val="2F8A28"/>
-          </a:solidFill>
-          <a:ln w="12700">
-            <a:solidFill>
-              <a:srgbClr val="2F8A28"/>
-            </a:solidFill>
-            <a:prstDash val="solid"/>
-          </a:ln>
-        </p:spPr>
-      </p:sp>
-      <p:sp>
-        <p:nvSpPr>
-          <p:cNvPr id="17" name="Text 15"/>
-          <p:cNvSpPr/>
-          <p:nvPr/>
-        </p:nvSpPr>
-        <p:spPr>
-          <a:xfrm>
-            <a:off x="9049512" y="3511296"/>
-            <a:ext cx="646176" cy="310896"/>
-          </a:xfrm>
-          <a:prstGeom prst="rect">
-            <a:avLst/>
-          </a:prstGeom>
-          <a:noFill/>
-          <a:ln/>
-        </p:spPr>
-        <p:txBody>
-          <a:bodyPr wrap="square" lIns="0" tIns="0" rIns="0" bIns="0" rtlCol="0" anchor="ctr">
-            <a:normAutofit/>
-          </a:bodyPr>
-          <a:lstStyle/>
-          <a:p>
-            <a:pPr algn="ctr" indent="0" marL="0">
-              <a:buNone/>
-            </a:pPr>
-            <a:r>
-              <a:rPr lang="en-US" sz="1500" b="1" dirty="0">
-                <a:solidFill>
-                  <a:srgbClr val="FFFFFF"/>
-                </a:solidFill>
-                <a:latin typeface="Aptos" pitchFamily="34" charset="0"/>
-                <a:ea typeface="Aptos" pitchFamily="34" charset="-122"/>
-                <a:cs typeface="Aptos" pitchFamily="34" charset="-120"/>
-              </a:rPr>
-              <a:t>Do</a:t>
-            </a:r>
-            <a:endParaRPr lang="en-US" sz="1500" dirty="0"/>
-          </a:p>
-        </p:txBody>
-      </p:sp>
-      <p:sp>
-        <p:nvSpPr>
-          <p:cNvPr id="18" name="Shape 16"/>
-          <p:cNvSpPr/>
-          <p:nvPr/>
-        </p:nvSpPr>
-        <p:spPr>
-          <a:xfrm>
-            <a:off x="10024872" y="3319272"/>
-            <a:ext cx="792480" cy="749808"/>
-          </a:xfrm>
-          <a:prstGeom prst="roundRect">
-            <a:avLst>
-              <a:gd name="adj" fmla="val 14634"/>
-            </a:avLst>
-          </a:prstGeom>
-          <a:solidFill>
-            <a:srgbClr val="D69A2D"/>
-          </a:solidFill>
-          <a:ln w="12700">
-            <a:solidFill>
-              <a:srgbClr val="D69A2D"/>
-            </a:solidFill>
-            <a:prstDash val="solid"/>
-          </a:ln>
-        </p:spPr>
-      </p:sp>
-      <p:sp>
-        <p:nvSpPr>
-          <p:cNvPr id="19" name="Text 17"/>
-          <p:cNvSpPr/>
-          <p:nvPr/>
-        </p:nvSpPr>
-        <p:spPr>
-          <a:xfrm>
-            <a:off x="10098024" y="3511296"/>
-            <a:ext cx="646176" cy="310896"/>
-          </a:xfrm>
-          <a:prstGeom prst="rect">
-            <a:avLst/>
-          </a:prstGeom>
-          <a:noFill/>
-          <a:ln/>
-        </p:spPr>
-        <p:txBody>
-          <a:bodyPr wrap="square" lIns="0" tIns="0" rIns="0" bIns="0" rtlCol="0" anchor="ctr">
-            <a:normAutofit/>
-          </a:bodyPr>
-          <a:lstStyle/>
-          <a:p>
-            <a:pPr algn="ctr" indent="0" marL="0">
-              <a:buNone/>
-            </a:pPr>
-            <a:r>
-              <a:rPr lang="en-US" sz="1500" b="1" dirty="0">
-                <a:solidFill>
-                  <a:srgbClr val="FFFFFF"/>
-                </a:solidFill>
-                <a:latin typeface="Aptos" pitchFamily="34" charset="0"/>
-                <a:ea typeface="Aptos" pitchFamily="34" charset="-122"/>
-                <a:cs typeface="Aptos" pitchFamily="34" charset="-120"/>
-              </a:rPr>
-              <a:t>Review</a:t>
-            </a:r>
-            <a:endParaRPr lang="en-US" sz="1500" dirty="0"/>
-          </a:p>
-        </p:txBody>
-      </p:sp>
-      <p:sp>
-        <p:nvSpPr>
-          <p:cNvPr id="20" name="Shape 18"/>
-          <p:cNvSpPr/>
-          <p:nvPr/>
-        </p:nvSpPr>
-        <p:spPr>
-          <a:xfrm>
-            <a:off x="8293608" y="4389120"/>
-            <a:ext cx="2157984" cy="0"/>
-          </a:xfrm>
-          <a:prstGeom prst="line">
-            <a:avLst/>
-          </a:prstGeom>
-          <a:noFill/>
-          <a:ln w="25400">
-            <a:solidFill>
-              <a:srgbClr val="8ABBD8"/>
-            </a:solidFill>
-            <a:prstDash val="solid"/>
-          </a:ln>
-        </p:spPr>
-      </p:sp>
-      <p:sp>
-        <p:nvSpPr>
-          <p:cNvPr id="21" name="Text 19"/>
-          <p:cNvSpPr/>
-          <p:nvPr/>
-        </p:nvSpPr>
-        <p:spPr>
-          <a:xfrm>
-            <a:off x="7909560" y="3977640"/>
-            <a:ext cx="2926080" cy="182880"/>
-          </a:xfrm>
-          <a:prstGeom prst="rect">
-            <a:avLst/>
-          </a:prstGeom>
-          <a:noFill/>
-          <a:ln/>
-        </p:spPr>
-        <p:txBody>
-          <a:bodyPr wrap="square" lIns="0" tIns="0" rIns="0" bIns="0" rtlCol="0" anchor="ctr"/>
-          <a:lstStyle/>
-          <a:p>
-            <a:pPr algn="ctr" indent="0" marL="0">
-              <a:buNone/>
-            </a:pPr>
-            <a:r>
-              <a:rPr lang="en-US" sz="1000" dirty="0">
-                <a:solidFill>
-                  <a:srgbClr val="003A63"/>
-                </a:solidFill>
-                <a:latin typeface="Aptos" pitchFamily="34" charset="0"/>
-                <a:ea typeface="Aptos" pitchFamily="34" charset="-122"/>
-                <a:cs typeface="Aptos" pitchFamily="34" charset="-120"/>
-              </a:rPr>
-              <a:t>Dependencies visible</a:t>
-            </a:r>
-            <a:endParaRPr lang="en-US" sz="1000" dirty="0"/>
-          </a:p>
-        </p:txBody>
-      </p:sp>
-      <p:sp>
-        <p:nvSpPr>
-          <p:cNvPr id="22" name="Shape 20"/>
           <p:cNvSpPr/>
           <p:nvPr/>
         </p:nvSpPr>
@@ -10440,7 +9215,7 @@
       </p:sp>
       <p:sp>
         <p:nvSpPr>
-          <p:cNvPr id="23" name="Text 21"/>
+          <p:cNvPr id="17" name="Text 15"/>
           <p:cNvSpPr/>
           <p:nvPr/>
         </p:nvSpPr>
@@ -10479,7 +9254,7 @@
       </p:sp>
       <p:sp>
         <p:nvSpPr>
-          <p:cNvPr id="24" name="Text 22"/>
+          <p:cNvPr id="18" name="Text 16"/>
           <p:cNvSpPr/>
           <p:nvPr/>
         </p:nvSpPr>
@@ -10987,13 +9762,11 @@
             </a:avLst>
           </a:prstGeom>
           <a:solidFill>
-            <a:srgbClr val="FFFFFF">
-              <a:alpha val="88000"/>
-            </a:srgbClr>
+            <a:srgbClr val="FFFFFF"/>
           </a:solidFill>
           <a:ln w="12700">
             <a:solidFill>
-              <a:srgbClr val="D6E8F2"/>
+              <a:srgbClr val="B9D7E6"/>
             </a:solidFill>
             <a:prstDash val="solid"/>
           </a:ln>
@@ -11001,30 +9774,42 @@
       </p:sp>
       <p:sp>
         <p:nvSpPr>
-          <p:cNvPr id="14" name="Shape 12"/>
-          <p:cNvSpPr/>
-          <p:nvPr/>
-        </p:nvSpPr>
-        <p:spPr>
-          <a:xfrm>
-            <a:off x="7927848" y="3319272"/>
-            <a:ext cx="792480" cy="749808"/>
-          </a:xfrm>
-          <a:prstGeom prst="roundRect">
-            <a:avLst>
-              <a:gd name="adj" fmla="val 14634"/>
-            </a:avLst>
-          </a:prstGeom>
-          <a:solidFill>
-            <a:srgbClr val="0068B7"/>
-          </a:solidFill>
-          <a:ln w="12700">
-            <a:solidFill>
-              <a:srgbClr val="0068B7"/>
-            </a:solidFill>
-            <a:prstDash val="solid"/>
-          </a:ln>
-        </p:spPr>
+          <p:cNvPr id="14" name="Text 12"/>
+          <p:cNvSpPr/>
+          <p:nvPr/>
+        </p:nvSpPr>
+        <p:spPr>
+          <a:xfrm>
+            <a:off x="7799832" y="2935224"/>
+            <a:ext cx="3145536" cy="256032"/>
+          </a:xfrm>
+          <a:prstGeom prst="rect">
+            <a:avLst/>
+          </a:prstGeom>
+          <a:noFill/>
+          <a:ln/>
+        </p:spPr>
+        <p:txBody>
+          <a:bodyPr wrap="square" lIns="0" tIns="0" rIns="0" bIns="0" rtlCol="0" anchor="ctr"/>
+          <a:lstStyle/>
+          <a:p>
+            <a:pPr indent="0" marL="0">
+              <a:buNone/>
+            </a:pPr>
+            <a:r>
+              <a:rPr lang="en-US" sz="1300" b="1" dirty="0">
+                <a:solidFill>
+                  <a:srgbClr val="0068B7"/>
+                </a:solidFill>
+                <a:latin typeface="Aptos" pitchFamily="34" charset="0"/>
+                <a:ea typeface="Aptos" pitchFamily="34" charset="-122"/>
+                <a:cs typeface="Aptos" pitchFamily="34" charset="-120"/>
+              </a:rPr>
+              <a:t>Concept checkpoints</a:t>
+            </a:r>
+            <a:endParaRPr lang="en-US" sz="1300" dirty="0"/>
+          </a:p>
+        </p:txBody>
       </p:sp>
       <p:sp>
         <p:nvSpPr>
@@ -11034,240 +9819,67 @@
         </p:nvSpPr>
         <p:spPr>
           <a:xfrm>
-            <a:off x="8001000" y="3511296"/>
-            <a:ext cx="646176" cy="310896"/>
-          </a:xfrm>
-          <a:prstGeom prst="rect">
-            <a:avLst/>
-          </a:prstGeom>
-          <a:noFill/>
-          <a:ln/>
-        </p:spPr>
-        <p:txBody>
-          <a:bodyPr wrap="square" lIns="0" tIns="0" rIns="0" bIns="0" rtlCol="0" anchor="ctr">
+            <a:off x="7818120" y="3300984"/>
+            <a:ext cx="3090672" cy="877824"/>
+          </a:xfrm>
+          <a:prstGeom prst="rect">
+            <a:avLst/>
+          </a:prstGeom>
+          <a:noFill/>
+          <a:ln/>
+        </p:spPr>
+        <p:txBody>
+          <a:bodyPr wrap="square" lIns="254" tIns="254" rIns="254" bIns="254" rtlCol="0" anchor="t">
             <a:normAutofit/>
           </a:bodyPr>
           <a:lstStyle/>
           <a:p>
-            <a:pPr algn="ctr" indent="0" marL="0">
-              <a:buNone/>
-            </a:pPr>
-            <a:r>
-              <a:rPr lang="en-US" sz="1500" b="1" dirty="0">
-                <a:solidFill>
-                  <a:srgbClr val="FFFFFF"/>
-                </a:solidFill>
-                <a:latin typeface="Aptos" pitchFamily="34" charset="0"/>
-                <a:ea typeface="Aptos" pitchFamily="34" charset="-122"/>
-                <a:cs typeface="Aptos" pitchFamily="34" charset="-120"/>
-              </a:rPr>
-              <a:t>Plan</a:t>
-            </a:r>
-            <a:endParaRPr lang="en-US" sz="1500" dirty="0"/>
+            <a:r>
+              <a:rPr lang="en-US" sz="1380" dirty="0">
+                <a:solidFill>
+                  <a:srgbClr val="17364A"/>
+                </a:solidFill>
+                <a:latin typeface="Aptos" pitchFamily="34" charset="0"/>
+                <a:ea typeface="Aptos" pitchFamily="34" charset="-122"/>
+                <a:cs typeface="Aptos" pitchFamily="34" charset="-120"/>
+              </a:rPr>
+              <a:t>eCR workflow map</a:t>
+            </a:r>
+            <a:endParaRPr lang="en-US" sz="1380" dirty="0"/>
+          </a:p>
+          <a:p>
+            <a:r>
+              <a:rPr lang="en-US" sz="1380" dirty="0">
+                <a:solidFill>
+                  <a:srgbClr val="17364A"/>
+                </a:solidFill>
+                <a:latin typeface="Aptos" pitchFamily="34" charset="0"/>
+                <a:ea typeface="Aptos" pitchFamily="34" charset="-122"/>
+                <a:cs typeface="Aptos" pitchFamily="34" charset="-120"/>
+              </a:rPr>
+              <a:t>AI-readiness checklist</a:t>
+            </a:r>
+            <a:endParaRPr lang="en-US" sz="1380" dirty="0"/>
+          </a:p>
+          <a:p>
+            <a:r>
+              <a:rPr lang="en-US" sz="1380" dirty="0">
+                <a:solidFill>
+                  <a:srgbClr val="17364A"/>
+                </a:solidFill>
+                <a:latin typeface="Aptos" pitchFamily="34" charset="0"/>
+                <a:ea typeface="Aptos" pitchFamily="34" charset="-122"/>
+                <a:cs typeface="Aptos" pitchFamily="34" charset="-120"/>
+              </a:rPr>
+              <a:t>Validation scenarios</a:t>
+            </a:r>
+            <a:endParaRPr lang="en-US" sz="1380" dirty="0"/>
           </a:p>
         </p:txBody>
       </p:sp>
       <p:sp>
         <p:nvSpPr>
           <p:cNvPr id="16" name="Shape 14"/>
-          <p:cNvSpPr/>
-          <p:nvPr/>
-        </p:nvSpPr>
-        <p:spPr>
-          <a:xfrm>
-            <a:off x="8976360" y="3319272"/>
-            <a:ext cx="792480" cy="749808"/>
-          </a:xfrm>
-          <a:prstGeom prst="roundRect">
-            <a:avLst>
-              <a:gd name="adj" fmla="val 14634"/>
-            </a:avLst>
-          </a:prstGeom>
-          <a:solidFill>
-            <a:srgbClr val="2F8A28"/>
-          </a:solidFill>
-          <a:ln w="12700">
-            <a:solidFill>
-              <a:srgbClr val="2F8A28"/>
-            </a:solidFill>
-            <a:prstDash val="solid"/>
-          </a:ln>
-        </p:spPr>
-      </p:sp>
-      <p:sp>
-        <p:nvSpPr>
-          <p:cNvPr id="17" name="Text 15"/>
-          <p:cNvSpPr/>
-          <p:nvPr/>
-        </p:nvSpPr>
-        <p:spPr>
-          <a:xfrm>
-            <a:off x="9049512" y="3511296"/>
-            <a:ext cx="646176" cy="310896"/>
-          </a:xfrm>
-          <a:prstGeom prst="rect">
-            <a:avLst/>
-          </a:prstGeom>
-          <a:noFill/>
-          <a:ln/>
-        </p:spPr>
-        <p:txBody>
-          <a:bodyPr wrap="square" lIns="0" tIns="0" rIns="0" bIns="0" rtlCol="0" anchor="ctr">
-            <a:normAutofit/>
-          </a:bodyPr>
-          <a:lstStyle/>
-          <a:p>
-            <a:pPr algn="ctr" indent="0" marL="0">
-              <a:buNone/>
-            </a:pPr>
-            <a:r>
-              <a:rPr lang="en-US" sz="1500" b="1" dirty="0">
-                <a:solidFill>
-                  <a:srgbClr val="FFFFFF"/>
-                </a:solidFill>
-                <a:latin typeface="Aptos" pitchFamily="34" charset="0"/>
-                <a:ea typeface="Aptos" pitchFamily="34" charset="-122"/>
-                <a:cs typeface="Aptos" pitchFamily="34" charset="-120"/>
-              </a:rPr>
-              <a:t>Do</a:t>
-            </a:r>
-            <a:endParaRPr lang="en-US" sz="1500" dirty="0"/>
-          </a:p>
-        </p:txBody>
-      </p:sp>
-      <p:sp>
-        <p:nvSpPr>
-          <p:cNvPr id="18" name="Shape 16"/>
-          <p:cNvSpPr/>
-          <p:nvPr/>
-        </p:nvSpPr>
-        <p:spPr>
-          <a:xfrm>
-            <a:off x="10024872" y="3319272"/>
-            <a:ext cx="792480" cy="749808"/>
-          </a:xfrm>
-          <a:prstGeom prst="roundRect">
-            <a:avLst>
-              <a:gd name="adj" fmla="val 14634"/>
-            </a:avLst>
-          </a:prstGeom>
-          <a:solidFill>
-            <a:srgbClr val="D69A2D"/>
-          </a:solidFill>
-          <a:ln w="12700">
-            <a:solidFill>
-              <a:srgbClr val="D69A2D"/>
-            </a:solidFill>
-            <a:prstDash val="solid"/>
-          </a:ln>
-        </p:spPr>
-      </p:sp>
-      <p:sp>
-        <p:nvSpPr>
-          <p:cNvPr id="19" name="Text 17"/>
-          <p:cNvSpPr/>
-          <p:nvPr/>
-        </p:nvSpPr>
-        <p:spPr>
-          <a:xfrm>
-            <a:off x="10098024" y="3511296"/>
-            <a:ext cx="646176" cy="310896"/>
-          </a:xfrm>
-          <a:prstGeom prst="rect">
-            <a:avLst/>
-          </a:prstGeom>
-          <a:noFill/>
-          <a:ln/>
-        </p:spPr>
-        <p:txBody>
-          <a:bodyPr wrap="square" lIns="0" tIns="0" rIns="0" bIns="0" rtlCol="0" anchor="ctr">
-            <a:normAutofit/>
-          </a:bodyPr>
-          <a:lstStyle/>
-          <a:p>
-            <a:pPr algn="ctr" indent="0" marL="0">
-              <a:buNone/>
-            </a:pPr>
-            <a:r>
-              <a:rPr lang="en-US" sz="1500" b="1" dirty="0">
-                <a:solidFill>
-                  <a:srgbClr val="FFFFFF"/>
-                </a:solidFill>
-                <a:latin typeface="Aptos" pitchFamily="34" charset="0"/>
-                <a:ea typeface="Aptos" pitchFamily="34" charset="-122"/>
-                <a:cs typeface="Aptos" pitchFamily="34" charset="-120"/>
-              </a:rPr>
-              <a:t>Review</a:t>
-            </a:r>
-            <a:endParaRPr lang="en-US" sz="1500" dirty="0"/>
-          </a:p>
-        </p:txBody>
-      </p:sp>
-      <p:sp>
-        <p:nvSpPr>
-          <p:cNvPr id="20" name="Shape 18"/>
-          <p:cNvSpPr/>
-          <p:nvPr/>
-        </p:nvSpPr>
-        <p:spPr>
-          <a:xfrm>
-            <a:off x="8293608" y="4389120"/>
-            <a:ext cx="2157984" cy="0"/>
-          </a:xfrm>
-          <a:prstGeom prst="line">
-            <a:avLst/>
-          </a:prstGeom>
-          <a:noFill/>
-          <a:ln w="25400">
-            <a:solidFill>
-              <a:srgbClr val="8ABBD8"/>
-            </a:solidFill>
-            <a:prstDash val="solid"/>
-          </a:ln>
-        </p:spPr>
-      </p:sp>
-      <p:sp>
-        <p:nvSpPr>
-          <p:cNvPr id="21" name="Text 19"/>
-          <p:cNvSpPr/>
-          <p:nvPr/>
-        </p:nvSpPr>
-        <p:spPr>
-          <a:xfrm>
-            <a:off x="7909560" y="3977640"/>
-            <a:ext cx="2926080" cy="182880"/>
-          </a:xfrm>
-          <a:prstGeom prst="rect">
-            <a:avLst/>
-          </a:prstGeom>
-          <a:noFill/>
-          <a:ln/>
-        </p:spPr>
-        <p:txBody>
-          <a:bodyPr wrap="square" lIns="0" tIns="0" rIns="0" bIns="0" rtlCol="0" anchor="ctr"/>
-          <a:lstStyle/>
-          <a:p>
-            <a:pPr algn="ctr" indent="0" marL="0">
-              <a:buNone/>
-            </a:pPr>
-            <a:r>
-              <a:rPr lang="en-US" sz="1000" dirty="0">
-                <a:solidFill>
-                  <a:srgbClr val="003A63"/>
-                </a:solidFill>
-                <a:latin typeface="Aptos" pitchFamily="34" charset="0"/>
-                <a:ea typeface="Aptos" pitchFamily="34" charset="-122"/>
-                <a:cs typeface="Aptos" pitchFamily="34" charset="-120"/>
-              </a:rPr>
-              <a:t>Dependencies visible</a:t>
-            </a:r>
-            <a:endParaRPr lang="en-US" sz="1000" dirty="0"/>
-          </a:p>
-        </p:txBody>
-      </p:sp>
-      <p:sp>
-        <p:nvSpPr>
-          <p:cNvPr id="22" name="Shape 20"/>
           <p:cNvSpPr/>
           <p:nvPr/>
         </p:nvSpPr>
@@ -11294,7 +9906,7 @@
       </p:sp>
       <p:sp>
         <p:nvSpPr>
-          <p:cNvPr id="23" name="Text 21"/>
+          <p:cNvPr id="17" name="Text 15"/>
           <p:cNvSpPr/>
           <p:nvPr/>
         </p:nvSpPr>
@@ -11333,7 +9945,7 @@
       </p:sp>
       <p:sp>
         <p:nvSpPr>
-          <p:cNvPr id="24" name="Text 22"/>
+          <p:cNvPr id="18" name="Text 16"/>
           <p:cNvSpPr/>
           <p:nvPr/>
         </p:nvSpPr>
@@ -11866,20 +10478,20 @@
         </p:nvSpPr>
         <p:spPr>
           <a:xfrm>
-            <a:off x="7635240" y="3730752"/>
-            <a:ext cx="1033272" cy="749808"/>
+            <a:off x="7909560" y="3675888"/>
+            <a:ext cx="3154680" cy="1691640"/>
           </a:xfrm>
           <a:prstGeom prst="roundRect">
             <a:avLst>
-              <a:gd name="adj" fmla="val 14634"/>
+              <a:gd name="adj" fmla="val 6486"/>
             </a:avLst>
           </a:prstGeom>
           <a:solidFill>
-            <a:srgbClr val="0068B7"/>
+            <a:srgbClr val="FFFFFF"/>
           </a:solidFill>
           <a:ln w="12700">
             <a:solidFill>
-              <a:srgbClr val="0068B7"/>
+              <a:srgbClr val="B9D7E6"/>
             </a:solidFill>
             <a:prstDash val="solid"/>
           </a:ln>
@@ -11893,172 +10505,100 @@
         </p:nvSpPr>
         <p:spPr>
           <a:xfrm>
-            <a:off x="7708392" y="3922776"/>
-            <a:ext cx="886968" cy="310896"/>
-          </a:xfrm>
-          <a:prstGeom prst="rect">
-            <a:avLst/>
-          </a:prstGeom>
-          <a:noFill/>
-          <a:ln/>
-        </p:spPr>
-        <p:txBody>
-          <a:bodyPr wrap="square" lIns="0" tIns="0" rIns="0" bIns="0" rtlCol="0" anchor="ctr">
+            <a:off x="8074152" y="3822192"/>
+            <a:ext cx="2825496" cy="256032"/>
+          </a:xfrm>
+          <a:prstGeom prst="rect">
+            <a:avLst/>
+          </a:prstGeom>
+          <a:noFill/>
+          <a:ln/>
+        </p:spPr>
+        <p:txBody>
+          <a:bodyPr wrap="square" lIns="0" tIns="0" rIns="0" bIns="0" rtlCol="0" anchor="ctr"/>
+          <a:lstStyle/>
+          <a:p>
+            <a:pPr indent="0" marL="0">
+              <a:buNone/>
+            </a:pPr>
+            <a:r>
+              <a:rPr lang="en-US" sz="1300" b="1" dirty="0">
+                <a:solidFill>
+                  <a:srgbClr val="0068B7"/>
+                </a:solidFill>
+                <a:latin typeface="Aptos" pitchFamily="34" charset="0"/>
+                <a:ea typeface="Aptos" pitchFamily="34" charset="-122"/>
+                <a:cs typeface="Aptos" pitchFamily="34" charset="-120"/>
+              </a:rPr>
+              <a:t>Learning sequence</a:t>
+            </a:r>
+            <a:endParaRPr lang="en-US" sz="1300" dirty="0"/>
+          </a:p>
+        </p:txBody>
+      </p:sp>
+      <p:sp>
+        <p:nvSpPr>
+          <p:cNvPr id="15" name="Text 13"/>
+          <p:cNvSpPr/>
+          <p:nvPr/>
+        </p:nvSpPr>
+        <p:spPr>
+          <a:xfrm>
+            <a:off x="8092440" y="4187952"/>
+            <a:ext cx="2770632" cy="1033272"/>
+          </a:xfrm>
+          <a:prstGeom prst="rect">
+            <a:avLst/>
+          </a:prstGeom>
+          <a:noFill/>
+          <a:ln/>
+        </p:spPr>
+        <p:txBody>
+          <a:bodyPr wrap="square" lIns="254" tIns="254" rIns="254" bIns="254" rtlCol="0" anchor="t">
             <a:normAutofit/>
           </a:bodyPr>
           <a:lstStyle/>
           <a:p>
-            <a:pPr algn="ctr" indent="0" marL="0">
-              <a:buNone/>
-            </a:pPr>
-            <a:r>
-              <a:rPr lang="en-US" sz="1500" b="1" dirty="0">
-                <a:solidFill>
-                  <a:srgbClr val="FFFFFF"/>
-                </a:solidFill>
-                <a:latin typeface="Aptos" pitchFamily="34" charset="0"/>
-                <a:ea typeface="Aptos" pitchFamily="34" charset="-122"/>
-                <a:cs typeface="Aptos" pitchFamily="34" charset="-120"/>
-              </a:rPr>
-              <a:t>Learn</a:t>
-            </a:r>
-            <a:endParaRPr lang="en-US" sz="1500" dirty="0"/>
-          </a:p>
-        </p:txBody>
-      </p:sp>
-      <p:sp>
-        <p:nvSpPr>
-          <p:cNvPr id="15" name="Shape 13"/>
-          <p:cNvSpPr/>
-          <p:nvPr/>
-        </p:nvSpPr>
-        <p:spPr>
-          <a:xfrm>
-            <a:off x="8924544" y="3730752"/>
-            <a:ext cx="1033272" cy="749808"/>
-          </a:xfrm>
-          <a:prstGeom prst="roundRect">
-            <a:avLst>
-              <a:gd name="adj" fmla="val 14634"/>
-            </a:avLst>
-          </a:prstGeom>
-          <a:solidFill>
-            <a:srgbClr val="2F8A28"/>
-          </a:solidFill>
-          <a:ln w="12700">
-            <a:solidFill>
-              <a:srgbClr val="2F8A28"/>
-            </a:solidFill>
-            <a:prstDash val="solid"/>
-          </a:ln>
-        </p:spPr>
-      </p:sp>
-      <p:sp>
-        <p:nvSpPr>
-          <p:cNvPr id="16" name="Text 14"/>
-          <p:cNvSpPr/>
-          <p:nvPr/>
-        </p:nvSpPr>
-        <p:spPr>
-          <a:xfrm>
-            <a:off x="8997696" y="3922776"/>
-            <a:ext cx="886968" cy="310896"/>
-          </a:xfrm>
-          <a:prstGeom prst="rect">
-            <a:avLst/>
-          </a:prstGeom>
-          <a:noFill/>
-          <a:ln/>
-        </p:spPr>
-        <p:txBody>
-          <a:bodyPr wrap="square" lIns="0" tIns="0" rIns="0" bIns="0" rtlCol="0" anchor="ctr">
-            <a:normAutofit/>
-          </a:bodyPr>
-          <a:lstStyle/>
-          <a:p>
-            <a:pPr algn="ctr" indent="0" marL="0">
-              <a:buNone/>
-            </a:pPr>
-            <a:r>
-              <a:rPr lang="en-US" sz="1500" b="1" dirty="0">
-                <a:solidFill>
-                  <a:srgbClr val="FFFFFF"/>
-                </a:solidFill>
-                <a:latin typeface="Aptos" pitchFamily="34" charset="0"/>
-                <a:ea typeface="Aptos" pitchFamily="34" charset="-122"/>
-                <a:cs typeface="Aptos" pitchFamily="34" charset="-120"/>
-              </a:rPr>
-              <a:t>Apply</a:t>
-            </a:r>
-            <a:endParaRPr lang="en-US" sz="1500" dirty="0"/>
-          </a:p>
-        </p:txBody>
-      </p:sp>
-      <p:sp>
-        <p:nvSpPr>
-          <p:cNvPr id="17" name="Shape 15"/>
-          <p:cNvSpPr/>
-          <p:nvPr/>
-        </p:nvSpPr>
-        <p:spPr>
-          <a:xfrm>
-            <a:off x="10213848" y="3730752"/>
-            <a:ext cx="1033272" cy="749808"/>
-          </a:xfrm>
-          <a:prstGeom prst="roundRect">
-            <a:avLst>
-              <a:gd name="adj" fmla="val 14634"/>
-            </a:avLst>
-          </a:prstGeom>
-          <a:solidFill>
-            <a:srgbClr val="6A4CA3"/>
-          </a:solidFill>
-          <a:ln w="12700">
-            <a:solidFill>
-              <a:srgbClr val="6A4CA3"/>
-            </a:solidFill>
-            <a:prstDash val="solid"/>
-          </a:ln>
-        </p:spPr>
-      </p:sp>
-      <p:sp>
-        <p:nvSpPr>
-          <p:cNvPr id="18" name="Text 16"/>
-          <p:cNvSpPr/>
-          <p:nvPr/>
-        </p:nvSpPr>
-        <p:spPr>
-          <a:xfrm>
-            <a:off x="10287000" y="3922776"/>
-            <a:ext cx="886968" cy="310896"/>
-          </a:xfrm>
-          <a:prstGeom prst="rect">
-            <a:avLst/>
-          </a:prstGeom>
-          <a:noFill/>
-          <a:ln/>
-        </p:spPr>
-        <p:txBody>
-          <a:bodyPr wrap="square" lIns="0" tIns="0" rIns="0" bIns="0" rtlCol="0" anchor="ctr">
-            <a:normAutofit/>
-          </a:bodyPr>
-          <a:lstStyle/>
-          <a:p>
-            <a:pPr algn="ctr" indent="0" marL="0">
-              <a:buNone/>
-            </a:pPr>
-            <a:r>
-              <a:rPr lang="en-US" sz="1500" b="1" dirty="0">
-                <a:solidFill>
-                  <a:srgbClr val="FFFFFF"/>
-                </a:solidFill>
-                <a:latin typeface="Aptos" pitchFamily="34" charset="0"/>
-                <a:ea typeface="Aptos" pitchFamily="34" charset="-122"/>
-                <a:cs typeface="Aptos" pitchFamily="34" charset="-120"/>
-              </a:rPr>
-              <a:t>Document</a:t>
-            </a:r>
-            <a:endParaRPr lang="en-US" sz="1500" dirty="0"/>
+            <a:r>
+              <a:rPr lang="en-US" sz="1380" dirty="0">
+                <a:solidFill>
+                  <a:srgbClr val="17364A"/>
+                </a:solidFill>
+                <a:latin typeface="Aptos" pitchFamily="34" charset="0"/>
+                <a:ea typeface="Aptos" pitchFamily="34" charset="-122"/>
+                <a:cs typeface="Aptos" pitchFamily="34" charset="-120"/>
+              </a:rPr>
+              <a:t>Read the module for shared vocabulary and context.</a:t>
+            </a:r>
+            <a:endParaRPr lang="en-US" sz="1380" dirty="0"/>
+          </a:p>
+          <a:p>
+            <a:r>
+              <a:rPr lang="en-US" sz="1380" dirty="0">
+                <a:solidFill>
+                  <a:srgbClr val="17364A"/>
+                </a:solidFill>
+                <a:latin typeface="Aptos" pitchFamily="34" charset="0"/>
+                <a:ea typeface="Aptos" pitchFamily="34" charset="-122"/>
+                <a:cs typeface="Aptos" pitchFamily="34" charset="-120"/>
+              </a:rPr>
+              <a:t>Complete the practical exercise to apply the concept.</a:t>
+            </a:r>
+            <a:endParaRPr lang="en-US" sz="1380" dirty="0"/>
+          </a:p>
+          <a:p>
+            <a:r>
+              <a:rPr lang="en-US" sz="1380" dirty="0">
+                <a:solidFill>
+                  <a:srgbClr val="17364A"/>
+                </a:solidFill>
+                <a:latin typeface="Aptos" pitchFamily="34" charset="0"/>
+                <a:ea typeface="Aptos" pitchFamily="34" charset="-122"/>
+                <a:cs typeface="Aptos" pitchFamily="34" charset="-120"/>
+              </a:rPr>
+              <a:t>Use the notes and references for deeper review.</a:t>
+            </a:r>
+            <a:endParaRPr lang="en-US" sz="1380" dirty="0"/>
           </a:p>
         </p:txBody>
       </p:sp>
@@ -12503,13 +11043,11 @@
             </a:avLst>
           </a:prstGeom>
           <a:solidFill>
-            <a:srgbClr val="FFFFFF">
-              <a:alpha val="88000"/>
-            </a:srgbClr>
+            <a:srgbClr val="FFFFFF"/>
           </a:solidFill>
           <a:ln w="12700">
             <a:solidFill>
-              <a:srgbClr val="D6E8F2"/>
+              <a:srgbClr val="B9D7E6"/>
             </a:solidFill>
             <a:prstDash val="solid"/>
           </a:ln>
@@ -12517,30 +11055,42 @@
       </p:sp>
       <p:sp>
         <p:nvSpPr>
-          <p:cNvPr id="14" name="Shape 12"/>
-          <p:cNvSpPr/>
-          <p:nvPr/>
-        </p:nvSpPr>
-        <p:spPr>
-          <a:xfrm>
-            <a:off x="7927848" y="3319272"/>
-            <a:ext cx="792480" cy="749808"/>
-          </a:xfrm>
-          <a:prstGeom prst="roundRect">
-            <a:avLst>
-              <a:gd name="adj" fmla="val 14634"/>
-            </a:avLst>
-          </a:prstGeom>
-          <a:solidFill>
-            <a:srgbClr val="0068B7"/>
-          </a:solidFill>
-          <a:ln w="12700">
-            <a:solidFill>
-              <a:srgbClr val="0068B7"/>
-            </a:solidFill>
-            <a:prstDash val="solid"/>
-          </a:ln>
-        </p:spPr>
+          <p:cNvPr id="14" name="Text 12"/>
+          <p:cNvSpPr/>
+          <p:nvPr/>
+        </p:nvSpPr>
+        <p:spPr>
+          <a:xfrm>
+            <a:off x="7799832" y="2935224"/>
+            <a:ext cx="3145536" cy="256032"/>
+          </a:xfrm>
+          <a:prstGeom prst="rect">
+            <a:avLst/>
+          </a:prstGeom>
+          <a:noFill/>
+          <a:ln/>
+        </p:spPr>
+        <p:txBody>
+          <a:bodyPr wrap="square" lIns="0" tIns="0" rIns="0" bIns="0" rtlCol="0" anchor="ctr"/>
+          <a:lstStyle/>
+          <a:p>
+            <a:pPr indent="0" marL="0">
+              <a:buNone/>
+            </a:pPr>
+            <a:r>
+              <a:rPr lang="en-US" sz="1300" b="1" dirty="0">
+                <a:solidFill>
+                  <a:srgbClr val="0068B7"/>
+                </a:solidFill>
+                <a:latin typeface="Aptos" pitchFamily="34" charset="0"/>
+                <a:ea typeface="Aptos" pitchFamily="34" charset="-122"/>
+                <a:cs typeface="Aptos" pitchFamily="34" charset="-120"/>
+              </a:rPr>
+              <a:t>Concept checkpoints</a:t>
+            </a:r>
+            <a:endParaRPr lang="en-US" sz="1300" dirty="0"/>
+          </a:p>
+        </p:txBody>
       </p:sp>
       <p:sp>
         <p:nvSpPr>
@@ -12550,240 +11100,39 @@
         </p:nvSpPr>
         <p:spPr>
           <a:xfrm>
-            <a:off x="8001000" y="3511296"/>
-            <a:ext cx="646176" cy="310896"/>
-          </a:xfrm>
-          <a:prstGeom prst="rect">
-            <a:avLst/>
-          </a:prstGeom>
-          <a:noFill/>
-          <a:ln/>
-        </p:spPr>
-        <p:txBody>
-          <a:bodyPr wrap="square" lIns="0" tIns="0" rIns="0" bIns="0" rtlCol="0" anchor="ctr">
+            <a:off x="7818120" y="3300984"/>
+            <a:ext cx="3090672" cy="877824"/>
+          </a:xfrm>
+          <a:prstGeom prst="rect">
+            <a:avLst/>
+          </a:prstGeom>
+          <a:noFill/>
+          <a:ln/>
+        </p:spPr>
+        <p:txBody>
+          <a:bodyPr wrap="square" lIns="254" tIns="254" rIns="254" bIns="254" rtlCol="0" anchor="t">
             <a:normAutofit/>
           </a:bodyPr>
           <a:lstStyle/>
           <a:p>
-            <a:pPr algn="ctr" indent="0" marL="0">
-              <a:buNone/>
-            </a:pPr>
-            <a:r>
-              <a:rPr lang="en-US" sz="1500" b="1" dirty="0">
-                <a:solidFill>
-                  <a:srgbClr val="FFFFFF"/>
-                </a:solidFill>
-                <a:latin typeface="Aptos" pitchFamily="34" charset="0"/>
-                <a:ea typeface="Aptos" pitchFamily="34" charset="-122"/>
-                <a:cs typeface="Aptos" pitchFamily="34" charset="-120"/>
-              </a:rPr>
-              <a:t>Plan</a:t>
-            </a:r>
-            <a:endParaRPr lang="en-US" sz="1500" dirty="0"/>
+            <a:r>
+              <a:rPr lang="en-US" sz="1380" dirty="0">
+                <a:solidFill>
+                  <a:srgbClr val="17364A"/>
+                </a:solidFill>
+                <a:latin typeface="Aptos" pitchFamily="34" charset="0"/>
+                <a:ea typeface="Aptos" pitchFamily="34" charset="-122"/>
+                <a:cs typeface="Aptos" pitchFamily="34" charset="-120"/>
+              </a:rPr>
+              <a:t>Human review and escalation plan</a:t>
+            </a:r>
+            <a:endParaRPr lang="en-US" sz="1380" dirty="0"/>
           </a:p>
         </p:txBody>
       </p:sp>
       <p:sp>
         <p:nvSpPr>
           <p:cNvPr id="16" name="Shape 14"/>
-          <p:cNvSpPr/>
-          <p:nvPr/>
-        </p:nvSpPr>
-        <p:spPr>
-          <a:xfrm>
-            <a:off x="8976360" y="3319272"/>
-            <a:ext cx="792480" cy="749808"/>
-          </a:xfrm>
-          <a:prstGeom prst="roundRect">
-            <a:avLst>
-              <a:gd name="adj" fmla="val 14634"/>
-            </a:avLst>
-          </a:prstGeom>
-          <a:solidFill>
-            <a:srgbClr val="2F8A28"/>
-          </a:solidFill>
-          <a:ln w="12700">
-            <a:solidFill>
-              <a:srgbClr val="2F8A28"/>
-            </a:solidFill>
-            <a:prstDash val="solid"/>
-          </a:ln>
-        </p:spPr>
-      </p:sp>
-      <p:sp>
-        <p:nvSpPr>
-          <p:cNvPr id="17" name="Text 15"/>
-          <p:cNvSpPr/>
-          <p:nvPr/>
-        </p:nvSpPr>
-        <p:spPr>
-          <a:xfrm>
-            <a:off x="9049512" y="3511296"/>
-            <a:ext cx="646176" cy="310896"/>
-          </a:xfrm>
-          <a:prstGeom prst="rect">
-            <a:avLst/>
-          </a:prstGeom>
-          <a:noFill/>
-          <a:ln/>
-        </p:spPr>
-        <p:txBody>
-          <a:bodyPr wrap="square" lIns="0" tIns="0" rIns="0" bIns="0" rtlCol="0" anchor="ctr">
-            <a:normAutofit/>
-          </a:bodyPr>
-          <a:lstStyle/>
-          <a:p>
-            <a:pPr algn="ctr" indent="0" marL="0">
-              <a:buNone/>
-            </a:pPr>
-            <a:r>
-              <a:rPr lang="en-US" sz="1500" b="1" dirty="0">
-                <a:solidFill>
-                  <a:srgbClr val="FFFFFF"/>
-                </a:solidFill>
-                <a:latin typeface="Aptos" pitchFamily="34" charset="0"/>
-                <a:ea typeface="Aptos" pitchFamily="34" charset="-122"/>
-                <a:cs typeface="Aptos" pitchFamily="34" charset="-120"/>
-              </a:rPr>
-              <a:t>Do</a:t>
-            </a:r>
-            <a:endParaRPr lang="en-US" sz="1500" dirty="0"/>
-          </a:p>
-        </p:txBody>
-      </p:sp>
-      <p:sp>
-        <p:nvSpPr>
-          <p:cNvPr id="18" name="Shape 16"/>
-          <p:cNvSpPr/>
-          <p:nvPr/>
-        </p:nvSpPr>
-        <p:spPr>
-          <a:xfrm>
-            <a:off x="10024872" y="3319272"/>
-            <a:ext cx="792480" cy="749808"/>
-          </a:xfrm>
-          <a:prstGeom prst="roundRect">
-            <a:avLst>
-              <a:gd name="adj" fmla="val 14634"/>
-            </a:avLst>
-          </a:prstGeom>
-          <a:solidFill>
-            <a:srgbClr val="D69A2D"/>
-          </a:solidFill>
-          <a:ln w="12700">
-            <a:solidFill>
-              <a:srgbClr val="D69A2D"/>
-            </a:solidFill>
-            <a:prstDash val="solid"/>
-          </a:ln>
-        </p:spPr>
-      </p:sp>
-      <p:sp>
-        <p:nvSpPr>
-          <p:cNvPr id="19" name="Text 17"/>
-          <p:cNvSpPr/>
-          <p:nvPr/>
-        </p:nvSpPr>
-        <p:spPr>
-          <a:xfrm>
-            <a:off x="10098024" y="3511296"/>
-            <a:ext cx="646176" cy="310896"/>
-          </a:xfrm>
-          <a:prstGeom prst="rect">
-            <a:avLst/>
-          </a:prstGeom>
-          <a:noFill/>
-          <a:ln/>
-        </p:spPr>
-        <p:txBody>
-          <a:bodyPr wrap="square" lIns="0" tIns="0" rIns="0" bIns="0" rtlCol="0" anchor="ctr">
-            <a:normAutofit/>
-          </a:bodyPr>
-          <a:lstStyle/>
-          <a:p>
-            <a:pPr algn="ctr" indent="0" marL="0">
-              <a:buNone/>
-            </a:pPr>
-            <a:r>
-              <a:rPr lang="en-US" sz="1500" b="1" dirty="0">
-                <a:solidFill>
-                  <a:srgbClr val="FFFFFF"/>
-                </a:solidFill>
-                <a:latin typeface="Aptos" pitchFamily="34" charset="0"/>
-                <a:ea typeface="Aptos" pitchFamily="34" charset="-122"/>
-                <a:cs typeface="Aptos" pitchFamily="34" charset="-120"/>
-              </a:rPr>
-              <a:t>Review</a:t>
-            </a:r>
-            <a:endParaRPr lang="en-US" sz="1500" dirty="0"/>
-          </a:p>
-        </p:txBody>
-      </p:sp>
-      <p:sp>
-        <p:nvSpPr>
-          <p:cNvPr id="20" name="Shape 18"/>
-          <p:cNvSpPr/>
-          <p:nvPr/>
-        </p:nvSpPr>
-        <p:spPr>
-          <a:xfrm>
-            <a:off x="8293608" y="4389120"/>
-            <a:ext cx="2157984" cy="0"/>
-          </a:xfrm>
-          <a:prstGeom prst="line">
-            <a:avLst/>
-          </a:prstGeom>
-          <a:noFill/>
-          <a:ln w="25400">
-            <a:solidFill>
-              <a:srgbClr val="8ABBD8"/>
-            </a:solidFill>
-            <a:prstDash val="solid"/>
-          </a:ln>
-        </p:spPr>
-      </p:sp>
-      <p:sp>
-        <p:nvSpPr>
-          <p:cNvPr id="21" name="Text 19"/>
-          <p:cNvSpPr/>
-          <p:nvPr/>
-        </p:nvSpPr>
-        <p:spPr>
-          <a:xfrm>
-            <a:off x="7909560" y="3977640"/>
-            <a:ext cx="2926080" cy="182880"/>
-          </a:xfrm>
-          <a:prstGeom prst="rect">
-            <a:avLst/>
-          </a:prstGeom>
-          <a:noFill/>
-          <a:ln/>
-        </p:spPr>
-        <p:txBody>
-          <a:bodyPr wrap="square" lIns="0" tIns="0" rIns="0" bIns="0" rtlCol="0" anchor="ctr"/>
-          <a:lstStyle/>
-          <a:p>
-            <a:pPr algn="ctr" indent="0" marL="0">
-              <a:buNone/>
-            </a:pPr>
-            <a:r>
-              <a:rPr lang="en-US" sz="1000" dirty="0">
-                <a:solidFill>
-                  <a:srgbClr val="003A63"/>
-                </a:solidFill>
-                <a:latin typeface="Aptos" pitchFamily="34" charset="0"/>
-                <a:ea typeface="Aptos" pitchFamily="34" charset="-122"/>
-                <a:cs typeface="Aptos" pitchFamily="34" charset="-120"/>
-              </a:rPr>
-              <a:t>Dependencies visible</a:t>
-            </a:r>
-            <a:endParaRPr lang="en-US" sz="1000" dirty="0"/>
-          </a:p>
-        </p:txBody>
-      </p:sp>
-      <p:sp>
-        <p:nvSpPr>
-          <p:cNvPr id="22" name="Shape 20"/>
           <p:cNvSpPr/>
           <p:nvPr/>
         </p:nvSpPr>
@@ -12810,7 +11159,7 @@
       </p:sp>
       <p:sp>
         <p:nvSpPr>
-          <p:cNvPr id="23" name="Text 21"/>
+          <p:cNvPr id="17" name="Text 15"/>
           <p:cNvSpPr/>
           <p:nvPr/>
         </p:nvSpPr>
@@ -12849,7 +11198,7 @@
       </p:sp>
       <p:sp>
         <p:nvSpPr>
-          <p:cNvPr id="24" name="Text 22"/>
+          <p:cNvPr id="18" name="Text 16"/>
           <p:cNvSpPr/>
           <p:nvPr/>
         </p:nvSpPr>
@@ -13357,13 +11706,11 @@
             </a:avLst>
           </a:prstGeom>
           <a:solidFill>
-            <a:srgbClr val="FFFFFF">
-              <a:alpha val="88000"/>
-            </a:srgbClr>
+            <a:srgbClr val="FFFFFF"/>
           </a:solidFill>
           <a:ln w="12700">
             <a:solidFill>
-              <a:srgbClr val="D6E8F2"/>
+              <a:srgbClr val="B9D7E6"/>
             </a:solidFill>
             <a:prstDash val="solid"/>
           </a:ln>
@@ -13371,30 +11718,42 @@
       </p:sp>
       <p:sp>
         <p:nvSpPr>
-          <p:cNvPr id="14" name="Shape 12"/>
-          <p:cNvSpPr/>
-          <p:nvPr/>
-        </p:nvSpPr>
-        <p:spPr>
-          <a:xfrm>
-            <a:off x="7927848" y="3319272"/>
-            <a:ext cx="792480" cy="749808"/>
-          </a:xfrm>
-          <a:prstGeom prst="roundRect">
-            <a:avLst>
-              <a:gd name="adj" fmla="val 14634"/>
-            </a:avLst>
-          </a:prstGeom>
-          <a:solidFill>
-            <a:srgbClr val="0068B7"/>
-          </a:solidFill>
-          <a:ln w="12700">
-            <a:solidFill>
-              <a:srgbClr val="0068B7"/>
-            </a:solidFill>
-            <a:prstDash val="solid"/>
-          </a:ln>
-        </p:spPr>
+          <p:cNvPr id="14" name="Text 12"/>
+          <p:cNvSpPr/>
+          <p:nvPr/>
+        </p:nvSpPr>
+        <p:spPr>
+          <a:xfrm>
+            <a:off x="7799832" y="2935224"/>
+            <a:ext cx="3145536" cy="256032"/>
+          </a:xfrm>
+          <a:prstGeom prst="rect">
+            <a:avLst/>
+          </a:prstGeom>
+          <a:noFill/>
+          <a:ln/>
+        </p:spPr>
+        <p:txBody>
+          <a:bodyPr wrap="square" lIns="0" tIns="0" rIns="0" bIns="0" rtlCol="0" anchor="ctr"/>
+          <a:lstStyle/>
+          <a:p>
+            <a:pPr indent="0" marL="0">
+              <a:buNone/>
+            </a:pPr>
+            <a:r>
+              <a:rPr lang="en-US" sz="1300" b="1" dirty="0">
+                <a:solidFill>
+                  <a:srgbClr val="0068B7"/>
+                </a:solidFill>
+                <a:latin typeface="Aptos" pitchFamily="34" charset="0"/>
+                <a:ea typeface="Aptos" pitchFamily="34" charset="-122"/>
+                <a:cs typeface="Aptos" pitchFamily="34" charset="-120"/>
+              </a:rPr>
+              <a:t>Concept checkpoints</a:t>
+            </a:r>
+            <a:endParaRPr lang="en-US" sz="1300" dirty="0"/>
+          </a:p>
+        </p:txBody>
       </p:sp>
       <p:sp>
         <p:nvSpPr>
@@ -13404,240 +11763,67 @@
         </p:nvSpPr>
         <p:spPr>
           <a:xfrm>
-            <a:off x="8001000" y="3511296"/>
-            <a:ext cx="646176" cy="310896"/>
-          </a:xfrm>
-          <a:prstGeom prst="rect">
-            <a:avLst/>
-          </a:prstGeom>
-          <a:noFill/>
-          <a:ln/>
-        </p:spPr>
-        <p:txBody>
-          <a:bodyPr wrap="square" lIns="0" tIns="0" rIns="0" bIns="0" rtlCol="0" anchor="ctr">
+            <a:off x="7818120" y="3300984"/>
+            <a:ext cx="3090672" cy="877824"/>
+          </a:xfrm>
+          <a:prstGeom prst="rect">
+            <a:avLst/>
+          </a:prstGeom>
+          <a:noFill/>
+          <a:ln/>
+        </p:spPr>
+        <p:txBody>
+          <a:bodyPr wrap="square" lIns="254" tIns="254" rIns="254" bIns="254" rtlCol="0" anchor="t">
             <a:normAutofit/>
           </a:bodyPr>
           <a:lstStyle/>
           <a:p>
-            <a:pPr algn="ctr" indent="0" marL="0">
-              <a:buNone/>
-            </a:pPr>
-            <a:r>
-              <a:rPr lang="en-US" sz="1500" b="1" dirty="0">
-                <a:solidFill>
-                  <a:srgbClr val="FFFFFF"/>
-                </a:solidFill>
-                <a:latin typeface="Aptos" pitchFamily="34" charset="0"/>
-                <a:ea typeface="Aptos" pitchFamily="34" charset="-122"/>
-                <a:cs typeface="Aptos" pitchFamily="34" charset="-120"/>
-              </a:rPr>
-              <a:t>Plan</a:t>
-            </a:r>
-            <a:endParaRPr lang="en-US" sz="1500" dirty="0"/>
+            <a:r>
+              <a:rPr lang="en-US" sz="1380" dirty="0">
+                <a:solidFill>
+                  <a:srgbClr val="17364A"/>
+                </a:solidFill>
+                <a:latin typeface="Aptos" pitchFamily="34" charset="0"/>
+                <a:ea typeface="Aptos" pitchFamily="34" charset="-122"/>
+                <a:cs typeface="Aptos" pitchFamily="34" charset="-120"/>
+              </a:rPr>
+              <a:t>eCR workflow map</a:t>
+            </a:r>
+            <a:endParaRPr lang="en-US" sz="1380" dirty="0"/>
+          </a:p>
+          <a:p>
+            <a:r>
+              <a:rPr lang="en-US" sz="1380" dirty="0">
+                <a:solidFill>
+                  <a:srgbClr val="17364A"/>
+                </a:solidFill>
+                <a:latin typeface="Aptos" pitchFamily="34" charset="0"/>
+                <a:ea typeface="Aptos" pitchFamily="34" charset="-122"/>
+                <a:cs typeface="Aptos" pitchFamily="34" charset="-120"/>
+              </a:rPr>
+              <a:t>AI-readiness checklist</a:t>
+            </a:r>
+            <a:endParaRPr lang="en-US" sz="1380" dirty="0"/>
+          </a:p>
+          <a:p>
+            <a:r>
+              <a:rPr lang="en-US" sz="1380" dirty="0">
+                <a:solidFill>
+                  <a:srgbClr val="17364A"/>
+                </a:solidFill>
+                <a:latin typeface="Aptos" pitchFamily="34" charset="0"/>
+                <a:ea typeface="Aptos" pitchFamily="34" charset="-122"/>
+                <a:cs typeface="Aptos" pitchFamily="34" charset="-120"/>
+              </a:rPr>
+              <a:t>Validation scenarios</a:t>
+            </a:r>
+            <a:endParaRPr lang="en-US" sz="1380" dirty="0"/>
           </a:p>
         </p:txBody>
       </p:sp>
       <p:sp>
         <p:nvSpPr>
           <p:cNvPr id="16" name="Shape 14"/>
-          <p:cNvSpPr/>
-          <p:nvPr/>
-        </p:nvSpPr>
-        <p:spPr>
-          <a:xfrm>
-            <a:off x="8976360" y="3319272"/>
-            <a:ext cx="792480" cy="749808"/>
-          </a:xfrm>
-          <a:prstGeom prst="roundRect">
-            <a:avLst>
-              <a:gd name="adj" fmla="val 14634"/>
-            </a:avLst>
-          </a:prstGeom>
-          <a:solidFill>
-            <a:srgbClr val="2F8A28"/>
-          </a:solidFill>
-          <a:ln w="12700">
-            <a:solidFill>
-              <a:srgbClr val="2F8A28"/>
-            </a:solidFill>
-            <a:prstDash val="solid"/>
-          </a:ln>
-        </p:spPr>
-      </p:sp>
-      <p:sp>
-        <p:nvSpPr>
-          <p:cNvPr id="17" name="Text 15"/>
-          <p:cNvSpPr/>
-          <p:nvPr/>
-        </p:nvSpPr>
-        <p:spPr>
-          <a:xfrm>
-            <a:off x="9049512" y="3511296"/>
-            <a:ext cx="646176" cy="310896"/>
-          </a:xfrm>
-          <a:prstGeom prst="rect">
-            <a:avLst/>
-          </a:prstGeom>
-          <a:noFill/>
-          <a:ln/>
-        </p:spPr>
-        <p:txBody>
-          <a:bodyPr wrap="square" lIns="0" tIns="0" rIns="0" bIns="0" rtlCol="0" anchor="ctr">
-            <a:normAutofit/>
-          </a:bodyPr>
-          <a:lstStyle/>
-          <a:p>
-            <a:pPr algn="ctr" indent="0" marL="0">
-              <a:buNone/>
-            </a:pPr>
-            <a:r>
-              <a:rPr lang="en-US" sz="1500" b="1" dirty="0">
-                <a:solidFill>
-                  <a:srgbClr val="FFFFFF"/>
-                </a:solidFill>
-                <a:latin typeface="Aptos" pitchFamily="34" charset="0"/>
-                <a:ea typeface="Aptos" pitchFamily="34" charset="-122"/>
-                <a:cs typeface="Aptos" pitchFamily="34" charset="-120"/>
-              </a:rPr>
-              <a:t>Do</a:t>
-            </a:r>
-            <a:endParaRPr lang="en-US" sz="1500" dirty="0"/>
-          </a:p>
-        </p:txBody>
-      </p:sp>
-      <p:sp>
-        <p:nvSpPr>
-          <p:cNvPr id="18" name="Shape 16"/>
-          <p:cNvSpPr/>
-          <p:nvPr/>
-        </p:nvSpPr>
-        <p:spPr>
-          <a:xfrm>
-            <a:off x="10024872" y="3319272"/>
-            <a:ext cx="792480" cy="749808"/>
-          </a:xfrm>
-          <a:prstGeom prst="roundRect">
-            <a:avLst>
-              <a:gd name="adj" fmla="val 14634"/>
-            </a:avLst>
-          </a:prstGeom>
-          <a:solidFill>
-            <a:srgbClr val="D69A2D"/>
-          </a:solidFill>
-          <a:ln w="12700">
-            <a:solidFill>
-              <a:srgbClr val="D69A2D"/>
-            </a:solidFill>
-            <a:prstDash val="solid"/>
-          </a:ln>
-        </p:spPr>
-      </p:sp>
-      <p:sp>
-        <p:nvSpPr>
-          <p:cNvPr id="19" name="Text 17"/>
-          <p:cNvSpPr/>
-          <p:nvPr/>
-        </p:nvSpPr>
-        <p:spPr>
-          <a:xfrm>
-            <a:off x="10098024" y="3511296"/>
-            <a:ext cx="646176" cy="310896"/>
-          </a:xfrm>
-          <a:prstGeom prst="rect">
-            <a:avLst/>
-          </a:prstGeom>
-          <a:noFill/>
-          <a:ln/>
-        </p:spPr>
-        <p:txBody>
-          <a:bodyPr wrap="square" lIns="0" tIns="0" rIns="0" bIns="0" rtlCol="0" anchor="ctr">
-            <a:normAutofit/>
-          </a:bodyPr>
-          <a:lstStyle/>
-          <a:p>
-            <a:pPr algn="ctr" indent="0" marL="0">
-              <a:buNone/>
-            </a:pPr>
-            <a:r>
-              <a:rPr lang="en-US" sz="1500" b="1" dirty="0">
-                <a:solidFill>
-                  <a:srgbClr val="FFFFFF"/>
-                </a:solidFill>
-                <a:latin typeface="Aptos" pitchFamily="34" charset="0"/>
-                <a:ea typeface="Aptos" pitchFamily="34" charset="-122"/>
-                <a:cs typeface="Aptos" pitchFamily="34" charset="-120"/>
-              </a:rPr>
-              <a:t>Review</a:t>
-            </a:r>
-            <a:endParaRPr lang="en-US" sz="1500" dirty="0"/>
-          </a:p>
-        </p:txBody>
-      </p:sp>
-      <p:sp>
-        <p:nvSpPr>
-          <p:cNvPr id="20" name="Shape 18"/>
-          <p:cNvSpPr/>
-          <p:nvPr/>
-        </p:nvSpPr>
-        <p:spPr>
-          <a:xfrm>
-            <a:off x="8293608" y="4389120"/>
-            <a:ext cx="2157984" cy="0"/>
-          </a:xfrm>
-          <a:prstGeom prst="line">
-            <a:avLst/>
-          </a:prstGeom>
-          <a:noFill/>
-          <a:ln w="25400">
-            <a:solidFill>
-              <a:srgbClr val="8ABBD8"/>
-            </a:solidFill>
-            <a:prstDash val="solid"/>
-          </a:ln>
-        </p:spPr>
-      </p:sp>
-      <p:sp>
-        <p:nvSpPr>
-          <p:cNvPr id="21" name="Text 19"/>
-          <p:cNvSpPr/>
-          <p:nvPr/>
-        </p:nvSpPr>
-        <p:spPr>
-          <a:xfrm>
-            <a:off x="7909560" y="3977640"/>
-            <a:ext cx="2926080" cy="182880"/>
-          </a:xfrm>
-          <a:prstGeom prst="rect">
-            <a:avLst/>
-          </a:prstGeom>
-          <a:noFill/>
-          <a:ln/>
-        </p:spPr>
-        <p:txBody>
-          <a:bodyPr wrap="square" lIns="0" tIns="0" rIns="0" bIns="0" rtlCol="0" anchor="ctr"/>
-          <a:lstStyle/>
-          <a:p>
-            <a:pPr algn="ctr" indent="0" marL="0">
-              <a:buNone/>
-            </a:pPr>
-            <a:r>
-              <a:rPr lang="en-US" sz="1000" dirty="0">
-                <a:solidFill>
-                  <a:srgbClr val="003A63"/>
-                </a:solidFill>
-                <a:latin typeface="Aptos" pitchFamily="34" charset="0"/>
-                <a:ea typeface="Aptos" pitchFamily="34" charset="-122"/>
-                <a:cs typeface="Aptos" pitchFamily="34" charset="-120"/>
-              </a:rPr>
-              <a:t>Dependencies visible</a:t>
-            </a:r>
-            <a:endParaRPr lang="en-US" sz="1000" dirty="0"/>
-          </a:p>
-        </p:txBody>
-      </p:sp>
-      <p:sp>
-        <p:nvSpPr>
-          <p:cNvPr id="22" name="Shape 20"/>
           <p:cNvSpPr/>
           <p:nvPr/>
         </p:nvSpPr>
@@ -13664,7 +11850,7 @@
       </p:sp>
       <p:sp>
         <p:nvSpPr>
-          <p:cNvPr id="23" name="Text 21"/>
+          <p:cNvPr id="17" name="Text 15"/>
           <p:cNvSpPr/>
           <p:nvPr/>
         </p:nvSpPr>
@@ -13703,7 +11889,7 @@
       </p:sp>
       <p:sp>
         <p:nvSpPr>
-          <p:cNvPr id="24" name="Text 22"/>
+          <p:cNvPr id="18" name="Text 16"/>
           <p:cNvSpPr/>
           <p:nvPr/>
         </p:nvSpPr>
@@ -14211,13 +12397,11 @@
             </a:avLst>
           </a:prstGeom>
           <a:solidFill>
-            <a:srgbClr val="FFFFFF">
-              <a:alpha val="88000"/>
-            </a:srgbClr>
+            <a:srgbClr val="FFFFFF"/>
           </a:solidFill>
           <a:ln w="12700">
             <a:solidFill>
-              <a:srgbClr val="D6E8F2"/>
+              <a:srgbClr val="B9D7E6"/>
             </a:solidFill>
             <a:prstDash val="solid"/>
           </a:ln>
@@ -14225,30 +12409,42 @@
       </p:sp>
       <p:sp>
         <p:nvSpPr>
-          <p:cNvPr id="14" name="Shape 12"/>
-          <p:cNvSpPr/>
-          <p:nvPr/>
-        </p:nvSpPr>
-        <p:spPr>
-          <a:xfrm>
-            <a:off x="7927848" y="3319272"/>
-            <a:ext cx="792480" cy="749808"/>
-          </a:xfrm>
-          <a:prstGeom prst="roundRect">
-            <a:avLst>
-              <a:gd name="adj" fmla="val 14634"/>
-            </a:avLst>
-          </a:prstGeom>
-          <a:solidFill>
-            <a:srgbClr val="0068B7"/>
-          </a:solidFill>
-          <a:ln w="12700">
-            <a:solidFill>
-              <a:srgbClr val="0068B7"/>
-            </a:solidFill>
-            <a:prstDash val="solid"/>
-          </a:ln>
-        </p:spPr>
+          <p:cNvPr id="14" name="Text 12"/>
+          <p:cNvSpPr/>
+          <p:nvPr/>
+        </p:nvSpPr>
+        <p:spPr>
+          <a:xfrm>
+            <a:off x="7799832" y="2935224"/>
+            <a:ext cx="3145536" cy="256032"/>
+          </a:xfrm>
+          <a:prstGeom prst="rect">
+            <a:avLst/>
+          </a:prstGeom>
+          <a:noFill/>
+          <a:ln/>
+        </p:spPr>
+        <p:txBody>
+          <a:bodyPr wrap="square" lIns="0" tIns="0" rIns="0" bIns="0" rtlCol="0" anchor="ctr"/>
+          <a:lstStyle/>
+          <a:p>
+            <a:pPr indent="0" marL="0">
+              <a:buNone/>
+            </a:pPr>
+            <a:r>
+              <a:rPr lang="en-US" sz="1300" b="1" dirty="0">
+                <a:solidFill>
+                  <a:srgbClr val="0068B7"/>
+                </a:solidFill>
+                <a:latin typeface="Aptos" pitchFamily="34" charset="0"/>
+                <a:ea typeface="Aptos" pitchFamily="34" charset="-122"/>
+                <a:cs typeface="Aptos" pitchFamily="34" charset="-120"/>
+              </a:rPr>
+              <a:t>Concept checkpoints</a:t>
+            </a:r>
+            <a:endParaRPr lang="en-US" sz="1300" dirty="0"/>
+          </a:p>
+        </p:txBody>
       </p:sp>
       <p:sp>
         <p:nvSpPr>
@@ -14258,240 +12454,67 @@
         </p:nvSpPr>
         <p:spPr>
           <a:xfrm>
-            <a:off x="8001000" y="3511296"/>
-            <a:ext cx="646176" cy="310896"/>
-          </a:xfrm>
-          <a:prstGeom prst="rect">
-            <a:avLst/>
-          </a:prstGeom>
-          <a:noFill/>
-          <a:ln/>
-        </p:spPr>
-        <p:txBody>
-          <a:bodyPr wrap="square" lIns="0" tIns="0" rIns="0" bIns="0" rtlCol="0" anchor="ctr">
+            <a:off x="7818120" y="3300984"/>
+            <a:ext cx="3090672" cy="877824"/>
+          </a:xfrm>
+          <a:prstGeom prst="rect">
+            <a:avLst/>
+          </a:prstGeom>
+          <a:noFill/>
+          <a:ln/>
+        </p:spPr>
+        <p:txBody>
+          <a:bodyPr wrap="square" lIns="254" tIns="254" rIns="254" bIns="254" rtlCol="0" anchor="t">
             <a:normAutofit/>
           </a:bodyPr>
           <a:lstStyle/>
           <a:p>
-            <a:pPr algn="ctr" indent="0" marL="0">
-              <a:buNone/>
-            </a:pPr>
-            <a:r>
-              <a:rPr lang="en-US" sz="1500" b="1" dirty="0">
-                <a:solidFill>
-                  <a:srgbClr val="FFFFFF"/>
-                </a:solidFill>
-                <a:latin typeface="Aptos" pitchFamily="34" charset="0"/>
-                <a:ea typeface="Aptos" pitchFamily="34" charset="-122"/>
-                <a:cs typeface="Aptos" pitchFamily="34" charset="-120"/>
-              </a:rPr>
-              <a:t>Plan</a:t>
-            </a:r>
-            <a:endParaRPr lang="en-US" sz="1500" dirty="0"/>
+            <a:r>
+              <a:rPr lang="en-US" sz="1380" dirty="0">
+                <a:solidFill>
+                  <a:srgbClr val="17364A"/>
+                </a:solidFill>
+                <a:latin typeface="Aptos" pitchFamily="34" charset="0"/>
+                <a:ea typeface="Aptos" pitchFamily="34" charset="-122"/>
+                <a:cs typeface="Aptos" pitchFamily="34" charset="-120"/>
+              </a:rPr>
+              <a:t>1.</a:t>
+            </a:r>
+            <a:endParaRPr lang="en-US" sz="1380" dirty="0"/>
+          </a:p>
+          <a:p>
+            <a:r>
+              <a:rPr lang="en-US" sz="1380" dirty="0">
+                <a:solidFill>
+                  <a:srgbClr val="17364A"/>
+                </a:solidFill>
+                <a:latin typeface="Aptos" pitchFamily="34" charset="0"/>
+                <a:ea typeface="Aptos" pitchFamily="34" charset="-122"/>
+                <a:cs typeface="Aptos" pitchFamily="34" charset="-120"/>
+              </a:rPr>
+              <a:t>What is eCR?</a:t>
+            </a:r>
+            <a:endParaRPr lang="en-US" sz="1380" dirty="0"/>
+          </a:p>
+          <a:p>
+            <a:r>
+              <a:rPr lang="en-US" sz="1380" dirty="0">
+                <a:solidFill>
+                  <a:srgbClr val="17364A"/>
+                </a:solidFill>
+                <a:latin typeface="Aptos" pitchFamily="34" charset="0"/>
+                <a:ea typeface="Aptos" pitchFamily="34" charset="-122"/>
+                <a:cs typeface="Aptos" pitchFamily="34" charset="-120"/>
+              </a:rPr>
+              <a:t>2.</a:t>
+            </a:r>
+            <a:endParaRPr lang="en-US" sz="1380" dirty="0"/>
           </a:p>
         </p:txBody>
       </p:sp>
       <p:sp>
         <p:nvSpPr>
           <p:cNvPr id="16" name="Shape 14"/>
-          <p:cNvSpPr/>
-          <p:nvPr/>
-        </p:nvSpPr>
-        <p:spPr>
-          <a:xfrm>
-            <a:off x="8976360" y="3319272"/>
-            <a:ext cx="792480" cy="749808"/>
-          </a:xfrm>
-          <a:prstGeom prst="roundRect">
-            <a:avLst>
-              <a:gd name="adj" fmla="val 14634"/>
-            </a:avLst>
-          </a:prstGeom>
-          <a:solidFill>
-            <a:srgbClr val="2F8A28"/>
-          </a:solidFill>
-          <a:ln w="12700">
-            <a:solidFill>
-              <a:srgbClr val="2F8A28"/>
-            </a:solidFill>
-            <a:prstDash val="solid"/>
-          </a:ln>
-        </p:spPr>
-      </p:sp>
-      <p:sp>
-        <p:nvSpPr>
-          <p:cNvPr id="17" name="Text 15"/>
-          <p:cNvSpPr/>
-          <p:nvPr/>
-        </p:nvSpPr>
-        <p:spPr>
-          <a:xfrm>
-            <a:off x="9049512" y="3511296"/>
-            <a:ext cx="646176" cy="310896"/>
-          </a:xfrm>
-          <a:prstGeom prst="rect">
-            <a:avLst/>
-          </a:prstGeom>
-          <a:noFill/>
-          <a:ln/>
-        </p:spPr>
-        <p:txBody>
-          <a:bodyPr wrap="square" lIns="0" tIns="0" rIns="0" bIns="0" rtlCol="0" anchor="ctr">
-            <a:normAutofit/>
-          </a:bodyPr>
-          <a:lstStyle/>
-          <a:p>
-            <a:pPr algn="ctr" indent="0" marL="0">
-              <a:buNone/>
-            </a:pPr>
-            <a:r>
-              <a:rPr lang="en-US" sz="1500" b="1" dirty="0">
-                <a:solidFill>
-                  <a:srgbClr val="FFFFFF"/>
-                </a:solidFill>
-                <a:latin typeface="Aptos" pitchFamily="34" charset="0"/>
-                <a:ea typeface="Aptos" pitchFamily="34" charset="-122"/>
-                <a:cs typeface="Aptos" pitchFamily="34" charset="-120"/>
-              </a:rPr>
-              <a:t>Do</a:t>
-            </a:r>
-            <a:endParaRPr lang="en-US" sz="1500" dirty="0"/>
-          </a:p>
-        </p:txBody>
-      </p:sp>
-      <p:sp>
-        <p:nvSpPr>
-          <p:cNvPr id="18" name="Shape 16"/>
-          <p:cNvSpPr/>
-          <p:nvPr/>
-        </p:nvSpPr>
-        <p:spPr>
-          <a:xfrm>
-            <a:off x="10024872" y="3319272"/>
-            <a:ext cx="792480" cy="749808"/>
-          </a:xfrm>
-          <a:prstGeom prst="roundRect">
-            <a:avLst>
-              <a:gd name="adj" fmla="val 14634"/>
-            </a:avLst>
-          </a:prstGeom>
-          <a:solidFill>
-            <a:srgbClr val="D69A2D"/>
-          </a:solidFill>
-          <a:ln w="12700">
-            <a:solidFill>
-              <a:srgbClr val="D69A2D"/>
-            </a:solidFill>
-            <a:prstDash val="solid"/>
-          </a:ln>
-        </p:spPr>
-      </p:sp>
-      <p:sp>
-        <p:nvSpPr>
-          <p:cNvPr id="19" name="Text 17"/>
-          <p:cNvSpPr/>
-          <p:nvPr/>
-        </p:nvSpPr>
-        <p:spPr>
-          <a:xfrm>
-            <a:off x="10098024" y="3511296"/>
-            <a:ext cx="646176" cy="310896"/>
-          </a:xfrm>
-          <a:prstGeom prst="rect">
-            <a:avLst/>
-          </a:prstGeom>
-          <a:noFill/>
-          <a:ln/>
-        </p:spPr>
-        <p:txBody>
-          <a:bodyPr wrap="square" lIns="0" tIns="0" rIns="0" bIns="0" rtlCol="0" anchor="ctr">
-            <a:normAutofit/>
-          </a:bodyPr>
-          <a:lstStyle/>
-          <a:p>
-            <a:pPr algn="ctr" indent="0" marL="0">
-              <a:buNone/>
-            </a:pPr>
-            <a:r>
-              <a:rPr lang="en-US" sz="1500" b="1" dirty="0">
-                <a:solidFill>
-                  <a:srgbClr val="FFFFFF"/>
-                </a:solidFill>
-                <a:latin typeface="Aptos" pitchFamily="34" charset="0"/>
-                <a:ea typeface="Aptos" pitchFamily="34" charset="-122"/>
-                <a:cs typeface="Aptos" pitchFamily="34" charset="-120"/>
-              </a:rPr>
-              <a:t>Review</a:t>
-            </a:r>
-            <a:endParaRPr lang="en-US" sz="1500" dirty="0"/>
-          </a:p>
-        </p:txBody>
-      </p:sp>
-      <p:sp>
-        <p:nvSpPr>
-          <p:cNvPr id="20" name="Shape 18"/>
-          <p:cNvSpPr/>
-          <p:nvPr/>
-        </p:nvSpPr>
-        <p:spPr>
-          <a:xfrm>
-            <a:off x="8293608" y="4389120"/>
-            <a:ext cx="2157984" cy="0"/>
-          </a:xfrm>
-          <a:prstGeom prst="line">
-            <a:avLst/>
-          </a:prstGeom>
-          <a:noFill/>
-          <a:ln w="25400">
-            <a:solidFill>
-              <a:srgbClr val="8ABBD8"/>
-            </a:solidFill>
-            <a:prstDash val="solid"/>
-          </a:ln>
-        </p:spPr>
-      </p:sp>
-      <p:sp>
-        <p:nvSpPr>
-          <p:cNvPr id="21" name="Text 19"/>
-          <p:cNvSpPr/>
-          <p:nvPr/>
-        </p:nvSpPr>
-        <p:spPr>
-          <a:xfrm>
-            <a:off x="7909560" y="3977640"/>
-            <a:ext cx="2926080" cy="182880"/>
-          </a:xfrm>
-          <a:prstGeom prst="rect">
-            <a:avLst/>
-          </a:prstGeom>
-          <a:noFill/>
-          <a:ln/>
-        </p:spPr>
-        <p:txBody>
-          <a:bodyPr wrap="square" lIns="0" tIns="0" rIns="0" bIns="0" rtlCol="0" anchor="ctr"/>
-          <a:lstStyle/>
-          <a:p>
-            <a:pPr algn="ctr" indent="0" marL="0">
-              <a:buNone/>
-            </a:pPr>
-            <a:r>
-              <a:rPr lang="en-US" sz="1000" dirty="0">
-                <a:solidFill>
-                  <a:srgbClr val="003A63"/>
-                </a:solidFill>
-                <a:latin typeface="Aptos" pitchFamily="34" charset="0"/>
-                <a:ea typeface="Aptos" pitchFamily="34" charset="-122"/>
-                <a:cs typeface="Aptos" pitchFamily="34" charset="-120"/>
-              </a:rPr>
-              <a:t>Dependencies visible</a:t>
-            </a:r>
-            <a:endParaRPr lang="en-US" sz="1000" dirty="0"/>
-          </a:p>
-        </p:txBody>
-      </p:sp>
-      <p:sp>
-        <p:nvSpPr>
-          <p:cNvPr id="22" name="Shape 20"/>
           <p:cNvSpPr/>
           <p:nvPr/>
         </p:nvSpPr>
@@ -14518,7 +12541,7 @@
       </p:sp>
       <p:sp>
         <p:nvSpPr>
-          <p:cNvPr id="23" name="Text 21"/>
+          <p:cNvPr id="17" name="Text 15"/>
           <p:cNvSpPr/>
           <p:nvPr/>
         </p:nvSpPr>
@@ -14557,7 +12580,7 @@
       </p:sp>
       <p:sp>
         <p:nvSpPr>
-          <p:cNvPr id="24" name="Text 22"/>
+          <p:cNvPr id="18" name="Text 16"/>
           <p:cNvSpPr/>
           <p:nvPr/>
         </p:nvSpPr>
@@ -15065,13 +13088,11 @@
             </a:avLst>
           </a:prstGeom>
           <a:solidFill>
-            <a:srgbClr val="FFFFFF">
-              <a:alpha val="88000"/>
-            </a:srgbClr>
+            <a:srgbClr val="FFFFFF"/>
           </a:solidFill>
           <a:ln w="12700">
             <a:solidFill>
-              <a:srgbClr val="D6E8F2"/>
+              <a:srgbClr val="B9D7E6"/>
             </a:solidFill>
             <a:prstDash val="solid"/>
           </a:ln>
@@ -15079,30 +13100,42 @@
       </p:sp>
       <p:sp>
         <p:nvSpPr>
-          <p:cNvPr id="14" name="Shape 12"/>
-          <p:cNvSpPr/>
-          <p:nvPr/>
-        </p:nvSpPr>
-        <p:spPr>
-          <a:xfrm>
-            <a:off x="7927848" y="3319272"/>
-            <a:ext cx="792480" cy="749808"/>
-          </a:xfrm>
-          <a:prstGeom prst="roundRect">
-            <a:avLst>
-              <a:gd name="adj" fmla="val 14634"/>
-            </a:avLst>
-          </a:prstGeom>
-          <a:solidFill>
-            <a:srgbClr val="0068B7"/>
-          </a:solidFill>
-          <a:ln w="12700">
-            <a:solidFill>
-              <a:srgbClr val="0068B7"/>
-            </a:solidFill>
-            <a:prstDash val="solid"/>
-          </a:ln>
-        </p:spPr>
+          <p:cNvPr id="14" name="Text 12"/>
+          <p:cNvSpPr/>
+          <p:nvPr/>
+        </p:nvSpPr>
+        <p:spPr>
+          <a:xfrm>
+            <a:off x="7799832" y="2935224"/>
+            <a:ext cx="3145536" cy="256032"/>
+          </a:xfrm>
+          <a:prstGeom prst="rect">
+            <a:avLst/>
+          </a:prstGeom>
+          <a:noFill/>
+          <a:ln/>
+        </p:spPr>
+        <p:txBody>
+          <a:bodyPr wrap="square" lIns="0" tIns="0" rIns="0" bIns="0" rtlCol="0" anchor="ctr"/>
+          <a:lstStyle/>
+          <a:p>
+            <a:pPr indent="0" marL="0">
+              <a:buNone/>
+            </a:pPr>
+            <a:r>
+              <a:rPr lang="en-US" sz="1300" b="1" dirty="0">
+                <a:solidFill>
+                  <a:srgbClr val="0068B7"/>
+                </a:solidFill>
+                <a:latin typeface="Aptos" pitchFamily="34" charset="0"/>
+                <a:ea typeface="Aptos" pitchFamily="34" charset="-122"/>
+                <a:cs typeface="Aptos" pitchFamily="34" charset="-120"/>
+              </a:rPr>
+              <a:t>Concept checkpoints</a:t>
+            </a:r>
+            <a:endParaRPr lang="en-US" sz="1300" dirty="0"/>
+          </a:p>
+        </p:txBody>
       </p:sp>
       <p:sp>
         <p:nvSpPr>
@@ -15112,240 +13145,67 @@
         </p:nvSpPr>
         <p:spPr>
           <a:xfrm>
-            <a:off x="8001000" y="3511296"/>
-            <a:ext cx="646176" cy="310896"/>
-          </a:xfrm>
-          <a:prstGeom prst="rect">
-            <a:avLst/>
-          </a:prstGeom>
-          <a:noFill/>
-          <a:ln/>
-        </p:spPr>
-        <p:txBody>
-          <a:bodyPr wrap="square" lIns="0" tIns="0" rIns="0" bIns="0" rtlCol="0" anchor="ctr">
+            <a:off x="7818120" y="3300984"/>
+            <a:ext cx="3090672" cy="877824"/>
+          </a:xfrm>
+          <a:prstGeom prst="rect">
+            <a:avLst/>
+          </a:prstGeom>
+          <a:noFill/>
+          <a:ln/>
+        </p:spPr>
+        <p:txBody>
+          <a:bodyPr wrap="square" lIns="254" tIns="254" rIns="254" bIns="254" rtlCol="0" anchor="t">
             <a:normAutofit/>
           </a:bodyPr>
           <a:lstStyle/>
           <a:p>
-            <a:pPr algn="ctr" indent="0" marL="0">
-              <a:buNone/>
-            </a:pPr>
-            <a:r>
-              <a:rPr lang="en-US" sz="1500" b="1" dirty="0">
-                <a:solidFill>
-                  <a:srgbClr val="FFFFFF"/>
-                </a:solidFill>
-                <a:latin typeface="Aptos" pitchFamily="34" charset="0"/>
-                <a:ea typeface="Aptos" pitchFamily="34" charset="-122"/>
-                <a:cs typeface="Aptos" pitchFamily="34" charset="-120"/>
-              </a:rPr>
-              <a:t>Plan</a:t>
-            </a:r>
-            <a:endParaRPr lang="en-US" sz="1500" dirty="0"/>
+            <a:r>
+              <a:rPr lang="en-US" sz="1380" dirty="0">
+                <a:solidFill>
+                  <a:srgbClr val="17364A"/>
+                </a:solidFill>
+                <a:latin typeface="Aptos" pitchFamily="34" charset="0"/>
+                <a:ea typeface="Aptos" pitchFamily="34" charset="-122"/>
+                <a:cs typeface="Aptos" pitchFamily="34" charset="-120"/>
+              </a:rPr>
+              <a:t>CDC Electronic Case Reporting resources: https://www.cdc.gov/ecr/php/index.html</a:t>
+            </a:r>
+            <a:endParaRPr lang="en-US" sz="1380" dirty="0"/>
+          </a:p>
+          <a:p>
+            <a:r>
+              <a:rPr lang="en-US" sz="1380" dirty="0">
+                <a:solidFill>
+                  <a:srgbClr val="17364A"/>
+                </a:solidFill>
+                <a:latin typeface="Aptos" pitchFamily="34" charset="0"/>
+                <a:ea typeface="Aptos" pitchFamily="34" charset="-122"/>
+                <a:cs typeface="Aptos" pitchFamily="34" charset="-120"/>
+              </a:rPr>
+              <a:t>AIMS eCR triggering documentation: https://ecr.aimsplatform.org/ehr-implementers/triggering/</a:t>
+            </a:r>
+            <a:endParaRPr lang="en-US" sz="1380" dirty="0"/>
+          </a:p>
+          <a:p>
+            <a:r>
+              <a:rPr lang="en-US" sz="1380" dirty="0">
+                <a:solidFill>
+                  <a:srgbClr val="17364A"/>
+                </a:solidFill>
+                <a:latin typeface="Aptos" pitchFamily="34" charset="0"/>
+                <a:ea typeface="Aptos" pitchFamily="34" charset="-122"/>
+                <a:cs typeface="Aptos" pitchFamily="34" charset="-120"/>
+              </a:rPr>
+              <a:t>HL7 eCR FHIR Implementation Guide: https://hl7.org/fhir/us/ecr/</a:t>
+            </a:r>
+            <a:endParaRPr lang="en-US" sz="1380" dirty="0"/>
           </a:p>
         </p:txBody>
       </p:sp>
       <p:sp>
         <p:nvSpPr>
           <p:cNvPr id="16" name="Shape 14"/>
-          <p:cNvSpPr/>
-          <p:nvPr/>
-        </p:nvSpPr>
-        <p:spPr>
-          <a:xfrm>
-            <a:off x="8976360" y="3319272"/>
-            <a:ext cx="792480" cy="749808"/>
-          </a:xfrm>
-          <a:prstGeom prst="roundRect">
-            <a:avLst>
-              <a:gd name="adj" fmla="val 14634"/>
-            </a:avLst>
-          </a:prstGeom>
-          <a:solidFill>
-            <a:srgbClr val="2F8A28"/>
-          </a:solidFill>
-          <a:ln w="12700">
-            <a:solidFill>
-              <a:srgbClr val="2F8A28"/>
-            </a:solidFill>
-            <a:prstDash val="solid"/>
-          </a:ln>
-        </p:spPr>
-      </p:sp>
-      <p:sp>
-        <p:nvSpPr>
-          <p:cNvPr id="17" name="Text 15"/>
-          <p:cNvSpPr/>
-          <p:nvPr/>
-        </p:nvSpPr>
-        <p:spPr>
-          <a:xfrm>
-            <a:off x="9049512" y="3511296"/>
-            <a:ext cx="646176" cy="310896"/>
-          </a:xfrm>
-          <a:prstGeom prst="rect">
-            <a:avLst/>
-          </a:prstGeom>
-          <a:noFill/>
-          <a:ln/>
-        </p:spPr>
-        <p:txBody>
-          <a:bodyPr wrap="square" lIns="0" tIns="0" rIns="0" bIns="0" rtlCol="0" anchor="ctr">
-            <a:normAutofit/>
-          </a:bodyPr>
-          <a:lstStyle/>
-          <a:p>
-            <a:pPr algn="ctr" indent="0" marL="0">
-              <a:buNone/>
-            </a:pPr>
-            <a:r>
-              <a:rPr lang="en-US" sz="1500" b="1" dirty="0">
-                <a:solidFill>
-                  <a:srgbClr val="FFFFFF"/>
-                </a:solidFill>
-                <a:latin typeface="Aptos" pitchFamily="34" charset="0"/>
-                <a:ea typeface="Aptos" pitchFamily="34" charset="-122"/>
-                <a:cs typeface="Aptos" pitchFamily="34" charset="-120"/>
-              </a:rPr>
-              <a:t>Do</a:t>
-            </a:r>
-            <a:endParaRPr lang="en-US" sz="1500" dirty="0"/>
-          </a:p>
-        </p:txBody>
-      </p:sp>
-      <p:sp>
-        <p:nvSpPr>
-          <p:cNvPr id="18" name="Shape 16"/>
-          <p:cNvSpPr/>
-          <p:nvPr/>
-        </p:nvSpPr>
-        <p:spPr>
-          <a:xfrm>
-            <a:off x="10024872" y="3319272"/>
-            <a:ext cx="792480" cy="749808"/>
-          </a:xfrm>
-          <a:prstGeom prst="roundRect">
-            <a:avLst>
-              <a:gd name="adj" fmla="val 14634"/>
-            </a:avLst>
-          </a:prstGeom>
-          <a:solidFill>
-            <a:srgbClr val="D69A2D"/>
-          </a:solidFill>
-          <a:ln w="12700">
-            <a:solidFill>
-              <a:srgbClr val="D69A2D"/>
-            </a:solidFill>
-            <a:prstDash val="solid"/>
-          </a:ln>
-        </p:spPr>
-      </p:sp>
-      <p:sp>
-        <p:nvSpPr>
-          <p:cNvPr id="19" name="Text 17"/>
-          <p:cNvSpPr/>
-          <p:nvPr/>
-        </p:nvSpPr>
-        <p:spPr>
-          <a:xfrm>
-            <a:off x="10098024" y="3511296"/>
-            <a:ext cx="646176" cy="310896"/>
-          </a:xfrm>
-          <a:prstGeom prst="rect">
-            <a:avLst/>
-          </a:prstGeom>
-          <a:noFill/>
-          <a:ln/>
-        </p:spPr>
-        <p:txBody>
-          <a:bodyPr wrap="square" lIns="0" tIns="0" rIns="0" bIns="0" rtlCol="0" anchor="ctr">
-            <a:normAutofit/>
-          </a:bodyPr>
-          <a:lstStyle/>
-          <a:p>
-            <a:pPr algn="ctr" indent="0" marL="0">
-              <a:buNone/>
-            </a:pPr>
-            <a:r>
-              <a:rPr lang="en-US" sz="1500" b="1" dirty="0">
-                <a:solidFill>
-                  <a:srgbClr val="FFFFFF"/>
-                </a:solidFill>
-                <a:latin typeface="Aptos" pitchFamily="34" charset="0"/>
-                <a:ea typeface="Aptos" pitchFamily="34" charset="-122"/>
-                <a:cs typeface="Aptos" pitchFamily="34" charset="-120"/>
-              </a:rPr>
-              <a:t>Review</a:t>
-            </a:r>
-            <a:endParaRPr lang="en-US" sz="1500" dirty="0"/>
-          </a:p>
-        </p:txBody>
-      </p:sp>
-      <p:sp>
-        <p:nvSpPr>
-          <p:cNvPr id="20" name="Shape 18"/>
-          <p:cNvSpPr/>
-          <p:nvPr/>
-        </p:nvSpPr>
-        <p:spPr>
-          <a:xfrm>
-            <a:off x="8293608" y="4389120"/>
-            <a:ext cx="2157984" cy="0"/>
-          </a:xfrm>
-          <a:prstGeom prst="line">
-            <a:avLst/>
-          </a:prstGeom>
-          <a:noFill/>
-          <a:ln w="25400">
-            <a:solidFill>
-              <a:srgbClr val="8ABBD8"/>
-            </a:solidFill>
-            <a:prstDash val="solid"/>
-          </a:ln>
-        </p:spPr>
-      </p:sp>
-      <p:sp>
-        <p:nvSpPr>
-          <p:cNvPr id="21" name="Text 19"/>
-          <p:cNvSpPr/>
-          <p:nvPr/>
-        </p:nvSpPr>
-        <p:spPr>
-          <a:xfrm>
-            <a:off x="7909560" y="3977640"/>
-            <a:ext cx="2926080" cy="182880"/>
-          </a:xfrm>
-          <a:prstGeom prst="rect">
-            <a:avLst/>
-          </a:prstGeom>
-          <a:noFill/>
-          <a:ln/>
-        </p:spPr>
-        <p:txBody>
-          <a:bodyPr wrap="square" lIns="0" tIns="0" rIns="0" bIns="0" rtlCol="0" anchor="ctr"/>
-          <a:lstStyle/>
-          <a:p>
-            <a:pPr algn="ctr" indent="0" marL="0">
-              <a:buNone/>
-            </a:pPr>
-            <a:r>
-              <a:rPr lang="en-US" sz="1000" dirty="0">
-                <a:solidFill>
-                  <a:srgbClr val="003A63"/>
-                </a:solidFill>
-                <a:latin typeface="Aptos" pitchFamily="34" charset="0"/>
-                <a:ea typeface="Aptos" pitchFamily="34" charset="-122"/>
-                <a:cs typeface="Aptos" pitchFamily="34" charset="-120"/>
-              </a:rPr>
-              <a:t>Dependencies visible</a:t>
-            </a:r>
-            <a:endParaRPr lang="en-US" sz="1000" dirty="0"/>
-          </a:p>
-        </p:txBody>
-      </p:sp>
-      <p:sp>
-        <p:nvSpPr>
-          <p:cNvPr id="22" name="Shape 20"/>
           <p:cNvSpPr/>
           <p:nvPr/>
         </p:nvSpPr>
@@ -15372,7 +13232,7 @@
       </p:sp>
       <p:sp>
         <p:nvSpPr>
-          <p:cNvPr id="23" name="Text 21"/>
+          <p:cNvPr id="17" name="Text 15"/>
           <p:cNvSpPr/>
           <p:nvPr/>
         </p:nvSpPr>
@@ -15411,7 +13271,7 @@
       </p:sp>
       <p:sp>
         <p:nvSpPr>
-          <p:cNvPr id="24" name="Text 22"/>
+          <p:cNvPr id="18" name="Text 16"/>
           <p:cNvSpPr/>
           <p:nvPr/>
         </p:nvSpPr>
@@ -15924,20 +13784,20 @@
         </p:nvSpPr>
         <p:spPr>
           <a:xfrm>
-            <a:off x="7818120" y="3977640"/>
-            <a:ext cx="972312" cy="749808"/>
+            <a:off x="8046720" y="3794760"/>
+            <a:ext cx="3063240" cy="1600200"/>
           </a:xfrm>
           <a:prstGeom prst="roundRect">
             <a:avLst>
-              <a:gd name="adj" fmla="val 14634"/>
+              <a:gd name="adj" fmla="val 6857"/>
             </a:avLst>
           </a:prstGeom>
           <a:solidFill>
-            <a:srgbClr val="0068B7"/>
+            <a:srgbClr val="FFFFFF"/>
           </a:solidFill>
           <a:ln w="12700">
             <a:solidFill>
-              <a:srgbClr val="0068B7"/>
+              <a:srgbClr val="B9D7E6"/>
             </a:solidFill>
             <a:prstDash val="solid"/>
           </a:ln>
@@ -15951,172 +13811,100 @@
         </p:nvSpPr>
         <p:spPr>
           <a:xfrm>
-            <a:off x="7891272" y="4169664"/>
-            <a:ext cx="826008" cy="310896"/>
-          </a:xfrm>
-          <a:prstGeom prst="rect">
-            <a:avLst/>
-          </a:prstGeom>
-          <a:noFill/>
-          <a:ln/>
-        </p:spPr>
-        <p:txBody>
-          <a:bodyPr wrap="square" lIns="0" tIns="0" rIns="0" bIns="0" rtlCol="0" anchor="ctr">
+            <a:off x="8211312" y="3941064"/>
+            <a:ext cx="2734056" cy="256032"/>
+          </a:xfrm>
+          <a:prstGeom prst="rect">
+            <a:avLst/>
+          </a:prstGeom>
+          <a:noFill/>
+          <a:ln/>
+        </p:spPr>
+        <p:txBody>
+          <a:bodyPr wrap="square" lIns="0" tIns="0" rIns="0" bIns="0" rtlCol="0" anchor="ctr"/>
+          <a:lstStyle/>
+          <a:p>
+            <a:pPr indent="0" marL="0">
+              <a:buNone/>
+            </a:pPr>
+            <a:r>
+              <a:rPr lang="en-US" sz="1300" b="1" dirty="0">
+                <a:solidFill>
+                  <a:srgbClr val="0068B7"/>
+                </a:solidFill>
+                <a:latin typeface="Aptos" pitchFamily="34" charset="0"/>
+                <a:ea typeface="Aptos" pitchFamily="34" charset="-122"/>
+                <a:cs typeface="Aptos" pitchFamily="34" charset="-120"/>
+              </a:rPr>
+              <a:t>Use the play links to</a:t>
+            </a:r>
+            <a:endParaRPr lang="en-US" sz="1300" dirty="0"/>
+          </a:p>
+        </p:txBody>
+      </p:sp>
+      <p:sp>
+        <p:nvSpPr>
+          <p:cNvPr id="15" name="Text 13"/>
+          <p:cNvSpPr/>
+          <p:nvPr/>
+        </p:nvSpPr>
+        <p:spPr>
+          <a:xfrm>
+            <a:off x="8229600" y="4306824"/>
+            <a:ext cx="2679192" cy="941832"/>
+          </a:xfrm>
+          <a:prstGeom prst="rect">
+            <a:avLst/>
+          </a:prstGeom>
+          <a:noFill/>
+          <a:ln/>
+        </p:spPr>
+        <p:txBody>
+          <a:bodyPr wrap="square" lIns="254" tIns="254" rIns="254" bIns="254" rtlCol="0" anchor="t">
             <a:normAutofit/>
           </a:bodyPr>
           <a:lstStyle/>
           <a:p>
-            <a:pPr algn="ctr" indent="0" marL="0">
-              <a:buNone/>
-            </a:pPr>
-            <a:r>
-              <a:rPr lang="en-US" sz="1500" b="1" dirty="0">
-                <a:solidFill>
-                  <a:srgbClr val="FFFFFF"/>
-                </a:solidFill>
-                <a:latin typeface="Aptos" pitchFamily="34" charset="0"/>
-                <a:ea typeface="Aptos" pitchFamily="34" charset="-122"/>
-                <a:cs typeface="Aptos" pitchFamily="34" charset="-120"/>
-              </a:rPr>
-              <a:t>Lesson</a:t>
-            </a:r>
-            <a:endParaRPr lang="en-US" sz="1500" dirty="0"/>
-          </a:p>
-        </p:txBody>
-      </p:sp>
-      <p:sp>
-        <p:nvSpPr>
-          <p:cNvPr id="15" name="Shape 13"/>
-          <p:cNvSpPr/>
-          <p:nvPr/>
-        </p:nvSpPr>
-        <p:spPr>
-          <a:xfrm>
-            <a:off x="9046464" y="3977640"/>
-            <a:ext cx="972312" cy="749808"/>
-          </a:xfrm>
-          <a:prstGeom prst="roundRect">
-            <a:avLst>
-              <a:gd name="adj" fmla="val 14634"/>
-            </a:avLst>
-          </a:prstGeom>
-          <a:solidFill>
-            <a:srgbClr val="2F8A28"/>
-          </a:solidFill>
-          <a:ln w="12700">
-            <a:solidFill>
-              <a:srgbClr val="2F8A28"/>
-            </a:solidFill>
-            <a:prstDash val="solid"/>
-          </a:ln>
-        </p:spPr>
-      </p:sp>
-      <p:sp>
-        <p:nvSpPr>
-          <p:cNvPr id="16" name="Text 14"/>
-          <p:cNvSpPr/>
-          <p:nvPr/>
-        </p:nvSpPr>
-        <p:spPr>
-          <a:xfrm>
-            <a:off x="9119616" y="4169664"/>
-            <a:ext cx="826008" cy="310896"/>
-          </a:xfrm>
-          <a:prstGeom prst="rect">
-            <a:avLst/>
-          </a:prstGeom>
-          <a:noFill/>
-          <a:ln/>
-        </p:spPr>
-        <p:txBody>
-          <a:bodyPr wrap="square" lIns="0" tIns="0" rIns="0" bIns="0" rtlCol="0" anchor="ctr">
-            <a:normAutofit/>
-          </a:bodyPr>
-          <a:lstStyle/>
-          <a:p>
-            <a:pPr algn="ctr" indent="0" marL="0">
-              <a:buNone/>
-            </a:pPr>
-            <a:r>
-              <a:rPr lang="en-US" sz="1500" b="1" dirty="0">
-                <a:solidFill>
-                  <a:srgbClr val="FFFFFF"/>
-                </a:solidFill>
-                <a:latin typeface="Aptos" pitchFamily="34" charset="0"/>
-                <a:ea typeface="Aptos" pitchFamily="34" charset="-122"/>
-                <a:cs typeface="Aptos" pitchFamily="34" charset="-120"/>
-              </a:rPr>
-              <a:t>Plays</a:t>
-            </a:r>
-            <a:endParaRPr lang="en-US" sz="1500" dirty="0"/>
-          </a:p>
-        </p:txBody>
-      </p:sp>
-      <p:sp>
-        <p:nvSpPr>
-          <p:cNvPr id="17" name="Shape 15"/>
-          <p:cNvSpPr/>
-          <p:nvPr/>
-        </p:nvSpPr>
-        <p:spPr>
-          <a:xfrm>
-            <a:off x="10274808" y="3977640"/>
-            <a:ext cx="972312" cy="749808"/>
-          </a:xfrm>
-          <a:prstGeom prst="roundRect">
-            <a:avLst>
-              <a:gd name="adj" fmla="val 14634"/>
-            </a:avLst>
-          </a:prstGeom>
-          <a:solidFill>
-            <a:srgbClr val="6A4CA3"/>
-          </a:solidFill>
-          <a:ln w="12700">
-            <a:solidFill>
-              <a:srgbClr val="6A4CA3"/>
-            </a:solidFill>
-            <a:prstDash val="solid"/>
-          </a:ln>
-        </p:spPr>
-      </p:sp>
-      <p:sp>
-        <p:nvSpPr>
-          <p:cNvPr id="18" name="Text 16"/>
-          <p:cNvSpPr/>
-          <p:nvPr/>
-        </p:nvSpPr>
-        <p:spPr>
-          <a:xfrm>
-            <a:off x="10347960" y="4169664"/>
-            <a:ext cx="826008" cy="310896"/>
-          </a:xfrm>
-          <a:prstGeom prst="rect">
-            <a:avLst/>
-          </a:prstGeom>
-          <a:noFill/>
-          <a:ln/>
-        </p:spPr>
-        <p:txBody>
-          <a:bodyPr wrap="square" lIns="0" tIns="0" rIns="0" bIns="0" rtlCol="0" anchor="ctr">
-            <a:normAutofit/>
-          </a:bodyPr>
-          <a:lstStyle/>
-          <a:p>
-            <a:pPr algn="ctr" indent="0" marL="0">
-              <a:buNone/>
-            </a:pPr>
-            <a:r>
-              <a:rPr lang="en-US" sz="1500" b="1" dirty="0">
-                <a:solidFill>
-                  <a:srgbClr val="FFFFFF"/>
-                </a:solidFill>
-                <a:latin typeface="Aptos" pitchFamily="34" charset="0"/>
-                <a:ea typeface="Aptos" pitchFamily="34" charset="-122"/>
-                <a:cs typeface="Aptos" pitchFamily="34" charset="-120"/>
-              </a:rPr>
-              <a:t>Action</a:t>
-            </a:r>
-            <a:endParaRPr lang="en-US" sz="1500" dirty="0"/>
+            <a:r>
+              <a:rPr lang="en-US" sz="1380" dirty="0">
+                <a:solidFill>
+                  <a:srgbClr val="17364A"/>
+                </a:solidFill>
+                <a:latin typeface="Aptos" pitchFamily="34" charset="0"/>
+                <a:ea typeface="Aptos" pitchFamily="34" charset="-122"/>
+                <a:cs typeface="Aptos" pitchFamily="34" charset="-120"/>
+              </a:rPr>
+              <a:t>Locate the decision point in the playbook sequence.</a:t>
+            </a:r>
+            <a:endParaRPr lang="en-US" sz="1380" dirty="0"/>
+          </a:p>
+          <a:p>
+            <a:r>
+              <a:rPr lang="en-US" sz="1380" dirty="0">
+                <a:solidFill>
+                  <a:srgbClr val="17364A"/>
+                </a:solidFill>
+                <a:latin typeface="Aptos" pitchFamily="34" charset="0"/>
+                <a:ea typeface="Aptos" pitchFamily="34" charset="-122"/>
+                <a:cs typeface="Aptos" pitchFamily="34" charset="-120"/>
+              </a:rPr>
+              <a:t>Identify who should participate in the work.</a:t>
+            </a:r>
+            <a:endParaRPr lang="en-US" sz="1380" dirty="0"/>
+          </a:p>
+          <a:p>
+            <a:r>
+              <a:rPr lang="en-US" sz="1380" dirty="0">
+                <a:solidFill>
+                  <a:srgbClr val="17364A"/>
+                </a:solidFill>
+                <a:latin typeface="Aptos" pitchFamily="34" charset="0"/>
+                <a:ea typeface="Aptos" pitchFamily="34" charset="-122"/>
+                <a:cs typeface="Aptos" pitchFamily="34" charset="-120"/>
+              </a:rPr>
+              <a:t>Document the review, approval, or implementation step.</a:t>
+            </a:r>
+            <a:endParaRPr lang="en-US" sz="1380" dirty="0"/>
           </a:p>
         </p:txBody>
       </p:sp>
@@ -16594,20 +14382,20 @@
         </p:nvSpPr>
         <p:spPr>
           <a:xfrm>
-            <a:off x="7818120" y="3977640"/>
-            <a:ext cx="972312" cy="749808"/>
+            <a:off x="8046720" y="3794760"/>
+            <a:ext cx="3063240" cy="1600200"/>
           </a:xfrm>
           <a:prstGeom prst="roundRect">
             <a:avLst>
-              <a:gd name="adj" fmla="val 14634"/>
+              <a:gd name="adj" fmla="val 6857"/>
             </a:avLst>
           </a:prstGeom>
           <a:solidFill>
-            <a:srgbClr val="0068B7"/>
+            <a:srgbClr val="FFFFFF"/>
           </a:solidFill>
           <a:ln w="12700">
             <a:solidFill>
-              <a:srgbClr val="0068B7"/>
+              <a:srgbClr val="B9D7E6"/>
             </a:solidFill>
             <a:prstDash val="solid"/>
           </a:ln>
@@ -16621,172 +14409,100 @@
         </p:nvSpPr>
         <p:spPr>
           <a:xfrm>
-            <a:off x="7891272" y="4169664"/>
-            <a:ext cx="826008" cy="310896"/>
-          </a:xfrm>
-          <a:prstGeom prst="rect">
-            <a:avLst/>
-          </a:prstGeom>
-          <a:noFill/>
-          <a:ln/>
-        </p:spPr>
-        <p:txBody>
-          <a:bodyPr wrap="square" lIns="0" tIns="0" rIns="0" bIns="0" rtlCol="0" anchor="ctr">
+            <a:off x="8211312" y="3941064"/>
+            <a:ext cx="2734056" cy="256032"/>
+          </a:xfrm>
+          <a:prstGeom prst="rect">
+            <a:avLst/>
+          </a:prstGeom>
+          <a:noFill/>
+          <a:ln/>
+        </p:spPr>
+        <p:txBody>
+          <a:bodyPr wrap="square" lIns="0" tIns="0" rIns="0" bIns="0" rtlCol="0" anchor="ctr"/>
+          <a:lstStyle/>
+          <a:p>
+            <a:pPr indent="0" marL="0">
+              <a:buNone/>
+            </a:pPr>
+            <a:r>
+              <a:rPr lang="en-US" sz="1300" b="1" dirty="0">
+                <a:solidFill>
+                  <a:srgbClr val="0068B7"/>
+                </a:solidFill>
+                <a:latin typeface="Aptos" pitchFamily="34" charset="0"/>
+                <a:ea typeface="Aptos" pitchFamily="34" charset="-122"/>
+                <a:cs typeface="Aptos" pitchFamily="34" charset="-120"/>
+              </a:rPr>
+              <a:t>Tool selection cues</a:t>
+            </a:r>
+            <a:endParaRPr lang="en-US" sz="1300" dirty="0"/>
+          </a:p>
+        </p:txBody>
+      </p:sp>
+      <p:sp>
+        <p:nvSpPr>
+          <p:cNvPr id="15" name="Text 13"/>
+          <p:cNvSpPr/>
+          <p:nvPr/>
+        </p:nvSpPr>
+        <p:spPr>
+          <a:xfrm>
+            <a:off x="8229600" y="4306824"/>
+            <a:ext cx="2679192" cy="941832"/>
+          </a:xfrm>
+          <a:prstGeom prst="rect">
+            <a:avLst/>
+          </a:prstGeom>
+          <a:noFill/>
+          <a:ln/>
+        </p:spPr>
+        <p:txBody>
+          <a:bodyPr wrap="square" lIns="254" tIns="254" rIns="254" bIns="254" rtlCol="0" anchor="t">
             <a:normAutofit/>
           </a:bodyPr>
           <a:lstStyle/>
           <a:p>
-            <a:pPr algn="ctr" indent="0" marL="0">
-              <a:buNone/>
-            </a:pPr>
-            <a:r>
-              <a:rPr lang="en-US" sz="1500" b="1" dirty="0">
-                <a:solidFill>
-                  <a:srgbClr val="FFFFFF"/>
-                </a:solidFill>
-                <a:latin typeface="Aptos" pitchFamily="34" charset="0"/>
-                <a:ea typeface="Aptos" pitchFamily="34" charset="-122"/>
-                <a:cs typeface="Aptos" pitchFamily="34" charset="-120"/>
-              </a:rPr>
-              <a:t>Concept</a:t>
-            </a:r>
-            <a:endParaRPr lang="en-US" sz="1500" dirty="0"/>
-          </a:p>
-        </p:txBody>
-      </p:sp>
-      <p:sp>
-        <p:nvSpPr>
-          <p:cNvPr id="15" name="Shape 13"/>
-          <p:cNvSpPr/>
-          <p:nvPr/>
-        </p:nvSpPr>
-        <p:spPr>
-          <a:xfrm>
-            <a:off x="9046464" y="3977640"/>
-            <a:ext cx="972312" cy="749808"/>
-          </a:xfrm>
-          <a:prstGeom prst="roundRect">
-            <a:avLst>
-              <a:gd name="adj" fmla="val 14634"/>
-            </a:avLst>
-          </a:prstGeom>
-          <a:solidFill>
-            <a:srgbClr val="2F8A28"/>
-          </a:solidFill>
-          <a:ln w="12700">
-            <a:solidFill>
-              <a:srgbClr val="2F8A28"/>
-            </a:solidFill>
-            <a:prstDash val="solid"/>
-          </a:ln>
-        </p:spPr>
-      </p:sp>
-      <p:sp>
-        <p:nvSpPr>
-          <p:cNvPr id="16" name="Text 14"/>
-          <p:cNvSpPr/>
-          <p:nvPr/>
-        </p:nvSpPr>
-        <p:spPr>
-          <a:xfrm>
-            <a:off x="9119616" y="4169664"/>
-            <a:ext cx="826008" cy="310896"/>
-          </a:xfrm>
-          <a:prstGeom prst="rect">
-            <a:avLst/>
-          </a:prstGeom>
-          <a:noFill/>
-          <a:ln/>
-        </p:spPr>
-        <p:txBody>
-          <a:bodyPr wrap="square" lIns="0" tIns="0" rIns="0" bIns="0" rtlCol="0" anchor="ctr">
-            <a:normAutofit/>
-          </a:bodyPr>
-          <a:lstStyle/>
-          <a:p>
-            <a:pPr algn="ctr" indent="0" marL="0">
-              <a:buNone/>
-            </a:pPr>
-            <a:r>
-              <a:rPr lang="en-US" sz="1500" b="1" dirty="0">
-                <a:solidFill>
-                  <a:srgbClr val="FFFFFF"/>
-                </a:solidFill>
-                <a:latin typeface="Aptos" pitchFamily="34" charset="0"/>
-                <a:ea typeface="Aptos" pitchFamily="34" charset="-122"/>
-                <a:cs typeface="Aptos" pitchFamily="34" charset="-120"/>
-              </a:rPr>
-              <a:t>Tool</a:t>
-            </a:r>
-            <a:endParaRPr lang="en-US" sz="1500" dirty="0"/>
-          </a:p>
-        </p:txBody>
-      </p:sp>
-      <p:sp>
-        <p:nvSpPr>
-          <p:cNvPr id="17" name="Shape 15"/>
-          <p:cNvSpPr/>
-          <p:nvPr/>
-        </p:nvSpPr>
-        <p:spPr>
-          <a:xfrm>
-            <a:off x="10274808" y="3977640"/>
-            <a:ext cx="972312" cy="749808"/>
-          </a:xfrm>
-          <a:prstGeom prst="roundRect">
-            <a:avLst>
-              <a:gd name="adj" fmla="val 14634"/>
-            </a:avLst>
-          </a:prstGeom>
-          <a:solidFill>
-            <a:srgbClr val="D69A2D"/>
-          </a:solidFill>
-          <a:ln w="12700">
-            <a:solidFill>
-              <a:srgbClr val="D69A2D"/>
-            </a:solidFill>
-            <a:prstDash val="solid"/>
-          </a:ln>
-        </p:spPr>
-      </p:sp>
-      <p:sp>
-        <p:nvSpPr>
-          <p:cNvPr id="18" name="Text 16"/>
-          <p:cNvSpPr/>
-          <p:nvPr/>
-        </p:nvSpPr>
-        <p:spPr>
-          <a:xfrm>
-            <a:off x="10347960" y="4169664"/>
-            <a:ext cx="826008" cy="310896"/>
-          </a:xfrm>
-          <a:prstGeom prst="rect">
-            <a:avLst/>
-          </a:prstGeom>
-          <a:noFill/>
-          <a:ln/>
-        </p:spPr>
-        <p:txBody>
-          <a:bodyPr wrap="square" lIns="0" tIns="0" rIns="0" bIns="0" rtlCol="0" anchor="ctr">
-            <a:normAutofit/>
-          </a:bodyPr>
-          <a:lstStyle/>
-          <a:p>
-            <a:pPr algn="ctr" indent="0" marL="0">
-              <a:buNone/>
-            </a:pPr>
-            <a:r>
-              <a:rPr lang="en-US" sz="1500" b="1" dirty="0">
-                <a:solidFill>
-                  <a:srgbClr val="FFFFFF"/>
-                </a:solidFill>
-                <a:latin typeface="Aptos" pitchFamily="34" charset="0"/>
-                <a:ea typeface="Aptos" pitchFamily="34" charset="-122"/>
-                <a:cs typeface="Aptos" pitchFamily="34" charset="-120"/>
-              </a:rPr>
-              <a:t>Artifact</a:t>
-            </a:r>
-            <a:endParaRPr lang="en-US" sz="1500" dirty="0"/>
+            <a:r>
+              <a:rPr lang="en-US" sz="1380" dirty="0">
+                <a:solidFill>
+                  <a:srgbClr val="17364A"/>
+                </a:solidFill>
+                <a:latin typeface="Aptos" pitchFamily="34" charset="0"/>
+                <a:ea typeface="Aptos" pitchFamily="34" charset="-122"/>
+                <a:cs typeface="Aptos" pitchFamily="34" charset="-120"/>
+              </a:rPr>
+              <a:t>Use a tool when no comparable local process exists.</a:t>
+            </a:r>
+            <a:endParaRPr lang="en-US" sz="1380" dirty="0"/>
+          </a:p>
+          <a:p>
+            <a:r>
+              <a:rPr lang="en-US" sz="1380" dirty="0">
+                <a:solidFill>
+                  <a:srgbClr val="17364A"/>
+                </a:solidFill>
+                <a:latin typeface="Aptos" pitchFamily="34" charset="0"/>
+                <a:ea typeface="Aptos" pitchFamily="34" charset="-122"/>
+                <a:cs typeface="Aptos" pitchFamily="34" charset="-120"/>
+              </a:rPr>
+              <a:t>Adapt existing department templates when they already fit the purpose.</a:t>
+            </a:r>
+            <a:endParaRPr lang="en-US" sz="1380" dirty="0"/>
+          </a:p>
+          <a:p>
+            <a:r>
+              <a:rPr lang="en-US" sz="1380" dirty="0">
+                <a:solidFill>
+                  <a:srgbClr val="17364A"/>
+                </a:solidFill>
+                <a:latin typeface="Aptos" pitchFamily="34" charset="0"/>
+                <a:ea typeface="Aptos" pitchFamily="34" charset="-122"/>
+                <a:cs typeface="Aptos" pitchFamily="34" charset="-120"/>
+              </a:rPr>
+              <a:t>Save the completed artifact as evidence of the decision.</a:t>
+            </a:r>
+            <a:endParaRPr lang="en-US" sz="1380" dirty="0"/>
           </a:p>
         </p:txBody>
       </p:sp>
@@ -17259,13 +14975,11 @@
             </a:avLst>
           </a:prstGeom>
           <a:solidFill>
-            <a:srgbClr val="FFFFFF">
-              <a:alpha val="88000"/>
-            </a:srgbClr>
+            <a:srgbClr val="FFFFFF"/>
           </a:solidFill>
           <a:ln w="12700">
             <a:solidFill>
-              <a:srgbClr val="D6E8F2"/>
+              <a:srgbClr val="B9D7E6"/>
             </a:solidFill>
             <a:prstDash val="solid"/>
           </a:ln>
@@ -17273,30 +14987,42 @@
       </p:sp>
       <p:sp>
         <p:nvSpPr>
-          <p:cNvPr id="14" name="Shape 12"/>
-          <p:cNvSpPr/>
-          <p:nvPr/>
-        </p:nvSpPr>
-        <p:spPr>
-          <a:xfrm>
-            <a:off x="7927848" y="3319272"/>
-            <a:ext cx="792480" cy="749808"/>
-          </a:xfrm>
-          <a:prstGeom prst="roundRect">
-            <a:avLst>
-              <a:gd name="adj" fmla="val 14634"/>
-            </a:avLst>
-          </a:prstGeom>
-          <a:solidFill>
-            <a:srgbClr val="0068B7"/>
-          </a:solidFill>
-          <a:ln w="12700">
-            <a:solidFill>
-              <a:srgbClr val="0068B7"/>
-            </a:solidFill>
-            <a:prstDash val="solid"/>
-          </a:ln>
-        </p:spPr>
+          <p:cNvPr id="14" name="Text 12"/>
+          <p:cNvSpPr/>
+          <p:nvPr/>
+        </p:nvSpPr>
+        <p:spPr>
+          <a:xfrm>
+            <a:off x="7799832" y="2935224"/>
+            <a:ext cx="3145536" cy="256032"/>
+          </a:xfrm>
+          <a:prstGeom prst="rect">
+            <a:avLst/>
+          </a:prstGeom>
+          <a:noFill/>
+          <a:ln/>
+        </p:spPr>
+        <p:txBody>
+          <a:bodyPr wrap="square" lIns="0" tIns="0" rIns="0" bIns="0" rtlCol="0" anchor="ctr"/>
+          <a:lstStyle/>
+          <a:p>
+            <a:pPr indent="0" marL="0">
+              <a:buNone/>
+            </a:pPr>
+            <a:r>
+              <a:rPr lang="en-US" sz="1300" b="1" dirty="0">
+                <a:solidFill>
+                  <a:srgbClr val="0068B7"/>
+                </a:solidFill>
+                <a:latin typeface="Aptos" pitchFamily="34" charset="0"/>
+                <a:ea typeface="Aptos" pitchFamily="34" charset="-122"/>
+                <a:cs typeface="Aptos" pitchFamily="34" charset="-120"/>
+              </a:rPr>
+              <a:t>Concept checkpoints</a:t>
+            </a:r>
+            <a:endParaRPr lang="en-US" sz="1300" dirty="0"/>
+          </a:p>
+        </p:txBody>
       </p:sp>
       <p:sp>
         <p:nvSpPr>
@@ -17306,240 +15032,53 @@
         </p:nvSpPr>
         <p:spPr>
           <a:xfrm>
-            <a:off x="8001000" y="3511296"/>
-            <a:ext cx="646176" cy="310896"/>
-          </a:xfrm>
-          <a:prstGeom prst="rect">
-            <a:avLst/>
-          </a:prstGeom>
-          <a:noFill/>
-          <a:ln/>
-        </p:spPr>
-        <p:txBody>
-          <a:bodyPr wrap="square" lIns="0" tIns="0" rIns="0" bIns="0" rtlCol="0" anchor="ctr">
+            <a:off x="7818120" y="3300984"/>
+            <a:ext cx="3090672" cy="877824"/>
+          </a:xfrm>
+          <a:prstGeom prst="rect">
+            <a:avLst/>
+          </a:prstGeom>
+          <a:noFill/>
+          <a:ln/>
+        </p:spPr>
+        <p:txBody>
+          <a:bodyPr wrap="square" lIns="254" tIns="254" rIns="254" bIns="254" rtlCol="0" anchor="t">
             <a:normAutofit/>
           </a:bodyPr>
           <a:lstStyle/>
           <a:p>
-            <a:pPr algn="ctr" indent="0" marL="0">
-              <a:buNone/>
-            </a:pPr>
-            <a:r>
-              <a:rPr lang="en-US" sz="1500" b="1" dirty="0">
-                <a:solidFill>
-                  <a:srgbClr val="FFFFFF"/>
-                </a:solidFill>
-                <a:latin typeface="Aptos" pitchFamily="34" charset="0"/>
-                <a:ea typeface="Aptos" pitchFamily="34" charset="-122"/>
-                <a:cs typeface="Aptos" pitchFamily="34" charset="-120"/>
-              </a:rPr>
-              <a:t>Plan</a:t>
-            </a:r>
-            <a:endParaRPr lang="en-US" sz="1500" dirty="0"/>
+            <a:r>
+              <a:rPr lang="en-US" sz="1380" dirty="0">
+                <a:solidFill>
+                  <a:srgbClr val="17364A"/>
+                </a:solidFill>
+                <a:latin typeface="Aptos" pitchFamily="34" charset="0"/>
+                <a:ea typeface="Aptos" pitchFamily="34" charset="-122"/>
+                <a:cs typeface="Aptos" pitchFamily="34" charset="-120"/>
+              </a:rPr>
+              <a:t>Assess where AI may support eCR workflows and where human review remains required.</a:t>
+            </a:r>
+            <a:endParaRPr lang="en-US" sz="1380" dirty="0"/>
+          </a:p>
+          <a:p>
+            <a:r>
+              <a:rPr lang="en-US" sz="1380" dirty="0">
+                <a:solidFill>
+                  <a:srgbClr val="17364A"/>
+                </a:solidFill>
+                <a:latin typeface="Aptos" pitchFamily="34" charset="0"/>
+                <a:ea typeface="Aptos" pitchFamily="34" charset="-122"/>
+                <a:cs typeface="Aptos" pitchFamily="34" charset="-120"/>
+              </a:rPr>
+              <a:t>Produce an AI-readiness review for an eCR workflow.</a:t>
+            </a:r>
+            <a:endParaRPr lang="en-US" sz="1380" dirty="0"/>
           </a:p>
         </p:txBody>
       </p:sp>
       <p:sp>
         <p:nvSpPr>
           <p:cNvPr id="16" name="Shape 14"/>
-          <p:cNvSpPr/>
-          <p:nvPr/>
-        </p:nvSpPr>
-        <p:spPr>
-          <a:xfrm>
-            <a:off x="8976360" y="3319272"/>
-            <a:ext cx="792480" cy="749808"/>
-          </a:xfrm>
-          <a:prstGeom prst="roundRect">
-            <a:avLst>
-              <a:gd name="adj" fmla="val 14634"/>
-            </a:avLst>
-          </a:prstGeom>
-          <a:solidFill>
-            <a:srgbClr val="2F8A28"/>
-          </a:solidFill>
-          <a:ln w="12700">
-            <a:solidFill>
-              <a:srgbClr val="2F8A28"/>
-            </a:solidFill>
-            <a:prstDash val="solid"/>
-          </a:ln>
-        </p:spPr>
-      </p:sp>
-      <p:sp>
-        <p:nvSpPr>
-          <p:cNvPr id="17" name="Text 15"/>
-          <p:cNvSpPr/>
-          <p:nvPr/>
-        </p:nvSpPr>
-        <p:spPr>
-          <a:xfrm>
-            <a:off x="9049512" y="3511296"/>
-            <a:ext cx="646176" cy="310896"/>
-          </a:xfrm>
-          <a:prstGeom prst="rect">
-            <a:avLst/>
-          </a:prstGeom>
-          <a:noFill/>
-          <a:ln/>
-        </p:spPr>
-        <p:txBody>
-          <a:bodyPr wrap="square" lIns="0" tIns="0" rIns="0" bIns="0" rtlCol="0" anchor="ctr">
-            <a:normAutofit/>
-          </a:bodyPr>
-          <a:lstStyle/>
-          <a:p>
-            <a:pPr algn="ctr" indent="0" marL="0">
-              <a:buNone/>
-            </a:pPr>
-            <a:r>
-              <a:rPr lang="en-US" sz="1500" b="1" dirty="0">
-                <a:solidFill>
-                  <a:srgbClr val="FFFFFF"/>
-                </a:solidFill>
-                <a:latin typeface="Aptos" pitchFamily="34" charset="0"/>
-                <a:ea typeface="Aptos" pitchFamily="34" charset="-122"/>
-                <a:cs typeface="Aptos" pitchFamily="34" charset="-120"/>
-              </a:rPr>
-              <a:t>Do</a:t>
-            </a:r>
-            <a:endParaRPr lang="en-US" sz="1500" dirty="0"/>
-          </a:p>
-        </p:txBody>
-      </p:sp>
-      <p:sp>
-        <p:nvSpPr>
-          <p:cNvPr id="18" name="Shape 16"/>
-          <p:cNvSpPr/>
-          <p:nvPr/>
-        </p:nvSpPr>
-        <p:spPr>
-          <a:xfrm>
-            <a:off x="10024872" y="3319272"/>
-            <a:ext cx="792480" cy="749808"/>
-          </a:xfrm>
-          <a:prstGeom prst="roundRect">
-            <a:avLst>
-              <a:gd name="adj" fmla="val 14634"/>
-            </a:avLst>
-          </a:prstGeom>
-          <a:solidFill>
-            <a:srgbClr val="D69A2D"/>
-          </a:solidFill>
-          <a:ln w="12700">
-            <a:solidFill>
-              <a:srgbClr val="D69A2D"/>
-            </a:solidFill>
-            <a:prstDash val="solid"/>
-          </a:ln>
-        </p:spPr>
-      </p:sp>
-      <p:sp>
-        <p:nvSpPr>
-          <p:cNvPr id="19" name="Text 17"/>
-          <p:cNvSpPr/>
-          <p:nvPr/>
-        </p:nvSpPr>
-        <p:spPr>
-          <a:xfrm>
-            <a:off x="10098024" y="3511296"/>
-            <a:ext cx="646176" cy="310896"/>
-          </a:xfrm>
-          <a:prstGeom prst="rect">
-            <a:avLst/>
-          </a:prstGeom>
-          <a:noFill/>
-          <a:ln/>
-        </p:spPr>
-        <p:txBody>
-          <a:bodyPr wrap="square" lIns="0" tIns="0" rIns="0" bIns="0" rtlCol="0" anchor="ctr">
-            <a:normAutofit/>
-          </a:bodyPr>
-          <a:lstStyle/>
-          <a:p>
-            <a:pPr algn="ctr" indent="0" marL="0">
-              <a:buNone/>
-            </a:pPr>
-            <a:r>
-              <a:rPr lang="en-US" sz="1500" b="1" dirty="0">
-                <a:solidFill>
-                  <a:srgbClr val="FFFFFF"/>
-                </a:solidFill>
-                <a:latin typeface="Aptos" pitchFamily="34" charset="0"/>
-                <a:ea typeface="Aptos" pitchFamily="34" charset="-122"/>
-                <a:cs typeface="Aptos" pitchFamily="34" charset="-120"/>
-              </a:rPr>
-              <a:t>Review</a:t>
-            </a:r>
-            <a:endParaRPr lang="en-US" sz="1500" dirty="0"/>
-          </a:p>
-        </p:txBody>
-      </p:sp>
-      <p:sp>
-        <p:nvSpPr>
-          <p:cNvPr id="20" name="Shape 18"/>
-          <p:cNvSpPr/>
-          <p:nvPr/>
-        </p:nvSpPr>
-        <p:spPr>
-          <a:xfrm>
-            <a:off x="8293608" y="4389120"/>
-            <a:ext cx="2157984" cy="0"/>
-          </a:xfrm>
-          <a:prstGeom prst="line">
-            <a:avLst/>
-          </a:prstGeom>
-          <a:noFill/>
-          <a:ln w="25400">
-            <a:solidFill>
-              <a:srgbClr val="8ABBD8"/>
-            </a:solidFill>
-            <a:prstDash val="solid"/>
-          </a:ln>
-        </p:spPr>
-      </p:sp>
-      <p:sp>
-        <p:nvSpPr>
-          <p:cNvPr id="21" name="Text 19"/>
-          <p:cNvSpPr/>
-          <p:nvPr/>
-        </p:nvSpPr>
-        <p:spPr>
-          <a:xfrm>
-            <a:off x="7909560" y="3977640"/>
-            <a:ext cx="2926080" cy="182880"/>
-          </a:xfrm>
-          <a:prstGeom prst="rect">
-            <a:avLst/>
-          </a:prstGeom>
-          <a:noFill/>
-          <a:ln/>
-        </p:spPr>
-        <p:txBody>
-          <a:bodyPr wrap="square" lIns="0" tIns="0" rIns="0" bIns="0" rtlCol="0" anchor="ctr"/>
-          <a:lstStyle/>
-          <a:p>
-            <a:pPr algn="ctr" indent="0" marL="0">
-              <a:buNone/>
-            </a:pPr>
-            <a:r>
-              <a:rPr lang="en-US" sz="1000" dirty="0">
-                <a:solidFill>
-                  <a:srgbClr val="003A63"/>
-                </a:solidFill>
-                <a:latin typeface="Aptos" pitchFamily="34" charset="0"/>
-                <a:ea typeface="Aptos" pitchFamily="34" charset="-122"/>
-                <a:cs typeface="Aptos" pitchFamily="34" charset="-120"/>
-              </a:rPr>
-              <a:t>Dependencies visible</a:t>
-            </a:r>
-            <a:endParaRPr lang="en-US" sz="1000" dirty="0"/>
-          </a:p>
-        </p:txBody>
-      </p:sp>
-      <p:sp>
-        <p:nvSpPr>
-          <p:cNvPr id="22" name="Shape 20"/>
           <p:cNvSpPr/>
           <p:nvPr/>
         </p:nvSpPr>
@@ -17566,7 +15105,7 @@
       </p:sp>
       <p:sp>
         <p:nvSpPr>
-          <p:cNvPr id="23" name="Text 21"/>
+          <p:cNvPr id="17" name="Text 15"/>
           <p:cNvSpPr/>
           <p:nvPr/>
         </p:nvSpPr>
@@ -17605,7 +15144,7 @@
       </p:sp>
       <p:sp>
         <p:nvSpPr>
-          <p:cNvPr id="24" name="Text 22"/>
+          <p:cNvPr id="18" name="Text 16"/>
           <p:cNvSpPr/>
           <p:nvPr/>
         </p:nvSpPr>
@@ -18113,13 +15652,11 @@
             </a:avLst>
           </a:prstGeom>
           <a:solidFill>
-            <a:srgbClr val="FFFFFF">
-              <a:alpha val="88000"/>
-            </a:srgbClr>
+            <a:srgbClr val="FFFFFF"/>
           </a:solidFill>
           <a:ln w="12700">
             <a:solidFill>
-              <a:srgbClr val="D6E8F2"/>
+              <a:srgbClr val="B9D7E6"/>
             </a:solidFill>
             <a:prstDash val="solid"/>
           </a:ln>
@@ -18127,30 +15664,42 @@
       </p:sp>
       <p:sp>
         <p:nvSpPr>
-          <p:cNvPr id="14" name="Shape 12"/>
-          <p:cNvSpPr/>
-          <p:nvPr/>
-        </p:nvSpPr>
-        <p:spPr>
-          <a:xfrm>
-            <a:off x="7927848" y="3319272"/>
-            <a:ext cx="792480" cy="749808"/>
-          </a:xfrm>
-          <a:prstGeom prst="roundRect">
-            <a:avLst>
-              <a:gd name="adj" fmla="val 14634"/>
-            </a:avLst>
-          </a:prstGeom>
-          <a:solidFill>
-            <a:srgbClr val="0068B7"/>
-          </a:solidFill>
-          <a:ln w="12700">
-            <a:solidFill>
-              <a:srgbClr val="0068B7"/>
-            </a:solidFill>
-            <a:prstDash val="solid"/>
-          </a:ln>
-        </p:spPr>
+          <p:cNvPr id="14" name="Text 12"/>
+          <p:cNvSpPr/>
+          <p:nvPr/>
+        </p:nvSpPr>
+        <p:spPr>
+          <a:xfrm>
+            <a:off x="7799832" y="2935224"/>
+            <a:ext cx="3145536" cy="256032"/>
+          </a:xfrm>
+          <a:prstGeom prst="rect">
+            <a:avLst/>
+          </a:prstGeom>
+          <a:noFill/>
+          <a:ln/>
+        </p:spPr>
+        <p:txBody>
+          <a:bodyPr wrap="square" lIns="0" tIns="0" rIns="0" bIns="0" rtlCol="0" anchor="ctr"/>
+          <a:lstStyle/>
+          <a:p>
+            <a:pPr indent="0" marL="0">
+              <a:buNone/>
+            </a:pPr>
+            <a:r>
+              <a:rPr lang="en-US" sz="1300" b="1" dirty="0">
+                <a:solidFill>
+                  <a:srgbClr val="0068B7"/>
+                </a:solidFill>
+                <a:latin typeface="Aptos" pitchFamily="34" charset="0"/>
+                <a:ea typeface="Aptos" pitchFamily="34" charset="-122"/>
+                <a:cs typeface="Aptos" pitchFamily="34" charset="-120"/>
+              </a:rPr>
+              <a:t>Concept checkpoints</a:t>
+            </a:r>
+            <a:endParaRPr lang="en-US" sz="1300" dirty="0"/>
+          </a:p>
+        </p:txBody>
       </p:sp>
       <p:sp>
         <p:nvSpPr>
@@ -18160,240 +15709,53 @@
         </p:nvSpPr>
         <p:spPr>
           <a:xfrm>
-            <a:off x="8001000" y="3511296"/>
-            <a:ext cx="646176" cy="310896"/>
-          </a:xfrm>
-          <a:prstGeom prst="rect">
-            <a:avLst/>
-          </a:prstGeom>
-          <a:noFill/>
-          <a:ln/>
-        </p:spPr>
-        <p:txBody>
-          <a:bodyPr wrap="square" lIns="0" tIns="0" rIns="0" bIns="0" rtlCol="0" anchor="ctr">
+            <a:off x="7818120" y="3300984"/>
+            <a:ext cx="3090672" cy="877824"/>
+          </a:xfrm>
+          <a:prstGeom prst="rect">
+            <a:avLst/>
+          </a:prstGeom>
+          <a:noFill/>
+          <a:ln/>
+        </p:spPr>
+        <p:txBody>
+          <a:bodyPr wrap="square" lIns="254" tIns="254" rIns="254" bIns="254" rtlCol="0" anchor="t">
             <a:normAutofit/>
           </a:bodyPr>
           <a:lstStyle/>
           <a:p>
-            <a:pPr algn="ctr" indent="0" marL="0">
-              <a:buNone/>
-            </a:pPr>
-            <a:r>
-              <a:rPr lang="en-US" sz="1500" b="1" dirty="0">
-                <a:solidFill>
-                  <a:srgbClr val="FFFFFF"/>
-                </a:solidFill>
-                <a:latin typeface="Aptos" pitchFamily="34" charset="0"/>
-                <a:ea typeface="Aptos" pitchFamily="34" charset="-122"/>
-                <a:cs typeface="Aptos" pitchFamily="34" charset="-120"/>
-              </a:rPr>
-              <a:t>Plan</a:t>
-            </a:r>
-            <a:endParaRPr lang="en-US" sz="1500" dirty="0"/>
+            <a:r>
+              <a:rPr lang="en-US" sz="1380" dirty="0">
+                <a:solidFill>
+                  <a:srgbClr val="17364A"/>
+                </a:solidFill>
+                <a:latin typeface="Aptos" pitchFamily="34" charset="0"/>
+                <a:ea typeface="Aptos" pitchFamily="34" charset="-122"/>
+                <a:cs typeface="Aptos" pitchFamily="34" charset="-120"/>
+              </a:rPr>
+              <a:t>It uses data from electronic health records and reporting logic to support more timely.</a:t>
+            </a:r>
+            <a:endParaRPr lang="en-US" sz="1380" dirty="0"/>
+          </a:p>
+          <a:p>
+            <a:r>
+              <a:rPr lang="en-US" sz="1380" dirty="0">
+                <a:solidFill>
+                  <a:srgbClr val="17364A"/>
+                </a:solidFill>
+                <a:latin typeface="Aptos" pitchFamily="34" charset="0"/>
+                <a:ea typeface="Aptos" pitchFamily="34" charset="-122"/>
+                <a:cs typeface="Aptos" pitchFamily="34" charset="-120"/>
+              </a:rPr>
+              <a:t>This module teaches learners how eCR works technically and how AI might support.</a:t>
+            </a:r>
+            <a:endParaRPr lang="en-US" sz="1380" dirty="0"/>
           </a:p>
         </p:txBody>
       </p:sp>
       <p:sp>
         <p:nvSpPr>
           <p:cNvPr id="16" name="Shape 14"/>
-          <p:cNvSpPr/>
-          <p:nvPr/>
-        </p:nvSpPr>
-        <p:spPr>
-          <a:xfrm>
-            <a:off x="8976360" y="3319272"/>
-            <a:ext cx="792480" cy="749808"/>
-          </a:xfrm>
-          <a:prstGeom prst="roundRect">
-            <a:avLst>
-              <a:gd name="adj" fmla="val 14634"/>
-            </a:avLst>
-          </a:prstGeom>
-          <a:solidFill>
-            <a:srgbClr val="2F8A28"/>
-          </a:solidFill>
-          <a:ln w="12700">
-            <a:solidFill>
-              <a:srgbClr val="2F8A28"/>
-            </a:solidFill>
-            <a:prstDash val="solid"/>
-          </a:ln>
-        </p:spPr>
-      </p:sp>
-      <p:sp>
-        <p:nvSpPr>
-          <p:cNvPr id="17" name="Text 15"/>
-          <p:cNvSpPr/>
-          <p:nvPr/>
-        </p:nvSpPr>
-        <p:spPr>
-          <a:xfrm>
-            <a:off x="9049512" y="3511296"/>
-            <a:ext cx="646176" cy="310896"/>
-          </a:xfrm>
-          <a:prstGeom prst="rect">
-            <a:avLst/>
-          </a:prstGeom>
-          <a:noFill/>
-          <a:ln/>
-        </p:spPr>
-        <p:txBody>
-          <a:bodyPr wrap="square" lIns="0" tIns="0" rIns="0" bIns="0" rtlCol="0" anchor="ctr">
-            <a:normAutofit/>
-          </a:bodyPr>
-          <a:lstStyle/>
-          <a:p>
-            <a:pPr algn="ctr" indent="0" marL="0">
-              <a:buNone/>
-            </a:pPr>
-            <a:r>
-              <a:rPr lang="en-US" sz="1500" b="1" dirty="0">
-                <a:solidFill>
-                  <a:srgbClr val="FFFFFF"/>
-                </a:solidFill>
-                <a:latin typeface="Aptos" pitchFamily="34" charset="0"/>
-                <a:ea typeface="Aptos" pitchFamily="34" charset="-122"/>
-                <a:cs typeface="Aptos" pitchFamily="34" charset="-120"/>
-              </a:rPr>
-              <a:t>Do</a:t>
-            </a:r>
-            <a:endParaRPr lang="en-US" sz="1500" dirty="0"/>
-          </a:p>
-        </p:txBody>
-      </p:sp>
-      <p:sp>
-        <p:nvSpPr>
-          <p:cNvPr id="18" name="Shape 16"/>
-          <p:cNvSpPr/>
-          <p:nvPr/>
-        </p:nvSpPr>
-        <p:spPr>
-          <a:xfrm>
-            <a:off x="10024872" y="3319272"/>
-            <a:ext cx="792480" cy="749808"/>
-          </a:xfrm>
-          <a:prstGeom prst="roundRect">
-            <a:avLst>
-              <a:gd name="adj" fmla="val 14634"/>
-            </a:avLst>
-          </a:prstGeom>
-          <a:solidFill>
-            <a:srgbClr val="D69A2D"/>
-          </a:solidFill>
-          <a:ln w="12700">
-            <a:solidFill>
-              <a:srgbClr val="D69A2D"/>
-            </a:solidFill>
-            <a:prstDash val="solid"/>
-          </a:ln>
-        </p:spPr>
-      </p:sp>
-      <p:sp>
-        <p:nvSpPr>
-          <p:cNvPr id="19" name="Text 17"/>
-          <p:cNvSpPr/>
-          <p:nvPr/>
-        </p:nvSpPr>
-        <p:spPr>
-          <a:xfrm>
-            <a:off x="10098024" y="3511296"/>
-            <a:ext cx="646176" cy="310896"/>
-          </a:xfrm>
-          <a:prstGeom prst="rect">
-            <a:avLst/>
-          </a:prstGeom>
-          <a:noFill/>
-          <a:ln/>
-        </p:spPr>
-        <p:txBody>
-          <a:bodyPr wrap="square" lIns="0" tIns="0" rIns="0" bIns="0" rtlCol="0" anchor="ctr">
-            <a:normAutofit/>
-          </a:bodyPr>
-          <a:lstStyle/>
-          <a:p>
-            <a:pPr algn="ctr" indent="0" marL="0">
-              <a:buNone/>
-            </a:pPr>
-            <a:r>
-              <a:rPr lang="en-US" sz="1500" b="1" dirty="0">
-                <a:solidFill>
-                  <a:srgbClr val="FFFFFF"/>
-                </a:solidFill>
-                <a:latin typeface="Aptos" pitchFamily="34" charset="0"/>
-                <a:ea typeface="Aptos" pitchFamily="34" charset="-122"/>
-                <a:cs typeface="Aptos" pitchFamily="34" charset="-120"/>
-              </a:rPr>
-              <a:t>Review</a:t>
-            </a:r>
-            <a:endParaRPr lang="en-US" sz="1500" dirty="0"/>
-          </a:p>
-        </p:txBody>
-      </p:sp>
-      <p:sp>
-        <p:nvSpPr>
-          <p:cNvPr id="20" name="Shape 18"/>
-          <p:cNvSpPr/>
-          <p:nvPr/>
-        </p:nvSpPr>
-        <p:spPr>
-          <a:xfrm>
-            <a:off x="8293608" y="4389120"/>
-            <a:ext cx="2157984" cy="0"/>
-          </a:xfrm>
-          <a:prstGeom prst="line">
-            <a:avLst/>
-          </a:prstGeom>
-          <a:noFill/>
-          <a:ln w="25400">
-            <a:solidFill>
-              <a:srgbClr val="8ABBD8"/>
-            </a:solidFill>
-            <a:prstDash val="solid"/>
-          </a:ln>
-        </p:spPr>
-      </p:sp>
-      <p:sp>
-        <p:nvSpPr>
-          <p:cNvPr id="21" name="Text 19"/>
-          <p:cNvSpPr/>
-          <p:nvPr/>
-        </p:nvSpPr>
-        <p:spPr>
-          <a:xfrm>
-            <a:off x="7909560" y="3977640"/>
-            <a:ext cx="2926080" cy="182880"/>
-          </a:xfrm>
-          <a:prstGeom prst="rect">
-            <a:avLst/>
-          </a:prstGeom>
-          <a:noFill/>
-          <a:ln/>
-        </p:spPr>
-        <p:txBody>
-          <a:bodyPr wrap="square" lIns="0" tIns="0" rIns="0" bIns="0" rtlCol="0" anchor="ctr"/>
-          <a:lstStyle/>
-          <a:p>
-            <a:pPr algn="ctr" indent="0" marL="0">
-              <a:buNone/>
-            </a:pPr>
-            <a:r>
-              <a:rPr lang="en-US" sz="1000" dirty="0">
-                <a:solidFill>
-                  <a:srgbClr val="003A63"/>
-                </a:solidFill>
-                <a:latin typeface="Aptos" pitchFamily="34" charset="0"/>
-                <a:ea typeface="Aptos" pitchFamily="34" charset="-122"/>
-                <a:cs typeface="Aptos" pitchFamily="34" charset="-120"/>
-              </a:rPr>
-              <a:t>Dependencies visible</a:t>
-            </a:r>
-            <a:endParaRPr lang="en-US" sz="1000" dirty="0"/>
-          </a:p>
-        </p:txBody>
-      </p:sp>
-      <p:sp>
-        <p:nvSpPr>
-          <p:cNvPr id="22" name="Shape 20"/>
           <p:cNvSpPr/>
           <p:nvPr/>
         </p:nvSpPr>
@@ -18420,7 +15782,7 @@
       </p:sp>
       <p:sp>
         <p:nvSpPr>
-          <p:cNvPr id="23" name="Text 21"/>
+          <p:cNvPr id="17" name="Text 15"/>
           <p:cNvSpPr/>
           <p:nvPr/>
         </p:nvSpPr>
@@ -18459,7 +15821,7 @@
       </p:sp>
       <p:sp>
         <p:nvSpPr>
-          <p:cNvPr id="24" name="Text 22"/>
+          <p:cNvPr id="18" name="Text 16"/>
           <p:cNvSpPr/>
           <p:nvPr/>
         </p:nvSpPr>
@@ -18967,13 +16329,11 @@
             </a:avLst>
           </a:prstGeom>
           <a:solidFill>
-            <a:srgbClr val="FFFFFF">
-              <a:alpha val="88000"/>
-            </a:srgbClr>
+            <a:srgbClr val="FFFFFF"/>
           </a:solidFill>
           <a:ln w="12700">
             <a:solidFill>
-              <a:srgbClr val="D6E8F2"/>
+              <a:srgbClr val="B9D7E6"/>
             </a:solidFill>
             <a:prstDash val="solid"/>
           </a:ln>
@@ -18981,190 +16341,112 @@
       </p:sp>
       <p:sp>
         <p:nvSpPr>
-          <p:cNvPr id="14" name="Shape 12"/>
-          <p:cNvSpPr/>
-          <p:nvPr/>
-        </p:nvSpPr>
-        <p:spPr>
-          <a:xfrm>
-            <a:off x="7891272" y="3108960"/>
-            <a:ext cx="566928" cy="566928"/>
-          </a:xfrm>
-          <a:prstGeom prst="ellipse">
-            <a:avLst/>
-          </a:prstGeom>
-          <a:solidFill>
-            <a:srgbClr val="0068B7"/>
-          </a:solidFill>
-          <a:ln w="12700">
-            <a:solidFill>
-              <a:srgbClr val="0068B7"/>
-            </a:solidFill>
-            <a:prstDash val="solid"/>
-          </a:ln>
-        </p:spPr>
-      </p:sp>
-      <p:sp>
-        <p:nvSpPr>
-          <p:cNvPr id="15" name="Shape 13"/>
-          <p:cNvSpPr/>
-          <p:nvPr/>
-        </p:nvSpPr>
-        <p:spPr>
-          <a:xfrm>
-            <a:off x="10287000" y="3108960"/>
-            <a:ext cx="566928" cy="566928"/>
-          </a:xfrm>
-          <a:prstGeom prst="ellipse">
-            <a:avLst/>
-          </a:prstGeom>
-          <a:solidFill>
-            <a:srgbClr val="2F8A28"/>
-          </a:solidFill>
-          <a:ln w="12700">
-            <a:solidFill>
-              <a:srgbClr val="2F8A28"/>
-            </a:solidFill>
-            <a:prstDash val="solid"/>
-          </a:ln>
-        </p:spPr>
+          <p:cNvPr id="14" name="Text 12"/>
+          <p:cNvSpPr/>
+          <p:nvPr/>
+        </p:nvSpPr>
+        <p:spPr>
+          <a:xfrm>
+            <a:off x="7799832" y="2935224"/>
+            <a:ext cx="3145536" cy="256032"/>
+          </a:xfrm>
+          <a:prstGeom prst="rect">
+            <a:avLst/>
+          </a:prstGeom>
+          <a:noFill/>
+          <a:ln/>
+        </p:spPr>
+        <p:txBody>
+          <a:bodyPr wrap="square" lIns="0" tIns="0" rIns="0" bIns="0" rtlCol="0" anchor="ctr"/>
+          <a:lstStyle/>
+          <a:p>
+            <a:pPr indent="0" marL="0">
+              <a:buNone/>
+            </a:pPr>
+            <a:r>
+              <a:rPr lang="en-US" sz="1300" b="1" dirty="0">
+                <a:solidFill>
+                  <a:srgbClr val="0068B7"/>
+                </a:solidFill>
+                <a:latin typeface="Aptos" pitchFamily="34" charset="0"/>
+                <a:ea typeface="Aptos" pitchFamily="34" charset="-122"/>
+                <a:cs typeface="Aptos" pitchFamily="34" charset="-120"/>
+              </a:rPr>
+              <a:t>Concept checkpoints</a:t>
+            </a:r>
+            <a:endParaRPr lang="en-US" sz="1300" dirty="0"/>
+          </a:p>
+        </p:txBody>
+      </p:sp>
+      <p:sp>
+        <p:nvSpPr>
+          <p:cNvPr id="15" name="Text 13"/>
+          <p:cNvSpPr/>
+          <p:nvPr/>
+        </p:nvSpPr>
+        <p:spPr>
+          <a:xfrm>
+            <a:off x="7818120" y="3300984"/>
+            <a:ext cx="3090672" cy="877824"/>
+          </a:xfrm>
+          <a:prstGeom prst="rect">
+            <a:avLst/>
+          </a:prstGeom>
+          <a:noFill/>
+          <a:ln/>
+        </p:spPr>
+        <p:txBody>
+          <a:bodyPr wrap="square" lIns="254" tIns="254" rIns="254" bIns="254" rtlCol="0" anchor="t">
+            <a:normAutofit/>
+          </a:bodyPr>
+          <a:lstStyle/>
+          <a:p>
+            <a:r>
+              <a:rPr lang="en-US" sz="1380" dirty="0">
+                <a:solidFill>
+                  <a:srgbClr val="17364A"/>
+                </a:solidFill>
+                <a:latin typeface="Aptos" pitchFamily="34" charset="0"/>
+                <a:ea typeface="Aptos" pitchFamily="34" charset="-122"/>
+                <a:cs typeface="Aptos" pitchFamily="34" charset="-120"/>
+              </a:rPr>
+              <a:t>This national-level module is intended for training and planning purposes.</a:t>
+            </a:r>
+            <a:endParaRPr lang="en-US" sz="1380" dirty="0"/>
+          </a:p>
+          <a:p>
+            <a:r>
+              <a:rPr lang="en-US" sz="1380" dirty="0">
+                <a:solidFill>
+                  <a:srgbClr val="17364A"/>
+                </a:solidFill>
+                <a:latin typeface="Aptos" pitchFamily="34" charset="0"/>
+                <a:ea typeface="Aptos" pitchFamily="34" charset="-122"/>
+                <a:cs typeface="Aptos" pitchFamily="34" charset="-120"/>
+              </a:rPr>
+              <a:t>It does not replace legal, privacy, procurement, civil rights, records, or agency policy.</a:t>
+            </a:r>
+            <a:endParaRPr lang="en-US" sz="1380" dirty="0"/>
+          </a:p>
+          <a:p>
+            <a:r>
+              <a:rPr lang="en-US" sz="1380" dirty="0">
+                <a:solidFill>
+                  <a:srgbClr val="17364A"/>
+                </a:solidFill>
+                <a:latin typeface="Aptos" pitchFamily="34" charset="0"/>
+                <a:ea typeface="Aptos" pitchFamily="34" charset="-122"/>
+                <a:cs typeface="Aptos" pitchFamily="34" charset="-120"/>
+              </a:rPr>
+              <a:t>Learners should confirm applicable requirements in their own jurisdiction and organization.</a:t>
+            </a:r>
+            <a:endParaRPr lang="en-US" sz="1380" dirty="0"/>
+          </a:p>
+        </p:txBody>
       </p:sp>
       <p:sp>
         <p:nvSpPr>
           <p:cNvPr id="16" name="Shape 14"/>
-          <p:cNvSpPr/>
-          <p:nvPr/>
-        </p:nvSpPr>
-        <p:spPr>
-          <a:xfrm>
-            <a:off x="9089136" y="3456432"/>
-            <a:ext cx="566928" cy="566928"/>
-          </a:xfrm>
-          <a:prstGeom prst="ellipse">
-            <a:avLst/>
-          </a:prstGeom>
-          <a:solidFill>
-            <a:srgbClr val="6A4CA3"/>
-          </a:solidFill>
-          <a:ln w="12700">
-            <a:solidFill>
-              <a:srgbClr val="6A4CA3"/>
-            </a:solidFill>
-            <a:prstDash val="solid"/>
-          </a:ln>
-        </p:spPr>
-      </p:sp>
-      <p:sp>
-        <p:nvSpPr>
-          <p:cNvPr id="17" name="Shape 15"/>
-          <p:cNvSpPr/>
-          <p:nvPr/>
-        </p:nvSpPr>
-        <p:spPr>
-          <a:xfrm>
-            <a:off x="8385048" y="3419856"/>
-            <a:ext cx="1975104" cy="0"/>
-          </a:xfrm>
-          <a:prstGeom prst="line">
-            <a:avLst/>
-          </a:prstGeom>
-          <a:noFill/>
-          <a:ln w="25400">
-            <a:solidFill>
-              <a:srgbClr val="8ABBD8"/>
-            </a:solidFill>
-            <a:prstDash val="solid"/>
-          </a:ln>
-        </p:spPr>
-      </p:sp>
-      <p:sp>
-        <p:nvSpPr>
-          <p:cNvPr id="18" name="Shape 16"/>
-          <p:cNvSpPr/>
-          <p:nvPr/>
-        </p:nvSpPr>
-        <p:spPr>
-          <a:xfrm>
-            <a:off x="8202168" y="3630168"/>
-            <a:ext cx="1170432" cy="118872"/>
-          </a:xfrm>
-          <a:prstGeom prst="line">
-            <a:avLst/>
-          </a:prstGeom>
-          <a:noFill/>
-          <a:ln w="25400">
-            <a:solidFill>
-              <a:srgbClr val="8ABBD8"/>
-            </a:solidFill>
-            <a:prstDash val="solid"/>
-          </a:ln>
-        </p:spPr>
-      </p:sp>
-      <p:sp>
-        <p:nvSpPr>
-          <p:cNvPr id="19" name="Shape 17"/>
-          <p:cNvSpPr/>
-          <p:nvPr/>
-        </p:nvSpPr>
-        <p:spPr>
-          <a:xfrm>
-            <a:off x="10543032" y="3630168"/>
-            <a:ext cx="-1170432" cy="118872"/>
-          </a:xfrm>
-          <a:prstGeom prst="line">
-            <a:avLst/>
-          </a:prstGeom>
-          <a:noFill/>
-          <a:ln w="25400">
-            <a:solidFill>
-              <a:srgbClr val="8ABBD8"/>
-            </a:solidFill>
-            <a:prstDash val="solid"/>
-          </a:ln>
-        </p:spPr>
-      </p:sp>
-      <p:sp>
-        <p:nvSpPr>
-          <p:cNvPr id="20" name="Text 18"/>
-          <p:cNvSpPr/>
-          <p:nvPr/>
-        </p:nvSpPr>
-        <p:spPr>
-          <a:xfrm>
-            <a:off x="7863840" y="4069080"/>
-            <a:ext cx="3017520" cy="164592"/>
-          </a:xfrm>
-          <a:prstGeom prst="rect">
-            <a:avLst/>
-          </a:prstGeom>
-          <a:noFill/>
-          <a:ln/>
-        </p:spPr>
-        <p:txBody>
-          <a:bodyPr wrap="square" lIns="0" tIns="0" rIns="0" bIns="0" rtlCol="0" anchor="ctr"/>
-          <a:lstStyle/>
-          <a:p>
-            <a:pPr algn="ctr" indent="0" marL="0">
-              <a:buNone/>
-            </a:pPr>
-            <a:r>
-              <a:rPr lang="en-US" sz="900" b="1" dirty="0">
-                <a:solidFill>
-                  <a:srgbClr val="003A63"/>
-                </a:solidFill>
-                <a:latin typeface="Aptos" pitchFamily="34" charset="0"/>
-                <a:ea typeface="Aptos" pitchFamily="34" charset="-122"/>
-                <a:cs typeface="Aptos" pitchFamily="34" charset="-120"/>
-              </a:rPr>
-              <a:t>Decision rights</a:t>
-            </a:r>
-            <a:endParaRPr lang="en-US" sz="900" dirty="0"/>
-          </a:p>
-        </p:txBody>
-      </p:sp>
-      <p:sp>
-        <p:nvSpPr>
-          <p:cNvPr id="21" name="Shape 19"/>
           <p:cNvSpPr/>
           <p:nvPr/>
         </p:nvSpPr>
@@ -19191,7 +16473,7 @@
       </p:sp>
       <p:sp>
         <p:nvSpPr>
-          <p:cNvPr id="22" name="Text 20"/>
+          <p:cNvPr id="17" name="Text 15"/>
           <p:cNvSpPr/>
           <p:nvPr/>
         </p:nvSpPr>
@@ -19230,7 +16512,7 @@
       </p:sp>
       <p:sp>
         <p:nvSpPr>
-          <p:cNvPr id="23" name="Text 21"/>
+          <p:cNvPr id="18" name="Text 16"/>
           <p:cNvSpPr/>
           <p:nvPr/>
         </p:nvSpPr>
@@ -19738,13 +17020,11 @@
             </a:avLst>
           </a:prstGeom>
           <a:solidFill>
-            <a:srgbClr val="FFFFFF">
-              <a:alpha val="88000"/>
-            </a:srgbClr>
+            <a:srgbClr val="FFFFFF"/>
           </a:solidFill>
           <a:ln w="12700">
             <a:solidFill>
-              <a:srgbClr val="D6E8F2"/>
+              <a:srgbClr val="B9D7E6"/>
             </a:solidFill>
             <a:prstDash val="solid"/>
           </a:ln>
@@ -19752,30 +17032,42 @@
       </p:sp>
       <p:sp>
         <p:nvSpPr>
-          <p:cNvPr id="14" name="Shape 12"/>
-          <p:cNvSpPr/>
-          <p:nvPr/>
-        </p:nvSpPr>
-        <p:spPr>
-          <a:xfrm>
-            <a:off x="7927848" y="3319272"/>
-            <a:ext cx="792480" cy="749808"/>
-          </a:xfrm>
-          <a:prstGeom prst="roundRect">
-            <a:avLst>
-              <a:gd name="adj" fmla="val 14634"/>
-            </a:avLst>
-          </a:prstGeom>
-          <a:solidFill>
-            <a:srgbClr val="0068B7"/>
-          </a:solidFill>
-          <a:ln w="12700">
-            <a:solidFill>
-              <a:srgbClr val="0068B7"/>
-            </a:solidFill>
-            <a:prstDash val="solid"/>
-          </a:ln>
-        </p:spPr>
+          <p:cNvPr id="14" name="Text 12"/>
+          <p:cNvSpPr/>
+          <p:nvPr/>
+        </p:nvSpPr>
+        <p:spPr>
+          <a:xfrm>
+            <a:off x="7799832" y="2935224"/>
+            <a:ext cx="3145536" cy="256032"/>
+          </a:xfrm>
+          <a:prstGeom prst="rect">
+            <a:avLst/>
+          </a:prstGeom>
+          <a:noFill/>
+          <a:ln/>
+        </p:spPr>
+        <p:txBody>
+          <a:bodyPr wrap="square" lIns="0" tIns="0" rIns="0" bIns="0" rtlCol="0" anchor="ctr"/>
+          <a:lstStyle/>
+          <a:p>
+            <a:pPr indent="0" marL="0">
+              <a:buNone/>
+            </a:pPr>
+            <a:r>
+              <a:rPr lang="en-US" sz="1300" b="1" dirty="0">
+                <a:solidFill>
+                  <a:srgbClr val="0068B7"/>
+                </a:solidFill>
+                <a:latin typeface="Aptos" pitchFamily="34" charset="0"/>
+                <a:ea typeface="Aptos" pitchFamily="34" charset="-122"/>
+                <a:cs typeface="Aptos" pitchFamily="34" charset="-120"/>
+              </a:rPr>
+              <a:t>Concept checkpoints</a:t>
+            </a:r>
+            <a:endParaRPr lang="en-US" sz="1300" dirty="0"/>
+          </a:p>
+        </p:txBody>
       </p:sp>
       <p:sp>
         <p:nvSpPr>
@@ -19785,240 +17077,67 @@
         </p:nvSpPr>
         <p:spPr>
           <a:xfrm>
-            <a:off x="8001000" y="3511296"/>
-            <a:ext cx="646176" cy="310896"/>
-          </a:xfrm>
-          <a:prstGeom prst="rect">
-            <a:avLst/>
-          </a:prstGeom>
-          <a:noFill/>
-          <a:ln/>
-        </p:spPr>
-        <p:txBody>
-          <a:bodyPr wrap="square" lIns="0" tIns="0" rIns="0" bIns="0" rtlCol="0" anchor="ctr">
+            <a:off x="7818120" y="3300984"/>
+            <a:ext cx="3090672" cy="877824"/>
+          </a:xfrm>
+          <a:prstGeom prst="rect">
+            <a:avLst/>
+          </a:prstGeom>
+          <a:noFill/>
+          <a:ln/>
+        </p:spPr>
+        <p:txBody>
+          <a:bodyPr wrap="square" lIns="254" tIns="254" rIns="254" bIns="254" rtlCol="0" anchor="t">
             <a:normAutofit/>
           </a:bodyPr>
           <a:lstStyle/>
           <a:p>
-            <a:pPr algn="ctr" indent="0" marL="0">
-              <a:buNone/>
-            </a:pPr>
-            <a:r>
-              <a:rPr lang="en-US" sz="1500" b="1" dirty="0">
-                <a:solidFill>
-                  <a:srgbClr val="FFFFFF"/>
-                </a:solidFill>
-                <a:latin typeface="Aptos" pitchFamily="34" charset="0"/>
-                <a:ea typeface="Aptos" pitchFamily="34" charset="-122"/>
-                <a:cs typeface="Aptos" pitchFamily="34" charset="-120"/>
-              </a:rPr>
-              <a:t>Plan</a:t>
-            </a:r>
-            <a:endParaRPr lang="en-US" sz="1500" dirty="0"/>
+            <a:r>
+              <a:rPr lang="en-US" sz="1380" dirty="0">
+                <a:solidFill>
+                  <a:srgbClr val="17364A"/>
+                </a:solidFill>
+                <a:latin typeface="Aptos" pitchFamily="34" charset="0"/>
+                <a:ea typeface="Aptos" pitchFamily="34" charset="-122"/>
+                <a:cs typeface="Aptos" pitchFamily="34" charset="-120"/>
+              </a:rPr>
+              <a:t>eCR matters for AI because it brings structured, timely, clinically relevant information.</a:t>
+            </a:r>
+            <a:endParaRPr lang="en-US" sz="1380" dirty="0"/>
+          </a:p>
+          <a:p>
+            <a:r>
+              <a:rPr lang="en-US" sz="1380" dirty="0">
+                <a:solidFill>
+                  <a:srgbClr val="17364A"/>
+                </a:solidFill>
+                <a:latin typeface="Aptos" pitchFamily="34" charset="0"/>
+                <a:ea typeface="Aptos" pitchFamily="34" charset="-122"/>
+                <a:cs typeface="Aptos" pitchFamily="34" charset="-120"/>
+              </a:rPr>
+              <a:t>It includes trigger logic, routing, standards, jurisdictional rules, provider workflows,.</a:t>
+            </a:r>
+            <a:endParaRPr lang="en-US" sz="1380" dirty="0"/>
+          </a:p>
+          <a:p>
+            <a:r>
+              <a:rPr lang="en-US" sz="1380" dirty="0">
+                <a:solidFill>
+                  <a:srgbClr val="17364A"/>
+                </a:solidFill>
+                <a:latin typeface="Aptos" pitchFamily="34" charset="0"/>
+                <a:ea typeface="Aptos" pitchFamily="34" charset="-122"/>
+                <a:cs typeface="Aptos" pitchFamily="34" charset="-120"/>
+              </a:rPr>
+              <a:t>AI may support eCR by summarizing incoming reports, identifying missing information,.</a:t>
+            </a:r>
+            <a:endParaRPr lang="en-US" sz="1380" dirty="0"/>
           </a:p>
         </p:txBody>
       </p:sp>
       <p:sp>
         <p:nvSpPr>
           <p:cNvPr id="16" name="Shape 14"/>
-          <p:cNvSpPr/>
-          <p:nvPr/>
-        </p:nvSpPr>
-        <p:spPr>
-          <a:xfrm>
-            <a:off x="8976360" y="3319272"/>
-            <a:ext cx="792480" cy="749808"/>
-          </a:xfrm>
-          <a:prstGeom prst="roundRect">
-            <a:avLst>
-              <a:gd name="adj" fmla="val 14634"/>
-            </a:avLst>
-          </a:prstGeom>
-          <a:solidFill>
-            <a:srgbClr val="2F8A28"/>
-          </a:solidFill>
-          <a:ln w="12700">
-            <a:solidFill>
-              <a:srgbClr val="2F8A28"/>
-            </a:solidFill>
-            <a:prstDash val="solid"/>
-          </a:ln>
-        </p:spPr>
-      </p:sp>
-      <p:sp>
-        <p:nvSpPr>
-          <p:cNvPr id="17" name="Text 15"/>
-          <p:cNvSpPr/>
-          <p:nvPr/>
-        </p:nvSpPr>
-        <p:spPr>
-          <a:xfrm>
-            <a:off x="9049512" y="3511296"/>
-            <a:ext cx="646176" cy="310896"/>
-          </a:xfrm>
-          <a:prstGeom prst="rect">
-            <a:avLst/>
-          </a:prstGeom>
-          <a:noFill/>
-          <a:ln/>
-        </p:spPr>
-        <p:txBody>
-          <a:bodyPr wrap="square" lIns="0" tIns="0" rIns="0" bIns="0" rtlCol="0" anchor="ctr">
-            <a:normAutofit/>
-          </a:bodyPr>
-          <a:lstStyle/>
-          <a:p>
-            <a:pPr algn="ctr" indent="0" marL="0">
-              <a:buNone/>
-            </a:pPr>
-            <a:r>
-              <a:rPr lang="en-US" sz="1500" b="1" dirty="0">
-                <a:solidFill>
-                  <a:srgbClr val="FFFFFF"/>
-                </a:solidFill>
-                <a:latin typeface="Aptos" pitchFamily="34" charset="0"/>
-                <a:ea typeface="Aptos" pitchFamily="34" charset="-122"/>
-                <a:cs typeface="Aptos" pitchFamily="34" charset="-120"/>
-              </a:rPr>
-              <a:t>Do</a:t>
-            </a:r>
-            <a:endParaRPr lang="en-US" sz="1500" dirty="0"/>
-          </a:p>
-        </p:txBody>
-      </p:sp>
-      <p:sp>
-        <p:nvSpPr>
-          <p:cNvPr id="18" name="Shape 16"/>
-          <p:cNvSpPr/>
-          <p:nvPr/>
-        </p:nvSpPr>
-        <p:spPr>
-          <a:xfrm>
-            <a:off x="10024872" y="3319272"/>
-            <a:ext cx="792480" cy="749808"/>
-          </a:xfrm>
-          <a:prstGeom prst="roundRect">
-            <a:avLst>
-              <a:gd name="adj" fmla="val 14634"/>
-            </a:avLst>
-          </a:prstGeom>
-          <a:solidFill>
-            <a:srgbClr val="D69A2D"/>
-          </a:solidFill>
-          <a:ln w="12700">
-            <a:solidFill>
-              <a:srgbClr val="D69A2D"/>
-            </a:solidFill>
-            <a:prstDash val="solid"/>
-          </a:ln>
-        </p:spPr>
-      </p:sp>
-      <p:sp>
-        <p:nvSpPr>
-          <p:cNvPr id="19" name="Text 17"/>
-          <p:cNvSpPr/>
-          <p:nvPr/>
-        </p:nvSpPr>
-        <p:spPr>
-          <a:xfrm>
-            <a:off x="10098024" y="3511296"/>
-            <a:ext cx="646176" cy="310896"/>
-          </a:xfrm>
-          <a:prstGeom prst="rect">
-            <a:avLst/>
-          </a:prstGeom>
-          <a:noFill/>
-          <a:ln/>
-        </p:spPr>
-        <p:txBody>
-          <a:bodyPr wrap="square" lIns="0" tIns="0" rIns="0" bIns="0" rtlCol="0" anchor="ctr">
-            <a:normAutofit/>
-          </a:bodyPr>
-          <a:lstStyle/>
-          <a:p>
-            <a:pPr algn="ctr" indent="0" marL="0">
-              <a:buNone/>
-            </a:pPr>
-            <a:r>
-              <a:rPr lang="en-US" sz="1500" b="1" dirty="0">
-                <a:solidFill>
-                  <a:srgbClr val="FFFFFF"/>
-                </a:solidFill>
-                <a:latin typeface="Aptos" pitchFamily="34" charset="0"/>
-                <a:ea typeface="Aptos" pitchFamily="34" charset="-122"/>
-                <a:cs typeface="Aptos" pitchFamily="34" charset="-120"/>
-              </a:rPr>
-              <a:t>Review</a:t>
-            </a:r>
-            <a:endParaRPr lang="en-US" sz="1500" dirty="0"/>
-          </a:p>
-        </p:txBody>
-      </p:sp>
-      <p:sp>
-        <p:nvSpPr>
-          <p:cNvPr id="20" name="Shape 18"/>
-          <p:cNvSpPr/>
-          <p:nvPr/>
-        </p:nvSpPr>
-        <p:spPr>
-          <a:xfrm>
-            <a:off x="8293608" y="4389120"/>
-            <a:ext cx="2157984" cy="0"/>
-          </a:xfrm>
-          <a:prstGeom prst="line">
-            <a:avLst/>
-          </a:prstGeom>
-          <a:noFill/>
-          <a:ln w="25400">
-            <a:solidFill>
-              <a:srgbClr val="8ABBD8"/>
-            </a:solidFill>
-            <a:prstDash val="solid"/>
-          </a:ln>
-        </p:spPr>
-      </p:sp>
-      <p:sp>
-        <p:nvSpPr>
-          <p:cNvPr id="21" name="Text 19"/>
-          <p:cNvSpPr/>
-          <p:nvPr/>
-        </p:nvSpPr>
-        <p:spPr>
-          <a:xfrm>
-            <a:off x="7909560" y="3977640"/>
-            <a:ext cx="2926080" cy="182880"/>
-          </a:xfrm>
-          <a:prstGeom prst="rect">
-            <a:avLst/>
-          </a:prstGeom>
-          <a:noFill/>
-          <a:ln/>
-        </p:spPr>
-        <p:txBody>
-          <a:bodyPr wrap="square" lIns="0" tIns="0" rIns="0" bIns="0" rtlCol="0" anchor="ctr"/>
-          <a:lstStyle/>
-          <a:p>
-            <a:pPr algn="ctr" indent="0" marL="0">
-              <a:buNone/>
-            </a:pPr>
-            <a:r>
-              <a:rPr lang="en-US" sz="1000" dirty="0">
-                <a:solidFill>
-                  <a:srgbClr val="003A63"/>
-                </a:solidFill>
-                <a:latin typeface="Aptos" pitchFamily="34" charset="0"/>
-                <a:ea typeface="Aptos" pitchFamily="34" charset="-122"/>
-                <a:cs typeface="Aptos" pitchFamily="34" charset="-120"/>
-              </a:rPr>
-              <a:t>Dependencies visible</a:t>
-            </a:r>
-            <a:endParaRPr lang="en-US" sz="1000" dirty="0"/>
-          </a:p>
-        </p:txBody>
-      </p:sp>
-      <p:sp>
-        <p:nvSpPr>
-          <p:cNvPr id="22" name="Shape 20"/>
           <p:cNvSpPr/>
           <p:nvPr/>
         </p:nvSpPr>
@@ -20045,7 +17164,7 @@
       </p:sp>
       <p:sp>
         <p:nvSpPr>
-          <p:cNvPr id="23" name="Text 21"/>
+          <p:cNvPr id="17" name="Text 15"/>
           <p:cNvSpPr/>
           <p:nvPr/>
         </p:nvSpPr>
@@ -20084,7 +17203,7 @@
       </p:sp>
       <p:sp>
         <p:nvSpPr>
-          <p:cNvPr id="24" name="Text 22"/>
+          <p:cNvPr id="18" name="Text 16"/>
           <p:cNvSpPr/>
           <p:nvPr/>
         </p:nvSpPr>
@@ -20592,13 +17711,11 @@
             </a:avLst>
           </a:prstGeom>
           <a:solidFill>
-            <a:srgbClr val="FFFFFF">
-              <a:alpha val="88000"/>
-            </a:srgbClr>
+            <a:srgbClr val="FFFFFF"/>
           </a:solidFill>
           <a:ln w="12700">
             <a:solidFill>
-              <a:srgbClr val="D6E8F2"/>
+              <a:srgbClr val="B9D7E6"/>
             </a:solidFill>
             <a:prstDash val="solid"/>
           </a:ln>
@@ -20606,30 +17723,42 @@
       </p:sp>
       <p:sp>
         <p:nvSpPr>
-          <p:cNvPr id="14" name="Shape 12"/>
-          <p:cNvSpPr/>
-          <p:nvPr/>
-        </p:nvSpPr>
-        <p:spPr>
-          <a:xfrm>
-            <a:off x="7927848" y="3319272"/>
-            <a:ext cx="792480" cy="749808"/>
-          </a:xfrm>
-          <a:prstGeom prst="roundRect">
-            <a:avLst>
-              <a:gd name="adj" fmla="val 14634"/>
-            </a:avLst>
-          </a:prstGeom>
-          <a:solidFill>
-            <a:srgbClr val="0068B7"/>
-          </a:solidFill>
-          <a:ln w="12700">
-            <a:solidFill>
-              <a:srgbClr val="0068B7"/>
-            </a:solidFill>
-            <a:prstDash val="solid"/>
-          </a:ln>
-        </p:spPr>
+          <p:cNvPr id="14" name="Text 12"/>
+          <p:cNvSpPr/>
+          <p:nvPr/>
+        </p:nvSpPr>
+        <p:spPr>
+          <a:xfrm>
+            <a:off x="7799832" y="2935224"/>
+            <a:ext cx="3145536" cy="256032"/>
+          </a:xfrm>
+          <a:prstGeom prst="rect">
+            <a:avLst/>
+          </a:prstGeom>
+          <a:noFill/>
+          <a:ln/>
+        </p:spPr>
+        <p:txBody>
+          <a:bodyPr wrap="square" lIns="0" tIns="0" rIns="0" bIns="0" rtlCol="0" anchor="ctr"/>
+          <a:lstStyle/>
+          <a:p>
+            <a:pPr indent="0" marL="0">
+              <a:buNone/>
+            </a:pPr>
+            <a:r>
+              <a:rPr lang="en-US" sz="1300" b="1" dirty="0">
+                <a:solidFill>
+                  <a:srgbClr val="0068B7"/>
+                </a:solidFill>
+                <a:latin typeface="Aptos" pitchFamily="34" charset="0"/>
+                <a:ea typeface="Aptos" pitchFamily="34" charset="-122"/>
+                <a:cs typeface="Aptos" pitchFamily="34" charset="-120"/>
+              </a:rPr>
+              <a:t>Concept checkpoints</a:t>
+            </a:r>
+            <a:endParaRPr lang="en-US" sz="1300" dirty="0"/>
+          </a:p>
+        </p:txBody>
       </p:sp>
       <p:sp>
         <p:nvSpPr>
@@ -20639,240 +17768,67 @@
         </p:nvSpPr>
         <p:spPr>
           <a:xfrm>
-            <a:off x="8001000" y="3511296"/>
-            <a:ext cx="646176" cy="310896"/>
-          </a:xfrm>
-          <a:prstGeom prst="rect">
-            <a:avLst/>
-          </a:prstGeom>
-          <a:noFill/>
-          <a:ln/>
-        </p:spPr>
-        <p:txBody>
-          <a:bodyPr wrap="square" lIns="0" tIns="0" rIns="0" bIns="0" rtlCol="0" anchor="ctr">
+            <a:off x="7818120" y="3300984"/>
+            <a:ext cx="3090672" cy="877824"/>
+          </a:xfrm>
+          <a:prstGeom prst="rect">
+            <a:avLst/>
+          </a:prstGeom>
+          <a:noFill/>
+          <a:ln/>
+        </p:spPr>
+        <p:txBody>
+          <a:bodyPr wrap="square" lIns="254" tIns="254" rIns="254" bIns="254" rtlCol="0" anchor="t">
             <a:normAutofit/>
           </a:bodyPr>
           <a:lstStyle/>
           <a:p>
-            <a:pPr algn="ctr" indent="0" marL="0">
-              <a:buNone/>
-            </a:pPr>
-            <a:r>
-              <a:rPr lang="en-US" sz="1500" b="1" dirty="0">
-                <a:solidFill>
-                  <a:srgbClr val="FFFFFF"/>
-                </a:solidFill>
-                <a:latin typeface="Aptos" pitchFamily="34" charset="0"/>
-                <a:ea typeface="Aptos" pitchFamily="34" charset="-122"/>
-                <a:cs typeface="Aptos" pitchFamily="34" charset="-120"/>
-              </a:rPr>
-              <a:t>Plan</a:t>
-            </a:r>
-            <a:endParaRPr lang="en-US" sz="1500" dirty="0"/>
+            <a:r>
+              <a:rPr lang="en-US" sz="1380" dirty="0">
+                <a:solidFill>
+                  <a:srgbClr val="17364A"/>
+                </a:solidFill>
+                <a:latin typeface="Aptos" pitchFamily="34" charset="0"/>
+                <a:ea typeface="Aptos" pitchFamily="34" charset="-122"/>
+                <a:cs typeface="Aptos" pitchFamily="34" charset="-120"/>
+              </a:rPr>
+              <a:t>Electronic case reporting is the automated exchange of case report information from.</a:t>
+            </a:r>
+            <a:endParaRPr lang="en-US" sz="1380" dirty="0"/>
+          </a:p>
+          <a:p>
+            <a:r>
+              <a:rPr lang="en-US" sz="1380" dirty="0">
+                <a:solidFill>
+                  <a:srgbClr val="17364A"/>
+                </a:solidFill>
+                <a:latin typeface="Aptos" pitchFamily="34" charset="0"/>
+                <a:ea typeface="Aptos" pitchFamily="34" charset="-122"/>
+                <a:cs typeface="Aptos" pitchFamily="34" charset="-120"/>
+              </a:rPr>
+              <a:t>eICR.</a:t>
+            </a:r>
+            <a:endParaRPr lang="en-US" sz="1380" dirty="0"/>
+          </a:p>
+          <a:p>
+            <a:r>
+              <a:rPr lang="en-US" sz="1380" dirty="0">
+                <a:solidFill>
+                  <a:srgbClr val="17364A"/>
+                </a:solidFill>
+                <a:latin typeface="Aptos" pitchFamily="34" charset="0"/>
+                <a:ea typeface="Aptos" pitchFamily="34" charset="-122"/>
+                <a:cs typeface="Aptos" pitchFamily="34" charset="-120"/>
+              </a:rPr>
+              <a:t>The electronic initial case report is the structured report sent from healthcare to public.</a:t>
+            </a:r>
+            <a:endParaRPr lang="en-US" sz="1380" dirty="0"/>
           </a:p>
         </p:txBody>
       </p:sp>
       <p:sp>
         <p:nvSpPr>
           <p:cNvPr id="16" name="Shape 14"/>
-          <p:cNvSpPr/>
-          <p:nvPr/>
-        </p:nvSpPr>
-        <p:spPr>
-          <a:xfrm>
-            <a:off x="8976360" y="3319272"/>
-            <a:ext cx="792480" cy="749808"/>
-          </a:xfrm>
-          <a:prstGeom prst="roundRect">
-            <a:avLst>
-              <a:gd name="adj" fmla="val 14634"/>
-            </a:avLst>
-          </a:prstGeom>
-          <a:solidFill>
-            <a:srgbClr val="2F8A28"/>
-          </a:solidFill>
-          <a:ln w="12700">
-            <a:solidFill>
-              <a:srgbClr val="2F8A28"/>
-            </a:solidFill>
-            <a:prstDash val="solid"/>
-          </a:ln>
-        </p:spPr>
-      </p:sp>
-      <p:sp>
-        <p:nvSpPr>
-          <p:cNvPr id="17" name="Text 15"/>
-          <p:cNvSpPr/>
-          <p:nvPr/>
-        </p:nvSpPr>
-        <p:spPr>
-          <a:xfrm>
-            <a:off x="9049512" y="3511296"/>
-            <a:ext cx="646176" cy="310896"/>
-          </a:xfrm>
-          <a:prstGeom prst="rect">
-            <a:avLst/>
-          </a:prstGeom>
-          <a:noFill/>
-          <a:ln/>
-        </p:spPr>
-        <p:txBody>
-          <a:bodyPr wrap="square" lIns="0" tIns="0" rIns="0" bIns="0" rtlCol="0" anchor="ctr">
-            <a:normAutofit/>
-          </a:bodyPr>
-          <a:lstStyle/>
-          <a:p>
-            <a:pPr algn="ctr" indent="0" marL="0">
-              <a:buNone/>
-            </a:pPr>
-            <a:r>
-              <a:rPr lang="en-US" sz="1500" b="1" dirty="0">
-                <a:solidFill>
-                  <a:srgbClr val="FFFFFF"/>
-                </a:solidFill>
-                <a:latin typeface="Aptos" pitchFamily="34" charset="0"/>
-                <a:ea typeface="Aptos" pitchFamily="34" charset="-122"/>
-                <a:cs typeface="Aptos" pitchFamily="34" charset="-120"/>
-              </a:rPr>
-              <a:t>Do</a:t>
-            </a:r>
-            <a:endParaRPr lang="en-US" sz="1500" dirty="0"/>
-          </a:p>
-        </p:txBody>
-      </p:sp>
-      <p:sp>
-        <p:nvSpPr>
-          <p:cNvPr id="18" name="Shape 16"/>
-          <p:cNvSpPr/>
-          <p:nvPr/>
-        </p:nvSpPr>
-        <p:spPr>
-          <a:xfrm>
-            <a:off x="10024872" y="3319272"/>
-            <a:ext cx="792480" cy="749808"/>
-          </a:xfrm>
-          <a:prstGeom prst="roundRect">
-            <a:avLst>
-              <a:gd name="adj" fmla="val 14634"/>
-            </a:avLst>
-          </a:prstGeom>
-          <a:solidFill>
-            <a:srgbClr val="D69A2D"/>
-          </a:solidFill>
-          <a:ln w="12700">
-            <a:solidFill>
-              <a:srgbClr val="D69A2D"/>
-            </a:solidFill>
-            <a:prstDash val="solid"/>
-          </a:ln>
-        </p:spPr>
-      </p:sp>
-      <p:sp>
-        <p:nvSpPr>
-          <p:cNvPr id="19" name="Text 17"/>
-          <p:cNvSpPr/>
-          <p:nvPr/>
-        </p:nvSpPr>
-        <p:spPr>
-          <a:xfrm>
-            <a:off x="10098024" y="3511296"/>
-            <a:ext cx="646176" cy="310896"/>
-          </a:xfrm>
-          <a:prstGeom prst="rect">
-            <a:avLst/>
-          </a:prstGeom>
-          <a:noFill/>
-          <a:ln/>
-        </p:spPr>
-        <p:txBody>
-          <a:bodyPr wrap="square" lIns="0" tIns="0" rIns="0" bIns="0" rtlCol="0" anchor="ctr">
-            <a:normAutofit/>
-          </a:bodyPr>
-          <a:lstStyle/>
-          <a:p>
-            <a:pPr algn="ctr" indent="0" marL="0">
-              <a:buNone/>
-            </a:pPr>
-            <a:r>
-              <a:rPr lang="en-US" sz="1500" b="1" dirty="0">
-                <a:solidFill>
-                  <a:srgbClr val="FFFFFF"/>
-                </a:solidFill>
-                <a:latin typeface="Aptos" pitchFamily="34" charset="0"/>
-                <a:ea typeface="Aptos" pitchFamily="34" charset="-122"/>
-                <a:cs typeface="Aptos" pitchFamily="34" charset="-120"/>
-              </a:rPr>
-              <a:t>Review</a:t>
-            </a:r>
-            <a:endParaRPr lang="en-US" sz="1500" dirty="0"/>
-          </a:p>
-        </p:txBody>
-      </p:sp>
-      <p:sp>
-        <p:nvSpPr>
-          <p:cNvPr id="20" name="Shape 18"/>
-          <p:cNvSpPr/>
-          <p:nvPr/>
-        </p:nvSpPr>
-        <p:spPr>
-          <a:xfrm>
-            <a:off x="8293608" y="4389120"/>
-            <a:ext cx="2157984" cy="0"/>
-          </a:xfrm>
-          <a:prstGeom prst="line">
-            <a:avLst/>
-          </a:prstGeom>
-          <a:noFill/>
-          <a:ln w="25400">
-            <a:solidFill>
-              <a:srgbClr val="8ABBD8"/>
-            </a:solidFill>
-            <a:prstDash val="solid"/>
-          </a:ln>
-        </p:spPr>
-      </p:sp>
-      <p:sp>
-        <p:nvSpPr>
-          <p:cNvPr id="21" name="Text 19"/>
-          <p:cNvSpPr/>
-          <p:nvPr/>
-        </p:nvSpPr>
-        <p:spPr>
-          <a:xfrm>
-            <a:off x="7909560" y="3977640"/>
-            <a:ext cx="2926080" cy="182880"/>
-          </a:xfrm>
-          <a:prstGeom prst="rect">
-            <a:avLst/>
-          </a:prstGeom>
-          <a:noFill/>
-          <a:ln/>
-        </p:spPr>
-        <p:txBody>
-          <a:bodyPr wrap="square" lIns="0" tIns="0" rIns="0" bIns="0" rtlCol="0" anchor="ctr"/>
-          <a:lstStyle/>
-          <a:p>
-            <a:pPr algn="ctr" indent="0" marL="0">
-              <a:buNone/>
-            </a:pPr>
-            <a:r>
-              <a:rPr lang="en-US" sz="1000" dirty="0">
-                <a:solidFill>
-                  <a:srgbClr val="003A63"/>
-                </a:solidFill>
-                <a:latin typeface="Aptos" pitchFamily="34" charset="0"/>
-                <a:ea typeface="Aptos" pitchFamily="34" charset="-122"/>
-                <a:cs typeface="Aptos" pitchFamily="34" charset="-120"/>
-              </a:rPr>
-              <a:t>Dependencies visible</a:t>
-            </a:r>
-            <a:endParaRPr lang="en-US" sz="1000" dirty="0"/>
-          </a:p>
-        </p:txBody>
-      </p:sp>
-      <p:sp>
-        <p:nvSpPr>
-          <p:cNvPr id="22" name="Shape 20"/>
           <p:cNvSpPr/>
           <p:nvPr/>
         </p:nvSpPr>
@@ -20899,7 +17855,7 @@
       </p:sp>
       <p:sp>
         <p:nvSpPr>
-          <p:cNvPr id="23" name="Text 21"/>
+          <p:cNvPr id="17" name="Text 15"/>
           <p:cNvSpPr/>
           <p:nvPr/>
         </p:nvSpPr>
@@ -20938,7 +17894,7 @@
       </p:sp>
       <p:sp>
         <p:nvSpPr>
-          <p:cNvPr id="24" name="Text 22"/>
+          <p:cNvPr id="18" name="Text 16"/>
           <p:cNvSpPr/>
           <p:nvPr/>
         </p:nvSpPr>

--- a/downloads/presentations/modules/arc-230.pptx
+++ b/downloads/presentations/modules/arc-230.pptx
@@ -3441,49 +3441,58 @@
           <a:ln/>
         </p:spPr>
         <p:txBody>
-          <a:bodyPr wrap="square" lIns="635" tIns="635" rIns="635" bIns="635" rtlCol="0" anchor="t">
+          <a:bodyPr wrap="square" lIns="1016" tIns="1016" rIns="1016" bIns="1016" rtlCol="0" anchor="t">
             <a:normAutofit/>
           </a:bodyPr>
           <a:lstStyle/>
           <a:p>
+            <a:pPr indent="0" marL="0">
+              <a:buNone/>
+            </a:pPr>
             <a:r>
               <a:rPr lang="en-US" sz="2100" dirty="0">
                 <a:solidFill>
-                  <a:srgbClr val="17364A"/>
-                </a:solidFill>
-                <a:latin typeface="Aptos" pitchFamily="34" charset="0"/>
-                <a:ea typeface="Aptos" pitchFamily="34" charset="-122"/>
-                <a:cs typeface="Aptos" pitchFamily="34" charset="-120"/>
-              </a:rPr>
-              <a:t>eRSD and RCTC.</a:t>
+                  <a:srgbClr val="003A63"/>
+                </a:solidFill>
+                <a:latin typeface="Aptos" pitchFamily="34" charset="0"/>
+                <a:ea typeface="Aptos" pitchFamily="34" charset="-122"/>
+                <a:cs typeface="Aptos" pitchFamily="34" charset="-120"/>
+              </a:rPr>
+              <a:t>• eRSD and RCTC.</a:t>
             </a:r>
             <a:endParaRPr lang="en-US" sz="2100" dirty="0"/>
           </a:p>
           <a:p>
+            <a:pPr indent="0" marL="0">
+              <a:buNone/>
+            </a:pPr>
             <a:r>
               <a:rPr lang="en-US" sz="2100" dirty="0">
                 <a:solidFill>
-                  <a:srgbClr val="17364A"/>
-                </a:solidFill>
-                <a:latin typeface="Aptos" pitchFamily="34" charset="0"/>
-                <a:ea typeface="Aptos" pitchFamily="34" charset="-122"/>
-                <a:cs typeface="Aptos" pitchFamily="34" charset="-120"/>
-              </a:rPr>
-              <a:t>Electronic Reporting and Surveillance Distribution supports the distribution of reporting criteria and.</a:t>
+                  <a:srgbClr val="003A63"/>
+                </a:solidFill>
+                <a:latin typeface="Aptos" pitchFamily="34" charset="0"/>
+                <a:ea typeface="Aptos" pitchFamily="34" charset="-122"/>
+                <a:cs typeface="Aptos" pitchFamily="34" charset="-120"/>
+              </a:rPr>
+              <a:t>• Electronic Reporting and Surveillance Distribution supports the distribution of reporting.</a:t>
             </a:r>
             <a:endParaRPr lang="en-US" sz="2100" dirty="0"/>
           </a:p>
           <a:p>
+            <a:pPr indent="0" marL="0">
+              <a:buNone/>
+            </a:pPr>
             <a:r>
               <a:rPr lang="en-US" sz="2100" dirty="0">
                 <a:solidFill>
-                  <a:srgbClr val="17364A"/>
-                </a:solidFill>
-                <a:latin typeface="Aptos" pitchFamily="34" charset="0"/>
-                <a:ea typeface="Aptos" pitchFamily="34" charset="-122"/>
-                <a:cs typeface="Aptos" pitchFamily="34" charset="-120"/>
-              </a:rPr>
-              <a:t>Reportable Conditions Trigger Codes help EHRs determine when an eICR should be generated.</a:t>
+                  <a:srgbClr val="003A63"/>
+                </a:solidFill>
+                <a:latin typeface="Aptos" pitchFamily="34" charset="0"/>
+                <a:ea typeface="Aptos" pitchFamily="34" charset="-122"/>
+                <a:cs typeface="Aptos" pitchFamily="34" charset="-120"/>
+              </a:rPr>
+              <a:t>• Reportable Conditions Trigger Codes help EHRs determine when an eICR should be generated.</a:t>
             </a:r>
             <a:endParaRPr lang="en-US" sz="2100" dirty="0"/>
           </a:p>
@@ -3563,17 +3572,17 @@
         </p:nvSpPr>
         <p:spPr>
           <a:xfrm>
-            <a:off x="7799832" y="1828800"/>
-            <a:ext cx="3145536" cy="685800"/>
-          </a:xfrm>
-          <a:prstGeom prst="rect">
-            <a:avLst/>
-          </a:prstGeom>
-          <a:noFill/>
-          <a:ln/>
-        </p:spPr>
-        <p:txBody>
-          <a:bodyPr wrap="square" lIns="0" tIns="0" rIns="0" bIns="0" rtlCol="0" anchor="t">
+            <a:off x="7799832" y="1801368"/>
+            <a:ext cx="3145536" cy="758952"/>
+          </a:xfrm>
+          <a:prstGeom prst="rect">
+            <a:avLst/>
+          </a:prstGeom>
+          <a:noFill/>
+          <a:ln/>
+        </p:spPr>
+        <p:txBody>
+          <a:bodyPr wrap="square" lIns="254" tIns="254" rIns="254" bIns="254" rtlCol="0" anchor="t">
             <a:normAutofit/>
           </a:bodyPr>
           <a:lstStyle/>
@@ -3582,7 +3591,7 @@
               <a:buNone/>
             </a:pPr>
             <a:r>
-              <a:rPr lang="en-US" sz="1550" dirty="0">
+              <a:rPr lang="en-US" sz="1320" dirty="0">
                 <a:solidFill>
                   <a:srgbClr val="17364A"/>
                 </a:solidFill>
@@ -3592,7 +3601,7 @@
               </a:rPr>
               <a:t>eRSD and RCTC.</a:t>
             </a:r>
-            <a:endParaRPr lang="en-US" sz="1550" dirty="0"/>
+            <a:endParaRPr lang="en-US" sz="1320" dirty="0"/>
           </a:p>
         </p:txBody>
       </p:sp>
@@ -3680,13 +3689,16 @@
           <a:ln/>
         </p:spPr>
         <p:txBody>
-          <a:bodyPr wrap="square" lIns="254" tIns="254" rIns="254" bIns="254" rtlCol="0" anchor="t">
+          <a:bodyPr wrap="square" lIns="508" tIns="508" rIns="508" bIns="508" rtlCol="0" anchor="t">
             <a:normAutofit/>
           </a:bodyPr>
           <a:lstStyle/>
           <a:p>
-            <a:r>
-              <a:rPr lang="en-US" sz="1380" dirty="0">
+            <a:pPr indent="0" marL="0">
+              <a:buNone/>
+            </a:pPr>
+            <a:r>
+              <a:rPr lang="en-US" sz="1220" dirty="0">
                 <a:solidFill>
                   <a:srgbClr val="17364A"/>
                 </a:solidFill>
@@ -3694,13 +3706,16 @@
                 <a:ea typeface="Aptos" pitchFamily="34" charset="-122"/>
                 <a:cs typeface="Aptos" pitchFamily="34" charset="-120"/>
               </a:rPr>
-              <a:t>Electronic Reporting and Surveillance Distribution supports the distribution of reporting.</a:t>
-            </a:r>
-            <a:endParaRPr lang="en-US" sz="1380" dirty="0"/>
-          </a:p>
-          <a:p>
-            <a:r>
-              <a:rPr lang="en-US" sz="1380" dirty="0">
+              <a:t>Electronic Reporting and Surveillance Distribution supports the.</a:t>
+            </a:r>
+            <a:endParaRPr lang="en-US" sz="1220" dirty="0"/>
+          </a:p>
+          <a:p>
+            <a:pPr indent="0" marL="0">
+              <a:buNone/>
+            </a:pPr>
+            <a:r>
+              <a:rPr lang="en-US" sz="1220" dirty="0">
                 <a:solidFill>
                   <a:srgbClr val="17364A"/>
                 </a:solidFill>
@@ -3710,7 +3725,7 @@
               </a:rPr>
               <a:t>These components are essential to reliable and current triggering.</a:t>
             </a:r>
-            <a:endParaRPr lang="en-US" sz="1380" dirty="0"/>
+            <a:endParaRPr lang="en-US" sz="1220" dirty="0"/>
           </a:p>
         </p:txBody>
       </p:sp>
@@ -3788,17 +3803,17 @@
         </p:nvSpPr>
         <p:spPr>
           <a:xfrm>
-            <a:off x="7799832" y="5001768"/>
-            <a:ext cx="3145536" cy="502920"/>
-          </a:xfrm>
-          <a:prstGeom prst="rect">
-            <a:avLst/>
-          </a:prstGeom>
-          <a:noFill/>
-          <a:ln/>
-        </p:spPr>
-        <p:txBody>
-          <a:bodyPr wrap="square" lIns="0" tIns="0" rIns="0" bIns="0" rtlCol="0" anchor="t">
+            <a:off x="7799832" y="4974336"/>
+            <a:ext cx="3145536" cy="576072"/>
+          </a:xfrm>
+          <a:prstGeom prst="rect">
+            <a:avLst/>
+          </a:prstGeom>
+          <a:noFill/>
+          <a:ln/>
+        </p:spPr>
+        <p:txBody>
+          <a:bodyPr wrap="square" lIns="254" tIns="254" rIns="254" bIns="254" rtlCol="0" anchor="t">
             <a:normAutofit/>
           </a:bodyPr>
           <a:lstStyle/>
@@ -3807,7 +3822,7 @@
               <a:buNone/>
             </a:pPr>
             <a:r>
-              <a:rPr lang="en-US" sz="1550" dirty="0">
+              <a:rPr lang="en-US" sz="1320" dirty="0">
                 <a:solidFill>
                   <a:srgbClr val="17364A"/>
                 </a:solidFill>
@@ -3815,9 +3830,9 @@
                 <a:ea typeface="Aptos" pitchFamily="34" charset="-122"/>
                 <a:cs typeface="Aptos" pitchFamily="34" charset="-120"/>
               </a:rPr>
-              <a:t>Use the concept to clarify workflow changes, dependencies, staffing, procurement requirements, training needs, and implementation checkpoints.</a:t>
-            </a:r>
-            <a:endParaRPr lang="en-US" sz="1550" dirty="0"/>
+              <a:t>Use the concept to clarify workflow changes, dependencies, staffing, procurement requirements, training needs, and.</a:t>
+            </a:r>
+            <a:endParaRPr lang="en-US" sz="1320" dirty="0"/>
           </a:p>
         </p:txBody>
       </p:sp>
@@ -4118,49 +4133,58 @@
           <a:ln/>
         </p:spPr>
         <p:txBody>
-          <a:bodyPr wrap="square" lIns="635" tIns="635" rIns="635" bIns="635" rtlCol="0" anchor="t">
+          <a:bodyPr wrap="square" lIns="1016" tIns="1016" rIns="1016" bIns="1016" rtlCol="0" anchor="t">
             <a:normAutofit/>
           </a:bodyPr>
           <a:lstStyle/>
           <a:p>
+            <a:pPr indent="0" marL="0">
+              <a:buNone/>
+            </a:pPr>
             <a:r>
               <a:rPr lang="en-US" sz="2100" dirty="0">
                 <a:solidFill>
-                  <a:srgbClr val="17364A"/>
-                </a:solidFill>
-                <a:latin typeface="Aptos" pitchFamily="34" charset="0"/>
-                <a:ea typeface="Aptos" pitchFamily="34" charset="-122"/>
-                <a:cs typeface="Aptos" pitchFamily="34" charset="-120"/>
-              </a:rPr>
-              <a:t>A jurisdiction may receive eICRs for a reportable condition and want AI to create an.</a:t>
+                  <a:srgbClr val="003A63"/>
+                </a:solidFill>
+                <a:latin typeface="Aptos" pitchFamily="34" charset="0"/>
+                <a:ea typeface="Aptos" pitchFamily="34" charset="-122"/>
+                <a:cs typeface="Aptos" pitchFamily="34" charset="-120"/>
+              </a:rPr>
+              <a:t>• A jurisdiction may receive eICRs for a reportable condition and want AI to create an.</a:t>
             </a:r>
             <a:endParaRPr lang="en-US" sz="2100" dirty="0"/>
           </a:p>
           <a:p>
+            <a:pPr indent="0" marL="0">
+              <a:buNone/>
+            </a:pPr>
             <a:r>
               <a:rPr lang="en-US" sz="2100" dirty="0">
                 <a:solidFill>
-                  <a:srgbClr val="17364A"/>
-                </a:solidFill>
-                <a:latin typeface="Aptos" pitchFamily="34" charset="0"/>
-                <a:ea typeface="Aptos" pitchFamily="34" charset="-122"/>
-                <a:cs typeface="Aptos" pitchFamily="34" charset="-120"/>
-              </a:rPr>
-              <a:t>The tool could highlight the suspected condition, key dates, lab evidence, symptoms, provider details,.</a:t>
+                  <a:srgbClr val="003A63"/>
+                </a:solidFill>
+                <a:latin typeface="Aptos" pitchFamily="34" charset="0"/>
+                <a:ea typeface="Aptos" pitchFamily="34" charset="-122"/>
+                <a:cs typeface="Aptos" pitchFamily="34" charset="-120"/>
+              </a:rPr>
+              <a:t>• The tool could highlight the suspected condition, key dates, lab evidence, symptoms, provider.</a:t>
             </a:r>
             <a:endParaRPr lang="en-US" sz="2100" dirty="0"/>
           </a:p>
           <a:p>
+            <a:pPr indent="0" marL="0">
+              <a:buNone/>
+            </a:pPr>
             <a:r>
               <a:rPr lang="en-US" sz="2100" dirty="0">
                 <a:solidFill>
-                  <a:srgbClr val="17364A"/>
-                </a:solidFill>
-                <a:latin typeface="Aptos" pitchFamily="34" charset="0"/>
-                <a:ea typeface="Aptos" pitchFamily="34" charset="-122"/>
-                <a:cs typeface="Aptos" pitchFamily="34" charset="-120"/>
-              </a:rPr>
-              <a:t>This could reduce staff burden, but only if users can inspect the source data and correct errors.</a:t>
+                  <a:srgbClr val="003A63"/>
+                </a:solidFill>
+                <a:latin typeface="Aptos" pitchFamily="34" charset="0"/>
+                <a:ea typeface="Aptos" pitchFamily="34" charset="-122"/>
+                <a:cs typeface="Aptos" pitchFamily="34" charset="-120"/>
+              </a:rPr>
+              <a:t>• This could reduce staff burden, but only if users can inspect the source data and correct.</a:t>
             </a:r>
             <a:endParaRPr lang="en-US" sz="2100" dirty="0"/>
           </a:p>
@@ -4240,17 +4264,17 @@
         </p:nvSpPr>
         <p:spPr>
           <a:xfrm>
-            <a:off x="7799832" y="1828800"/>
-            <a:ext cx="3145536" cy="685800"/>
-          </a:xfrm>
-          <a:prstGeom prst="rect">
-            <a:avLst/>
-          </a:prstGeom>
-          <a:noFill/>
-          <a:ln/>
-        </p:spPr>
-        <p:txBody>
-          <a:bodyPr wrap="square" lIns="0" tIns="0" rIns="0" bIns="0" rtlCol="0" anchor="t">
+            <a:off x="7799832" y="1801368"/>
+            <a:ext cx="3145536" cy="758952"/>
+          </a:xfrm>
+          <a:prstGeom prst="rect">
+            <a:avLst/>
+          </a:prstGeom>
+          <a:noFill/>
+          <a:ln/>
+        </p:spPr>
+        <p:txBody>
+          <a:bodyPr wrap="square" lIns="254" tIns="254" rIns="254" bIns="254" rtlCol="0" anchor="t">
             <a:normAutofit/>
           </a:bodyPr>
           <a:lstStyle/>
@@ -4259,7 +4283,7 @@
               <a:buNone/>
             </a:pPr>
             <a:r>
-              <a:rPr lang="en-US" sz="1550" dirty="0">
+              <a:rPr lang="en-US" sz="1320" dirty="0">
                 <a:solidFill>
                   <a:srgbClr val="17364A"/>
                 </a:solidFill>
@@ -4269,7 +4293,7 @@
               </a:rPr>
               <a:t>A jurisdiction may receive eICRs for a reportable condition and want AI to create an.</a:t>
             </a:r>
-            <a:endParaRPr lang="en-US" sz="1550" dirty="0"/>
+            <a:endParaRPr lang="en-US" sz="1320" dirty="0"/>
           </a:p>
         </p:txBody>
       </p:sp>
@@ -4357,13 +4381,16 @@
           <a:ln/>
         </p:spPr>
         <p:txBody>
-          <a:bodyPr wrap="square" lIns="254" tIns="254" rIns="254" bIns="254" rtlCol="0" anchor="t">
+          <a:bodyPr wrap="square" lIns="508" tIns="508" rIns="508" bIns="508" rtlCol="0" anchor="t">
             <a:normAutofit/>
           </a:bodyPr>
           <a:lstStyle/>
           <a:p>
-            <a:r>
-              <a:rPr lang="en-US" sz="1380" dirty="0">
+            <a:pPr indent="0" marL="0">
+              <a:buNone/>
+            </a:pPr>
+            <a:r>
+              <a:rPr lang="en-US" sz="1220" dirty="0">
                 <a:solidFill>
                   <a:srgbClr val="17364A"/>
                 </a:solidFill>
@@ -4371,13 +4398,16 @@
                 <a:ea typeface="Aptos" pitchFamily="34" charset="-122"/>
                 <a:cs typeface="Aptos" pitchFamily="34" charset="-120"/>
               </a:rPr>
-              <a:t>A jurisdiction may receive eICRs for a reportable condition and want AI to create an.</a:t>
-            </a:r>
-            <a:endParaRPr lang="en-US" sz="1380" dirty="0"/>
-          </a:p>
-          <a:p>
-            <a:r>
-              <a:rPr lang="en-US" sz="1380" dirty="0">
+              <a:t>A jurisdiction may receive eICRs for a reportable condition and.</a:t>
+            </a:r>
+            <a:endParaRPr lang="en-US" sz="1220" dirty="0"/>
+          </a:p>
+          <a:p>
+            <a:pPr indent="0" marL="0">
+              <a:buNone/>
+            </a:pPr>
+            <a:r>
+              <a:rPr lang="en-US" sz="1220" dirty="0">
                 <a:solidFill>
                   <a:srgbClr val="17364A"/>
                 </a:solidFill>
@@ -4385,13 +4415,16 @@
                 <a:ea typeface="Aptos" pitchFamily="34" charset="-122"/>
                 <a:cs typeface="Aptos" pitchFamily="34" charset="-120"/>
               </a:rPr>
-              <a:t>The tool could highlight the suspected condition, key dates, lab evidence, symptoms,.</a:t>
-            </a:r>
-            <a:endParaRPr lang="en-US" sz="1380" dirty="0"/>
-          </a:p>
-          <a:p>
-            <a:r>
-              <a:rPr lang="en-US" sz="1380" dirty="0">
+              <a:t>The tool could highlight the suspected condition, key dates, lab.</a:t>
+            </a:r>
+            <a:endParaRPr lang="en-US" sz="1220" dirty="0"/>
+          </a:p>
+          <a:p>
+            <a:pPr indent="0" marL="0">
+              <a:buNone/>
+            </a:pPr>
+            <a:r>
+              <a:rPr lang="en-US" sz="1220" dirty="0">
                 <a:solidFill>
                   <a:srgbClr val="17364A"/>
                 </a:solidFill>
@@ -4399,9 +4432,9 @@
                 <a:ea typeface="Aptos" pitchFamily="34" charset="-122"/>
                 <a:cs typeface="Aptos" pitchFamily="34" charset="-120"/>
               </a:rPr>
-              <a:t>Another jurisdiction may want to use AI to triage incoming eICRs by urgency.</a:t>
-            </a:r>
-            <a:endParaRPr lang="en-US" sz="1380" dirty="0"/>
+              <a:t>Another jurisdiction may want to use AI to triage incoming eICRs.</a:t>
+            </a:r>
+            <a:endParaRPr lang="en-US" sz="1220" dirty="0"/>
           </a:p>
         </p:txBody>
       </p:sp>
@@ -4479,17 +4512,17 @@
         </p:nvSpPr>
         <p:spPr>
           <a:xfrm>
-            <a:off x="7799832" y="5001768"/>
-            <a:ext cx="3145536" cy="502920"/>
-          </a:xfrm>
-          <a:prstGeom prst="rect">
-            <a:avLst/>
-          </a:prstGeom>
-          <a:noFill/>
-          <a:ln/>
-        </p:spPr>
-        <p:txBody>
-          <a:bodyPr wrap="square" lIns="0" tIns="0" rIns="0" bIns="0" rtlCol="0" anchor="t">
+            <a:off x="7799832" y="4974336"/>
+            <a:ext cx="3145536" cy="576072"/>
+          </a:xfrm>
+          <a:prstGeom prst="rect">
+            <a:avLst/>
+          </a:prstGeom>
+          <a:noFill/>
+          <a:ln/>
+        </p:spPr>
+        <p:txBody>
+          <a:bodyPr wrap="square" lIns="254" tIns="254" rIns="254" bIns="254" rtlCol="0" anchor="t">
             <a:normAutofit/>
           </a:bodyPr>
           <a:lstStyle/>
@@ -4498,7 +4531,7 @@
               <a:buNone/>
             </a:pPr>
             <a:r>
-              <a:rPr lang="en-US" sz="1550" dirty="0">
+              <a:rPr lang="en-US" sz="1320" dirty="0">
                 <a:solidFill>
                   <a:srgbClr val="17364A"/>
                 </a:solidFill>
@@ -4506,9 +4539,9 @@
                 <a:ea typeface="Aptos" pitchFamily="34" charset="-122"/>
                 <a:cs typeface="Aptos" pitchFamily="34" charset="-120"/>
               </a:rPr>
-              <a:t>Use the concept to clarify workflow changes, dependencies, staffing, procurement requirements, training needs, and implementation checkpoints.</a:t>
-            </a:r>
-            <a:endParaRPr lang="en-US" sz="1550" dirty="0"/>
+              <a:t>Use the concept to clarify workflow changes, dependencies, staffing, procurement requirements, training needs, and.</a:t>
+            </a:r>
+            <a:endParaRPr lang="en-US" sz="1320" dirty="0"/>
           </a:p>
         </p:txBody>
       </p:sp>
@@ -4809,49 +4842,58 @@
           <a:ln/>
         </p:spPr>
         <p:txBody>
-          <a:bodyPr wrap="square" lIns="635" tIns="635" rIns="635" bIns="635" rtlCol="0" anchor="t">
+          <a:bodyPr wrap="square" lIns="1016" tIns="1016" rIns="1016" bIns="1016" rtlCol="0" anchor="t">
             <a:normAutofit/>
           </a:bodyPr>
           <a:lstStyle/>
           <a:p>
+            <a:pPr indent="0" marL="0">
+              <a:buNone/>
+            </a:pPr>
             <a:r>
               <a:rPr lang="en-US" sz="2100" dirty="0">
                 <a:solidFill>
-                  <a:srgbClr val="17364A"/>
-                </a:solidFill>
-                <a:latin typeface="Aptos" pitchFamily="34" charset="0"/>
-                <a:ea typeface="Aptos" pitchFamily="34" charset="-122"/>
-                <a:cs typeface="Aptos" pitchFamily="34" charset="-120"/>
-              </a:rPr>
-              <a:t>The eCR workflow begins before a report reaches public health.</a:t>
+                  <a:srgbClr val="003A63"/>
+                </a:solidFill>
+                <a:latin typeface="Aptos" pitchFamily="34" charset="0"/>
+                <a:ea typeface="Aptos" pitchFamily="34" charset="-122"/>
+                <a:cs typeface="Aptos" pitchFamily="34" charset="-120"/>
+              </a:rPr>
+              <a:t>• The eCR workflow begins before a report reaches public health.</a:t>
             </a:r>
             <a:endParaRPr lang="en-US" sz="2100" dirty="0"/>
           </a:p>
           <a:p>
+            <a:pPr indent="0" marL="0">
+              <a:buNone/>
+            </a:pPr>
             <a:r>
               <a:rPr lang="en-US" sz="2100" dirty="0">
                 <a:solidFill>
-                  <a:srgbClr val="17364A"/>
-                </a:solidFill>
-                <a:latin typeface="Aptos" pitchFamily="34" charset="0"/>
-                <a:ea typeface="Aptos" pitchFamily="34" charset="-122"/>
-                <a:cs typeface="Aptos" pitchFamily="34" charset="-120"/>
-              </a:rPr>
-              <a:t>EHR systems use trigger criteria and value sets to identify encounters that may need reporting.</a:t>
+                  <a:srgbClr val="003A63"/>
+                </a:solidFill>
+                <a:latin typeface="Aptos" pitchFamily="34" charset="0"/>
+                <a:ea typeface="Aptos" pitchFamily="34" charset="-122"/>
+                <a:cs typeface="Aptos" pitchFamily="34" charset="-120"/>
+              </a:rPr>
+              <a:t>• EHR systems use trigger criteria and value sets to identify encounters that may need reporting.</a:t>
             </a:r>
             <a:endParaRPr lang="en-US" sz="2100" dirty="0"/>
           </a:p>
           <a:p>
+            <a:pPr indent="0" marL="0">
+              <a:buNone/>
+            </a:pPr>
             <a:r>
               <a:rPr lang="en-US" sz="2100" dirty="0">
                 <a:solidFill>
-                  <a:srgbClr val="17364A"/>
-                </a:solidFill>
-                <a:latin typeface="Aptos" pitchFamily="34" charset="0"/>
-                <a:ea typeface="Aptos" pitchFamily="34" charset="-122"/>
-                <a:cs typeface="Aptos" pitchFamily="34" charset="-120"/>
-              </a:rPr>
-              <a:t>The eICR is generated and transmitted through an exchange process to the appropriate public health.</a:t>
+                  <a:srgbClr val="003A63"/>
+                </a:solidFill>
+                <a:latin typeface="Aptos" pitchFamily="34" charset="0"/>
+                <a:ea typeface="Aptos" pitchFamily="34" charset="-122"/>
+                <a:cs typeface="Aptos" pitchFamily="34" charset="-120"/>
+              </a:rPr>
+              <a:t>• The eICR is generated and transmitted through an exchange process to the appropriate public.</a:t>
             </a:r>
             <a:endParaRPr lang="en-US" sz="2100" dirty="0"/>
           </a:p>
@@ -4931,17 +4973,17 @@
         </p:nvSpPr>
         <p:spPr>
           <a:xfrm>
-            <a:off x="7799832" y="1828800"/>
-            <a:ext cx="3145536" cy="685800"/>
-          </a:xfrm>
-          <a:prstGeom prst="rect">
-            <a:avLst/>
-          </a:prstGeom>
-          <a:noFill/>
-          <a:ln/>
-        </p:spPr>
-        <p:txBody>
-          <a:bodyPr wrap="square" lIns="0" tIns="0" rIns="0" bIns="0" rtlCol="0" anchor="t">
+            <a:off x="7799832" y="1801368"/>
+            <a:ext cx="3145536" cy="758952"/>
+          </a:xfrm>
+          <a:prstGeom prst="rect">
+            <a:avLst/>
+          </a:prstGeom>
+          <a:noFill/>
+          <a:ln/>
+        </p:spPr>
+        <p:txBody>
+          <a:bodyPr wrap="square" lIns="254" tIns="254" rIns="254" bIns="254" rtlCol="0" anchor="t">
             <a:normAutofit/>
           </a:bodyPr>
           <a:lstStyle/>
@@ -4950,7 +4992,7 @@
               <a:buNone/>
             </a:pPr>
             <a:r>
-              <a:rPr lang="en-US" sz="1550" dirty="0">
+              <a:rPr lang="en-US" sz="1320" dirty="0">
                 <a:solidFill>
                   <a:srgbClr val="17364A"/>
                 </a:solidFill>
@@ -4960,7 +5002,7 @@
               </a:rPr>
               <a:t>The eCR workflow begins before a report reaches public health.</a:t>
             </a:r>
-            <a:endParaRPr lang="en-US" sz="1550" dirty="0"/>
+            <a:endParaRPr lang="en-US" sz="1320" dirty="0"/>
           </a:p>
         </p:txBody>
       </p:sp>
@@ -5048,13 +5090,16 @@
           <a:ln/>
         </p:spPr>
         <p:txBody>
-          <a:bodyPr wrap="square" lIns="254" tIns="254" rIns="254" bIns="254" rtlCol="0" anchor="t">
+          <a:bodyPr wrap="square" lIns="508" tIns="508" rIns="508" bIns="508" rtlCol="0" anchor="t">
             <a:normAutofit/>
           </a:bodyPr>
           <a:lstStyle/>
           <a:p>
-            <a:r>
-              <a:rPr lang="en-US" sz="1380" dirty="0">
+            <a:pPr indent="0" marL="0">
+              <a:buNone/>
+            </a:pPr>
+            <a:r>
+              <a:rPr lang="en-US" sz="1220" dirty="0">
                 <a:solidFill>
                   <a:srgbClr val="17364A"/>
                 </a:solidFill>
@@ -5062,13 +5107,16 @@
                 <a:ea typeface="Aptos" pitchFamily="34" charset="-122"/>
                 <a:cs typeface="Aptos" pitchFamily="34" charset="-120"/>
               </a:rPr>
-              <a:t>The eICR is generated and transmitted through an exchange process to the appropriate.</a:t>
-            </a:r>
-            <a:endParaRPr lang="en-US" sz="1380" dirty="0"/>
-          </a:p>
-          <a:p>
-            <a:r>
-              <a:rPr lang="en-US" sz="1380" dirty="0">
+              <a:t>The eICR is generated and transmitted through an exchange process.</a:t>
+            </a:r>
+            <a:endParaRPr lang="en-US" sz="1220" dirty="0"/>
+          </a:p>
+          <a:p>
+            <a:pPr indent="0" marL="0">
+              <a:buNone/>
+            </a:pPr>
+            <a:r>
+              <a:rPr lang="en-US" sz="1220" dirty="0">
                 <a:solidFill>
                   <a:srgbClr val="17364A"/>
                 </a:solidFill>
@@ -5076,13 +5124,16 @@
                 <a:ea typeface="Aptos" pitchFamily="34" charset="-122"/>
                 <a:cs typeface="Aptos" pitchFamily="34" charset="-120"/>
               </a:rPr>
-              <a:t>Public health systems then receive, parse, route, review, and incorporate the information.</a:t>
-            </a:r>
-            <a:endParaRPr lang="en-US" sz="1380" dirty="0"/>
-          </a:p>
-          <a:p>
-            <a:r>
-              <a:rPr lang="en-US" sz="1380" dirty="0">
+              <a:t>Public health systems then receive, parse, route, review, and.</a:t>
+            </a:r>
+            <a:endParaRPr lang="en-US" sz="1220" dirty="0"/>
+          </a:p>
+          <a:p>
+            <a:pPr indent="0" marL="0">
+              <a:buNone/>
+            </a:pPr>
+            <a:r>
+              <a:rPr lang="en-US" sz="1220" dirty="0">
                 <a:solidFill>
                   <a:srgbClr val="17364A"/>
                 </a:solidFill>
@@ -5092,7 +5143,7 @@
               </a:rPr>
               <a:t>AI readiness depends on several technical questions.</a:t>
             </a:r>
-            <a:endParaRPr lang="en-US" sz="1380" dirty="0"/>
+            <a:endParaRPr lang="en-US" sz="1220" dirty="0"/>
           </a:p>
         </p:txBody>
       </p:sp>
@@ -5170,17 +5221,17 @@
         </p:nvSpPr>
         <p:spPr>
           <a:xfrm>
-            <a:off x="7799832" y="5001768"/>
-            <a:ext cx="3145536" cy="502920"/>
-          </a:xfrm>
-          <a:prstGeom prst="rect">
-            <a:avLst/>
-          </a:prstGeom>
-          <a:noFill/>
-          <a:ln/>
-        </p:spPr>
-        <p:txBody>
-          <a:bodyPr wrap="square" lIns="0" tIns="0" rIns="0" bIns="0" rtlCol="0" anchor="t">
+            <a:off x="7799832" y="4974336"/>
+            <a:ext cx="3145536" cy="576072"/>
+          </a:xfrm>
+          <a:prstGeom prst="rect">
+            <a:avLst/>
+          </a:prstGeom>
+          <a:noFill/>
+          <a:ln/>
+        </p:spPr>
+        <p:txBody>
+          <a:bodyPr wrap="square" lIns="254" tIns="254" rIns="254" bIns="254" rtlCol="0" anchor="t">
             <a:normAutofit/>
           </a:bodyPr>
           <a:lstStyle/>
@@ -5189,7 +5240,7 @@
               <a:buNone/>
             </a:pPr>
             <a:r>
-              <a:rPr lang="en-US" sz="1550" dirty="0">
+              <a:rPr lang="en-US" sz="1320" dirty="0">
                 <a:solidFill>
                   <a:srgbClr val="17364A"/>
                 </a:solidFill>
@@ -5197,9 +5248,9 @@
                 <a:ea typeface="Aptos" pitchFamily="34" charset="-122"/>
                 <a:cs typeface="Aptos" pitchFamily="34" charset="-120"/>
               </a:rPr>
-              <a:t>Use the concept to clarify workflow changes, dependencies, staffing, procurement requirements, training needs, and implementation checkpoints.</a:t>
-            </a:r>
-            <a:endParaRPr lang="en-US" sz="1550" dirty="0"/>
+              <a:t>Use the concept to clarify workflow changes, dependencies, staffing, procurement requirements, training needs, and.</a:t>
+            </a:r>
+            <a:endParaRPr lang="en-US" sz="1320" dirty="0"/>
           </a:p>
         </p:txBody>
       </p:sp>
@@ -5500,49 +5551,58 @@
           <a:ln/>
         </p:spPr>
         <p:txBody>
-          <a:bodyPr wrap="square" lIns="635" tIns="635" rIns="635" bIns="635" rtlCol="0" anchor="t">
+          <a:bodyPr wrap="square" lIns="1016" tIns="1016" rIns="1016" bIns="1016" rtlCol="0" anchor="t">
             <a:normAutofit/>
           </a:bodyPr>
           <a:lstStyle/>
           <a:p>
+            <a:pPr indent="0" marL="0">
+              <a:buNone/>
+            </a:pPr>
             <a:r>
               <a:rPr lang="en-US" sz="2100" dirty="0">
                 <a:solidFill>
-                  <a:srgbClr val="17364A"/>
-                </a:solidFill>
-                <a:latin typeface="Aptos" pitchFamily="34" charset="0"/>
-                <a:ea typeface="Aptos" pitchFamily="34" charset="-122"/>
-                <a:cs typeface="Aptos" pitchFamily="34" charset="-120"/>
-              </a:rPr>
-              <a:t>Incorrect trigger assumptions.</a:t>
+                  <a:srgbClr val="003A63"/>
+                </a:solidFill>
+                <a:latin typeface="Aptos" pitchFamily="34" charset="0"/>
+                <a:ea typeface="Aptos" pitchFamily="34" charset="-122"/>
+                <a:cs typeface="Aptos" pitchFamily="34" charset="-120"/>
+              </a:rPr>
+              <a:t>• Incorrect trigger assumptions.</a:t>
             </a:r>
             <a:endParaRPr lang="en-US" sz="2100" dirty="0"/>
           </a:p>
           <a:p>
+            <a:pPr indent="0" marL="0">
+              <a:buNone/>
+            </a:pPr>
             <a:r>
               <a:rPr lang="en-US" sz="2100" dirty="0">
                 <a:solidFill>
-                  <a:srgbClr val="17364A"/>
-                </a:solidFill>
-                <a:latin typeface="Aptos" pitchFamily="34" charset="0"/>
-                <a:ea typeface="Aptos" pitchFamily="34" charset="-122"/>
-                <a:cs typeface="Aptos" pitchFamily="34" charset="-120"/>
-              </a:rPr>
-              <a:t>If trigger value sets or reporting criteria are outdated, the workflow may generate missing or.</a:t>
+                  <a:srgbClr val="003A63"/>
+                </a:solidFill>
+                <a:latin typeface="Aptos" pitchFamily="34" charset="0"/>
+                <a:ea typeface="Aptos" pitchFamily="34" charset="-122"/>
+                <a:cs typeface="Aptos" pitchFamily="34" charset="-120"/>
+              </a:rPr>
+              <a:t>• If trigger value sets or reporting criteria are outdated, the workflow may generate missing or.</a:t>
             </a:r>
             <a:endParaRPr lang="en-US" sz="2100" dirty="0"/>
           </a:p>
           <a:p>
+            <a:pPr indent="0" marL="0">
+              <a:buNone/>
+            </a:pPr>
             <a:r>
               <a:rPr lang="en-US" sz="2100" dirty="0">
                 <a:solidFill>
-                  <a:srgbClr val="17364A"/>
-                </a:solidFill>
-                <a:latin typeface="Aptos" pitchFamily="34" charset="0"/>
-                <a:ea typeface="Aptos" pitchFamily="34" charset="-122"/>
-                <a:cs typeface="Aptos" pitchFamily="34" charset="-120"/>
-              </a:rPr>
-              <a:t>Guardrails include current eRSD/RCTC management, onboarding checks, and periodic review.</a:t>
+                  <a:srgbClr val="003A63"/>
+                </a:solidFill>
+                <a:latin typeface="Aptos" pitchFamily="34" charset="0"/>
+                <a:ea typeface="Aptos" pitchFamily="34" charset="-122"/>
+                <a:cs typeface="Aptos" pitchFamily="34" charset="-120"/>
+              </a:rPr>
+              <a:t>• Guardrails include current eRSD/RCTC management, onboarding checks, and periodic review.</a:t>
             </a:r>
             <a:endParaRPr lang="en-US" sz="2100" dirty="0"/>
           </a:p>
@@ -5622,17 +5682,17 @@
         </p:nvSpPr>
         <p:spPr>
           <a:xfrm>
-            <a:off x="7799832" y="1828800"/>
-            <a:ext cx="3145536" cy="685800"/>
-          </a:xfrm>
-          <a:prstGeom prst="rect">
-            <a:avLst/>
-          </a:prstGeom>
-          <a:noFill/>
-          <a:ln/>
-        </p:spPr>
-        <p:txBody>
-          <a:bodyPr wrap="square" lIns="0" tIns="0" rIns="0" bIns="0" rtlCol="0" anchor="t">
+            <a:off x="7799832" y="1801368"/>
+            <a:ext cx="3145536" cy="758952"/>
+          </a:xfrm>
+          <a:prstGeom prst="rect">
+            <a:avLst/>
+          </a:prstGeom>
+          <a:noFill/>
+          <a:ln/>
+        </p:spPr>
+        <p:txBody>
+          <a:bodyPr wrap="square" lIns="254" tIns="254" rIns="254" bIns="254" rtlCol="0" anchor="t">
             <a:normAutofit/>
           </a:bodyPr>
           <a:lstStyle/>
@@ -5641,7 +5701,7 @@
               <a:buNone/>
             </a:pPr>
             <a:r>
-              <a:rPr lang="en-US" sz="1550" dirty="0">
+              <a:rPr lang="en-US" sz="1320" dirty="0">
                 <a:solidFill>
                   <a:srgbClr val="17364A"/>
                 </a:solidFill>
@@ -5651,7 +5711,7 @@
               </a:rPr>
               <a:t>Incorrect trigger assumptions.</a:t>
             </a:r>
-            <a:endParaRPr lang="en-US" sz="1550" dirty="0"/>
+            <a:endParaRPr lang="en-US" sz="1320" dirty="0"/>
           </a:p>
         </p:txBody>
       </p:sp>
@@ -5739,13 +5799,16 @@
           <a:ln/>
         </p:spPr>
         <p:txBody>
-          <a:bodyPr wrap="square" lIns="254" tIns="254" rIns="254" bIns="254" rtlCol="0" anchor="t">
+          <a:bodyPr wrap="square" lIns="508" tIns="508" rIns="508" bIns="508" rtlCol="0" anchor="t">
             <a:normAutofit/>
           </a:bodyPr>
           <a:lstStyle/>
           <a:p>
-            <a:r>
-              <a:rPr lang="en-US" sz="1380" dirty="0">
+            <a:pPr indent="0" marL="0">
+              <a:buNone/>
+            </a:pPr>
+            <a:r>
+              <a:rPr lang="en-US" sz="1220" dirty="0">
                 <a:solidFill>
                   <a:srgbClr val="17364A"/>
                 </a:solidFill>
@@ -5753,13 +5816,16 @@
                 <a:ea typeface="Aptos" pitchFamily="34" charset="-122"/>
                 <a:cs typeface="Aptos" pitchFamily="34" charset="-120"/>
               </a:rPr>
-              <a:t>If trigger value sets or reporting criteria are outdated, the workflow may generate.</a:t>
-            </a:r>
-            <a:endParaRPr lang="en-US" sz="1380" dirty="0"/>
-          </a:p>
-          <a:p>
-            <a:r>
-              <a:rPr lang="en-US" sz="1380" dirty="0">
+              <a:t>If trigger value sets or reporting criteria are outdated, the.</a:t>
+            </a:r>
+            <a:endParaRPr lang="en-US" sz="1220" dirty="0"/>
+          </a:p>
+          <a:p>
+            <a:pPr indent="0" marL="0">
+              <a:buNone/>
+            </a:pPr>
+            <a:r>
+              <a:rPr lang="en-US" sz="1220" dirty="0">
                 <a:solidFill>
                   <a:srgbClr val="17364A"/>
                 </a:solidFill>
@@ -5769,11 +5835,14 @@
               </a:rPr>
               <a:t>Unsupported summaries.</a:t>
             </a:r>
-            <a:endParaRPr lang="en-US" sz="1380" dirty="0"/>
-          </a:p>
-          <a:p>
-            <a:r>
-              <a:rPr lang="en-US" sz="1380" dirty="0">
+            <a:endParaRPr lang="en-US" sz="1220" dirty="0"/>
+          </a:p>
+          <a:p>
+            <a:pPr indent="0" marL="0">
+              <a:buNone/>
+            </a:pPr>
+            <a:r>
+              <a:rPr lang="en-US" sz="1220" dirty="0">
                 <a:solidFill>
                   <a:srgbClr val="17364A"/>
                 </a:solidFill>
@@ -5781,9 +5850,9 @@
                 <a:ea typeface="Aptos" pitchFamily="34" charset="-122"/>
                 <a:cs typeface="Aptos" pitchFamily="34" charset="-120"/>
               </a:rPr>
-              <a:t>Generative AI summaries may include statements not supported by the eICR.</a:t>
-            </a:r>
-            <a:endParaRPr lang="en-US" sz="1380" dirty="0"/>
+              <a:t>Generative AI summaries may include statements not supported by.</a:t>
+            </a:r>
+            <a:endParaRPr lang="en-US" sz="1220" dirty="0"/>
           </a:p>
         </p:txBody>
       </p:sp>
@@ -5861,17 +5930,17 @@
         </p:nvSpPr>
         <p:spPr>
           <a:xfrm>
-            <a:off x="7799832" y="5001768"/>
-            <a:ext cx="3145536" cy="502920"/>
-          </a:xfrm>
-          <a:prstGeom prst="rect">
-            <a:avLst/>
-          </a:prstGeom>
-          <a:noFill/>
-          <a:ln/>
-        </p:spPr>
-        <p:txBody>
-          <a:bodyPr wrap="square" lIns="0" tIns="0" rIns="0" bIns="0" rtlCol="0" anchor="t">
+            <a:off x="7799832" y="4974336"/>
+            <a:ext cx="3145536" cy="576072"/>
+          </a:xfrm>
+          <a:prstGeom prst="rect">
+            <a:avLst/>
+          </a:prstGeom>
+          <a:noFill/>
+          <a:ln/>
+        </p:spPr>
+        <p:txBody>
+          <a:bodyPr wrap="square" lIns="254" tIns="254" rIns="254" bIns="254" rtlCol="0" anchor="t">
             <a:normAutofit/>
           </a:bodyPr>
           <a:lstStyle/>
@@ -5880,7 +5949,7 @@
               <a:buNone/>
             </a:pPr>
             <a:r>
-              <a:rPr lang="en-US" sz="1550" dirty="0">
+              <a:rPr lang="en-US" sz="1320" dirty="0">
                 <a:solidFill>
                   <a:srgbClr val="17364A"/>
                 </a:solidFill>
@@ -5888,9 +5957,9 @@
                 <a:ea typeface="Aptos" pitchFamily="34" charset="-122"/>
                 <a:cs typeface="Aptos" pitchFamily="34" charset="-120"/>
               </a:rPr>
-              <a:t>Identify what could go wrong, who could be affected, what safeguards are needed, and what evidence should be reviewed before use expands.</a:t>
-            </a:r>
-            <a:endParaRPr lang="en-US" sz="1550" dirty="0"/>
+              <a:t>Identify what could go wrong, who could be affected, what safeguards are needed, and what evidence should be reviewed.</a:t>
+            </a:r>
+            <a:endParaRPr lang="en-US" sz="1320" dirty="0"/>
           </a:p>
         </p:txBody>
       </p:sp>
@@ -6191,49 +6260,58 @@
           <a:ln/>
         </p:spPr>
         <p:txBody>
-          <a:bodyPr wrap="square" lIns="635" tIns="635" rIns="635" bIns="635" rtlCol="0" anchor="t">
+          <a:bodyPr wrap="square" lIns="1016" tIns="1016" rIns="1016" bIns="1016" rtlCol="0" anchor="t">
             <a:normAutofit/>
           </a:bodyPr>
           <a:lstStyle/>
           <a:p>
+            <a:pPr indent="0" marL="0">
+              <a:buNone/>
+            </a:pPr>
             <a:r>
               <a:rPr lang="en-US" sz="2100" dirty="0">
                 <a:solidFill>
-                  <a:srgbClr val="17364A"/>
-                </a:solidFill>
-                <a:latin typeface="Aptos" pitchFamily="34" charset="0"/>
-                <a:ea typeface="Aptos" pitchFamily="34" charset="-122"/>
-                <a:cs typeface="Aptos" pitchFamily="34" charset="-120"/>
-              </a:rPr>
-              <a:t>Routing errors.</a:t>
+                  <a:srgbClr val="003A63"/>
+                </a:solidFill>
+                <a:latin typeface="Aptos" pitchFamily="34" charset="0"/>
+                <a:ea typeface="Aptos" pitchFamily="34" charset="-122"/>
+                <a:cs typeface="Aptos" pitchFamily="34" charset="-120"/>
+              </a:rPr>
+              <a:t>• Routing errors.</a:t>
             </a:r>
             <a:endParaRPr lang="en-US" sz="2100" dirty="0"/>
           </a:p>
           <a:p>
+            <a:pPr indent="0" marL="0">
+              <a:buNone/>
+            </a:pPr>
             <a:r>
               <a:rPr lang="en-US" sz="2100" dirty="0">
                 <a:solidFill>
-                  <a:srgbClr val="17364A"/>
-                </a:solidFill>
-                <a:latin typeface="Aptos" pitchFamily="34" charset="0"/>
-                <a:ea typeface="Aptos" pitchFamily="34" charset="-122"/>
-                <a:cs typeface="Aptos" pitchFamily="34" charset="-120"/>
-              </a:rPr>
-              <a:t>Incorrect jurisdiction or program routing can delay response.</a:t>
+                  <a:srgbClr val="003A63"/>
+                </a:solidFill>
+                <a:latin typeface="Aptos" pitchFamily="34" charset="0"/>
+                <a:ea typeface="Aptos" pitchFamily="34" charset="-122"/>
+                <a:cs typeface="Aptos" pitchFamily="34" charset="-120"/>
+              </a:rPr>
+              <a:t>• Incorrect jurisdiction or program routing can delay response.</a:t>
             </a:r>
             <a:endParaRPr lang="en-US" sz="2100" dirty="0"/>
           </a:p>
           <a:p>
+            <a:pPr indent="0" marL="0">
+              <a:buNone/>
+            </a:pPr>
             <a:r>
               <a:rPr lang="en-US" sz="2100" dirty="0">
                 <a:solidFill>
-                  <a:srgbClr val="17364A"/>
-                </a:solidFill>
-                <a:latin typeface="Aptos" pitchFamily="34" charset="0"/>
-                <a:ea typeface="Aptos" pitchFamily="34" charset="-122"/>
-                <a:cs typeface="Aptos" pitchFamily="34" charset="-120"/>
-              </a:rPr>
-              <a:t>Guardrails include routing validation, exception queues, and escalation procedures.</a:t>
+                  <a:srgbClr val="003A63"/>
+                </a:solidFill>
+                <a:latin typeface="Aptos" pitchFamily="34" charset="0"/>
+                <a:ea typeface="Aptos" pitchFamily="34" charset="-122"/>
+                <a:cs typeface="Aptos" pitchFamily="34" charset="-120"/>
+              </a:rPr>
+              <a:t>• Guardrails include routing validation, exception queues, and escalation procedures.</a:t>
             </a:r>
             <a:endParaRPr lang="en-US" sz="2100" dirty="0"/>
           </a:p>
@@ -6313,17 +6391,17 @@
         </p:nvSpPr>
         <p:spPr>
           <a:xfrm>
-            <a:off x="7799832" y="1828800"/>
-            <a:ext cx="3145536" cy="685800"/>
-          </a:xfrm>
-          <a:prstGeom prst="rect">
-            <a:avLst/>
-          </a:prstGeom>
-          <a:noFill/>
-          <a:ln/>
-        </p:spPr>
-        <p:txBody>
-          <a:bodyPr wrap="square" lIns="0" tIns="0" rIns="0" bIns="0" rtlCol="0" anchor="t">
+            <a:off x="7799832" y="1801368"/>
+            <a:ext cx="3145536" cy="758952"/>
+          </a:xfrm>
+          <a:prstGeom prst="rect">
+            <a:avLst/>
+          </a:prstGeom>
+          <a:noFill/>
+          <a:ln/>
+        </p:spPr>
+        <p:txBody>
+          <a:bodyPr wrap="square" lIns="254" tIns="254" rIns="254" bIns="254" rtlCol="0" anchor="t">
             <a:normAutofit/>
           </a:bodyPr>
           <a:lstStyle/>
@@ -6332,7 +6410,7 @@
               <a:buNone/>
             </a:pPr>
             <a:r>
-              <a:rPr lang="en-US" sz="1550" dirty="0">
+              <a:rPr lang="en-US" sz="1320" dirty="0">
                 <a:solidFill>
                   <a:srgbClr val="17364A"/>
                 </a:solidFill>
@@ -6342,7 +6420,7 @@
               </a:rPr>
               <a:t>Routing errors.</a:t>
             </a:r>
-            <a:endParaRPr lang="en-US" sz="1550" dirty="0"/>
+            <a:endParaRPr lang="en-US" sz="1320" dirty="0"/>
           </a:p>
         </p:txBody>
       </p:sp>
@@ -6430,13 +6508,16 @@
           <a:ln/>
         </p:spPr>
         <p:txBody>
-          <a:bodyPr wrap="square" lIns="254" tIns="254" rIns="254" bIns="254" rtlCol="0" anchor="t">
+          <a:bodyPr wrap="square" lIns="508" tIns="508" rIns="508" bIns="508" rtlCol="0" anchor="t">
             <a:normAutofit/>
           </a:bodyPr>
           <a:lstStyle/>
           <a:p>
-            <a:r>
-              <a:rPr lang="en-US" sz="1380" dirty="0">
+            <a:pPr indent="0" marL="0">
+              <a:buNone/>
+            </a:pPr>
+            <a:r>
+              <a:rPr lang="en-US" sz="1220" dirty="0">
                 <a:solidFill>
                   <a:srgbClr val="17364A"/>
                 </a:solidFill>
@@ -6446,11 +6527,14 @@
               </a:rPr>
               <a:t>Routing errors.</a:t>
             </a:r>
-            <a:endParaRPr lang="en-US" sz="1380" dirty="0"/>
-          </a:p>
-          <a:p>
-            <a:r>
-              <a:rPr lang="en-US" sz="1380" dirty="0">
+            <a:endParaRPr lang="en-US" sz="1220" dirty="0"/>
+          </a:p>
+          <a:p>
+            <a:pPr indent="0" marL="0">
+              <a:buNone/>
+            </a:pPr>
+            <a:r>
+              <a:rPr lang="en-US" sz="1220" dirty="0">
                 <a:solidFill>
                   <a:srgbClr val="17364A"/>
                 </a:solidFill>
@@ -6460,11 +6544,14 @@
               </a:rPr>
               <a:t>Incorrect jurisdiction or program routing can delay response.</a:t>
             </a:r>
-            <a:endParaRPr lang="en-US" sz="1380" dirty="0"/>
-          </a:p>
-          <a:p>
-            <a:r>
-              <a:rPr lang="en-US" sz="1380" dirty="0">
+            <a:endParaRPr lang="en-US" sz="1220" dirty="0"/>
+          </a:p>
+          <a:p>
+            <a:pPr indent="0" marL="0">
+              <a:buNone/>
+            </a:pPr>
+            <a:r>
+              <a:rPr lang="en-US" sz="1220" dirty="0">
                 <a:solidFill>
                   <a:srgbClr val="17364A"/>
                 </a:solidFill>
@@ -6472,9 +6559,9 @@
                 <a:ea typeface="Aptos" pitchFamily="34" charset="-122"/>
                 <a:cs typeface="Aptos" pitchFamily="34" charset="-120"/>
               </a:rPr>
-              <a:t>Guardrails include routing validation, exception queues, and escalation procedures.</a:t>
-            </a:r>
-            <a:endParaRPr lang="en-US" sz="1380" dirty="0"/>
+              <a:t>Guardrails include routing validation, exception queues, and.</a:t>
+            </a:r>
+            <a:endParaRPr lang="en-US" sz="1220" dirty="0"/>
           </a:p>
         </p:txBody>
       </p:sp>
@@ -6552,17 +6639,17 @@
         </p:nvSpPr>
         <p:spPr>
           <a:xfrm>
-            <a:off x="7799832" y="5001768"/>
-            <a:ext cx="3145536" cy="502920"/>
-          </a:xfrm>
-          <a:prstGeom prst="rect">
-            <a:avLst/>
-          </a:prstGeom>
-          <a:noFill/>
-          <a:ln/>
-        </p:spPr>
-        <p:txBody>
-          <a:bodyPr wrap="square" lIns="0" tIns="0" rIns="0" bIns="0" rtlCol="0" anchor="t">
+            <a:off x="7799832" y="4974336"/>
+            <a:ext cx="3145536" cy="576072"/>
+          </a:xfrm>
+          <a:prstGeom prst="rect">
+            <a:avLst/>
+          </a:prstGeom>
+          <a:noFill/>
+          <a:ln/>
+        </p:spPr>
+        <p:txBody>
+          <a:bodyPr wrap="square" lIns="254" tIns="254" rIns="254" bIns="254" rtlCol="0" anchor="t">
             <a:normAutofit/>
           </a:bodyPr>
           <a:lstStyle/>
@@ -6571,7 +6658,7 @@
               <a:buNone/>
             </a:pPr>
             <a:r>
-              <a:rPr lang="en-US" sz="1550" dirty="0">
+              <a:rPr lang="en-US" sz="1320" dirty="0">
                 <a:solidFill>
                   <a:srgbClr val="17364A"/>
                 </a:solidFill>
@@ -6579,9 +6666,9 @@
                 <a:ea typeface="Aptos" pitchFamily="34" charset="-122"/>
                 <a:cs typeface="Aptos" pitchFamily="34" charset="-120"/>
               </a:rPr>
-              <a:t>Identify what could go wrong, who could be affected, what safeguards are needed, and what evidence should be reviewed before use expands.</a:t>
-            </a:r>
-            <a:endParaRPr lang="en-US" sz="1550" dirty="0"/>
+              <a:t>Identify what could go wrong, who could be affected, what safeguards are needed, and what evidence should be reviewed.</a:t>
+            </a:r>
+            <a:endParaRPr lang="en-US" sz="1320" dirty="0"/>
           </a:p>
         </p:txBody>
       </p:sp>
@@ -6882,49 +6969,58 @@
           <a:ln/>
         </p:spPr>
         <p:txBody>
-          <a:bodyPr wrap="square" lIns="635" tIns="635" rIns="635" bIns="635" rtlCol="0" anchor="t">
+          <a:bodyPr wrap="square" lIns="1016" tIns="1016" rIns="1016" bIns="1016" rtlCol="0" anchor="t">
             <a:normAutofit/>
           </a:bodyPr>
           <a:lstStyle/>
           <a:p>
+            <a:pPr indent="0" marL="0">
+              <a:buNone/>
+            </a:pPr>
             <a:r>
               <a:rPr lang="en-US" sz="2100" dirty="0">
                 <a:solidFill>
-                  <a:srgbClr val="17364A"/>
-                </a:solidFill>
-                <a:latin typeface="Aptos" pitchFamily="34" charset="0"/>
-                <a:ea typeface="Aptos" pitchFamily="34" charset="-122"/>
-                <a:cs typeface="Aptos" pitchFamily="34" charset="-120"/>
-              </a:rPr>
-              <a:t>Generative AI may summarize eICR content, but summaries should display source evidence and uncertainty.</a:t>
+                  <a:srgbClr val="003A63"/>
+                </a:solidFill>
+                <a:latin typeface="Aptos" pitchFamily="34" charset="0"/>
+                <a:ea typeface="Aptos" pitchFamily="34" charset="-122"/>
+                <a:cs typeface="Aptos" pitchFamily="34" charset="-120"/>
+              </a:rPr>
+              <a:t>• Generative AI may summarize eICR content, but summaries should display source evidence and.</a:t>
             </a:r>
             <a:endParaRPr lang="en-US" sz="2100" dirty="0"/>
           </a:p>
           <a:p>
+            <a:pPr indent="0" marL="0">
+              <a:buNone/>
+            </a:pPr>
             <a:r>
               <a:rPr lang="en-US" sz="2100" dirty="0">
                 <a:solidFill>
-                  <a:srgbClr val="17364A"/>
-                </a:solidFill>
-                <a:latin typeface="Aptos" pitchFamily="34" charset="0"/>
-                <a:ea typeface="Aptos" pitchFamily="34" charset="-122"/>
-                <a:cs typeface="Aptos" pitchFamily="34" charset="-120"/>
-              </a:rPr>
-              <a:t>Predictive models may support prioritization, but only after validation against public health outcomes.</a:t>
+                  <a:srgbClr val="003A63"/>
+                </a:solidFill>
+                <a:latin typeface="Aptos" pitchFamily="34" charset="0"/>
+                <a:ea typeface="Aptos" pitchFamily="34" charset="-122"/>
+                <a:cs typeface="Aptos" pitchFamily="34" charset="-120"/>
+              </a:rPr>
+              <a:t>• Predictive models may support prioritization, but only after validation against public health.</a:t>
             </a:r>
             <a:endParaRPr lang="en-US" sz="2100" dirty="0"/>
           </a:p>
           <a:p>
+            <a:pPr indent="0" marL="0">
+              <a:buNone/>
+            </a:pPr>
             <a:r>
               <a:rPr lang="en-US" sz="2100" dirty="0">
                 <a:solidFill>
-                  <a:srgbClr val="17364A"/>
-                </a:solidFill>
-                <a:latin typeface="Aptos" pitchFamily="34" charset="0"/>
-                <a:ea typeface="Aptos" pitchFamily="34" charset="-122"/>
-                <a:cs typeface="Aptos" pitchFamily="34" charset="-120"/>
-              </a:rPr>
-              <a:t>RAG may provide disease-specific guidance to investigators, but document sources must be current and.</a:t>
+                  <a:srgbClr val="003A63"/>
+                </a:solidFill>
+                <a:latin typeface="Aptos" pitchFamily="34" charset="0"/>
+                <a:ea typeface="Aptos" pitchFamily="34" charset="-122"/>
+                <a:cs typeface="Aptos" pitchFamily="34" charset="-120"/>
+              </a:rPr>
+              <a:t>• RAG may provide disease-specific guidance to investigators, but document sources must be.</a:t>
             </a:r>
             <a:endParaRPr lang="en-US" sz="2100" dirty="0"/>
           </a:p>
@@ -7004,17 +7100,17 @@
         </p:nvSpPr>
         <p:spPr>
           <a:xfrm>
-            <a:off x="7799832" y="1828800"/>
-            <a:ext cx="3145536" cy="685800"/>
-          </a:xfrm>
-          <a:prstGeom prst="rect">
-            <a:avLst/>
-          </a:prstGeom>
-          <a:noFill/>
-          <a:ln/>
-        </p:spPr>
-        <p:txBody>
-          <a:bodyPr wrap="square" lIns="0" tIns="0" rIns="0" bIns="0" rtlCol="0" anchor="t">
+            <a:off x="7799832" y="1801368"/>
+            <a:ext cx="3145536" cy="758952"/>
+          </a:xfrm>
+          <a:prstGeom prst="rect">
+            <a:avLst/>
+          </a:prstGeom>
+          <a:noFill/>
+          <a:ln/>
+        </p:spPr>
+        <p:txBody>
+          <a:bodyPr wrap="square" lIns="254" tIns="254" rIns="254" bIns="254" rtlCol="0" anchor="t">
             <a:normAutofit/>
           </a:bodyPr>
           <a:lstStyle/>
@@ -7023,7 +7119,7 @@
               <a:buNone/>
             </a:pPr>
             <a:r>
-              <a:rPr lang="en-US" sz="1550" dirty="0">
+              <a:rPr lang="en-US" sz="1320" dirty="0">
                 <a:solidFill>
                   <a:srgbClr val="17364A"/>
                 </a:solidFill>
@@ -7033,7 +7129,7 @@
               </a:rPr>
               <a:t>Generative AI may summarize eICR content, but summaries should display source evidence and uncertainty.</a:t>
             </a:r>
-            <a:endParaRPr lang="en-US" sz="1550" dirty="0"/>
+            <a:endParaRPr lang="en-US" sz="1320" dirty="0"/>
           </a:p>
         </p:txBody>
       </p:sp>
@@ -7121,13 +7217,16 @@
           <a:ln/>
         </p:spPr>
         <p:txBody>
-          <a:bodyPr wrap="square" lIns="254" tIns="254" rIns="254" bIns="254" rtlCol="0" anchor="t">
+          <a:bodyPr wrap="square" lIns="508" tIns="508" rIns="508" bIns="508" rtlCol="0" anchor="t">
             <a:normAutofit/>
           </a:bodyPr>
           <a:lstStyle/>
           <a:p>
-            <a:r>
-              <a:rPr lang="en-US" sz="1380" dirty="0">
+            <a:pPr indent="0" marL="0">
+              <a:buNone/>
+            </a:pPr>
+            <a:r>
+              <a:rPr lang="en-US" sz="1220" dirty="0">
                 <a:solidFill>
                   <a:srgbClr val="17364A"/>
                 </a:solidFill>
@@ -7135,13 +7234,16 @@
                 <a:ea typeface="Aptos" pitchFamily="34" charset="-122"/>
                 <a:cs typeface="Aptos" pitchFamily="34" charset="-120"/>
               </a:rPr>
-              <a:t>Predictive models may support prioritization, but only after validation against public.</a:t>
-            </a:r>
-            <a:endParaRPr lang="en-US" sz="1380" dirty="0"/>
-          </a:p>
-          <a:p>
-            <a:r>
-              <a:rPr lang="en-US" sz="1380" dirty="0">
+              <a:t>Predictive models may support prioritization, but only after.</a:t>
+            </a:r>
+            <a:endParaRPr lang="en-US" sz="1220" dirty="0"/>
+          </a:p>
+          <a:p>
+            <a:pPr indent="0" marL="0">
+              <a:buNone/>
+            </a:pPr>
+            <a:r>
+              <a:rPr lang="en-US" sz="1220" dirty="0">
                 <a:solidFill>
                   <a:srgbClr val="17364A"/>
                 </a:solidFill>
@@ -7149,13 +7251,16 @@
                 <a:ea typeface="Aptos" pitchFamily="34" charset="-122"/>
                 <a:cs typeface="Aptos" pitchFamily="34" charset="-120"/>
               </a:rPr>
-              <a:t>RAG may provide disease-specific guidance to investigators, but document sources must be.</a:t>
-            </a:r>
-            <a:endParaRPr lang="en-US" sz="1380" dirty="0"/>
-          </a:p>
-          <a:p>
-            <a:r>
-              <a:rPr lang="en-US" sz="1380" dirty="0">
+              <a:t>RAG may provide disease-specific guidance to investigators, but.</a:t>
+            </a:r>
+            <a:endParaRPr lang="en-US" sz="1220" dirty="0"/>
+          </a:p>
+          <a:p>
+            <a:pPr indent="0" marL="0">
+              <a:buNone/>
+            </a:pPr>
+            <a:r>
+              <a:rPr lang="en-US" sz="1220" dirty="0">
                 <a:solidFill>
                   <a:srgbClr val="17364A"/>
                 </a:solidFill>
@@ -7163,9 +7268,9 @@
                 <a:ea typeface="Aptos" pitchFamily="34" charset="-122"/>
                 <a:cs typeface="Aptos" pitchFamily="34" charset="-120"/>
               </a:rPr>
-              <a:t>Agentic AI could create follow-up tasks, but task creation should be constrained and.</a:t>
-            </a:r>
-            <a:endParaRPr lang="en-US" sz="1380" dirty="0"/>
+              <a:t>Agentic AI could create follow-up tasks, but task creation should.</a:t>
+            </a:r>
+            <a:endParaRPr lang="en-US" sz="1220" dirty="0"/>
           </a:p>
         </p:txBody>
       </p:sp>
@@ -7243,17 +7348,17 @@
         </p:nvSpPr>
         <p:spPr>
           <a:xfrm>
-            <a:off x="7799832" y="5001768"/>
-            <a:ext cx="3145536" cy="502920"/>
-          </a:xfrm>
-          <a:prstGeom prst="rect">
-            <a:avLst/>
-          </a:prstGeom>
-          <a:noFill/>
-          <a:ln/>
-        </p:spPr>
-        <p:txBody>
-          <a:bodyPr wrap="square" lIns="0" tIns="0" rIns="0" bIns="0" rtlCol="0" anchor="t">
+            <a:off x="7799832" y="4974336"/>
+            <a:ext cx="3145536" cy="576072"/>
+          </a:xfrm>
+          <a:prstGeom prst="rect">
+            <a:avLst/>
+          </a:prstGeom>
+          <a:noFill/>
+          <a:ln/>
+        </p:spPr>
+        <p:txBody>
+          <a:bodyPr wrap="square" lIns="254" tIns="254" rIns="254" bIns="254" rtlCol="0" anchor="t">
             <a:normAutofit/>
           </a:bodyPr>
           <a:lstStyle/>
@@ -7262,7 +7367,7 @@
               <a:buNone/>
             </a:pPr>
             <a:r>
-              <a:rPr lang="en-US" sz="1550" dirty="0">
+              <a:rPr lang="en-US" sz="1320" dirty="0">
                 <a:solidFill>
                   <a:srgbClr val="17364A"/>
                 </a:solidFill>
@@ -7270,9 +7375,9 @@
                 <a:ea typeface="Aptos" pitchFamily="34" charset="-122"/>
                 <a:cs typeface="Aptos" pitchFamily="34" charset="-120"/>
               </a:rPr>
-              <a:t>Use the concept to clarify workflow changes, dependencies, staffing, procurement requirements, training needs, and implementation checkpoints.</a:t>
-            </a:r>
-            <a:endParaRPr lang="en-US" sz="1550" dirty="0"/>
+              <a:t>Use the concept to clarify workflow changes, dependencies, staffing, procurement requirements, training needs, and.</a:t>
+            </a:r>
+            <a:endParaRPr lang="en-US" sz="1320" dirty="0"/>
           </a:p>
         </p:txBody>
       </p:sp>
@@ -7573,49 +7678,58 @@
           <a:ln/>
         </p:spPr>
         <p:txBody>
-          <a:bodyPr wrap="square" lIns="635" tIns="635" rIns="635" bIns="635" rtlCol="0" anchor="t">
+          <a:bodyPr wrap="square" lIns="1016" tIns="1016" rIns="1016" bIns="1016" rtlCol="0" anchor="t">
             <a:normAutofit/>
           </a:bodyPr>
           <a:lstStyle/>
           <a:p>
+            <a:pPr indent="0" marL="0">
+              <a:buNone/>
+            </a:pPr>
             <a:r>
               <a:rPr lang="en-US" sz="2100" dirty="0">
                 <a:solidFill>
-                  <a:srgbClr val="17364A"/>
-                </a:solidFill>
-                <a:latin typeface="Aptos" pitchFamily="34" charset="0"/>
-                <a:ea typeface="Aptos" pitchFamily="34" charset="-122"/>
-                <a:cs typeface="Aptos" pitchFamily="34" charset="-120"/>
-              </a:rPr>
-              <a:t>Where does your agency receive, review, or process case reports today?</a:t>
+                  <a:srgbClr val="003A63"/>
+                </a:solidFill>
+                <a:latin typeface="Aptos" pitchFamily="34" charset="0"/>
+                <a:ea typeface="Aptos" pitchFamily="34" charset="-122"/>
+                <a:cs typeface="Aptos" pitchFamily="34" charset="-120"/>
+              </a:rPr>
+              <a:t>• Where does your agency receive, review, or process case reports today?</a:t>
             </a:r>
             <a:endParaRPr lang="en-US" sz="2100" dirty="0"/>
           </a:p>
           <a:p>
+            <a:pPr indent="0" marL="0">
+              <a:buNone/>
+            </a:pPr>
             <a:r>
               <a:rPr lang="en-US" sz="2100" dirty="0">
                 <a:solidFill>
-                  <a:srgbClr val="17364A"/>
-                </a:solidFill>
-                <a:latin typeface="Aptos" pitchFamily="34" charset="0"/>
-                <a:ea typeface="Aptos" pitchFamily="34" charset="-122"/>
-                <a:cs typeface="Aptos" pitchFamily="34" charset="-120"/>
-              </a:rPr>
-              <a:t>Which steps are automated and which remain manual?</a:t>
+                  <a:srgbClr val="003A63"/>
+                </a:solidFill>
+                <a:latin typeface="Aptos" pitchFamily="34" charset="0"/>
+                <a:ea typeface="Aptos" pitchFamily="34" charset="-122"/>
+                <a:cs typeface="Aptos" pitchFamily="34" charset="-120"/>
+              </a:rPr>
+              <a:t>• Which steps are automated and which remain manual?</a:t>
             </a:r>
             <a:endParaRPr lang="en-US" sz="2100" dirty="0"/>
           </a:p>
           <a:p>
+            <a:pPr indent="0" marL="0">
+              <a:buNone/>
+            </a:pPr>
             <a:r>
               <a:rPr lang="en-US" sz="2100" dirty="0">
                 <a:solidFill>
-                  <a:srgbClr val="17364A"/>
-                </a:solidFill>
-                <a:latin typeface="Aptos" pitchFamily="34" charset="0"/>
-                <a:ea typeface="Aptos" pitchFamily="34" charset="-122"/>
-                <a:cs typeface="Aptos" pitchFamily="34" charset="-120"/>
-              </a:rPr>
-              <a:t>Where are timeliness, completeness, routing, or duplication problems most common?</a:t>
+                  <a:srgbClr val="003A63"/>
+                </a:solidFill>
+                <a:latin typeface="Aptos" pitchFamily="34" charset="0"/>
+                <a:ea typeface="Aptos" pitchFamily="34" charset="-122"/>
+                <a:cs typeface="Aptos" pitchFamily="34" charset="-120"/>
+              </a:rPr>
+              <a:t>• Where are timeliness, completeness, routing, or duplication problems most common?</a:t>
             </a:r>
             <a:endParaRPr lang="en-US" sz="2100" dirty="0"/>
           </a:p>
@@ -7695,17 +7809,17 @@
         </p:nvSpPr>
         <p:spPr>
           <a:xfrm>
-            <a:off x="7799832" y="1828800"/>
-            <a:ext cx="3145536" cy="685800"/>
-          </a:xfrm>
-          <a:prstGeom prst="rect">
-            <a:avLst/>
-          </a:prstGeom>
-          <a:noFill/>
-          <a:ln/>
-        </p:spPr>
-        <p:txBody>
-          <a:bodyPr wrap="square" lIns="0" tIns="0" rIns="0" bIns="0" rtlCol="0" anchor="t">
+            <a:off x="7799832" y="1801368"/>
+            <a:ext cx="3145536" cy="758952"/>
+          </a:xfrm>
+          <a:prstGeom prst="rect">
+            <a:avLst/>
+          </a:prstGeom>
+          <a:noFill/>
+          <a:ln/>
+        </p:spPr>
+        <p:txBody>
+          <a:bodyPr wrap="square" lIns="254" tIns="254" rIns="254" bIns="254" rtlCol="0" anchor="t">
             <a:normAutofit/>
           </a:bodyPr>
           <a:lstStyle/>
@@ -7714,7 +7828,7 @@
               <a:buNone/>
             </a:pPr>
             <a:r>
-              <a:rPr lang="en-US" sz="1550" dirty="0">
+              <a:rPr lang="en-US" sz="1320" dirty="0">
                 <a:solidFill>
                   <a:srgbClr val="17364A"/>
                 </a:solidFill>
@@ -7724,7 +7838,7 @@
               </a:rPr>
               <a:t>Where does your agency receive, review, or process case reports today?</a:t>
             </a:r>
-            <a:endParaRPr lang="en-US" sz="1550" dirty="0"/>
+            <a:endParaRPr lang="en-US" sz="1320" dirty="0"/>
           </a:p>
         </p:txBody>
       </p:sp>
@@ -7812,13 +7926,16 @@
           <a:ln/>
         </p:spPr>
         <p:txBody>
-          <a:bodyPr wrap="square" lIns="254" tIns="254" rIns="254" bIns="254" rtlCol="0" anchor="t">
+          <a:bodyPr wrap="square" lIns="508" tIns="508" rIns="508" bIns="508" rtlCol="0" anchor="t">
             <a:normAutofit/>
           </a:bodyPr>
           <a:lstStyle/>
           <a:p>
-            <a:r>
-              <a:rPr lang="en-US" sz="1380" dirty="0">
+            <a:pPr indent="0" marL="0">
+              <a:buNone/>
+            </a:pPr>
+            <a:r>
+              <a:rPr lang="en-US" sz="1220" dirty="0">
                 <a:solidFill>
                   <a:srgbClr val="17364A"/>
                 </a:solidFill>
@@ -7826,13 +7943,16 @@
                 <a:ea typeface="Aptos" pitchFamily="34" charset="-122"/>
                 <a:cs typeface="Aptos" pitchFamily="34" charset="-120"/>
               </a:rPr>
-              <a:t>Where does your agency receive, review, or process case reports today?</a:t>
-            </a:r>
-            <a:endParaRPr lang="en-US" sz="1380" dirty="0"/>
-          </a:p>
-          <a:p>
-            <a:r>
-              <a:rPr lang="en-US" sz="1380" dirty="0">
+              <a:t>Where does your agency receive, review, or process case reports.</a:t>
+            </a:r>
+            <a:endParaRPr lang="en-US" sz="1220" dirty="0"/>
+          </a:p>
+          <a:p>
+            <a:pPr indent="0" marL="0">
+              <a:buNone/>
+            </a:pPr>
+            <a:r>
+              <a:rPr lang="en-US" sz="1220" dirty="0">
                 <a:solidFill>
                   <a:srgbClr val="17364A"/>
                 </a:solidFill>
@@ -7842,11 +7962,14 @@
               </a:rPr>
               <a:t>Which steps are automated and which remain manual?</a:t>
             </a:r>
-            <a:endParaRPr lang="en-US" sz="1380" dirty="0"/>
-          </a:p>
-          <a:p>
-            <a:r>
-              <a:rPr lang="en-US" sz="1380" dirty="0">
+            <a:endParaRPr lang="en-US" sz="1220" dirty="0"/>
+          </a:p>
+          <a:p>
+            <a:pPr indent="0" marL="0">
+              <a:buNone/>
+            </a:pPr>
+            <a:r>
+              <a:rPr lang="en-US" sz="1220" dirty="0">
                 <a:solidFill>
                   <a:srgbClr val="17364A"/>
                 </a:solidFill>
@@ -7854,9 +7977,9 @@
                 <a:ea typeface="Aptos" pitchFamily="34" charset="-122"/>
                 <a:cs typeface="Aptos" pitchFamily="34" charset="-120"/>
               </a:rPr>
-              <a:t>Where are timeliness, completeness, routing, or duplication problems most common?</a:t>
-            </a:r>
-            <a:endParaRPr lang="en-US" sz="1380" dirty="0"/>
+              <a:t>Where are timeliness, completeness, routing, or duplication.</a:t>
+            </a:r>
+            <a:endParaRPr lang="en-US" sz="1220" dirty="0"/>
           </a:p>
         </p:txBody>
       </p:sp>
@@ -7934,17 +8057,17 @@
         </p:nvSpPr>
         <p:spPr>
           <a:xfrm>
-            <a:off x="7799832" y="5001768"/>
-            <a:ext cx="3145536" cy="502920"/>
-          </a:xfrm>
-          <a:prstGeom prst="rect">
-            <a:avLst/>
-          </a:prstGeom>
-          <a:noFill/>
-          <a:ln/>
-        </p:spPr>
-        <p:txBody>
-          <a:bodyPr wrap="square" lIns="0" tIns="0" rIns="0" bIns="0" rtlCol="0" anchor="t">
+            <a:off x="7799832" y="4974336"/>
+            <a:ext cx="3145536" cy="576072"/>
+          </a:xfrm>
+          <a:prstGeom prst="rect">
+            <a:avLst/>
+          </a:prstGeom>
+          <a:noFill/>
+          <a:ln/>
+        </p:spPr>
+        <p:txBody>
+          <a:bodyPr wrap="square" lIns="254" tIns="254" rIns="254" bIns="254" rtlCol="0" anchor="t">
             <a:normAutofit/>
           </a:bodyPr>
           <a:lstStyle/>
@@ -7953,7 +8076,7 @@
               <a:buNone/>
             </a:pPr>
             <a:r>
-              <a:rPr lang="en-US" sz="1550" dirty="0">
+              <a:rPr lang="en-US" sz="1320" dirty="0">
                 <a:solidFill>
                   <a:srgbClr val="17364A"/>
                 </a:solidFill>
@@ -7961,9 +8084,9 @@
                 <a:ea typeface="Aptos" pitchFamily="34" charset="-122"/>
                 <a:cs typeface="Aptos" pitchFamily="34" charset="-120"/>
               </a:rPr>
-              <a:t>Use the concept to clarify workflow changes, dependencies, staffing, procurement requirements, training needs, and implementation checkpoints.</a:t>
-            </a:r>
-            <a:endParaRPr lang="en-US" sz="1550" dirty="0"/>
+              <a:t>Use the concept to clarify workflow changes, dependencies, staffing, procurement requirements, training needs, and.</a:t>
+            </a:r>
+            <a:endParaRPr lang="en-US" sz="1320" dirty="0"/>
           </a:p>
         </p:txBody>
       </p:sp>
@@ -8264,35 +8387,41 @@
           <a:ln/>
         </p:spPr>
         <p:txBody>
-          <a:bodyPr wrap="square" lIns="635" tIns="635" rIns="635" bIns="635" rtlCol="0" anchor="t">
+          <a:bodyPr wrap="square" lIns="1016" tIns="1016" rIns="1016" bIns="1016" rtlCol="0" anchor="t">
             <a:normAutofit/>
           </a:bodyPr>
           <a:lstStyle/>
           <a:p>
+            <a:pPr indent="0" marL="0">
+              <a:buNone/>
+            </a:pPr>
             <a:r>
               <a:rPr lang="en-US" sz="2100" dirty="0">
                 <a:solidFill>
-                  <a:srgbClr val="17364A"/>
-                </a:solidFill>
-                <a:latin typeface="Aptos" pitchFamily="34" charset="0"/>
-                <a:ea typeface="Aptos" pitchFamily="34" charset="-122"/>
-                <a:cs typeface="Aptos" pitchFamily="34" charset="-120"/>
-              </a:rPr>
-              <a:t>Which eCR tasks could AI support safely?</a:t>
+                  <a:srgbClr val="003A63"/>
+                </a:solidFill>
+                <a:latin typeface="Aptos" pitchFamily="34" charset="0"/>
+                <a:ea typeface="Aptos" pitchFamily="34" charset="-122"/>
+                <a:cs typeface="Aptos" pitchFamily="34" charset="-120"/>
+              </a:rPr>
+              <a:t>• Which eCR tasks could AI support safely?</a:t>
             </a:r>
             <a:endParaRPr lang="en-US" sz="2100" dirty="0"/>
           </a:p>
           <a:p>
+            <a:pPr indent="0" marL="0">
+              <a:buNone/>
+            </a:pPr>
             <a:r>
               <a:rPr lang="en-US" sz="2100" dirty="0">
                 <a:solidFill>
-                  <a:srgbClr val="17364A"/>
-                </a:solidFill>
-                <a:latin typeface="Aptos" pitchFamily="34" charset="0"/>
-                <a:ea typeface="Aptos" pitchFamily="34" charset="-122"/>
-                <a:cs typeface="Aptos" pitchFamily="34" charset="-120"/>
-              </a:rPr>
-              <a:t>Which tasks require human review, legal authority, or epidemiologic judgment?</a:t>
+                  <a:srgbClr val="003A63"/>
+                </a:solidFill>
+                <a:latin typeface="Aptos" pitchFamily="34" charset="0"/>
+                <a:ea typeface="Aptos" pitchFamily="34" charset="-122"/>
+                <a:cs typeface="Aptos" pitchFamily="34" charset="-120"/>
+              </a:rPr>
+              <a:t>• Which tasks require human review, legal authority, or epidemiologic judgment?</a:t>
             </a:r>
             <a:endParaRPr lang="en-US" sz="2100" dirty="0"/>
           </a:p>
@@ -8372,17 +8501,17 @@
         </p:nvSpPr>
         <p:spPr>
           <a:xfrm>
-            <a:off x="7799832" y="1828800"/>
-            <a:ext cx="3145536" cy="685800"/>
-          </a:xfrm>
-          <a:prstGeom prst="rect">
-            <a:avLst/>
-          </a:prstGeom>
-          <a:noFill/>
-          <a:ln/>
-        </p:spPr>
-        <p:txBody>
-          <a:bodyPr wrap="square" lIns="0" tIns="0" rIns="0" bIns="0" rtlCol="0" anchor="t">
+            <a:off x="7799832" y="1801368"/>
+            <a:ext cx="3145536" cy="758952"/>
+          </a:xfrm>
+          <a:prstGeom prst="rect">
+            <a:avLst/>
+          </a:prstGeom>
+          <a:noFill/>
+          <a:ln/>
+        </p:spPr>
+        <p:txBody>
+          <a:bodyPr wrap="square" lIns="254" tIns="254" rIns="254" bIns="254" rtlCol="0" anchor="t">
             <a:normAutofit/>
           </a:bodyPr>
           <a:lstStyle/>
@@ -8391,7 +8520,7 @@
               <a:buNone/>
             </a:pPr>
             <a:r>
-              <a:rPr lang="en-US" sz="1550" dirty="0">
+              <a:rPr lang="en-US" sz="1320" dirty="0">
                 <a:solidFill>
                   <a:srgbClr val="17364A"/>
                 </a:solidFill>
@@ -8401,7 +8530,7 @@
               </a:rPr>
               <a:t>Which eCR tasks could AI support safely?</a:t>
             </a:r>
-            <a:endParaRPr lang="en-US" sz="1550" dirty="0"/>
+            <a:endParaRPr lang="en-US" sz="1320" dirty="0"/>
           </a:p>
         </p:txBody>
       </p:sp>
@@ -8489,13 +8618,16 @@
           <a:ln/>
         </p:spPr>
         <p:txBody>
-          <a:bodyPr wrap="square" lIns="254" tIns="254" rIns="254" bIns="254" rtlCol="0" anchor="t">
+          <a:bodyPr wrap="square" lIns="508" tIns="508" rIns="508" bIns="508" rtlCol="0" anchor="t">
             <a:normAutofit/>
           </a:bodyPr>
           <a:lstStyle/>
           <a:p>
-            <a:r>
-              <a:rPr lang="en-US" sz="1380" dirty="0">
+            <a:pPr indent="0" marL="0">
+              <a:buNone/>
+            </a:pPr>
+            <a:r>
+              <a:rPr lang="en-US" sz="1220" dirty="0">
                 <a:solidFill>
                   <a:srgbClr val="17364A"/>
                 </a:solidFill>
@@ -8505,11 +8637,14 @@
               </a:rPr>
               <a:t>Which eCR tasks could AI support safely?</a:t>
             </a:r>
-            <a:endParaRPr lang="en-US" sz="1380" dirty="0"/>
-          </a:p>
-          <a:p>
-            <a:r>
-              <a:rPr lang="en-US" sz="1380" dirty="0">
+            <a:endParaRPr lang="en-US" sz="1220" dirty="0"/>
+          </a:p>
+          <a:p>
+            <a:pPr indent="0" marL="0">
+              <a:buNone/>
+            </a:pPr>
+            <a:r>
+              <a:rPr lang="en-US" sz="1220" dirty="0">
                 <a:solidFill>
                   <a:srgbClr val="17364A"/>
                 </a:solidFill>
@@ -8517,9 +8652,9 @@
                 <a:ea typeface="Aptos" pitchFamily="34" charset="-122"/>
                 <a:cs typeface="Aptos" pitchFamily="34" charset="-120"/>
               </a:rPr>
-              <a:t>Which tasks require human review, legal authority, or epidemiologic judgment?</a:t>
-            </a:r>
-            <a:endParaRPr lang="en-US" sz="1380" dirty="0"/>
+              <a:t>Which tasks require human review, legal authority, or.</a:t>
+            </a:r>
+            <a:endParaRPr lang="en-US" sz="1220" dirty="0"/>
           </a:p>
         </p:txBody>
       </p:sp>
@@ -8597,17 +8732,17 @@
         </p:nvSpPr>
         <p:spPr>
           <a:xfrm>
-            <a:off x="7799832" y="5001768"/>
-            <a:ext cx="3145536" cy="502920"/>
-          </a:xfrm>
-          <a:prstGeom prst="rect">
-            <a:avLst/>
-          </a:prstGeom>
-          <a:noFill/>
-          <a:ln/>
-        </p:spPr>
-        <p:txBody>
-          <a:bodyPr wrap="square" lIns="0" tIns="0" rIns="0" bIns="0" rtlCol="0" anchor="t">
+            <a:off x="7799832" y="4974336"/>
+            <a:ext cx="3145536" cy="576072"/>
+          </a:xfrm>
+          <a:prstGeom prst="rect">
+            <a:avLst/>
+          </a:prstGeom>
+          <a:noFill/>
+          <a:ln/>
+        </p:spPr>
+        <p:txBody>
+          <a:bodyPr wrap="square" lIns="254" tIns="254" rIns="254" bIns="254" rtlCol="0" anchor="t">
             <a:normAutofit/>
           </a:bodyPr>
           <a:lstStyle/>
@@ -8616,7 +8751,7 @@
               <a:buNone/>
             </a:pPr>
             <a:r>
-              <a:rPr lang="en-US" sz="1550" dirty="0">
+              <a:rPr lang="en-US" sz="1320" dirty="0">
                 <a:solidFill>
                   <a:srgbClr val="17364A"/>
                 </a:solidFill>
@@ -8624,9 +8759,9 @@
                 <a:ea typeface="Aptos" pitchFamily="34" charset="-122"/>
                 <a:cs typeface="Aptos" pitchFamily="34" charset="-120"/>
               </a:rPr>
-              <a:t>Use the concept to clarify workflow changes, dependencies, staffing, procurement requirements, training needs, and implementation checkpoints.</a:t>
-            </a:r>
-            <a:endParaRPr lang="en-US" sz="1550" dirty="0"/>
+              <a:t>Use the concept to clarify workflow changes, dependencies, staffing, procurement requirements, training needs, and.</a:t>
+            </a:r>
+            <a:endParaRPr lang="en-US" sz="1320" dirty="0"/>
           </a:p>
         </p:txBody>
       </p:sp>
@@ -8927,35 +9062,41 @@
           <a:ln/>
         </p:spPr>
         <p:txBody>
-          <a:bodyPr wrap="square" lIns="635" tIns="635" rIns="635" bIns="635" rtlCol="0" anchor="t">
+          <a:bodyPr wrap="square" lIns="1016" tIns="1016" rIns="1016" bIns="1016" rtlCol="0" anchor="t">
             <a:normAutofit/>
           </a:bodyPr>
           <a:lstStyle/>
           <a:p>
+            <a:pPr indent="0" marL="0">
+              <a:buNone/>
+            </a:pPr>
             <a:r>
               <a:rPr lang="en-US" sz="2100" dirty="0">
                 <a:solidFill>
-                  <a:srgbClr val="17364A"/>
-                </a:solidFill>
-                <a:latin typeface="Aptos" pitchFamily="34" charset="0"/>
-                <a:ea typeface="Aptos" pitchFamily="34" charset="-122"/>
-                <a:cs typeface="Aptos" pitchFamily="34" charset="-120"/>
-              </a:rPr>
-              <a:t>Create an AI-readiness review for one eCR workflow.</a:t>
+                  <a:srgbClr val="003A63"/>
+                </a:solidFill>
+                <a:latin typeface="Aptos" pitchFamily="34" charset="0"/>
+                <a:ea typeface="Aptos" pitchFamily="34" charset="-122"/>
+                <a:cs typeface="Aptos" pitchFamily="34" charset="-120"/>
+              </a:rPr>
+              <a:t>• Create an AI-readiness review for one eCR workflow.</a:t>
             </a:r>
             <a:endParaRPr lang="en-US" sz="2100" dirty="0"/>
           </a:p>
           <a:p>
+            <a:pPr indent="0" marL="0">
+              <a:buNone/>
+            </a:pPr>
             <a:r>
               <a:rPr lang="en-US" sz="2100" dirty="0">
                 <a:solidFill>
-                  <a:srgbClr val="17364A"/>
-                </a:solidFill>
-                <a:latin typeface="Aptos" pitchFamily="34" charset="0"/>
-                <a:ea typeface="Aptos" pitchFamily="34" charset="-122"/>
-                <a:cs typeface="Aptos" pitchFamily="34" charset="-120"/>
-              </a:rPr>
-              <a:t>Map the current workflow, identify data elements required for review, describe common data quality.</a:t>
+                  <a:srgbClr val="003A63"/>
+                </a:solidFill>
+                <a:latin typeface="Aptos" pitchFamily="34" charset="0"/>
+                <a:ea typeface="Aptos" pitchFamily="34" charset="-122"/>
+                <a:cs typeface="Aptos" pitchFamily="34" charset="-120"/>
+              </a:rPr>
+              <a:t>• Map the current workflow, identify data elements required for review, describe common data.</a:t>
             </a:r>
             <a:endParaRPr lang="en-US" sz="2100" dirty="0"/>
           </a:p>
@@ -9035,17 +9176,17 @@
         </p:nvSpPr>
         <p:spPr>
           <a:xfrm>
-            <a:off x="7799832" y="1828800"/>
-            <a:ext cx="3145536" cy="685800"/>
-          </a:xfrm>
-          <a:prstGeom prst="rect">
-            <a:avLst/>
-          </a:prstGeom>
-          <a:noFill/>
-          <a:ln/>
-        </p:spPr>
-        <p:txBody>
-          <a:bodyPr wrap="square" lIns="0" tIns="0" rIns="0" bIns="0" rtlCol="0" anchor="t">
+            <a:off x="7799832" y="1801368"/>
+            <a:ext cx="3145536" cy="758952"/>
+          </a:xfrm>
+          <a:prstGeom prst="rect">
+            <a:avLst/>
+          </a:prstGeom>
+          <a:noFill/>
+          <a:ln/>
+        </p:spPr>
+        <p:txBody>
+          <a:bodyPr wrap="square" lIns="254" tIns="254" rIns="254" bIns="254" rtlCol="0" anchor="t">
             <a:normAutofit/>
           </a:bodyPr>
           <a:lstStyle/>
@@ -9054,7 +9195,7 @@
               <a:buNone/>
             </a:pPr>
             <a:r>
-              <a:rPr lang="en-US" sz="1550" dirty="0">
+              <a:rPr lang="en-US" sz="1320" dirty="0">
                 <a:solidFill>
                   <a:srgbClr val="17364A"/>
                 </a:solidFill>
@@ -9064,7 +9205,7 @@
               </a:rPr>
               <a:t>Create an AI-readiness review for one eCR workflow.</a:t>
             </a:r>
-            <a:endParaRPr lang="en-US" sz="1550" dirty="0"/>
+            <a:endParaRPr lang="en-US" sz="1320" dirty="0"/>
           </a:p>
         </p:txBody>
       </p:sp>
@@ -9152,13 +9293,16 @@
           <a:ln/>
         </p:spPr>
         <p:txBody>
-          <a:bodyPr wrap="square" lIns="254" tIns="254" rIns="254" bIns="254" rtlCol="0" anchor="t">
+          <a:bodyPr wrap="square" lIns="508" tIns="508" rIns="508" bIns="508" rtlCol="0" anchor="t">
             <a:normAutofit/>
           </a:bodyPr>
           <a:lstStyle/>
           <a:p>
-            <a:r>
-              <a:rPr lang="en-US" sz="1380" dirty="0">
+            <a:pPr indent="0" marL="0">
+              <a:buNone/>
+            </a:pPr>
+            <a:r>
+              <a:rPr lang="en-US" sz="1220" dirty="0">
                 <a:solidFill>
                   <a:srgbClr val="17364A"/>
                 </a:solidFill>
@@ -9168,11 +9312,14 @@
               </a:rPr>
               <a:t>Create an AI-readiness review for one eCR workflow.</a:t>
             </a:r>
-            <a:endParaRPr lang="en-US" sz="1380" dirty="0"/>
-          </a:p>
-          <a:p>
-            <a:r>
-              <a:rPr lang="en-US" sz="1380" dirty="0">
+            <a:endParaRPr lang="en-US" sz="1220" dirty="0"/>
+          </a:p>
+          <a:p>
+            <a:pPr indent="0" marL="0">
+              <a:buNone/>
+            </a:pPr>
+            <a:r>
+              <a:rPr lang="en-US" sz="1220" dirty="0">
                 <a:solidFill>
                   <a:srgbClr val="17364A"/>
                 </a:solidFill>
@@ -9180,9 +9327,9 @@
                 <a:ea typeface="Aptos" pitchFamily="34" charset="-122"/>
                 <a:cs typeface="Aptos" pitchFamily="34" charset="-120"/>
               </a:rPr>
-              <a:t>Map the current workflow, identify data elements required for review, describe common data.</a:t>
-            </a:r>
-            <a:endParaRPr lang="en-US" sz="1380" dirty="0"/>
+              <a:t>Map the current workflow, identify data elements required for.</a:t>
+            </a:r>
+            <a:endParaRPr lang="en-US" sz="1220" dirty="0"/>
           </a:p>
         </p:txBody>
       </p:sp>
@@ -9260,17 +9407,17 @@
         </p:nvSpPr>
         <p:spPr>
           <a:xfrm>
-            <a:off x="7799832" y="5001768"/>
-            <a:ext cx="3145536" cy="502920"/>
-          </a:xfrm>
-          <a:prstGeom prst="rect">
-            <a:avLst/>
-          </a:prstGeom>
-          <a:noFill/>
-          <a:ln/>
-        </p:spPr>
-        <p:txBody>
-          <a:bodyPr wrap="square" lIns="0" tIns="0" rIns="0" bIns="0" rtlCol="0" anchor="t">
+            <a:off x="7799832" y="4974336"/>
+            <a:ext cx="3145536" cy="576072"/>
+          </a:xfrm>
+          <a:prstGeom prst="rect">
+            <a:avLst/>
+          </a:prstGeom>
+          <a:noFill/>
+          <a:ln/>
+        </p:spPr>
+        <p:txBody>
+          <a:bodyPr wrap="square" lIns="254" tIns="254" rIns="254" bIns="254" rtlCol="0" anchor="t">
             <a:normAutofit/>
           </a:bodyPr>
           <a:lstStyle/>
@@ -9279,7 +9426,7 @@
               <a:buNone/>
             </a:pPr>
             <a:r>
-              <a:rPr lang="en-US" sz="1550" dirty="0">
+              <a:rPr lang="en-US" sz="1320" dirty="0">
                 <a:solidFill>
                   <a:srgbClr val="17364A"/>
                 </a:solidFill>
@@ -9287,9 +9434,9 @@
                 <a:ea typeface="Aptos" pitchFamily="34" charset="-122"/>
                 <a:cs typeface="Aptos" pitchFamily="34" charset="-120"/>
               </a:rPr>
-              <a:t>Use the assignment to test whether you can explain the concept, apply it to a realistic public health situation, and identify what would need review before the work moves forward.</a:t>
-            </a:r>
-            <a:endParaRPr lang="en-US" sz="1550" dirty="0"/>
+              <a:t>Use the assignment to test whether you can explain the concept, apply it to a realistic public health situation, and.</a:t>
+            </a:r>
+            <a:endParaRPr lang="en-US" sz="1320" dirty="0"/>
           </a:p>
         </p:txBody>
       </p:sp>
@@ -9590,49 +9737,58 @@
           <a:ln/>
         </p:spPr>
         <p:txBody>
-          <a:bodyPr wrap="square" lIns="635" tIns="635" rIns="635" bIns="635" rtlCol="0" anchor="t">
+          <a:bodyPr wrap="square" lIns="1016" tIns="1016" rIns="1016" bIns="1016" rtlCol="0" anchor="t">
             <a:normAutofit/>
           </a:bodyPr>
           <a:lstStyle/>
           <a:p>
+            <a:pPr indent="0" marL="0">
+              <a:buNone/>
+            </a:pPr>
             <a:r>
               <a:rPr lang="en-US" sz="2100" dirty="0">
                 <a:solidFill>
-                  <a:srgbClr val="17364A"/>
-                </a:solidFill>
-                <a:latin typeface="Aptos" pitchFamily="34" charset="0"/>
-                <a:ea typeface="Aptos" pitchFamily="34" charset="-122"/>
-                <a:cs typeface="Aptos" pitchFamily="34" charset="-120"/>
-              </a:rPr>
-              <a:t>eCR workflow map</a:t>
+                  <a:srgbClr val="003A63"/>
+                </a:solidFill>
+                <a:latin typeface="Aptos" pitchFamily="34" charset="0"/>
+                <a:ea typeface="Aptos" pitchFamily="34" charset="-122"/>
+                <a:cs typeface="Aptos" pitchFamily="34" charset="-120"/>
+              </a:rPr>
+              <a:t>• eCR workflow map</a:t>
             </a:r>
             <a:endParaRPr lang="en-US" sz="2100" dirty="0"/>
           </a:p>
           <a:p>
+            <a:pPr indent="0" marL="0">
+              <a:buNone/>
+            </a:pPr>
             <a:r>
               <a:rPr lang="en-US" sz="2100" dirty="0">
                 <a:solidFill>
-                  <a:srgbClr val="17364A"/>
-                </a:solidFill>
-                <a:latin typeface="Aptos" pitchFamily="34" charset="0"/>
-                <a:ea typeface="Aptos" pitchFamily="34" charset="-122"/>
-                <a:cs typeface="Aptos" pitchFamily="34" charset="-120"/>
-              </a:rPr>
-              <a:t>AI-readiness checklist</a:t>
+                  <a:srgbClr val="003A63"/>
+                </a:solidFill>
+                <a:latin typeface="Aptos" pitchFamily="34" charset="0"/>
+                <a:ea typeface="Aptos" pitchFamily="34" charset="-122"/>
+                <a:cs typeface="Aptos" pitchFamily="34" charset="-120"/>
+              </a:rPr>
+              <a:t>• AI-readiness checklist</a:t>
             </a:r>
             <a:endParaRPr lang="en-US" sz="2100" dirty="0"/>
           </a:p>
           <a:p>
+            <a:pPr indent="0" marL="0">
+              <a:buNone/>
+            </a:pPr>
             <a:r>
               <a:rPr lang="en-US" sz="2100" dirty="0">
                 <a:solidFill>
-                  <a:srgbClr val="17364A"/>
-                </a:solidFill>
-                <a:latin typeface="Aptos" pitchFamily="34" charset="0"/>
-                <a:ea typeface="Aptos" pitchFamily="34" charset="-122"/>
-                <a:cs typeface="Aptos" pitchFamily="34" charset="-120"/>
-              </a:rPr>
-              <a:t>Validation scenarios</a:t>
+                  <a:srgbClr val="003A63"/>
+                </a:solidFill>
+                <a:latin typeface="Aptos" pitchFamily="34" charset="0"/>
+                <a:ea typeface="Aptos" pitchFamily="34" charset="-122"/>
+                <a:cs typeface="Aptos" pitchFamily="34" charset="-120"/>
+              </a:rPr>
+              <a:t>• Validation scenarios</a:t>
             </a:r>
             <a:endParaRPr lang="en-US" sz="2100" dirty="0"/>
           </a:p>
@@ -9712,17 +9868,17 @@
         </p:nvSpPr>
         <p:spPr>
           <a:xfrm>
-            <a:off x="7799832" y="1828800"/>
-            <a:ext cx="3145536" cy="685800"/>
-          </a:xfrm>
-          <a:prstGeom prst="rect">
-            <a:avLst/>
-          </a:prstGeom>
-          <a:noFill/>
-          <a:ln/>
-        </p:spPr>
-        <p:txBody>
-          <a:bodyPr wrap="square" lIns="0" tIns="0" rIns="0" bIns="0" rtlCol="0" anchor="t">
+            <a:off x="7799832" y="1801368"/>
+            <a:ext cx="3145536" cy="758952"/>
+          </a:xfrm>
+          <a:prstGeom prst="rect">
+            <a:avLst/>
+          </a:prstGeom>
+          <a:noFill/>
+          <a:ln/>
+        </p:spPr>
+        <p:txBody>
+          <a:bodyPr wrap="square" lIns="254" tIns="254" rIns="254" bIns="254" rtlCol="0" anchor="t">
             <a:normAutofit/>
           </a:bodyPr>
           <a:lstStyle/>
@@ -9731,7 +9887,7 @@
               <a:buNone/>
             </a:pPr>
             <a:r>
-              <a:rPr lang="en-US" sz="1550" dirty="0">
+              <a:rPr lang="en-US" sz="1320" dirty="0">
                 <a:solidFill>
                   <a:srgbClr val="17364A"/>
                 </a:solidFill>
@@ -9741,7 +9897,7 @@
               </a:rPr>
               <a:t>eCR workflow map</a:t>
             </a:r>
-            <a:endParaRPr lang="en-US" sz="1550" dirty="0"/>
+            <a:endParaRPr lang="en-US" sz="1320" dirty="0"/>
           </a:p>
         </p:txBody>
       </p:sp>
@@ -9829,13 +9985,16 @@
           <a:ln/>
         </p:spPr>
         <p:txBody>
-          <a:bodyPr wrap="square" lIns="254" tIns="254" rIns="254" bIns="254" rtlCol="0" anchor="t">
+          <a:bodyPr wrap="square" lIns="508" tIns="508" rIns="508" bIns="508" rtlCol="0" anchor="t">
             <a:normAutofit/>
           </a:bodyPr>
           <a:lstStyle/>
           <a:p>
-            <a:r>
-              <a:rPr lang="en-US" sz="1380" dirty="0">
+            <a:pPr indent="0" marL="0">
+              <a:buNone/>
+            </a:pPr>
+            <a:r>
+              <a:rPr lang="en-US" sz="1220" dirty="0">
                 <a:solidFill>
                   <a:srgbClr val="17364A"/>
                 </a:solidFill>
@@ -9845,11 +10004,14 @@
               </a:rPr>
               <a:t>eCR workflow map</a:t>
             </a:r>
-            <a:endParaRPr lang="en-US" sz="1380" dirty="0"/>
-          </a:p>
-          <a:p>
-            <a:r>
-              <a:rPr lang="en-US" sz="1380" dirty="0">
+            <a:endParaRPr lang="en-US" sz="1220" dirty="0"/>
+          </a:p>
+          <a:p>
+            <a:pPr indent="0" marL="0">
+              <a:buNone/>
+            </a:pPr>
+            <a:r>
+              <a:rPr lang="en-US" sz="1220" dirty="0">
                 <a:solidFill>
                   <a:srgbClr val="17364A"/>
                 </a:solidFill>
@@ -9859,11 +10021,14 @@
               </a:rPr>
               <a:t>AI-readiness checklist</a:t>
             </a:r>
-            <a:endParaRPr lang="en-US" sz="1380" dirty="0"/>
-          </a:p>
-          <a:p>
-            <a:r>
-              <a:rPr lang="en-US" sz="1380" dirty="0">
+            <a:endParaRPr lang="en-US" sz="1220" dirty="0"/>
+          </a:p>
+          <a:p>
+            <a:pPr indent="0" marL="0">
+              <a:buNone/>
+            </a:pPr>
+            <a:r>
+              <a:rPr lang="en-US" sz="1220" dirty="0">
                 <a:solidFill>
                   <a:srgbClr val="17364A"/>
                 </a:solidFill>
@@ -9873,7 +10038,7 @@
               </a:rPr>
               <a:t>Validation scenarios</a:t>
             </a:r>
-            <a:endParaRPr lang="en-US" sz="1380" dirty="0"/>
+            <a:endParaRPr lang="en-US" sz="1220" dirty="0"/>
           </a:p>
         </p:txBody>
       </p:sp>
@@ -9951,17 +10116,17 @@
         </p:nvSpPr>
         <p:spPr>
           <a:xfrm>
-            <a:off x="7799832" y="5001768"/>
-            <a:ext cx="3145536" cy="502920"/>
-          </a:xfrm>
-          <a:prstGeom prst="rect">
-            <a:avLst/>
-          </a:prstGeom>
-          <a:noFill/>
-          <a:ln/>
-        </p:spPr>
-        <p:txBody>
-          <a:bodyPr wrap="square" lIns="0" tIns="0" rIns="0" bIns="0" rtlCol="0" anchor="t">
+            <a:off x="7799832" y="4974336"/>
+            <a:ext cx="3145536" cy="576072"/>
+          </a:xfrm>
+          <a:prstGeom prst="rect">
+            <a:avLst/>
+          </a:prstGeom>
+          <a:noFill/>
+          <a:ln/>
+        </p:spPr>
+        <p:txBody>
+          <a:bodyPr wrap="square" lIns="254" tIns="254" rIns="254" bIns="254" rtlCol="0" anchor="t">
             <a:normAutofit/>
           </a:bodyPr>
           <a:lstStyle/>
@@ -9970,7 +10135,7 @@
               <a:buNone/>
             </a:pPr>
             <a:r>
-              <a:rPr lang="en-US" sz="1550" dirty="0">
+              <a:rPr lang="en-US" sz="1320" dirty="0">
                 <a:solidFill>
                   <a:srgbClr val="17364A"/>
                 </a:solidFill>
@@ -9978,9 +10143,9 @@
                 <a:ea typeface="Aptos" pitchFamily="34" charset="-122"/>
                 <a:cs typeface="Aptos" pitchFamily="34" charset="-120"/>
               </a:rPr>
-              <a:t>Use the concept to clarify workflow changes, dependencies, staffing, procurement requirements, training needs, and implementation checkpoints.</a:t>
-            </a:r>
-            <a:endParaRPr lang="en-US" sz="1550" dirty="0"/>
+              <a:t>Use the concept to clarify workflow changes, dependencies, staffing, procurement requirements, training needs, and.</a:t>
+            </a:r>
+            <a:endParaRPr lang="en-US" sz="1320" dirty="0"/>
           </a:p>
         </p:txBody>
       </p:sp>
@@ -10281,49 +10446,58 @@
           <a:ln/>
         </p:spPr>
         <p:txBody>
-          <a:bodyPr wrap="square" lIns="635" tIns="635" rIns="635" bIns="635" rtlCol="0" anchor="t">
+          <a:bodyPr wrap="square" lIns="1016" tIns="1016" rIns="1016" bIns="1016" rtlCol="0" anchor="t">
             <a:normAutofit/>
           </a:bodyPr>
           <a:lstStyle/>
           <a:p>
+            <a:pPr indent="0" marL="0">
+              <a:buNone/>
+            </a:pPr>
             <a:r>
               <a:rPr lang="en-US" sz="2100" dirty="0">
                 <a:solidFill>
-                  <a:srgbClr val="17364A"/>
-                </a:solidFill>
-                <a:latin typeface="Aptos" pitchFamily="34" charset="0"/>
-                <a:ea typeface="Aptos" pitchFamily="34" charset="-122"/>
-                <a:cs typeface="Aptos" pitchFamily="34" charset="-120"/>
-              </a:rPr>
-              <a:t>Electronic case reporting is one of the clearest examples of public health automation.</a:t>
+                  <a:srgbClr val="003A63"/>
+                </a:solidFill>
+                <a:latin typeface="Aptos" pitchFamily="34" charset="0"/>
+                <a:ea typeface="Aptos" pitchFamily="34" charset="-122"/>
+                <a:cs typeface="Aptos" pitchFamily="34" charset="-120"/>
+              </a:rPr>
+              <a:t>• Electronic case reporting is one of the clearest examples of public health automation.</a:t>
             </a:r>
             <a:endParaRPr lang="en-US" sz="2100" dirty="0"/>
           </a:p>
           <a:p>
+            <a:pPr indent="0" marL="0">
+              <a:buNone/>
+            </a:pPr>
             <a:r>
               <a:rPr lang="en-US" sz="2100" dirty="0">
                 <a:solidFill>
-                  <a:srgbClr val="17364A"/>
-                </a:solidFill>
-                <a:latin typeface="Aptos" pitchFamily="34" charset="0"/>
-                <a:ea typeface="Aptos" pitchFamily="34" charset="-122"/>
-                <a:cs typeface="Aptos" pitchFamily="34" charset="-120"/>
-              </a:rPr>
-              <a:t>It uses data from electronic health records and reporting logic to support more timely case reporting to public.</a:t>
+                  <a:srgbClr val="003A63"/>
+                </a:solidFill>
+                <a:latin typeface="Aptos" pitchFamily="34" charset="0"/>
+                <a:ea typeface="Aptos" pitchFamily="34" charset="-122"/>
+                <a:cs typeface="Aptos" pitchFamily="34" charset="-120"/>
+              </a:rPr>
+              <a:t>• It uses data from electronic health records and reporting logic to support more timely case.</a:t>
             </a:r>
             <a:endParaRPr lang="en-US" sz="2100" dirty="0"/>
           </a:p>
           <a:p>
+            <a:pPr indent="0" marL="0">
+              <a:buNone/>
+            </a:pPr>
             <a:r>
               <a:rPr lang="en-US" sz="2100" dirty="0">
                 <a:solidFill>
-                  <a:srgbClr val="17364A"/>
-                </a:solidFill>
-                <a:latin typeface="Aptos" pitchFamily="34" charset="0"/>
-                <a:ea typeface="Aptos" pitchFamily="34" charset="-122"/>
-                <a:cs typeface="Aptos" pitchFamily="34" charset="-120"/>
-              </a:rPr>
-              <a:t>This module teaches learners how eCR works technically and how AI might support eCR-related workflows without.</a:t>
+                  <a:srgbClr val="003A63"/>
+                </a:solidFill>
+                <a:latin typeface="Aptos" pitchFamily="34" charset="0"/>
+                <a:ea typeface="Aptos" pitchFamily="34" charset="-122"/>
+                <a:cs typeface="Aptos" pitchFamily="34" charset="-120"/>
+              </a:rPr>
+              <a:t>• This module teaches learners how eCR works technically and how AI might support eCR-related.</a:t>
             </a:r>
             <a:endParaRPr lang="en-US" sz="2100" dirty="0"/>
           </a:p>
@@ -10403,17 +10577,17 @@
         </p:nvSpPr>
         <p:spPr>
           <a:xfrm>
-            <a:off x="8074152" y="1920240"/>
-            <a:ext cx="2825496" cy="1280160"/>
-          </a:xfrm>
-          <a:prstGeom prst="rect">
-            <a:avLst/>
-          </a:prstGeom>
-          <a:noFill/>
-          <a:ln/>
-        </p:spPr>
-        <p:txBody>
-          <a:bodyPr wrap="square" lIns="0" tIns="0" rIns="0" bIns="0" rtlCol="0" anchor="t">
+            <a:off x="8074152" y="1892808"/>
+            <a:ext cx="2825496" cy="1353312"/>
+          </a:xfrm>
+          <a:prstGeom prst="rect">
+            <a:avLst/>
+          </a:prstGeom>
+          <a:noFill/>
+          <a:ln/>
+        </p:spPr>
+        <p:txBody>
+          <a:bodyPr wrap="square" lIns="254" tIns="254" rIns="254" bIns="254" rtlCol="0" anchor="t">
             <a:normAutofit/>
           </a:bodyPr>
           <a:lstStyle/>
@@ -10422,7 +10596,7 @@
               <a:buNone/>
             </a:pPr>
             <a:r>
-              <a:rPr lang="en-US" sz="1550" dirty="0">
+              <a:rPr lang="en-US" sz="1320" dirty="0">
                 <a:solidFill>
                   <a:srgbClr val="17364A"/>
                 </a:solidFill>
@@ -10430,43 +10604,9 @@
                 <a:ea typeface="Aptos" pitchFamily="34" charset="-122"/>
                 <a:cs typeface="Aptos" pitchFamily="34" charset="-120"/>
               </a:rPr>
-              <a:t>Level: applied/foundational</a:t>
-            </a:r>
-            <a:endParaRPr lang="en-US" sz="1550" dirty="0"/>
-          </a:p>
-          <a:p>
-            <a:pPr indent="0" marL="0">
-              <a:buNone/>
-            </a:pPr>
-            <a:r>
-              <a:rPr lang="en-US" sz="1550" dirty="0">
-                <a:solidFill>
-                  <a:srgbClr val="17364A"/>
-                </a:solidFill>
-                <a:latin typeface="Aptos" pitchFamily="34" charset="0"/>
-                <a:ea typeface="Aptos" pitchFamily="34" charset="-122"/>
-                <a:cs typeface="Aptos" pitchFamily="34" charset="-120"/>
-              </a:rPr>
-              <a:t>Primary track: Technical Architecture Track</a:t>
-            </a:r>
-            <a:endParaRPr lang="en-US" sz="1550" dirty="0"/>
-          </a:p>
-          <a:p>
-            <a:pPr indent="0" marL="0">
-              <a:buNone/>
-            </a:pPr>
-            <a:r>
-              <a:rPr lang="en-US" sz="1550" dirty="0">
-                <a:solidFill>
-                  <a:srgbClr val="17364A"/>
-                </a:solidFill>
-                <a:latin typeface="Aptos" pitchFamily="34" charset="0"/>
-                <a:ea typeface="Aptos" pitchFamily="34" charset="-122"/>
-                <a:cs typeface="Aptos" pitchFamily="34" charset="-120"/>
-              </a:rPr>
-              <a:t>Appears in tracks: technical-architecture</a:t>
-            </a:r>
-            <a:endParaRPr lang="en-US" sz="1550" dirty="0"/>
+              <a:t>Level: applied/foundational Primary track: Technical Architecture Track Appears in tracks: technical-architecture</a:t>
+            </a:r>
+            <a:endParaRPr lang="en-US" sz="1320" dirty="0"/>
           </a:p>
         </p:txBody>
       </p:sp>
@@ -10554,13 +10694,16 @@
           <a:ln/>
         </p:spPr>
         <p:txBody>
-          <a:bodyPr wrap="square" lIns="254" tIns="254" rIns="254" bIns="254" rtlCol="0" anchor="t">
+          <a:bodyPr wrap="square" lIns="508" tIns="508" rIns="508" bIns="508" rtlCol="0" anchor="t">
             <a:normAutofit/>
           </a:bodyPr>
           <a:lstStyle/>
           <a:p>
-            <a:r>
-              <a:rPr lang="en-US" sz="1380" dirty="0">
+            <a:pPr indent="0" marL="0">
+              <a:buNone/>
+            </a:pPr>
+            <a:r>
+              <a:rPr lang="en-US" sz="1220" dirty="0">
                 <a:solidFill>
                   <a:srgbClr val="17364A"/>
                 </a:solidFill>
@@ -10570,11 +10713,14 @@
               </a:rPr>
               <a:t>Read the module for shared vocabulary and context.</a:t>
             </a:r>
-            <a:endParaRPr lang="en-US" sz="1380" dirty="0"/>
-          </a:p>
-          <a:p>
-            <a:r>
-              <a:rPr lang="en-US" sz="1380" dirty="0">
+            <a:endParaRPr lang="en-US" sz="1220" dirty="0"/>
+          </a:p>
+          <a:p>
+            <a:pPr indent="0" marL="0">
+              <a:buNone/>
+            </a:pPr>
+            <a:r>
+              <a:rPr lang="en-US" sz="1220" dirty="0">
                 <a:solidFill>
                   <a:srgbClr val="17364A"/>
                 </a:solidFill>
@@ -10584,11 +10730,14 @@
               </a:rPr>
               <a:t>Complete the practical exercise to apply the concept.</a:t>
             </a:r>
-            <a:endParaRPr lang="en-US" sz="1380" dirty="0"/>
-          </a:p>
-          <a:p>
-            <a:r>
-              <a:rPr lang="en-US" sz="1380" dirty="0">
+            <a:endParaRPr lang="en-US" sz="1220" dirty="0"/>
+          </a:p>
+          <a:p>
+            <a:pPr indent="0" marL="0">
+              <a:buNone/>
+            </a:pPr>
+            <a:r>
+              <a:rPr lang="en-US" sz="1220" dirty="0">
                 <a:solidFill>
                   <a:srgbClr val="17364A"/>
                 </a:solidFill>
@@ -10598,7 +10747,7 @@
               </a:rPr>
               <a:t>Use the notes and references for deeper review.</a:t>
             </a:r>
-            <a:endParaRPr lang="en-US" sz="1380" dirty="0"/>
+            <a:endParaRPr lang="en-US" sz="1220" dirty="0"/>
           </a:p>
         </p:txBody>
       </p:sp>
@@ -10899,21 +11048,24 @@
           <a:ln/>
         </p:spPr>
         <p:txBody>
-          <a:bodyPr wrap="square" lIns="635" tIns="635" rIns="635" bIns="635" rtlCol="0" anchor="t">
+          <a:bodyPr wrap="square" lIns="1016" tIns="1016" rIns="1016" bIns="1016" rtlCol="0" anchor="t">
             <a:normAutofit/>
           </a:bodyPr>
           <a:lstStyle/>
           <a:p>
+            <a:pPr indent="0" marL="0">
+              <a:buNone/>
+            </a:pPr>
             <a:r>
               <a:rPr lang="en-US" sz="2100" dirty="0">
                 <a:solidFill>
-                  <a:srgbClr val="17364A"/>
-                </a:solidFill>
-                <a:latin typeface="Aptos" pitchFamily="34" charset="0"/>
-                <a:ea typeface="Aptos" pitchFamily="34" charset="-122"/>
-                <a:cs typeface="Aptos" pitchFamily="34" charset="-120"/>
-              </a:rPr>
-              <a:t>Human review and escalation plan</a:t>
+                  <a:srgbClr val="003A63"/>
+                </a:solidFill>
+                <a:latin typeface="Aptos" pitchFamily="34" charset="0"/>
+                <a:ea typeface="Aptos" pitchFamily="34" charset="-122"/>
+                <a:cs typeface="Aptos" pitchFamily="34" charset="-120"/>
+              </a:rPr>
+              <a:t>• Human review and escalation plan</a:t>
             </a:r>
             <a:endParaRPr lang="en-US" sz="2100" dirty="0"/>
           </a:p>
@@ -10993,17 +11145,17 @@
         </p:nvSpPr>
         <p:spPr>
           <a:xfrm>
-            <a:off x="7799832" y="1828800"/>
-            <a:ext cx="3145536" cy="685800"/>
-          </a:xfrm>
-          <a:prstGeom prst="rect">
-            <a:avLst/>
-          </a:prstGeom>
-          <a:noFill/>
-          <a:ln/>
-        </p:spPr>
-        <p:txBody>
-          <a:bodyPr wrap="square" lIns="0" tIns="0" rIns="0" bIns="0" rtlCol="0" anchor="t">
+            <a:off x="7799832" y="1801368"/>
+            <a:ext cx="3145536" cy="758952"/>
+          </a:xfrm>
+          <a:prstGeom prst="rect">
+            <a:avLst/>
+          </a:prstGeom>
+          <a:noFill/>
+          <a:ln/>
+        </p:spPr>
+        <p:txBody>
+          <a:bodyPr wrap="square" lIns="254" tIns="254" rIns="254" bIns="254" rtlCol="0" anchor="t">
             <a:normAutofit/>
           </a:bodyPr>
           <a:lstStyle/>
@@ -11012,7 +11164,7 @@
               <a:buNone/>
             </a:pPr>
             <a:r>
-              <a:rPr lang="en-US" sz="1550" dirty="0">
+              <a:rPr lang="en-US" sz="1320" dirty="0">
                 <a:solidFill>
                   <a:srgbClr val="17364A"/>
                 </a:solidFill>
@@ -11022,7 +11174,7 @@
               </a:rPr>
               <a:t>Human review and escalation plan</a:t>
             </a:r>
-            <a:endParaRPr lang="en-US" sz="1550" dirty="0"/>
+            <a:endParaRPr lang="en-US" sz="1320" dirty="0"/>
           </a:p>
         </p:txBody>
       </p:sp>
@@ -11110,13 +11262,16 @@
           <a:ln/>
         </p:spPr>
         <p:txBody>
-          <a:bodyPr wrap="square" lIns="254" tIns="254" rIns="254" bIns="254" rtlCol="0" anchor="t">
+          <a:bodyPr wrap="square" lIns="508" tIns="508" rIns="508" bIns="508" rtlCol="0" anchor="t">
             <a:normAutofit/>
           </a:bodyPr>
           <a:lstStyle/>
           <a:p>
-            <a:r>
-              <a:rPr lang="en-US" sz="1380" dirty="0">
+            <a:pPr indent="0" marL="0">
+              <a:buNone/>
+            </a:pPr>
+            <a:r>
+              <a:rPr lang="en-US" sz="1220" dirty="0">
                 <a:solidFill>
                   <a:srgbClr val="17364A"/>
                 </a:solidFill>
@@ -11126,7 +11281,7 @@
               </a:rPr>
               <a:t>Human review and escalation plan</a:t>
             </a:r>
-            <a:endParaRPr lang="en-US" sz="1380" dirty="0"/>
+            <a:endParaRPr lang="en-US" sz="1220" dirty="0"/>
           </a:p>
         </p:txBody>
       </p:sp>
@@ -11204,17 +11359,17 @@
         </p:nvSpPr>
         <p:spPr>
           <a:xfrm>
-            <a:off x="7799832" y="5001768"/>
-            <a:ext cx="3145536" cy="502920"/>
-          </a:xfrm>
-          <a:prstGeom prst="rect">
-            <a:avLst/>
-          </a:prstGeom>
-          <a:noFill/>
-          <a:ln/>
-        </p:spPr>
-        <p:txBody>
-          <a:bodyPr wrap="square" lIns="0" tIns="0" rIns="0" bIns="0" rtlCol="0" anchor="t">
+            <a:off x="7799832" y="4974336"/>
+            <a:ext cx="3145536" cy="576072"/>
+          </a:xfrm>
+          <a:prstGeom prst="rect">
+            <a:avLst/>
+          </a:prstGeom>
+          <a:noFill/>
+          <a:ln/>
+        </p:spPr>
+        <p:txBody>
+          <a:bodyPr wrap="square" lIns="254" tIns="254" rIns="254" bIns="254" rtlCol="0" anchor="t">
             <a:normAutofit/>
           </a:bodyPr>
           <a:lstStyle/>
@@ -11223,7 +11378,7 @@
               <a:buNone/>
             </a:pPr>
             <a:r>
-              <a:rPr lang="en-US" sz="1550" dirty="0">
+              <a:rPr lang="en-US" sz="1320" dirty="0">
                 <a:solidFill>
                   <a:srgbClr val="17364A"/>
                 </a:solidFill>
@@ -11231,9 +11386,9 @@
                 <a:ea typeface="Aptos" pitchFamily="34" charset="-122"/>
                 <a:cs typeface="Aptos" pitchFamily="34" charset="-120"/>
               </a:rPr>
-              <a:t>Use the concept to clarify workflow changes, dependencies, staffing, procurement requirements, training needs, and implementation checkpoints.</a:t>
-            </a:r>
-            <a:endParaRPr lang="en-US" sz="1550" dirty="0"/>
+              <a:t>Use the concept to clarify workflow changes, dependencies, staffing, procurement requirements, training needs, and.</a:t>
+            </a:r>
+            <a:endParaRPr lang="en-US" sz="1320" dirty="0"/>
           </a:p>
         </p:txBody>
       </p:sp>
@@ -11534,49 +11689,58 @@
           <a:ln/>
         </p:spPr>
         <p:txBody>
-          <a:bodyPr wrap="square" lIns="635" tIns="635" rIns="635" bIns="635" rtlCol="0" anchor="t">
+          <a:bodyPr wrap="square" lIns="1016" tIns="1016" rIns="1016" bIns="1016" rtlCol="0" anchor="t">
             <a:normAutofit/>
           </a:bodyPr>
           <a:lstStyle/>
           <a:p>
+            <a:pPr indent="0" marL="0">
+              <a:buNone/>
+            </a:pPr>
             <a:r>
               <a:rPr lang="en-US" sz="2100" dirty="0">
                 <a:solidFill>
-                  <a:srgbClr val="17364A"/>
-                </a:solidFill>
-                <a:latin typeface="Aptos" pitchFamily="34" charset="0"/>
-                <a:ea typeface="Aptos" pitchFamily="34" charset="-122"/>
-                <a:cs typeface="Aptos" pitchFamily="34" charset="-120"/>
-              </a:rPr>
-              <a:t>eCR workflow map</a:t>
+                  <a:srgbClr val="003A63"/>
+                </a:solidFill>
+                <a:latin typeface="Aptos" pitchFamily="34" charset="0"/>
+                <a:ea typeface="Aptos" pitchFamily="34" charset="-122"/>
+                <a:cs typeface="Aptos" pitchFamily="34" charset="-120"/>
+              </a:rPr>
+              <a:t>• eCR workflow map</a:t>
             </a:r>
             <a:endParaRPr lang="en-US" sz="2100" dirty="0"/>
           </a:p>
           <a:p>
+            <a:pPr indent="0" marL="0">
+              <a:buNone/>
+            </a:pPr>
             <a:r>
               <a:rPr lang="en-US" sz="2100" dirty="0">
                 <a:solidFill>
-                  <a:srgbClr val="17364A"/>
-                </a:solidFill>
-                <a:latin typeface="Aptos" pitchFamily="34" charset="0"/>
-                <a:ea typeface="Aptos" pitchFamily="34" charset="-122"/>
-                <a:cs typeface="Aptos" pitchFamily="34" charset="-120"/>
-              </a:rPr>
-              <a:t>AI-readiness checklist</a:t>
+                  <a:srgbClr val="003A63"/>
+                </a:solidFill>
+                <a:latin typeface="Aptos" pitchFamily="34" charset="0"/>
+                <a:ea typeface="Aptos" pitchFamily="34" charset="-122"/>
+                <a:cs typeface="Aptos" pitchFamily="34" charset="-120"/>
+              </a:rPr>
+              <a:t>• AI-readiness checklist</a:t>
             </a:r>
             <a:endParaRPr lang="en-US" sz="2100" dirty="0"/>
           </a:p>
           <a:p>
+            <a:pPr indent="0" marL="0">
+              <a:buNone/>
+            </a:pPr>
             <a:r>
               <a:rPr lang="en-US" sz="2100" dirty="0">
                 <a:solidFill>
-                  <a:srgbClr val="17364A"/>
-                </a:solidFill>
-                <a:latin typeface="Aptos" pitchFamily="34" charset="0"/>
-                <a:ea typeface="Aptos" pitchFamily="34" charset="-122"/>
-                <a:cs typeface="Aptos" pitchFamily="34" charset="-120"/>
-              </a:rPr>
-              <a:t>Validation scenarios</a:t>
+                  <a:srgbClr val="003A63"/>
+                </a:solidFill>
+                <a:latin typeface="Aptos" pitchFamily="34" charset="0"/>
+                <a:ea typeface="Aptos" pitchFamily="34" charset="-122"/>
+                <a:cs typeface="Aptos" pitchFamily="34" charset="-120"/>
+              </a:rPr>
+              <a:t>• Validation scenarios</a:t>
             </a:r>
             <a:endParaRPr lang="en-US" sz="2100" dirty="0"/>
           </a:p>
@@ -11656,17 +11820,17 @@
         </p:nvSpPr>
         <p:spPr>
           <a:xfrm>
-            <a:off x="7799832" y="1828800"/>
-            <a:ext cx="3145536" cy="685800"/>
-          </a:xfrm>
-          <a:prstGeom prst="rect">
-            <a:avLst/>
-          </a:prstGeom>
-          <a:noFill/>
-          <a:ln/>
-        </p:spPr>
-        <p:txBody>
-          <a:bodyPr wrap="square" lIns="0" tIns="0" rIns="0" bIns="0" rtlCol="0" anchor="t">
+            <a:off x="7799832" y="1801368"/>
+            <a:ext cx="3145536" cy="758952"/>
+          </a:xfrm>
+          <a:prstGeom prst="rect">
+            <a:avLst/>
+          </a:prstGeom>
+          <a:noFill/>
+          <a:ln/>
+        </p:spPr>
+        <p:txBody>
+          <a:bodyPr wrap="square" lIns="254" tIns="254" rIns="254" bIns="254" rtlCol="0" anchor="t">
             <a:normAutofit/>
           </a:bodyPr>
           <a:lstStyle/>
@@ -11675,7 +11839,7 @@
               <a:buNone/>
             </a:pPr>
             <a:r>
-              <a:rPr lang="en-US" sz="1550" dirty="0">
+              <a:rPr lang="en-US" sz="1320" dirty="0">
                 <a:solidFill>
                   <a:srgbClr val="17364A"/>
                 </a:solidFill>
@@ -11685,7 +11849,7 @@
               </a:rPr>
               <a:t>eCR workflow map</a:t>
             </a:r>
-            <a:endParaRPr lang="en-US" sz="1550" dirty="0"/>
+            <a:endParaRPr lang="en-US" sz="1320" dirty="0"/>
           </a:p>
         </p:txBody>
       </p:sp>
@@ -11773,13 +11937,16 @@
           <a:ln/>
         </p:spPr>
         <p:txBody>
-          <a:bodyPr wrap="square" lIns="254" tIns="254" rIns="254" bIns="254" rtlCol="0" anchor="t">
+          <a:bodyPr wrap="square" lIns="508" tIns="508" rIns="508" bIns="508" rtlCol="0" anchor="t">
             <a:normAutofit/>
           </a:bodyPr>
           <a:lstStyle/>
           <a:p>
-            <a:r>
-              <a:rPr lang="en-US" sz="1380" dirty="0">
+            <a:pPr indent="0" marL="0">
+              <a:buNone/>
+            </a:pPr>
+            <a:r>
+              <a:rPr lang="en-US" sz="1220" dirty="0">
                 <a:solidFill>
                   <a:srgbClr val="17364A"/>
                 </a:solidFill>
@@ -11789,11 +11956,14 @@
               </a:rPr>
               <a:t>eCR workflow map</a:t>
             </a:r>
-            <a:endParaRPr lang="en-US" sz="1380" dirty="0"/>
-          </a:p>
-          <a:p>
-            <a:r>
-              <a:rPr lang="en-US" sz="1380" dirty="0">
+            <a:endParaRPr lang="en-US" sz="1220" dirty="0"/>
+          </a:p>
+          <a:p>
+            <a:pPr indent="0" marL="0">
+              <a:buNone/>
+            </a:pPr>
+            <a:r>
+              <a:rPr lang="en-US" sz="1220" dirty="0">
                 <a:solidFill>
                   <a:srgbClr val="17364A"/>
                 </a:solidFill>
@@ -11803,11 +11973,14 @@
               </a:rPr>
               <a:t>AI-readiness checklist</a:t>
             </a:r>
-            <a:endParaRPr lang="en-US" sz="1380" dirty="0"/>
-          </a:p>
-          <a:p>
-            <a:r>
-              <a:rPr lang="en-US" sz="1380" dirty="0">
+            <a:endParaRPr lang="en-US" sz="1220" dirty="0"/>
+          </a:p>
+          <a:p>
+            <a:pPr indent="0" marL="0">
+              <a:buNone/>
+            </a:pPr>
+            <a:r>
+              <a:rPr lang="en-US" sz="1220" dirty="0">
                 <a:solidFill>
                   <a:srgbClr val="17364A"/>
                 </a:solidFill>
@@ -11817,7 +11990,7 @@
               </a:rPr>
               <a:t>Validation scenarios</a:t>
             </a:r>
-            <a:endParaRPr lang="en-US" sz="1380" dirty="0"/>
+            <a:endParaRPr lang="en-US" sz="1220" dirty="0"/>
           </a:p>
         </p:txBody>
       </p:sp>
@@ -11895,17 +12068,17 @@
         </p:nvSpPr>
         <p:spPr>
           <a:xfrm>
-            <a:off x="7799832" y="5001768"/>
-            <a:ext cx="3145536" cy="502920"/>
-          </a:xfrm>
-          <a:prstGeom prst="rect">
-            <a:avLst/>
-          </a:prstGeom>
-          <a:noFill/>
-          <a:ln/>
-        </p:spPr>
-        <p:txBody>
-          <a:bodyPr wrap="square" lIns="0" tIns="0" rIns="0" bIns="0" rtlCol="0" anchor="t">
+            <a:off x="7799832" y="4974336"/>
+            <a:ext cx="3145536" cy="576072"/>
+          </a:xfrm>
+          <a:prstGeom prst="rect">
+            <a:avLst/>
+          </a:prstGeom>
+          <a:noFill/>
+          <a:ln/>
+        </p:spPr>
+        <p:txBody>
+          <a:bodyPr wrap="square" lIns="254" tIns="254" rIns="254" bIns="254" rtlCol="0" anchor="t">
             <a:normAutofit/>
           </a:bodyPr>
           <a:lstStyle/>
@@ -11914,7 +12087,7 @@
               <a:buNone/>
             </a:pPr>
             <a:r>
-              <a:rPr lang="en-US" sz="1550" dirty="0">
+              <a:rPr lang="en-US" sz="1320" dirty="0">
                 <a:solidFill>
                   <a:srgbClr val="17364A"/>
                 </a:solidFill>
@@ -11922,9 +12095,9 @@
                 <a:ea typeface="Aptos" pitchFamily="34" charset="-122"/>
                 <a:cs typeface="Aptos" pitchFamily="34" charset="-120"/>
               </a:rPr>
-              <a:t>Use the assignment to test whether you can explain the concept, apply it to a realistic public health situation, and identify what would need review before the work moves forward.</a:t>
-            </a:r>
-            <a:endParaRPr lang="en-US" sz="1550" dirty="0"/>
+              <a:t>Use the assignment to test whether you can explain the concept, apply it to a realistic public health situation, and.</a:t>
+            </a:r>
+            <a:endParaRPr lang="en-US" sz="1320" dirty="0"/>
           </a:p>
         </p:txBody>
       </p:sp>
@@ -12225,49 +12398,58 @@
           <a:ln/>
         </p:spPr>
         <p:txBody>
-          <a:bodyPr wrap="square" lIns="635" tIns="635" rIns="635" bIns="635" rtlCol="0" anchor="t">
+          <a:bodyPr wrap="square" lIns="1016" tIns="1016" rIns="1016" bIns="1016" rtlCol="0" anchor="t">
             <a:normAutofit/>
           </a:bodyPr>
           <a:lstStyle/>
           <a:p>
+            <a:pPr indent="0" marL="0">
+              <a:buNone/>
+            </a:pPr>
             <a:r>
               <a:rPr lang="en-US" sz="2100" dirty="0">
                 <a:solidFill>
-                  <a:srgbClr val="17364A"/>
-                </a:solidFill>
-                <a:latin typeface="Aptos" pitchFamily="34" charset="0"/>
-                <a:ea typeface="Aptos" pitchFamily="34" charset="-122"/>
-                <a:cs typeface="Aptos" pitchFamily="34" charset="-120"/>
-              </a:rPr>
-              <a:t>1. What is eCR?</a:t>
+                  <a:srgbClr val="003A63"/>
+                </a:solidFill>
+                <a:latin typeface="Aptos" pitchFamily="34" charset="0"/>
+                <a:ea typeface="Aptos" pitchFamily="34" charset="-122"/>
+                <a:cs typeface="Aptos" pitchFamily="34" charset="-120"/>
+              </a:rPr>
+              <a:t>• 1. What is eCR?</a:t>
             </a:r>
             <a:endParaRPr lang="en-US" sz="2100" dirty="0"/>
           </a:p>
           <a:p>
+            <a:pPr indent="0" marL="0">
+              <a:buNone/>
+            </a:pPr>
             <a:r>
               <a:rPr lang="en-US" sz="2100" dirty="0">
                 <a:solidFill>
-                  <a:srgbClr val="17364A"/>
-                </a:solidFill>
-                <a:latin typeface="Aptos" pitchFamily="34" charset="0"/>
-                <a:ea typeface="Aptos" pitchFamily="34" charset="-122"/>
-                <a:cs typeface="Aptos" pitchFamily="34" charset="-120"/>
-              </a:rPr>
-              <a:t>2. What is an eICR?</a:t>
+                  <a:srgbClr val="003A63"/>
+                </a:solidFill>
+                <a:latin typeface="Aptos" pitchFamily="34" charset="0"/>
+                <a:ea typeface="Aptos" pitchFamily="34" charset="-122"/>
+                <a:cs typeface="Aptos" pitchFamily="34" charset="-120"/>
+              </a:rPr>
+              <a:t>• 2. What is an eICR?</a:t>
             </a:r>
             <a:endParaRPr lang="en-US" sz="2100" dirty="0"/>
           </a:p>
           <a:p>
+            <a:pPr indent="0" marL="0">
+              <a:buNone/>
+            </a:pPr>
             <a:r>
               <a:rPr lang="en-US" sz="2100" dirty="0">
                 <a:solidFill>
-                  <a:srgbClr val="17364A"/>
-                </a:solidFill>
-                <a:latin typeface="Aptos" pitchFamily="34" charset="0"/>
-                <a:ea typeface="Aptos" pitchFamily="34" charset="-122"/>
-                <a:cs typeface="Aptos" pitchFamily="34" charset="-120"/>
-              </a:rPr>
-              <a:t>3. What do eRSD and RCTC support?</a:t>
+                  <a:srgbClr val="003A63"/>
+                </a:solidFill>
+                <a:latin typeface="Aptos" pitchFamily="34" charset="0"/>
+                <a:ea typeface="Aptos" pitchFamily="34" charset="-122"/>
+                <a:cs typeface="Aptos" pitchFamily="34" charset="-120"/>
+              </a:rPr>
+              <a:t>• 3. What do eRSD and RCTC support?</a:t>
             </a:r>
             <a:endParaRPr lang="en-US" sz="2100" dirty="0"/>
           </a:p>
@@ -12347,17 +12529,17 @@
         </p:nvSpPr>
         <p:spPr>
           <a:xfrm>
-            <a:off x="7799832" y="1828800"/>
-            <a:ext cx="3145536" cy="685800"/>
-          </a:xfrm>
-          <a:prstGeom prst="rect">
-            <a:avLst/>
-          </a:prstGeom>
-          <a:noFill/>
-          <a:ln/>
-        </p:spPr>
-        <p:txBody>
-          <a:bodyPr wrap="square" lIns="0" tIns="0" rIns="0" bIns="0" rtlCol="0" anchor="t">
+            <a:off x="7799832" y="1801368"/>
+            <a:ext cx="3145536" cy="758952"/>
+          </a:xfrm>
+          <a:prstGeom prst="rect">
+            <a:avLst/>
+          </a:prstGeom>
+          <a:noFill/>
+          <a:ln/>
+        </p:spPr>
+        <p:txBody>
+          <a:bodyPr wrap="square" lIns="254" tIns="254" rIns="254" bIns="254" rtlCol="0" anchor="t">
             <a:normAutofit/>
           </a:bodyPr>
           <a:lstStyle/>
@@ -12366,7 +12548,7 @@
               <a:buNone/>
             </a:pPr>
             <a:r>
-              <a:rPr lang="en-US" sz="1550" dirty="0">
+              <a:rPr lang="en-US" sz="1320" dirty="0">
                 <a:solidFill>
                   <a:srgbClr val="17364A"/>
                 </a:solidFill>
@@ -12376,7 +12558,7 @@
               </a:rPr>
               <a:t>1. What is eCR?</a:t>
             </a:r>
-            <a:endParaRPr lang="en-US" sz="1550" dirty="0"/>
+            <a:endParaRPr lang="en-US" sz="1320" dirty="0"/>
           </a:p>
         </p:txBody>
       </p:sp>
@@ -12464,13 +12646,16 @@
           <a:ln/>
         </p:spPr>
         <p:txBody>
-          <a:bodyPr wrap="square" lIns="254" tIns="254" rIns="254" bIns="254" rtlCol="0" anchor="t">
+          <a:bodyPr wrap="square" lIns="508" tIns="508" rIns="508" bIns="508" rtlCol="0" anchor="t">
             <a:normAutofit/>
           </a:bodyPr>
           <a:lstStyle/>
           <a:p>
-            <a:r>
-              <a:rPr lang="en-US" sz="1380" dirty="0">
+            <a:pPr indent="0" marL="0">
+              <a:buNone/>
+            </a:pPr>
+            <a:r>
+              <a:rPr lang="en-US" sz="1220" dirty="0">
                 <a:solidFill>
                   <a:srgbClr val="17364A"/>
                 </a:solidFill>
@@ -12480,11 +12665,14 @@
               </a:rPr>
               <a:t>1.</a:t>
             </a:r>
-            <a:endParaRPr lang="en-US" sz="1380" dirty="0"/>
-          </a:p>
-          <a:p>
-            <a:r>
-              <a:rPr lang="en-US" sz="1380" dirty="0">
+            <a:endParaRPr lang="en-US" sz="1220" dirty="0"/>
+          </a:p>
+          <a:p>
+            <a:pPr indent="0" marL="0">
+              <a:buNone/>
+            </a:pPr>
+            <a:r>
+              <a:rPr lang="en-US" sz="1220" dirty="0">
                 <a:solidFill>
                   <a:srgbClr val="17364A"/>
                 </a:solidFill>
@@ -12494,11 +12682,14 @@
               </a:rPr>
               <a:t>What is eCR?</a:t>
             </a:r>
-            <a:endParaRPr lang="en-US" sz="1380" dirty="0"/>
-          </a:p>
-          <a:p>
-            <a:r>
-              <a:rPr lang="en-US" sz="1380" dirty="0">
+            <a:endParaRPr lang="en-US" sz="1220" dirty="0"/>
+          </a:p>
+          <a:p>
+            <a:pPr indent="0" marL="0">
+              <a:buNone/>
+            </a:pPr>
+            <a:r>
+              <a:rPr lang="en-US" sz="1220" dirty="0">
                 <a:solidFill>
                   <a:srgbClr val="17364A"/>
                 </a:solidFill>
@@ -12508,7 +12699,7 @@
               </a:rPr>
               <a:t>2.</a:t>
             </a:r>
-            <a:endParaRPr lang="en-US" sz="1380" dirty="0"/>
+            <a:endParaRPr lang="en-US" sz="1220" dirty="0"/>
           </a:p>
         </p:txBody>
       </p:sp>
@@ -12586,17 +12777,17 @@
         </p:nvSpPr>
         <p:spPr>
           <a:xfrm>
-            <a:off x="7799832" y="5001768"/>
-            <a:ext cx="3145536" cy="502920"/>
-          </a:xfrm>
-          <a:prstGeom prst="rect">
-            <a:avLst/>
-          </a:prstGeom>
-          <a:noFill/>
-          <a:ln/>
-        </p:spPr>
-        <p:txBody>
-          <a:bodyPr wrap="square" lIns="0" tIns="0" rIns="0" bIns="0" rtlCol="0" anchor="t">
+            <a:off x="7799832" y="4974336"/>
+            <a:ext cx="3145536" cy="576072"/>
+          </a:xfrm>
+          <a:prstGeom prst="rect">
+            <a:avLst/>
+          </a:prstGeom>
+          <a:noFill/>
+          <a:ln/>
+        </p:spPr>
+        <p:txBody>
+          <a:bodyPr wrap="square" lIns="254" tIns="254" rIns="254" bIns="254" rtlCol="0" anchor="t">
             <a:normAutofit/>
           </a:bodyPr>
           <a:lstStyle/>
@@ -12605,7 +12796,7 @@
               <a:buNone/>
             </a:pPr>
             <a:r>
-              <a:rPr lang="en-US" sz="1550" dirty="0">
+              <a:rPr lang="en-US" sz="1320" dirty="0">
                 <a:solidFill>
                   <a:srgbClr val="17364A"/>
                 </a:solidFill>
@@ -12613,9 +12804,9 @@
                 <a:ea typeface="Aptos" pitchFamily="34" charset="-122"/>
                 <a:cs typeface="Aptos" pitchFamily="34" charset="-120"/>
               </a:rPr>
-              <a:t>Use the assignment to test whether you can explain the concept, apply it to a realistic public health situation, and identify what would need review before the work moves forward.</a:t>
-            </a:r>
-            <a:endParaRPr lang="en-US" sz="1550" dirty="0"/>
+              <a:t>Use the assignment to test whether you can explain the concept, apply it to a realistic public health situation, and.</a:t>
+            </a:r>
+            <a:endParaRPr lang="en-US" sz="1320" dirty="0"/>
           </a:p>
         </p:txBody>
       </p:sp>
@@ -12916,49 +13107,58 @@
           <a:ln/>
         </p:spPr>
         <p:txBody>
-          <a:bodyPr wrap="square" lIns="635" tIns="635" rIns="635" bIns="635" rtlCol="0" anchor="t">
+          <a:bodyPr wrap="square" lIns="1016" tIns="1016" rIns="1016" bIns="1016" rtlCol="0" anchor="t">
             <a:normAutofit/>
           </a:bodyPr>
           <a:lstStyle/>
           <a:p>
+            <a:pPr indent="0" marL="0">
+              <a:buNone/>
+            </a:pPr>
             <a:r>
               <a:rPr lang="en-US" sz="2100" dirty="0">
                 <a:solidFill>
-                  <a:srgbClr val="17364A"/>
-                </a:solidFill>
-                <a:latin typeface="Aptos" pitchFamily="34" charset="0"/>
-                <a:ea typeface="Aptos" pitchFamily="34" charset="-122"/>
-                <a:cs typeface="Aptos" pitchFamily="34" charset="-120"/>
-              </a:rPr>
-              <a:t>CDC Electronic Case Reporting resources: https://www.cdc.gov/ecr/php/index.html</a:t>
+                  <a:srgbClr val="003A63"/>
+                </a:solidFill>
+                <a:latin typeface="Aptos" pitchFamily="34" charset="0"/>
+                <a:ea typeface="Aptos" pitchFamily="34" charset="-122"/>
+                <a:cs typeface="Aptos" pitchFamily="34" charset="-120"/>
+              </a:rPr>
+              <a:t>• CDC Electronic Case Reporting resources: https://www.cdc.gov/ecr/php/index.html</a:t>
             </a:r>
             <a:endParaRPr lang="en-US" sz="2100" dirty="0"/>
           </a:p>
           <a:p>
+            <a:pPr indent="0" marL="0">
+              <a:buNone/>
+            </a:pPr>
             <a:r>
               <a:rPr lang="en-US" sz="2100" dirty="0">
                 <a:solidFill>
-                  <a:srgbClr val="17364A"/>
-                </a:solidFill>
-                <a:latin typeface="Aptos" pitchFamily="34" charset="0"/>
-                <a:ea typeface="Aptos" pitchFamily="34" charset="-122"/>
-                <a:cs typeface="Aptos" pitchFamily="34" charset="-120"/>
-              </a:rPr>
-              <a:t>AIMS eCR triggering documentation: https://ecr.aimsplatform.org/ehr-implementers/triggering/</a:t>
+                  <a:srgbClr val="003A63"/>
+                </a:solidFill>
+                <a:latin typeface="Aptos" pitchFamily="34" charset="0"/>
+                <a:ea typeface="Aptos" pitchFamily="34" charset="-122"/>
+                <a:cs typeface="Aptos" pitchFamily="34" charset="-120"/>
+              </a:rPr>
+              <a:t>• AIMS eCR triggering documentation: https://ecr.aimsplatform.org/ehr-implementers/triggering/</a:t>
             </a:r>
             <a:endParaRPr lang="en-US" sz="2100" dirty="0"/>
           </a:p>
           <a:p>
+            <a:pPr indent="0" marL="0">
+              <a:buNone/>
+            </a:pPr>
             <a:r>
               <a:rPr lang="en-US" sz="2100" dirty="0">
                 <a:solidFill>
-                  <a:srgbClr val="17364A"/>
-                </a:solidFill>
-                <a:latin typeface="Aptos" pitchFamily="34" charset="0"/>
-                <a:ea typeface="Aptos" pitchFamily="34" charset="-122"/>
-                <a:cs typeface="Aptos" pitchFamily="34" charset="-120"/>
-              </a:rPr>
-              <a:t>HL7 eCR FHIR Implementation Guide: https://hl7.org/fhir/us/ecr/</a:t>
+                  <a:srgbClr val="003A63"/>
+                </a:solidFill>
+                <a:latin typeface="Aptos" pitchFamily="34" charset="0"/>
+                <a:ea typeface="Aptos" pitchFamily="34" charset="-122"/>
+                <a:cs typeface="Aptos" pitchFamily="34" charset="-120"/>
+              </a:rPr>
+              <a:t>• HL7 eCR FHIR Implementation Guide: https://hl7.org/fhir/us/ecr/</a:t>
             </a:r>
             <a:endParaRPr lang="en-US" sz="2100" dirty="0"/>
           </a:p>
@@ -13038,17 +13238,17 @@
         </p:nvSpPr>
         <p:spPr>
           <a:xfrm>
-            <a:off x="7799832" y="1828800"/>
-            <a:ext cx="3145536" cy="685800"/>
-          </a:xfrm>
-          <a:prstGeom prst="rect">
-            <a:avLst/>
-          </a:prstGeom>
-          <a:noFill/>
-          <a:ln/>
-        </p:spPr>
-        <p:txBody>
-          <a:bodyPr wrap="square" lIns="0" tIns="0" rIns="0" bIns="0" rtlCol="0" anchor="t">
+            <a:off x="7799832" y="1801368"/>
+            <a:ext cx="3145536" cy="758952"/>
+          </a:xfrm>
+          <a:prstGeom prst="rect">
+            <a:avLst/>
+          </a:prstGeom>
+          <a:noFill/>
+          <a:ln/>
+        </p:spPr>
+        <p:txBody>
+          <a:bodyPr wrap="square" lIns="254" tIns="254" rIns="254" bIns="254" rtlCol="0" anchor="t">
             <a:normAutofit/>
           </a:bodyPr>
           <a:lstStyle/>
@@ -13057,7 +13257,7 @@
               <a:buNone/>
             </a:pPr>
             <a:r>
-              <a:rPr lang="en-US" sz="1550" dirty="0">
+              <a:rPr lang="en-US" sz="1320" dirty="0">
                 <a:solidFill>
                   <a:srgbClr val="17364A"/>
                 </a:solidFill>
@@ -13067,7 +13267,7 @@
               </a:rPr>
               <a:t>CDC Electronic Case Reporting resources: https://www.cdc.gov/ecr/php/index.html</a:t>
             </a:r>
-            <a:endParaRPr lang="en-US" sz="1550" dirty="0"/>
+            <a:endParaRPr lang="en-US" sz="1320" dirty="0"/>
           </a:p>
         </p:txBody>
       </p:sp>
@@ -13155,13 +13355,16 @@
           <a:ln/>
         </p:spPr>
         <p:txBody>
-          <a:bodyPr wrap="square" lIns="254" tIns="254" rIns="254" bIns="254" rtlCol="0" anchor="t">
+          <a:bodyPr wrap="square" lIns="508" tIns="508" rIns="508" bIns="508" rtlCol="0" anchor="t">
             <a:normAutofit/>
           </a:bodyPr>
           <a:lstStyle/>
           <a:p>
-            <a:r>
-              <a:rPr lang="en-US" sz="1380" dirty="0">
+            <a:pPr indent="0" marL="0">
+              <a:buNone/>
+            </a:pPr>
+            <a:r>
+              <a:rPr lang="en-US" sz="1220" dirty="0">
                 <a:solidFill>
                   <a:srgbClr val="17364A"/>
                 </a:solidFill>
@@ -13169,13 +13372,16 @@
                 <a:ea typeface="Aptos" pitchFamily="34" charset="-122"/>
                 <a:cs typeface="Aptos" pitchFamily="34" charset="-120"/>
               </a:rPr>
-              <a:t>CDC Electronic Case Reporting resources: https://www.cdc.gov/ecr/php/index.html</a:t>
-            </a:r>
-            <a:endParaRPr lang="en-US" sz="1380" dirty="0"/>
-          </a:p>
-          <a:p>
-            <a:r>
-              <a:rPr lang="en-US" sz="1380" dirty="0">
+              <a:t>CDC Electronic Case Reporting resources:.</a:t>
+            </a:r>
+            <a:endParaRPr lang="en-US" sz="1220" dirty="0"/>
+          </a:p>
+          <a:p>
+            <a:pPr indent="0" marL="0">
+              <a:buNone/>
+            </a:pPr>
+            <a:r>
+              <a:rPr lang="en-US" sz="1220" dirty="0">
                 <a:solidFill>
                   <a:srgbClr val="17364A"/>
                 </a:solidFill>
@@ -13183,13 +13389,16 @@
                 <a:ea typeface="Aptos" pitchFamily="34" charset="-122"/>
                 <a:cs typeface="Aptos" pitchFamily="34" charset="-120"/>
               </a:rPr>
-              <a:t>AIMS eCR triggering documentation: https://ecr.aimsplatform.org/ehr-implementers/triggering/</a:t>
-            </a:r>
-            <a:endParaRPr lang="en-US" sz="1380" dirty="0"/>
-          </a:p>
-          <a:p>
-            <a:r>
-              <a:rPr lang="en-US" sz="1380" dirty="0">
+              <a:t>AIMS eCR triggering documentation:.</a:t>
+            </a:r>
+            <a:endParaRPr lang="en-US" sz="1220" dirty="0"/>
+          </a:p>
+          <a:p>
+            <a:pPr indent="0" marL="0">
+              <a:buNone/>
+            </a:pPr>
+            <a:r>
+              <a:rPr lang="en-US" sz="1220" dirty="0">
                 <a:solidFill>
                   <a:srgbClr val="17364A"/>
                 </a:solidFill>
@@ -13199,7 +13408,7 @@
               </a:rPr>
               <a:t>HL7 eCR FHIR Implementation Guide: https://hl7.org/fhir/us/ecr/</a:t>
             </a:r>
-            <a:endParaRPr lang="en-US" sz="1380" dirty="0"/>
+            <a:endParaRPr lang="en-US" sz="1220" dirty="0"/>
           </a:p>
         </p:txBody>
       </p:sp>
@@ -13277,17 +13486,17 @@
         </p:nvSpPr>
         <p:spPr>
           <a:xfrm>
-            <a:off x="7799832" y="5001768"/>
-            <a:ext cx="3145536" cy="502920"/>
-          </a:xfrm>
-          <a:prstGeom prst="rect">
-            <a:avLst/>
-          </a:prstGeom>
-          <a:noFill/>
-          <a:ln/>
-        </p:spPr>
-        <p:txBody>
-          <a:bodyPr wrap="square" lIns="0" tIns="0" rIns="0" bIns="0" rtlCol="0" anchor="t">
+            <a:off x="7799832" y="4974336"/>
+            <a:ext cx="3145536" cy="576072"/>
+          </a:xfrm>
+          <a:prstGeom prst="rect">
+            <a:avLst/>
+          </a:prstGeom>
+          <a:noFill/>
+          <a:ln/>
+        </p:spPr>
+        <p:txBody>
+          <a:bodyPr wrap="square" lIns="254" tIns="254" rIns="254" bIns="254" rtlCol="0" anchor="t">
             <a:normAutofit/>
           </a:bodyPr>
           <a:lstStyle/>
@@ -13296,7 +13505,7 @@
               <a:buNone/>
             </a:pPr>
             <a:r>
-              <a:rPr lang="en-US" sz="1550" dirty="0">
+              <a:rPr lang="en-US" sz="1320" dirty="0">
                 <a:solidFill>
                   <a:srgbClr val="17364A"/>
                 </a:solidFill>
@@ -13304,9 +13513,9 @@
                 <a:ea typeface="Aptos" pitchFamily="34" charset="-122"/>
                 <a:cs typeface="Aptos" pitchFamily="34" charset="-120"/>
               </a:rPr>
-              <a:t>Use the concept to clarify workflow changes, dependencies, staffing, procurement requirements, training needs, and implementation checkpoints.</a:t>
-            </a:r>
-            <a:endParaRPr lang="en-US" sz="1550" dirty="0"/>
+              <a:t>Use the concept to clarify workflow changes, dependencies, staffing, procurement requirements, training needs, and.</a:t>
+            </a:r>
+            <a:endParaRPr lang="en-US" sz="1320" dirty="0"/>
           </a:p>
         </p:txBody>
       </p:sp>
@@ -13607,63 +13816,75 @@
           <a:ln/>
         </p:spPr>
         <p:txBody>
-          <a:bodyPr wrap="square" lIns="635" tIns="635" rIns="635" bIns="635" rtlCol="0" anchor="t">
+          <a:bodyPr wrap="square" lIns="1016" tIns="1016" rIns="1016" bIns="1016" rtlCol="0" anchor="t">
             <a:normAutofit/>
           </a:bodyPr>
           <a:lstStyle/>
           <a:p>
+            <a:pPr indent="0" marL="0">
+              <a:buNone/>
+            </a:pPr>
             <a:r>
               <a:rPr lang="en-US" sz="1900" dirty="0">
                 <a:solidFill>
-                  <a:srgbClr val="17364A"/>
-                </a:solidFill>
-                <a:latin typeface="Aptos" pitchFamily="34" charset="0"/>
-                <a:ea typeface="Aptos" pitchFamily="34" charset="-122"/>
-                <a:cs typeface="Aptos" pitchFamily="34" charset="-120"/>
-              </a:rPr>
-              <a:t>Play 13: Monitor and Evaluate AI Systems - This lesson informs Play 13 by helping learners connect the.</a:t>
+                  <a:srgbClr val="003A63"/>
+                </a:solidFill>
+                <a:latin typeface="Aptos" pitchFamily="34" charset="0"/>
+                <a:ea typeface="Aptos" pitchFamily="34" charset="-122"/>
+                <a:cs typeface="Aptos" pitchFamily="34" charset="-120"/>
+              </a:rPr>
+              <a:t>• Play 13: Monitor and Evaluate AI Systems - This lesson informs Play 13 by helping learners.</a:t>
             </a:r>
             <a:endParaRPr lang="en-US" sz="1900" dirty="0"/>
           </a:p>
           <a:p>
+            <a:pPr indent="0" marL="0">
+              <a:buNone/>
+            </a:pPr>
             <a:r>
               <a:rPr lang="en-US" sz="1900" dirty="0">
                 <a:solidFill>
-                  <a:srgbClr val="17364A"/>
-                </a:solidFill>
-                <a:latin typeface="Aptos" pitchFamily="34" charset="0"/>
-                <a:ea typeface="Aptos" pitchFamily="34" charset="-122"/>
-                <a:cs typeface="Aptos" pitchFamily="34" charset="-120"/>
-              </a:rPr>
-              <a:t>Play 1: Vision &amp; Guardrails - This lesson informs Play 1 by helping learners connect the lesson topic to.</a:t>
+                  <a:srgbClr val="003A63"/>
+                </a:solidFill>
+                <a:latin typeface="Aptos" pitchFamily="34" charset="0"/>
+                <a:ea typeface="Aptos" pitchFamily="34" charset="-122"/>
+                <a:cs typeface="Aptos" pitchFamily="34" charset="-120"/>
+              </a:rPr>
+              <a:t>• Play 1: Vision &amp; Guardrails - This lesson informs Play 1 by helping learners connect the.</a:t>
             </a:r>
             <a:endParaRPr lang="en-US" sz="1900" dirty="0"/>
           </a:p>
           <a:p>
+            <a:pPr indent="0" marL="0">
+              <a:buNone/>
+            </a:pPr>
             <a:r>
               <a:rPr lang="en-US" sz="1900" dirty="0">
                 <a:solidFill>
-                  <a:srgbClr val="17364A"/>
-                </a:solidFill>
-                <a:latin typeface="Aptos" pitchFamily="34" charset="0"/>
-                <a:ea typeface="Aptos" pitchFamily="34" charset="-122"/>
-                <a:cs typeface="Aptos" pitchFamily="34" charset="-120"/>
-              </a:rPr>
-              <a:t>Play 12: Execute Governance and Oversight - This lesson informs Play 12 by helping learners connect the.</a:t>
+                  <a:srgbClr val="003A63"/>
+                </a:solidFill>
+                <a:latin typeface="Aptos" pitchFamily="34" charset="0"/>
+                <a:ea typeface="Aptos" pitchFamily="34" charset="-122"/>
+                <a:cs typeface="Aptos" pitchFamily="34" charset="-120"/>
+              </a:rPr>
+              <a:t>• Play 12: Execute Governance and Oversight - This lesson informs Play 12 by helping learners.</a:t>
             </a:r>
             <a:endParaRPr lang="en-US" sz="1900" dirty="0"/>
           </a:p>
           <a:p>
+            <a:pPr indent="0" marL="0">
+              <a:buNone/>
+            </a:pPr>
             <a:r>
               <a:rPr lang="en-US" sz="1900" dirty="0">
                 <a:solidFill>
-                  <a:srgbClr val="17364A"/>
-                </a:solidFill>
-                <a:latin typeface="Aptos" pitchFamily="34" charset="0"/>
-                <a:ea typeface="Aptos" pitchFamily="34" charset="-122"/>
-                <a:cs typeface="Aptos" pitchFamily="34" charset="-120"/>
-              </a:rPr>
-              <a:t>Play 7: Prioritize Use Cases - This lesson informs Play 7 by helping learners connect the lesson topic to.</a:t>
+                  <a:srgbClr val="003A63"/>
+                </a:solidFill>
+                <a:latin typeface="Aptos" pitchFamily="34" charset="0"/>
+                <a:ea typeface="Aptos" pitchFamily="34" charset="-122"/>
+                <a:cs typeface="Aptos" pitchFamily="34" charset="-120"/>
+              </a:rPr>
+              <a:t>• Play 7: Prioritize Use Cases - This lesson informs Play 7 by helping learners connect the.</a:t>
             </a:r>
             <a:endParaRPr lang="en-US" sz="1900" dirty="0"/>
           </a:p>
@@ -13743,17 +13964,17 @@
         </p:nvSpPr>
         <p:spPr>
           <a:xfrm>
-            <a:off x="8211312" y="1920240"/>
-            <a:ext cx="2734056" cy="1463040"/>
-          </a:xfrm>
-          <a:prstGeom prst="rect">
-            <a:avLst/>
-          </a:prstGeom>
-          <a:noFill/>
-          <a:ln/>
-        </p:spPr>
-        <p:txBody>
-          <a:bodyPr wrap="square" lIns="0" tIns="0" rIns="0" bIns="0" rtlCol="0" anchor="t">
+            <a:off x="8211312" y="1892808"/>
+            <a:ext cx="2734056" cy="1536192"/>
+          </a:xfrm>
+          <a:prstGeom prst="rect">
+            <a:avLst/>
+          </a:prstGeom>
+          <a:noFill/>
+          <a:ln/>
+        </p:spPr>
+        <p:txBody>
+          <a:bodyPr wrap="square" lIns="254" tIns="254" rIns="254" bIns="254" rtlCol="0" anchor="t">
             <a:normAutofit/>
           </a:bodyPr>
           <a:lstStyle/>
@@ -13762,7 +13983,7 @@
               <a:buNone/>
             </a:pPr>
             <a:r>
-              <a:rPr lang="en-US" sz="1550" dirty="0">
+              <a:rPr lang="en-US" sz="1320" dirty="0">
                 <a:solidFill>
                   <a:srgbClr val="17364A"/>
                 </a:solidFill>
@@ -13770,9 +13991,9 @@
                 <a:ea typeface="Aptos" pitchFamily="34" charset="-122"/>
                 <a:cs typeface="Aptos" pitchFamily="34" charset="-120"/>
               </a:rPr>
-              <a:t>Use the related plays to identify decisions, participants, timing, approvals, and documentation needed for responsible implementation.</a:t>
-            </a:r>
-            <a:endParaRPr lang="en-US" sz="1550" dirty="0"/>
+              <a:t>Use the related plays to identify decisions, participants, timing, approvals, and documentation needed for responsible.</a:t>
+            </a:r>
+            <a:endParaRPr lang="en-US" sz="1320" dirty="0"/>
           </a:p>
         </p:txBody>
       </p:sp>
@@ -13860,13 +14081,16 @@
           <a:ln/>
         </p:spPr>
         <p:txBody>
-          <a:bodyPr wrap="square" lIns="254" tIns="254" rIns="254" bIns="254" rtlCol="0" anchor="t">
+          <a:bodyPr wrap="square" lIns="508" tIns="508" rIns="508" bIns="508" rtlCol="0" anchor="t">
             <a:normAutofit/>
           </a:bodyPr>
           <a:lstStyle/>
           <a:p>
-            <a:r>
-              <a:rPr lang="en-US" sz="1380" dirty="0">
+            <a:pPr indent="0" marL="0">
+              <a:buNone/>
+            </a:pPr>
+            <a:r>
+              <a:rPr lang="en-US" sz="1220" dirty="0">
                 <a:solidFill>
                   <a:srgbClr val="17364A"/>
                 </a:solidFill>
@@ -13876,11 +14100,14 @@
               </a:rPr>
               <a:t>Locate the decision point in the playbook sequence.</a:t>
             </a:r>
-            <a:endParaRPr lang="en-US" sz="1380" dirty="0"/>
-          </a:p>
-          <a:p>
-            <a:r>
-              <a:rPr lang="en-US" sz="1380" dirty="0">
+            <a:endParaRPr lang="en-US" sz="1220" dirty="0"/>
+          </a:p>
+          <a:p>
+            <a:pPr indent="0" marL="0">
+              <a:buNone/>
+            </a:pPr>
+            <a:r>
+              <a:rPr lang="en-US" sz="1220" dirty="0">
                 <a:solidFill>
                   <a:srgbClr val="17364A"/>
                 </a:solidFill>
@@ -13890,11 +14117,14 @@
               </a:rPr>
               <a:t>Identify who should participate in the work.</a:t>
             </a:r>
-            <a:endParaRPr lang="en-US" sz="1380" dirty="0"/>
-          </a:p>
-          <a:p>
-            <a:r>
-              <a:rPr lang="en-US" sz="1380" dirty="0">
+            <a:endParaRPr lang="en-US" sz="1220" dirty="0"/>
+          </a:p>
+          <a:p>
+            <a:pPr indent="0" marL="0">
+              <a:buNone/>
+            </a:pPr>
+            <a:r>
+              <a:rPr lang="en-US" sz="1220" dirty="0">
                 <a:solidFill>
                   <a:srgbClr val="17364A"/>
                 </a:solidFill>
@@ -13904,7 +14134,7 @@
               </a:rPr>
               <a:t>Document the review, approval, or implementation step.</a:t>
             </a:r>
-            <a:endParaRPr lang="en-US" sz="1380" dirty="0"/>
+            <a:endParaRPr lang="en-US" sz="1220" dirty="0"/>
           </a:p>
         </p:txBody>
       </p:sp>
@@ -14205,63 +14435,75 @@
           <a:ln/>
         </p:spPr>
         <p:txBody>
-          <a:bodyPr wrap="square" lIns="635" tIns="635" rIns="635" bIns="635" rtlCol="0" anchor="t">
+          <a:bodyPr wrap="square" lIns="1016" tIns="1016" rIns="1016" bIns="1016" rtlCol="0" anchor="t">
             <a:normAutofit/>
           </a:bodyPr>
           <a:lstStyle/>
           <a:p>
+            <a:pPr indent="0" marL="0">
+              <a:buNone/>
+            </a:pPr>
             <a:r>
               <a:rPr lang="en-US" sz="1850" dirty="0">
                 <a:solidFill>
-                  <a:srgbClr val="17364A"/>
-                </a:solidFill>
-                <a:latin typeface="Aptos" pitchFamily="34" charset="0"/>
-                <a:ea typeface="Aptos" pitchFamily="34" charset="-122"/>
-                <a:cs typeface="Aptos" pitchFamily="34" charset="-120"/>
-              </a:rPr>
-              <a:t>Tool 44: Performance Monitoring Dashboard (Dashboard) - Use this tool to complete or strengthen the.</a:t>
+                  <a:srgbClr val="003A63"/>
+                </a:solidFill>
+                <a:latin typeface="Aptos" pitchFamily="34" charset="0"/>
+                <a:ea typeface="Aptos" pitchFamily="34" charset="-122"/>
+                <a:cs typeface="Aptos" pitchFamily="34" charset="-120"/>
+              </a:rPr>
+              <a:t>• Tool 44: Performance Monitoring Dashboard (Dashboard) - Use this tool to complete or.</a:t>
             </a:r>
             <a:endParaRPr lang="en-US" sz="1850" dirty="0"/>
           </a:p>
           <a:p>
+            <a:pPr indent="0" marL="0">
+              <a:buNone/>
+            </a:pPr>
             <a:r>
               <a:rPr lang="en-US" sz="1850" dirty="0">
                 <a:solidFill>
-                  <a:srgbClr val="17364A"/>
-                </a:solidFill>
-                <a:latin typeface="Aptos" pitchFamily="34" charset="0"/>
-                <a:ea typeface="Aptos" pitchFamily="34" charset="-122"/>
-                <a:cs typeface="Aptos" pitchFamily="34" charset="-120"/>
-              </a:rPr>
-              <a:t>Tool 45: Continuous Improvement Log (Log) - Use Continuous Improvement Log to translate this lesson into a.</a:t>
+                  <a:srgbClr val="003A63"/>
+                </a:solidFill>
+                <a:latin typeface="Aptos" pitchFamily="34" charset="0"/>
+                <a:ea typeface="Aptos" pitchFamily="34" charset="-122"/>
+                <a:cs typeface="Aptos" pitchFamily="34" charset="-120"/>
+              </a:rPr>
+              <a:t>• Tool 45: Continuous Improvement Log (Log) - Use Continuous Improvement Log to translate this.</a:t>
             </a:r>
             <a:endParaRPr lang="en-US" sz="1850" dirty="0"/>
           </a:p>
           <a:p>
+            <a:pPr indent="0" marL="0">
+              <a:buNone/>
+            </a:pPr>
             <a:r>
               <a:rPr lang="en-US" sz="1850" dirty="0">
                 <a:solidFill>
-                  <a:srgbClr val="17364A"/>
-                </a:solidFill>
-                <a:latin typeface="Aptos" pitchFamily="34" charset="0"/>
-                <a:ea typeface="Aptos" pitchFamily="34" charset="-122"/>
-                <a:cs typeface="Aptos" pitchFamily="34" charset="-120"/>
-              </a:rPr>
-              <a:t>Tool 48: AI Evaluation &amp; Outcomes Reporting (Template) - Use AI Evaluation &amp; Outcomes Reporting to translate.</a:t>
+                  <a:srgbClr val="003A63"/>
+                </a:solidFill>
+                <a:latin typeface="Aptos" pitchFamily="34" charset="0"/>
+                <a:ea typeface="Aptos" pitchFamily="34" charset="-122"/>
+                <a:cs typeface="Aptos" pitchFamily="34" charset="-120"/>
+              </a:rPr>
+              <a:t>• Tool 48: AI Evaluation &amp; Outcomes Reporting (Template) - Use AI Evaluation &amp; Outcomes.</a:t>
             </a:r>
             <a:endParaRPr lang="en-US" sz="1850" dirty="0"/>
           </a:p>
           <a:p>
+            <a:pPr indent="0" marL="0">
+              <a:buNone/>
+            </a:pPr>
             <a:r>
               <a:rPr lang="en-US" sz="1850" dirty="0">
                 <a:solidFill>
-                  <a:srgbClr val="17364A"/>
-                </a:solidFill>
-                <a:latin typeface="Aptos" pitchFamily="34" charset="0"/>
-                <a:ea typeface="Aptos" pitchFamily="34" charset="-122"/>
-                <a:cs typeface="Aptos" pitchFamily="34" charset="-120"/>
-              </a:rPr>
-              <a:t>Tool 4: AI Policy Landscape Scan (Worksheet) - Use AI Policy Landscape Scan to translate this lesson into a.</a:t>
+                  <a:srgbClr val="003A63"/>
+                </a:solidFill>
+                <a:latin typeface="Aptos" pitchFamily="34" charset="0"/>
+                <a:ea typeface="Aptos" pitchFamily="34" charset="-122"/>
+                <a:cs typeface="Aptos" pitchFamily="34" charset="-120"/>
+              </a:rPr>
+              <a:t>• Tool 4: AI Policy Landscape Scan (Worksheet) - Use AI Policy Landscape Scan to translate this.</a:t>
             </a:r>
             <a:endParaRPr lang="en-US" sz="1850" dirty="0"/>
           </a:p>
@@ -14341,17 +14583,17 @@
         </p:nvSpPr>
         <p:spPr>
           <a:xfrm>
-            <a:off x="8211312" y="1920240"/>
-            <a:ext cx="2734056" cy="1463040"/>
-          </a:xfrm>
-          <a:prstGeom prst="rect">
-            <a:avLst/>
-          </a:prstGeom>
-          <a:noFill/>
-          <a:ln/>
-        </p:spPr>
-        <p:txBody>
-          <a:bodyPr wrap="square" lIns="0" tIns="0" rIns="0" bIns="0" rtlCol="0" anchor="t">
+            <a:off x="8211312" y="1892808"/>
+            <a:ext cx="2734056" cy="1536192"/>
+          </a:xfrm>
+          <a:prstGeom prst="rect">
+            <a:avLst/>
+          </a:prstGeom>
+          <a:noFill/>
+          <a:ln/>
+        </p:spPr>
+        <p:txBody>
+          <a:bodyPr wrap="square" lIns="254" tIns="254" rIns="254" bIns="254" rtlCol="0" anchor="t">
             <a:normAutofit/>
           </a:bodyPr>
           <a:lstStyle/>
@@ -14360,7 +14602,7 @@
               <a:buNone/>
             </a:pPr>
             <a:r>
-              <a:rPr lang="en-US" sz="1550" dirty="0">
+              <a:rPr lang="en-US" sz="1320" dirty="0">
                 <a:solidFill>
                   <a:srgbClr val="17364A"/>
                 </a:solidFill>
@@ -14368,9 +14610,9 @@
                 <a:ea typeface="Aptos" pitchFamily="34" charset="-122"/>
                 <a:cs typeface="Aptos" pitchFamily="34" charset="-120"/>
               </a:rPr>
-              <a:t>Use linked tools when your department needs a structured worksheet, template, checklist, review process, or documentation artifact.</a:t>
-            </a:r>
-            <a:endParaRPr lang="en-US" sz="1550" dirty="0"/>
+              <a:t>Use linked tools when your department needs a structured worksheet, template, checklist, review process, or.</a:t>
+            </a:r>
+            <a:endParaRPr lang="en-US" sz="1320" dirty="0"/>
           </a:p>
         </p:txBody>
       </p:sp>
@@ -14458,13 +14700,16 @@
           <a:ln/>
         </p:spPr>
         <p:txBody>
-          <a:bodyPr wrap="square" lIns="254" tIns="254" rIns="254" bIns="254" rtlCol="0" anchor="t">
+          <a:bodyPr wrap="square" lIns="508" tIns="508" rIns="508" bIns="508" rtlCol="0" anchor="t">
             <a:normAutofit/>
           </a:bodyPr>
           <a:lstStyle/>
           <a:p>
-            <a:r>
-              <a:rPr lang="en-US" sz="1380" dirty="0">
+            <a:pPr indent="0" marL="0">
+              <a:buNone/>
+            </a:pPr>
+            <a:r>
+              <a:rPr lang="en-US" sz="1220" dirty="0">
                 <a:solidFill>
                   <a:srgbClr val="17364A"/>
                 </a:solidFill>
@@ -14474,11 +14719,14 @@
               </a:rPr>
               <a:t>Use a tool when no comparable local process exists.</a:t>
             </a:r>
-            <a:endParaRPr lang="en-US" sz="1380" dirty="0"/>
-          </a:p>
-          <a:p>
-            <a:r>
-              <a:rPr lang="en-US" sz="1380" dirty="0">
+            <a:endParaRPr lang="en-US" sz="1220" dirty="0"/>
+          </a:p>
+          <a:p>
+            <a:pPr indent="0" marL="0">
+              <a:buNone/>
+            </a:pPr>
+            <a:r>
+              <a:rPr lang="en-US" sz="1220" dirty="0">
                 <a:solidFill>
                   <a:srgbClr val="17364A"/>
                 </a:solidFill>
@@ -14486,13 +14734,16 @@
                 <a:ea typeface="Aptos" pitchFamily="34" charset="-122"/>
                 <a:cs typeface="Aptos" pitchFamily="34" charset="-120"/>
               </a:rPr>
-              <a:t>Adapt existing department templates when they already fit the purpose.</a:t>
-            </a:r>
-            <a:endParaRPr lang="en-US" sz="1380" dirty="0"/>
-          </a:p>
-          <a:p>
-            <a:r>
-              <a:rPr lang="en-US" sz="1380" dirty="0">
+              <a:t>Adapt existing department templates when they already fit the.</a:t>
+            </a:r>
+            <a:endParaRPr lang="en-US" sz="1220" dirty="0"/>
+          </a:p>
+          <a:p>
+            <a:pPr indent="0" marL="0">
+              <a:buNone/>
+            </a:pPr>
+            <a:r>
+              <a:rPr lang="en-US" sz="1220" dirty="0">
                 <a:solidFill>
                   <a:srgbClr val="17364A"/>
                 </a:solidFill>
@@ -14502,7 +14753,7 @@
               </a:rPr>
               <a:t>Save the completed artifact as evidence of the decision.</a:t>
             </a:r>
-            <a:endParaRPr lang="en-US" sz="1380" dirty="0"/>
+            <a:endParaRPr lang="en-US" sz="1220" dirty="0"/>
           </a:p>
         </p:txBody>
       </p:sp>
@@ -14803,49 +15054,58 @@
           <a:ln/>
         </p:spPr>
         <p:txBody>
-          <a:bodyPr wrap="square" lIns="635" tIns="635" rIns="635" bIns="635" rtlCol="0" anchor="t">
+          <a:bodyPr wrap="square" lIns="1016" tIns="1016" rIns="1016" bIns="1016" rtlCol="0" anchor="t">
             <a:normAutofit/>
           </a:bodyPr>
           <a:lstStyle/>
           <a:p>
+            <a:pPr indent="0" marL="0">
+              <a:buNone/>
+            </a:pPr>
             <a:r>
               <a:rPr lang="en-US" sz="2100" dirty="0">
                 <a:solidFill>
-                  <a:srgbClr val="17364A"/>
-                </a:solidFill>
-                <a:latin typeface="Aptos" pitchFamily="34" charset="0"/>
-                <a:ea typeface="Aptos" pitchFamily="34" charset="-122"/>
-                <a:cs typeface="Aptos" pitchFamily="34" charset="-120"/>
-              </a:rPr>
-              <a:t>Describe the basic eCR workflow from EHR trigger to public health action.</a:t>
+                  <a:srgbClr val="003A63"/>
+                </a:solidFill>
+                <a:latin typeface="Aptos" pitchFamily="34" charset="0"/>
+                <a:ea typeface="Aptos" pitchFamily="34" charset="-122"/>
+                <a:cs typeface="Aptos" pitchFamily="34" charset="-120"/>
+              </a:rPr>
+              <a:t>• Describe the basic eCR workflow from EHR trigger to public health action.</a:t>
             </a:r>
             <a:endParaRPr lang="en-US" sz="2100" dirty="0"/>
           </a:p>
           <a:p>
+            <a:pPr indent="0" marL="0">
+              <a:buNone/>
+            </a:pPr>
             <a:r>
               <a:rPr lang="en-US" sz="2100" dirty="0">
                 <a:solidFill>
-                  <a:srgbClr val="17364A"/>
-                </a:solidFill>
-                <a:latin typeface="Aptos" pitchFamily="34" charset="0"/>
-                <a:ea typeface="Aptos" pitchFamily="34" charset="-122"/>
-                <a:cs typeface="Aptos" pitchFamily="34" charset="-120"/>
-              </a:rPr>
-              <a:t>Explain the roles of eICR, Reportability Response, eRSD, and RCTC.</a:t>
+                  <a:srgbClr val="003A63"/>
+                </a:solidFill>
+                <a:latin typeface="Aptos" pitchFamily="34" charset="0"/>
+                <a:ea typeface="Aptos" pitchFamily="34" charset="-122"/>
+                <a:cs typeface="Aptos" pitchFamily="34" charset="-120"/>
+              </a:rPr>
+              <a:t>• Explain the roles of eICR, Reportability Response, eRSD, and RCTC.</a:t>
             </a:r>
             <a:endParaRPr lang="en-US" sz="2100" dirty="0"/>
           </a:p>
           <a:p>
+            <a:pPr indent="0" marL="0">
+              <a:buNone/>
+            </a:pPr>
             <a:r>
               <a:rPr lang="en-US" sz="2100" dirty="0">
                 <a:solidFill>
-                  <a:srgbClr val="17364A"/>
-                </a:solidFill>
-                <a:latin typeface="Aptos" pitchFamily="34" charset="0"/>
-                <a:ea typeface="Aptos" pitchFamily="34" charset="-122"/>
-                <a:cs typeface="Aptos" pitchFamily="34" charset="-120"/>
-              </a:rPr>
-              <a:t>Identify eCR data quality, routing, and onboarding issues that can affect AI use.</a:t>
+                  <a:srgbClr val="003A63"/>
+                </a:solidFill>
+                <a:latin typeface="Aptos" pitchFamily="34" charset="0"/>
+                <a:ea typeface="Aptos" pitchFamily="34" charset="-122"/>
+                <a:cs typeface="Aptos" pitchFamily="34" charset="-120"/>
+              </a:rPr>
+              <a:t>• Identify eCR data quality, routing, and onboarding issues that can affect AI use.</a:t>
             </a:r>
             <a:endParaRPr lang="en-US" sz="2100" dirty="0"/>
           </a:p>
@@ -14925,17 +15185,17 @@
         </p:nvSpPr>
         <p:spPr>
           <a:xfrm>
-            <a:off x="7799832" y="1828800"/>
-            <a:ext cx="3145536" cy="685800"/>
-          </a:xfrm>
-          <a:prstGeom prst="rect">
-            <a:avLst/>
-          </a:prstGeom>
-          <a:noFill/>
-          <a:ln/>
-        </p:spPr>
-        <p:txBody>
-          <a:bodyPr wrap="square" lIns="0" tIns="0" rIns="0" bIns="0" rtlCol="0" anchor="t">
+            <a:off x="7799832" y="1801368"/>
+            <a:ext cx="3145536" cy="758952"/>
+          </a:xfrm>
+          <a:prstGeom prst="rect">
+            <a:avLst/>
+          </a:prstGeom>
+          <a:noFill/>
+          <a:ln/>
+        </p:spPr>
+        <p:txBody>
+          <a:bodyPr wrap="square" lIns="254" tIns="254" rIns="254" bIns="254" rtlCol="0" anchor="t">
             <a:normAutofit/>
           </a:bodyPr>
           <a:lstStyle/>
@@ -14944,7 +15204,7 @@
               <a:buNone/>
             </a:pPr>
             <a:r>
-              <a:rPr lang="en-US" sz="1550" dirty="0">
+              <a:rPr lang="en-US" sz="1320" dirty="0">
                 <a:solidFill>
                   <a:srgbClr val="17364A"/>
                 </a:solidFill>
@@ -14954,7 +15214,7 @@
               </a:rPr>
               <a:t>Describe the basic eCR workflow from EHR trigger to public health action.</a:t>
             </a:r>
-            <a:endParaRPr lang="en-US" sz="1550" dirty="0"/>
+            <a:endParaRPr lang="en-US" sz="1320" dirty="0"/>
           </a:p>
         </p:txBody>
       </p:sp>
@@ -15042,13 +15302,16 @@
           <a:ln/>
         </p:spPr>
         <p:txBody>
-          <a:bodyPr wrap="square" lIns="254" tIns="254" rIns="254" bIns="254" rtlCol="0" anchor="t">
+          <a:bodyPr wrap="square" lIns="508" tIns="508" rIns="508" bIns="508" rtlCol="0" anchor="t">
             <a:normAutofit/>
           </a:bodyPr>
           <a:lstStyle/>
           <a:p>
-            <a:r>
-              <a:rPr lang="en-US" sz="1380" dirty="0">
+            <a:pPr indent="0" marL="0">
+              <a:buNone/>
+            </a:pPr>
+            <a:r>
+              <a:rPr lang="en-US" sz="1220" dirty="0">
                 <a:solidFill>
                   <a:srgbClr val="17364A"/>
                 </a:solidFill>
@@ -15056,13 +15319,16 @@
                 <a:ea typeface="Aptos" pitchFamily="34" charset="-122"/>
                 <a:cs typeface="Aptos" pitchFamily="34" charset="-120"/>
               </a:rPr>
-              <a:t>Assess where AI may support eCR workflows and where human review remains required.</a:t>
-            </a:r>
-            <a:endParaRPr lang="en-US" sz="1380" dirty="0"/>
-          </a:p>
-          <a:p>
-            <a:r>
-              <a:rPr lang="en-US" sz="1380" dirty="0">
+              <a:t>Assess where AI may support eCR workflows and where human review.</a:t>
+            </a:r>
+            <a:endParaRPr lang="en-US" sz="1220" dirty="0"/>
+          </a:p>
+          <a:p>
+            <a:pPr indent="0" marL="0">
+              <a:buNone/>
+            </a:pPr>
+            <a:r>
+              <a:rPr lang="en-US" sz="1220" dirty="0">
                 <a:solidFill>
                   <a:srgbClr val="17364A"/>
                 </a:solidFill>
@@ -15072,7 +15338,7 @@
               </a:rPr>
               <a:t>Produce an AI-readiness review for an eCR workflow.</a:t>
             </a:r>
-            <a:endParaRPr lang="en-US" sz="1380" dirty="0"/>
+            <a:endParaRPr lang="en-US" sz="1220" dirty="0"/>
           </a:p>
         </p:txBody>
       </p:sp>
@@ -15150,17 +15416,17 @@
         </p:nvSpPr>
         <p:spPr>
           <a:xfrm>
-            <a:off x="7799832" y="5001768"/>
-            <a:ext cx="3145536" cy="502920"/>
-          </a:xfrm>
-          <a:prstGeom prst="rect">
-            <a:avLst/>
-          </a:prstGeom>
-          <a:noFill/>
-          <a:ln/>
-        </p:spPr>
-        <p:txBody>
-          <a:bodyPr wrap="square" lIns="0" tIns="0" rIns="0" bIns="0" rtlCol="0" anchor="t">
+            <a:off x="7799832" y="4974336"/>
+            <a:ext cx="3145536" cy="576072"/>
+          </a:xfrm>
+          <a:prstGeom prst="rect">
+            <a:avLst/>
+          </a:prstGeom>
+          <a:noFill/>
+          <a:ln/>
+        </p:spPr>
+        <p:txBody>
+          <a:bodyPr wrap="square" lIns="254" tIns="254" rIns="254" bIns="254" rtlCol="0" anchor="t">
             <a:normAutofit/>
           </a:bodyPr>
           <a:lstStyle/>
@@ -15169,7 +15435,7 @@
               <a:buNone/>
             </a:pPr>
             <a:r>
-              <a:rPr lang="en-US" sz="1550" dirty="0">
+              <a:rPr lang="en-US" sz="1320" dirty="0">
                 <a:solidFill>
                   <a:srgbClr val="17364A"/>
                 </a:solidFill>
@@ -15177,9 +15443,9 @@
                 <a:ea typeface="Aptos" pitchFamily="34" charset="-122"/>
                 <a:cs typeface="Aptos" pitchFamily="34" charset="-120"/>
               </a:rPr>
-              <a:t>Use the assignment to test whether you can explain the concept, apply it to a realistic public health situation, and identify what would need review before the work moves forward.</a:t>
-            </a:r>
-            <a:endParaRPr lang="en-US" sz="1550" dirty="0"/>
+              <a:t>Use the assignment to test whether you can explain the concept, apply it to a realistic public health situation, and.</a:t>
+            </a:r>
+            <a:endParaRPr lang="en-US" sz="1320" dirty="0"/>
           </a:p>
         </p:txBody>
       </p:sp>
@@ -15480,49 +15746,58 @@
           <a:ln/>
         </p:spPr>
         <p:txBody>
-          <a:bodyPr wrap="square" lIns="635" tIns="635" rIns="635" bIns="635" rtlCol="0" anchor="t">
+          <a:bodyPr wrap="square" lIns="1016" tIns="1016" rIns="1016" bIns="1016" rtlCol="0" anchor="t">
             <a:normAutofit/>
           </a:bodyPr>
           <a:lstStyle/>
           <a:p>
+            <a:pPr indent="0" marL="0">
+              <a:buNone/>
+            </a:pPr>
             <a:r>
               <a:rPr lang="en-US" sz="2100" dirty="0">
                 <a:solidFill>
-                  <a:srgbClr val="17364A"/>
-                </a:solidFill>
-                <a:latin typeface="Aptos" pitchFamily="34" charset="0"/>
-                <a:ea typeface="Aptos" pitchFamily="34" charset="-122"/>
-                <a:cs typeface="Aptos" pitchFamily="34" charset="-120"/>
-              </a:rPr>
-              <a:t>Electronic case reporting is one of the clearest examples of public health automation.</a:t>
+                  <a:srgbClr val="003A63"/>
+                </a:solidFill>
+                <a:latin typeface="Aptos" pitchFamily="34" charset="0"/>
+                <a:ea typeface="Aptos" pitchFamily="34" charset="-122"/>
+                <a:cs typeface="Aptos" pitchFamily="34" charset="-120"/>
+              </a:rPr>
+              <a:t>• Electronic case reporting is one of the clearest examples of public health automation.</a:t>
             </a:r>
             <a:endParaRPr lang="en-US" sz="2100" dirty="0"/>
           </a:p>
           <a:p>
+            <a:pPr indent="0" marL="0">
+              <a:buNone/>
+            </a:pPr>
             <a:r>
               <a:rPr lang="en-US" sz="2100" dirty="0">
                 <a:solidFill>
-                  <a:srgbClr val="17364A"/>
-                </a:solidFill>
-                <a:latin typeface="Aptos" pitchFamily="34" charset="0"/>
-                <a:ea typeface="Aptos" pitchFamily="34" charset="-122"/>
-                <a:cs typeface="Aptos" pitchFamily="34" charset="-120"/>
-              </a:rPr>
-              <a:t>It uses data from electronic health records and reporting logic to support more timely case reporting.</a:t>
+                  <a:srgbClr val="003A63"/>
+                </a:solidFill>
+                <a:latin typeface="Aptos" pitchFamily="34" charset="0"/>
+                <a:ea typeface="Aptos" pitchFamily="34" charset="-122"/>
+                <a:cs typeface="Aptos" pitchFamily="34" charset="-120"/>
+              </a:rPr>
+              <a:t>• It uses data from electronic health records and reporting logic to support more timely case.</a:t>
             </a:r>
             <a:endParaRPr lang="en-US" sz="2100" dirty="0"/>
           </a:p>
           <a:p>
+            <a:pPr indent="0" marL="0">
+              <a:buNone/>
+            </a:pPr>
             <a:r>
               <a:rPr lang="en-US" sz="2100" dirty="0">
                 <a:solidFill>
-                  <a:srgbClr val="17364A"/>
-                </a:solidFill>
-                <a:latin typeface="Aptos" pitchFamily="34" charset="0"/>
-                <a:ea typeface="Aptos" pitchFamily="34" charset="-122"/>
-                <a:cs typeface="Aptos" pitchFamily="34" charset="-120"/>
-              </a:rPr>
-              <a:t>This module teaches learners how eCR works technically and how AI might support eCR-related workflows.</a:t>
+                  <a:srgbClr val="003A63"/>
+                </a:solidFill>
+                <a:latin typeface="Aptos" pitchFamily="34" charset="0"/>
+                <a:ea typeface="Aptos" pitchFamily="34" charset="-122"/>
+                <a:cs typeface="Aptos" pitchFamily="34" charset="-120"/>
+              </a:rPr>
+              <a:t>• This module teaches learners how eCR works technically and how AI might support eCR-related.</a:t>
             </a:r>
             <a:endParaRPr lang="en-US" sz="2100" dirty="0"/>
           </a:p>
@@ -15602,17 +15877,17 @@
         </p:nvSpPr>
         <p:spPr>
           <a:xfrm>
-            <a:off x="7799832" y="1828800"/>
-            <a:ext cx="3145536" cy="685800"/>
-          </a:xfrm>
-          <a:prstGeom prst="rect">
-            <a:avLst/>
-          </a:prstGeom>
-          <a:noFill/>
-          <a:ln/>
-        </p:spPr>
-        <p:txBody>
-          <a:bodyPr wrap="square" lIns="0" tIns="0" rIns="0" bIns="0" rtlCol="0" anchor="t">
+            <a:off x="7799832" y="1801368"/>
+            <a:ext cx="3145536" cy="758952"/>
+          </a:xfrm>
+          <a:prstGeom prst="rect">
+            <a:avLst/>
+          </a:prstGeom>
+          <a:noFill/>
+          <a:ln/>
+        </p:spPr>
+        <p:txBody>
+          <a:bodyPr wrap="square" lIns="254" tIns="254" rIns="254" bIns="254" rtlCol="0" anchor="t">
             <a:normAutofit/>
           </a:bodyPr>
           <a:lstStyle/>
@@ -15621,7 +15896,7 @@
               <a:buNone/>
             </a:pPr>
             <a:r>
-              <a:rPr lang="en-US" sz="1550" dirty="0">
+              <a:rPr lang="en-US" sz="1320" dirty="0">
                 <a:solidFill>
                   <a:srgbClr val="17364A"/>
                 </a:solidFill>
@@ -15631,7 +15906,7 @@
               </a:rPr>
               <a:t>Electronic case reporting is one of the clearest examples of public health automation.</a:t>
             </a:r>
-            <a:endParaRPr lang="en-US" sz="1550" dirty="0"/>
+            <a:endParaRPr lang="en-US" sz="1320" dirty="0"/>
           </a:p>
         </p:txBody>
       </p:sp>
@@ -15719,13 +15994,16 @@
           <a:ln/>
         </p:spPr>
         <p:txBody>
-          <a:bodyPr wrap="square" lIns="254" tIns="254" rIns="254" bIns="254" rtlCol="0" anchor="t">
+          <a:bodyPr wrap="square" lIns="508" tIns="508" rIns="508" bIns="508" rtlCol="0" anchor="t">
             <a:normAutofit/>
           </a:bodyPr>
           <a:lstStyle/>
           <a:p>
-            <a:r>
-              <a:rPr lang="en-US" sz="1380" dirty="0">
+            <a:pPr indent="0" marL="0">
+              <a:buNone/>
+            </a:pPr>
+            <a:r>
+              <a:rPr lang="en-US" sz="1220" dirty="0">
                 <a:solidFill>
                   <a:srgbClr val="17364A"/>
                 </a:solidFill>
@@ -15733,13 +16011,16 @@
                 <a:ea typeface="Aptos" pitchFamily="34" charset="-122"/>
                 <a:cs typeface="Aptos" pitchFamily="34" charset="-120"/>
               </a:rPr>
-              <a:t>It uses data from electronic health records and reporting logic to support more timely.</a:t>
-            </a:r>
-            <a:endParaRPr lang="en-US" sz="1380" dirty="0"/>
-          </a:p>
-          <a:p>
-            <a:r>
-              <a:rPr lang="en-US" sz="1380" dirty="0">
+              <a:t>It uses data from electronic health records and reporting logic to.</a:t>
+            </a:r>
+            <a:endParaRPr lang="en-US" sz="1220" dirty="0"/>
+          </a:p>
+          <a:p>
+            <a:pPr indent="0" marL="0">
+              <a:buNone/>
+            </a:pPr>
+            <a:r>
+              <a:rPr lang="en-US" sz="1220" dirty="0">
                 <a:solidFill>
                   <a:srgbClr val="17364A"/>
                 </a:solidFill>
@@ -15747,9 +16028,9 @@
                 <a:ea typeface="Aptos" pitchFamily="34" charset="-122"/>
                 <a:cs typeface="Aptos" pitchFamily="34" charset="-120"/>
               </a:rPr>
-              <a:t>This module teaches learners how eCR works technically and how AI might support.</a:t>
-            </a:r>
-            <a:endParaRPr lang="en-US" sz="1380" dirty="0"/>
+              <a:t>This module teaches learners how eCR works technically and how AI.</a:t>
+            </a:r>
+            <a:endParaRPr lang="en-US" sz="1220" dirty="0"/>
           </a:p>
         </p:txBody>
       </p:sp>
@@ -15827,17 +16108,17 @@
         </p:nvSpPr>
         <p:spPr>
           <a:xfrm>
-            <a:off x="7799832" y="5001768"/>
-            <a:ext cx="3145536" cy="502920"/>
-          </a:xfrm>
-          <a:prstGeom prst="rect">
-            <a:avLst/>
-          </a:prstGeom>
-          <a:noFill/>
-          <a:ln/>
-        </p:spPr>
-        <p:txBody>
-          <a:bodyPr wrap="square" lIns="0" tIns="0" rIns="0" bIns="0" rtlCol="0" anchor="t">
+            <a:off x="7799832" y="4974336"/>
+            <a:ext cx="3145536" cy="576072"/>
+          </a:xfrm>
+          <a:prstGeom prst="rect">
+            <a:avLst/>
+          </a:prstGeom>
+          <a:noFill/>
+          <a:ln/>
+        </p:spPr>
+        <p:txBody>
+          <a:bodyPr wrap="square" lIns="254" tIns="254" rIns="254" bIns="254" rtlCol="0" anchor="t">
             <a:normAutofit/>
           </a:bodyPr>
           <a:lstStyle/>
@@ -15846,7 +16127,7 @@
               <a:buNone/>
             </a:pPr>
             <a:r>
-              <a:rPr lang="en-US" sz="1550" dirty="0">
+              <a:rPr lang="en-US" sz="1320" dirty="0">
                 <a:solidFill>
                   <a:srgbClr val="17364A"/>
                 </a:solidFill>
@@ -15854,9 +16135,9 @@
                 <a:ea typeface="Aptos" pitchFamily="34" charset="-122"/>
                 <a:cs typeface="Aptos" pitchFamily="34" charset="-120"/>
               </a:rPr>
-              <a:t>Use the concept to clarify workflow changes, dependencies, staffing, procurement requirements, training needs, and implementation checkpoints.</a:t>
-            </a:r>
-            <a:endParaRPr lang="en-US" sz="1550" dirty="0"/>
+              <a:t>Use the concept to clarify workflow changes, dependencies, staffing, procurement requirements, training needs, and.</a:t>
+            </a:r>
+            <a:endParaRPr lang="en-US" sz="1320" dirty="0"/>
           </a:p>
         </p:txBody>
       </p:sp>
@@ -16157,49 +16438,58 @@
           <a:ln/>
         </p:spPr>
         <p:txBody>
-          <a:bodyPr wrap="square" lIns="635" tIns="635" rIns="635" bIns="635" rtlCol="0" anchor="t">
+          <a:bodyPr wrap="square" lIns="1016" tIns="1016" rIns="1016" bIns="1016" rtlCol="0" anchor="t">
             <a:normAutofit/>
           </a:bodyPr>
           <a:lstStyle/>
           <a:p>
+            <a:pPr indent="0" marL="0">
+              <a:buNone/>
+            </a:pPr>
             <a:r>
               <a:rPr lang="en-US" sz="2100" dirty="0">
                 <a:solidFill>
-                  <a:srgbClr val="17364A"/>
-                </a:solidFill>
-                <a:latin typeface="Aptos" pitchFamily="34" charset="0"/>
-                <a:ea typeface="Aptos" pitchFamily="34" charset="-122"/>
-                <a:cs typeface="Aptos" pitchFamily="34" charset="-120"/>
-              </a:rPr>
-              <a:t>This national-level module is intended for training and planning purposes.</a:t>
+                  <a:srgbClr val="003A63"/>
+                </a:solidFill>
+                <a:latin typeface="Aptos" pitchFamily="34" charset="0"/>
+                <a:ea typeface="Aptos" pitchFamily="34" charset="-122"/>
+                <a:cs typeface="Aptos" pitchFamily="34" charset="-120"/>
+              </a:rPr>
+              <a:t>• This national-level module is intended for training and planning purposes.</a:t>
             </a:r>
             <a:endParaRPr lang="en-US" sz="2100" dirty="0"/>
           </a:p>
           <a:p>
+            <a:pPr indent="0" marL="0">
+              <a:buNone/>
+            </a:pPr>
             <a:r>
               <a:rPr lang="en-US" sz="2100" dirty="0">
                 <a:solidFill>
-                  <a:srgbClr val="17364A"/>
-                </a:solidFill>
-                <a:latin typeface="Aptos" pitchFamily="34" charset="0"/>
-                <a:ea typeface="Aptos" pitchFamily="34" charset="-122"/>
-                <a:cs typeface="Aptos" pitchFamily="34" charset="-120"/>
-              </a:rPr>
-              <a:t>It does not replace legal, privacy, procurement, civil rights, records, or agency policy review.</a:t>
+                  <a:srgbClr val="003A63"/>
+                </a:solidFill>
+                <a:latin typeface="Aptos" pitchFamily="34" charset="0"/>
+                <a:ea typeface="Aptos" pitchFamily="34" charset="-122"/>
+                <a:cs typeface="Aptos" pitchFamily="34" charset="-120"/>
+              </a:rPr>
+              <a:t>• It does not replace legal, privacy, procurement, civil rights, records, or agency policy review.</a:t>
             </a:r>
             <a:endParaRPr lang="en-US" sz="2100" dirty="0"/>
           </a:p>
           <a:p>
+            <a:pPr indent="0" marL="0">
+              <a:buNone/>
+            </a:pPr>
             <a:r>
               <a:rPr lang="en-US" sz="2100" dirty="0">
                 <a:solidFill>
-                  <a:srgbClr val="17364A"/>
-                </a:solidFill>
-                <a:latin typeface="Aptos" pitchFamily="34" charset="0"/>
-                <a:ea typeface="Aptos" pitchFamily="34" charset="-122"/>
-                <a:cs typeface="Aptos" pitchFamily="34" charset="-120"/>
-              </a:rPr>
-              <a:t>Learners should confirm applicable requirements in their own jurisdiction and organization before.</a:t>
+                  <a:srgbClr val="003A63"/>
+                </a:solidFill>
+                <a:latin typeface="Aptos" pitchFamily="34" charset="0"/>
+                <a:ea typeface="Aptos" pitchFamily="34" charset="-122"/>
+                <a:cs typeface="Aptos" pitchFamily="34" charset="-120"/>
+              </a:rPr>
+              <a:t>• Learners should confirm applicable requirements in their own jurisdiction and organization.</a:t>
             </a:r>
             <a:endParaRPr lang="en-US" sz="2100" dirty="0"/>
           </a:p>
@@ -16279,17 +16569,17 @@
         </p:nvSpPr>
         <p:spPr>
           <a:xfrm>
-            <a:off x="7799832" y="1828800"/>
-            <a:ext cx="3145536" cy="685800"/>
-          </a:xfrm>
-          <a:prstGeom prst="rect">
-            <a:avLst/>
-          </a:prstGeom>
-          <a:noFill/>
-          <a:ln/>
-        </p:spPr>
-        <p:txBody>
-          <a:bodyPr wrap="square" lIns="0" tIns="0" rIns="0" bIns="0" rtlCol="0" anchor="t">
+            <a:off x="7799832" y="1801368"/>
+            <a:ext cx="3145536" cy="758952"/>
+          </a:xfrm>
+          <a:prstGeom prst="rect">
+            <a:avLst/>
+          </a:prstGeom>
+          <a:noFill/>
+          <a:ln/>
+        </p:spPr>
+        <p:txBody>
+          <a:bodyPr wrap="square" lIns="254" tIns="254" rIns="254" bIns="254" rtlCol="0" anchor="t">
             <a:normAutofit/>
           </a:bodyPr>
           <a:lstStyle/>
@@ -16298,7 +16588,7 @@
               <a:buNone/>
             </a:pPr>
             <a:r>
-              <a:rPr lang="en-US" sz="1550" dirty="0">
+              <a:rPr lang="en-US" sz="1320" dirty="0">
                 <a:solidFill>
                   <a:srgbClr val="17364A"/>
                 </a:solidFill>
@@ -16308,7 +16598,7 @@
               </a:rPr>
               <a:t>This national-level module is intended for training and planning purposes.</a:t>
             </a:r>
-            <a:endParaRPr lang="en-US" sz="1550" dirty="0"/>
+            <a:endParaRPr lang="en-US" sz="1320" dirty="0"/>
           </a:p>
         </p:txBody>
       </p:sp>
@@ -16396,13 +16686,16 @@
           <a:ln/>
         </p:spPr>
         <p:txBody>
-          <a:bodyPr wrap="square" lIns="254" tIns="254" rIns="254" bIns="254" rtlCol="0" anchor="t">
+          <a:bodyPr wrap="square" lIns="508" tIns="508" rIns="508" bIns="508" rtlCol="0" anchor="t">
             <a:normAutofit/>
           </a:bodyPr>
           <a:lstStyle/>
           <a:p>
-            <a:r>
-              <a:rPr lang="en-US" sz="1380" dirty="0">
+            <a:pPr indent="0" marL="0">
+              <a:buNone/>
+            </a:pPr>
+            <a:r>
+              <a:rPr lang="en-US" sz="1220" dirty="0">
                 <a:solidFill>
                   <a:srgbClr val="17364A"/>
                 </a:solidFill>
@@ -16410,13 +16703,16 @@
                 <a:ea typeface="Aptos" pitchFamily="34" charset="-122"/>
                 <a:cs typeface="Aptos" pitchFamily="34" charset="-120"/>
               </a:rPr>
-              <a:t>This national-level module is intended for training and planning purposes.</a:t>
-            </a:r>
-            <a:endParaRPr lang="en-US" sz="1380" dirty="0"/>
-          </a:p>
-          <a:p>
-            <a:r>
-              <a:rPr lang="en-US" sz="1380" dirty="0">
+              <a:t>This national-level module is intended for training and planning.</a:t>
+            </a:r>
+            <a:endParaRPr lang="en-US" sz="1220" dirty="0"/>
+          </a:p>
+          <a:p>
+            <a:pPr indent="0" marL="0">
+              <a:buNone/>
+            </a:pPr>
+            <a:r>
+              <a:rPr lang="en-US" sz="1220" dirty="0">
                 <a:solidFill>
                   <a:srgbClr val="17364A"/>
                 </a:solidFill>
@@ -16424,13 +16720,16 @@
                 <a:ea typeface="Aptos" pitchFamily="34" charset="-122"/>
                 <a:cs typeface="Aptos" pitchFamily="34" charset="-120"/>
               </a:rPr>
-              <a:t>It does not replace legal, privacy, procurement, civil rights, records, or agency policy.</a:t>
-            </a:r>
-            <a:endParaRPr lang="en-US" sz="1380" dirty="0"/>
-          </a:p>
-          <a:p>
-            <a:r>
-              <a:rPr lang="en-US" sz="1380" dirty="0">
+              <a:t>It does not replace legal, privacy, procurement, civil rights,.</a:t>
+            </a:r>
+            <a:endParaRPr lang="en-US" sz="1220" dirty="0"/>
+          </a:p>
+          <a:p>
+            <a:pPr indent="0" marL="0">
+              <a:buNone/>
+            </a:pPr>
+            <a:r>
+              <a:rPr lang="en-US" sz="1220" dirty="0">
                 <a:solidFill>
                   <a:srgbClr val="17364A"/>
                 </a:solidFill>
@@ -16438,9 +16737,9 @@
                 <a:ea typeface="Aptos" pitchFamily="34" charset="-122"/>
                 <a:cs typeface="Aptos" pitchFamily="34" charset="-120"/>
               </a:rPr>
-              <a:t>Learners should confirm applicable requirements in their own jurisdiction and organization.</a:t>
-            </a:r>
-            <a:endParaRPr lang="en-US" sz="1380" dirty="0"/>
+              <a:t>Learners should confirm applicable requirements in their own.</a:t>
+            </a:r>
+            <a:endParaRPr lang="en-US" sz="1220" dirty="0"/>
           </a:p>
         </p:txBody>
       </p:sp>
@@ -16518,17 +16817,17 @@
         </p:nvSpPr>
         <p:spPr>
           <a:xfrm>
-            <a:off x="7799832" y="5001768"/>
-            <a:ext cx="3145536" cy="502920"/>
-          </a:xfrm>
-          <a:prstGeom prst="rect">
-            <a:avLst/>
-          </a:prstGeom>
-          <a:noFill/>
-          <a:ln/>
-        </p:spPr>
-        <p:txBody>
-          <a:bodyPr wrap="square" lIns="0" tIns="0" rIns="0" bIns="0" rtlCol="0" anchor="t">
+            <a:off x="7799832" y="4974336"/>
+            <a:ext cx="3145536" cy="576072"/>
+          </a:xfrm>
+          <a:prstGeom prst="rect">
+            <a:avLst/>
+          </a:prstGeom>
+          <a:noFill/>
+          <a:ln/>
+        </p:spPr>
+        <p:txBody>
+          <a:bodyPr wrap="square" lIns="254" tIns="254" rIns="254" bIns="254" rtlCol="0" anchor="t">
             <a:normAutofit/>
           </a:bodyPr>
           <a:lstStyle/>
@@ -16537,7 +16836,7 @@
               <a:buNone/>
             </a:pPr>
             <a:r>
-              <a:rPr lang="en-US" sz="1550" dirty="0">
+              <a:rPr lang="en-US" sz="1320" dirty="0">
                 <a:solidFill>
                   <a:srgbClr val="17364A"/>
                 </a:solidFill>
@@ -16545,9 +16844,9 @@
                 <a:ea typeface="Aptos" pitchFamily="34" charset="-122"/>
                 <a:cs typeface="Aptos" pitchFamily="34" charset="-120"/>
               </a:rPr>
-              <a:t>Translate this concept into clear decision rights, review steps, documentation expectations, and escalation paths before an AI-supported workflow is approved.</a:t>
-            </a:r>
-            <a:endParaRPr lang="en-US" sz="1550" dirty="0"/>
+              <a:t>Translate this concept into clear decision rights, review steps, documentation expectations, and escalation paths before.</a:t>
+            </a:r>
+            <a:endParaRPr lang="en-US" sz="1320" dirty="0"/>
           </a:p>
         </p:txBody>
       </p:sp>
@@ -16848,49 +17147,58 @@
           <a:ln/>
         </p:spPr>
         <p:txBody>
-          <a:bodyPr wrap="square" lIns="635" tIns="635" rIns="635" bIns="635" rtlCol="0" anchor="t">
+          <a:bodyPr wrap="square" lIns="1016" tIns="1016" rIns="1016" bIns="1016" rtlCol="0" anchor="t">
             <a:normAutofit/>
           </a:bodyPr>
           <a:lstStyle/>
           <a:p>
+            <a:pPr indent="0" marL="0">
+              <a:buNone/>
+            </a:pPr>
             <a:r>
               <a:rPr lang="en-US" sz="2100" dirty="0">
                 <a:solidFill>
-                  <a:srgbClr val="17364A"/>
-                </a:solidFill>
-                <a:latin typeface="Aptos" pitchFamily="34" charset="0"/>
-                <a:ea typeface="Aptos" pitchFamily="34" charset="-122"/>
-                <a:cs typeface="Aptos" pitchFamily="34" charset="-120"/>
-              </a:rPr>
-              <a:t>eCR matters for AI because it brings structured, timely, clinically relevant information into public.</a:t>
+                  <a:srgbClr val="003A63"/>
+                </a:solidFill>
+                <a:latin typeface="Aptos" pitchFamily="34" charset="0"/>
+                <a:ea typeface="Aptos" pitchFamily="34" charset="-122"/>
+                <a:cs typeface="Aptos" pitchFamily="34" charset="-120"/>
+              </a:rPr>
+              <a:t>• eCR matters for AI because it brings structured, timely, clinically relevant information into.</a:t>
             </a:r>
             <a:endParaRPr lang="en-US" sz="2100" dirty="0"/>
           </a:p>
           <a:p>
+            <a:pPr indent="0" marL="0">
+              <a:buNone/>
+            </a:pPr>
             <a:r>
               <a:rPr lang="en-US" sz="2100" dirty="0">
                 <a:solidFill>
-                  <a:srgbClr val="17364A"/>
-                </a:solidFill>
-                <a:latin typeface="Aptos" pitchFamily="34" charset="0"/>
-                <a:ea typeface="Aptos" pitchFamily="34" charset="-122"/>
-                <a:cs typeface="Aptos" pitchFamily="34" charset="-120"/>
-              </a:rPr>
-              <a:t>It can reduce manual reporting burden and improve the speed of public health awareness.</a:t>
+                  <a:srgbClr val="003A63"/>
+                </a:solidFill>
+                <a:latin typeface="Aptos" pitchFamily="34" charset="0"/>
+                <a:ea typeface="Aptos" pitchFamily="34" charset="-122"/>
+                <a:cs typeface="Aptos" pitchFamily="34" charset="-120"/>
+              </a:rPr>
+              <a:t>• It can reduce manual reporting burden and improve the speed of public health awareness.</a:t>
             </a:r>
             <a:endParaRPr lang="en-US" sz="2100" dirty="0"/>
           </a:p>
           <a:p>
+            <a:pPr indent="0" marL="0">
+              <a:buNone/>
+            </a:pPr>
             <a:r>
               <a:rPr lang="en-US" sz="2100" dirty="0">
                 <a:solidFill>
-                  <a:srgbClr val="17364A"/>
-                </a:solidFill>
-                <a:latin typeface="Aptos" pitchFamily="34" charset="0"/>
-                <a:ea typeface="Aptos" pitchFamily="34" charset="-122"/>
-                <a:cs typeface="Aptos" pitchFamily="34" charset="-120"/>
-              </a:rPr>
-              <a:t>However, eCR is not simply a data feed.</a:t>
+                  <a:srgbClr val="003A63"/>
+                </a:solidFill>
+                <a:latin typeface="Aptos" pitchFamily="34" charset="0"/>
+                <a:ea typeface="Aptos" pitchFamily="34" charset="-122"/>
+                <a:cs typeface="Aptos" pitchFamily="34" charset="-120"/>
+              </a:rPr>
+              <a:t>• However, eCR is not simply a data feed.</a:t>
             </a:r>
             <a:endParaRPr lang="en-US" sz="2100" dirty="0"/>
           </a:p>
@@ -16970,17 +17278,17 @@
         </p:nvSpPr>
         <p:spPr>
           <a:xfrm>
-            <a:off x="7799832" y="1828800"/>
-            <a:ext cx="3145536" cy="685800"/>
-          </a:xfrm>
-          <a:prstGeom prst="rect">
-            <a:avLst/>
-          </a:prstGeom>
-          <a:noFill/>
-          <a:ln/>
-        </p:spPr>
-        <p:txBody>
-          <a:bodyPr wrap="square" lIns="0" tIns="0" rIns="0" bIns="0" rtlCol="0" anchor="t">
+            <a:off x="7799832" y="1801368"/>
+            <a:ext cx="3145536" cy="758952"/>
+          </a:xfrm>
+          <a:prstGeom prst="rect">
+            <a:avLst/>
+          </a:prstGeom>
+          <a:noFill/>
+          <a:ln/>
+        </p:spPr>
+        <p:txBody>
+          <a:bodyPr wrap="square" lIns="254" tIns="254" rIns="254" bIns="254" rtlCol="0" anchor="t">
             <a:normAutofit/>
           </a:bodyPr>
           <a:lstStyle/>
@@ -16989,7 +17297,7 @@
               <a:buNone/>
             </a:pPr>
             <a:r>
-              <a:rPr lang="en-US" sz="1550" dirty="0">
+              <a:rPr lang="en-US" sz="1320" dirty="0">
                 <a:solidFill>
                   <a:srgbClr val="17364A"/>
                 </a:solidFill>
@@ -16999,7 +17307,7 @@
               </a:rPr>
               <a:t>eCR matters for AI because it brings structured, timely, clinically relevant information into public.</a:t>
             </a:r>
-            <a:endParaRPr lang="en-US" sz="1550" dirty="0"/>
+            <a:endParaRPr lang="en-US" sz="1320" dirty="0"/>
           </a:p>
         </p:txBody>
       </p:sp>
@@ -17087,13 +17395,16 @@
           <a:ln/>
         </p:spPr>
         <p:txBody>
-          <a:bodyPr wrap="square" lIns="254" tIns="254" rIns="254" bIns="254" rtlCol="0" anchor="t">
+          <a:bodyPr wrap="square" lIns="508" tIns="508" rIns="508" bIns="508" rtlCol="0" anchor="t">
             <a:normAutofit/>
           </a:bodyPr>
           <a:lstStyle/>
           <a:p>
-            <a:r>
-              <a:rPr lang="en-US" sz="1380" dirty="0">
+            <a:pPr indent="0" marL="0">
+              <a:buNone/>
+            </a:pPr>
+            <a:r>
+              <a:rPr lang="en-US" sz="1220" dirty="0">
                 <a:solidFill>
                   <a:srgbClr val="17364A"/>
                 </a:solidFill>
@@ -17101,13 +17412,16 @@
                 <a:ea typeface="Aptos" pitchFamily="34" charset="-122"/>
                 <a:cs typeface="Aptos" pitchFamily="34" charset="-120"/>
               </a:rPr>
-              <a:t>eCR matters for AI because it brings structured, timely, clinically relevant information.</a:t>
-            </a:r>
-            <a:endParaRPr lang="en-US" sz="1380" dirty="0"/>
-          </a:p>
-          <a:p>
-            <a:r>
-              <a:rPr lang="en-US" sz="1380" dirty="0">
+              <a:t>eCR matters for AI because it brings structured, timely,.</a:t>
+            </a:r>
+            <a:endParaRPr lang="en-US" sz="1220" dirty="0"/>
+          </a:p>
+          <a:p>
+            <a:pPr indent="0" marL="0">
+              <a:buNone/>
+            </a:pPr>
+            <a:r>
+              <a:rPr lang="en-US" sz="1220" dirty="0">
                 <a:solidFill>
                   <a:srgbClr val="17364A"/>
                 </a:solidFill>
@@ -17115,13 +17429,16 @@
                 <a:ea typeface="Aptos" pitchFamily="34" charset="-122"/>
                 <a:cs typeface="Aptos" pitchFamily="34" charset="-120"/>
               </a:rPr>
-              <a:t>It includes trigger logic, routing, standards, jurisdictional rules, provider workflows,.</a:t>
-            </a:r>
-            <a:endParaRPr lang="en-US" sz="1380" dirty="0"/>
-          </a:p>
-          <a:p>
-            <a:r>
-              <a:rPr lang="en-US" sz="1380" dirty="0">
+              <a:t>It includes trigger logic, routing, standards, jurisdictional.</a:t>
+            </a:r>
+            <a:endParaRPr lang="en-US" sz="1220" dirty="0"/>
+          </a:p>
+          <a:p>
+            <a:pPr indent="0" marL="0">
+              <a:buNone/>
+            </a:pPr>
+            <a:r>
+              <a:rPr lang="en-US" sz="1220" dirty="0">
                 <a:solidFill>
                   <a:srgbClr val="17364A"/>
                 </a:solidFill>
@@ -17129,9 +17446,9 @@
                 <a:ea typeface="Aptos" pitchFamily="34" charset="-122"/>
                 <a:cs typeface="Aptos" pitchFamily="34" charset="-120"/>
               </a:rPr>
-              <a:t>AI may support eCR by summarizing incoming reports, identifying missing information,.</a:t>
-            </a:r>
-            <a:endParaRPr lang="en-US" sz="1380" dirty="0"/>
+              <a:t>AI may support eCR by summarizing incoming reports, identifying.</a:t>
+            </a:r>
+            <a:endParaRPr lang="en-US" sz="1220" dirty="0"/>
           </a:p>
         </p:txBody>
       </p:sp>
@@ -17209,17 +17526,17 @@
         </p:nvSpPr>
         <p:spPr>
           <a:xfrm>
-            <a:off x="7799832" y="5001768"/>
-            <a:ext cx="3145536" cy="502920"/>
-          </a:xfrm>
-          <a:prstGeom prst="rect">
-            <a:avLst/>
-          </a:prstGeom>
-          <a:noFill/>
-          <a:ln/>
-        </p:spPr>
-        <p:txBody>
-          <a:bodyPr wrap="square" lIns="0" tIns="0" rIns="0" bIns="0" rtlCol="0" anchor="t">
+            <a:off x="7799832" y="4974336"/>
+            <a:ext cx="3145536" cy="576072"/>
+          </a:xfrm>
+          <a:prstGeom prst="rect">
+            <a:avLst/>
+          </a:prstGeom>
+          <a:noFill/>
+          <a:ln/>
+        </p:spPr>
+        <p:txBody>
+          <a:bodyPr wrap="square" lIns="254" tIns="254" rIns="254" bIns="254" rtlCol="0" anchor="t">
             <a:normAutofit/>
           </a:bodyPr>
           <a:lstStyle/>
@@ -17228,7 +17545,7 @@
               <a:buNone/>
             </a:pPr>
             <a:r>
-              <a:rPr lang="en-US" sz="1550" dirty="0">
+              <a:rPr lang="en-US" sz="1320" dirty="0">
                 <a:solidFill>
                   <a:srgbClr val="17364A"/>
                 </a:solidFill>
@@ -17236,9 +17553,9 @@
                 <a:ea typeface="Aptos" pitchFamily="34" charset="-122"/>
                 <a:cs typeface="Aptos" pitchFamily="34" charset="-120"/>
               </a:rPr>
-              <a:t>Use the concept to clarify workflow changes, dependencies, staffing, procurement requirements, training needs, and implementation checkpoints.</a:t>
-            </a:r>
-            <a:endParaRPr lang="en-US" sz="1550" dirty="0"/>
+              <a:t>Use the concept to clarify workflow changes, dependencies, staffing, procurement requirements, training needs, and.</a:t>
+            </a:r>
+            <a:endParaRPr lang="en-US" sz="1320" dirty="0"/>
           </a:p>
         </p:txBody>
       </p:sp>
@@ -17539,49 +17856,58 @@
           <a:ln/>
         </p:spPr>
         <p:txBody>
-          <a:bodyPr wrap="square" lIns="635" tIns="635" rIns="635" bIns="635" rtlCol="0" anchor="t">
+          <a:bodyPr wrap="square" lIns="1016" tIns="1016" rIns="1016" bIns="1016" rtlCol="0" anchor="t">
             <a:normAutofit/>
           </a:bodyPr>
           <a:lstStyle/>
           <a:p>
+            <a:pPr indent="0" marL="0">
+              <a:buNone/>
+            </a:pPr>
             <a:r>
               <a:rPr lang="en-US" sz="2100" dirty="0">
                 <a:solidFill>
-                  <a:srgbClr val="17364A"/>
-                </a:solidFill>
-                <a:latin typeface="Aptos" pitchFamily="34" charset="0"/>
-                <a:ea typeface="Aptos" pitchFamily="34" charset="-122"/>
-                <a:cs typeface="Aptos" pitchFamily="34" charset="-120"/>
-              </a:rPr>
-              <a:t>Electronic case reporting.</a:t>
+                  <a:srgbClr val="003A63"/>
+                </a:solidFill>
+                <a:latin typeface="Aptos" pitchFamily="34" charset="0"/>
+                <a:ea typeface="Aptos" pitchFamily="34" charset="-122"/>
+                <a:cs typeface="Aptos" pitchFamily="34" charset="-120"/>
+              </a:rPr>
+              <a:t>• Electronic case reporting.</a:t>
             </a:r>
             <a:endParaRPr lang="en-US" sz="2100" dirty="0"/>
           </a:p>
           <a:p>
+            <a:pPr indent="0" marL="0">
+              <a:buNone/>
+            </a:pPr>
             <a:r>
               <a:rPr lang="en-US" sz="2100" dirty="0">
                 <a:solidFill>
-                  <a:srgbClr val="17364A"/>
-                </a:solidFill>
-                <a:latin typeface="Aptos" pitchFamily="34" charset="0"/>
-                <a:ea typeface="Aptos" pitchFamily="34" charset="-122"/>
-                <a:cs typeface="Aptos" pitchFamily="34" charset="-120"/>
-              </a:rPr>
-              <a:t>Electronic case reporting is the automated exchange of case report information from healthcare to.</a:t>
+                  <a:srgbClr val="003A63"/>
+                </a:solidFill>
+                <a:latin typeface="Aptos" pitchFamily="34" charset="0"/>
+                <a:ea typeface="Aptos" pitchFamily="34" charset="-122"/>
+                <a:cs typeface="Aptos" pitchFamily="34" charset="-120"/>
+              </a:rPr>
+              <a:t>• Electronic case reporting is the automated exchange of case report information from healthcare.</a:t>
             </a:r>
             <a:endParaRPr lang="en-US" sz="2100" dirty="0"/>
           </a:p>
           <a:p>
+            <a:pPr indent="0" marL="0">
+              <a:buNone/>
+            </a:pPr>
             <a:r>
               <a:rPr lang="en-US" sz="2100" dirty="0">
                 <a:solidFill>
-                  <a:srgbClr val="17364A"/>
-                </a:solidFill>
-                <a:latin typeface="Aptos" pitchFamily="34" charset="0"/>
-                <a:ea typeface="Aptos" pitchFamily="34" charset="-122"/>
-                <a:cs typeface="Aptos" pitchFamily="34" charset="-120"/>
-              </a:rPr>
-              <a:t>It is designed to improve timeliness, completeness, and consistency in reportable condition workflows.</a:t>
+                  <a:srgbClr val="003A63"/>
+                </a:solidFill>
+                <a:latin typeface="Aptos" pitchFamily="34" charset="0"/>
+                <a:ea typeface="Aptos" pitchFamily="34" charset="-122"/>
+                <a:cs typeface="Aptos" pitchFamily="34" charset="-120"/>
+              </a:rPr>
+              <a:t>• It is designed to improve timeliness, completeness, and consistency in reportable condition.</a:t>
             </a:r>
             <a:endParaRPr lang="en-US" sz="2100" dirty="0"/>
           </a:p>
@@ -17661,17 +17987,17 @@
         </p:nvSpPr>
         <p:spPr>
           <a:xfrm>
-            <a:off x="7799832" y="1828800"/>
-            <a:ext cx="3145536" cy="685800"/>
-          </a:xfrm>
-          <a:prstGeom prst="rect">
-            <a:avLst/>
-          </a:prstGeom>
-          <a:noFill/>
-          <a:ln/>
-        </p:spPr>
-        <p:txBody>
-          <a:bodyPr wrap="square" lIns="0" tIns="0" rIns="0" bIns="0" rtlCol="0" anchor="t">
+            <a:off x="7799832" y="1801368"/>
+            <a:ext cx="3145536" cy="758952"/>
+          </a:xfrm>
+          <a:prstGeom prst="rect">
+            <a:avLst/>
+          </a:prstGeom>
+          <a:noFill/>
+          <a:ln/>
+        </p:spPr>
+        <p:txBody>
+          <a:bodyPr wrap="square" lIns="254" tIns="254" rIns="254" bIns="254" rtlCol="0" anchor="t">
             <a:normAutofit/>
           </a:bodyPr>
           <a:lstStyle/>
@@ -17680,7 +18006,7 @@
               <a:buNone/>
             </a:pPr>
             <a:r>
-              <a:rPr lang="en-US" sz="1550" dirty="0">
+              <a:rPr lang="en-US" sz="1320" dirty="0">
                 <a:solidFill>
                   <a:srgbClr val="17364A"/>
                 </a:solidFill>
@@ -17690,7 +18016,7 @@
               </a:rPr>
               <a:t>Electronic case reporting.</a:t>
             </a:r>
-            <a:endParaRPr lang="en-US" sz="1550" dirty="0"/>
+            <a:endParaRPr lang="en-US" sz="1320" dirty="0"/>
           </a:p>
         </p:txBody>
       </p:sp>
@@ -17778,13 +18104,16 @@
           <a:ln/>
         </p:spPr>
         <p:txBody>
-          <a:bodyPr wrap="square" lIns="254" tIns="254" rIns="254" bIns="254" rtlCol="0" anchor="t">
+          <a:bodyPr wrap="square" lIns="508" tIns="508" rIns="508" bIns="508" rtlCol="0" anchor="t">
             <a:normAutofit/>
           </a:bodyPr>
           <a:lstStyle/>
           <a:p>
-            <a:r>
-              <a:rPr lang="en-US" sz="1380" dirty="0">
+            <a:pPr indent="0" marL="0">
+              <a:buNone/>
+            </a:pPr>
+            <a:r>
+              <a:rPr lang="en-US" sz="1220" dirty="0">
                 <a:solidFill>
                   <a:srgbClr val="17364A"/>
                 </a:solidFill>
@@ -17792,13 +18121,16 @@
                 <a:ea typeface="Aptos" pitchFamily="34" charset="-122"/>
                 <a:cs typeface="Aptos" pitchFamily="34" charset="-120"/>
               </a:rPr>
-              <a:t>Electronic case reporting is the automated exchange of case report information from.</a:t>
-            </a:r>
-            <a:endParaRPr lang="en-US" sz="1380" dirty="0"/>
-          </a:p>
-          <a:p>
-            <a:r>
-              <a:rPr lang="en-US" sz="1380" dirty="0">
+              <a:t>Electronic case reporting is the automated exchange of case report.</a:t>
+            </a:r>
+            <a:endParaRPr lang="en-US" sz="1220" dirty="0"/>
+          </a:p>
+          <a:p>
+            <a:pPr indent="0" marL="0">
+              <a:buNone/>
+            </a:pPr>
+            <a:r>
+              <a:rPr lang="en-US" sz="1220" dirty="0">
                 <a:solidFill>
                   <a:srgbClr val="17364A"/>
                 </a:solidFill>
@@ -17808,11 +18140,14 @@
               </a:rPr>
               <a:t>eICR.</a:t>
             </a:r>
-            <a:endParaRPr lang="en-US" sz="1380" dirty="0"/>
-          </a:p>
-          <a:p>
-            <a:r>
-              <a:rPr lang="en-US" sz="1380" dirty="0">
+            <a:endParaRPr lang="en-US" sz="1220" dirty="0"/>
+          </a:p>
+          <a:p>
+            <a:pPr indent="0" marL="0">
+              <a:buNone/>
+            </a:pPr>
+            <a:r>
+              <a:rPr lang="en-US" sz="1220" dirty="0">
                 <a:solidFill>
                   <a:srgbClr val="17364A"/>
                 </a:solidFill>
@@ -17820,9 +18155,9 @@
                 <a:ea typeface="Aptos" pitchFamily="34" charset="-122"/>
                 <a:cs typeface="Aptos" pitchFamily="34" charset="-120"/>
               </a:rPr>
-              <a:t>The electronic initial case report is the structured report sent from healthcare to public.</a:t>
-            </a:r>
-            <a:endParaRPr lang="en-US" sz="1380" dirty="0"/>
+              <a:t>The electronic initial case report is the structured report sent.</a:t>
+            </a:r>
+            <a:endParaRPr lang="en-US" sz="1220" dirty="0"/>
           </a:p>
         </p:txBody>
       </p:sp>
@@ -17900,17 +18235,17 @@
         </p:nvSpPr>
         <p:spPr>
           <a:xfrm>
-            <a:off x="7799832" y="5001768"/>
-            <a:ext cx="3145536" cy="502920"/>
-          </a:xfrm>
-          <a:prstGeom prst="rect">
-            <a:avLst/>
-          </a:prstGeom>
-          <a:noFill/>
-          <a:ln/>
-        </p:spPr>
-        <p:txBody>
-          <a:bodyPr wrap="square" lIns="0" tIns="0" rIns="0" bIns="0" rtlCol="0" anchor="t">
+            <a:off x="7799832" y="4974336"/>
+            <a:ext cx="3145536" cy="576072"/>
+          </a:xfrm>
+          <a:prstGeom prst="rect">
+            <a:avLst/>
+          </a:prstGeom>
+          <a:noFill/>
+          <a:ln/>
+        </p:spPr>
+        <p:txBody>
+          <a:bodyPr wrap="square" lIns="254" tIns="254" rIns="254" bIns="254" rtlCol="0" anchor="t">
             <a:normAutofit/>
           </a:bodyPr>
           <a:lstStyle/>
@@ -17919,7 +18254,7 @@
               <a:buNone/>
             </a:pPr>
             <a:r>
-              <a:rPr lang="en-US" sz="1550" dirty="0">
+              <a:rPr lang="en-US" sz="1320" dirty="0">
                 <a:solidFill>
                   <a:srgbClr val="17364A"/>
                 </a:solidFill>
@@ -17927,9 +18262,9 @@
                 <a:ea typeface="Aptos" pitchFamily="34" charset="-122"/>
                 <a:cs typeface="Aptos" pitchFamily="34" charset="-120"/>
               </a:rPr>
-              <a:t>Use the concept to clarify workflow changes, dependencies, staffing, procurement requirements, training needs, and implementation checkpoints.</a:t>
-            </a:r>
-            <a:endParaRPr lang="en-US" sz="1550" dirty="0"/>
+              <a:t>Use the concept to clarify workflow changes, dependencies, staffing, procurement requirements, training needs, and.</a:t>
+            </a:r>
+            <a:endParaRPr lang="en-US" sz="1320" dirty="0"/>
           </a:p>
         </p:txBody>
       </p:sp>

--- a/downloads/presentations/modules/arc-230.pptx
+++ b/downloads/presentations/modules/arc-230.pptx
@@ -3507,11 +3507,11 @@
         <p:spPr>
           <a:xfrm>
             <a:off x="7635240" y="1325880"/>
-            <a:ext cx="3474720" cy="1325880"/>
+            <a:ext cx="3474720" cy="1207008"/>
           </a:xfrm>
           <a:prstGeom prst="roundRect">
             <a:avLst>
-              <a:gd name="adj" fmla="val 8276"/>
+              <a:gd name="adj" fmla="val 9091"/>
             </a:avLst>
           </a:prstGeom>
           <a:solidFill>
@@ -3573,7 +3573,7 @@
         <p:spPr>
           <a:xfrm>
             <a:off x="7799832" y="1801368"/>
-            <a:ext cx="3145536" cy="758952"/>
+            <a:ext cx="3145536" cy="640080"/>
           </a:xfrm>
           <a:prstGeom prst="rect">
             <a:avLst/>
@@ -3613,12 +3613,12 @@
         </p:nvSpPr>
         <p:spPr>
           <a:xfrm>
-            <a:off x="7635240" y="2788920"/>
-            <a:ext cx="3474720" cy="1536192"/>
+            <a:off x="7635240" y="2670048"/>
+            <a:ext cx="3474720" cy="1377086"/>
           </a:xfrm>
           <a:prstGeom prst="roundRect">
             <a:avLst>
-              <a:gd name="adj" fmla="val 7143"/>
+              <a:gd name="adj" fmla="val 7968"/>
             </a:avLst>
           </a:prstGeom>
           <a:solidFill>
@@ -3640,7 +3640,7 @@
         </p:nvSpPr>
         <p:spPr>
           <a:xfrm>
-            <a:off x="7799832" y="2935224"/>
+            <a:off x="7799832" y="2816352"/>
             <a:ext cx="3145536" cy="256032"/>
           </a:xfrm>
           <a:prstGeom prst="rect">
@@ -3679,8 +3679,8 @@
         </p:nvSpPr>
         <p:spPr>
           <a:xfrm>
-            <a:off x="7818120" y="3300984"/>
-            <a:ext cx="3090672" cy="877824"/>
+            <a:off x="7818120" y="3182112"/>
+            <a:ext cx="3090672" cy="718718"/>
           </a:xfrm>
           <a:prstGeom prst="rect">
             <a:avLst/>
@@ -3737,12 +3737,12 @@
         </p:nvSpPr>
         <p:spPr>
           <a:xfrm>
-            <a:off x="7635240" y="4498848"/>
-            <a:ext cx="3474720" cy="1143000"/>
+            <a:off x="7635240" y="4184294"/>
+            <a:ext cx="3474720" cy="1466698"/>
           </a:xfrm>
           <a:prstGeom prst="roundRect">
             <a:avLst>
-              <a:gd name="adj" fmla="val 9600"/>
+              <a:gd name="adj" fmla="val 7481"/>
             </a:avLst>
           </a:prstGeom>
           <a:solidFill>
@@ -3764,7 +3764,7 @@
         </p:nvSpPr>
         <p:spPr>
           <a:xfrm>
-            <a:off x="7799832" y="4645152"/>
+            <a:off x="7799832" y="4330598"/>
             <a:ext cx="3145536" cy="256032"/>
           </a:xfrm>
           <a:prstGeom prst="rect">
@@ -3803,8 +3803,8 @@
         </p:nvSpPr>
         <p:spPr>
           <a:xfrm>
-            <a:off x="7799832" y="4974336"/>
-            <a:ext cx="3145536" cy="576072"/>
+            <a:off x="7799832" y="4659782"/>
+            <a:ext cx="3145536" cy="899770"/>
           </a:xfrm>
           <a:prstGeom prst="rect">
             <a:avLst/>
@@ -3830,7 +3830,7 @@
                 <a:ea typeface="Aptos" pitchFamily="34" charset="-122"/>
                 <a:cs typeface="Aptos" pitchFamily="34" charset="-120"/>
               </a:rPr>
-              <a:t>Use the concept to clarify workflow changes, dependencies, staffing, procurement requirements, training needs, and.</a:t>
+              <a:t>Use the concept to clarify workflow changes, dependencies, staffing, procurement requirements, training needs, and implementation checkpoints.</a:t>
             </a:r>
             <a:endParaRPr lang="en-US" sz="1320" dirty="0"/>
           </a:p>
@@ -4199,11 +4199,11 @@
         <p:spPr>
           <a:xfrm>
             <a:off x="7635240" y="1325880"/>
-            <a:ext cx="3474720" cy="1325880"/>
+            <a:ext cx="3474720" cy="1207008"/>
           </a:xfrm>
           <a:prstGeom prst="roundRect">
             <a:avLst>
-              <a:gd name="adj" fmla="val 8276"/>
+              <a:gd name="adj" fmla="val 9091"/>
             </a:avLst>
           </a:prstGeom>
           <a:solidFill>
@@ -4265,7 +4265,7 @@
         <p:spPr>
           <a:xfrm>
             <a:off x="7799832" y="1801368"/>
-            <a:ext cx="3145536" cy="758952"/>
+            <a:ext cx="3145536" cy="640080"/>
           </a:xfrm>
           <a:prstGeom prst="rect">
             <a:avLst/>
@@ -4305,12 +4305,12 @@
         </p:nvSpPr>
         <p:spPr>
           <a:xfrm>
-            <a:off x="7635240" y="2788920"/>
-            <a:ext cx="3474720" cy="1536192"/>
+            <a:off x="7635240" y="2670048"/>
+            <a:ext cx="3474720" cy="1377086"/>
           </a:xfrm>
           <a:prstGeom prst="roundRect">
             <a:avLst>
-              <a:gd name="adj" fmla="val 7143"/>
+              <a:gd name="adj" fmla="val 7968"/>
             </a:avLst>
           </a:prstGeom>
           <a:solidFill>
@@ -4332,7 +4332,7 @@
         </p:nvSpPr>
         <p:spPr>
           <a:xfrm>
-            <a:off x="7799832" y="2935224"/>
+            <a:off x="7799832" y="2816352"/>
             <a:ext cx="3145536" cy="256032"/>
           </a:xfrm>
           <a:prstGeom prst="rect">
@@ -4371,8 +4371,8 @@
         </p:nvSpPr>
         <p:spPr>
           <a:xfrm>
-            <a:off x="7818120" y="3300984"/>
-            <a:ext cx="3090672" cy="877824"/>
+            <a:off x="7818120" y="3182112"/>
+            <a:ext cx="3090672" cy="718718"/>
           </a:xfrm>
           <a:prstGeom prst="rect">
             <a:avLst/>
@@ -4446,12 +4446,12 @@
         </p:nvSpPr>
         <p:spPr>
           <a:xfrm>
-            <a:off x="7635240" y="4498848"/>
-            <a:ext cx="3474720" cy="1143000"/>
+            <a:off x="7635240" y="4184294"/>
+            <a:ext cx="3474720" cy="1466698"/>
           </a:xfrm>
           <a:prstGeom prst="roundRect">
             <a:avLst>
-              <a:gd name="adj" fmla="val 9600"/>
+              <a:gd name="adj" fmla="val 7481"/>
             </a:avLst>
           </a:prstGeom>
           <a:solidFill>
@@ -4473,7 +4473,7 @@
         </p:nvSpPr>
         <p:spPr>
           <a:xfrm>
-            <a:off x="7799832" y="4645152"/>
+            <a:off x="7799832" y="4330598"/>
             <a:ext cx="3145536" cy="256032"/>
           </a:xfrm>
           <a:prstGeom prst="rect">
@@ -4512,8 +4512,8 @@
         </p:nvSpPr>
         <p:spPr>
           <a:xfrm>
-            <a:off x="7799832" y="4974336"/>
-            <a:ext cx="3145536" cy="576072"/>
+            <a:off x="7799832" y="4659782"/>
+            <a:ext cx="3145536" cy="899770"/>
           </a:xfrm>
           <a:prstGeom prst="rect">
             <a:avLst/>
@@ -4539,7 +4539,7 @@
                 <a:ea typeface="Aptos" pitchFamily="34" charset="-122"/>
                 <a:cs typeface="Aptos" pitchFamily="34" charset="-120"/>
               </a:rPr>
-              <a:t>Use the concept to clarify workflow changes, dependencies, staffing, procurement requirements, training needs, and.</a:t>
+              <a:t>Use the concept to clarify workflow changes, dependencies, staffing, procurement requirements, training needs, and implementation checkpoints.</a:t>
             </a:r>
             <a:endParaRPr lang="en-US" sz="1320" dirty="0"/>
           </a:p>
@@ -4908,11 +4908,11 @@
         <p:spPr>
           <a:xfrm>
             <a:off x="7635240" y="1325880"/>
-            <a:ext cx="3474720" cy="1325880"/>
+            <a:ext cx="3474720" cy="1207008"/>
           </a:xfrm>
           <a:prstGeom prst="roundRect">
             <a:avLst>
-              <a:gd name="adj" fmla="val 8276"/>
+              <a:gd name="adj" fmla="val 9091"/>
             </a:avLst>
           </a:prstGeom>
           <a:solidFill>
@@ -4974,7 +4974,7 @@
         <p:spPr>
           <a:xfrm>
             <a:off x="7799832" y="1801368"/>
-            <a:ext cx="3145536" cy="758952"/>
+            <a:ext cx="3145536" cy="640080"/>
           </a:xfrm>
           <a:prstGeom prst="rect">
             <a:avLst/>
@@ -5014,12 +5014,12 @@
         </p:nvSpPr>
         <p:spPr>
           <a:xfrm>
-            <a:off x="7635240" y="2788920"/>
-            <a:ext cx="3474720" cy="1536192"/>
+            <a:off x="7635240" y="2670048"/>
+            <a:ext cx="3474720" cy="1377086"/>
           </a:xfrm>
           <a:prstGeom prst="roundRect">
             <a:avLst>
-              <a:gd name="adj" fmla="val 7143"/>
+              <a:gd name="adj" fmla="val 7968"/>
             </a:avLst>
           </a:prstGeom>
           <a:solidFill>
@@ -5041,7 +5041,7 @@
         </p:nvSpPr>
         <p:spPr>
           <a:xfrm>
-            <a:off x="7799832" y="2935224"/>
+            <a:off x="7799832" y="2816352"/>
             <a:ext cx="3145536" cy="256032"/>
           </a:xfrm>
           <a:prstGeom prst="rect">
@@ -5080,8 +5080,8 @@
         </p:nvSpPr>
         <p:spPr>
           <a:xfrm>
-            <a:off x="7818120" y="3300984"/>
-            <a:ext cx="3090672" cy="877824"/>
+            <a:off x="7818120" y="3182112"/>
+            <a:ext cx="3090672" cy="718718"/>
           </a:xfrm>
           <a:prstGeom prst="rect">
             <a:avLst/>
@@ -5155,12 +5155,12 @@
         </p:nvSpPr>
         <p:spPr>
           <a:xfrm>
-            <a:off x="7635240" y="4498848"/>
-            <a:ext cx="3474720" cy="1143000"/>
+            <a:off x="7635240" y="4184294"/>
+            <a:ext cx="3474720" cy="1466698"/>
           </a:xfrm>
           <a:prstGeom prst="roundRect">
             <a:avLst>
-              <a:gd name="adj" fmla="val 9600"/>
+              <a:gd name="adj" fmla="val 7481"/>
             </a:avLst>
           </a:prstGeom>
           <a:solidFill>
@@ -5182,7 +5182,7 @@
         </p:nvSpPr>
         <p:spPr>
           <a:xfrm>
-            <a:off x="7799832" y="4645152"/>
+            <a:off x="7799832" y="4330598"/>
             <a:ext cx="3145536" cy="256032"/>
           </a:xfrm>
           <a:prstGeom prst="rect">
@@ -5221,8 +5221,8 @@
         </p:nvSpPr>
         <p:spPr>
           <a:xfrm>
-            <a:off x="7799832" y="4974336"/>
-            <a:ext cx="3145536" cy="576072"/>
+            <a:off x="7799832" y="4659782"/>
+            <a:ext cx="3145536" cy="899770"/>
           </a:xfrm>
           <a:prstGeom prst="rect">
             <a:avLst/>
@@ -5248,7 +5248,7 @@
                 <a:ea typeface="Aptos" pitchFamily="34" charset="-122"/>
                 <a:cs typeface="Aptos" pitchFamily="34" charset="-120"/>
               </a:rPr>
-              <a:t>Use the concept to clarify workflow changes, dependencies, staffing, procurement requirements, training needs, and.</a:t>
+              <a:t>Use the concept to clarify workflow changes, dependencies, staffing, procurement requirements, training needs, and implementation checkpoints.</a:t>
             </a:r>
             <a:endParaRPr lang="en-US" sz="1320" dirty="0"/>
           </a:p>
@@ -5617,11 +5617,11 @@
         <p:spPr>
           <a:xfrm>
             <a:off x="7635240" y="1325880"/>
-            <a:ext cx="3474720" cy="1325880"/>
+            <a:ext cx="3474720" cy="1207008"/>
           </a:xfrm>
           <a:prstGeom prst="roundRect">
             <a:avLst>
-              <a:gd name="adj" fmla="val 8276"/>
+              <a:gd name="adj" fmla="val 9091"/>
             </a:avLst>
           </a:prstGeom>
           <a:solidFill>
@@ -5683,7 +5683,7 @@
         <p:spPr>
           <a:xfrm>
             <a:off x="7799832" y="1801368"/>
-            <a:ext cx="3145536" cy="758952"/>
+            <a:ext cx="3145536" cy="640080"/>
           </a:xfrm>
           <a:prstGeom prst="rect">
             <a:avLst/>
@@ -5723,7 +5723,7 @@
         </p:nvSpPr>
         <p:spPr>
           <a:xfrm>
-            <a:off x="7635240" y="2788920"/>
+            <a:off x="7635240" y="2670048"/>
             <a:ext cx="3474720" cy="1536192"/>
           </a:xfrm>
           <a:prstGeom prst="roundRect">
@@ -5750,7 +5750,7 @@
         </p:nvSpPr>
         <p:spPr>
           <a:xfrm>
-            <a:off x="7799832" y="2935224"/>
+            <a:off x="7799832" y="2816352"/>
             <a:ext cx="3145536" cy="256032"/>
           </a:xfrm>
           <a:prstGeom prst="rect">
@@ -5789,7 +5789,7 @@
         </p:nvSpPr>
         <p:spPr>
           <a:xfrm>
-            <a:off x="7818120" y="3300984"/>
+            <a:off x="7818120" y="3182112"/>
             <a:ext cx="3090672" cy="877824"/>
           </a:xfrm>
           <a:prstGeom prst="rect">
@@ -5864,12 +5864,12 @@
         </p:nvSpPr>
         <p:spPr>
           <a:xfrm>
-            <a:off x="7635240" y="4498848"/>
-            <a:ext cx="3474720" cy="1143000"/>
+            <a:off x="7635240" y="4343400"/>
+            <a:ext cx="3474720" cy="1255471"/>
           </a:xfrm>
           <a:prstGeom prst="roundRect">
             <a:avLst>
-              <a:gd name="adj" fmla="val 9600"/>
+              <a:gd name="adj" fmla="val 8740"/>
             </a:avLst>
           </a:prstGeom>
           <a:solidFill>
@@ -5891,7 +5891,7 @@
         </p:nvSpPr>
         <p:spPr>
           <a:xfrm>
-            <a:off x="7799832" y="4645152"/>
+            <a:off x="7799832" y="4489704"/>
             <a:ext cx="3145536" cy="256032"/>
           </a:xfrm>
           <a:prstGeom prst="rect">
@@ -5930,8 +5930,8 @@
         </p:nvSpPr>
         <p:spPr>
           <a:xfrm>
-            <a:off x="7799832" y="4974336"/>
-            <a:ext cx="3145536" cy="576072"/>
+            <a:off x="7799832" y="4818888"/>
+            <a:ext cx="3145536" cy="688543"/>
           </a:xfrm>
           <a:prstGeom prst="rect">
             <a:avLst/>
@@ -5957,7 +5957,7 @@
                 <a:ea typeface="Aptos" pitchFamily="34" charset="-122"/>
                 <a:cs typeface="Aptos" pitchFamily="34" charset="-120"/>
               </a:rPr>
-              <a:t>Identify what could go wrong, who could be affected, what safeguards are needed, and what evidence should be reviewed.</a:t>
+              <a:t>Identify what could go wrong, who could be affected, what safeguards are needed, and what evidence should be reviewed before use.</a:t>
             </a:r>
             <a:endParaRPr lang="en-US" sz="1320" dirty="0"/>
           </a:p>
@@ -6326,11 +6326,11 @@
         <p:spPr>
           <a:xfrm>
             <a:off x="7635240" y="1325880"/>
-            <a:ext cx="3474720" cy="1325880"/>
+            <a:ext cx="3474720" cy="1207008"/>
           </a:xfrm>
           <a:prstGeom prst="roundRect">
             <a:avLst>
-              <a:gd name="adj" fmla="val 8276"/>
+              <a:gd name="adj" fmla="val 9091"/>
             </a:avLst>
           </a:prstGeom>
           <a:solidFill>
@@ -6392,7 +6392,7 @@
         <p:spPr>
           <a:xfrm>
             <a:off x="7799832" y="1801368"/>
-            <a:ext cx="3145536" cy="758952"/>
+            <a:ext cx="3145536" cy="640080"/>
           </a:xfrm>
           <a:prstGeom prst="rect">
             <a:avLst/>
@@ -6432,7 +6432,7 @@
         </p:nvSpPr>
         <p:spPr>
           <a:xfrm>
-            <a:off x="7635240" y="2788920"/>
+            <a:off x="7635240" y="2670048"/>
             <a:ext cx="3474720" cy="1536192"/>
           </a:xfrm>
           <a:prstGeom prst="roundRect">
@@ -6459,7 +6459,7 @@
         </p:nvSpPr>
         <p:spPr>
           <a:xfrm>
-            <a:off x="7799832" y="2935224"/>
+            <a:off x="7799832" y="2816352"/>
             <a:ext cx="3145536" cy="256032"/>
           </a:xfrm>
           <a:prstGeom prst="rect">
@@ -6498,7 +6498,7 @@
         </p:nvSpPr>
         <p:spPr>
           <a:xfrm>
-            <a:off x="7818120" y="3300984"/>
+            <a:off x="7818120" y="3182112"/>
             <a:ext cx="3090672" cy="877824"/>
           </a:xfrm>
           <a:prstGeom prst="rect">
@@ -6573,12 +6573,12 @@
         </p:nvSpPr>
         <p:spPr>
           <a:xfrm>
-            <a:off x="7635240" y="4498848"/>
-            <a:ext cx="3474720" cy="1143000"/>
+            <a:off x="7635240" y="4343400"/>
+            <a:ext cx="3474720" cy="1255471"/>
           </a:xfrm>
           <a:prstGeom prst="roundRect">
             <a:avLst>
-              <a:gd name="adj" fmla="val 9600"/>
+              <a:gd name="adj" fmla="val 8740"/>
             </a:avLst>
           </a:prstGeom>
           <a:solidFill>
@@ -6600,7 +6600,7 @@
         </p:nvSpPr>
         <p:spPr>
           <a:xfrm>
-            <a:off x="7799832" y="4645152"/>
+            <a:off x="7799832" y="4489704"/>
             <a:ext cx="3145536" cy="256032"/>
           </a:xfrm>
           <a:prstGeom prst="rect">
@@ -6639,8 +6639,8 @@
         </p:nvSpPr>
         <p:spPr>
           <a:xfrm>
-            <a:off x="7799832" y="4974336"/>
-            <a:ext cx="3145536" cy="576072"/>
+            <a:off x="7799832" y="4818888"/>
+            <a:ext cx="3145536" cy="688543"/>
           </a:xfrm>
           <a:prstGeom prst="rect">
             <a:avLst/>
@@ -6666,7 +6666,7 @@
                 <a:ea typeface="Aptos" pitchFamily="34" charset="-122"/>
                 <a:cs typeface="Aptos" pitchFamily="34" charset="-120"/>
               </a:rPr>
-              <a:t>Identify what could go wrong, who could be affected, what safeguards are needed, and what evidence should be reviewed.</a:t>
+              <a:t>Identify what could go wrong, who could be affected, what safeguards are needed, and what evidence should be reviewed before use.</a:t>
             </a:r>
             <a:endParaRPr lang="en-US" sz="1320" dirty="0"/>
           </a:p>
@@ -7035,11 +7035,11 @@
         <p:spPr>
           <a:xfrm>
             <a:off x="7635240" y="1325880"/>
-            <a:ext cx="3474720" cy="1325880"/>
+            <a:ext cx="3474720" cy="1255471"/>
           </a:xfrm>
           <a:prstGeom prst="roundRect">
             <a:avLst>
-              <a:gd name="adj" fmla="val 8276"/>
+              <a:gd name="adj" fmla="val 8740"/>
             </a:avLst>
           </a:prstGeom>
           <a:solidFill>
@@ -7101,7 +7101,7 @@
         <p:spPr>
           <a:xfrm>
             <a:off x="7799832" y="1801368"/>
-            <a:ext cx="3145536" cy="758952"/>
+            <a:ext cx="3145536" cy="688543"/>
           </a:xfrm>
           <a:prstGeom prst="rect">
             <a:avLst/>
@@ -7141,12 +7141,12 @@
         </p:nvSpPr>
         <p:spPr>
           <a:xfrm>
-            <a:off x="7635240" y="2788920"/>
-            <a:ext cx="3474720" cy="1536192"/>
+            <a:off x="7635240" y="2718511"/>
+            <a:ext cx="3474720" cy="1328623"/>
           </a:xfrm>
           <a:prstGeom prst="roundRect">
             <a:avLst>
-              <a:gd name="adj" fmla="val 7143"/>
+              <a:gd name="adj" fmla="val 8259"/>
             </a:avLst>
           </a:prstGeom>
           <a:solidFill>
@@ -7168,7 +7168,7 @@
         </p:nvSpPr>
         <p:spPr>
           <a:xfrm>
-            <a:off x="7799832" y="2935224"/>
+            <a:off x="7799832" y="2864815"/>
             <a:ext cx="3145536" cy="256032"/>
           </a:xfrm>
           <a:prstGeom prst="rect">
@@ -7207,8 +7207,8 @@
         </p:nvSpPr>
         <p:spPr>
           <a:xfrm>
-            <a:off x="7818120" y="3300984"/>
-            <a:ext cx="3090672" cy="877824"/>
+            <a:off x="7818120" y="3230575"/>
+            <a:ext cx="3090672" cy="670255"/>
           </a:xfrm>
           <a:prstGeom prst="rect">
             <a:avLst/>
@@ -7282,12 +7282,12 @@
         </p:nvSpPr>
         <p:spPr>
           <a:xfrm>
-            <a:off x="7635240" y="4498848"/>
-            <a:ext cx="3474720" cy="1143000"/>
+            <a:off x="7635240" y="4184294"/>
+            <a:ext cx="3474720" cy="1466698"/>
           </a:xfrm>
           <a:prstGeom prst="roundRect">
             <a:avLst>
-              <a:gd name="adj" fmla="val 9600"/>
+              <a:gd name="adj" fmla="val 7481"/>
             </a:avLst>
           </a:prstGeom>
           <a:solidFill>
@@ -7309,7 +7309,7 @@
         </p:nvSpPr>
         <p:spPr>
           <a:xfrm>
-            <a:off x="7799832" y="4645152"/>
+            <a:off x="7799832" y="4330598"/>
             <a:ext cx="3145536" cy="256032"/>
           </a:xfrm>
           <a:prstGeom prst="rect">
@@ -7348,8 +7348,8 @@
         </p:nvSpPr>
         <p:spPr>
           <a:xfrm>
-            <a:off x="7799832" y="4974336"/>
-            <a:ext cx="3145536" cy="576072"/>
+            <a:off x="7799832" y="4659782"/>
+            <a:ext cx="3145536" cy="899770"/>
           </a:xfrm>
           <a:prstGeom prst="rect">
             <a:avLst/>
@@ -7375,7 +7375,7 @@
                 <a:ea typeface="Aptos" pitchFamily="34" charset="-122"/>
                 <a:cs typeface="Aptos" pitchFamily="34" charset="-120"/>
               </a:rPr>
-              <a:t>Use the concept to clarify workflow changes, dependencies, staffing, procurement requirements, training needs, and.</a:t>
+              <a:t>Use the concept to clarify workflow changes, dependencies, staffing, procurement requirements, training needs, and implementation checkpoints.</a:t>
             </a:r>
             <a:endParaRPr lang="en-US" sz="1320" dirty="0"/>
           </a:p>
@@ -7744,11 +7744,11 @@
         <p:spPr>
           <a:xfrm>
             <a:off x="7635240" y="1325880"/>
-            <a:ext cx="3474720" cy="1325880"/>
+            <a:ext cx="3474720" cy="1207008"/>
           </a:xfrm>
           <a:prstGeom prst="roundRect">
             <a:avLst>
-              <a:gd name="adj" fmla="val 8276"/>
+              <a:gd name="adj" fmla="val 9091"/>
             </a:avLst>
           </a:prstGeom>
           <a:solidFill>
@@ -7810,7 +7810,7 @@
         <p:spPr>
           <a:xfrm>
             <a:off x="7799832" y="1801368"/>
-            <a:ext cx="3145536" cy="758952"/>
+            <a:ext cx="3145536" cy="640080"/>
           </a:xfrm>
           <a:prstGeom prst="rect">
             <a:avLst/>
@@ -7850,12 +7850,12 @@
         </p:nvSpPr>
         <p:spPr>
           <a:xfrm>
-            <a:off x="7635240" y="2788920"/>
-            <a:ext cx="3474720" cy="1536192"/>
+            <a:off x="7635240" y="2670048"/>
+            <a:ext cx="3474720" cy="1377086"/>
           </a:xfrm>
           <a:prstGeom prst="roundRect">
             <a:avLst>
-              <a:gd name="adj" fmla="val 7143"/>
+              <a:gd name="adj" fmla="val 7968"/>
             </a:avLst>
           </a:prstGeom>
           <a:solidFill>
@@ -7877,7 +7877,7 @@
         </p:nvSpPr>
         <p:spPr>
           <a:xfrm>
-            <a:off x="7799832" y="2935224"/>
+            <a:off x="7799832" y="2816352"/>
             <a:ext cx="3145536" cy="256032"/>
           </a:xfrm>
           <a:prstGeom prst="rect">
@@ -7916,8 +7916,8 @@
         </p:nvSpPr>
         <p:spPr>
           <a:xfrm>
-            <a:off x="7818120" y="3300984"/>
-            <a:ext cx="3090672" cy="877824"/>
+            <a:off x="7818120" y="3182112"/>
+            <a:ext cx="3090672" cy="718718"/>
           </a:xfrm>
           <a:prstGeom prst="rect">
             <a:avLst/>
@@ -7991,12 +7991,12 @@
         </p:nvSpPr>
         <p:spPr>
           <a:xfrm>
-            <a:off x="7635240" y="4498848"/>
-            <a:ext cx="3474720" cy="1143000"/>
+            <a:off x="7635240" y="4184294"/>
+            <a:ext cx="3474720" cy="1466698"/>
           </a:xfrm>
           <a:prstGeom prst="roundRect">
             <a:avLst>
-              <a:gd name="adj" fmla="val 9600"/>
+              <a:gd name="adj" fmla="val 7481"/>
             </a:avLst>
           </a:prstGeom>
           <a:solidFill>
@@ -8018,7 +8018,7 @@
         </p:nvSpPr>
         <p:spPr>
           <a:xfrm>
-            <a:off x="7799832" y="4645152"/>
+            <a:off x="7799832" y="4330598"/>
             <a:ext cx="3145536" cy="256032"/>
           </a:xfrm>
           <a:prstGeom prst="rect">
@@ -8057,8 +8057,8 @@
         </p:nvSpPr>
         <p:spPr>
           <a:xfrm>
-            <a:off x="7799832" y="4974336"/>
-            <a:ext cx="3145536" cy="576072"/>
+            <a:off x="7799832" y="4659782"/>
+            <a:ext cx="3145536" cy="899770"/>
           </a:xfrm>
           <a:prstGeom prst="rect">
             <a:avLst/>
@@ -8084,7 +8084,7 @@
                 <a:ea typeface="Aptos" pitchFamily="34" charset="-122"/>
                 <a:cs typeface="Aptos" pitchFamily="34" charset="-120"/>
               </a:rPr>
-              <a:t>Use the concept to clarify workflow changes, dependencies, staffing, procurement requirements, training needs, and.</a:t>
+              <a:t>Use the concept to clarify workflow changes, dependencies, staffing, procurement requirements, training needs, and implementation checkpoints.</a:t>
             </a:r>
             <a:endParaRPr lang="en-US" sz="1320" dirty="0"/>
           </a:p>
@@ -8436,11 +8436,11 @@
         <p:spPr>
           <a:xfrm>
             <a:off x="7635240" y="1325880"/>
-            <a:ext cx="3474720" cy="1325880"/>
+            <a:ext cx="3474720" cy="1207008"/>
           </a:xfrm>
           <a:prstGeom prst="roundRect">
             <a:avLst>
-              <a:gd name="adj" fmla="val 8276"/>
+              <a:gd name="adj" fmla="val 9091"/>
             </a:avLst>
           </a:prstGeom>
           <a:solidFill>
@@ -8502,7 +8502,7 @@
         <p:spPr>
           <a:xfrm>
             <a:off x="7799832" y="1801368"/>
-            <a:ext cx="3145536" cy="758952"/>
+            <a:ext cx="3145536" cy="640080"/>
           </a:xfrm>
           <a:prstGeom prst="rect">
             <a:avLst/>
@@ -8542,12 +8542,12 @@
         </p:nvSpPr>
         <p:spPr>
           <a:xfrm>
-            <a:off x="7635240" y="2788920"/>
-            <a:ext cx="3474720" cy="1536192"/>
+            <a:off x="7635240" y="2670048"/>
+            <a:ext cx="3474720" cy="1377086"/>
           </a:xfrm>
           <a:prstGeom prst="roundRect">
             <a:avLst>
-              <a:gd name="adj" fmla="val 7143"/>
+              <a:gd name="adj" fmla="val 7968"/>
             </a:avLst>
           </a:prstGeom>
           <a:solidFill>
@@ -8569,7 +8569,7 @@
         </p:nvSpPr>
         <p:spPr>
           <a:xfrm>
-            <a:off x="7799832" y="2935224"/>
+            <a:off x="7799832" y="2816352"/>
             <a:ext cx="3145536" cy="256032"/>
           </a:xfrm>
           <a:prstGeom prst="rect">
@@ -8608,8 +8608,8 @@
         </p:nvSpPr>
         <p:spPr>
           <a:xfrm>
-            <a:off x="7818120" y="3300984"/>
-            <a:ext cx="3090672" cy="877824"/>
+            <a:off x="7818120" y="3182112"/>
+            <a:ext cx="3090672" cy="718718"/>
           </a:xfrm>
           <a:prstGeom prst="rect">
             <a:avLst/>
@@ -8666,12 +8666,12 @@
         </p:nvSpPr>
         <p:spPr>
           <a:xfrm>
-            <a:off x="7635240" y="4498848"/>
-            <a:ext cx="3474720" cy="1143000"/>
+            <a:off x="7635240" y="4184294"/>
+            <a:ext cx="3474720" cy="1466698"/>
           </a:xfrm>
           <a:prstGeom prst="roundRect">
             <a:avLst>
-              <a:gd name="adj" fmla="val 9600"/>
+              <a:gd name="adj" fmla="val 7481"/>
             </a:avLst>
           </a:prstGeom>
           <a:solidFill>
@@ -8693,7 +8693,7 @@
         </p:nvSpPr>
         <p:spPr>
           <a:xfrm>
-            <a:off x="7799832" y="4645152"/>
+            <a:off x="7799832" y="4330598"/>
             <a:ext cx="3145536" cy="256032"/>
           </a:xfrm>
           <a:prstGeom prst="rect">
@@ -8732,8 +8732,8 @@
         </p:nvSpPr>
         <p:spPr>
           <a:xfrm>
-            <a:off x="7799832" y="4974336"/>
-            <a:ext cx="3145536" cy="576072"/>
+            <a:off x="7799832" y="4659782"/>
+            <a:ext cx="3145536" cy="899770"/>
           </a:xfrm>
           <a:prstGeom prst="rect">
             <a:avLst/>
@@ -8759,7 +8759,7 @@
                 <a:ea typeface="Aptos" pitchFamily="34" charset="-122"/>
                 <a:cs typeface="Aptos" pitchFamily="34" charset="-120"/>
               </a:rPr>
-              <a:t>Use the concept to clarify workflow changes, dependencies, staffing, procurement requirements, training needs, and.</a:t>
+              <a:t>Use the concept to clarify workflow changes, dependencies, staffing, procurement requirements, training needs, and implementation checkpoints.</a:t>
             </a:r>
             <a:endParaRPr lang="en-US" sz="1320" dirty="0"/>
           </a:p>
@@ -9111,11 +9111,11 @@
         <p:spPr>
           <a:xfrm>
             <a:off x="7635240" y="1325880"/>
-            <a:ext cx="3474720" cy="1325880"/>
+            <a:ext cx="3474720" cy="1207008"/>
           </a:xfrm>
           <a:prstGeom prst="roundRect">
             <a:avLst>
-              <a:gd name="adj" fmla="val 8276"/>
+              <a:gd name="adj" fmla="val 9091"/>
             </a:avLst>
           </a:prstGeom>
           <a:solidFill>
@@ -9177,7 +9177,7 @@
         <p:spPr>
           <a:xfrm>
             <a:off x="7799832" y="1801368"/>
-            <a:ext cx="3145536" cy="758952"/>
+            <a:ext cx="3145536" cy="640080"/>
           </a:xfrm>
           <a:prstGeom prst="rect">
             <a:avLst/>
@@ -9217,12 +9217,12 @@
         </p:nvSpPr>
         <p:spPr>
           <a:xfrm>
-            <a:off x="7635240" y="2788920"/>
-            <a:ext cx="3474720" cy="1536192"/>
+            <a:off x="7635240" y="2670048"/>
+            <a:ext cx="3474720" cy="1377086"/>
           </a:xfrm>
           <a:prstGeom prst="roundRect">
             <a:avLst>
-              <a:gd name="adj" fmla="val 7143"/>
+              <a:gd name="adj" fmla="val 7968"/>
             </a:avLst>
           </a:prstGeom>
           <a:solidFill>
@@ -9244,7 +9244,7 @@
         </p:nvSpPr>
         <p:spPr>
           <a:xfrm>
-            <a:off x="7799832" y="2935224"/>
+            <a:off x="7799832" y="2816352"/>
             <a:ext cx="3145536" cy="256032"/>
           </a:xfrm>
           <a:prstGeom prst="rect">
@@ -9283,8 +9283,8 @@
         </p:nvSpPr>
         <p:spPr>
           <a:xfrm>
-            <a:off x="7818120" y="3300984"/>
-            <a:ext cx="3090672" cy="877824"/>
+            <a:off x="7818120" y="3182112"/>
+            <a:ext cx="3090672" cy="718718"/>
           </a:xfrm>
           <a:prstGeom prst="rect">
             <a:avLst/>
@@ -9341,12 +9341,12 @@
         </p:nvSpPr>
         <p:spPr>
           <a:xfrm>
-            <a:off x="7635240" y="4498848"/>
-            <a:ext cx="3474720" cy="1143000"/>
+            <a:off x="7635240" y="4184294"/>
+            <a:ext cx="3474720" cy="1466698"/>
           </a:xfrm>
           <a:prstGeom prst="roundRect">
             <a:avLst>
-              <a:gd name="adj" fmla="val 9600"/>
+              <a:gd name="adj" fmla="val 7481"/>
             </a:avLst>
           </a:prstGeom>
           <a:solidFill>
@@ -9368,7 +9368,7 @@
         </p:nvSpPr>
         <p:spPr>
           <a:xfrm>
-            <a:off x="7799832" y="4645152"/>
+            <a:off x="7799832" y="4330598"/>
             <a:ext cx="3145536" cy="256032"/>
           </a:xfrm>
           <a:prstGeom prst="rect">
@@ -9407,8 +9407,8 @@
         </p:nvSpPr>
         <p:spPr>
           <a:xfrm>
-            <a:off x="7799832" y="4974336"/>
-            <a:ext cx="3145536" cy="576072"/>
+            <a:off x="7799832" y="4659782"/>
+            <a:ext cx="3145536" cy="899770"/>
           </a:xfrm>
           <a:prstGeom prst="rect">
             <a:avLst/>
@@ -9434,7 +9434,7 @@
                 <a:ea typeface="Aptos" pitchFamily="34" charset="-122"/>
                 <a:cs typeface="Aptos" pitchFamily="34" charset="-120"/>
               </a:rPr>
-              <a:t>Use the assignment to test whether you can explain the concept, apply it to a realistic public health situation, and.</a:t>
+              <a:t>Use the assignment to test whether you can explain the concept, apply it to a realistic public health situation, and identify what would need review before the work moves forward.</a:t>
             </a:r>
             <a:endParaRPr lang="en-US" sz="1320" dirty="0"/>
           </a:p>
@@ -9803,11 +9803,11 @@
         <p:spPr>
           <a:xfrm>
             <a:off x="7635240" y="1325880"/>
-            <a:ext cx="3474720" cy="1325880"/>
+            <a:ext cx="3474720" cy="1207008"/>
           </a:xfrm>
           <a:prstGeom prst="roundRect">
             <a:avLst>
-              <a:gd name="adj" fmla="val 8276"/>
+              <a:gd name="adj" fmla="val 9091"/>
             </a:avLst>
           </a:prstGeom>
           <a:solidFill>
@@ -9869,7 +9869,7 @@
         <p:spPr>
           <a:xfrm>
             <a:off x="7799832" y="1801368"/>
-            <a:ext cx="3145536" cy="758952"/>
+            <a:ext cx="3145536" cy="640080"/>
           </a:xfrm>
           <a:prstGeom prst="rect">
             <a:avLst/>
@@ -9909,12 +9909,12 @@
         </p:nvSpPr>
         <p:spPr>
           <a:xfrm>
-            <a:off x="7635240" y="2788920"/>
-            <a:ext cx="3474720" cy="1536192"/>
+            <a:off x="7635240" y="2670048"/>
+            <a:ext cx="3474720" cy="1377086"/>
           </a:xfrm>
           <a:prstGeom prst="roundRect">
             <a:avLst>
-              <a:gd name="adj" fmla="val 7143"/>
+              <a:gd name="adj" fmla="val 7968"/>
             </a:avLst>
           </a:prstGeom>
           <a:solidFill>
@@ -9936,7 +9936,7 @@
         </p:nvSpPr>
         <p:spPr>
           <a:xfrm>
-            <a:off x="7799832" y="2935224"/>
+            <a:off x="7799832" y="2816352"/>
             <a:ext cx="3145536" cy="256032"/>
           </a:xfrm>
           <a:prstGeom prst="rect">
@@ -9975,8 +9975,8 @@
         </p:nvSpPr>
         <p:spPr>
           <a:xfrm>
-            <a:off x="7818120" y="3300984"/>
-            <a:ext cx="3090672" cy="877824"/>
+            <a:off x="7818120" y="3182112"/>
+            <a:ext cx="3090672" cy="718718"/>
           </a:xfrm>
           <a:prstGeom prst="rect">
             <a:avLst/>
@@ -10050,12 +10050,12 @@
         </p:nvSpPr>
         <p:spPr>
           <a:xfrm>
-            <a:off x="7635240" y="4498848"/>
-            <a:ext cx="3474720" cy="1143000"/>
+            <a:off x="7635240" y="4184294"/>
+            <a:ext cx="3474720" cy="1466698"/>
           </a:xfrm>
           <a:prstGeom prst="roundRect">
             <a:avLst>
-              <a:gd name="adj" fmla="val 9600"/>
+              <a:gd name="adj" fmla="val 7481"/>
             </a:avLst>
           </a:prstGeom>
           <a:solidFill>
@@ -10077,7 +10077,7 @@
         </p:nvSpPr>
         <p:spPr>
           <a:xfrm>
-            <a:off x="7799832" y="4645152"/>
+            <a:off x="7799832" y="4330598"/>
             <a:ext cx="3145536" cy="256032"/>
           </a:xfrm>
           <a:prstGeom prst="rect">
@@ -10116,8 +10116,8 @@
         </p:nvSpPr>
         <p:spPr>
           <a:xfrm>
-            <a:off x="7799832" y="4974336"/>
-            <a:ext cx="3145536" cy="576072"/>
+            <a:off x="7799832" y="4659782"/>
+            <a:ext cx="3145536" cy="899770"/>
           </a:xfrm>
           <a:prstGeom prst="rect">
             <a:avLst/>
@@ -10143,7 +10143,7 @@
                 <a:ea typeface="Aptos" pitchFamily="34" charset="-122"/>
                 <a:cs typeface="Aptos" pitchFamily="34" charset="-120"/>
               </a:rPr>
-              <a:t>Use the concept to clarify workflow changes, dependencies, staffing, procurement requirements, training needs, and.</a:t>
+              <a:t>Use the concept to clarify workflow changes, dependencies, staffing, procurement requirements, training needs, and implementation checkpoints.</a:t>
             </a:r>
             <a:endParaRPr lang="en-US" sz="1320" dirty="0"/>
           </a:p>
@@ -11080,11 +11080,11 @@
         <p:spPr>
           <a:xfrm>
             <a:off x="7635240" y="1325880"/>
-            <a:ext cx="3474720" cy="1325880"/>
+            <a:ext cx="3474720" cy="1207008"/>
           </a:xfrm>
           <a:prstGeom prst="roundRect">
             <a:avLst>
-              <a:gd name="adj" fmla="val 8276"/>
+              <a:gd name="adj" fmla="val 9091"/>
             </a:avLst>
           </a:prstGeom>
           <a:solidFill>
@@ -11146,7 +11146,7 @@
         <p:spPr>
           <a:xfrm>
             <a:off x="7799832" y="1801368"/>
-            <a:ext cx="3145536" cy="758952"/>
+            <a:ext cx="3145536" cy="640080"/>
           </a:xfrm>
           <a:prstGeom prst="rect">
             <a:avLst/>
@@ -11186,12 +11186,12 @@
         </p:nvSpPr>
         <p:spPr>
           <a:xfrm>
-            <a:off x="7635240" y="2788920"/>
-            <a:ext cx="3474720" cy="1536192"/>
+            <a:off x="7635240" y="2670048"/>
+            <a:ext cx="3474720" cy="1377086"/>
           </a:xfrm>
           <a:prstGeom prst="roundRect">
             <a:avLst>
-              <a:gd name="adj" fmla="val 7143"/>
+              <a:gd name="adj" fmla="val 7968"/>
             </a:avLst>
           </a:prstGeom>
           <a:solidFill>
@@ -11213,7 +11213,7 @@
         </p:nvSpPr>
         <p:spPr>
           <a:xfrm>
-            <a:off x="7799832" y="2935224"/>
+            <a:off x="7799832" y="2816352"/>
             <a:ext cx="3145536" cy="256032"/>
           </a:xfrm>
           <a:prstGeom prst="rect">
@@ -11252,8 +11252,8 @@
         </p:nvSpPr>
         <p:spPr>
           <a:xfrm>
-            <a:off x="7818120" y="3300984"/>
-            <a:ext cx="3090672" cy="877824"/>
+            <a:off x="7818120" y="3182112"/>
+            <a:ext cx="3090672" cy="718718"/>
           </a:xfrm>
           <a:prstGeom prst="rect">
             <a:avLst/>
@@ -11293,12 +11293,12 @@
         </p:nvSpPr>
         <p:spPr>
           <a:xfrm>
-            <a:off x="7635240" y="4498848"/>
-            <a:ext cx="3474720" cy="1143000"/>
+            <a:off x="7635240" y="4184294"/>
+            <a:ext cx="3474720" cy="1466698"/>
           </a:xfrm>
           <a:prstGeom prst="roundRect">
             <a:avLst>
-              <a:gd name="adj" fmla="val 9600"/>
+              <a:gd name="adj" fmla="val 7481"/>
             </a:avLst>
           </a:prstGeom>
           <a:solidFill>
@@ -11320,7 +11320,7 @@
         </p:nvSpPr>
         <p:spPr>
           <a:xfrm>
-            <a:off x="7799832" y="4645152"/>
+            <a:off x="7799832" y="4330598"/>
             <a:ext cx="3145536" cy="256032"/>
           </a:xfrm>
           <a:prstGeom prst="rect">
@@ -11359,8 +11359,8 @@
         </p:nvSpPr>
         <p:spPr>
           <a:xfrm>
-            <a:off x="7799832" y="4974336"/>
-            <a:ext cx="3145536" cy="576072"/>
+            <a:off x="7799832" y="4659782"/>
+            <a:ext cx="3145536" cy="899770"/>
           </a:xfrm>
           <a:prstGeom prst="rect">
             <a:avLst/>
@@ -11386,7 +11386,7 @@
                 <a:ea typeface="Aptos" pitchFamily="34" charset="-122"/>
                 <a:cs typeface="Aptos" pitchFamily="34" charset="-120"/>
               </a:rPr>
-              <a:t>Use the concept to clarify workflow changes, dependencies, staffing, procurement requirements, training needs, and.</a:t>
+              <a:t>Use the concept to clarify workflow changes, dependencies, staffing, procurement requirements, training needs, and implementation checkpoints.</a:t>
             </a:r>
             <a:endParaRPr lang="en-US" sz="1320" dirty="0"/>
           </a:p>
@@ -11755,11 +11755,11 @@
         <p:spPr>
           <a:xfrm>
             <a:off x="7635240" y="1325880"/>
-            <a:ext cx="3474720" cy="1325880"/>
+            <a:ext cx="3474720" cy="1207008"/>
           </a:xfrm>
           <a:prstGeom prst="roundRect">
             <a:avLst>
-              <a:gd name="adj" fmla="val 8276"/>
+              <a:gd name="adj" fmla="val 9091"/>
             </a:avLst>
           </a:prstGeom>
           <a:solidFill>
@@ -11821,7 +11821,7 @@
         <p:spPr>
           <a:xfrm>
             <a:off x="7799832" y="1801368"/>
-            <a:ext cx="3145536" cy="758952"/>
+            <a:ext cx="3145536" cy="640080"/>
           </a:xfrm>
           <a:prstGeom prst="rect">
             <a:avLst/>
@@ -11861,12 +11861,12 @@
         </p:nvSpPr>
         <p:spPr>
           <a:xfrm>
-            <a:off x="7635240" y="2788920"/>
-            <a:ext cx="3474720" cy="1536192"/>
+            <a:off x="7635240" y="2670048"/>
+            <a:ext cx="3474720" cy="1377086"/>
           </a:xfrm>
           <a:prstGeom prst="roundRect">
             <a:avLst>
-              <a:gd name="adj" fmla="val 7143"/>
+              <a:gd name="adj" fmla="val 7968"/>
             </a:avLst>
           </a:prstGeom>
           <a:solidFill>
@@ -11888,7 +11888,7 @@
         </p:nvSpPr>
         <p:spPr>
           <a:xfrm>
-            <a:off x="7799832" y="2935224"/>
+            <a:off x="7799832" y="2816352"/>
             <a:ext cx="3145536" cy="256032"/>
           </a:xfrm>
           <a:prstGeom prst="rect">
@@ -11927,8 +11927,8 @@
         </p:nvSpPr>
         <p:spPr>
           <a:xfrm>
-            <a:off x="7818120" y="3300984"/>
-            <a:ext cx="3090672" cy="877824"/>
+            <a:off x="7818120" y="3182112"/>
+            <a:ext cx="3090672" cy="718718"/>
           </a:xfrm>
           <a:prstGeom prst="rect">
             <a:avLst/>
@@ -12002,12 +12002,12 @@
         </p:nvSpPr>
         <p:spPr>
           <a:xfrm>
-            <a:off x="7635240" y="4498848"/>
-            <a:ext cx="3474720" cy="1143000"/>
+            <a:off x="7635240" y="4184294"/>
+            <a:ext cx="3474720" cy="1466698"/>
           </a:xfrm>
           <a:prstGeom prst="roundRect">
             <a:avLst>
-              <a:gd name="adj" fmla="val 9600"/>
+              <a:gd name="adj" fmla="val 7481"/>
             </a:avLst>
           </a:prstGeom>
           <a:solidFill>
@@ -12029,7 +12029,7 @@
         </p:nvSpPr>
         <p:spPr>
           <a:xfrm>
-            <a:off x="7799832" y="4645152"/>
+            <a:off x="7799832" y="4330598"/>
             <a:ext cx="3145536" cy="256032"/>
           </a:xfrm>
           <a:prstGeom prst="rect">
@@ -12068,8 +12068,8 @@
         </p:nvSpPr>
         <p:spPr>
           <a:xfrm>
-            <a:off x="7799832" y="4974336"/>
-            <a:ext cx="3145536" cy="576072"/>
+            <a:off x="7799832" y="4659782"/>
+            <a:ext cx="3145536" cy="899770"/>
           </a:xfrm>
           <a:prstGeom prst="rect">
             <a:avLst/>
@@ -12095,7 +12095,7 @@
                 <a:ea typeface="Aptos" pitchFamily="34" charset="-122"/>
                 <a:cs typeface="Aptos" pitchFamily="34" charset="-120"/>
               </a:rPr>
-              <a:t>Use the assignment to test whether you can explain the concept, apply it to a realistic public health situation, and.</a:t>
+              <a:t>Use the assignment to test whether you can explain the concept, apply it to a realistic public health situation, and identify what would need review before the work moves forward.</a:t>
             </a:r>
             <a:endParaRPr lang="en-US" sz="1320" dirty="0"/>
           </a:p>
@@ -12464,11 +12464,11 @@
         <p:spPr>
           <a:xfrm>
             <a:off x="7635240" y="1325880"/>
-            <a:ext cx="3474720" cy="1325880"/>
+            <a:ext cx="3474720" cy="1207008"/>
           </a:xfrm>
           <a:prstGeom prst="roundRect">
             <a:avLst>
-              <a:gd name="adj" fmla="val 8276"/>
+              <a:gd name="adj" fmla="val 9091"/>
             </a:avLst>
           </a:prstGeom>
           <a:solidFill>
@@ -12530,7 +12530,7 @@
         <p:spPr>
           <a:xfrm>
             <a:off x="7799832" y="1801368"/>
-            <a:ext cx="3145536" cy="758952"/>
+            <a:ext cx="3145536" cy="640080"/>
           </a:xfrm>
           <a:prstGeom prst="rect">
             <a:avLst/>
@@ -12570,12 +12570,12 @@
         </p:nvSpPr>
         <p:spPr>
           <a:xfrm>
-            <a:off x="7635240" y="2788920"/>
-            <a:ext cx="3474720" cy="1536192"/>
+            <a:off x="7635240" y="2670048"/>
+            <a:ext cx="3474720" cy="1377086"/>
           </a:xfrm>
           <a:prstGeom prst="roundRect">
             <a:avLst>
-              <a:gd name="adj" fmla="val 7143"/>
+              <a:gd name="adj" fmla="val 7968"/>
             </a:avLst>
           </a:prstGeom>
           <a:solidFill>
@@ -12597,7 +12597,7 @@
         </p:nvSpPr>
         <p:spPr>
           <a:xfrm>
-            <a:off x="7799832" y="2935224"/>
+            <a:off x="7799832" y="2816352"/>
             <a:ext cx="3145536" cy="256032"/>
           </a:xfrm>
           <a:prstGeom prst="rect">
@@ -12636,8 +12636,8 @@
         </p:nvSpPr>
         <p:spPr>
           <a:xfrm>
-            <a:off x="7818120" y="3300984"/>
-            <a:ext cx="3090672" cy="877824"/>
+            <a:off x="7818120" y="3182112"/>
+            <a:ext cx="3090672" cy="718718"/>
           </a:xfrm>
           <a:prstGeom prst="rect">
             <a:avLst/>
@@ -12711,12 +12711,12 @@
         </p:nvSpPr>
         <p:spPr>
           <a:xfrm>
-            <a:off x="7635240" y="4498848"/>
-            <a:ext cx="3474720" cy="1143000"/>
+            <a:off x="7635240" y="4184294"/>
+            <a:ext cx="3474720" cy="1466698"/>
           </a:xfrm>
           <a:prstGeom prst="roundRect">
             <a:avLst>
-              <a:gd name="adj" fmla="val 9600"/>
+              <a:gd name="adj" fmla="val 7481"/>
             </a:avLst>
           </a:prstGeom>
           <a:solidFill>
@@ -12738,7 +12738,7 @@
         </p:nvSpPr>
         <p:spPr>
           <a:xfrm>
-            <a:off x="7799832" y="4645152"/>
+            <a:off x="7799832" y="4330598"/>
             <a:ext cx="3145536" cy="256032"/>
           </a:xfrm>
           <a:prstGeom prst="rect">
@@ -12777,8 +12777,8 @@
         </p:nvSpPr>
         <p:spPr>
           <a:xfrm>
-            <a:off x="7799832" y="4974336"/>
-            <a:ext cx="3145536" cy="576072"/>
+            <a:off x="7799832" y="4659782"/>
+            <a:ext cx="3145536" cy="899770"/>
           </a:xfrm>
           <a:prstGeom prst="rect">
             <a:avLst/>
@@ -12804,7 +12804,7 @@
                 <a:ea typeface="Aptos" pitchFamily="34" charset="-122"/>
                 <a:cs typeface="Aptos" pitchFamily="34" charset="-120"/>
               </a:rPr>
-              <a:t>Use the assignment to test whether you can explain the concept, apply it to a realistic public health situation, and.</a:t>
+              <a:t>Use the assignment to test whether you can explain the concept, apply it to a realistic public health situation, and identify what would need review before the work moves forward.</a:t>
             </a:r>
             <a:endParaRPr lang="en-US" sz="1320" dirty="0"/>
           </a:p>
@@ -13173,11 +13173,11 @@
         <p:spPr>
           <a:xfrm>
             <a:off x="7635240" y="1325880"/>
-            <a:ext cx="3474720" cy="1325880"/>
+            <a:ext cx="3474720" cy="1207008"/>
           </a:xfrm>
           <a:prstGeom prst="roundRect">
             <a:avLst>
-              <a:gd name="adj" fmla="val 8276"/>
+              <a:gd name="adj" fmla="val 9091"/>
             </a:avLst>
           </a:prstGeom>
           <a:solidFill>
@@ -13239,7 +13239,7 @@
         <p:spPr>
           <a:xfrm>
             <a:off x="7799832" y="1801368"/>
-            <a:ext cx="3145536" cy="758952"/>
+            <a:ext cx="3145536" cy="640080"/>
           </a:xfrm>
           <a:prstGeom prst="rect">
             <a:avLst/>
@@ -13279,12 +13279,12 @@
         </p:nvSpPr>
         <p:spPr>
           <a:xfrm>
-            <a:off x="7635240" y="2788920"/>
-            <a:ext cx="3474720" cy="1536192"/>
+            <a:off x="7635240" y="2670048"/>
+            <a:ext cx="3474720" cy="1377086"/>
           </a:xfrm>
           <a:prstGeom prst="roundRect">
             <a:avLst>
-              <a:gd name="adj" fmla="val 7143"/>
+              <a:gd name="adj" fmla="val 7968"/>
             </a:avLst>
           </a:prstGeom>
           <a:solidFill>
@@ -13306,7 +13306,7 @@
         </p:nvSpPr>
         <p:spPr>
           <a:xfrm>
-            <a:off x="7799832" y="2935224"/>
+            <a:off x="7799832" y="2816352"/>
             <a:ext cx="3145536" cy="256032"/>
           </a:xfrm>
           <a:prstGeom prst="rect">
@@ -13345,8 +13345,8 @@
         </p:nvSpPr>
         <p:spPr>
           <a:xfrm>
-            <a:off x="7818120" y="3300984"/>
-            <a:ext cx="3090672" cy="877824"/>
+            <a:off x="7818120" y="3182112"/>
+            <a:ext cx="3090672" cy="718718"/>
           </a:xfrm>
           <a:prstGeom prst="rect">
             <a:avLst/>
@@ -13420,12 +13420,12 @@
         </p:nvSpPr>
         <p:spPr>
           <a:xfrm>
-            <a:off x="7635240" y="4498848"/>
-            <a:ext cx="3474720" cy="1143000"/>
+            <a:off x="7635240" y="4184294"/>
+            <a:ext cx="3474720" cy="1466698"/>
           </a:xfrm>
           <a:prstGeom prst="roundRect">
             <a:avLst>
-              <a:gd name="adj" fmla="val 9600"/>
+              <a:gd name="adj" fmla="val 7481"/>
             </a:avLst>
           </a:prstGeom>
           <a:solidFill>
@@ -13447,7 +13447,7 @@
         </p:nvSpPr>
         <p:spPr>
           <a:xfrm>
-            <a:off x="7799832" y="4645152"/>
+            <a:off x="7799832" y="4330598"/>
             <a:ext cx="3145536" cy="256032"/>
           </a:xfrm>
           <a:prstGeom prst="rect">
@@ -13486,8 +13486,8 @@
         </p:nvSpPr>
         <p:spPr>
           <a:xfrm>
-            <a:off x="7799832" y="4974336"/>
-            <a:ext cx="3145536" cy="576072"/>
+            <a:off x="7799832" y="4659782"/>
+            <a:ext cx="3145536" cy="899770"/>
           </a:xfrm>
           <a:prstGeom prst="rect">
             <a:avLst/>
@@ -13513,7 +13513,7 @@
                 <a:ea typeface="Aptos" pitchFamily="34" charset="-122"/>
                 <a:cs typeface="Aptos" pitchFamily="34" charset="-120"/>
               </a:rPr>
-              <a:t>Use the concept to clarify workflow changes, dependencies, staffing, procurement requirements, training needs, and.</a:t>
+              <a:t>Use the concept to clarify workflow changes, dependencies, staffing, procurement requirements, training needs, and implementation checkpoints.</a:t>
             </a:r>
             <a:endParaRPr lang="en-US" sz="1320" dirty="0"/>
           </a:p>
@@ -13991,7 +13991,7 @@
                 <a:ea typeface="Aptos" pitchFamily="34" charset="-122"/>
                 <a:cs typeface="Aptos" pitchFamily="34" charset="-120"/>
               </a:rPr>
-              <a:t>Use the related plays to identify decisions, participants, timing, approvals, and documentation needed for responsible.</a:t>
+              <a:t>Use the related plays to identify decisions, participants, timing, approvals, and documentation needed for responsible implementation.</a:t>
             </a:r>
             <a:endParaRPr lang="en-US" sz="1320" dirty="0"/>
           </a:p>
@@ -14610,7 +14610,7 @@
                 <a:ea typeface="Aptos" pitchFamily="34" charset="-122"/>
                 <a:cs typeface="Aptos" pitchFamily="34" charset="-120"/>
               </a:rPr>
-              <a:t>Use linked tools when your department needs a structured worksheet, template, checklist, review process, or.</a:t>
+              <a:t>Use linked tools when your department needs a structured worksheet, template, checklist, review process, or documentation artifact.</a:t>
             </a:r>
             <a:endParaRPr lang="en-US" sz="1320" dirty="0"/>
           </a:p>
@@ -15120,11 +15120,11 @@
         <p:spPr>
           <a:xfrm>
             <a:off x="7635240" y="1325880"/>
-            <a:ext cx="3474720" cy="1325880"/>
+            <a:ext cx="3474720" cy="1207008"/>
           </a:xfrm>
           <a:prstGeom prst="roundRect">
             <a:avLst>
-              <a:gd name="adj" fmla="val 8276"/>
+              <a:gd name="adj" fmla="val 9091"/>
             </a:avLst>
           </a:prstGeom>
           <a:solidFill>
@@ -15186,7 +15186,7 @@
         <p:spPr>
           <a:xfrm>
             <a:off x="7799832" y="1801368"/>
-            <a:ext cx="3145536" cy="758952"/>
+            <a:ext cx="3145536" cy="640080"/>
           </a:xfrm>
           <a:prstGeom prst="rect">
             <a:avLst/>
@@ -15226,12 +15226,12 @@
         </p:nvSpPr>
         <p:spPr>
           <a:xfrm>
-            <a:off x="7635240" y="2788920"/>
-            <a:ext cx="3474720" cy="1536192"/>
+            <a:off x="7635240" y="2670048"/>
+            <a:ext cx="3474720" cy="1377086"/>
           </a:xfrm>
           <a:prstGeom prst="roundRect">
             <a:avLst>
-              <a:gd name="adj" fmla="val 7143"/>
+              <a:gd name="adj" fmla="val 7968"/>
             </a:avLst>
           </a:prstGeom>
           <a:solidFill>
@@ -15253,7 +15253,7 @@
         </p:nvSpPr>
         <p:spPr>
           <a:xfrm>
-            <a:off x="7799832" y="2935224"/>
+            <a:off x="7799832" y="2816352"/>
             <a:ext cx="3145536" cy="256032"/>
           </a:xfrm>
           <a:prstGeom prst="rect">
@@ -15292,8 +15292,8 @@
         </p:nvSpPr>
         <p:spPr>
           <a:xfrm>
-            <a:off x="7818120" y="3300984"/>
-            <a:ext cx="3090672" cy="877824"/>
+            <a:off x="7818120" y="3182112"/>
+            <a:ext cx="3090672" cy="718718"/>
           </a:xfrm>
           <a:prstGeom prst="rect">
             <a:avLst/>
@@ -15350,12 +15350,12 @@
         </p:nvSpPr>
         <p:spPr>
           <a:xfrm>
-            <a:off x="7635240" y="4498848"/>
-            <a:ext cx="3474720" cy="1143000"/>
+            <a:off x="7635240" y="4184294"/>
+            <a:ext cx="3474720" cy="1466698"/>
           </a:xfrm>
           <a:prstGeom prst="roundRect">
             <a:avLst>
-              <a:gd name="adj" fmla="val 9600"/>
+              <a:gd name="adj" fmla="val 7481"/>
             </a:avLst>
           </a:prstGeom>
           <a:solidFill>
@@ -15377,7 +15377,7 @@
         </p:nvSpPr>
         <p:spPr>
           <a:xfrm>
-            <a:off x="7799832" y="4645152"/>
+            <a:off x="7799832" y="4330598"/>
             <a:ext cx="3145536" cy="256032"/>
           </a:xfrm>
           <a:prstGeom prst="rect">
@@ -15416,8 +15416,8 @@
         </p:nvSpPr>
         <p:spPr>
           <a:xfrm>
-            <a:off x="7799832" y="4974336"/>
-            <a:ext cx="3145536" cy="576072"/>
+            <a:off x="7799832" y="4659782"/>
+            <a:ext cx="3145536" cy="899770"/>
           </a:xfrm>
           <a:prstGeom prst="rect">
             <a:avLst/>
@@ -15443,7 +15443,7 @@
                 <a:ea typeface="Aptos" pitchFamily="34" charset="-122"/>
                 <a:cs typeface="Aptos" pitchFamily="34" charset="-120"/>
               </a:rPr>
-              <a:t>Use the assignment to test whether you can explain the concept, apply it to a realistic public health situation, and.</a:t>
+              <a:t>Use the assignment to test whether you can explain the concept, apply it to a realistic public health situation, and identify what would need review before the work moves forward.</a:t>
             </a:r>
             <a:endParaRPr lang="en-US" sz="1320" dirty="0"/>
           </a:p>
@@ -15812,11 +15812,11 @@
         <p:spPr>
           <a:xfrm>
             <a:off x="7635240" y="1325880"/>
-            <a:ext cx="3474720" cy="1325880"/>
+            <a:ext cx="3474720" cy="1207008"/>
           </a:xfrm>
           <a:prstGeom prst="roundRect">
             <a:avLst>
-              <a:gd name="adj" fmla="val 8276"/>
+              <a:gd name="adj" fmla="val 9091"/>
             </a:avLst>
           </a:prstGeom>
           <a:solidFill>
@@ -15878,7 +15878,7 @@
         <p:spPr>
           <a:xfrm>
             <a:off x="7799832" y="1801368"/>
-            <a:ext cx="3145536" cy="758952"/>
+            <a:ext cx="3145536" cy="640080"/>
           </a:xfrm>
           <a:prstGeom prst="rect">
             <a:avLst/>
@@ -15918,12 +15918,12 @@
         </p:nvSpPr>
         <p:spPr>
           <a:xfrm>
-            <a:off x="7635240" y="2788920"/>
-            <a:ext cx="3474720" cy="1536192"/>
+            <a:off x="7635240" y="2670048"/>
+            <a:ext cx="3474720" cy="1377086"/>
           </a:xfrm>
           <a:prstGeom prst="roundRect">
             <a:avLst>
-              <a:gd name="adj" fmla="val 7143"/>
+              <a:gd name="adj" fmla="val 7968"/>
             </a:avLst>
           </a:prstGeom>
           <a:solidFill>
@@ -15945,8 +15945,8 @@
         </p:nvSpPr>
         <p:spPr>
           <a:xfrm>
-            <a:off x="7799832" y="2935224"/>
-            <a:ext cx="3145536" cy="256032"/>
+            <a:off x="7799832" y="2798064"/>
+            <a:ext cx="3145536" cy="237744"/>
           </a:xfrm>
           <a:prstGeom prst="rect">
             <a:avLst/>
@@ -15962,7 +15962,7 @@
               <a:buNone/>
             </a:pPr>
             <a:r>
-              <a:rPr lang="en-US" sz="1300" b="1" dirty="0">
+              <a:rPr lang="en-US" sz="1250" b="1" dirty="0">
                 <a:solidFill>
                   <a:srgbClr val="0068B7"/>
                 </a:solidFill>
@@ -15970,84 +15970,317 @@
                 <a:ea typeface="Aptos" pitchFamily="34" charset="-122"/>
                 <a:cs typeface="Aptos" pitchFamily="34" charset="-120"/>
               </a:rPr>
-              <a:t>Concept checkpoints</a:t>
-            </a:r>
-            <a:endParaRPr lang="en-US" sz="1300" dirty="0"/>
-          </a:p>
-        </p:txBody>
-      </p:sp>
-      <p:sp>
-        <p:nvSpPr>
-          <p:cNvPr id="15" name="Text 13"/>
-          <p:cNvSpPr/>
-          <p:nvPr/>
-        </p:nvSpPr>
-        <p:spPr>
-          <a:xfrm>
-            <a:off x="7818120" y="3300984"/>
-            <a:ext cx="3090672" cy="877824"/>
-          </a:xfrm>
-          <a:prstGeom prst="rect">
-            <a:avLst/>
-          </a:prstGeom>
-          <a:noFill/>
-          <a:ln/>
-        </p:spPr>
-        <p:txBody>
-          <a:bodyPr wrap="square" lIns="508" tIns="508" rIns="508" bIns="508" rtlCol="0" anchor="t">
+              <a:t>Implementation path</a:t>
+            </a:r>
+            <a:endParaRPr lang="en-US" sz="1250" dirty="0"/>
+          </a:p>
+        </p:txBody>
+      </p:sp>
+      <p:sp>
+        <p:nvSpPr>
+          <p:cNvPr id="15" name="Shape 13"/>
+          <p:cNvSpPr/>
+          <p:nvPr/>
+        </p:nvSpPr>
+        <p:spPr>
+          <a:xfrm>
+            <a:off x="8763000" y="3351276"/>
+            <a:ext cx="164592" cy="0"/>
+          </a:xfrm>
+          <a:prstGeom prst="line">
+            <a:avLst/>
+          </a:prstGeom>
+          <a:noFill/>
+          <a:ln w="15240">
+            <a:solidFill>
+              <a:srgbClr val="8ABBD8"/>
+            </a:solidFill>
+            <a:prstDash val="solid"/>
+          </a:ln>
+        </p:spPr>
+      </p:sp>
+      <p:sp>
+        <p:nvSpPr>
+          <p:cNvPr id="16" name="Shape 14"/>
+          <p:cNvSpPr/>
+          <p:nvPr/>
+        </p:nvSpPr>
+        <p:spPr>
+          <a:xfrm>
+            <a:off x="7872984" y="3200400"/>
+            <a:ext cx="890016" cy="301752"/>
+          </a:xfrm>
+          <a:prstGeom prst="roundRect">
+            <a:avLst>
+              <a:gd name="adj" fmla="val 24242"/>
+            </a:avLst>
+          </a:prstGeom>
+          <a:solidFill>
+            <a:srgbClr val="0068B7"/>
+          </a:solidFill>
+          <a:ln w="12700">
+            <a:solidFill>
+              <a:srgbClr val="0068B7"/>
+            </a:solidFill>
+            <a:prstDash val="solid"/>
+          </a:ln>
+        </p:spPr>
+      </p:sp>
+      <p:sp>
+        <p:nvSpPr>
+          <p:cNvPr id="17" name="Text 15"/>
+          <p:cNvSpPr/>
+          <p:nvPr/>
+        </p:nvSpPr>
+        <p:spPr>
+          <a:xfrm>
+            <a:off x="7909560" y="3273552"/>
+            <a:ext cx="816864" cy="146304"/>
+          </a:xfrm>
+          <a:prstGeom prst="rect">
+            <a:avLst/>
+          </a:prstGeom>
+          <a:noFill/>
+          <a:ln/>
+        </p:spPr>
+        <p:txBody>
+          <a:bodyPr wrap="square" lIns="0" tIns="0" rIns="0" bIns="0" rtlCol="0" anchor="ctr">
             <a:normAutofit/>
           </a:bodyPr>
           <a:lstStyle/>
           <a:p>
-            <a:pPr indent="0" marL="0">
-              <a:buNone/>
-            </a:pPr>
-            <a:r>
-              <a:rPr lang="en-US" sz="1220" dirty="0">
-                <a:solidFill>
-                  <a:srgbClr val="17364A"/>
-                </a:solidFill>
-                <a:latin typeface="Aptos" pitchFamily="34" charset="0"/>
-                <a:ea typeface="Aptos" pitchFamily="34" charset="-122"/>
-                <a:cs typeface="Aptos" pitchFamily="34" charset="-120"/>
-              </a:rPr>
-              <a:t>It uses data from electronic health records and reporting logic to.</a:t>
-            </a:r>
-            <a:endParaRPr lang="en-US" sz="1220" dirty="0"/>
-          </a:p>
-          <a:p>
-            <a:pPr indent="0" marL="0">
-              <a:buNone/>
-            </a:pPr>
-            <a:r>
-              <a:rPr lang="en-US" sz="1220" dirty="0">
-                <a:solidFill>
-                  <a:srgbClr val="17364A"/>
-                </a:solidFill>
-                <a:latin typeface="Aptos" pitchFamily="34" charset="0"/>
-                <a:ea typeface="Aptos" pitchFamily="34" charset="-122"/>
-                <a:cs typeface="Aptos" pitchFamily="34" charset="-120"/>
-              </a:rPr>
-              <a:t>This module teaches learners how eCR works technically and how AI.</a:t>
-            </a:r>
-            <a:endParaRPr lang="en-US" sz="1220" dirty="0"/>
-          </a:p>
-        </p:txBody>
-      </p:sp>
-      <p:sp>
-        <p:nvSpPr>
-          <p:cNvPr id="16" name="Shape 14"/>
-          <p:cNvSpPr/>
-          <p:nvPr/>
-        </p:nvSpPr>
-        <p:spPr>
-          <a:xfrm>
-            <a:off x="7635240" y="4498848"/>
-            <a:ext cx="3474720" cy="1143000"/>
+            <a:pPr algn="ctr" indent="0" marL="0">
+              <a:buNone/>
+            </a:pPr>
+            <a:r>
+              <a:rPr lang="en-US" sz="880" b="1" dirty="0">
+                <a:solidFill>
+                  <a:srgbClr val="FFFFFF"/>
+                </a:solidFill>
+                <a:latin typeface="Aptos" pitchFamily="34" charset="0"/>
+                <a:ea typeface="Aptos" pitchFamily="34" charset="-122"/>
+                <a:cs typeface="Aptos" pitchFamily="34" charset="-120"/>
+              </a:rPr>
+              <a:t>Need</a:t>
+            </a:r>
+            <a:endParaRPr lang="en-US" sz="880" dirty="0"/>
+          </a:p>
+        </p:txBody>
+      </p:sp>
+      <p:sp>
+        <p:nvSpPr>
+          <p:cNvPr id="18" name="Shape 16"/>
+          <p:cNvSpPr/>
+          <p:nvPr/>
+        </p:nvSpPr>
+        <p:spPr>
+          <a:xfrm>
+            <a:off x="9817608" y="3351276"/>
+            <a:ext cx="164592" cy="0"/>
+          </a:xfrm>
+          <a:prstGeom prst="line">
+            <a:avLst/>
+          </a:prstGeom>
+          <a:noFill/>
+          <a:ln w="15240">
+            <a:solidFill>
+              <a:srgbClr val="8ABBD8"/>
+            </a:solidFill>
+            <a:prstDash val="solid"/>
+          </a:ln>
+        </p:spPr>
+      </p:sp>
+      <p:sp>
+        <p:nvSpPr>
+          <p:cNvPr id="19" name="Shape 17"/>
+          <p:cNvSpPr/>
+          <p:nvPr/>
+        </p:nvSpPr>
+        <p:spPr>
+          <a:xfrm>
+            <a:off x="8927592" y="3200400"/>
+            <a:ext cx="890016" cy="301752"/>
           </a:xfrm>
           <a:prstGeom prst="roundRect">
             <a:avLst>
-              <a:gd name="adj" fmla="val 9600"/>
+              <a:gd name="adj" fmla="val 24242"/>
+            </a:avLst>
+          </a:prstGeom>
+          <a:solidFill>
+            <a:srgbClr val="2F8A28"/>
+          </a:solidFill>
+          <a:ln w="12700">
+            <a:solidFill>
+              <a:srgbClr val="2F8A28"/>
+            </a:solidFill>
+            <a:prstDash val="solid"/>
+          </a:ln>
+        </p:spPr>
+      </p:sp>
+      <p:sp>
+        <p:nvSpPr>
+          <p:cNvPr id="20" name="Text 18"/>
+          <p:cNvSpPr/>
+          <p:nvPr/>
+        </p:nvSpPr>
+        <p:spPr>
+          <a:xfrm>
+            <a:off x="8964168" y="3273552"/>
+            <a:ext cx="816864" cy="146304"/>
+          </a:xfrm>
+          <a:prstGeom prst="rect">
+            <a:avLst/>
+          </a:prstGeom>
+          <a:noFill/>
+          <a:ln/>
+        </p:spPr>
+        <p:txBody>
+          <a:bodyPr wrap="square" lIns="0" tIns="0" rIns="0" bIns="0" rtlCol="0" anchor="ctr">
+            <a:normAutofit/>
+          </a:bodyPr>
+          <a:lstStyle/>
+          <a:p>
+            <a:pPr algn="ctr" indent="0" marL="0">
+              <a:buNone/>
+            </a:pPr>
+            <a:r>
+              <a:rPr lang="en-US" sz="880" b="1" dirty="0">
+                <a:solidFill>
+                  <a:srgbClr val="FFFFFF"/>
+                </a:solidFill>
+                <a:latin typeface="Aptos" pitchFamily="34" charset="0"/>
+                <a:ea typeface="Aptos" pitchFamily="34" charset="-122"/>
+                <a:cs typeface="Aptos" pitchFamily="34" charset="-120"/>
+              </a:rPr>
+              <a:t>Build</a:t>
+            </a:r>
+            <a:endParaRPr lang="en-US" sz="880" dirty="0"/>
+          </a:p>
+        </p:txBody>
+      </p:sp>
+      <p:sp>
+        <p:nvSpPr>
+          <p:cNvPr id="21" name="Shape 19"/>
+          <p:cNvSpPr/>
+          <p:nvPr/>
+        </p:nvSpPr>
+        <p:spPr>
+          <a:xfrm>
+            <a:off x="9982200" y="3200400"/>
+            <a:ext cx="890016" cy="301752"/>
+          </a:xfrm>
+          <a:prstGeom prst="roundRect">
+            <a:avLst>
+              <a:gd name="adj" fmla="val 24242"/>
+            </a:avLst>
+          </a:prstGeom>
+          <a:solidFill>
+            <a:srgbClr val="6A4CA3"/>
+          </a:solidFill>
+          <a:ln w="12700">
+            <a:solidFill>
+              <a:srgbClr val="6A4CA3"/>
+            </a:solidFill>
+            <a:prstDash val="solid"/>
+          </a:ln>
+        </p:spPr>
+      </p:sp>
+      <p:sp>
+        <p:nvSpPr>
+          <p:cNvPr id="22" name="Text 20"/>
+          <p:cNvSpPr/>
+          <p:nvPr/>
+        </p:nvSpPr>
+        <p:spPr>
+          <a:xfrm>
+            <a:off x="10018776" y="3273552"/>
+            <a:ext cx="816864" cy="146304"/>
+          </a:xfrm>
+          <a:prstGeom prst="rect">
+            <a:avLst/>
+          </a:prstGeom>
+          <a:noFill/>
+          <a:ln/>
+        </p:spPr>
+        <p:txBody>
+          <a:bodyPr wrap="square" lIns="0" tIns="0" rIns="0" bIns="0" rtlCol="0" anchor="ctr">
+            <a:normAutofit/>
+          </a:bodyPr>
+          <a:lstStyle/>
+          <a:p>
+            <a:pPr algn="ctr" indent="0" marL="0">
+              <a:buNone/>
+            </a:pPr>
+            <a:r>
+              <a:rPr lang="en-US" sz="880" b="1" dirty="0">
+                <a:solidFill>
+                  <a:srgbClr val="FFFFFF"/>
+                </a:solidFill>
+                <a:latin typeface="Aptos" pitchFamily="34" charset="0"/>
+                <a:ea typeface="Aptos" pitchFamily="34" charset="-122"/>
+                <a:cs typeface="Aptos" pitchFamily="34" charset="-120"/>
+              </a:rPr>
+              <a:t>Adopt</a:t>
+            </a:r>
+            <a:endParaRPr lang="en-US" sz="880" dirty="0"/>
+          </a:p>
+        </p:txBody>
+      </p:sp>
+      <p:sp>
+        <p:nvSpPr>
+          <p:cNvPr id="23" name="Text 21"/>
+          <p:cNvSpPr/>
+          <p:nvPr/>
+        </p:nvSpPr>
+        <p:spPr>
+          <a:xfrm>
+            <a:off x="7854696" y="3694176"/>
+            <a:ext cx="3035808" cy="206654"/>
+          </a:xfrm>
+          <a:prstGeom prst="rect">
+            <a:avLst/>
+          </a:prstGeom>
+          <a:noFill/>
+          <a:ln/>
+        </p:spPr>
+        <p:txBody>
+          <a:bodyPr wrap="square" lIns="254" tIns="254" rIns="254" bIns="254" rtlCol="0" anchor="t">
+            <a:normAutofit/>
+          </a:bodyPr>
+          <a:lstStyle/>
+          <a:p>
+            <a:pPr indent="0" marL="0">
+              <a:buNone/>
+            </a:pPr>
+            <a:r>
+              <a:rPr lang="en-US" sz="1120" dirty="0">
+                <a:solidFill>
+                  <a:srgbClr val="17364A"/>
+                </a:solidFill>
+                <a:latin typeface="Aptos" pitchFamily="34" charset="0"/>
+                <a:ea typeface="Aptos" pitchFamily="34" charset="-122"/>
+                <a:cs typeface="Aptos" pitchFamily="34" charset="-120"/>
+              </a:rPr>
+              <a:t>Implementation work should make dependencies, approvals, training, and sustainment visible before launch.</a:t>
+            </a:r>
+            <a:endParaRPr lang="en-US" sz="1120" dirty="0"/>
+          </a:p>
+        </p:txBody>
+      </p:sp>
+      <p:sp>
+        <p:nvSpPr>
+          <p:cNvPr id="24" name="Shape 22"/>
+          <p:cNvSpPr/>
+          <p:nvPr/>
+        </p:nvSpPr>
+        <p:spPr>
+          <a:xfrm>
+            <a:off x="7635240" y="4184294"/>
+            <a:ext cx="3474720" cy="1466698"/>
+          </a:xfrm>
+          <a:prstGeom prst="roundRect">
+            <a:avLst>
+              <a:gd name="adj" fmla="val 7481"/>
             </a:avLst>
           </a:prstGeom>
           <a:solidFill>
@@ -16063,13 +16296,13 @@
       </p:sp>
       <p:sp>
         <p:nvSpPr>
-          <p:cNvPr id="17" name="Text 15"/>
-          <p:cNvSpPr/>
-          <p:nvPr/>
-        </p:nvSpPr>
-        <p:spPr>
-          <a:xfrm>
-            <a:off x="7799832" y="4645152"/>
+          <p:cNvPr id="25" name="Text 23"/>
+          <p:cNvSpPr/>
+          <p:nvPr/>
+        </p:nvSpPr>
+        <p:spPr>
+          <a:xfrm>
+            <a:off x="7799832" y="4330598"/>
             <a:ext cx="3145536" cy="256032"/>
           </a:xfrm>
           <a:prstGeom prst="rect">
@@ -16102,14 +16335,14 @@
       </p:sp>
       <p:sp>
         <p:nvSpPr>
-          <p:cNvPr id="18" name="Text 16"/>
-          <p:cNvSpPr/>
-          <p:nvPr/>
-        </p:nvSpPr>
-        <p:spPr>
-          <a:xfrm>
-            <a:off x="7799832" y="4974336"/>
-            <a:ext cx="3145536" cy="576072"/>
+          <p:cNvPr id="26" name="Text 24"/>
+          <p:cNvSpPr/>
+          <p:nvPr/>
+        </p:nvSpPr>
+        <p:spPr>
+          <a:xfrm>
+            <a:off x="7799832" y="4659782"/>
+            <a:ext cx="3145536" cy="899770"/>
           </a:xfrm>
           <a:prstGeom prst="rect">
             <a:avLst/>
@@ -16135,7 +16368,7 @@
                 <a:ea typeface="Aptos" pitchFamily="34" charset="-122"/>
                 <a:cs typeface="Aptos" pitchFamily="34" charset="-120"/>
               </a:rPr>
-              <a:t>Use the concept to clarify workflow changes, dependencies, staffing, procurement requirements, training needs, and.</a:t>
+              <a:t>Use the concept to clarify workflow changes, dependencies, staffing, procurement requirements, training needs, and implementation checkpoints.</a:t>
             </a:r>
             <a:endParaRPr lang="en-US" sz="1320" dirty="0"/>
           </a:p>
@@ -16504,11 +16737,11 @@
         <p:spPr>
           <a:xfrm>
             <a:off x="7635240" y="1325880"/>
-            <a:ext cx="3474720" cy="1325880"/>
+            <a:ext cx="3474720" cy="1207008"/>
           </a:xfrm>
           <a:prstGeom prst="roundRect">
             <a:avLst>
-              <a:gd name="adj" fmla="val 8276"/>
+              <a:gd name="adj" fmla="val 9091"/>
             </a:avLst>
           </a:prstGeom>
           <a:solidFill>
@@ -16570,7 +16803,7 @@
         <p:spPr>
           <a:xfrm>
             <a:off x="7799832" y="1801368"/>
-            <a:ext cx="3145536" cy="758952"/>
+            <a:ext cx="3145536" cy="640080"/>
           </a:xfrm>
           <a:prstGeom prst="rect">
             <a:avLst/>
@@ -16610,12 +16843,12 @@
         </p:nvSpPr>
         <p:spPr>
           <a:xfrm>
-            <a:off x="7635240" y="2788920"/>
-            <a:ext cx="3474720" cy="1536192"/>
+            <a:off x="7635240" y="2670048"/>
+            <a:ext cx="3474720" cy="1377086"/>
           </a:xfrm>
           <a:prstGeom prst="roundRect">
             <a:avLst>
-              <a:gd name="adj" fmla="val 7143"/>
+              <a:gd name="adj" fmla="val 7968"/>
             </a:avLst>
           </a:prstGeom>
           <a:solidFill>
@@ -16637,8 +16870,8 @@
         </p:nvSpPr>
         <p:spPr>
           <a:xfrm>
-            <a:off x="7799832" y="2935224"/>
-            <a:ext cx="3145536" cy="256032"/>
+            <a:off x="7799832" y="2798064"/>
+            <a:ext cx="3145536" cy="237744"/>
           </a:xfrm>
           <a:prstGeom prst="rect">
             <a:avLst/>
@@ -16654,7 +16887,7 @@
               <a:buNone/>
             </a:pPr>
             <a:r>
-              <a:rPr lang="en-US" sz="1300" b="1" dirty="0">
+              <a:rPr lang="en-US" sz="1250" b="1" dirty="0">
                 <a:solidFill>
                   <a:srgbClr val="0068B7"/>
                 </a:solidFill>
@@ -16662,101 +16895,317 @@
                 <a:ea typeface="Aptos" pitchFamily="34" charset="-122"/>
                 <a:cs typeface="Aptos" pitchFamily="34" charset="-120"/>
               </a:rPr>
-              <a:t>Concept checkpoints</a:t>
-            </a:r>
-            <a:endParaRPr lang="en-US" sz="1300" dirty="0"/>
-          </a:p>
-        </p:txBody>
-      </p:sp>
-      <p:sp>
-        <p:nvSpPr>
-          <p:cNvPr id="15" name="Text 13"/>
-          <p:cNvSpPr/>
-          <p:nvPr/>
-        </p:nvSpPr>
-        <p:spPr>
-          <a:xfrm>
-            <a:off x="7818120" y="3300984"/>
-            <a:ext cx="3090672" cy="877824"/>
-          </a:xfrm>
-          <a:prstGeom prst="rect">
-            <a:avLst/>
-          </a:prstGeom>
-          <a:noFill/>
-          <a:ln/>
-        </p:spPr>
-        <p:txBody>
-          <a:bodyPr wrap="square" lIns="508" tIns="508" rIns="508" bIns="508" rtlCol="0" anchor="t">
+              <a:t>Governance pathway</a:t>
+            </a:r>
+            <a:endParaRPr lang="en-US" sz="1250" dirty="0"/>
+          </a:p>
+        </p:txBody>
+      </p:sp>
+      <p:sp>
+        <p:nvSpPr>
+          <p:cNvPr id="15" name="Shape 13"/>
+          <p:cNvSpPr/>
+          <p:nvPr/>
+        </p:nvSpPr>
+        <p:spPr>
+          <a:xfrm>
+            <a:off x="8763000" y="3351276"/>
+            <a:ext cx="164592" cy="0"/>
+          </a:xfrm>
+          <a:prstGeom prst="line">
+            <a:avLst/>
+          </a:prstGeom>
+          <a:noFill/>
+          <a:ln w="15240">
+            <a:solidFill>
+              <a:srgbClr val="8ABBD8"/>
+            </a:solidFill>
+            <a:prstDash val="solid"/>
+          </a:ln>
+        </p:spPr>
+      </p:sp>
+      <p:sp>
+        <p:nvSpPr>
+          <p:cNvPr id="16" name="Shape 14"/>
+          <p:cNvSpPr/>
+          <p:nvPr/>
+        </p:nvSpPr>
+        <p:spPr>
+          <a:xfrm>
+            <a:off x="7872984" y="3200400"/>
+            <a:ext cx="890016" cy="301752"/>
+          </a:xfrm>
+          <a:prstGeom prst="roundRect">
+            <a:avLst>
+              <a:gd name="adj" fmla="val 24242"/>
+            </a:avLst>
+          </a:prstGeom>
+          <a:solidFill>
+            <a:srgbClr val="0068B7"/>
+          </a:solidFill>
+          <a:ln w="12700">
+            <a:solidFill>
+              <a:srgbClr val="0068B7"/>
+            </a:solidFill>
+            <a:prstDash val="solid"/>
+          </a:ln>
+        </p:spPr>
+      </p:sp>
+      <p:sp>
+        <p:nvSpPr>
+          <p:cNvPr id="17" name="Text 15"/>
+          <p:cNvSpPr/>
+          <p:nvPr/>
+        </p:nvSpPr>
+        <p:spPr>
+          <a:xfrm>
+            <a:off x="7909560" y="3273552"/>
+            <a:ext cx="816864" cy="146304"/>
+          </a:xfrm>
+          <a:prstGeom prst="rect">
+            <a:avLst/>
+          </a:prstGeom>
+          <a:noFill/>
+          <a:ln/>
+        </p:spPr>
+        <p:txBody>
+          <a:bodyPr wrap="square" lIns="0" tIns="0" rIns="0" bIns="0" rtlCol="0" anchor="ctr">
             <a:normAutofit/>
           </a:bodyPr>
           <a:lstStyle/>
           <a:p>
-            <a:pPr indent="0" marL="0">
-              <a:buNone/>
-            </a:pPr>
-            <a:r>
-              <a:rPr lang="en-US" sz="1220" dirty="0">
-                <a:solidFill>
-                  <a:srgbClr val="17364A"/>
-                </a:solidFill>
-                <a:latin typeface="Aptos" pitchFamily="34" charset="0"/>
-                <a:ea typeface="Aptos" pitchFamily="34" charset="-122"/>
-                <a:cs typeface="Aptos" pitchFamily="34" charset="-120"/>
-              </a:rPr>
-              <a:t>This national-level module is intended for training and planning.</a:t>
-            </a:r>
-            <a:endParaRPr lang="en-US" sz="1220" dirty="0"/>
-          </a:p>
-          <a:p>
-            <a:pPr indent="0" marL="0">
-              <a:buNone/>
-            </a:pPr>
-            <a:r>
-              <a:rPr lang="en-US" sz="1220" dirty="0">
-                <a:solidFill>
-                  <a:srgbClr val="17364A"/>
-                </a:solidFill>
-                <a:latin typeface="Aptos" pitchFamily="34" charset="0"/>
-                <a:ea typeface="Aptos" pitchFamily="34" charset="-122"/>
-                <a:cs typeface="Aptos" pitchFamily="34" charset="-120"/>
-              </a:rPr>
-              <a:t>It does not replace legal, privacy, procurement, civil rights,.</a:t>
-            </a:r>
-            <a:endParaRPr lang="en-US" sz="1220" dirty="0"/>
-          </a:p>
-          <a:p>
-            <a:pPr indent="0" marL="0">
-              <a:buNone/>
-            </a:pPr>
-            <a:r>
-              <a:rPr lang="en-US" sz="1220" dirty="0">
-                <a:solidFill>
-                  <a:srgbClr val="17364A"/>
-                </a:solidFill>
-                <a:latin typeface="Aptos" pitchFamily="34" charset="0"/>
-                <a:ea typeface="Aptos" pitchFamily="34" charset="-122"/>
-                <a:cs typeface="Aptos" pitchFamily="34" charset="-120"/>
-              </a:rPr>
-              <a:t>Learners should confirm applicable requirements in their own.</a:t>
-            </a:r>
-            <a:endParaRPr lang="en-US" sz="1220" dirty="0"/>
-          </a:p>
-        </p:txBody>
-      </p:sp>
-      <p:sp>
-        <p:nvSpPr>
-          <p:cNvPr id="16" name="Shape 14"/>
-          <p:cNvSpPr/>
-          <p:nvPr/>
-        </p:nvSpPr>
-        <p:spPr>
-          <a:xfrm>
-            <a:off x="7635240" y="4498848"/>
-            <a:ext cx="3474720" cy="1143000"/>
+            <a:pPr algn="ctr" indent="0" marL="0">
+              <a:buNone/>
+            </a:pPr>
+            <a:r>
+              <a:rPr lang="en-US" sz="880" b="1" dirty="0">
+                <a:solidFill>
+                  <a:srgbClr val="FFFFFF"/>
+                </a:solidFill>
+                <a:latin typeface="Aptos" pitchFamily="34" charset="0"/>
+                <a:ea typeface="Aptos" pitchFamily="34" charset="-122"/>
+                <a:cs typeface="Aptos" pitchFamily="34" charset="-120"/>
+              </a:rPr>
+              <a:t>Submit</a:t>
+            </a:r>
+            <a:endParaRPr lang="en-US" sz="880" dirty="0"/>
+          </a:p>
+        </p:txBody>
+      </p:sp>
+      <p:sp>
+        <p:nvSpPr>
+          <p:cNvPr id="18" name="Shape 16"/>
+          <p:cNvSpPr/>
+          <p:nvPr/>
+        </p:nvSpPr>
+        <p:spPr>
+          <a:xfrm>
+            <a:off x="9817608" y="3351276"/>
+            <a:ext cx="164592" cy="0"/>
+          </a:xfrm>
+          <a:prstGeom prst="line">
+            <a:avLst/>
+          </a:prstGeom>
+          <a:noFill/>
+          <a:ln w="15240">
+            <a:solidFill>
+              <a:srgbClr val="8ABBD8"/>
+            </a:solidFill>
+            <a:prstDash val="solid"/>
+          </a:ln>
+        </p:spPr>
+      </p:sp>
+      <p:sp>
+        <p:nvSpPr>
+          <p:cNvPr id="19" name="Shape 17"/>
+          <p:cNvSpPr/>
+          <p:nvPr/>
+        </p:nvSpPr>
+        <p:spPr>
+          <a:xfrm>
+            <a:off x="8927592" y="3200400"/>
+            <a:ext cx="890016" cy="301752"/>
           </a:xfrm>
           <a:prstGeom prst="roundRect">
             <a:avLst>
-              <a:gd name="adj" fmla="val 9600"/>
+              <a:gd name="adj" fmla="val 24242"/>
+            </a:avLst>
+          </a:prstGeom>
+          <a:solidFill>
+            <a:srgbClr val="2F8A28"/>
+          </a:solidFill>
+          <a:ln w="12700">
+            <a:solidFill>
+              <a:srgbClr val="2F8A28"/>
+            </a:solidFill>
+            <a:prstDash val="solid"/>
+          </a:ln>
+        </p:spPr>
+      </p:sp>
+      <p:sp>
+        <p:nvSpPr>
+          <p:cNvPr id="20" name="Text 18"/>
+          <p:cNvSpPr/>
+          <p:nvPr/>
+        </p:nvSpPr>
+        <p:spPr>
+          <a:xfrm>
+            <a:off x="8964168" y="3273552"/>
+            <a:ext cx="816864" cy="146304"/>
+          </a:xfrm>
+          <a:prstGeom prst="rect">
+            <a:avLst/>
+          </a:prstGeom>
+          <a:noFill/>
+          <a:ln/>
+        </p:spPr>
+        <p:txBody>
+          <a:bodyPr wrap="square" lIns="0" tIns="0" rIns="0" bIns="0" rtlCol="0" anchor="ctr">
+            <a:normAutofit/>
+          </a:bodyPr>
+          <a:lstStyle/>
+          <a:p>
+            <a:pPr algn="ctr" indent="0" marL="0">
+              <a:buNone/>
+            </a:pPr>
+            <a:r>
+              <a:rPr lang="en-US" sz="880" b="1" dirty="0">
+                <a:solidFill>
+                  <a:srgbClr val="FFFFFF"/>
+                </a:solidFill>
+                <a:latin typeface="Aptos" pitchFamily="34" charset="0"/>
+                <a:ea typeface="Aptos" pitchFamily="34" charset="-122"/>
+                <a:cs typeface="Aptos" pitchFamily="34" charset="-120"/>
+              </a:rPr>
+              <a:t>Review</a:t>
+            </a:r>
+            <a:endParaRPr lang="en-US" sz="880" dirty="0"/>
+          </a:p>
+        </p:txBody>
+      </p:sp>
+      <p:sp>
+        <p:nvSpPr>
+          <p:cNvPr id="21" name="Shape 19"/>
+          <p:cNvSpPr/>
+          <p:nvPr/>
+        </p:nvSpPr>
+        <p:spPr>
+          <a:xfrm>
+            <a:off x="9982200" y="3200400"/>
+            <a:ext cx="890016" cy="301752"/>
+          </a:xfrm>
+          <a:prstGeom prst="roundRect">
+            <a:avLst>
+              <a:gd name="adj" fmla="val 24242"/>
+            </a:avLst>
+          </a:prstGeom>
+          <a:solidFill>
+            <a:srgbClr val="6A4CA3"/>
+          </a:solidFill>
+          <a:ln w="12700">
+            <a:solidFill>
+              <a:srgbClr val="6A4CA3"/>
+            </a:solidFill>
+            <a:prstDash val="solid"/>
+          </a:ln>
+        </p:spPr>
+      </p:sp>
+      <p:sp>
+        <p:nvSpPr>
+          <p:cNvPr id="22" name="Text 20"/>
+          <p:cNvSpPr/>
+          <p:nvPr/>
+        </p:nvSpPr>
+        <p:spPr>
+          <a:xfrm>
+            <a:off x="10018776" y="3273552"/>
+            <a:ext cx="816864" cy="146304"/>
+          </a:xfrm>
+          <a:prstGeom prst="rect">
+            <a:avLst/>
+          </a:prstGeom>
+          <a:noFill/>
+          <a:ln/>
+        </p:spPr>
+        <p:txBody>
+          <a:bodyPr wrap="square" lIns="0" tIns="0" rIns="0" bIns="0" rtlCol="0" anchor="ctr">
+            <a:normAutofit/>
+          </a:bodyPr>
+          <a:lstStyle/>
+          <a:p>
+            <a:pPr algn="ctr" indent="0" marL="0">
+              <a:buNone/>
+            </a:pPr>
+            <a:r>
+              <a:rPr lang="en-US" sz="880" b="1" dirty="0">
+                <a:solidFill>
+                  <a:srgbClr val="FFFFFF"/>
+                </a:solidFill>
+                <a:latin typeface="Aptos" pitchFamily="34" charset="0"/>
+                <a:ea typeface="Aptos" pitchFamily="34" charset="-122"/>
+                <a:cs typeface="Aptos" pitchFamily="34" charset="-120"/>
+              </a:rPr>
+              <a:t>Oversee</a:t>
+            </a:r>
+            <a:endParaRPr lang="en-US" sz="880" dirty="0"/>
+          </a:p>
+        </p:txBody>
+      </p:sp>
+      <p:sp>
+        <p:nvSpPr>
+          <p:cNvPr id="23" name="Text 21"/>
+          <p:cNvSpPr/>
+          <p:nvPr/>
+        </p:nvSpPr>
+        <p:spPr>
+          <a:xfrm>
+            <a:off x="7854696" y="3694176"/>
+            <a:ext cx="3035808" cy="206654"/>
+          </a:xfrm>
+          <a:prstGeom prst="rect">
+            <a:avLst/>
+          </a:prstGeom>
+          <a:noFill/>
+          <a:ln/>
+        </p:spPr>
+        <p:txBody>
+          <a:bodyPr wrap="square" lIns="254" tIns="254" rIns="254" bIns="254" rtlCol="0" anchor="t">
+            <a:normAutofit/>
+          </a:bodyPr>
+          <a:lstStyle/>
+          <a:p>
+            <a:pPr indent="0" marL="0">
+              <a:buNone/>
+            </a:pPr>
+            <a:r>
+              <a:rPr lang="en-US" sz="1120" dirty="0">
+                <a:solidFill>
+                  <a:srgbClr val="17364A"/>
+                </a:solidFill>
+                <a:latin typeface="Aptos" pitchFamily="34" charset="0"/>
+                <a:ea typeface="Aptos" pitchFamily="34" charset="-122"/>
+                <a:cs typeface="Aptos" pitchFamily="34" charset="-120"/>
+              </a:rPr>
+              <a:t>A proposed AI use should move through documented review before it becomes an operational workflow.</a:t>
+            </a:r>
+            <a:endParaRPr lang="en-US" sz="1120" dirty="0"/>
+          </a:p>
+        </p:txBody>
+      </p:sp>
+      <p:sp>
+        <p:nvSpPr>
+          <p:cNvPr id="24" name="Shape 22"/>
+          <p:cNvSpPr/>
+          <p:nvPr/>
+        </p:nvSpPr>
+        <p:spPr>
+          <a:xfrm>
+            <a:off x="7635240" y="4184294"/>
+            <a:ext cx="3474720" cy="1466698"/>
+          </a:xfrm>
+          <a:prstGeom prst="roundRect">
+            <a:avLst>
+              <a:gd name="adj" fmla="val 7481"/>
             </a:avLst>
           </a:prstGeom>
           <a:solidFill>
@@ -16772,13 +17221,13 @@
       </p:sp>
       <p:sp>
         <p:nvSpPr>
-          <p:cNvPr id="17" name="Text 15"/>
-          <p:cNvSpPr/>
-          <p:nvPr/>
-        </p:nvSpPr>
-        <p:spPr>
-          <a:xfrm>
-            <a:off x="7799832" y="4645152"/>
+          <p:cNvPr id="25" name="Text 23"/>
+          <p:cNvSpPr/>
+          <p:nvPr/>
+        </p:nvSpPr>
+        <p:spPr>
+          <a:xfrm>
+            <a:off x="7799832" y="4330598"/>
             <a:ext cx="3145536" cy="256032"/>
           </a:xfrm>
           <a:prstGeom prst="rect">
@@ -16811,14 +17260,14 @@
       </p:sp>
       <p:sp>
         <p:nvSpPr>
-          <p:cNvPr id="18" name="Text 16"/>
-          <p:cNvSpPr/>
-          <p:nvPr/>
-        </p:nvSpPr>
-        <p:spPr>
-          <a:xfrm>
-            <a:off x="7799832" y="4974336"/>
-            <a:ext cx="3145536" cy="576072"/>
+          <p:cNvPr id="26" name="Text 24"/>
+          <p:cNvSpPr/>
+          <p:nvPr/>
+        </p:nvSpPr>
+        <p:spPr>
+          <a:xfrm>
+            <a:off x="7799832" y="4659782"/>
+            <a:ext cx="3145536" cy="899770"/>
           </a:xfrm>
           <a:prstGeom prst="rect">
             <a:avLst/>
@@ -16844,7 +17293,7 @@
                 <a:ea typeface="Aptos" pitchFamily="34" charset="-122"/>
                 <a:cs typeface="Aptos" pitchFamily="34" charset="-120"/>
               </a:rPr>
-              <a:t>Translate this concept into clear decision rights, review steps, documentation expectations, and escalation paths before.</a:t>
+              <a:t>Translate this concept into clear decision rights, review steps, documentation expectations, and escalation paths before an AI-supported workflow is approved.</a:t>
             </a:r>
             <a:endParaRPr lang="en-US" sz="1320" dirty="0"/>
           </a:p>
@@ -17213,11 +17662,11 @@
         <p:spPr>
           <a:xfrm>
             <a:off x="7635240" y="1325880"/>
-            <a:ext cx="3474720" cy="1325880"/>
+            <a:ext cx="3474720" cy="1255471"/>
           </a:xfrm>
           <a:prstGeom prst="roundRect">
             <a:avLst>
-              <a:gd name="adj" fmla="val 8276"/>
+              <a:gd name="adj" fmla="val 8740"/>
             </a:avLst>
           </a:prstGeom>
           <a:solidFill>
@@ -17279,7 +17728,7 @@
         <p:spPr>
           <a:xfrm>
             <a:off x="7799832" y="1801368"/>
-            <a:ext cx="3145536" cy="758952"/>
+            <a:ext cx="3145536" cy="688543"/>
           </a:xfrm>
           <a:prstGeom prst="rect">
             <a:avLst/>
@@ -17319,12 +17768,12 @@
         </p:nvSpPr>
         <p:spPr>
           <a:xfrm>
-            <a:off x="7635240" y="2788920"/>
-            <a:ext cx="3474720" cy="1536192"/>
+            <a:off x="7635240" y="2718511"/>
+            <a:ext cx="3474720" cy="1328623"/>
           </a:xfrm>
           <a:prstGeom prst="roundRect">
             <a:avLst>
-              <a:gd name="adj" fmla="val 7143"/>
+              <a:gd name="adj" fmla="val 8259"/>
             </a:avLst>
           </a:prstGeom>
           <a:solidFill>
@@ -17346,8 +17795,8 @@
         </p:nvSpPr>
         <p:spPr>
           <a:xfrm>
-            <a:off x="7799832" y="2935224"/>
-            <a:ext cx="3145536" cy="256032"/>
+            <a:off x="7799832" y="2846527"/>
+            <a:ext cx="3145536" cy="237744"/>
           </a:xfrm>
           <a:prstGeom prst="rect">
             <a:avLst/>
@@ -17363,7 +17812,7 @@
               <a:buNone/>
             </a:pPr>
             <a:r>
-              <a:rPr lang="en-US" sz="1300" b="1" dirty="0">
+              <a:rPr lang="en-US" sz="1250" b="1" dirty="0">
                 <a:solidFill>
                   <a:srgbClr val="0068B7"/>
                 </a:solidFill>
@@ -17371,101 +17820,317 @@
                 <a:ea typeface="Aptos" pitchFamily="34" charset="-122"/>
                 <a:cs typeface="Aptos" pitchFamily="34" charset="-120"/>
               </a:rPr>
-              <a:t>Concept checkpoints</a:t>
-            </a:r>
-            <a:endParaRPr lang="en-US" sz="1300" dirty="0"/>
-          </a:p>
-        </p:txBody>
-      </p:sp>
-      <p:sp>
-        <p:nvSpPr>
-          <p:cNvPr id="15" name="Text 13"/>
-          <p:cNvSpPr/>
-          <p:nvPr/>
-        </p:nvSpPr>
-        <p:spPr>
-          <a:xfrm>
-            <a:off x="7818120" y="3300984"/>
-            <a:ext cx="3090672" cy="877824"/>
-          </a:xfrm>
-          <a:prstGeom prst="rect">
-            <a:avLst/>
-          </a:prstGeom>
-          <a:noFill/>
-          <a:ln/>
-        </p:spPr>
-        <p:txBody>
-          <a:bodyPr wrap="square" lIns="508" tIns="508" rIns="508" bIns="508" rtlCol="0" anchor="t">
+              <a:t>Implementation path</a:t>
+            </a:r>
+            <a:endParaRPr lang="en-US" sz="1250" dirty="0"/>
+          </a:p>
+        </p:txBody>
+      </p:sp>
+      <p:sp>
+        <p:nvSpPr>
+          <p:cNvPr id="15" name="Shape 13"/>
+          <p:cNvSpPr/>
+          <p:nvPr/>
+        </p:nvSpPr>
+        <p:spPr>
+          <a:xfrm>
+            <a:off x="8763000" y="3399739"/>
+            <a:ext cx="164592" cy="0"/>
+          </a:xfrm>
+          <a:prstGeom prst="line">
+            <a:avLst/>
+          </a:prstGeom>
+          <a:noFill/>
+          <a:ln w="15240">
+            <a:solidFill>
+              <a:srgbClr val="8ABBD8"/>
+            </a:solidFill>
+            <a:prstDash val="solid"/>
+          </a:ln>
+        </p:spPr>
+      </p:sp>
+      <p:sp>
+        <p:nvSpPr>
+          <p:cNvPr id="16" name="Shape 14"/>
+          <p:cNvSpPr/>
+          <p:nvPr/>
+        </p:nvSpPr>
+        <p:spPr>
+          <a:xfrm>
+            <a:off x="7872984" y="3248863"/>
+            <a:ext cx="890016" cy="301752"/>
+          </a:xfrm>
+          <a:prstGeom prst="roundRect">
+            <a:avLst>
+              <a:gd name="adj" fmla="val 24242"/>
+            </a:avLst>
+          </a:prstGeom>
+          <a:solidFill>
+            <a:srgbClr val="0068B7"/>
+          </a:solidFill>
+          <a:ln w="12700">
+            <a:solidFill>
+              <a:srgbClr val="0068B7"/>
+            </a:solidFill>
+            <a:prstDash val="solid"/>
+          </a:ln>
+        </p:spPr>
+      </p:sp>
+      <p:sp>
+        <p:nvSpPr>
+          <p:cNvPr id="17" name="Text 15"/>
+          <p:cNvSpPr/>
+          <p:nvPr/>
+        </p:nvSpPr>
+        <p:spPr>
+          <a:xfrm>
+            <a:off x="7909560" y="3322015"/>
+            <a:ext cx="816864" cy="146304"/>
+          </a:xfrm>
+          <a:prstGeom prst="rect">
+            <a:avLst/>
+          </a:prstGeom>
+          <a:noFill/>
+          <a:ln/>
+        </p:spPr>
+        <p:txBody>
+          <a:bodyPr wrap="square" lIns="0" tIns="0" rIns="0" bIns="0" rtlCol="0" anchor="ctr">
             <a:normAutofit/>
           </a:bodyPr>
           <a:lstStyle/>
           <a:p>
-            <a:pPr indent="0" marL="0">
-              <a:buNone/>
-            </a:pPr>
-            <a:r>
-              <a:rPr lang="en-US" sz="1220" dirty="0">
-                <a:solidFill>
-                  <a:srgbClr val="17364A"/>
-                </a:solidFill>
-                <a:latin typeface="Aptos" pitchFamily="34" charset="0"/>
-                <a:ea typeface="Aptos" pitchFamily="34" charset="-122"/>
-                <a:cs typeface="Aptos" pitchFamily="34" charset="-120"/>
-              </a:rPr>
-              <a:t>eCR matters for AI because it brings structured, timely,.</a:t>
-            </a:r>
-            <a:endParaRPr lang="en-US" sz="1220" dirty="0"/>
-          </a:p>
-          <a:p>
-            <a:pPr indent="0" marL="0">
-              <a:buNone/>
-            </a:pPr>
-            <a:r>
-              <a:rPr lang="en-US" sz="1220" dirty="0">
-                <a:solidFill>
-                  <a:srgbClr val="17364A"/>
-                </a:solidFill>
-                <a:latin typeface="Aptos" pitchFamily="34" charset="0"/>
-                <a:ea typeface="Aptos" pitchFamily="34" charset="-122"/>
-                <a:cs typeface="Aptos" pitchFamily="34" charset="-120"/>
-              </a:rPr>
-              <a:t>It includes trigger logic, routing, standards, jurisdictional.</a:t>
-            </a:r>
-            <a:endParaRPr lang="en-US" sz="1220" dirty="0"/>
-          </a:p>
-          <a:p>
-            <a:pPr indent="0" marL="0">
-              <a:buNone/>
-            </a:pPr>
-            <a:r>
-              <a:rPr lang="en-US" sz="1220" dirty="0">
-                <a:solidFill>
-                  <a:srgbClr val="17364A"/>
-                </a:solidFill>
-                <a:latin typeface="Aptos" pitchFamily="34" charset="0"/>
-                <a:ea typeface="Aptos" pitchFamily="34" charset="-122"/>
-                <a:cs typeface="Aptos" pitchFamily="34" charset="-120"/>
-              </a:rPr>
-              <a:t>AI may support eCR by summarizing incoming reports, identifying.</a:t>
-            </a:r>
-            <a:endParaRPr lang="en-US" sz="1220" dirty="0"/>
-          </a:p>
-        </p:txBody>
-      </p:sp>
-      <p:sp>
-        <p:nvSpPr>
-          <p:cNvPr id="16" name="Shape 14"/>
-          <p:cNvSpPr/>
-          <p:nvPr/>
-        </p:nvSpPr>
-        <p:spPr>
-          <a:xfrm>
-            <a:off x="7635240" y="4498848"/>
-            <a:ext cx="3474720" cy="1143000"/>
+            <a:pPr algn="ctr" indent="0" marL="0">
+              <a:buNone/>
+            </a:pPr>
+            <a:r>
+              <a:rPr lang="en-US" sz="880" b="1" dirty="0">
+                <a:solidFill>
+                  <a:srgbClr val="FFFFFF"/>
+                </a:solidFill>
+                <a:latin typeface="Aptos" pitchFamily="34" charset="0"/>
+                <a:ea typeface="Aptos" pitchFamily="34" charset="-122"/>
+                <a:cs typeface="Aptos" pitchFamily="34" charset="-120"/>
+              </a:rPr>
+              <a:t>Need</a:t>
+            </a:r>
+            <a:endParaRPr lang="en-US" sz="880" dirty="0"/>
+          </a:p>
+        </p:txBody>
+      </p:sp>
+      <p:sp>
+        <p:nvSpPr>
+          <p:cNvPr id="18" name="Shape 16"/>
+          <p:cNvSpPr/>
+          <p:nvPr/>
+        </p:nvSpPr>
+        <p:spPr>
+          <a:xfrm>
+            <a:off x="9817608" y="3399739"/>
+            <a:ext cx="164592" cy="0"/>
+          </a:xfrm>
+          <a:prstGeom prst="line">
+            <a:avLst/>
+          </a:prstGeom>
+          <a:noFill/>
+          <a:ln w="15240">
+            <a:solidFill>
+              <a:srgbClr val="8ABBD8"/>
+            </a:solidFill>
+            <a:prstDash val="solid"/>
+          </a:ln>
+        </p:spPr>
+      </p:sp>
+      <p:sp>
+        <p:nvSpPr>
+          <p:cNvPr id="19" name="Shape 17"/>
+          <p:cNvSpPr/>
+          <p:nvPr/>
+        </p:nvSpPr>
+        <p:spPr>
+          <a:xfrm>
+            <a:off x="8927592" y="3248863"/>
+            <a:ext cx="890016" cy="301752"/>
           </a:xfrm>
           <a:prstGeom prst="roundRect">
             <a:avLst>
-              <a:gd name="adj" fmla="val 9600"/>
+              <a:gd name="adj" fmla="val 24242"/>
+            </a:avLst>
+          </a:prstGeom>
+          <a:solidFill>
+            <a:srgbClr val="2F8A28"/>
+          </a:solidFill>
+          <a:ln w="12700">
+            <a:solidFill>
+              <a:srgbClr val="2F8A28"/>
+            </a:solidFill>
+            <a:prstDash val="solid"/>
+          </a:ln>
+        </p:spPr>
+      </p:sp>
+      <p:sp>
+        <p:nvSpPr>
+          <p:cNvPr id="20" name="Text 18"/>
+          <p:cNvSpPr/>
+          <p:nvPr/>
+        </p:nvSpPr>
+        <p:spPr>
+          <a:xfrm>
+            <a:off x="8964168" y="3322015"/>
+            <a:ext cx="816864" cy="146304"/>
+          </a:xfrm>
+          <a:prstGeom prst="rect">
+            <a:avLst/>
+          </a:prstGeom>
+          <a:noFill/>
+          <a:ln/>
+        </p:spPr>
+        <p:txBody>
+          <a:bodyPr wrap="square" lIns="0" tIns="0" rIns="0" bIns="0" rtlCol="0" anchor="ctr">
+            <a:normAutofit/>
+          </a:bodyPr>
+          <a:lstStyle/>
+          <a:p>
+            <a:pPr algn="ctr" indent="0" marL="0">
+              <a:buNone/>
+            </a:pPr>
+            <a:r>
+              <a:rPr lang="en-US" sz="880" b="1" dirty="0">
+                <a:solidFill>
+                  <a:srgbClr val="FFFFFF"/>
+                </a:solidFill>
+                <a:latin typeface="Aptos" pitchFamily="34" charset="0"/>
+                <a:ea typeface="Aptos" pitchFamily="34" charset="-122"/>
+                <a:cs typeface="Aptos" pitchFamily="34" charset="-120"/>
+              </a:rPr>
+              <a:t>Build</a:t>
+            </a:r>
+            <a:endParaRPr lang="en-US" sz="880" dirty="0"/>
+          </a:p>
+        </p:txBody>
+      </p:sp>
+      <p:sp>
+        <p:nvSpPr>
+          <p:cNvPr id="21" name="Shape 19"/>
+          <p:cNvSpPr/>
+          <p:nvPr/>
+        </p:nvSpPr>
+        <p:spPr>
+          <a:xfrm>
+            <a:off x="9982200" y="3248863"/>
+            <a:ext cx="890016" cy="301752"/>
+          </a:xfrm>
+          <a:prstGeom prst="roundRect">
+            <a:avLst>
+              <a:gd name="adj" fmla="val 24242"/>
+            </a:avLst>
+          </a:prstGeom>
+          <a:solidFill>
+            <a:srgbClr val="6A4CA3"/>
+          </a:solidFill>
+          <a:ln w="12700">
+            <a:solidFill>
+              <a:srgbClr val="6A4CA3"/>
+            </a:solidFill>
+            <a:prstDash val="solid"/>
+          </a:ln>
+        </p:spPr>
+      </p:sp>
+      <p:sp>
+        <p:nvSpPr>
+          <p:cNvPr id="22" name="Text 20"/>
+          <p:cNvSpPr/>
+          <p:nvPr/>
+        </p:nvSpPr>
+        <p:spPr>
+          <a:xfrm>
+            <a:off x="10018776" y="3322015"/>
+            <a:ext cx="816864" cy="146304"/>
+          </a:xfrm>
+          <a:prstGeom prst="rect">
+            <a:avLst/>
+          </a:prstGeom>
+          <a:noFill/>
+          <a:ln/>
+        </p:spPr>
+        <p:txBody>
+          <a:bodyPr wrap="square" lIns="0" tIns="0" rIns="0" bIns="0" rtlCol="0" anchor="ctr">
+            <a:normAutofit/>
+          </a:bodyPr>
+          <a:lstStyle/>
+          <a:p>
+            <a:pPr algn="ctr" indent="0" marL="0">
+              <a:buNone/>
+            </a:pPr>
+            <a:r>
+              <a:rPr lang="en-US" sz="880" b="1" dirty="0">
+                <a:solidFill>
+                  <a:srgbClr val="FFFFFF"/>
+                </a:solidFill>
+                <a:latin typeface="Aptos" pitchFamily="34" charset="0"/>
+                <a:ea typeface="Aptos" pitchFamily="34" charset="-122"/>
+                <a:cs typeface="Aptos" pitchFamily="34" charset="-120"/>
+              </a:rPr>
+              <a:t>Adopt</a:t>
+            </a:r>
+            <a:endParaRPr lang="en-US" sz="880" dirty="0"/>
+          </a:p>
+        </p:txBody>
+      </p:sp>
+      <p:sp>
+        <p:nvSpPr>
+          <p:cNvPr id="23" name="Text 21"/>
+          <p:cNvSpPr/>
+          <p:nvPr/>
+        </p:nvSpPr>
+        <p:spPr>
+          <a:xfrm>
+            <a:off x="7854696" y="3742639"/>
+            <a:ext cx="3035808" cy="158191"/>
+          </a:xfrm>
+          <a:prstGeom prst="rect">
+            <a:avLst/>
+          </a:prstGeom>
+          <a:noFill/>
+          <a:ln/>
+        </p:spPr>
+        <p:txBody>
+          <a:bodyPr wrap="square" lIns="254" tIns="254" rIns="254" bIns="254" rtlCol="0" anchor="t">
+            <a:normAutofit/>
+          </a:bodyPr>
+          <a:lstStyle/>
+          <a:p>
+            <a:pPr indent="0" marL="0">
+              <a:buNone/>
+            </a:pPr>
+            <a:r>
+              <a:rPr lang="en-US" sz="1120" dirty="0">
+                <a:solidFill>
+                  <a:srgbClr val="17364A"/>
+                </a:solidFill>
+                <a:latin typeface="Aptos" pitchFamily="34" charset="0"/>
+                <a:ea typeface="Aptos" pitchFamily="34" charset="-122"/>
+                <a:cs typeface="Aptos" pitchFamily="34" charset="-120"/>
+              </a:rPr>
+              <a:t>Implementation work should make dependencies, approvals, training, and sustainment visible before launch.</a:t>
+            </a:r>
+            <a:endParaRPr lang="en-US" sz="1120" dirty="0"/>
+          </a:p>
+        </p:txBody>
+      </p:sp>
+      <p:sp>
+        <p:nvSpPr>
+          <p:cNvPr id="24" name="Shape 22"/>
+          <p:cNvSpPr/>
+          <p:nvPr/>
+        </p:nvSpPr>
+        <p:spPr>
+          <a:xfrm>
+            <a:off x="7635240" y="4184294"/>
+            <a:ext cx="3474720" cy="1466698"/>
+          </a:xfrm>
+          <a:prstGeom prst="roundRect">
+            <a:avLst>
+              <a:gd name="adj" fmla="val 7481"/>
             </a:avLst>
           </a:prstGeom>
           <a:solidFill>
@@ -17481,13 +18146,13 @@
       </p:sp>
       <p:sp>
         <p:nvSpPr>
-          <p:cNvPr id="17" name="Text 15"/>
-          <p:cNvSpPr/>
-          <p:nvPr/>
-        </p:nvSpPr>
-        <p:spPr>
-          <a:xfrm>
-            <a:off x="7799832" y="4645152"/>
+          <p:cNvPr id="25" name="Text 23"/>
+          <p:cNvSpPr/>
+          <p:nvPr/>
+        </p:nvSpPr>
+        <p:spPr>
+          <a:xfrm>
+            <a:off x="7799832" y="4330598"/>
             <a:ext cx="3145536" cy="256032"/>
           </a:xfrm>
           <a:prstGeom prst="rect">
@@ -17520,14 +18185,14 @@
       </p:sp>
       <p:sp>
         <p:nvSpPr>
-          <p:cNvPr id="18" name="Text 16"/>
-          <p:cNvSpPr/>
-          <p:nvPr/>
-        </p:nvSpPr>
-        <p:spPr>
-          <a:xfrm>
-            <a:off x="7799832" y="4974336"/>
-            <a:ext cx="3145536" cy="576072"/>
+          <p:cNvPr id="26" name="Text 24"/>
+          <p:cNvSpPr/>
+          <p:nvPr/>
+        </p:nvSpPr>
+        <p:spPr>
+          <a:xfrm>
+            <a:off x="7799832" y="4659782"/>
+            <a:ext cx="3145536" cy="899770"/>
           </a:xfrm>
           <a:prstGeom prst="rect">
             <a:avLst/>
@@ -17553,7 +18218,7 @@
                 <a:ea typeface="Aptos" pitchFamily="34" charset="-122"/>
                 <a:cs typeface="Aptos" pitchFamily="34" charset="-120"/>
               </a:rPr>
-              <a:t>Use the concept to clarify workflow changes, dependencies, staffing, procurement requirements, training needs, and.</a:t>
+              <a:t>Use the concept to clarify workflow changes, dependencies, staffing, procurement requirements, training needs, and implementation checkpoints.</a:t>
             </a:r>
             <a:endParaRPr lang="en-US" sz="1320" dirty="0"/>
           </a:p>
@@ -17922,11 +18587,11 @@
         <p:spPr>
           <a:xfrm>
             <a:off x="7635240" y="1325880"/>
-            <a:ext cx="3474720" cy="1325880"/>
+            <a:ext cx="3474720" cy="1207008"/>
           </a:xfrm>
           <a:prstGeom prst="roundRect">
             <a:avLst>
-              <a:gd name="adj" fmla="val 8276"/>
+              <a:gd name="adj" fmla="val 9091"/>
             </a:avLst>
           </a:prstGeom>
           <a:solidFill>
@@ -17988,7 +18653,7 @@
         <p:spPr>
           <a:xfrm>
             <a:off x="7799832" y="1801368"/>
-            <a:ext cx="3145536" cy="758952"/>
+            <a:ext cx="3145536" cy="640080"/>
           </a:xfrm>
           <a:prstGeom prst="rect">
             <a:avLst/>
@@ -18028,12 +18693,12 @@
         </p:nvSpPr>
         <p:spPr>
           <a:xfrm>
-            <a:off x="7635240" y="2788920"/>
-            <a:ext cx="3474720" cy="1536192"/>
+            <a:off x="7635240" y="2670048"/>
+            <a:ext cx="3474720" cy="1377086"/>
           </a:xfrm>
           <a:prstGeom prst="roundRect">
             <a:avLst>
-              <a:gd name="adj" fmla="val 7143"/>
+              <a:gd name="adj" fmla="val 7968"/>
             </a:avLst>
           </a:prstGeom>
           <a:solidFill>
@@ -18055,7 +18720,7 @@
         </p:nvSpPr>
         <p:spPr>
           <a:xfrm>
-            <a:off x="7799832" y="2935224"/>
+            <a:off x="7799832" y="2816352"/>
             <a:ext cx="3145536" cy="256032"/>
           </a:xfrm>
           <a:prstGeom prst="rect">
@@ -18094,8 +18759,8 @@
         </p:nvSpPr>
         <p:spPr>
           <a:xfrm>
-            <a:off x="7818120" y="3300984"/>
-            <a:ext cx="3090672" cy="877824"/>
+            <a:off x="7818120" y="3182112"/>
+            <a:ext cx="3090672" cy="718718"/>
           </a:xfrm>
           <a:prstGeom prst="rect">
             <a:avLst/>
@@ -18169,12 +18834,12 @@
         </p:nvSpPr>
         <p:spPr>
           <a:xfrm>
-            <a:off x="7635240" y="4498848"/>
-            <a:ext cx="3474720" cy="1143000"/>
+            <a:off x="7635240" y="4184294"/>
+            <a:ext cx="3474720" cy="1466698"/>
           </a:xfrm>
           <a:prstGeom prst="roundRect">
             <a:avLst>
-              <a:gd name="adj" fmla="val 9600"/>
+              <a:gd name="adj" fmla="val 7481"/>
             </a:avLst>
           </a:prstGeom>
           <a:solidFill>
@@ -18196,7 +18861,7 @@
         </p:nvSpPr>
         <p:spPr>
           <a:xfrm>
-            <a:off x="7799832" y="4645152"/>
+            <a:off x="7799832" y="4330598"/>
             <a:ext cx="3145536" cy="256032"/>
           </a:xfrm>
           <a:prstGeom prst="rect">
@@ -18235,8 +18900,8 @@
         </p:nvSpPr>
         <p:spPr>
           <a:xfrm>
-            <a:off x="7799832" y="4974336"/>
-            <a:ext cx="3145536" cy="576072"/>
+            <a:off x="7799832" y="4659782"/>
+            <a:ext cx="3145536" cy="899770"/>
           </a:xfrm>
           <a:prstGeom prst="rect">
             <a:avLst/>
@@ -18262,7 +18927,7 @@
                 <a:ea typeface="Aptos" pitchFamily="34" charset="-122"/>
                 <a:cs typeface="Aptos" pitchFamily="34" charset="-120"/>
               </a:rPr>
-              <a:t>Use the concept to clarify workflow changes, dependencies, staffing, procurement requirements, training needs, and.</a:t>
+              <a:t>Use the concept to clarify workflow changes, dependencies, staffing, procurement requirements, training needs, and implementation checkpoints.</a:t>
             </a:r>
             <a:endParaRPr lang="en-US" sz="1320" dirty="0"/>
           </a:p>

--- a/downloads/presentations/modules/arc-230.pptx
+++ b/downloads/presentations/modules/arc-230.pptx
@@ -3431,8 +3431,8 @@
         </p:nvSpPr>
         <p:spPr>
           <a:xfrm>
-            <a:off x="868680" y="1508760"/>
-            <a:ext cx="6309360" cy="4160520"/>
+            <a:off x="822960" y="1463040"/>
+            <a:ext cx="6565392" cy="4343400"/>
           </a:xfrm>
           <a:prstGeom prst="rect">
             <a:avLst/>
@@ -3450,7 +3450,7 @@
               <a:buNone/>
             </a:pPr>
             <a:r>
-              <a:rPr lang="en-US" sz="2100" dirty="0">
+              <a:rPr lang="en-US" sz="1920" dirty="0">
                 <a:solidFill>
                   <a:srgbClr val="003A63"/>
                 </a:solidFill>
@@ -3460,14 +3460,14 @@
               </a:rPr>
               <a:t>• eRSD and RCTC.</a:t>
             </a:r>
-            <a:endParaRPr lang="en-US" sz="2100" dirty="0"/>
-          </a:p>
-          <a:p>
-            <a:pPr indent="0" marL="0">
-              <a:buNone/>
-            </a:pPr>
-            <a:r>
-              <a:rPr lang="en-US" sz="2100" dirty="0">
+            <a:endParaRPr lang="en-US" sz="1920" dirty="0"/>
+          </a:p>
+          <a:p>
+            <a:pPr indent="0" marL="0">
+              <a:buNone/>
+            </a:pPr>
+            <a:r>
+              <a:rPr lang="en-US" sz="1920" dirty="0">
                 <a:solidFill>
                   <a:srgbClr val="003A63"/>
                 </a:solidFill>
@@ -3475,16 +3475,16 @@
                 <a:ea typeface="Aptos" pitchFamily="34" charset="-122"/>
                 <a:cs typeface="Aptos" pitchFamily="34" charset="-120"/>
               </a:rPr>
-              <a:t>• Electronic Reporting and Surveillance Distribution supports the distribution of reporting.</a:t>
-            </a:r>
-            <a:endParaRPr lang="en-US" sz="2100" dirty="0"/>
-          </a:p>
-          <a:p>
-            <a:pPr indent="0" marL="0">
-              <a:buNone/>
-            </a:pPr>
-            <a:r>
-              <a:rPr lang="en-US" sz="2100" dirty="0">
+              <a:t>• Electronic Reporting and Surveillance Distribution supports the distribution.</a:t>
+            </a:r>
+            <a:endParaRPr lang="en-US" sz="1920" dirty="0"/>
+          </a:p>
+          <a:p>
+            <a:pPr indent="0" marL="0">
+              <a:buNone/>
+            </a:pPr>
+            <a:r>
+              <a:rPr lang="en-US" sz="1920" dirty="0">
                 <a:solidFill>
                   <a:srgbClr val="003A63"/>
                 </a:solidFill>
@@ -3492,9 +3492,9 @@
                 <a:ea typeface="Aptos" pitchFamily="34" charset="-122"/>
                 <a:cs typeface="Aptos" pitchFamily="34" charset="-120"/>
               </a:rPr>
-              <a:t>• Reportable Conditions Trigger Codes help EHRs determine when an eICR should be generated.</a:t>
-            </a:r>
-            <a:endParaRPr lang="en-US" sz="2100" dirty="0"/>
+              <a:t>• Reportable Conditions Trigger Codes help EHRs determine when an eICR should.</a:t>
+            </a:r>
+            <a:endParaRPr lang="en-US" sz="1920" dirty="0"/>
           </a:p>
         </p:txBody>
       </p:sp>
@@ -3506,12 +3506,12 @@
         </p:nvSpPr>
         <p:spPr>
           <a:xfrm>
-            <a:off x="7635240" y="1325880"/>
-            <a:ext cx="3474720" cy="1207008"/>
+            <a:off x="7543800" y="1325880"/>
+            <a:ext cx="3611880" cy="1261872"/>
           </a:xfrm>
           <a:prstGeom prst="roundRect">
             <a:avLst>
-              <a:gd name="adj" fmla="val 9091"/>
+              <a:gd name="adj" fmla="val 8696"/>
             </a:avLst>
           </a:prstGeom>
           <a:solidFill>
@@ -3533,8 +3533,8 @@
         </p:nvSpPr>
         <p:spPr>
           <a:xfrm>
-            <a:off x="7799832" y="1472184"/>
-            <a:ext cx="3145536" cy="256032"/>
+            <a:off x="7708392" y="1453896"/>
+            <a:ext cx="3282696" cy="228600"/>
           </a:xfrm>
           <a:prstGeom prst="rect">
             <a:avLst/>
@@ -3550,7 +3550,7 @@
               <a:buNone/>
             </a:pPr>
             <a:r>
-              <a:rPr lang="en-US" sz="1300" b="1" dirty="0">
+              <a:rPr lang="en-US" sz="1220" b="1" dirty="0">
                 <a:solidFill>
                   <a:srgbClr val="0068B7"/>
                 </a:solidFill>
@@ -3560,7 +3560,7 @@
               </a:rPr>
               <a:t>Implementation cue</a:t>
             </a:r>
-            <a:endParaRPr lang="en-US" sz="1300" dirty="0"/>
+            <a:endParaRPr lang="en-US" sz="1220" dirty="0"/>
           </a:p>
         </p:txBody>
       </p:sp>
@@ -3572,8 +3572,8 @@
         </p:nvSpPr>
         <p:spPr>
           <a:xfrm>
-            <a:off x="7799832" y="1801368"/>
-            <a:ext cx="3145536" cy="640080"/>
+            <a:off x="7708392" y="1764792"/>
+            <a:ext cx="3282696" cy="749808"/>
           </a:xfrm>
           <a:prstGeom prst="rect">
             <a:avLst/>
@@ -3591,7 +3591,7 @@
               <a:buNone/>
             </a:pPr>
             <a:r>
-              <a:rPr lang="en-US" sz="1320" dirty="0">
+              <a:rPr lang="en-US" sz="1220" dirty="0">
                 <a:solidFill>
                   <a:srgbClr val="17364A"/>
                 </a:solidFill>
@@ -3601,7 +3601,7 @@
               </a:rPr>
               <a:t>eRSD and RCTC.</a:t>
             </a:r>
-            <a:endParaRPr lang="en-US" sz="1320" dirty="0"/>
+            <a:endParaRPr lang="en-US" sz="1220" dirty="0"/>
           </a:p>
         </p:txBody>
       </p:sp>
@@ -3613,12 +3613,12 @@
         </p:nvSpPr>
         <p:spPr>
           <a:xfrm>
-            <a:off x="7635240" y="2670048"/>
-            <a:ext cx="3474720" cy="1377086"/>
+            <a:off x="7543800" y="2724912"/>
+            <a:ext cx="3611880" cy="1527048"/>
           </a:xfrm>
           <a:prstGeom prst="roundRect">
             <a:avLst>
-              <a:gd name="adj" fmla="val 7968"/>
+              <a:gd name="adj" fmla="val 7186"/>
             </a:avLst>
           </a:prstGeom>
           <a:solidFill>
@@ -3640,8 +3640,8 @@
         </p:nvSpPr>
         <p:spPr>
           <a:xfrm>
-            <a:off x="7799832" y="2816352"/>
-            <a:ext cx="3145536" cy="256032"/>
+            <a:off x="7708392" y="2852928"/>
+            <a:ext cx="3282696" cy="228600"/>
           </a:xfrm>
           <a:prstGeom prst="rect">
             <a:avLst/>
@@ -3657,7 +3657,7 @@
               <a:buNone/>
             </a:pPr>
             <a:r>
-              <a:rPr lang="en-US" sz="1300" b="1" dirty="0">
+              <a:rPr lang="en-US" sz="1220" b="1" dirty="0">
                 <a:solidFill>
                   <a:srgbClr val="0068B7"/>
                 </a:solidFill>
@@ -3667,7 +3667,7 @@
               </a:rPr>
               <a:t>Concept checkpoints</a:t>
             </a:r>
-            <a:endParaRPr lang="en-US" sz="1300" dirty="0"/>
+            <a:endParaRPr lang="en-US" sz="1220" dirty="0"/>
           </a:p>
         </p:txBody>
       </p:sp>
@@ -3679,8 +3679,8 @@
         </p:nvSpPr>
         <p:spPr>
           <a:xfrm>
-            <a:off x="7818120" y="3182112"/>
-            <a:ext cx="3090672" cy="718718"/>
+            <a:off x="7726680" y="3182112"/>
+            <a:ext cx="3227832" cy="960120"/>
           </a:xfrm>
           <a:prstGeom prst="rect">
             <a:avLst/>
@@ -3698,7 +3698,7 @@
               <a:buNone/>
             </a:pPr>
             <a:r>
-              <a:rPr lang="en-US" sz="1220" dirty="0">
+              <a:rPr lang="en-US" sz="1140" dirty="0">
                 <a:solidFill>
                   <a:srgbClr val="17364A"/>
                 </a:solidFill>
@@ -3706,16 +3706,16 @@
                 <a:ea typeface="Aptos" pitchFamily="34" charset="-122"/>
                 <a:cs typeface="Aptos" pitchFamily="34" charset="-120"/>
               </a:rPr>
-              <a:t>Electronic Reporting and Surveillance Distribution supports the.</a:t>
-            </a:r>
-            <a:endParaRPr lang="en-US" sz="1220" dirty="0"/>
-          </a:p>
-          <a:p>
-            <a:pPr indent="0" marL="0">
-              <a:buNone/>
-            </a:pPr>
-            <a:r>
-              <a:rPr lang="en-US" sz="1220" dirty="0">
+              <a:t>Electronic Reporting and Surveillance Distribution.</a:t>
+            </a:r>
+            <a:endParaRPr lang="en-US" sz="1140" dirty="0"/>
+          </a:p>
+          <a:p>
+            <a:pPr indent="0" marL="0">
+              <a:buNone/>
+            </a:pPr>
+            <a:r>
+              <a:rPr lang="en-US" sz="1140" dirty="0">
                 <a:solidFill>
                   <a:srgbClr val="17364A"/>
                 </a:solidFill>
@@ -3723,9 +3723,9 @@
                 <a:ea typeface="Aptos" pitchFamily="34" charset="-122"/>
                 <a:cs typeface="Aptos" pitchFamily="34" charset="-120"/>
               </a:rPr>
-              <a:t>These components are essential to reliable and current triggering.</a:t>
-            </a:r>
-            <a:endParaRPr lang="en-US" sz="1220" dirty="0"/>
+              <a:t>These components are essential to reliable and.</a:t>
+            </a:r>
+            <a:endParaRPr lang="en-US" sz="1140" dirty="0"/>
           </a:p>
         </p:txBody>
       </p:sp>
@@ -3737,12 +3737,12 @@
         </p:nvSpPr>
         <p:spPr>
           <a:xfrm>
-            <a:off x="7635240" y="4184294"/>
-            <a:ext cx="3474720" cy="1466698"/>
+            <a:off x="7543800" y="4389120"/>
+            <a:ext cx="3611880" cy="1261872"/>
           </a:xfrm>
           <a:prstGeom prst="roundRect">
             <a:avLst>
-              <a:gd name="adj" fmla="val 7481"/>
+              <a:gd name="adj" fmla="val 8696"/>
             </a:avLst>
           </a:prstGeom>
           <a:solidFill>
@@ -3764,8 +3764,8 @@
         </p:nvSpPr>
         <p:spPr>
           <a:xfrm>
-            <a:off x="7799832" y="4330598"/>
-            <a:ext cx="3145536" cy="256032"/>
+            <a:off x="7708392" y="4517136"/>
+            <a:ext cx="3282696" cy="228600"/>
           </a:xfrm>
           <a:prstGeom prst="rect">
             <a:avLst/>
@@ -3781,7 +3781,7 @@
               <a:buNone/>
             </a:pPr>
             <a:r>
-              <a:rPr lang="en-US" sz="1300" b="1" dirty="0">
+              <a:rPr lang="en-US" sz="1220" b="1" dirty="0">
                 <a:solidFill>
                   <a:srgbClr val="0068B7"/>
                 </a:solidFill>
@@ -3791,7 +3791,7 @@
               </a:rPr>
               <a:t>Next action</a:t>
             </a:r>
-            <a:endParaRPr lang="en-US" sz="1300" dirty="0"/>
+            <a:endParaRPr lang="en-US" sz="1220" dirty="0"/>
           </a:p>
         </p:txBody>
       </p:sp>
@@ -3803,8 +3803,8 @@
         </p:nvSpPr>
         <p:spPr>
           <a:xfrm>
-            <a:off x="7799832" y="4659782"/>
-            <a:ext cx="3145536" cy="899770"/>
+            <a:off x="7708392" y="4828032"/>
+            <a:ext cx="3282696" cy="749808"/>
           </a:xfrm>
           <a:prstGeom prst="rect">
             <a:avLst/>
@@ -3822,7 +3822,7 @@
               <a:buNone/>
             </a:pPr>
             <a:r>
-              <a:rPr lang="en-US" sz="1320" dirty="0">
+              <a:rPr lang="en-US" sz="1220" dirty="0">
                 <a:solidFill>
                   <a:srgbClr val="17364A"/>
                 </a:solidFill>
@@ -3830,9 +3830,9 @@
                 <a:ea typeface="Aptos" pitchFamily="34" charset="-122"/>
                 <a:cs typeface="Aptos" pitchFamily="34" charset="-120"/>
               </a:rPr>
-              <a:t>Use the concept to clarify workflow changes, dependencies, staffing, procurement requirements, training needs, and implementation checkpoints.</a:t>
-            </a:r>
-            <a:endParaRPr lang="en-US" sz="1320" dirty="0"/>
+              <a:t>Use the concept to clarify workflow changes, dependencies, staffing, procurement.</a:t>
+            </a:r>
+            <a:endParaRPr lang="en-US" sz="1220" dirty="0"/>
           </a:p>
         </p:txBody>
       </p:sp>
@@ -4123,8 +4123,8 @@
         </p:nvSpPr>
         <p:spPr>
           <a:xfrm>
-            <a:off x="868680" y="1508760"/>
-            <a:ext cx="6309360" cy="4160520"/>
+            <a:off x="822960" y="1463040"/>
+            <a:ext cx="6565392" cy="4343400"/>
           </a:xfrm>
           <a:prstGeom prst="rect">
             <a:avLst/>
@@ -4142,7 +4142,7 @@
               <a:buNone/>
             </a:pPr>
             <a:r>
-              <a:rPr lang="en-US" sz="2100" dirty="0">
+              <a:rPr lang="en-US" sz="1920" dirty="0">
                 <a:solidFill>
                   <a:srgbClr val="003A63"/>
                 </a:solidFill>
@@ -4150,16 +4150,16 @@
                 <a:ea typeface="Aptos" pitchFamily="34" charset="-122"/>
                 <a:cs typeface="Aptos" pitchFamily="34" charset="-120"/>
               </a:rPr>
-              <a:t>• A jurisdiction may receive eICRs for a reportable condition and want AI to create an.</a:t>
-            </a:r>
-            <a:endParaRPr lang="en-US" sz="2100" dirty="0"/>
-          </a:p>
-          <a:p>
-            <a:pPr indent="0" marL="0">
-              <a:buNone/>
-            </a:pPr>
-            <a:r>
-              <a:rPr lang="en-US" sz="2100" dirty="0">
+              <a:t>• A jurisdiction may receive eICRs for a reportable condition and want AI to.</a:t>
+            </a:r>
+            <a:endParaRPr lang="en-US" sz="1920" dirty="0"/>
+          </a:p>
+          <a:p>
+            <a:pPr indent="0" marL="0">
+              <a:buNone/>
+            </a:pPr>
+            <a:r>
+              <a:rPr lang="en-US" sz="1920" dirty="0">
                 <a:solidFill>
                   <a:srgbClr val="003A63"/>
                 </a:solidFill>
@@ -4167,16 +4167,16 @@
                 <a:ea typeface="Aptos" pitchFamily="34" charset="-122"/>
                 <a:cs typeface="Aptos" pitchFamily="34" charset="-120"/>
               </a:rPr>
-              <a:t>• The tool could highlight the suspected condition, key dates, lab evidence, symptoms, provider.</a:t>
-            </a:r>
-            <a:endParaRPr lang="en-US" sz="2100" dirty="0"/>
-          </a:p>
-          <a:p>
-            <a:pPr indent="0" marL="0">
-              <a:buNone/>
-            </a:pPr>
-            <a:r>
-              <a:rPr lang="en-US" sz="2100" dirty="0">
+              <a:t>• The tool could highlight the suspected condition, key dates, lab evidence,.</a:t>
+            </a:r>
+            <a:endParaRPr lang="en-US" sz="1920" dirty="0"/>
+          </a:p>
+          <a:p>
+            <a:pPr indent="0" marL="0">
+              <a:buNone/>
+            </a:pPr>
+            <a:r>
+              <a:rPr lang="en-US" sz="1920" dirty="0">
                 <a:solidFill>
                   <a:srgbClr val="003A63"/>
                 </a:solidFill>
@@ -4184,9 +4184,9 @@
                 <a:ea typeface="Aptos" pitchFamily="34" charset="-122"/>
                 <a:cs typeface="Aptos" pitchFamily="34" charset="-120"/>
               </a:rPr>
-              <a:t>• This could reduce staff burden, but only if users can inspect the source data and correct.</a:t>
-            </a:r>
-            <a:endParaRPr lang="en-US" sz="2100" dirty="0"/>
+              <a:t>• This could reduce staff burden, but only if users can inspect the source.</a:t>
+            </a:r>
+            <a:endParaRPr lang="en-US" sz="1920" dirty="0"/>
           </a:p>
         </p:txBody>
       </p:sp>
@@ -4198,12 +4198,12 @@
         </p:nvSpPr>
         <p:spPr>
           <a:xfrm>
-            <a:off x="7635240" y="1325880"/>
-            <a:ext cx="3474720" cy="1207008"/>
+            <a:off x="7543800" y="1325880"/>
+            <a:ext cx="3611880" cy="1261872"/>
           </a:xfrm>
           <a:prstGeom prst="roundRect">
             <a:avLst>
-              <a:gd name="adj" fmla="val 9091"/>
+              <a:gd name="adj" fmla="val 8696"/>
             </a:avLst>
           </a:prstGeom>
           <a:solidFill>
@@ -4225,8 +4225,8 @@
         </p:nvSpPr>
         <p:spPr>
           <a:xfrm>
-            <a:off x="7799832" y="1472184"/>
-            <a:ext cx="3145536" cy="256032"/>
+            <a:off x="7708392" y="1453896"/>
+            <a:ext cx="3282696" cy="228600"/>
           </a:xfrm>
           <a:prstGeom prst="rect">
             <a:avLst/>
@@ -4242,7 +4242,7 @@
               <a:buNone/>
             </a:pPr>
             <a:r>
-              <a:rPr lang="en-US" sz="1300" b="1" dirty="0">
+              <a:rPr lang="en-US" sz="1220" b="1" dirty="0">
                 <a:solidFill>
                   <a:srgbClr val="0068B7"/>
                 </a:solidFill>
@@ -4252,7 +4252,7 @@
               </a:rPr>
               <a:t>Implementation cue</a:t>
             </a:r>
-            <a:endParaRPr lang="en-US" sz="1300" dirty="0"/>
+            <a:endParaRPr lang="en-US" sz="1220" dirty="0"/>
           </a:p>
         </p:txBody>
       </p:sp>
@@ -4264,8 +4264,8 @@
         </p:nvSpPr>
         <p:spPr>
           <a:xfrm>
-            <a:off x="7799832" y="1801368"/>
-            <a:ext cx="3145536" cy="640080"/>
+            <a:off x="7708392" y="1764792"/>
+            <a:ext cx="3282696" cy="749808"/>
           </a:xfrm>
           <a:prstGeom prst="rect">
             <a:avLst/>
@@ -4283,7 +4283,7 @@
               <a:buNone/>
             </a:pPr>
             <a:r>
-              <a:rPr lang="en-US" sz="1320" dirty="0">
+              <a:rPr lang="en-US" sz="1220" dirty="0">
                 <a:solidFill>
                   <a:srgbClr val="17364A"/>
                 </a:solidFill>
@@ -4291,9 +4291,9 @@
                 <a:ea typeface="Aptos" pitchFamily="34" charset="-122"/>
                 <a:cs typeface="Aptos" pitchFamily="34" charset="-120"/>
               </a:rPr>
-              <a:t>A jurisdiction may receive eICRs for a reportable condition and want AI to create an.</a:t>
-            </a:r>
-            <a:endParaRPr lang="en-US" sz="1320" dirty="0"/>
+              <a:t>A jurisdiction may receive eICRs for a reportable condition and want AI to.</a:t>
+            </a:r>
+            <a:endParaRPr lang="en-US" sz="1220" dirty="0"/>
           </a:p>
         </p:txBody>
       </p:sp>
@@ -4305,12 +4305,12 @@
         </p:nvSpPr>
         <p:spPr>
           <a:xfrm>
-            <a:off x="7635240" y="2670048"/>
-            <a:ext cx="3474720" cy="1377086"/>
+            <a:off x="7543800" y="2724912"/>
+            <a:ext cx="3611880" cy="1527048"/>
           </a:xfrm>
           <a:prstGeom prst="roundRect">
             <a:avLst>
-              <a:gd name="adj" fmla="val 7968"/>
+              <a:gd name="adj" fmla="val 7186"/>
             </a:avLst>
           </a:prstGeom>
           <a:solidFill>
@@ -4332,8 +4332,8 @@
         </p:nvSpPr>
         <p:spPr>
           <a:xfrm>
-            <a:off x="7799832" y="2816352"/>
-            <a:ext cx="3145536" cy="256032"/>
+            <a:off x="7708392" y="2852928"/>
+            <a:ext cx="3282696" cy="228600"/>
           </a:xfrm>
           <a:prstGeom prst="rect">
             <a:avLst/>
@@ -4349,7 +4349,7 @@
               <a:buNone/>
             </a:pPr>
             <a:r>
-              <a:rPr lang="en-US" sz="1300" b="1" dirty="0">
+              <a:rPr lang="en-US" sz="1220" b="1" dirty="0">
                 <a:solidFill>
                   <a:srgbClr val="0068B7"/>
                 </a:solidFill>
@@ -4359,7 +4359,7 @@
               </a:rPr>
               <a:t>Concept checkpoints</a:t>
             </a:r>
-            <a:endParaRPr lang="en-US" sz="1300" dirty="0"/>
+            <a:endParaRPr lang="en-US" sz="1220" dirty="0"/>
           </a:p>
         </p:txBody>
       </p:sp>
@@ -4371,8 +4371,8 @@
         </p:nvSpPr>
         <p:spPr>
           <a:xfrm>
-            <a:off x="7818120" y="3182112"/>
-            <a:ext cx="3090672" cy="718718"/>
+            <a:off x="7726680" y="3182112"/>
+            <a:ext cx="3227832" cy="960120"/>
           </a:xfrm>
           <a:prstGeom prst="rect">
             <a:avLst/>
@@ -4390,7 +4390,7 @@
               <a:buNone/>
             </a:pPr>
             <a:r>
-              <a:rPr lang="en-US" sz="1220" dirty="0">
+              <a:rPr lang="en-US" sz="1140" dirty="0">
                 <a:solidFill>
                   <a:srgbClr val="17364A"/>
                 </a:solidFill>
@@ -4398,16 +4398,16 @@
                 <a:ea typeface="Aptos" pitchFamily="34" charset="-122"/>
                 <a:cs typeface="Aptos" pitchFamily="34" charset="-120"/>
               </a:rPr>
-              <a:t>A jurisdiction may receive eICRs for a reportable condition and.</a:t>
-            </a:r>
-            <a:endParaRPr lang="en-US" sz="1220" dirty="0"/>
-          </a:p>
-          <a:p>
-            <a:pPr indent="0" marL="0">
-              <a:buNone/>
-            </a:pPr>
-            <a:r>
-              <a:rPr lang="en-US" sz="1220" dirty="0">
+              <a:t>A jurisdiction may receive eICRs for a reportable.</a:t>
+            </a:r>
+            <a:endParaRPr lang="en-US" sz="1140" dirty="0"/>
+          </a:p>
+          <a:p>
+            <a:pPr indent="0" marL="0">
+              <a:buNone/>
+            </a:pPr>
+            <a:r>
+              <a:rPr lang="en-US" sz="1140" dirty="0">
                 <a:solidFill>
                   <a:srgbClr val="17364A"/>
                 </a:solidFill>
@@ -4415,16 +4415,16 @@
                 <a:ea typeface="Aptos" pitchFamily="34" charset="-122"/>
                 <a:cs typeface="Aptos" pitchFamily="34" charset="-120"/>
               </a:rPr>
-              <a:t>The tool could highlight the suspected condition, key dates, lab.</a:t>
-            </a:r>
-            <a:endParaRPr lang="en-US" sz="1220" dirty="0"/>
-          </a:p>
-          <a:p>
-            <a:pPr indent="0" marL="0">
-              <a:buNone/>
-            </a:pPr>
-            <a:r>
-              <a:rPr lang="en-US" sz="1220" dirty="0">
+              <a:t>The tool could highlight the suspected condition,.</a:t>
+            </a:r>
+            <a:endParaRPr lang="en-US" sz="1140" dirty="0"/>
+          </a:p>
+          <a:p>
+            <a:pPr indent="0" marL="0">
+              <a:buNone/>
+            </a:pPr>
+            <a:r>
+              <a:rPr lang="en-US" sz="1140" dirty="0">
                 <a:solidFill>
                   <a:srgbClr val="17364A"/>
                 </a:solidFill>
@@ -4432,9 +4432,9 @@
                 <a:ea typeface="Aptos" pitchFamily="34" charset="-122"/>
                 <a:cs typeface="Aptos" pitchFamily="34" charset="-120"/>
               </a:rPr>
-              <a:t>Another jurisdiction may want to use AI to triage incoming eICRs.</a:t>
-            </a:r>
-            <a:endParaRPr lang="en-US" sz="1220" dirty="0"/>
+              <a:t>Another jurisdiction may want to use AI to triage.</a:t>
+            </a:r>
+            <a:endParaRPr lang="en-US" sz="1140" dirty="0"/>
           </a:p>
         </p:txBody>
       </p:sp>
@@ -4446,12 +4446,12 @@
         </p:nvSpPr>
         <p:spPr>
           <a:xfrm>
-            <a:off x="7635240" y="4184294"/>
-            <a:ext cx="3474720" cy="1466698"/>
+            <a:off x="7543800" y="4389120"/>
+            <a:ext cx="3611880" cy="1261872"/>
           </a:xfrm>
           <a:prstGeom prst="roundRect">
             <a:avLst>
-              <a:gd name="adj" fmla="val 7481"/>
+              <a:gd name="adj" fmla="val 8696"/>
             </a:avLst>
           </a:prstGeom>
           <a:solidFill>
@@ -4473,8 +4473,8 @@
         </p:nvSpPr>
         <p:spPr>
           <a:xfrm>
-            <a:off x="7799832" y="4330598"/>
-            <a:ext cx="3145536" cy="256032"/>
+            <a:off x="7708392" y="4517136"/>
+            <a:ext cx="3282696" cy="228600"/>
           </a:xfrm>
           <a:prstGeom prst="rect">
             <a:avLst/>
@@ -4490,7 +4490,7 @@
               <a:buNone/>
             </a:pPr>
             <a:r>
-              <a:rPr lang="en-US" sz="1300" b="1" dirty="0">
+              <a:rPr lang="en-US" sz="1220" b="1" dirty="0">
                 <a:solidFill>
                   <a:srgbClr val="0068B7"/>
                 </a:solidFill>
@@ -4500,7 +4500,7 @@
               </a:rPr>
               <a:t>Next action</a:t>
             </a:r>
-            <a:endParaRPr lang="en-US" sz="1300" dirty="0"/>
+            <a:endParaRPr lang="en-US" sz="1220" dirty="0"/>
           </a:p>
         </p:txBody>
       </p:sp>
@@ -4512,8 +4512,8 @@
         </p:nvSpPr>
         <p:spPr>
           <a:xfrm>
-            <a:off x="7799832" y="4659782"/>
-            <a:ext cx="3145536" cy="899770"/>
+            <a:off x="7708392" y="4828032"/>
+            <a:ext cx="3282696" cy="749808"/>
           </a:xfrm>
           <a:prstGeom prst="rect">
             <a:avLst/>
@@ -4531,7 +4531,7 @@
               <a:buNone/>
             </a:pPr>
             <a:r>
-              <a:rPr lang="en-US" sz="1320" dirty="0">
+              <a:rPr lang="en-US" sz="1220" dirty="0">
                 <a:solidFill>
                   <a:srgbClr val="17364A"/>
                 </a:solidFill>
@@ -4539,9 +4539,9 @@
                 <a:ea typeface="Aptos" pitchFamily="34" charset="-122"/>
                 <a:cs typeface="Aptos" pitchFamily="34" charset="-120"/>
               </a:rPr>
-              <a:t>Use the concept to clarify workflow changes, dependencies, staffing, procurement requirements, training needs, and implementation checkpoints.</a:t>
-            </a:r>
-            <a:endParaRPr lang="en-US" sz="1320" dirty="0"/>
+              <a:t>Use the concept to clarify workflow changes, dependencies, staffing, procurement.</a:t>
+            </a:r>
+            <a:endParaRPr lang="en-US" sz="1220" dirty="0"/>
           </a:p>
         </p:txBody>
       </p:sp>
@@ -4832,8 +4832,8 @@
         </p:nvSpPr>
         <p:spPr>
           <a:xfrm>
-            <a:off x="868680" y="1508760"/>
-            <a:ext cx="6309360" cy="4160520"/>
+            <a:off x="822960" y="1463040"/>
+            <a:ext cx="6565392" cy="4343400"/>
           </a:xfrm>
           <a:prstGeom prst="rect">
             <a:avLst/>
@@ -4851,7 +4851,7 @@
               <a:buNone/>
             </a:pPr>
             <a:r>
-              <a:rPr lang="en-US" sz="2100" dirty="0">
+              <a:rPr lang="en-US" sz="1920" dirty="0">
                 <a:solidFill>
                   <a:srgbClr val="003A63"/>
                 </a:solidFill>
@@ -4861,14 +4861,14 @@
               </a:rPr>
               <a:t>• The eCR workflow begins before a report reaches public health.</a:t>
             </a:r>
-            <a:endParaRPr lang="en-US" sz="2100" dirty="0"/>
-          </a:p>
-          <a:p>
-            <a:pPr indent="0" marL="0">
-              <a:buNone/>
-            </a:pPr>
-            <a:r>
-              <a:rPr lang="en-US" sz="2100" dirty="0">
+            <a:endParaRPr lang="en-US" sz="1920" dirty="0"/>
+          </a:p>
+          <a:p>
+            <a:pPr indent="0" marL="0">
+              <a:buNone/>
+            </a:pPr>
+            <a:r>
+              <a:rPr lang="en-US" sz="1920" dirty="0">
                 <a:solidFill>
                   <a:srgbClr val="003A63"/>
                 </a:solidFill>
@@ -4876,16 +4876,16 @@
                 <a:ea typeface="Aptos" pitchFamily="34" charset="-122"/>
                 <a:cs typeface="Aptos" pitchFamily="34" charset="-120"/>
               </a:rPr>
-              <a:t>• EHR systems use trigger criteria and value sets to identify encounters that may need reporting.</a:t>
-            </a:r>
-            <a:endParaRPr lang="en-US" sz="2100" dirty="0"/>
-          </a:p>
-          <a:p>
-            <a:pPr indent="0" marL="0">
-              <a:buNone/>
-            </a:pPr>
-            <a:r>
-              <a:rPr lang="en-US" sz="2100" dirty="0">
+              <a:t>• EHR systems use trigger criteria and value sets to identify encounters that.</a:t>
+            </a:r>
+            <a:endParaRPr lang="en-US" sz="1920" dirty="0"/>
+          </a:p>
+          <a:p>
+            <a:pPr indent="0" marL="0">
+              <a:buNone/>
+            </a:pPr>
+            <a:r>
+              <a:rPr lang="en-US" sz="1920" dirty="0">
                 <a:solidFill>
                   <a:srgbClr val="003A63"/>
                 </a:solidFill>
@@ -4893,9 +4893,9 @@
                 <a:ea typeface="Aptos" pitchFamily="34" charset="-122"/>
                 <a:cs typeface="Aptos" pitchFamily="34" charset="-120"/>
               </a:rPr>
-              <a:t>• The eICR is generated and transmitted through an exchange process to the appropriate public.</a:t>
-            </a:r>
-            <a:endParaRPr lang="en-US" sz="2100" dirty="0"/>
+              <a:t>• The eICR is generated and transmitted through an exchange process to the.</a:t>
+            </a:r>
+            <a:endParaRPr lang="en-US" sz="1920" dirty="0"/>
           </a:p>
         </p:txBody>
       </p:sp>
@@ -4907,12 +4907,12 @@
         </p:nvSpPr>
         <p:spPr>
           <a:xfrm>
-            <a:off x="7635240" y="1325880"/>
-            <a:ext cx="3474720" cy="1207008"/>
+            <a:off x="7543800" y="1325880"/>
+            <a:ext cx="3611880" cy="1261872"/>
           </a:xfrm>
           <a:prstGeom prst="roundRect">
             <a:avLst>
-              <a:gd name="adj" fmla="val 9091"/>
+              <a:gd name="adj" fmla="val 8696"/>
             </a:avLst>
           </a:prstGeom>
           <a:solidFill>
@@ -4934,8 +4934,8 @@
         </p:nvSpPr>
         <p:spPr>
           <a:xfrm>
-            <a:off x="7799832" y="1472184"/>
-            <a:ext cx="3145536" cy="256032"/>
+            <a:off x="7708392" y="1453896"/>
+            <a:ext cx="3282696" cy="228600"/>
           </a:xfrm>
           <a:prstGeom prst="rect">
             <a:avLst/>
@@ -4951,7 +4951,7 @@
               <a:buNone/>
             </a:pPr>
             <a:r>
-              <a:rPr lang="en-US" sz="1300" b="1" dirty="0">
+              <a:rPr lang="en-US" sz="1220" b="1" dirty="0">
                 <a:solidFill>
                   <a:srgbClr val="0068B7"/>
                 </a:solidFill>
@@ -4961,7 +4961,7 @@
               </a:rPr>
               <a:t>Implementation cue</a:t>
             </a:r>
-            <a:endParaRPr lang="en-US" sz="1300" dirty="0"/>
+            <a:endParaRPr lang="en-US" sz="1220" dirty="0"/>
           </a:p>
         </p:txBody>
       </p:sp>
@@ -4973,8 +4973,8 @@
         </p:nvSpPr>
         <p:spPr>
           <a:xfrm>
-            <a:off x="7799832" y="1801368"/>
-            <a:ext cx="3145536" cy="640080"/>
+            <a:off x="7708392" y="1764792"/>
+            <a:ext cx="3282696" cy="749808"/>
           </a:xfrm>
           <a:prstGeom prst="rect">
             <a:avLst/>
@@ -4992,7 +4992,7 @@
               <a:buNone/>
             </a:pPr>
             <a:r>
-              <a:rPr lang="en-US" sz="1320" dirty="0">
+              <a:rPr lang="en-US" sz="1220" dirty="0">
                 <a:solidFill>
                   <a:srgbClr val="17364A"/>
                 </a:solidFill>
@@ -5002,7 +5002,7 @@
               </a:rPr>
               <a:t>The eCR workflow begins before a report reaches public health.</a:t>
             </a:r>
-            <a:endParaRPr lang="en-US" sz="1320" dirty="0"/>
+            <a:endParaRPr lang="en-US" sz="1220" dirty="0"/>
           </a:p>
         </p:txBody>
       </p:sp>
@@ -5014,12 +5014,12 @@
         </p:nvSpPr>
         <p:spPr>
           <a:xfrm>
-            <a:off x="7635240" y="2670048"/>
-            <a:ext cx="3474720" cy="1377086"/>
+            <a:off x="7543800" y="2724912"/>
+            <a:ext cx="3611880" cy="1527048"/>
           </a:xfrm>
           <a:prstGeom prst="roundRect">
             <a:avLst>
-              <a:gd name="adj" fmla="val 7968"/>
+              <a:gd name="adj" fmla="val 7186"/>
             </a:avLst>
           </a:prstGeom>
           <a:solidFill>
@@ -5041,8 +5041,8 @@
         </p:nvSpPr>
         <p:spPr>
           <a:xfrm>
-            <a:off x="7799832" y="2816352"/>
-            <a:ext cx="3145536" cy="256032"/>
+            <a:off x="7708392" y="2852928"/>
+            <a:ext cx="3282696" cy="228600"/>
           </a:xfrm>
           <a:prstGeom prst="rect">
             <a:avLst/>
@@ -5058,7 +5058,7 @@
               <a:buNone/>
             </a:pPr>
             <a:r>
-              <a:rPr lang="en-US" sz="1300" b="1" dirty="0">
+              <a:rPr lang="en-US" sz="1220" b="1" dirty="0">
                 <a:solidFill>
                   <a:srgbClr val="0068B7"/>
                 </a:solidFill>
@@ -5068,7 +5068,7 @@
               </a:rPr>
               <a:t>Concept checkpoints</a:t>
             </a:r>
-            <a:endParaRPr lang="en-US" sz="1300" dirty="0"/>
+            <a:endParaRPr lang="en-US" sz="1220" dirty="0"/>
           </a:p>
         </p:txBody>
       </p:sp>
@@ -5080,8 +5080,8 @@
         </p:nvSpPr>
         <p:spPr>
           <a:xfrm>
-            <a:off x="7818120" y="3182112"/>
-            <a:ext cx="3090672" cy="718718"/>
+            <a:off x="7726680" y="3182112"/>
+            <a:ext cx="3227832" cy="960120"/>
           </a:xfrm>
           <a:prstGeom prst="rect">
             <a:avLst/>
@@ -5099,7 +5099,7 @@
               <a:buNone/>
             </a:pPr>
             <a:r>
-              <a:rPr lang="en-US" sz="1220" dirty="0">
+              <a:rPr lang="en-US" sz="1140" dirty="0">
                 <a:solidFill>
                   <a:srgbClr val="17364A"/>
                 </a:solidFill>
@@ -5107,16 +5107,16 @@
                 <a:ea typeface="Aptos" pitchFamily="34" charset="-122"/>
                 <a:cs typeface="Aptos" pitchFamily="34" charset="-120"/>
               </a:rPr>
-              <a:t>The eICR is generated and transmitted through an exchange process.</a:t>
-            </a:r>
-            <a:endParaRPr lang="en-US" sz="1220" dirty="0"/>
-          </a:p>
-          <a:p>
-            <a:pPr indent="0" marL="0">
-              <a:buNone/>
-            </a:pPr>
-            <a:r>
-              <a:rPr lang="en-US" sz="1220" dirty="0">
+              <a:t>The eICR is generated and transmitted through an.</a:t>
+            </a:r>
+            <a:endParaRPr lang="en-US" sz="1140" dirty="0"/>
+          </a:p>
+          <a:p>
+            <a:pPr indent="0" marL="0">
+              <a:buNone/>
+            </a:pPr>
+            <a:r>
+              <a:rPr lang="en-US" sz="1140" dirty="0">
                 <a:solidFill>
                   <a:srgbClr val="17364A"/>
                 </a:solidFill>
@@ -5124,16 +5124,16 @@
                 <a:ea typeface="Aptos" pitchFamily="34" charset="-122"/>
                 <a:cs typeface="Aptos" pitchFamily="34" charset="-120"/>
               </a:rPr>
-              <a:t>Public health systems then receive, parse, route, review, and.</a:t>
-            </a:r>
-            <a:endParaRPr lang="en-US" sz="1220" dirty="0"/>
-          </a:p>
-          <a:p>
-            <a:pPr indent="0" marL="0">
-              <a:buNone/>
-            </a:pPr>
-            <a:r>
-              <a:rPr lang="en-US" sz="1220" dirty="0">
+              <a:t>Public health systems then receive, parse, route,.</a:t>
+            </a:r>
+            <a:endParaRPr lang="en-US" sz="1140" dirty="0"/>
+          </a:p>
+          <a:p>
+            <a:pPr indent="0" marL="0">
+              <a:buNone/>
+            </a:pPr>
+            <a:r>
+              <a:rPr lang="en-US" sz="1140" dirty="0">
                 <a:solidFill>
                   <a:srgbClr val="17364A"/>
                 </a:solidFill>
@@ -5143,7 +5143,7 @@
               </a:rPr>
               <a:t>AI readiness depends on several technical questions.</a:t>
             </a:r>
-            <a:endParaRPr lang="en-US" sz="1220" dirty="0"/>
+            <a:endParaRPr lang="en-US" sz="1140" dirty="0"/>
           </a:p>
         </p:txBody>
       </p:sp>
@@ -5155,12 +5155,12 @@
         </p:nvSpPr>
         <p:spPr>
           <a:xfrm>
-            <a:off x="7635240" y="4184294"/>
-            <a:ext cx="3474720" cy="1466698"/>
+            <a:off x="7543800" y="4389120"/>
+            <a:ext cx="3611880" cy="1261872"/>
           </a:xfrm>
           <a:prstGeom prst="roundRect">
             <a:avLst>
-              <a:gd name="adj" fmla="val 7481"/>
+              <a:gd name="adj" fmla="val 8696"/>
             </a:avLst>
           </a:prstGeom>
           <a:solidFill>
@@ -5182,8 +5182,8 @@
         </p:nvSpPr>
         <p:spPr>
           <a:xfrm>
-            <a:off x="7799832" y="4330598"/>
-            <a:ext cx="3145536" cy="256032"/>
+            <a:off x="7708392" y="4517136"/>
+            <a:ext cx="3282696" cy="228600"/>
           </a:xfrm>
           <a:prstGeom prst="rect">
             <a:avLst/>
@@ -5199,7 +5199,7 @@
               <a:buNone/>
             </a:pPr>
             <a:r>
-              <a:rPr lang="en-US" sz="1300" b="1" dirty="0">
+              <a:rPr lang="en-US" sz="1220" b="1" dirty="0">
                 <a:solidFill>
                   <a:srgbClr val="0068B7"/>
                 </a:solidFill>
@@ -5209,7 +5209,7 @@
               </a:rPr>
               <a:t>Next action</a:t>
             </a:r>
-            <a:endParaRPr lang="en-US" sz="1300" dirty="0"/>
+            <a:endParaRPr lang="en-US" sz="1220" dirty="0"/>
           </a:p>
         </p:txBody>
       </p:sp>
@@ -5221,8 +5221,8 @@
         </p:nvSpPr>
         <p:spPr>
           <a:xfrm>
-            <a:off x="7799832" y="4659782"/>
-            <a:ext cx="3145536" cy="899770"/>
+            <a:off x="7708392" y="4828032"/>
+            <a:ext cx="3282696" cy="749808"/>
           </a:xfrm>
           <a:prstGeom prst="rect">
             <a:avLst/>
@@ -5240,7 +5240,7 @@
               <a:buNone/>
             </a:pPr>
             <a:r>
-              <a:rPr lang="en-US" sz="1320" dirty="0">
+              <a:rPr lang="en-US" sz="1220" dirty="0">
                 <a:solidFill>
                   <a:srgbClr val="17364A"/>
                 </a:solidFill>
@@ -5248,9 +5248,9 @@
                 <a:ea typeface="Aptos" pitchFamily="34" charset="-122"/>
                 <a:cs typeface="Aptos" pitchFamily="34" charset="-120"/>
               </a:rPr>
-              <a:t>Use the concept to clarify workflow changes, dependencies, staffing, procurement requirements, training needs, and implementation checkpoints.</a:t>
-            </a:r>
-            <a:endParaRPr lang="en-US" sz="1320" dirty="0"/>
+              <a:t>Use the concept to clarify workflow changes, dependencies, staffing, procurement.</a:t>
+            </a:r>
+            <a:endParaRPr lang="en-US" sz="1220" dirty="0"/>
           </a:p>
         </p:txBody>
       </p:sp>
@@ -5541,8 +5541,8 @@
         </p:nvSpPr>
         <p:spPr>
           <a:xfrm>
-            <a:off x="868680" y="1508760"/>
-            <a:ext cx="6309360" cy="4160520"/>
+            <a:off x="822960" y="1463040"/>
+            <a:ext cx="6565392" cy="4343400"/>
           </a:xfrm>
           <a:prstGeom prst="rect">
             <a:avLst/>
@@ -5560,7 +5560,7 @@
               <a:buNone/>
             </a:pPr>
             <a:r>
-              <a:rPr lang="en-US" sz="2100" dirty="0">
+              <a:rPr lang="en-US" sz="1920" dirty="0">
                 <a:solidFill>
                   <a:srgbClr val="003A63"/>
                 </a:solidFill>
@@ -5570,14 +5570,14 @@
               </a:rPr>
               <a:t>• Incorrect trigger assumptions.</a:t>
             </a:r>
-            <a:endParaRPr lang="en-US" sz="2100" dirty="0"/>
-          </a:p>
-          <a:p>
-            <a:pPr indent="0" marL="0">
-              <a:buNone/>
-            </a:pPr>
-            <a:r>
-              <a:rPr lang="en-US" sz="2100" dirty="0">
+            <a:endParaRPr lang="en-US" sz="1920" dirty="0"/>
+          </a:p>
+          <a:p>
+            <a:pPr indent="0" marL="0">
+              <a:buNone/>
+            </a:pPr>
+            <a:r>
+              <a:rPr lang="en-US" sz="1920" dirty="0">
                 <a:solidFill>
                   <a:srgbClr val="003A63"/>
                 </a:solidFill>
@@ -5585,16 +5585,16 @@
                 <a:ea typeface="Aptos" pitchFamily="34" charset="-122"/>
                 <a:cs typeface="Aptos" pitchFamily="34" charset="-120"/>
               </a:rPr>
-              <a:t>• If trigger value sets or reporting criteria are outdated, the workflow may generate missing or.</a:t>
-            </a:r>
-            <a:endParaRPr lang="en-US" sz="2100" dirty="0"/>
-          </a:p>
-          <a:p>
-            <a:pPr indent="0" marL="0">
-              <a:buNone/>
-            </a:pPr>
-            <a:r>
-              <a:rPr lang="en-US" sz="2100" dirty="0">
+              <a:t>• If trigger value sets or reporting criteria are outdated, the workflow may.</a:t>
+            </a:r>
+            <a:endParaRPr lang="en-US" sz="1920" dirty="0"/>
+          </a:p>
+          <a:p>
+            <a:pPr indent="0" marL="0">
+              <a:buNone/>
+            </a:pPr>
+            <a:r>
+              <a:rPr lang="en-US" sz="1920" dirty="0">
                 <a:solidFill>
                   <a:srgbClr val="003A63"/>
                 </a:solidFill>
@@ -5602,9 +5602,9 @@
                 <a:ea typeface="Aptos" pitchFamily="34" charset="-122"/>
                 <a:cs typeface="Aptos" pitchFamily="34" charset="-120"/>
               </a:rPr>
-              <a:t>• Guardrails include current eRSD/RCTC management, onboarding checks, and periodic review.</a:t>
-            </a:r>
-            <a:endParaRPr lang="en-US" sz="2100" dirty="0"/>
+              <a:t>• Guardrails include current eRSD/RCTC management, onboarding checks, and.</a:t>
+            </a:r>
+            <a:endParaRPr lang="en-US" sz="1920" dirty="0"/>
           </a:p>
         </p:txBody>
       </p:sp>
@@ -5616,12 +5616,12 @@
         </p:nvSpPr>
         <p:spPr>
           <a:xfrm>
-            <a:off x="7635240" y="1325880"/>
-            <a:ext cx="3474720" cy="1207008"/>
+            <a:off x="7543800" y="1325880"/>
+            <a:ext cx="3611880" cy="1261872"/>
           </a:xfrm>
           <a:prstGeom prst="roundRect">
             <a:avLst>
-              <a:gd name="adj" fmla="val 9091"/>
+              <a:gd name="adj" fmla="val 8696"/>
             </a:avLst>
           </a:prstGeom>
           <a:solidFill>
@@ -5643,8 +5643,8 @@
         </p:nvSpPr>
         <p:spPr>
           <a:xfrm>
-            <a:off x="7799832" y="1472184"/>
-            <a:ext cx="3145536" cy="256032"/>
+            <a:off x="7708392" y="1453896"/>
+            <a:ext cx="3282696" cy="228600"/>
           </a:xfrm>
           <a:prstGeom prst="rect">
             <a:avLst/>
@@ -5660,7 +5660,7 @@
               <a:buNone/>
             </a:pPr>
             <a:r>
-              <a:rPr lang="en-US" sz="1300" b="1" dirty="0">
+              <a:rPr lang="en-US" sz="1220" b="1" dirty="0">
                 <a:solidFill>
                   <a:srgbClr val="0068B7"/>
                 </a:solidFill>
@@ -5670,7 +5670,7 @@
               </a:rPr>
               <a:t>Risk check</a:t>
             </a:r>
-            <a:endParaRPr lang="en-US" sz="1300" dirty="0"/>
+            <a:endParaRPr lang="en-US" sz="1220" dirty="0"/>
           </a:p>
         </p:txBody>
       </p:sp>
@@ -5682,8 +5682,8 @@
         </p:nvSpPr>
         <p:spPr>
           <a:xfrm>
-            <a:off x="7799832" y="1801368"/>
-            <a:ext cx="3145536" cy="640080"/>
+            <a:off x="7708392" y="1764792"/>
+            <a:ext cx="3282696" cy="749808"/>
           </a:xfrm>
           <a:prstGeom prst="rect">
             <a:avLst/>
@@ -5701,7 +5701,7 @@
               <a:buNone/>
             </a:pPr>
             <a:r>
-              <a:rPr lang="en-US" sz="1320" dirty="0">
+              <a:rPr lang="en-US" sz="1220" dirty="0">
                 <a:solidFill>
                   <a:srgbClr val="17364A"/>
                 </a:solidFill>
@@ -5711,7 +5711,7 @@
               </a:rPr>
               <a:t>Incorrect trigger assumptions.</a:t>
             </a:r>
-            <a:endParaRPr lang="en-US" sz="1320" dirty="0"/>
+            <a:endParaRPr lang="en-US" sz="1220" dirty="0"/>
           </a:p>
         </p:txBody>
       </p:sp>
@@ -5723,12 +5723,12 @@
         </p:nvSpPr>
         <p:spPr>
           <a:xfrm>
-            <a:off x="7635240" y="2670048"/>
-            <a:ext cx="3474720" cy="1536192"/>
+            <a:off x="7543800" y="2724912"/>
+            <a:ext cx="3611880" cy="1527048"/>
           </a:xfrm>
           <a:prstGeom prst="roundRect">
             <a:avLst>
-              <a:gd name="adj" fmla="val 7143"/>
+              <a:gd name="adj" fmla="val 7186"/>
             </a:avLst>
           </a:prstGeom>
           <a:solidFill>
@@ -5750,8 +5750,8 @@
         </p:nvSpPr>
         <p:spPr>
           <a:xfrm>
-            <a:off x="7799832" y="2816352"/>
-            <a:ext cx="3145536" cy="256032"/>
+            <a:off x="7708392" y="2852928"/>
+            <a:ext cx="3282696" cy="228600"/>
           </a:xfrm>
           <a:prstGeom prst="rect">
             <a:avLst/>
@@ -5767,7 +5767,7 @@
               <a:buNone/>
             </a:pPr>
             <a:r>
-              <a:rPr lang="en-US" sz="1300" b="1" dirty="0">
+              <a:rPr lang="en-US" sz="1220" b="1" dirty="0">
                 <a:solidFill>
                   <a:srgbClr val="0068B7"/>
                 </a:solidFill>
@@ -5777,7 +5777,7 @@
               </a:rPr>
               <a:t>Concept checkpoints</a:t>
             </a:r>
-            <a:endParaRPr lang="en-US" sz="1300" dirty="0"/>
+            <a:endParaRPr lang="en-US" sz="1220" dirty="0"/>
           </a:p>
         </p:txBody>
       </p:sp>
@@ -5789,8 +5789,8 @@
         </p:nvSpPr>
         <p:spPr>
           <a:xfrm>
-            <a:off x="7818120" y="3182112"/>
-            <a:ext cx="3090672" cy="877824"/>
+            <a:off x="7726680" y="3182112"/>
+            <a:ext cx="3227832" cy="960120"/>
           </a:xfrm>
           <a:prstGeom prst="rect">
             <a:avLst/>
@@ -5808,7 +5808,7 @@
               <a:buNone/>
             </a:pPr>
             <a:r>
-              <a:rPr lang="en-US" sz="1220" dirty="0">
+              <a:rPr lang="en-US" sz="1140" dirty="0">
                 <a:solidFill>
                   <a:srgbClr val="17364A"/>
                 </a:solidFill>
@@ -5816,16 +5816,16 @@
                 <a:ea typeface="Aptos" pitchFamily="34" charset="-122"/>
                 <a:cs typeface="Aptos" pitchFamily="34" charset="-120"/>
               </a:rPr>
-              <a:t>If trigger value sets or reporting criteria are outdated, the.</a:t>
-            </a:r>
-            <a:endParaRPr lang="en-US" sz="1220" dirty="0"/>
-          </a:p>
-          <a:p>
-            <a:pPr indent="0" marL="0">
-              <a:buNone/>
-            </a:pPr>
-            <a:r>
-              <a:rPr lang="en-US" sz="1220" dirty="0">
+              <a:t>If trigger value sets or reporting criteria are.</a:t>
+            </a:r>
+            <a:endParaRPr lang="en-US" sz="1140" dirty="0"/>
+          </a:p>
+          <a:p>
+            <a:pPr indent="0" marL="0">
+              <a:buNone/>
+            </a:pPr>
+            <a:r>
+              <a:rPr lang="en-US" sz="1140" dirty="0">
                 <a:solidFill>
                   <a:srgbClr val="17364A"/>
                 </a:solidFill>
@@ -5835,14 +5835,14 @@
               </a:rPr>
               <a:t>Unsupported summaries.</a:t>
             </a:r>
-            <a:endParaRPr lang="en-US" sz="1220" dirty="0"/>
-          </a:p>
-          <a:p>
-            <a:pPr indent="0" marL="0">
-              <a:buNone/>
-            </a:pPr>
-            <a:r>
-              <a:rPr lang="en-US" sz="1220" dirty="0">
+            <a:endParaRPr lang="en-US" sz="1140" dirty="0"/>
+          </a:p>
+          <a:p>
+            <a:pPr indent="0" marL="0">
+              <a:buNone/>
+            </a:pPr>
+            <a:r>
+              <a:rPr lang="en-US" sz="1140" dirty="0">
                 <a:solidFill>
                   <a:srgbClr val="17364A"/>
                 </a:solidFill>
@@ -5850,9 +5850,9 @@
                 <a:ea typeface="Aptos" pitchFamily="34" charset="-122"/>
                 <a:cs typeface="Aptos" pitchFamily="34" charset="-120"/>
               </a:rPr>
-              <a:t>Generative AI summaries may include statements not supported by.</a:t>
-            </a:r>
-            <a:endParaRPr lang="en-US" sz="1220" dirty="0"/>
+              <a:t>Generative AI summaries may include statements not.</a:t>
+            </a:r>
+            <a:endParaRPr lang="en-US" sz="1140" dirty="0"/>
           </a:p>
         </p:txBody>
       </p:sp>
@@ -5864,12 +5864,12 @@
         </p:nvSpPr>
         <p:spPr>
           <a:xfrm>
-            <a:off x="7635240" y="4343400"/>
-            <a:ext cx="3474720" cy="1255471"/>
+            <a:off x="7543800" y="4389120"/>
+            <a:ext cx="3611880" cy="1261872"/>
           </a:xfrm>
           <a:prstGeom prst="roundRect">
             <a:avLst>
-              <a:gd name="adj" fmla="val 8740"/>
+              <a:gd name="adj" fmla="val 8696"/>
             </a:avLst>
           </a:prstGeom>
           <a:solidFill>
@@ -5891,8 +5891,8 @@
         </p:nvSpPr>
         <p:spPr>
           <a:xfrm>
-            <a:off x="7799832" y="4489704"/>
-            <a:ext cx="3145536" cy="256032"/>
+            <a:off x="7708392" y="4517136"/>
+            <a:ext cx="3282696" cy="228600"/>
           </a:xfrm>
           <a:prstGeom prst="rect">
             <a:avLst/>
@@ -5908,7 +5908,7 @@
               <a:buNone/>
             </a:pPr>
             <a:r>
-              <a:rPr lang="en-US" sz="1300" b="1" dirty="0">
+              <a:rPr lang="en-US" sz="1220" b="1" dirty="0">
                 <a:solidFill>
                   <a:srgbClr val="0068B7"/>
                 </a:solidFill>
@@ -5918,7 +5918,7 @@
               </a:rPr>
               <a:t>Safeguard to plan</a:t>
             </a:r>
-            <a:endParaRPr lang="en-US" sz="1300" dirty="0"/>
+            <a:endParaRPr lang="en-US" sz="1220" dirty="0"/>
           </a:p>
         </p:txBody>
       </p:sp>
@@ -5930,8 +5930,8 @@
         </p:nvSpPr>
         <p:spPr>
           <a:xfrm>
-            <a:off x="7799832" y="4818888"/>
-            <a:ext cx="3145536" cy="688543"/>
+            <a:off x="7708392" y="4828032"/>
+            <a:ext cx="3282696" cy="749808"/>
           </a:xfrm>
           <a:prstGeom prst="rect">
             <a:avLst/>
@@ -5949,7 +5949,7 @@
               <a:buNone/>
             </a:pPr>
             <a:r>
-              <a:rPr lang="en-US" sz="1320" dirty="0">
+              <a:rPr lang="en-US" sz="1220" dirty="0">
                 <a:solidFill>
                   <a:srgbClr val="17364A"/>
                 </a:solidFill>
@@ -5957,9 +5957,9 @@
                 <a:ea typeface="Aptos" pitchFamily="34" charset="-122"/>
                 <a:cs typeface="Aptos" pitchFamily="34" charset="-120"/>
               </a:rPr>
-              <a:t>Identify what could go wrong, who could be affected, what safeguards are needed, and what evidence should be reviewed before use.</a:t>
-            </a:r>
-            <a:endParaRPr lang="en-US" sz="1320" dirty="0"/>
+              <a:t>Identify what could go wrong, who could be affected, what safeguards are needed,.</a:t>
+            </a:r>
+            <a:endParaRPr lang="en-US" sz="1220" dirty="0"/>
           </a:p>
         </p:txBody>
       </p:sp>
@@ -6250,8 +6250,8 @@
         </p:nvSpPr>
         <p:spPr>
           <a:xfrm>
-            <a:off x="868680" y="1508760"/>
-            <a:ext cx="6309360" cy="4160520"/>
+            <a:off x="822960" y="1463040"/>
+            <a:ext cx="6565392" cy="4343400"/>
           </a:xfrm>
           <a:prstGeom prst="rect">
             <a:avLst/>
@@ -6269,7 +6269,7 @@
               <a:buNone/>
             </a:pPr>
             <a:r>
-              <a:rPr lang="en-US" sz="2100" dirty="0">
+              <a:rPr lang="en-US" sz="1920" dirty="0">
                 <a:solidFill>
                   <a:srgbClr val="003A63"/>
                 </a:solidFill>
@@ -6279,14 +6279,14 @@
               </a:rPr>
               <a:t>• Routing errors.</a:t>
             </a:r>
-            <a:endParaRPr lang="en-US" sz="2100" dirty="0"/>
-          </a:p>
-          <a:p>
-            <a:pPr indent="0" marL="0">
-              <a:buNone/>
-            </a:pPr>
-            <a:r>
-              <a:rPr lang="en-US" sz="2100" dirty="0">
+            <a:endParaRPr lang="en-US" sz="1920" dirty="0"/>
+          </a:p>
+          <a:p>
+            <a:pPr indent="0" marL="0">
+              <a:buNone/>
+            </a:pPr>
+            <a:r>
+              <a:rPr lang="en-US" sz="1920" dirty="0">
                 <a:solidFill>
                   <a:srgbClr val="003A63"/>
                 </a:solidFill>
@@ -6296,14 +6296,14 @@
               </a:rPr>
               <a:t>• Incorrect jurisdiction or program routing can delay response.</a:t>
             </a:r>
-            <a:endParaRPr lang="en-US" sz="2100" dirty="0"/>
-          </a:p>
-          <a:p>
-            <a:pPr indent="0" marL="0">
-              <a:buNone/>
-            </a:pPr>
-            <a:r>
-              <a:rPr lang="en-US" sz="2100" dirty="0">
+            <a:endParaRPr lang="en-US" sz="1920" dirty="0"/>
+          </a:p>
+          <a:p>
+            <a:pPr indent="0" marL="0">
+              <a:buNone/>
+            </a:pPr>
+            <a:r>
+              <a:rPr lang="en-US" sz="1920" dirty="0">
                 <a:solidFill>
                   <a:srgbClr val="003A63"/>
                 </a:solidFill>
@@ -6311,9 +6311,9 @@
                 <a:ea typeface="Aptos" pitchFamily="34" charset="-122"/>
                 <a:cs typeface="Aptos" pitchFamily="34" charset="-120"/>
               </a:rPr>
-              <a:t>• Guardrails include routing validation, exception queues, and escalation procedures.</a:t>
-            </a:r>
-            <a:endParaRPr lang="en-US" sz="2100" dirty="0"/>
+              <a:t>• Guardrails include routing validation, exception queues, and escalation.</a:t>
+            </a:r>
+            <a:endParaRPr lang="en-US" sz="1920" dirty="0"/>
           </a:p>
         </p:txBody>
       </p:sp>
@@ -6325,12 +6325,12 @@
         </p:nvSpPr>
         <p:spPr>
           <a:xfrm>
-            <a:off x="7635240" y="1325880"/>
-            <a:ext cx="3474720" cy="1207008"/>
+            <a:off x="7543800" y="1325880"/>
+            <a:ext cx="3611880" cy="1261872"/>
           </a:xfrm>
           <a:prstGeom prst="roundRect">
             <a:avLst>
-              <a:gd name="adj" fmla="val 9091"/>
+              <a:gd name="adj" fmla="val 8696"/>
             </a:avLst>
           </a:prstGeom>
           <a:solidFill>
@@ -6352,8 +6352,8 @@
         </p:nvSpPr>
         <p:spPr>
           <a:xfrm>
-            <a:off x="7799832" y="1472184"/>
-            <a:ext cx="3145536" cy="256032"/>
+            <a:off x="7708392" y="1453896"/>
+            <a:ext cx="3282696" cy="228600"/>
           </a:xfrm>
           <a:prstGeom prst="rect">
             <a:avLst/>
@@ -6369,7 +6369,7 @@
               <a:buNone/>
             </a:pPr>
             <a:r>
-              <a:rPr lang="en-US" sz="1300" b="1" dirty="0">
+              <a:rPr lang="en-US" sz="1220" b="1" dirty="0">
                 <a:solidFill>
                   <a:srgbClr val="0068B7"/>
                 </a:solidFill>
@@ -6379,7 +6379,7 @@
               </a:rPr>
               <a:t>Risk check</a:t>
             </a:r>
-            <a:endParaRPr lang="en-US" sz="1300" dirty="0"/>
+            <a:endParaRPr lang="en-US" sz="1220" dirty="0"/>
           </a:p>
         </p:txBody>
       </p:sp>
@@ -6391,8 +6391,8 @@
         </p:nvSpPr>
         <p:spPr>
           <a:xfrm>
-            <a:off x="7799832" y="1801368"/>
-            <a:ext cx="3145536" cy="640080"/>
+            <a:off x="7708392" y="1764792"/>
+            <a:ext cx="3282696" cy="749808"/>
           </a:xfrm>
           <a:prstGeom prst="rect">
             <a:avLst/>
@@ -6410,7 +6410,7 @@
               <a:buNone/>
             </a:pPr>
             <a:r>
-              <a:rPr lang="en-US" sz="1320" dirty="0">
+              <a:rPr lang="en-US" sz="1220" dirty="0">
                 <a:solidFill>
                   <a:srgbClr val="17364A"/>
                 </a:solidFill>
@@ -6420,7 +6420,7 @@
               </a:rPr>
               <a:t>Routing errors.</a:t>
             </a:r>
-            <a:endParaRPr lang="en-US" sz="1320" dirty="0"/>
+            <a:endParaRPr lang="en-US" sz="1220" dirty="0"/>
           </a:p>
         </p:txBody>
       </p:sp>
@@ -6432,12 +6432,12 @@
         </p:nvSpPr>
         <p:spPr>
           <a:xfrm>
-            <a:off x="7635240" y="2670048"/>
-            <a:ext cx="3474720" cy="1536192"/>
+            <a:off x="7543800" y="2724912"/>
+            <a:ext cx="3611880" cy="1527048"/>
           </a:xfrm>
           <a:prstGeom prst="roundRect">
             <a:avLst>
-              <a:gd name="adj" fmla="val 7143"/>
+              <a:gd name="adj" fmla="val 7186"/>
             </a:avLst>
           </a:prstGeom>
           <a:solidFill>
@@ -6459,8 +6459,8 @@
         </p:nvSpPr>
         <p:spPr>
           <a:xfrm>
-            <a:off x="7799832" y="2816352"/>
-            <a:ext cx="3145536" cy="256032"/>
+            <a:off x="7708392" y="2852928"/>
+            <a:ext cx="3282696" cy="228600"/>
           </a:xfrm>
           <a:prstGeom prst="rect">
             <a:avLst/>
@@ -6476,7 +6476,7 @@
               <a:buNone/>
             </a:pPr>
             <a:r>
-              <a:rPr lang="en-US" sz="1300" b="1" dirty="0">
+              <a:rPr lang="en-US" sz="1220" b="1" dirty="0">
                 <a:solidFill>
                   <a:srgbClr val="0068B7"/>
                 </a:solidFill>
@@ -6486,7 +6486,7 @@
               </a:rPr>
               <a:t>Concept checkpoints</a:t>
             </a:r>
-            <a:endParaRPr lang="en-US" sz="1300" dirty="0"/>
+            <a:endParaRPr lang="en-US" sz="1220" dirty="0"/>
           </a:p>
         </p:txBody>
       </p:sp>
@@ -6498,8 +6498,8 @@
         </p:nvSpPr>
         <p:spPr>
           <a:xfrm>
-            <a:off x="7818120" y="3182112"/>
-            <a:ext cx="3090672" cy="877824"/>
+            <a:off x="7726680" y="3182112"/>
+            <a:ext cx="3227832" cy="960120"/>
           </a:xfrm>
           <a:prstGeom prst="rect">
             <a:avLst/>
@@ -6517,7 +6517,7 @@
               <a:buNone/>
             </a:pPr>
             <a:r>
-              <a:rPr lang="en-US" sz="1220" dirty="0">
+              <a:rPr lang="en-US" sz="1140" dirty="0">
                 <a:solidFill>
                   <a:srgbClr val="17364A"/>
                 </a:solidFill>
@@ -6527,14 +6527,14 @@
               </a:rPr>
               <a:t>Routing errors.</a:t>
             </a:r>
-            <a:endParaRPr lang="en-US" sz="1220" dirty="0"/>
-          </a:p>
-          <a:p>
-            <a:pPr indent="0" marL="0">
-              <a:buNone/>
-            </a:pPr>
-            <a:r>
-              <a:rPr lang="en-US" sz="1220" dirty="0">
+            <a:endParaRPr lang="en-US" sz="1140" dirty="0"/>
+          </a:p>
+          <a:p>
+            <a:pPr indent="0" marL="0">
+              <a:buNone/>
+            </a:pPr>
+            <a:r>
+              <a:rPr lang="en-US" sz="1140" dirty="0">
                 <a:solidFill>
                   <a:srgbClr val="17364A"/>
                 </a:solidFill>
@@ -6542,16 +6542,16 @@
                 <a:ea typeface="Aptos" pitchFamily="34" charset="-122"/>
                 <a:cs typeface="Aptos" pitchFamily="34" charset="-120"/>
               </a:rPr>
-              <a:t>Incorrect jurisdiction or program routing can delay response.</a:t>
-            </a:r>
-            <a:endParaRPr lang="en-US" sz="1220" dirty="0"/>
-          </a:p>
-          <a:p>
-            <a:pPr indent="0" marL="0">
-              <a:buNone/>
-            </a:pPr>
-            <a:r>
-              <a:rPr lang="en-US" sz="1220" dirty="0">
+              <a:t>Incorrect jurisdiction or program routing can.</a:t>
+            </a:r>
+            <a:endParaRPr lang="en-US" sz="1140" dirty="0"/>
+          </a:p>
+          <a:p>
+            <a:pPr indent="0" marL="0">
+              <a:buNone/>
+            </a:pPr>
+            <a:r>
+              <a:rPr lang="en-US" sz="1140" dirty="0">
                 <a:solidFill>
                   <a:srgbClr val="17364A"/>
                 </a:solidFill>
@@ -6559,9 +6559,9 @@
                 <a:ea typeface="Aptos" pitchFamily="34" charset="-122"/>
                 <a:cs typeface="Aptos" pitchFamily="34" charset="-120"/>
               </a:rPr>
-              <a:t>Guardrails include routing validation, exception queues, and.</a:t>
-            </a:r>
-            <a:endParaRPr lang="en-US" sz="1220" dirty="0"/>
+              <a:t>Guardrails include routing validation, exception.</a:t>
+            </a:r>
+            <a:endParaRPr lang="en-US" sz="1140" dirty="0"/>
           </a:p>
         </p:txBody>
       </p:sp>
@@ -6573,12 +6573,12 @@
         </p:nvSpPr>
         <p:spPr>
           <a:xfrm>
-            <a:off x="7635240" y="4343400"/>
-            <a:ext cx="3474720" cy="1255471"/>
+            <a:off x="7543800" y="4389120"/>
+            <a:ext cx="3611880" cy="1261872"/>
           </a:xfrm>
           <a:prstGeom prst="roundRect">
             <a:avLst>
-              <a:gd name="adj" fmla="val 8740"/>
+              <a:gd name="adj" fmla="val 8696"/>
             </a:avLst>
           </a:prstGeom>
           <a:solidFill>
@@ -6600,8 +6600,8 @@
         </p:nvSpPr>
         <p:spPr>
           <a:xfrm>
-            <a:off x="7799832" y="4489704"/>
-            <a:ext cx="3145536" cy="256032"/>
+            <a:off x="7708392" y="4517136"/>
+            <a:ext cx="3282696" cy="228600"/>
           </a:xfrm>
           <a:prstGeom prst="rect">
             <a:avLst/>
@@ -6617,7 +6617,7 @@
               <a:buNone/>
             </a:pPr>
             <a:r>
-              <a:rPr lang="en-US" sz="1300" b="1" dirty="0">
+              <a:rPr lang="en-US" sz="1220" b="1" dirty="0">
                 <a:solidFill>
                   <a:srgbClr val="0068B7"/>
                 </a:solidFill>
@@ -6627,7 +6627,7 @@
               </a:rPr>
               <a:t>Safeguard to plan</a:t>
             </a:r>
-            <a:endParaRPr lang="en-US" sz="1300" dirty="0"/>
+            <a:endParaRPr lang="en-US" sz="1220" dirty="0"/>
           </a:p>
         </p:txBody>
       </p:sp>
@@ -6639,8 +6639,8 @@
         </p:nvSpPr>
         <p:spPr>
           <a:xfrm>
-            <a:off x="7799832" y="4818888"/>
-            <a:ext cx="3145536" cy="688543"/>
+            <a:off x="7708392" y="4828032"/>
+            <a:ext cx="3282696" cy="749808"/>
           </a:xfrm>
           <a:prstGeom prst="rect">
             <a:avLst/>
@@ -6658,7 +6658,7 @@
               <a:buNone/>
             </a:pPr>
             <a:r>
-              <a:rPr lang="en-US" sz="1320" dirty="0">
+              <a:rPr lang="en-US" sz="1220" dirty="0">
                 <a:solidFill>
                   <a:srgbClr val="17364A"/>
                 </a:solidFill>
@@ -6666,9 +6666,9 @@
                 <a:ea typeface="Aptos" pitchFamily="34" charset="-122"/>
                 <a:cs typeface="Aptos" pitchFamily="34" charset="-120"/>
               </a:rPr>
-              <a:t>Identify what could go wrong, who could be affected, what safeguards are needed, and what evidence should be reviewed before use.</a:t>
-            </a:r>
-            <a:endParaRPr lang="en-US" sz="1320" dirty="0"/>
+              <a:t>Identify what could go wrong, who could be affected, what safeguards are needed,.</a:t>
+            </a:r>
+            <a:endParaRPr lang="en-US" sz="1220" dirty="0"/>
           </a:p>
         </p:txBody>
       </p:sp>
@@ -6959,8 +6959,8 @@
         </p:nvSpPr>
         <p:spPr>
           <a:xfrm>
-            <a:off x="868680" y="1508760"/>
-            <a:ext cx="6309360" cy="4160520"/>
+            <a:off x="822960" y="1463040"/>
+            <a:ext cx="6565392" cy="4343400"/>
           </a:xfrm>
           <a:prstGeom prst="rect">
             <a:avLst/>
@@ -6978,7 +6978,7 @@
               <a:buNone/>
             </a:pPr>
             <a:r>
-              <a:rPr lang="en-US" sz="2100" dirty="0">
+              <a:rPr lang="en-US" sz="1920" dirty="0">
                 <a:solidFill>
                   <a:srgbClr val="003A63"/>
                 </a:solidFill>
@@ -6986,16 +6986,16 @@
                 <a:ea typeface="Aptos" pitchFamily="34" charset="-122"/>
                 <a:cs typeface="Aptos" pitchFamily="34" charset="-120"/>
               </a:rPr>
-              <a:t>• Generative AI may summarize eICR content, but summaries should display source evidence and.</a:t>
-            </a:r>
-            <a:endParaRPr lang="en-US" sz="2100" dirty="0"/>
-          </a:p>
-          <a:p>
-            <a:pPr indent="0" marL="0">
-              <a:buNone/>
-            </a:pPr>
-            <a:r>
-              <a:rPr lang="en-US" sz="2100" dirty="0">
+              <a:t>• Generative AI may summarize eICR content, but summaries should display.</a:t>
+            </a:r>
+            <a:endParaRPr lang="en-US" sz="1920" dirty="0"/>
+          </a:p>
+          <a:p>
+            <a:pPr indent="0" marL="0">
+              <a:buNone/>
+            </a:pPr>
+            <a:r>
+              <a:rPr lang="en-US" sz="1920" dirty="0">
                 <a:solidFill>
                   <a:srgbClr val="003A63"/>
                 </a:solidFill>
@@ -7003,16 +7003,16 @@
                 <a:ea typeface="Aptos" pitchFamily="34" charset="-122"/>
                 <a:cs typeface="Aptos" pitchFamily="34" charset="-120"/>
               </a:rPr>
-              <a:t>• Predictive models may support prioritization, but only after validation against public health.</a:t>
-            </a:r>
-            <a:endParaRPr lang="en-US" sz="2100" dirty="0"/>
-          </a:p>
-          <a:p>
-            <a:pPr indent="0" marL="0">
-              <a:buNone/>
-            </a:pPr>
-            <a:r>
-              <a:rPr lang="en-US" sz="2100" dirty="0">
+              <a:t>• Predictive models may support prioritization, but only after validation.</a:t>
+            </a:r>
+            <a:endParaRPr lang="en-US" sz="1920" dirty="0"/>
+          </a:p>
+          <a:p>
+            <a:pPr indent="0" marL="0">
+              <a:buNone/>
+            </a:pPr>
+            <a:r>
+              <a:rPr lang="en-US" sz="1920" dirty="0">
                 <a:solidFill>
                   <a:srgbClr val="003A63"/>
                 </a:solidFill>
@@ -7020,9 +7020,9 @@
                 <a:ea typeface="Aptos" pitchFamily="34" charset="-122"/>
                 <a:cs typeface="Aptos" pitchFamily="34" charset="-120"/>
               </a:rPr>
-              <a:t>• RAG may provide disease-specific guidance to investigators, but document sources must be.</a:t>
-            </a:r>
-            <a:endParaRPr lang="en-US" sz="2100" dirty="0"/>
+              <a:t>• RAG may provide disease-specific guidance to investigators, but document.</a:t>
+            </a:r>
+            <a:endParaRPr lang="en-US" sz="1920" dirty="0"/>
           </a:p>
         </p:txBody>
       </p:sp>
@@ -7034,12 +7034,12 @@
         </p:nvSpPr>
         <p:spPr>
           <a:xfrm>
-            <a:off x="7635240" y="1325880"/>
-            <a:ext cx="3474720" cy="1255471"/>
+            <a:off x="7543800" y="1325880"/>
+            <a:ext cx="3611880" cy="1261872"/>
           </a:xfrm>
           <a:prstGeom prst="roundRect">
             <a:avLst>
-              <a:gd name="adj" fmla="val 8740"/>
+              <a:gd name="adj" fmla="val 8696"/>
             </a:avLst>
           </a:prstGeom>
           <a:solidFill>
@@ -7061,8 +7061,8 @@
         </p:nvSpPr>
         <p:spPr>
           <a:xfrm>
-            <a:off x="7799832" y="1472184"/>
-            <a:ext cx="3145536" cy="256032"/>
+            <a:off x="7708392" y="1453896"/>
+            <a:ext cx="3282696" cy="228600"/>
           </a:xfrm>
           <a:prstGeom prst="rect">
             <a:avLst/>
@@ -7078,7 +7078,7 @@
               <a:buNone/>
             </a:pPr>
             <a:r>
-              <a:rPr lang="en-US" sz="1300" b="1" dirty="0">
+              <a:rPr lang="en-US" sz="1220" b="1" dirty="0">
                 <a:solidFill>
                   <a:srgbClr val="0068B7"/>
                 </a:solidFill>
@@ -7088,7 +7088,7 @@
               </a:rPr>
               <a:t>Implementation cue</a:t>
             </a:r>
-            <a:endParaRPr lang="en-US" sz="1300" dirty="0"/>
+            <a:endParaRPr lang="en-US" sz="1220" dirty="0"/>
           </a:p>
         </p:txBody>
       </p:sp>
@@ -7100,8 +7100,8 @@
         </p:nvSpPr>
         <p:spPr>
           <a:xfrm>
-            <a:off x="7799832" y="1801368"/>
-            <a:ext cx="3145536" cy="688543"/>
+            <a:off x="7708392" y="1764792"/>
+            <a:ext cx="3282696" cy="749808"/>
           </a:xfrm>
           <a:prstGeom prst="rect">
             <a:avLst/>
@@ -7119,7 +7119,7 @@
               <a:buNone/>
             </a:pPr>
             <a:r>
-              <a:rPr lang="en-US" sz="1320" dirty="0">
+              <a:rPr lang="en-US" sz="1220" dirty="0">
                 <a:solidFill>
                   <a:srgbClr val="17364A"/>
                 </a:solidFill>
@@ -7127,9 +7127,9 @@
                 <a:ea typeface="Aptos" pitchFamily="34" charset="-122"/>
                 <a:cs typeface="Aptos" pitchFamily="34" charset="-120"/>
               </a:rPr>
-              <a:t>Generative AI may summarize eICR content, but summaries should display source evidence and uncertainty.</a:t>
-            </a:r>
-            <a:endParaRPr lang="en-US" sz="1320" dirty="0"/>
+              <a:t>Generative AI may summarize eICR content, but summaries should display source.</a:t>
+            </a:r>
+            <a:endParaRPr lang="en-US" sz="1220" dirty="0"/>
           </a:p>
         </p:txBody>
       </p:sp>
@@ -7141,12 +7141,12 @@
         </p:nvSpPr>
         <p:spPr>
           <a:xfrm>
-            <a:off x="7635240" y="2718511"/>
-            <a:ext cx="3474720" cy="1328623"/>
+            <a:off x="7543800" y="2724912"/>
+            <a:ext cx="3611880" cy="1527048"/>
           </a:xfrm>
           <a:prstGeom prst="roundRect">
             <a:avLst>
-              <a:gd name="adj" fmla="val 8259"/>
+              <a:gd name="adj" fmla="val 7186"/>
             </a:avLst>
           </a:prstGeom>
           <a:solidFill>
@@ -7168,8 +7168,8 @@
         </p:nvSpPr>
         <p:spPr>
           <a:xfrm>
-            <a:off x="7799832" y="2864815"/>
-            <a:ext cx="3145536" cy="256032"/>
+            <a:off x="7708392" y="2852928"/>
+            <a:ext cx="3282696" cy="228600"/>
           </a:xfrm>
           <a:prstGeom prst="rect">
             <a:avLst/>
@@ -7185,7 +7185,7 @@
               <a:buNone/>
             </a:pPr>
             <a:r>
-              <a:rPr lang="en-US" sz="1300" b="1" dirty="0">
+              <a:rPr lang="en-US" sz="1220" b="1" dirty="0">
                 <a:solidFill>
                   <a:srgbClr val="0068B7"/>
                 </a:solidFill>
@@ -7195,7 +7195,7 @@
               </a:rPr>
               <a:t>Concept checkpoints</a:t>
             </a:r>
-            <a:endParaRPr lang="en-US" sz="1300" dirty="0"/>
+            <a:endParaRPr lang="en-US" sz="1220" dirty="0"/>
           </a:p>
         </p:txBody>
       </p:sp>
@@ -7207,8 +7207,8 @@
         </p:nvSpPr>
         <p:spPr>
           <a:xfrm>
-            <a:off x="7818120" y="3230575"/>
-            <a:ext cx="3090672" cy="670255"/>
+            <a:off x="7726680" y="3182112"/>
+            <a:ext cx="3227832" cy="960120"/>
           </a:xfrm>
           <a:prstGeom prst="rect">
             <a:avLst/>
@@ -7226,7 +7226,7 @@
               <a:buNone/>
             </a:pPr>
             <a:r>
-              <a:rPr lang="en-US" sz="1220" dirty="0">
+              <a:rPr lang="en-US" sz="1140" dirty="0">
                 <a:solidFill>
                   <a:srgbClr val="17364A"/>
                 </a:solidFill>
@@ -7234,16 +7234,16 @@
                 <a:ea typeface="Aptos" pitchFamily="34" charset="-122"/>
                 <a:cs typeface="Aptos" pitchFamily="34" charset="-120"/>
               </a:rPr>
-              <a:t>Predictive models may support prioritization, but only after.</a:t>
-            </a:r>
-            <a:endParaRPr lang="en-US" sz="1220" dirty="0"/>
-          </a:p>
-          <a:p>
-            <a:pPr indent="0" marL="0">
-              <a:buNone/>
-            </a:pPr>
-            <a:r>
-              <a:rPr lang="en-US" sz="1220" dirty="0">
+              <a:t>Predictive models may support prioritization, but.</a:t>
+            </a:r>
+            <a:endParaRPr lang="en-US" sz="1140" dirty="0"/>
+          </a:p>
+          <a:p>
+            <a:pPr indent="0" marL="0">
+              <a:buNone/>
+            </a:pPr>
+            <a:r>
+              <a:rPr lang="en-US" sz="1140" dirty="0">
                 <a:solidFill>
                   <a:srgbClr val="17364A"/>
                 </a:solidFill>
@@ -7251,16 +7251,16 @@
                 <a:ea typeface="Aptos" pitchFamily="34" charset="-122"/>
                 <a:cs typeface="Aptos" pitchFamily="34" charset="-120"/>
               </a:rPr>
-              <a:t>RAG may provide disease-specific guidance to investigators, but.</a:t>
-            </a:r>
-            <a:endParaRPr lang="en-US" sz="1220" dirty="0"/>
-          </a:p>
-          <a:p>
-            <a:pPr indent="0" marL="0">
-              <a:buNone/>
-            </a:pPr>
-            <a:r>
-              <a:rPr lang="en-US" sz="1220" dirty="0">
+              <a:t>RAG may provide disease-specific guidance to.</a:t>
+            </a:r>
+            <a:endParaRPr lang="en-US" sz="1140" dirty="0"/>
+          </a:p>
+          <a:p>
+            <a:pPr indent="0" marL="0">
+              <a:buNone/>
+            </a:pPr>
+            <a:r>
+              <a:rPr lang="en-US" sz="1140" dirty="0">
                 <a:solidFill>
                   <a:srgbClr val="17364A"/>
                 </a:solidFill>
@@ -7268,9 +7268,9 @@
                 <a:ea typeface="Aptos" pitchFamily="34" charset="-122"/>
                 <a:cs typeface="Aptos" pitchFamily="34" charset="-120"/>
               </a:rPr>
-              <a:t>Agentic AI could create follow-up tasks, but task creation should.</a:t>
-            </a:r>
-            <a:endParaRPr lang="en-US" sz="1220" dirty="0"/>
+              <a:t>Agentic AI could create follow-up tasks, but task.</a:t>
+            </a:r>
+            <a:endParaRPr lang="en-US" sz="1140" dirty="0"/>
           </a:p>
         </p:txBody>
       </p:sp>
@@ -7282,12 +7282,12 @@
         </p:nvSpPr>
         <p:spPr>
           <a:xfrm>
-            <a:off x="7635240" y="4184294"/>
-            <a:ext cx="3474720" cy="1466698"/>
+            <a:off x="7543800" y="4389120"/>
+            <a:ext cx="3611880" cy="1261872"/>
           </a:xfrm>
           <a:prstGeom prst="roundRect">
             <a:avLst>
-              <a:gd name="adj" fmla="val 7481"/>
+              <a:gd name="adj" fmla="val 8696"/>
             </a:avLst>
           </a:prstGeom>
           <a:solidFill>
@@ -7309,8 +7309,8 @@
         </p:nvSpPr>
         <p:spPr>
           <a:xfrm>
-            <a:off x="7799832" y="4330598"/>
-            <a:ext cx="3145536" cy="256032"/>
+            <a:off x="7708392" y="4517136"/>
+            <a:ext cx="3282696" cy="228600"/>
           </a:xfrm>
           <a:prstGeom prst="rect">
             <a:avLst/>
@@ -7326,7 +7326,7 @@
               <a:buNone/>
             </a:pPr>
             <a:r>
-              <a:rPr lang="en-US" sz="1300" b="1" dirty="0">
+              <a:rPr lang="en-US" sz="1220" b="1" dirty="0">
                 <a:solidFill>
                   <a:srgbClr val="0068B7"/>
                 </a:solidFill>
@@ -7336,7 +7336,7 @@
               </a:rPr>
               <a:t>Next action</a:t>
             </a:r>
-            <a:endParaRPr lang="en-US" sz="1300" dirty="0"/>
+            <a:endParaRPr lang="en-US" sz="1220" dirty="0"/>
           </a:p>
         </p:txBody>
       </p:sp>
@@ -7348,8 +7348,8 @@
         </p:nvSpPr>
         <p:spPr>
           <a:xfrm>
-            <a:off x="7799832" y="4659782"/>
-            <a:ext cx="3145536" cy="899770"/>
+            <a:off x="7708392" y="4828032"/>
+            <a:ext cx="3282696" cy="749808"/>
           </a:xfrm>
           <a:prstGeom prst="rect">
             <a:avLst/>
@@ -7367,7 +7367,7 @@
               <a:buNone/>
             </a:pPr>
             <a:r>
-              <a:rPr lang="en-US" sz="1320" dirty="0">
+              <a:rPr lang="en-US" sz="1220" dirty="0">
                 <a:solidFill>
                   <a:srgbClr val="17364A"/>
                 </a:solidFill>
@@ -7375,9 +7375,9 @@
                 <a:ea typeface="Aptos" pitchFamily="34" charset="-122"/>
                 <a:cs typeface="Aptos" pitchFamily="34" charset="-120"/>
               </a:rPr>
-              <a:t>Use the concept to clarify workflow changes, dependencies, staffing, procurement requirements, training needs, and implementation checkpoints.</a:t>
-            </a:r>
-            <a:endParaRPr lang="en-US" sz="1320" dirty="0"/>
+              <a:t>Use the concept to clarify workflow changes, dependencies, staffing, procurement.</a:t>
+            </a:r>
+            <a:endParaRPr lang="en-US" sz="1220" dirty="0"/>
           </a:p>
         </p:txBody>
       </p:sp>
@@ -7668,8 +7668,8 @@
         </p:nvSpPr>
         <p:spPr>
           <a:xfrm>
-            <a:off x="868680" y="1508760"/>
-            <a:ext cx="6309360" cy="4160520"/>
+            <a:off x="822960" y="1463040"/>
+            <a:ext cx="6565392" cy="4343400"/>
           </a:xfrm>
           <a:prstGeom prst="rect">
             <a:avLst/>
@@ -7687,7 +7687,7 @@
               <a:buNone/>
             </a:pPr>
             <a:r>
-              <a:rPr lang="en-US" sz="2100" dirty="0">
+              <a:rPr lang="en-US" sz="1920" dirty="0">
                 <a:solidFill>
                   <a:srgbClr val="003A63"/>
                 </a:solidFill>
@@ -7697,14 +7697,14 @@
               </a:rPr>
               <a:t>• Where does your agency receive, review, or process case reports today?</a:t>
             </a:r>
-            <a:endParaRPr lang="en-US" sz="2100" dirty="0"/>
-          </a:p>
-          <a:p>
-            <a:pPr indent="0" marL="0">
-              <a:buNone/>
-            </a:pPr>
-            <a:r>
-              <a:rPr lang="en-US" sz="2100" dirty="0">
+            <a:endParaRPr lang="en-US" sz="1920" dirty="0"/>
+          </a:p>
+          <a:p>
+            <a:pPr indent="0" marL="0">
+              <a:buNone/>
+            </a:pPr>
+            <a:r>
+              <a:rPr lang="en-US" sz="1920" dirty="0">
                 <a:solidFill>
                   <a:srgbClr val="003A63"/>
                 </a:solidFill>
@@ -7714,14 +7714,14 @@
               </a:rPr>
               <a:t>• Which steps are automated and which remain manual?</a:t>
             </a:r>
-            <a:endParaRPr lang="en-US" sz="2100" dirty="0"/>
-          </a:p>
-          <a:p>
-            <a:pPr indent="0" marL="0">
-              <a:buNone/>
-            </a:pPr>
-            <a:r>
-              <a:rPr lang="en-US" sz="2100" dirty="0">
+            <a:endParaRPr lang="en-US" sz="1920" dirty="0"/>
+          </a:p>
+          <a:p>
+            <a:pPr indent="0" marL="0">
+              <a:buNone/>
+            </a:pPr>
+            <a:r>
+              <a:rPr lang="en-US" sz="1920" dirty="0">
                 <a:solidFill>
                   <a:srgbClr val="003A63"/>
                 </a:solidFill>
@@ -7729,9 +7729,9 @@
                 <a:ea typeface="Aptos" pitchFamily="34" charset="-122"/>
                 <a:cs typeface="Aptos" pitchFamily="34" charset="-120"/>
               </a:rPr>
-              <a:t>• Where are timeliness, completeness, routing, or duplication problems most common?</a:t>
-            </a:r>
-            <a:endParaRPr lang="en-US" sz="2100" dirty="0"/>
+              <a:t>• Where are timeliness, completeness, routing, or duplication problems most.</a:t>
+            </a:r>
+            <a:endParaRPr lang="en-US" sz="1920" dirty="0"/>
           </a:p>
         </p:txBody>
       </p:sp>
@@ -7743,12 +7743,12 @@
         </p:nvSpPr>
         <p:spPr>
           <a:xfrm>
-            <a:off x="7635240" y="1325880"/>
-            <a:ext cx="3474720" cy="1207008"/>
+            <a:off x="7543800" y="1325880"/>
+            <a:ext cx="3611880" cy="1261872"/>
           </a:xfrm>
           <a:prstGeom prst="roundRect">
             <a:avLst>
-              <a:gd name="adj" fmla="val 9091"/>
+              <a:gd name="adj" fmla="val 8696"/>
             </a:avLst>
           </a:prstGeom>
           <a:solidFill>
@@ -7770,8 +7770,8 @@
         </p:nvSpPr>
         <p:spPr>
           <a:xfrm>
-            <a:off x="7799832" y="1472184"/>
-            <a:ext cx="3145536" cy="256032"/>
+            <a:off x="7708392" y="1453896"/>
+            <a:ext cx="3282696" cy="228600"/>
           </a:xfrm>
           <a:prstGeom prst="rect">
             <a:avLst/>
@@ -7787,7 +7787,7 @@
               <a:buNone/>
             </a:pPr>
             <a:r>
-              <a:rPr lang="en-US" sz="1300" b="1" dirty="0">
+              <a:rPr lang="en-US" sz="1220" b="1" dirty="0">
                 <a:solidFill>
                   <a:srgbClr val="0068B7"/>
                 </a:solidFill>
@@ -7797,7 +7797,7 @@
               </a:rPr>
               <a:t>Implementation cue</a:t>
             </a:r>
-            <a:endParaRPr lang="en-US" sz="1300" dirty="0"/>
+            <a:endParaRPr lang="en-US" sz="1220" dirty="0"/>
           </a:p>
         </p:txBody>
       </p:sp>
@@ -7809,8 +7809,8 @@
         </p:nvSpPr>
         <p:spPr>
           <a:xfrm>
-            <a:off x="7799832" y="1801368"/>
-            <a:ext cx="3145536" cy="640080"/>
+            <a:off x="7708392" y="1764792"/>
+            <a:ext cx="3282696" cy="749808"/>
           </a:xfrm>
           <a:prstGeom prst="rect">
             <a:avLst/>
@@ -7828,7 +7828,7 @@
               <a:buNone/>
             </a:pPr>
             <a:r>
-              <a:rPr lang="en-US" sz="1320" dirty="0">
+              <a:rPr lang="en-US" sz="1220" dirty="0">
                 <a:solidFill>
                   <a:srgbClr val="17364A"/>
                 </a:solidFill>
@@ -7838,7 +7838,7 @@
               </a:rPr>
               <a:t>Where does your agency receive, review, or process case reports today?</a:t>
             </a:r>
-            <a:endParaRPr lang="en-US" sz="1320" dirty="0"/>
+            <a:endParaRPr lang="en-US" sz="1220" dirty="0"/>
           </a:p>
         </p:txBody>
       </p:sp>
@@ -7850,12 +7850,12 @@
         </p:nvSpPr>
         <p:spPr>
           <a:xfrm>
-            <a:off x="7635240" y="2670048"/>
-            <a:ext cx="3474720" cy="1377086"/>
+            <a:off x="7543800" y="2724912"/>
+            <a:ext cx="3611880" cy="1527048"/>
           </a:xfrm>
           <a:prstGeom prst="roundRect">
             <a:avLst>
-              <a:gd name="adj" fmla="val 7968"/>
+              <a:gd name="adj" fmla="val 7186"/>
             </a:avLst>
           </a:prstGeom>
           <a:solidFill>
@@ -7877,8 +7877,8 @@
         </p:nvSpPr>
         <p:spPr>
           <a:xfrm>
-            <a:off x="7799832" y="2816352"/>
-            <a:ext cx="3145536" cy="256032"/>
+            <a:off x="7708392" y="2852928"/>
+            <a:ext cx="3282696" cy="228600"/>
           </a:xfrm>
           <a:prstGeom prst="rect">
             <a:avLst/>
@@ -7894,7 +7894,7 @@
               <a:buNone/>
             </a:pPr>
             <a:r>
-              <a:rPr lang="en-US" sz="1300" b="1" dirty="0">
+              <a:rPr lang="en-US" sz="1220" b="1" dirty="0">
                 <a:solidFill>
                   <a:srgbClr val="0068B7"/>
                 </a:solidFill>
@@ -7904,7 +7904,7 @@
               </a:rPr>
               <a:t>Concept checkpoints</a:t>
             </a:r>
-            <a:endParaRPr lang="en-US" sz="1300" dirty="0"/>
+            <a:endParaRPr lang="en-US" sz="1220" dirty="0"/>
           </a:p>
         </p:txBody>
       </p:sp>
@@ -7916,8 +7916,8 @@
         </p:nvSpPr>
         <p:spPr>
           <a:xfrm>
-            <a:off x="7818120" y="3182112"/>
-            <a:ext cx="3090672" cy="718718"/>
+            <a:off x="7726680" y="3182112"/>
+            <a:ext cx="3227832" cy="960120"/>
           </a:xfrm>
           <a:prstGeom prst="rect">
             <a:avLst/>
@@ -7935,7 +7935,7 @@
               <a:buNone/>
             </a:pPr>
             <a:r>
-              <a:rPr lang="en-US" sz="1220" dirty="0">
+              <a:rPr lang="en-US" sz="1140" dirty="0">
                 <a:solidFill>
                   <a:srgbClr val="17364A"/>
                 </a:solidFill>
@@ -7943,16 +7943,16 @@
                 <a:ea typeface="Aptos" pitchFamily="34" charset="-122"/>
                 <a:cs typeface="Aptos" pitchFamily="34" charset="-120"/>
               </a:rPr>
-              <a:t>Where does your agency receive, review, or process case reports.</a:t>
-            </a:r>
-            <a:endParaRPr lang="en-US" sz="1220" dirty="0"/>
-          </a:p>
-          <a:p>
-            <a:pPr indent="0" marL="0">
-              <a:buNone/>
-            </a:pPr>
-            <a:r>
-              <a:rPr lang="en-US" sz="1220" dirty="0">
+              <a:t>Where does your agency receive, review, or process.</a:t>
+            </a:r>
+            <a:endParaRPr lang="en-US" sz="1140" dirty="0"/>
+          </a:p>
+          <a:p>
+            <a:pPr indent="0" marL="0">
+              <a:buNone/>
+            </a:pPr>
+            <a:r>
+              <a:rPr lang="en-US" sz="1140" dirty="0">
                 <a:solidFill>
                   <a:srgbClr val="17364A"/>
                 </a:solidFill>
@@ -7962,14 +7962,14 @@
               </a:rPr>
               <a:t>Which steps are automated and which remain manual?</a:t>
             </a:r>
-            <a:endParaRPr lang="en-US" sz="1220" dirty="0"/>
-          </a:p>
-          <a:p>
-            <a:pPr indent="0" marL="0">
-              <a:buNone/>
-            </a:pPr>
-            <a:r>
-              <a:rPr lang="en-US" sz="1220" dirty="0">
+            <a:endParaRPr lang="en-US" sz="1140" dirty="0"/>
+          </a:p>
+          <a:p>
+            <a:pPr indent="0" marL="0">
+              <a:buNone/>
+            </a:pPr>
+            <a:r>
+              <a:rPr lang="en-US" sz="1140" dirty="0">
                 <a:solidFill>
                   <a:srgbClr val="17364A"/>
                 </a:solidFill>
@@ -7977,9 +7977,9 @@
                 <a:ea typeface="Aptos" pitchFamily="34" charset="-122"/>
                 <a:cs typeface="Aptos" pitchFamily="34" charset="-120"/>
               </a:rPr>
-              <a:t>Where are timeliness, completeness, routing, or duplication.</a:t>
-            </a:r>
-            <a:endParaRPr lang="en-US" sz="1220" dirty="0"/>
+              <a:t>Where are timeliness, completeness, routing, or.</a:t>
+            </a:r>
+            <a:endParaRPr lang="en-US" sz="1140" dirty="0"/>
           </a:p>
         </p:txBody>
       </p:sp>
@@ -7991,12 +7991,12 @@
         </p:nvSpPr>
         <p:spPr>
           <a:xfrm>
-            <a:off x="7635240" y="4184294"/>
-            <a:ext cx="3474720" cy="1466698"/>
+            <a:off x="7543800" y="4389120"/>
+            <a:ext cx="3611880" cy="1261872"/>
           </a:xfrm>
           <a:prstGeom prst="roundRect">
             <a:avLst>
-              <a:gd name="adj" fmla="val 7481"/>
+              <a:gd name="adj" fmla="val 8696"/>
             </a:avLst>
           </a:prstGeom>
           <a:solidFill>
@@ -8018,8 +8018,8 @@
         </p:nvSpPr>
         <p:spPr>
           <a:xfrm>
-            <a:off x="7799832" y="4330598"/>
-            <a:ext cx="3145536" cy="256032"/>
+            <a:off x="7708392" y="4517136"/>
+            <a:ext cx="3282696" cy="228600"/>
           </a:xfrm>
           <a:prstGeom prst="rect">
             <a:avLst/>
@@ -8035,7 +8035,7 @@
               <a:buNone/>
             </a:pPr>
             <a:r>
-              <a:rPr lang="en-US" sz="1300" b="1" dirty="0">
+              <a:rPr lang="en-US" sz="1220" b="1" dirty="0">
                 <a:solidFill>
                   <a:srgbClr val="0068B7"/>
                 </a:solidFill>
@@ -8045,7 +8045,7 @@
               </a:rPr>
               <a:t>Next action</a:t>
             </a:r>
-            <a:endParaRPr lang="en-US" sz="1300" dirty="0"/>
+            <a:endParaRPr lang="en-US" sz="1220" dirty="0"/>
           </a:p>
         </p:txBody>
       </p:sp>
@@ -8057,8 +8057,8 @@
         </p:nvSpPr>
         <p:spPr>
           <a:xfrm>
-            <a:off x="7799832" y="4659782"/>
-            <a:ext cx="3145536" cy="899770"/>
+            <a:off x="7708392" y="4828032"/>
+            <a:ext cx="3282696" cy="749808"/>
           </a:xfrm>
           <a:prstGeom prst="rect">
             <a:avLst/>
@@ -8076,7 +8076,7 @@
               <a:buNone/>
             </a:pPr>
             <a:r>
-              <a:rPr lang="en-US" sz="1320" dirty="0">
+              <a:rPr lang="en-US" sz="1220" dirty="0">
                 <a:solidFill>
                   <a:srgbClr val="17364A"/>
                 </a:solidFill>
@@ -8084,9 +8084,9 @@
                 <a:ea typeface="Aptos" pitchFamily="34" charset="-122"/>
                 <a:cs typeface="Aptos" pitchFamily="34" charset="-120"/>
               </a:rPr>
-              <a:t>Use the concept to clarify workflow changes, dependencies, staffing, procurement requirements, training needs, and implementation checkpoints.</a:t>
-            </a:r>
-            <a:endParaRPr lang="en-US" sz="1320" dirty="0"/>
+              <a:t>Use the concept to clarify workflow changes, dependencies, staffing, procurement.</a:t>
+            </a:r>
+            <a:endParaRPr lang="en-US" sz="1220" dirty="0"/>
           </a:p>
         </p:txBody>
       </p:sp>
@@ -8377,8 +8377,8 @@
         </p:nvSpPr>
         <p:spPr>
           <a:xfrm>
-            <a:off x="868680" y="1508760"/>
-            <a:ext cx="6309360" cy="4160520"/>
+            <a:off x="822960" y="1463040"/>
+            <a:ext cx="6565392" cy="4343400"/>
           </a:xfrm>
           <a:prstGeom prst="rect">
             <a:avLst/>
@@ -8396,7 +8396,7 @@
               <a:buNone/>
             </a:pPr>
             <a:r>
-              <a:rPr lang="en-US" sz="2100" dirty="0">
+              <a:rPr lang="en-US" sz="1920" dirty="0">
                 <a:solidFill>
                   <a:srgbClr val="003A63"/>
                 </a:solidFill>
@@ -8406,14 +8406,14 @@
               </a:rPr>
               <a:t>• Which eCR tasks could AI support safely?</a:t>
             </a:r>
-            <a:endParaRPr lang="en-US" sz="2100" dirty="0"/>
-          </a:p>
-          <a:p>
-            <a:pPr indent="0" marL="0">
-              <a:buNone/>
-            </a:pPr>
-            <a:r>
-              <a:rPr lang="en-US" sz="2100" dirty="0">
+            <a:endParaRPr lang="en-US" sz="1920" dirty="0"/>
+          </a:p>
+          <a:p>
+            <a:pPr indent="0" marL="0">
+              <a:buNone/>
+            </a:pPr>
+            <a:r>
+              <a:rPr lang="en-US" sz="1920" dirty="0">
                 <a:solidFill>
                   <a:srgbClr val="003A63"/>
                 </a:solidFill>
@@ -8423,7 +8423,7 @@
               </a:rPr>
               <a:t>• Which tasks require human review, legal authority, or epidemiologic judgment?</a:t>
             </a:r>
-            <a:endParaRPr lang="en-US" sz="2100" dirty="0"/>
+            <a:endParaRPr lang="en-US" sz="1920" dirty="0"/>
           </a:p>
         </p:txBody>
       </p:sp>
@@ -8435,12 +8435,12 @@
         </p:nvSpPr>
         <p:spPr>
           <a:xfrm>
-            <a:off x="7635240" y="1325880"/>
-            <a:ext cx="3474720" cy="1207008"/>
+            <a:off x="7543800" y="1325880"/>
+            <a:ext cx="3611880" cy="1261872"/>
           </a:xfrm>
           <a:prstGeom prst="roundRect">
             <a:avLst>
-              <a:gd name="adj" fmla="val 9091"/>
+              <a:gd name="adj" fmla="val 8696"/>
             </a:avLst>
           </a:prstGeom>
           <a:solidFill>
@@ -8462,8 +8462,8 @@
         </p:nvSpPr>
         <p:spPr>
           <a:xfrm>
-            <a:off x="7799832" y="1472184"/>
-            <a:ext cx="3145536" cy="256032"/>
+            <a:off x="7708392" y="1453896"/>
+            <a:ext cx="3282696" cy="228600"/>
           </a:xfrm>
           <a:prstGeom prst="rect">
             <a:avLst/>
@@ -8479,7 +8479,7 @@
               <a:buNone/>
             </a:pPr>
             <a:r>
-              <a:rPr lang="en-US" sz="1300" b="1" dirty="0">
+              <a:rPr lang="en-US" sz="1220" b="1" dirty="0">
                 <a:solidFill>
                   <a:srgbClr val="0068B7"/>
                 </a:solidFill>
@@ -8489,7 +8489,7 @@
               </a:rPr>
               <a:t>Implementation cue</a:t>
             </a:r>
-            <a:endParaRPr lang="en-US" sz="1300" dirty="0"/>
+            <a:endParaRPr lang="en-US" sz="1220" dirty="0"/>
           </a:p>
         </p:txBody>
       </p:sp>
@@ -8501,8 +8501,8 @@
         </p:nvSpPr>
         <p:spPr>
           <a:xfrm>
-            <a:off x="7799832" y="1801368"/>
-            <a:ext cx="3145536" cy="640080"/>
+            <a:off x="7708392" y="1764792"/>
+            <a:ext cx="3282696" cy="749808"/>
           </a:xfrm>
           <a:prstGeom prst="rect">
             <a:avLst/>
@@ -8520,7 +8520,7 @@
               <a:buNone/>
             </a:pPr>
             <a:r>
-              <a:rPr lang="en-US" sz="1320" dirty="0">
+              <a:rPr lang="en-US" sz="1220" dirty="0">
                 <a:solidFill>
                   <a:srgbClr val="17364A"/>
                 </a:solidFill>
@@ -8530,7 +8530,7 @@
               </a:rPr>
               <a:t>Which eCR tasks could AI support safely?</a:t>
             </a:r>
-            <a:endParaRPr lang="en-US" sz="1320" dirty="0"/>
+            <a:endParaRPr lang="en-US" sz="1220" dirty="0"/>
           </a:p>
         </p:txBody>
       </p:sp>
@@ -8542,12 +8542,12 @@
         </p:nvSpPr>
         <p:spPr>
           <a:xfrm>
-            <a:off x="7635240" y="2670048"/>
-            <a:ext cx="3474720" cy="1377086"/>
+            <a:off x="7543800" y="2724912"/>
+            <a:ext cx="3611880" cy="1527048"/>
           </a:xfrm>
           <a:prstGeom prst="roundRect">
             <a:avLst>
-              <a:gd name="adj" fmla="val 7968"/>
+              <a:gd name="adj" fmla="val 7186"/>
             </a:avLst>
           </a:prstGeom>
           <a:solidFill>
@@ -8569,8 +8569,8 @@
         </p:nvSpPr>
         <p:spPr>
           <a:xfrm>
-            <a:off x="7799832" y="2816352"/>
-            <a:ext cx="3145536" cy="256032"/>
+            <a:off x="7708392" y="2852928"/>
+            <a:ext cx="3282696" cy="228600"/>
           </a:xfrm>
           <a:prstGeom prst="rect">
             <a:avLst/>
@@ -8586,7 +8586,7 @@
               <a:buNone/>
             </a:pPr>
             <a:r>
-              <a:rPr lang="en-US" sz="1300" b="1" dirty="0">
+              <a:rPr lang="en-US" sz="1220" b="1" dirty="0">
                 <a:solidFill>
                   <a:srgbClr val="0068B7"/>
                 </a:solidFill>
@@ -8596,7 +8596,7 @@
               </a:rPr>
               <a:t>Concept checkpoints</a:t>
             </a:r>
-            <a:endParaRPr lang="en-US" sz="1300" dirty="0"/>
+            <a:endParaRPr lang="en-US" sz="1220" dirty="0"/>
           </a:p>
         </p:txBody>
       </p:sp>
@@ -8608,8 +8608,8 @@
         </p:nvSpPr>
         <p:spPr>
           <a:xfrm>
-            <a:off x="7818120" y="3182112"/>
-            <a:ext cx="3090672" cy="718718"/>
+            <a:off x="7726680" y="3182112"/>
+            <a:ext cx="3227832" cy="960120"/>
           </a:xfrm>
           <a:prstGeom prst="rect">
             <a:avLst/>
@@ -8627,7 +8627,7 @@
               <a:buNone/>
             </a:pPr>
             <a:r>
-              <a:rPr lang="en-US" sz="1220" dirty="0">
+              <a:rPr lang="en-US" sz="1140" dirty="0">
                 <a:solidFill>
                   <a:srgbClr val="17364A"/>
                 </a:solidFill>
@@ -8637,14 +8637,14 @@
               </a:rPr>
               <a:t>Which eCR tasks could AI support safely?</a:t>
             </a:r>
-            <a:endParaRPr lang="en-US" sz="1220" dirty="0"/>
-          </a:p>
-          <a:p>
-            <a:pPr indent="0" marL="0">
-              <a:buNone/>
-            </a:pPr>
-            <a:r>
-              <a:rPr lang="en-US" sz="1220" dirty="0">
+            <a:endParaRPr lang="en-US" sz="1140" dirty="0"/>
+          </a:p>
+          <a:p>
+            <a:pPr indent="0" marL="0">
+              <a:buNone/>
+            </a:pPr>
+            <a:r>
+              <a:rPr lang="en-US" sz="1140" dirty="0">
                 <a:solidFill>
                   <a:srgbClr val="17364A"/>
                 </a:solidFill>
@@ -8652,9 +8652,9 @@
                 <a:ea typeface="Aptos" pitchFamily="34" charset="-122"/>
                 <a:cs typeface="Aptos" pitchFamily="34" charset="-120"/>
               </a:rPr>
-              <a:t>Which tasks require human review, legal authority, or.</a:t>
-            </a:r>
-            <a:endParaRPr lang="en-US" sz="1220" dirty="0"/>
+              <a:t>Which tasks require human review, legal authority,.</a:t>
+            </a:r>
+            <a:endParaRPr lang="en-US" sz="1140" dirty="0"/>
           </a:p>
         </p:txBody>
       </p:sp>
@@ -8666,12 +8666,12 @@
         </p:nvSpPr>
         <p:spPr>
           <a:xfrm>
-            <a:off x="7635240" y="4184294"/>
-            <a:ext cx="3474720" cy="1466698"/>
+            <a:off x="7543800" y="4389120"/>
+            <a:ext cx="3611880" cy="1261872"/>
           </a:xfrm>
           <a:prstGeom prst="roundRect">
             <a:avLst>
-              <a:gd name="adj" fmla="val 7481"/>
+              <a:gd name="adj" fmla="val 8696"/>
             </a:avLst>
           </a:prstGeom>
           <a:solidFill>
@@ -8693,8 +8693,8 @@
         </p:nvSpPr>
         <p:spPr>
           <a:xfrm>
-            <a:off x="7799832" y="4330598"/>
-            <a:ext cx="3145536" cy="256032"/>
+            <a:off x="7708392" y="4517136"/>
+            <a:ext cx="3282696" cy="228600"/>
           </a:xfrm>
           <a:prstGeom prst="rect">
             <a:avLst/>
@@ -8710,7 +8710,7 @@
               <a:buNone/>
             </a:pPr>
             <a:r>
-              <a:rPr lang="en-US" sz="1300" b="1" dirty="0">
+              <a:rPr lang="en-US" sz="1220" b="1" dirty="0">
                 <a:solidFill>
                   <a:srgbClr val="0068B7"/>
                 </a:solidFill>
@@ -8720,7 +8720,7 @@
               </a:rPr>
               <a:t>Next action</a:t>
             </a:r>
-            <a:endParaRPr lang="en-US" sz="1300" dirty="0"/>
+            <a:endParaRPr lang="en-US" sz="1220" dirty="0"/>
           </a:p>
         </p:txBody>
       </p:sp>
@@ -8732,8 +8732,8 @@
         </p:nvSpPr>
         <p:spPr>
           <a:xfrm>
-            <a:off x="7799832" y="4659782"/>
-            <a:ext cx="3145536" cy="899770"/>
+            <a:off x="7708392" y="4828032"/>
+            <a:ext cx="3282696" cy="749808"/>
           </a:xfrm>
           <a:prstGeom prst="rect">
             <a:avLst/>
@@ -8751,7 +8751,7 @@
               <a:buNone/>
             </a:pPr>
             <a:r>
-              <a:rPr lang="en-US" sz="1320" dirty="0">
+              <a:rPr lang="en-US" sz="1220" dirty="0">
                 <a:solidFill>
                   <a:srgbClr val="17364A"/>
                 </a:solidFill>
@@ -8759,9 +8759,9 @@
                 <a:ea typeface="Aptos" pitchFamily="34" charset="-122"/>
                 <a:cs typeface="Aptos" pitchFamily="34" charset="-120"/>
               </a:rPr>
-              <a:t>Use the concept to clarify workflow changes, dependencies, staffing, procurement requirements, training needs, and implementation checkpoints.</a:t>
-            </a:r>
-            <a:endParaRPr lang="en-US" sz="1320" dirty="0"/>
+              <a:t>Use the concept to clarify workflow changes, dependencies, staffing, procurement.</a:t>
+            </a:r>
+            <a:endParaRPr lang="en-US" sz="1220" dirty="0"/>
           </a:p>
         </p:txBody>
       </p:sp>
@@ -9052,8 +9052,8 @@
         </p:nvSpPr>
         <p:spPr>
           <a:xfrm>
-            <a:off x="868680" y="1508760"/>
-            <a:ext cx="6309360" cy="4160520"/>
+            <a:off x="822960" y="1463040"/>
+            <a:ext cx="6565392" cy="4343400"/>
           </a:xfrm>
           <a:prstGeom prst="rect">
             <a:avLst/>
@@ -9071,7 +9071,7 @@
               <a:buNone/>
             </a:pPr>
             <a:r>
-              <a:rPr lang="en-US" sz="2100" dirty="0">
+              <a:rPr lang="en-US" sz="1920" dirty="0">
                 <a:solidFill>
                   <a:srgbClr val="003A63"/>
                 </a:solidFill>
@@ -9081,14 +9081,14 @@
               </a:rPr>
               <a:t>• Create an AI-readiness review for one eCR workflow.</a:t>
             </a:r>
-            <a:endParaRPr lang="en-US" sz="2100" dirty="0"/>
-          </a:p>
-          <a:p>
-            <a:pPr indent="0" marL="0">
-              <a:buNone/>
-            </a:pPr>
-            <a:r>
-              <a:rPr lang="en-US" sz="2100" dirty="0">
+            <a:endParaRPr lang="en-US" sz="1920" dirty="0"/>
+          </a:p>
+          <a:p>
+            <a:pPr indent="0" marL="0">
+              <a:buNone/>
+            </a:pPr>
+            <a:r>
+              <a:rPr lang="en-US" sz="1920" dirty="0">
                 <a:solidFill>
                   <a:srgbClr val="003A63"/>
                 </a:solidFill>
@@ -9096,9 +9096,9 @@
                 <a:ea typeface="Aptos" pitchFamily="34" charset="-122"/>
                 <a:cs typeface="Aptos" pitchFamily="34" charset="-120"/>
               </a:rPr>
-              <a:t>• Map the current workflow, identify data elements required for review, describe common data.</a:t>
-            </a:r>
-            <a:endParaRPr lang="en-US" sz="2100" dirty="0"/>
+              <a:t>• Map the current workflow, identify data elements required for review,.</a:t>
+            </a:r>
+            <a:endParaRPr lang="en-US" sz="1920" dirty="0"/>
           </a:p>
         </p:txBody>
       </p:sp>
@@ -9110,12 +9110,12 @@
         </p:nvSpPr>
         <p:spPr>
           <a:xfrm>
-            <a:off x="7635240" y="1325880"/>
-            <a:ext cx="3474720" cy="1207008"/>
+            <a:off x="7543800" y="1325880"/>
+            <a:ext cx="3611880" cy="1261872"/>
           </a:xfrm>
           <a:prstGeom prst="roundRect">
             <a:avLst>
-              <a:gd name="adj" fmla="val 9091"/>
+              <a:gd name="adj" fmla="val 8696"/>
             </a:avLst>
           </a:prstGeom>
           <a:solidFill>
@@ -9137,8 +9137,8 @@
         </p:nvSpPr>
         <p:spPr>
           <a:xfrm>
-            <a:off x="7799832" y="1472184"/>
-            <a:ext cx="3145536" cy="256032"/>
+            <a:off x="7708392" y="1453896"/>
+            <a:ext cx="3282696" cy="228600"/>
           </a:xfrm>
           <a:prstGeom prst="rect">
             <a:avLst/>
@@ -9154,7 +9154,7 @@
               <a:buNone/>
             </a:pPr>
             <a:r>
-              <a:rPr lang="en-US" sz="1300" b="1" dirty="0">
+              <a:rPr lang="en-US" sz="1220" b="1" dirty="0">
                 <a:solidFill>
                   <a:srgbClr val="0068B7"/>
                 </a:solidFill>
@@ -9164,7 +9164,7 @@
               </a:rPr>
               <a:t>Implementation cue</a:t>
             </a:r>
-            <a:endParaRPr lang="en-US" sz="1300" dirty="0"/>
+            <a:endParaRPr lang="en-US" sz="1220" dirty="0"/>
           </a:p>
         </p:txBody>
       </p:sp>
@@ -9176,8 +9176,8 @@
         </p:nvSpPr>
         <p:spPr>
           <a:xfrm>
-            <a:off x="7799832" y="1801368"/>
-            <a:ext cx="3145536" cy="640080"/>
+            <a:off x="7708392" y="1764792"/>
+            <a:ext cx="3282696" cy="749808"/>
           </a:xfrm>
           <a:prstGeom prst="rect">
             <a:avLst/>
@@ -9195,7 +9195,7 @@
               <a:buNone/>
             </a:pPr>
             <a:r>
-              <a:rPr lang="en-US" sz="1320" dirty="0">
+              <a:rPr lang="en-US" sz="1220" dirty="0">
                 <a:solidFill>
                   <a:srgbClr val="17364A"/>
                 </a:solidFill>
@@ -9205,7 +9205,7 @@
               </a:rPr>
               <a:t>Create an AI-readiness review for one eCR workflow.</a:t>
             </a:r>
-            <a:endParaRPr lang="en-US" sz="1320" dirty="0"/>
+            <a:endParaRPr lang="en-US" sz="1220" dirty="0"/>
           </a:p>
         </p:txBody>
       </p:sp>
@@ -9217,12 +9217,12 @@
         </p:nvSpPr>
         <p:spPr>
           <a:xfrm>
-            <a:off x="7635240" y="2670048"/>
-            <a:ext cx="3474720" cy="1377086"/>
+            <a:off x="7543800" y="2724912"/>
+            <a:ext cx="3611880" cy="1527048"/>
           </a:xfrm>
           <a:prstGeom prst="roundRect">
             <a:avLst>
-              <a:gd name="adj" fmla="val 7968"/>
+              <a:gd name="adj" fmla="val 7186"/>
             </a:avLst>
           </a:prstGeom>
           <a:solidFill>
@@ -9244,8 +9244,8 @@
         </p:nvSpPr>
         <p:spPr>
           <a:xfrm>
-            <a:off x="7799832" y="2816352"/>
-            <a:ext cx="3145536" cy="256032"/>
+            <a:off x="7708392" y="2852928"/>
+            <a:ext cx="3282696" cy="228600"/>
           </a:xfrm>
           <a:prstGeom prst="rect">
             <a:avLst/>
@@ -9261,7 +9261,7 @@
               <a:buNone/>
             </a:pPr>
             <a:r>
-              <a:rPr lang="en-US" sz="1300" b="1" dirty="0">
+              <a:rPr lang="en-US" sz="1220" b="1" dirty="0">
                 <a:solidFill>
                   <a:srgbClr val="0068B7"/>
                 </a:solidFill>
@@ -9271,7 +9271,7 @@
               </a:rPr>
               <a:t>Concept checkpoints</a:t>
             </a:r>
-            <a:endParaRPr lang="en-US" sz="1300" dirty="0"/>
+            <a:endParaRPr lang="en-US" sz="1220" dirty="0"/>
           </a:p>
         </p:txBody>
       </p:sp>
@@ -9283,8 +9283,8 @@
         </p:nvSpPr>
         <p:spPr>
           <a:xfrm>
-            <a:off x="7818120" y="3182112"/>
-            <a:ext cx="3090672" cy="718718"/>
+            <a:off x="7726680" y="3182112"/>
+            <a:ext cx="3227832" cy="960120"/>
           </a:xfrm>
           <a:prstGeom prst="rect">
             <a:avLst/>
@@ -9302,7 +9302,7 @@
               <a:buNone/>
             </a:pPr>
             <a:r>
-              <a:rPr lang="en-US" sz="1220" dirty="0">
+              <a:rPr lang="en-US" sz="1140" dirty="0">
                 <a:solidFill>
                   <a:srgbClr val="17364A"/>
                 </a:solidFill>
@@ -9312,14 +9312,14 @@
               </a:rPr>
               <a:t>Create an AI-readiness review for one eCR workflow.</a:t>
             </a:r>
-            <a:endParaRPr lang="en-US" sz="1220" dirty="0"/>
-          </a:p>
-          <a:p>
-            <a:pPr indent="0" marL="0">
-              <a:buNone/>
-            </a:pPr>
-            <a:r>
-              <a:rPr lang="en-US" sz="1220" dirty="0">
+            <a:endParaRPr lang="en-US" sz="1140" dirty="0"/>
+          </a:p>
+          <a:p>
+            <a:pPr indent="0" marL="0">
+              <a:buNone/>
+            </a:pPr>
+            <a:r>
+              <a:rPr lang="en-US" sz="1140" dirty="0">
                 <a:solidFill>
                   <a:srgbClr val="17364A"/>
                 </a:solidFill>
@@ -9327,9 +9327,9 @@
                 <a:ea typeface="Aptos" pitchFamily="34" charset="-122"/>
                 <a:cs typeface="Aptos" pitchFamily="34" charset="-120"/>
               </a:rPr>
-              <a:t>Map the current workflow, identify data elements required for.</a:t>
-            </a:r>
-            <a:endParaRPr lang="en-US" sz="1220" dirty="0"/>
+              <a:t>Map the current workflow, identify data elements.</a:t>
+            </a:r>
+            <a:endParaRPr lang="en-US" sz="1140" dirty="0"/>
           </a:p>
         </p:txBody>
       </p:sp>
@@ -9341,12 +9341,12 @@
         </p:nvSpPr>
         <p:spPr>
           <a:xfrm>
-            <a:off x="7635240" y="4184294"/>
-            <a:ext cx="3474720" cy="1466698"/>
+            <a:off x="7543800" y="4389120"/>
+            <a:ext cx="3611880" cy="1261872"/>
           </a:xfrm>
           <a:prstGeom prst="roundRect">
             <a:avLst>
-              <a:gd name="adj" fmla="val 7481"/>
+              <a:gd name="adj" fmla="val 8696"/>
             </a:avLst>
           </a:prstGeom>
           <a:solidFill>
@@ -9368,8 +9368,8 @@
         </p:nvSpPr>
         <p:spPr>
           <a:xfrm>
-            <a:off x="7799832" y="4330598"/>
-            <a:ext cx="3145536" cy="256032"/>
+            <a:off x="7708392" y="4517136"/>
+            <a:ext cx="3282696" cy="228600"/>
           </a:xfrm>
           <a:prstGeom prst="rect">
             <a:avLst/>
@@ -9385,7 +9385,7 @@
               <a:buNone/>
             </a:pPr>
             <a:r>
-              <a:rPr lang="en-US" sz="1300" b="1" dirty="0">
+              <a:rPr lang="en-US" sz="1220" b="1" dirty="0">
                 <a:solidFill>
                   <a:srgbClr val="0068B7"/>
                 </a:solidFill>
@@ -9395,7 +9395,7 @@
               </a:rPr>
               <a:t>Next action</a:t>
             </a:r>
-            <a:endParaRPr lang="en-US" sz="1300" dirty="0"/>
+            <a:endParaRPr lang="en-US" sz="1220" dirty="0"/>
           </a:p>
         </p:txBody>
       </p:sp>
@@ -9407,8 +9407,8 @@
         </p:nvSpPr>
         <p:spPr>
           <a:xfrm>
-            <a:off x="7799832" y="4659782"/>
-            <a:ext cx="3145536" cy="899770"/>
+            <a:off x="7708392" y="4828032"/>
+            <a:ext cx="3282696" cy="749808"/>
           </a:xfrm>
           <a:prstGeom prst="rect">
             <a:avLst/>
@@ -9426,7 +9426,7 @@
               <a:buNone/>
             </a:pPr>
             <a:r>
-              <a:rPr lang="en-US" sz="1320" dirty="0">
+              <a:rPr lang="en-US" sz="1220" dirty="0">
                 <a:solidFill>
                   <a:srgbClr val="17364A"/>
                 </a:solidFill>
@@ -9434,9 +9434,9 @@
                 <a:ea typeface="Aptos" pitchFamily="34" charset="-122"/>
                 <a:cs typeface="Aptos" pitchFamily="34" charset="-120"/>
               </a:rPr>
-              <a:t>Use the assignment to test whether you can explain the concept, apply it to a realistic public health situation, and identify what would need review before the work moves forward.</a:t>
-            </a:r>
-            <a:endParaRPr lang="en-US" sz="1320" dirty="0"/>
+              <a:t>Use the assignment to test whether you can explain the concept, apply it to a.</a:t>
+            </a:r>
+            <a:endParaRPr lang="en-US" sz="1220" dirty="0"/>
           </a:p>
         </p:txBody>
       </p:sp>
@@ -9727,8 +9727,8 @@
         </p:nvSpPr>
         <p:spPr>
           <a:xfrm>
-            <a:off x="868680" y="1508760"/>
-            <a:ext cx="6309360" cy="4160520"/>
+            <a:off x="822960" y="1463040"/>
+            <a:ext cx="6565392" cy="4343400"/>
           </a:xfrm>
           <a:prstGeom prst="rect">
             <a:avLst/>
@@ -9746,7 +9746,7 @@
               <a:buNone/>
             </a:pPr>
             <a:r>
-              <a:rPr lang="en-US" sz="2100" dirty="0">
+              <a:rPr lang="en-US" sz="1920" dirty="0">
                 <a:solidFill>
                   <a:srgbClr val="003A63"/>
                 </a:solidFill>
@@ -9756,14 +9756,14 @@
               </a:rPr>
               <a:t>• eCR workflow map</a:t>
             </a:r>
-            <a:endParaRPr lang="en-US" sz="2100" dirty="0"/>
-          </a:p>
-          <a:p>
-            <a:pPr indent="0" marL="0">
-              <a:buNone/>
-            </a:pPr>
-            <a:r>
-              <a:rPr lang="en-US" sz="2100" dirty="0">
+            <a:endParaRPr lang="en-US" sz="1920" dirty="0"/>
+          </a:p>
+          <a:p>
+            <a:pPr indent="0" marL="0">
+              <a:buNone/>
+            </a:pPr>
+            <a:r>
+              <a:rPr lang="en-US" sz="1920" dirty="0">
                 <a:solidFill>
                   <a:srgbClr val="003A63"/>
                 </a:solidFill>
@@ -9773,14 +9773,14 @@
               </a:rPr>
               <a:t>• AI-readiness checklist</a:t>
             </a:r>
-            <a:endParaRPr lang="en-US" sz="2100" dirty="0"/>
-          </a:p>
-          <a:p>
-            <a:pPr indent="0" marL="0">
-              <a:buNone/>
-            </a:pPr>
-            <a:r>
-              <a:rPr lang="en-US" sz="2100" dirty="0">
+            <a:endParaRPr lang="en-US" sz="1920" dirty="0"/>
+          </a:p>
+          <a:p>
+            <a:pPr indent="0" marL="0">
+              <a:buNone/>
+            </a:pPr>
+            <a:r>
+              <a:rPr lang="en-US" sz="1920" dirty="0">
                 <a:solidFill>
                   <a:srgbClr val="003A63"/>
                 </a:solidFill>
@@ -9790,7 +9790,7 @@
               </a:rPr>
               <a:t>• Validation scenarios</a:t>
             </a:r>
-            <a:endParaRPr lang="en-US" sz="2100" dirty="0"/>
+            <a:endParaRPr lang="en-US" sz="1920" dirty="0"/>
           </a:p>
         </p:txBody>
       </p:sp>
@@ -9802,12 +9802,12 @@
         </p:nvSpPr>
         <p:spPr>
           <a:xfrm>
-            <a:off x="7635240" y="1325880"/>
-            <a:ext cx="3474720" cy="1207008"/>
+            <a:off x="7543800" y="1325880"/>
+            <a:ext cx="3611880" cy="1261872"/>
           </a:xfrm>
           <a:prstGeom prst="roundRect">
             <a:avLst>
-              <a:gd name="adj" fmla="val 9091"/>
+              <a:gd name="adj" fmla="val 8696"/>
             </a:avLst>
           </a:prstGeom>
           <a:solidFill>
@@ -9829,8 +9829,8 @@
         </p:nvSpPr>
         <p:spPr>
           <a:xfrm>
-            <a:off x="7799832" y="1472184"/>
-            <a:ext cx="3145536" cy="256032"/>
+            <a:off x="7708392" y="1453896"/>
+            <a:ext cx="3282696" cy="228600"/>
           </a:xfrm>
           <a:prstGeom prst="rect">
             <a:avLst/>
@@ -9846,7 +9846,7 @@
               <a:buNone/>
             </a:pPr>
             <a:r>
-              <a:rPr lang="en-US" sz="1300" b="1" dirty="0">
+              <a:rPr lang="en-US" sz="1220" b="1" dirty="0">
                 <a:solidFill>
                   <a:srgbClr val="0068B7"/>
                 </a:solidFill>
@@ -9856,7 +9856,7 @@
               </a:rPr>
               <a:t>Implementation cue</a:t>
             </a:r>
-            <a:endParaRPr lang="en-US" sz="1300" dirty="0"/>
+            <a:endParaRPr lang="en-US" sz="1220" dirty="0"/>
           </a:p>
         </p:txBody>
       </p:sp>
@@ -9868,8 +9868,8 @@
         </p:nvSpPr>
         <p:spPr>
           <a:xfrm>
-            <a:off x="7799832" y="1801368"/>
-            <a:ext cx="3145536" cy="640080"/>
+            <a:off x="7708392" y="1764792"/>
+            <a:ext cx="3282696" cy="749808"/>
           </a:xfrm>
           <a:prstGeom prst="rect">
             <a:avLst/>
@@ -9887,7 +9887,7 @@
               <a:buNone/>
             </a:pPr>
             <a:r>
-              <a:rPr lang="en-US" sz="1320" dirty="0">
+              <a:rPr lang="en-US" sz="1220" dirty="0">
                 <a:solidFill>
                   <a:srgbClr val="17364A"/>
                 </a:solidFill>
@@ -9897,7 +9897,7 @@
               </a:rPr>
               <a:t>eCR workflow map</a:t>
             </a:r>
-            <a:endParaRPr lang="en-US" sz="1320" dirty="0"/>
+            <a:endParaRPr lang="en-US" sz="1220" dirty="0"/>
           </a:p>
         </p:txBody>
       </p:sp>
@@ -9909,12 +9909,12 @@
         </p:nvSpPr>
         <p:spPr>
           <a:xfrm>
-            <a:off x="7635240" y="2670048"/>
-            <a:ext cx="3474720" cy="1377086"/>
+            <a:off x="7543800" y="2724912"/>
+            <a:ext cx="3611880" cy="1527048"/>
           </a:xfrm>
           <a:prstGeom prst="roundRect">
             <a:avLst>
-              <a:gd name="adj" fmla="val 7968"/>
+              <a:gd name="adj" fmla="val 7186"/>
             </a:avLst>
           </a:prstGeom>
           <a:solidFill>
@@ -9936,8 +9936,8 @@
         </p:nvSpPr>
         <p:spPr>
           <a:xfrm>
-            <a:off x="7799832" y="2816352"/>
-            <a:ext cx="3145536" cy="256032"/>
+            <a:off x="7708392" y="2852928"/>
+            <a:ext cx="3282696" cy="228600"/>
           </a:xfrm>
           <a:prstGeom prst="rect">
             <a:avLst/>
@@ -9953,7 +9953,7 @@
               <a:buNone/>
             </a:pPr>
             <a:r>
-              <a:rPr lang="en-US" sz="1300" b="1" dirty="0">
+              <a:rPr lang="en-US" sz="1220" b="1" dirty="0">
                 <a:solidFill>
                   <a:srgbClr val="0068B7"/>
                 </a:solidFill>
@@ -9963,7 +9963,7 @@
               </a:rPr>
               <a:t>Concept checkpoints</a:t>
             </a:r>
-            <a:endParaRPr lang="en-US" sz="1300" dirty="0"/>
+            <a:endParaRPr lang="en-US" sz="1220" dirty="0"/>
           </a:p>
         </p:txBody>
       </p:sp>
@@ -9975,8 +9975,8 @@
         </p:nvSpPr>
         <p:spPr>
           <a:xfrm>
-            <a:off x="7818120" y="3182112"/>
-            <a:ext cx="3090672" cy="718718"/>
+            <a:off x="7726680" y="3182112"/>
+            <a:ext cx="3227832" cy="960120"/>
           </a:xfrm>
           <a:prstGeom prst="rect">
             <a:avLst/>
@@ -9994,7 +9994,7 @@
               <a:buNone/>
             </a:pPr>
             <a:r>
-              <a:rPr lang="en-US" sz="1220" dirty="0">
+              <a:rPr lang="en-US" sz="1140" dirty="0">
                 <a:solidFill>
                   <a:srgbClr val="17364A"/>
                 </a:solidFill>
@@ -10004,14 +10004,14 @@
               </a:rPr>
               <a:t>eCR workflow map</a:t>
             </a:r>
-            <a:endParaRPr lang="en-US" sz="1220" dirty="0"/>
-          </a:p>
-          <a:p>
-            <a:pPr indent="0" marL="0">
-              <a:buNone/>
-            </a:pPr>
-            <a:r>
-              <a:rPr lang="en-US" sz="1220" dirty="0">
+            <a:endParaRPr lang="en-US" sz="1140" dirty="0"/>
+          </a:p>
+          <a:p>
+            <a:pPr indent="0" marL="0">
+              <a:buNone/>
+            </a:pPr>
+            <a:r>
+              <a:rPr lang="en-US" sz="1140" dirty="0">
                 <a:solidFill>
                   <a:srgbClr val="17364A"/>
                 </a:solidFill>
@@ -10021,14 +10021,14 @@
               </a:rPr>
               <a:t>AI-readiness checklist</a:t>
             </a:r>
-            <a:endParaRPr lang="en-US" sz="1220" dirty="0"/>
-          </a:p>
-          <a:p>
-            <a:pPr indent="0" marL="0">
-              <a:buNone/>
-            </a:pPr>
-            <a:r>
-              <a:rPr lang="en-US" sz="1220" dirty="0">
+            <a:endParaRPr lang="en-US" sz="1140" dirty="0"/>
+          </a:p>
+          <a:p>
+            <a:pPr indent="0" marL="0">
+              <a:buNone/>
+            </a:pPr>
+            <a:r>
+              <a:rPr lang="en-US" sz="1140" dirty="0">
                 <a:solidFill>
                   <a:srgbClr val="17364A"/>
                 </a:solidFill>
@@ -10038,7 +10038,7 @@
               </a:rPr>
               <a:t>Validation scenarios</a:t>
             </a:r>
-            <a:endParaRPr lang="en-US" sz="1220" dirty="0"/>
+            <a:endParaRPr lang="en-US" sz="1140" dirty="0"/>
           </a:p>
         </p:txBody>
       </p:sp>
@@ -10050,12 +10050,12 @@
         </p:nvSpPr>
         <p:spPr>
           <a:xfrm>
-            <a:off x="7635240" y="4184294"/>
-            <a:ext cx="3474720" cy="1466698"/>
+            <a:off x="7543800" y="4389120"/>
+            <a:ext cx="3611880" cy="1261872"/>
           </a:xfrm>
           <a:prstGeom prst="roundRect">
             <a:avLst>
-              <a:gd name="adj" fmla="val 7481"/>
+              <a:gd name="adj" fmla="val 8696"/>
             </a:avLst>
           </a:prstGeom>
           <a:solidFill>
@@ -10077,8 +10077,8 @@
         </p:nvSpPr>
         <p:spPr>
           <a:xfrm>
-            <a:off x="7799832" y="4330598"/>
-            <a:ext cx="3145536" cy="256032"/>
+            <a:off x="7708392" y="4517136"/>
+            <a:ext cx="3282696" cy="228600"/>
           </a:xfrm>
           <a:prstGeom prst="rect">
             <a:avLst/>
@@ -10094,7 +10094,7 @@
               <a:buNone/>
             </a:pPr>
             <a:r>
-              <a:rPr lang="en-US" sz="1300" b="1" dirty="0">
+              <a:rPr lang="en-US" sz="1220" b="1" dirty="0">
                 <a:solidFill>
                   <a:srgbClr val="0068B7"/>
                 </a:solidFill>
@@ -10104,7 +10104,7 @@
               </a:rPr>
               <a:t>Next action</a:t>
             </a:r>
-            <a:endParaRPr lang="en-US" sz="1300" dirty="0"/>
+            <a:endParaRPr lang="en-US" sz="1220" dirty="0"/>
           </a:p>
         </p:txBody>
       </p:sp>
@@ -10116,8 +10116,8 @@
         </p:nvSpPr>
         <p:spPr>
           <a:xfrm>
-            <a:off x="7799832" y="4659782"/>
-            <a:ext cx="3145536" cy="899770"/>
+            <a:off x="7708392" y="4828032"/>
+            <a:ext cx="3282696" cy="749808"/>
           </a:xfrm>
           <a:prstGeom prst="rect">
             <a:avLst/>
@@ -10135,7 +10135,7 @@
               <a:buNone/>
             </a:pPr>
             <a:r>
-              <a:rPr lang="en-US" sz="1320" dirty="0">
+              <a:rPr lang="en-US" sz="1220" dirty="0">
                 <a:solidFill>
                   <a:srgbClr val="17364A"/>
                 </a:solidFill>
@@ -10143,9 +10143,9 @@
                 <a:ea typeface="Aptos" pitchFamily="34" charset="-122"/>
                 <a:cs typeface="Aptos" pitchFamily="34" charset="-120"/>
               </a:rPr>
-              <a:t>Use the concept to clarify workflow changes, dependencies, staffing, procurement requirements, training needs, and implementation checkpoints.</a:t>
-            </a:r>
-            <a:endParaRPr lang="en-US" sz="1320" dirty="0"/>
+              <a:t>Use the concept to clarify workflow changes, dependencies, staffing, procurement.</a:t>
+            </a:r>
+            <a:endParaRPr lang="en-US" sz="1220" dirty="0"/>
           </a:p>
         </p:txBody>
       </p:sp>
@@ -10463,7 +10463,7 @@
                 <a:ea typeface="Aptos" pitchFamily="34" charset="-122"/>
                 <a:cs typeface="Aptos" pitchFamily="34" charset="-120"/>
               </a:rPr>
-              <a:t>• Electronic case reporting is one of the clearest examples of public health automation.</a:t>
+              <a:t>• Electronic case reporting is one of the clearest examples of public health.</a:t>
             </a:r>
             <a:endParaRPr lang="en-US" sz="2100" dirty="0"/>
           </a:p>
@@ -10480,7 +10480,7 @@
                 <a:ea typeface="Aptos" pitchFamily="34" charset="-122"/>
                 <a:cs typeface="Aptos" pitchFamily="34" charset="-120"/>
               </a:rPr>
-              <a:t>• It uses data from electronic health records and reporting logic to support more timely case.</a:t>
+              <a:t>• It uses data from electronic health records and reporting logic to support.</a:t>
             </a:r>
             <a:endParaRPr lang="en-US" sz="2100" dirty="0"/>
           </a:p>
@@ -10497,7 +10497,7 @@
                 <a:ea typeface="Aptos" pitchFamily="34" charset="-122"/>
                 <a:cs typeface="Aptos" pitchFamily="34" charset="-120"/>
               </a:rPr>
-              <a:t>• This module teaches learners how eCR works technically and how AI might support eCR-related.</a:t>
+              <a:t>• This module teaches learners how eCR works technically and how AI might.</a:t>
             </a:r>
             <a:endParaRPr lang="en-US" sz="2100" dirty="0"/>
           </a:p>
@@ -10538,8 +10538,8 @@
         </p:nvSpPr>
         <p:spPr>
           <a:xfrm>
-            <a:off x="8074152" y="1563624"/>
-            <a:ext cx="2825496" cy="256032"/>
+            <a:off x="8074152" y="1545336"/>
+            <a:ext cx="2825496" cy="228600"/>
           </a:xfrm>
           <a:prstGeom prst="rect">
             <a:avLst/>
@@ -10555,7 +10555,7 @@
               <a:buNone/>
             </a:pPr>
             <a:r>
-              <a:rPr lang="en-US" sz="1300" b="1" dirty="0">
+              <a:rPr lang="en-US" sz="1220" b="1" dirty="0">
                 <a:solidFill>
                   <a:srgbClr val="0068B7"/>
                 </a:solidFill>
@@ -10565,7 +10565,7 @@
               </a:rPr>
               <a:t>Module details</a:t>
             </a:r>
-            <a:endParaRPr lang="en-US" sz="1300" dirty="0"/>
+            <a:endParaRPr lang="en-US" sz="1220" dirty="0"/>
           </a:p>
         </p:txBody>
       </p:sp>
@@ -10577,8 +10577,8 @@
         </p:nvSpPr>
         <p:spPr>
           <a:xfrm>
-            <a:off x="8074152" y="1892808"/>
-            <a:ext cx="2825496" cy="1353312"/>
+            <a:off x="8074152" y="1856232"/>
+            <a:ext cx="2825496" cy="1408176"/>
           </a:xfrm>
           <a:prstGeom prst="rect">
             <a:avLst/>
@@ -10596,7 +10596,7 @@
               <a:buNone/>
             </a:pPr>
             <a:r>
-              <a:rPr lang="en-US" sz="1320" dirty="0">
+              <a:rPr lang="en-US" sz="1220" dirty="0">
                 <a:solidFill>
                   <a:srgbClr val="17364A"/>
                 </a:solidFill>
@@ -10604,9 +10604,9 @@
                 <a:ea typeface="Aptos" pitchFamily="34" charset="-122"/>
                 <a:cs typeface="Aptos" pitchFamily="34" charset="-120"/>
               </a:rPr>
-              <a:t>Level: applied/foundational Primary track: Technical Architecture Track Appears in tracks: technical-architecture</a:t>
-            </a:r>
-            <a:endParaRPr lang="en-US" sz="1320" dirty="0"/>
+              <a:t>Level: applied/foundational Primary track: Technical Architecture Track Appears.</a:t>
+            </a:r>
+            <a:endParaRPr lang="en-US" sz="1220" dirty="0"/>
           </a:p>
         </p:txBody>
       </p:sp>
@@ -10645,8 +10645,8 @@
         </p:nvSpPr>
         <p:spPr>
           <a:xfrm>
-            <a:off x="8074152" y="3822192"/>
-            <a:ext cx="2825496" cy="256032"/>
+            <a:off x="8074152" y="3803904"/>
+            <a:ext cx="2825496" cy="228600"/>
           </a:xfrm>
           <a:prstGeom prst="rect">
             <a:avLst/>
@@ -10662,7 +10662,7 @@
               <a:buNone/>
             </a:pPr>
             <a:r>
-              <a:rPr lang="en-US" sz="1300" b="1" dirty="0">
+              <a:rPr lang="en-US" sz="1220" b="1" dirty="0">
                 <a:solidFill>
                   <a:srgbClr val="0068B7"/>
                 </a:solidFill>
@@ -10672,7 +10672,7 @@
               </a:rPr>
               <a:t>Learning sequence</a:t>
             </a:r>
-            <a:endParaRPr lang="en-US" sz="1300" dirty="0"/>
+            <a:endParaRPr lang="en-US" sz="1220" dirty="0"/>
           </a:p>
         </p:txBody>
       </p:sp>
@@ -10684,8 +10684,8 @@
         </p:nvSpPr>
         <p:spPr>
           <a:xfrm>
-            <a:off x="8092440" y="4187952"/>
-            <a:ext cx="2770632" cy="1033272"/>
+            <a:off x="8092440" y="4133088"/>
+            <a:ext cx="2770632" cy="1124712"/>
           </a:xfrm>
           <a:prstGeom prst="rect">
             <a:avLst/>
@@ -10703,7 +10703,7 @@
               <a:buNone/>
             </a:pPr>
             <a:r>
-              <a:rPr lang="en-US" sz="1220" dirty="0">
+              <a:rPr lang="en-US" sz="1140" dirty="0">
                 <a:solidFill>
                   <a:srgbClr val="17364A"/>
                 </a:solidFill>
@@ -10713,14 +10713,14 @@
               </a:rPr>
               <a:t>Read the module for shared vocabulary and context.</a:t>
             </a:r>
-            <a:endParaRPr lang="en-US" sz="1220" dirty="0"/>
-          </a:p>
-          <a:p>
-            <a:pPr indent="0" marL="0">
-              <a:buNone/>
-            </a:pPr>
-            <a:r>
-              <a:rPr lang="en-US" sz="1220" dirty="0">
+            <a:endParaRPr lang="en-US" sz="1140" dirty="0"/>
+          </a:p>
+          <a:p>
+            <a:pPr indent="0" marL="0">
+              <a:buNone/>
+            </a:pPr>
+            <a:r>
+              <a:rPr lang="en-US" sz="1140" dirty="0">
                 <a:solidFill>
                   <a:srgbClr val="17364A"/>
                 </a:solidFill>
@@ -10728,16 +10728,16 @@
                 <a:ea typeface="Aptos" pitchFamily="34" charset="-122"/>
                 <a:cs typeface="Aptos" pitchFamily="34" charset="-120"/>
               </a:rPr>
-              <a:t>Complete the practical exercise to apply the concept.</a:t>
-            </a:r>
-            <a:endParaRPr lang="en-US" sz="1220" dirty="0"/>
-          </a:p>
-          <a:p>
-            <a:pPr indent="0" marL="0">
-              <a:buNone/>
-            </a:pPr>
-            <a:r>
-              <a:rPr lang="en-US" sz="1220" dirty="0">
+              <a:t>Complete the practical exercise to apply the.</a:t>
+            </a:r>
+            <a:endParaRPr lang="en-US" sz="1140" dirty="0"/>
+          </a:p>
+          <a:p>
+            <a:pPr indent="0" marL="0">
+              <a:buNone/>
+            </a:pPr>
+            <a:r>
+              <a:rPr lang="en-US" sz="1140" dirty="0">
                 <a:solidFill>
                   <a:srgbClr val="17364A"/>
                 </a:solidFill>
@@ -10747,7 +10747,7 @@
               </a:rPr>
               <a:t>Use the notes and references for deeper review.</a:t>
             </a:r>
-            <a:endParaRPr lang="en-US" sz="1220" dirty="0"/>
+            <a:endParaRPr lang="en-US" sz="1140" dirty="0"/>
           </a:p>
         </p:txBody>
       </p:sp>
@@ -11038,8 +11038,8 @@
         </p:nvSpPr>
         <p:spPr>
           <a:xfrm>
-            <a:off x="868680" y="1508760"/>
-            <a:ext cx="6309360" cy="4160520"/>
+            <a:off x="822960" y="1463040"/>
+            <a:ext cx="6565392" cy="4343400"/>
           </a:xfrm>
           <a:prstGeom prst="rect">
             <a:avLst/>
@@ -11057,7 +11057,7 @@
               <a:buNone/>
             </a:pPr>
             <a:r>
-              <a:rPr lang="en-US" sz="2100" dirty="0">
+              <a:rPr lang="en-US" sz="1920" dirty="0">
                 <a:solidFill>
                   <a:srgbClr val="003A63"/>
                 </a:solidFill>
@@ -11067,7 +11067,7 @@
               </a:rPr>
               <a:t>• Human review and escalation plan</a:t>
             </a:r>
-            <a:endParaRPr lang="en-US" sz="2100" dirty="0"/>
+            <a:endParaRPr lang="en-US" sz="1920" dirty="0"/>
           </a:p>
         </p:txBody>
       </p:sp>
@@ -11079,12 +11079,12 @@
         </p:nvSpPr>
         <p:spPr>
           <a:xfrm>
-            <a:off x="7635240" y="1325880"/>
-            <a:ext cx="3474720" cy="1207008"/>
+            <a:off x="7543800" y="1325880"/>
+            <a:ext cx="3611880" cy="1261872"/>
           </a:xfrm>
           <a:prstGeom prst="roundRect">
             <a:avLst>
-              <a:gd name="adj" fmla="val 9091"/>
+              <a:gd name="adj" fmla="val 8696"/>
             </a:avLst>
           </a:prstGeom>
           <a:solidFill>
@@ -11106,8 +11106,8 @@
         </p:nvSpPr>
         <p:spPr>
           <a:xfrm>
-            <a:off x="7799832" y="1472184"/>
-            <a:ext cx="3145536" cy="256032"/>
+            <a:off x="7708392" y="1453896"/>
+            <a:ext cx="3282696" cy="228600"/>
           </a:xfrm>
           <a:prstGeom prst="rect">
             <a:avLst/>
@@ -11123,7 +11123,7 @@
               <a:buNone/>
             </a:pPr>
             <a:r>
-              <a:rPr lang="en-US" sz="1300" b="1" dirty="0">
+              <a:rPr lang="en-US" sz="1220" b="1" dirty="0">
                 <a:solidFill>
                   <a:srgbClr val="0068B7"/>
                 </a:solidFill>
@@ -11133,7 +11133,7 @@
               </a:rPr>
               <a:t>Implementation cue</a:t>
             </a:r>
-            <a:endParaRPr lang="en-US" sz="1300" dirty="0"/>
+            <a:endParaRPr lang="en-US" sz="1220" dirty="0"/>
           </a:p>
         </p:txBody>
       </p:sp>
@@ -11145,8 +11145,8 @@
         </p:nvSpPr>
         <p:spPr>
           <a:xfrm>
-            <a:off x="7799832" y="1801368"/>
-            <a:ext cx="3145536" cy="640080"/>
+            <a:off x="7708392" y="1764792"/>
+            <a:ext cx="3282696" cy="749808"/>
           </a:xfrm>
           <a:prstGeom prst="rect">
             <a:avLst/>
@@ -11164,7 +11164,7 @@
               <a:buNone/>
             </a:pPr>
             <a:r>
-              <a:rPr lang="en-US" sz="1320" dirty="0">
+              <a:rPr lang="en-US" sz="1220" dirty="0">
                 <a:solidFill>
                   <a:srgbClr val="17364A"/>
                 </a:solidFill>
@@ -11174,7 +11174,7 @@
               </a:rPr>
               <a:t>Human review and escalation plan</a:t>
             </a:r>
-            <a:endParaRPr lang="en-US" sz="1320" dirty="0"/>
+            <a:endParaRPr lang="en-US" sz="1220" dirty="0"/>
           </a:p>
         </p:txBody>
       </p:sp>
@@ -11186,12 +11186,12 @@
         </p:nvSpPr>
         <p:spPr>
           <a:xfrm>
-            <a:off x="7635240" y="2670048"/>
-            <a:ext cx="3474720" cy="1377086"/>
+            <a:off x="7543800" y="2724912"/>
+            <a:ext cx="3611880" cy="1527048"/>
           </a:xfrm>
           <a:prstGeom prst="roundRect">
             <a:avLst>
-              <a:gd name="adj" fmla="val 7968"/>
+              <a:gd name="adj" fmla="val 7186"/>
             </a:avLst>
           </a:prstGeom>
           <a:solidFill>
@@ -11213,8 +11213,8 @@
         </p:nvSpPr>
         <p:spPr>
           <a:xfrm>
-            <a:off x="7799832" y="2816352"/>
-            <a:ext cx="3145536" cy="256032"/>
+            <a:off x="7708392" y="2852928"/>
+            <a:ext cx="3282696" cy="228600"/>
           </a:xfrm>
           <a:prstGeom prst="rect">
             <a:avLst/>
@@ -11230,7 +11230,7 @@
               <a:buNone/>
             </a:pPr>
             <a:r>
-              <a:rPr lang="en-US" sz="1300" b="1" dirty="0">
+              <a:rPr lang="en-US" sz="1220" b="1" dirty="0">
                 <a:solidFill>
                   <a:srgbClr val="0068B7"/>
                 </a:solidFill>
@@ -11240,7 +11240,7 @@
               </a:rPr>
               <a:t>Concept checkpoints</a:t>
             </a:r>
-            <a:endParaRPr lang="en-US" sz="1300" dirty="0"/>
+            <a:endParaRPr lang="en-US" sz="1220" dirty="0"/>
           </a:p>
         </p:txBody>
       </p:sp>
@@ -11252,8 +11252,8 @@
         </p:nvSpPr>
         <p:spPr>
           <a:xfrm>
-            <a:off x="7818120" y="3182112"/>
-            <a:ext cx="3090672" cy="718718"/>
+            <a:off x="7726680" y="3182112"/>
+            <a:ext cx="3227832" cy="960120"/>
           </a:xfrm>
           <a:prstGeom prst="rect">
             <a:avLst/>
@@ -11271,7 +11271,7 @@
               <a:buNone/>
             </a:pPr>
             <a:r>
-              <a:rPr lang="en-US" sz="1220" dirty="0">
+              <a:rPr lang="en-US" sz="1140" dirty="0">
                 <a:solidFill>
                   <a:srgbClr val="17364A"/>
                 </a:solidFill>
@@ -11281,7 +11281,7 @@
               </a:rPr>
               <a:t>Human review and escalation plan</a:t>
             </a:r>
-            <a:endParaRPr lang="en-US" sz="1220" dirty="0"/>
+            <a:endParaRPr lang="en-US" sz="1140" dirty="0"/>
           </a:p>
         </p:txBody>
       </p:sp>
@@ -11293,12 +11293,12 @@
         </p:nvSpPr>
         <p:spPr>
           <a:xfrm>
-            <a:off x="7635240" y="4184294"/>
-            <a:ext cx="3474720" cy="1466698"/>
+            <a:off x="7543800" y="4389120"/>
+            <a:ext cx="3611880" cy="1261872"/>
           </a:xfrm>
           <a:prstGeom prst="roundRect">
             <a:avLst>
-              <a:gd name="adj" fmla="val 7481"/>
+              <a:gd name="adj" fmla="val 8696"/>
             </a:avLst>
           </a:prstGeom>
           <a:solidFill>
@@ -11320,8 +11320,8 @@
         </p:nvSpPr>
         <p:spPr>
           <a:xfrm>
-            <a:off x="7799832" y="4330598"/>
-            <a:ext cx="3145536" cy="256032"/>
+            <a:off x="7708392" y="4517136"/>
+            <a:ext cx="3282696" cy="228600"/>
           </a:xfrm>
           <a:prstGeom prst="rect">
             <a:avLst/>
@@ -11337,7 +11337,7 @@
               <a:buNone/>
             </a:pPr>
             <a:r>
-              <a:rPr lang="en-US" sz="1300" b="1" dirty="0">
+              <a:rPr lang="en-US" sz="1220" b="1" dirty="0">
                 <a:solidFill>
                   <a:srgbClr val="0068B7"/>
                 </a:solidFill>
@@ -11347,7 +11347,7 @@
               </a:rPr>
               <a:t>Next action</a:t>
             </a:r>
-            <a:endParaRPr lang="en-US" sz="1300" dirty="0"/>
+            <a:endParaRPr lang="en-US" sz="1220" dirty="0"/>
           </a:p>
         </p:txBody>
       </p:sp>
@@ -11359,8 +11359,8 @@
         </p:nvSpPr>
         <p:spPr>
           <a:xfrm>
-            <a:off x="7799832" y="4659782"/>
-            <a:ext cx="3145536" cy="899770"/>
+            <a:off x="7708392" y="4828032"/>
+            <a:ext cx="3282696" cy="749808"/>
           </a:xfrm>
           <a:prstGeom prst="rect">
             <a:avLst/>
@@ -11378,7 +11378,7 @@
               <a:buNone/>
             </a:pPr>
             <a:r>
-              <a:rPr lang="en-US" sz="1320" dirty="0">
+              <a:rPr lang="en-US" sz="1220" dirty="0">
                 <a:solidFill>
                   <a:srgbClr val="17364A"/>
                 </a:solidFill>
@@ -11386,9 +11386,9 @@
                 <a:ea typeface="Aptos" pitchFamily="34" charset="-122"/>
                 <a:cs typeface="Aptos" pitchFamily="34" charset="-120"/>
               </a:rPr>
-              <a:t>Use the concept to clarify workflow changes, dependencies, staffing, procurement requirements, training needs, and implementation checkpoints.</a:t>
-            </a:r>
-            <a:endParaRPr lang="en-US" sz="1320" dirty="0"/>
+              <a:t>Use the concept to clarify workflow changes, dependencies, staffing, procurement.</a:t>
+            </a:r>
+            <a:endParaRPr lang="en-US" sz="1220" dirty="0"/>
           </a:p>
         </p:txBody>
       </p:sp>
@@ -11679,8 +11679,8 @@
         </p:nvSpPr>
         <p:spPr>
           <a:xfrm>
-            <a:off x="868680" y="1508760"/>
-            <a:ext cx="6309360" cy="4160520"/>
+            <a:off x="822960" y="1463040"/>
+            <a:ext cx="6565392" cy="4343400"/>
           </a:xfrm>
           <a:prstGeom prst="rect">
             <a:avLst/>
@@ -11698,7 +11698,7 @@
               <a:buNone/>
             </a:pPr>
             <a:r>
-              <a:rPr lang="en-US" sz="2100" dirty="0">
+              <a:rPr lang="en-US" sz="1920" dirty="0">
                 <a:solidFill>
                   <a:srgbClr val="003A63"/>
                 </a:solidFill>
@@ -11708,14 +11708,14 @@
               </a:rPr>
               <a:t>• eCR workflow map</a:t>
             </a:r>
-            <a:endParaRPr lang="en-US" sz="2100" dirty="0"/>
-          </a:p>
-          <a:p>
-            <a:pPr indent="0" marL="0">
-              <a:buNone/>
-            </a:pPr>
-            <a:r>
-              <a:rPr lang="en-US" sz="2100" dirty="0">
+            <a:endParaRPr lang="en-US" sz="1920" dirty="0"/>
+          </a:p>
+          <a:p>
+            <a:pPr indent="0" marL="0">
+              <a:buNone/>
+            </a:pPr>
+            <a:r>
+              <a:rPr lang="en-US" sz="1920" dirty="0">
                 <a:solidFill>
                   <a:srgbClr val="003A63"/>
                 </a:solidFill>
@@ -11725,14 +11725,14 @@
               </a:rPr>
               <a:t>• AI-readiness checklist</a:t>
             </a:r>
-            <a:endParaRPr lang="en-US" sz="2100" dirty="0"/>
-          </a:p>
-          <a:p>
-            <a:pPr indent="0" marL="0">
-              <a:buNone/>
-            </a:pPr>
-            <a:r>
-              <a:rPr lang="en-US" sz="2100" dirty="0">
+            <a:endParaRPr lang="en-US" sz="1920" dirty="0"/>
+          </a:p>
+          <a:p>
+            <a:pPr indent="0" marL="0">
+              <a:buNone/>
+            </a:pPr>
+            <a:r>
+              <a:rPr lang="en-US" sz="1920" dirty="0">
                 <a:solidFill>
                   <a:srgbClr val="003A63"/>
                 </a:solidFill>
@@ -11742,7 +11742,7 @@
               </a:rPr>
               <a:t>• Validation scenarios</a:t>
             </a:r>
-            <a:endParaRPr lang="en-US" sz="2100" dirty="0"/>
+            <a:endParaRPr lang="en-US" sz="1920" dirty="0"/>
           </a:p>
         </p:txBody>
       </p:sp>
@@ -11754,12 +11754,12 @@
         </p:nvSpPr>
         <p:spPr>
           <a:xfrm>
-            <a:off x="7635240" y="1325880"/>
-            <a:ext cx="3474720" cy="1207008"/>
+            <a:off x="7543800" y="1325880"/>
+            <a:ext cx="3611880" cy="1261872"/>
           </a:xfrm>
           <a:prstGeom prst="roundRect">
             <a:avLst>
-              <a:gd name="adj" fmla="val 9091"/>
+              <a:gd name="adj" fmla="val 8696"/>
             </a:avLst>
           </a:prstGeom>
           <a:solidFill>
@@ -11781,8 +11781,8 @@
         </p:nvSpPr>
         <p:spPr>
           <a:xfrm>
-            <a:off x="7799832" y="1472184"/>
-            <a:ext cx="3145536" cy="256032"/>
+            <a:off x="7708392" y="1453896"/>
+            <a:ext cx="3282696" cy="228600"/>
           </a:xfrm>
           <a:prstGeom prst="rect">
             <a:avLst/>
@@ -11798,7 +11798,7 @@
               <a:buNone/>
             </a:pPr>
             <a:r>
-              <a:rPr lang="en-US" sz="1300" b="1" dirty="0">
+              <a:rPr lang="en-US" sz="1220" b="1" dirty="0">
                 <a:solidFill>
                   <a:srgbClr val="0068B7"/>
                 </a:solidFill>
@@ -11808,7 +11808,7 @@
               </a:rPr>
               <a:t>Implementation cue</a:t>
             </a:r>
-            <a:endParaRPr lang="en-US" sz="1300" dirty="0"/>
+            <a:endParaRPr lang="en-US" sz="1220" dirty="0"/>
           </a:p>
         </p:txBody>
       </p:sp>
@@ -11820,8 +11820,8 @@
         </p:nvSpPr>
         <p:spPr>
           <a:xfrm>
-            <a:off x="7799832" y="1801368"/>
-            <a:ext cx="3145536" cy="640080"/>
+            <a:off x="7708392" y="1764792"/>
+            <a:ext cx="3282696" cy="749808"/>
           </a:xfrm>
           <a:prstGeom prst="rect">
             <a:avLst/>
@@ -11839,7 +11839,7 @@
               <a:buNone/>
             </a:pPr>
             <a:r>
-              <a:rPr lang="en-US" sz="1320" dirty="0">
+              <a:rPr lang="en-US" sz="1220" dirty="0">
                 <a:solidFill>
                   <a:srgbClr val="17364A"/>
                 </a:solidFill>
@@ -11849,7 +11849,7 @@
               </a:rPr>
               <a:t>eCR workflow map</a:t>
             </a:r>
-            <a:endParaRPr lang="en-US" sz="1320" dirty="0"/>
+            <a:endParaRPr lang="en-US" sz="1220" dirty="0"/>
           </a:p>
         </p:txBody>
       </p:sp>
@@ -11861,12 +11861,12 @@
         </p:nvSpPr>
         <p:spPr>
           <a:xfrm>
-            <a:off x="7635240" y="2670048"/>
-            <a:ext cx="3474720" cy="1377086"/>
+            <a:off x="7543800" y="2724912"/>
+            <a:ext cx="3611880" cy="1527048"/>
           </a:xfrm>
           <a:prstGeom prst="roundRect">
             <a:avLst>
-              <a:gd name="adj" fmla="val 7968"/>
+              <a:gd name="adj" fmla="val 7186"/>
             </a:avLst>
           </a:prstGeom>
           <a:solidFill>
@@ -11888,8 +11888,8 @@
         </p:nvSpPr>
         <p:spPr>
           <a:xfrm>
-            <a:off x="7799832" y="2816352"/>
-            <a:ext cx="3145536" cy="256032"/>
+            <a:off x="7708392" y="2852928"/>
+            <a:ext cx="3282696" cy="228600"/>
           </a:xfrm>
           <a:prstGeom prst="rect">
             <a:avLst/>
@@ -11905,7 +11905,7 @@
               <a:buNone/>
             </a:pPr>
             <a:r>
-              <a:rPr lang="en-US" sz="1300" b="1" dirty="0">
+              <a:rPr lang="en-US" sz="1220" b="1" dirty="0">
                 <a:solidFill>
                   <a:srgbClr val="0068B7"/>
                 </a:solidFill>
@@ -11915,7 +11915,7 @@
               </a:rPr>
               <a:t>Concept checkpoints</a:t>
             </a:r>
-            <a:endParaRPr lang="en-US" sz="1300" dirty="0"/>
+            <a:endParaRPr lang="en-US" sz="1220" dirty="0"/>
           </a:p>
         </p:txBody>
       </p:sp>
@@ -11927,8 +11927,8 @@
         </p:nvSpPr>
         <p:spPr>
           <a:xfrm>
-            <a:off x="7818120" y="3182112"/>
-            <a:ext cx="3090672" cy="718718"/>
+            <a:off x="7726680" y="3182112"/>
+            <a:ext cx="3227832" cy="960120"/>
           </a:xfrm>
           <a:prstGeom prst="rect">
             <a:avLst/>
@@ -11946,7 +11946,7 @@
               <a:buNone/>
             </a:pPr>
             <a:r>
-              <a:rPr lang="en-US" sz="1220" dirty="0">
+              <a:rPr lang="en-US" sz="1140" dirty="0">
                 <a:solidFill>
                   <a:srgbClr val="17364A"/>
                 </a:solidFill>
@@ -11956,14 +11956,14 @@
               </a:rPr>
               <a:t>eCR workflow map</a:t>
             </a:r>
-            <a:endParaRPr lang="en-US" sz="1220" dirty="0"/>
-          </a:p>
-          <a:p>
-            <a:pPr indent="0" marL="0">
-              <a:buNone/>
-            </a:pPr>
-            <a:r>
-              <a:rPr lang="en-US" sz="1220" dirty="0">
+            <a:endParaRPr lang="en-US" sz="1140" dirty="0"/>
+          </a:p>
+          <a:p>
+            <a:pPr indent="0" marL="0">
+              <a:buNone/>
+            </a:pPr>
+            <a:r>
+              <a:rPr lang="en-US" sz="1140" dirty="0">
                 <a:solidFill>
                   <a:srgbClr val="17364A"/>
                 </a:solidFill>
@@ -11973,14 +11973,14 @@
               </a:rPr>
               <a:t>AI-readiness checklist</a:t>
             </a:r>
-            <a:endParaRPr lang="en-US" sz="1220" dirty="0"/>
-          </a:p>
-          <a:p>
-            <a:pPr indent="0" marL="0">
-              <a:buNone/>
-            </a:pPr>
-            <a:r>
-              <a:rPr lang="en-US" sz="1220" dirty="0">
+            <a:endParaRPr lang="en-US" sz="1140" dirty="0"/>
+          </a:p>
+          <a:p>
+            <a:pPr indent="0" marL="0">
+              <a:buNone/>
+            </a:pPr>
+            <a:r>
+              <a:rPr lang="en-US" sz="1140" dirty="0">
                 <a:solidFill>
                   <a:srgbClr val="17364A"/>
                 </a:solidFill>
@@ -11990,7 +11990,7 @@
               </a:rPr>
               <a:t>Validation scenarios</a:t>
             </a:r>
-            <a:endParaRPr lang="en-US" sz="1220" dirty="0"/>
+            <a:endParaRPr lang="en-US" sz="1140" dirty="0"/>
           </a:p>
         </p:txBody>
       </p:sp>
@@ -12002,12 +12002,12 @@
         </p:nvSpPr>
         <p:spPr>
           <a:xfrm>
-            <a:off x="7635240" y="4184294"/>
-            <a:ext cx="3474720" cy="1466698"/>
+            <a:off x="7543800" y="4389120"/>
+            <a:ext cx="3611880" cy="1261872"/>
           </a:xfrm>
           <a:prstGeom prst="roundRect">
             <a:avLst>
-              <a:gd name="adj" fmla="val 7481"/>
+              <a:gd name="adj" fmla="val 8696"/>
             </a:avLst>
           </a:prstGeom>
           <a:solidFill>
@@ -12029,8 +12029,8 @@
         </p:nvSpPr>
         <p:spPr>
           <a:xfrm>
-            <a:off x="7799832" y="4330598"/>
-            <a:ext cx="3145536" cy="256032"/>
+            <a:off x="7708392" y="4517136"/>
+            <a:ext cx="3282696" cy="228600"/>
           </a:xfrm>
           <a:prstGeom prst="rect">
             <a:avLst/>
@@ -12046,7 +12046,7 @@
               <a:buNone/>
             </a:pPr>
             <a:r>
-              <a:rPr lang="en-US" sz="1300" b="1" dirty="0">
+              <a:rPr lang="en-US" sz="1220" b="1" dirty="0">
                 <a:solidFill>
                   <a:srgbClr val="0068B7"/>
                 </a:solidFill>
@@ -12056,7 +12056,7 @@
               </a:rPr>
               <a:t>Next action</a:t>
             </a:r>
-            <a:endParaRPr lang="en-US" sz="1300" dirty="0"/>
+            <a:endParaRPr lang="en-US" sz="1220" dirty="0"/>
           </a:p>
         </p:txBody>
       </p:sp>
@@ -12068,8 +12068,8 @@
         </p:nvSpPr>
         <p:spPr>
           <a:xfrm>
-            <a:off x="7799832" y="4659782"/>
-            <a:ext cx="3145536" cy="899770"/>
+            <a:off x="7708392" y="4828032"/>
+            <a:ext cx="3282696" cy="749808"/>
           </a:xfrm>
           <a:prstGeom prst="rect">
             <a:avLst/>
@@ -12087,7 +12087,7 @@
               <a:buNone/>
             </a:pPr>
             <a:r>
-              <a:rPr lang="en-US" sz="1320" dirty="0">
+              <a:rPr lang="en-US" sz="1220" dirty="0">
                 <a:solidFill>
                   <a:srgbClr val="17364A"/>
                 </a:solidFill>
@@ -12095,9 +12095,9 @@
                 <a:ea typeface="Aptos" pitchFamily="34" charset="-122"/>
                 <a:cs typeface="Aptos" pitchFamily="34" charset="-120"/>
               </a:rPr>
-              <a:t>Use the assignment to test whether you can explain the concept, apply it to a realistic public health situation, and identify what would need review before the work moves forward.</a:t>
-            </a:r>
-            <a:endParaRPr lang="en-US" sz="1320" dirty="0"/>
+              <a:t>Use the assignment to test whether you can explain the concept, apply it to a.</a:t>
+            </a:r>
+            <a:endParaRPr lang="en-US" sz="1220" dirty="0"/>
           </a:p>
         </p:txBody>
       </p:sp>
@@ -12388,8 +12388,8 @@
         </p:nvSpPr>
         <p:spPr>
           <a:xfrm>
-            <a:off x="868680" y="1508760"/>
-            <a:ext cx="6309360" cy="4160520"/>
+            <a:off x="822960" y="1463040"/>
+            <a:ext cx="6565392" cy="4343400"/>
           </a:xfrm>
           <a:prstGeom prst="rect">
             <a:avLst/>
@@ -12407,7 +12407,7 @@
               <a:buNone/>
             </a:pPr>
             <a:r>
-              <a:rPr lang="en-US" sz="2100" dirty="0">
+              <a:rPr lang="en-US" sz="1920" dirty="0">
                 <a:solidFill>
                   <a:srgbClr val="003A63"/>
                 </a:solidFill>
@@ -12417,14 +12417,14 @@
               </a:rPr>
               <a:t>• 1. What is eCR?</a:t>
             </a:r>
-            <a:endParaRPr lang="en-US" sz="2100" dirty="0"/>
-          </a:p>
-          <a:p>
-            <a:pPr indent="0" marL="0">
-              <a:buNone/>
-            </a:pPr>
-            <a:r>
-              <a:rPr lang="en-US" sz="2100" dirty="0">
+            <a:endParaRPr lang="en-US" sz="1920" dirty="0"/>
+          </a:p>
+          <a:p>
+            <a:pPr indent="0" marL="0">
+              <a:buNone/>
+            </a:pPr>
+            <a:r>
+              <a:rPr lang="en-US" sz="1920" dirty="0">
                 <a:solidFill>
                   <a:srgbClr val="003A63"/>
                 </a:solidFill>
@@ -12434,14 +12434,14 @@
               </a:rPr>
               <a:t>• 2. What is an eICR?</a:t>
             </a:r>
-            <a:endParaRPr lang="en-US" sz="2100" dirty="0"/>
-          </a:p>
-          <a:p>
-            <a:pPr indent="0" marL="0">
-              <a:buNone/>
-            </a:pPr>
-            <a:r>
-              <a:rPr lang="en-US" sz="2100" dirty="0">
+            <a:endParaRPr lang="en-US" sz="1920" dirty="0"/>
+          </a:p>
+          <a:p>
+            <a:pPr indent="0" marL="0">
+              <a:buNone/>
+            </a:pPr>
+            <a:r>
+              <a:rPr lang="en-US" sz="1920" dirty="0">
                 <a:solidFill>
                   <a:srgbClr val="003A63"/>
                 </a:solidFill>
@@ -12451,7 +12451,7 @@
               </a:rPr>
               <a:t>• 3. What do eRSD and RCTC support?</a:t>
             </a:r>
-            <a:endParaRPr lang="en-US" sz="2100" dirty="0"/>
+            <a:endParaRPr lang="en-US" sz="1920" dirty="0"/>
           </a:p>
         </p:txBody>
       </p:sp>
@@ -12463,12 +12463,12 @@
         </p:nvSpPr>
         <p:spPr>
           <a:xfrm>
-            <a:off x="7635240" y="1325880"/>
-            <a:ext cx="3474720" cy="1207008"/>
+            <a:off x="7543800" y="1325880"/>
+            <a:ext cx="3611880" cy="1261872"/>
           </a:xfrm>
           <a:prstGeom prst="roundRect">
             <a:avLst>
-              <a:gd name="adj" fmla="val 9091"/>
+              <a:gd name="adj" fmla="val 8696"/>
             </a:avLst>
           </a:prstGeom>
           <a:solidFill>
@@ -12490,8 +12490,8 @@
         </p:nvSpPr>
         <p:spPr>
           <a:xfrm>
-            <a:off x="7799832" y="1472184"/>
-            <a:ext cx="3145536" cy="256032"/>
+            <a:off x="7708392" y="1453896"/>
+            <a:ext cx="3282696" cy="228600"/>
           </a:xfrm>
           <a:prstGeom prst="rect">
             <a:avLst/>
@@ -12507,7 +12507,7 @@
               <a:buNone/>
             </a:pPr>
             <a:r>
-              <a:rPr lang="en-US" sz="1300" b="1" dirty="0">
+              <a:rPr lang="en-US" sz="1220" b="1" dirty="0">
                 <a:solidFill>
                   <a:srgbClr val="0068B7"/>
                 </a:solidFill>
@@ -12517,7 +12517,7 @@
               </a:rPr>
               <a:t>Implementation cue</a:t>
             </a:r>
-            <a:endParaRPr lang="en-US" sz="1300" dirty="0"/>
+            <a:endParaRPr lang="en-US" sz="1220" dirty="0"/>
           </a:p>
         </p:txBody>
       </p:sp>
@@ -12529,8 +12529,8 @@
         </p:nvSpPr>
         <p:spPr>
           <a:xfrm>
-            <a:off x="7799832" y="1801368"/>
-            <a:ext cx="3145536" cy="640080"/>
+            <a:off x="7708392" y="1764792"/>
+            <a:ext cx="3282696" cy="749808"/>
           </a:xfrm>
           <a:prstGeom prst="rect">
             <a:avLst/>
@@ -12548,7 +12548,7 @@
               <a:buNone/>
             </a:pPr>
             <a:r>
-              <a:rPr lang="en-US" sz="1320" dirty="0">
+              <a:rPr lang="en-US" sz="1220" dirty="0">
                 <a:solidFill>
                   <a:srgbClr val="17364A"/>
                 </a:solidFill>
@@ -12558,7 +12558,7 @@
               </a:rPr>
               <a:t>1. What is eCR?</a:t>
             </a:r>
-            <a:endParaRPr lang="en-US" sz="1320" dirty="0"/>
+            <a:endParaRPr lang="en-US" sz="1220" dirty="0"/>
           </a:p>
         </p:txBody>
       </p:sp>
@@ -12570,12 +12570,12 @@
         </p:nvSpPr>
         <p:spPr>
           <a:xfrm>
-            <a:off x="7635240" y="2670048"/>
-            <a:ext cx="3474720" cy="1377086"/>
+            <a:off x="7543800" y="2724912"/>
+            <a:ext cx="3611880" cy="1527048"/>
           </a:xfrm>
           <a:prstGeom prst="roundRect">
             <a:avLst>
-              <a:gd name="adj" fmla="val 7968"/>
+              <a:gd name="adj" fmla="val 7186"/>
             </a:avLst>
           </a:prstGeom>
           <a:solidFill>
@@ -12597,8 +12597,8 @@
         </p:nvSpPr>
         <p:spPr>
           <a:xfrm>
-            <a:off x="7799832" y="2816352"/>
-            <a:ext cx="3145536" cy="256032"/>
+            <a:off x="7708392" y="2852928"/>
+            <a:ext cx="3282696" cy="228600"/>
           </a:xfrm>
           <a:prstGeom prst="rect">
             <a:avLst/>
@@ -12614,7 +12614,7 @@
               <a:buNone/>
             </a:pPr>
             <a:r>
-              <a:rPr lang="en-US" sz="1300" b="1" dirty="0">
+              <a:rPr lang="en-US" sz="1220" b="1" dirty="0">
                 <a:solidFill>
                   <a:srgbClr val="0068B7"/>
                 </a:solidFill>
@@ -12624,7 +12624,7 @@
               </a:rPr>
               <a:t>Concept checkpoints</a:t>
             </a:r>
-            <a:endParaRPr lang="en-US" sz="1300" dirty="0"/>
+            <a:endParaRPr lang="en-US" sz="1220" dirty="0"/>
           </a:p>
         </p:txBody>
       </p:sp>
@@ -12636,8 +12636,8 @@
         </p:nvSpPr>
         <p:spPr>
           <a:xfrm>
-            <a:off x="7818120" y="3182112"/>
-            <a:ext cx="3090672" cy="718718"/>
+            <a:off x="7726680" y="3182112"/>
+            <a:ext cx="3227832" cy="960120"/>
           </a:xfrm>
           <a:prstGeom prst="rect">
             <a:avLst/>
@@ -12655,7 +12655,7 @@
               <a:buNone/>
             </a:pPr>
             <a:r>
-              <a:rPr lang="en-US" sz="1220" dirty="0">
+              <a:rPr lang="en-US" sz="1140" dirty="0">
                 <a:solidFill>
                   <a:srgbClr val="17364A"/>
                 </a:solidFill>
@@ -12665,14 +12665,14 @@
               </a:rPr>
               <a:t>1.</a:t>
             </a:r>
-            <a:endParaRPr lang="en-US" sz="1220" dirty="0"/>
-          </a:p>
-          <a:p>
-            <a:pPr indent="0" marL="0">
-              <a:buNone/>
-            </a:pPr>
-            <a:r>
-              <a:rPr lang="en-US" sz="1220" dirty="0">
+            <a:endParaRPr lang="en-US" sz="1140" dirty="0"/>
+          </a:p>
+          <a:p>
+            <a:pPr indent="0" marL="0">
+              <a:buNone/>
+            </a:pPr>
+            <a:r>
+              <a:rPr lang="en-US" sz="1140" dirty="0">
                 <a:solidFill>
                   <a:srgbClr val="17364A"/>
                 </a:solidFill>
@@ -12682,14 +12682,14 @@
               </a:rPr>
               <a:t>What is eCR?</a:t>
             </a:r>
-            <a:endParaRPr lang="en-US" sz="1220" dirty="0"/>
-          </a:p>
-          <a:p>
-            <a:pPr indent="0" marL="0">
-              <a:buNone/>
-            </a:pPr>
-            <a:r>
-              <a:rPr lang="en-US" sz="1220" dirty="0">
+            <a:endParaRPr lang="en-US" sz="1140" dirty="0"/>
+          </a:p>
+          <a:p>
+            <a:pPr indent="0" marL="0">
+              <a:buNone/>
+            </a:pPr>
+            <a:r>
+              <a:rPr lang="en-US" sz="1140" dirty="0">
                 <a:solidFill>
                   <a:srgbClr val="17364A"/>
                 </a:solidFill>
@@ -12699,7 +12699,7 @@
               </a:rPr>
               <a:t>2.</a:t>
             </a:r>
-            <a:endParaRPr lang="en-US" sz="1220" dirty="0"/>
+            <a:endParaRPr lang="en-US" sz="1140" dirty="0"/>
           </a:p>
         </p:txBody>
       </p:sp>
@@ -12711,12 +12711,12 @@
         </p:nvSpPr>
         <p:spPr>
           <a:xfrm>
-            <a:off x="7635240" y="4184294"/>
-            <a:ext cx="3474720" cy="1466698"/>
+            <a:off x="7543800" y="4389120"/>
+            <a:ext cx="3611880" cy="1261872"/>
           </a:xfrm>
           <a:prstGeom prst="roundRect">
             <a:avLst>
-              <a:gd name="adj" fmla="val 7481"/>
+              <a:gd name="adj" fmla="val 8696"/>
             </a:avLst>
           </a:prstGeom>
           <a:solidFill>
@@ -12738,8 +12738,8 @@
         </p:nvSpPr>
         <p:spPr>
           <a:xfrm>
-            <a:off x="7799832" y="4330598"/>
-            <a:ext cx="3145536" cy="256032"/>
+            <a:off x="7708392" y="4517136"/>
+            <a:ext cx="3282696" cy="228600"/>
           </a:xfrm>
           <a:prstGeom prst="rect">
             <a:avLst/>
@@ -12755,7 +12755,7 @@
               <a:buNone/>
             </a:pPr>
             <a:r>
-              <a:rPr lang="en-US" sz="1300" b="1" dirty="0">
+              <a:rPr lang="en-US" sz="1220" b="1" dirty="0">
                 <a:solidFill>
                   <a:srgbClr val="0068B7"/>
                 </a:solidFill>
@@ -12765,7 +12765,7 @@
               </a:rPr>
               <a:t>Next action</a:t>
             </a:r>
-            <a:endParaRPr lang="en-US" sz="1300" dirty="0"/>
+            <a:endParaRPr lang="en-US" sz="1220" dirty="0"/>
           </a:p>
         </p:txBody>
       </p:sp>
@@ -12777,8 +12777,8 @@
         </p:nvSpPr>
         <p:spPr>
           <a:xfrm>
-            <a:off x="7799832" y="4659782"/>
-            <a:ext cx="3145536" cy="899770"/>
+            <a:off x="7708392" y="4828032"/>
+            <a:ext cx="3282696" cy="749808"/>
           </a:xfrm>
           <a:prstGeom prst="rect">
             <a:avLst/>
@@ -12796,7 +12796,7 @@
               <a:buNone/>
             </a:pPr>
             <a:r>
-              <a:rPr lang="en-US" sz="1320" dirty="0">
+              <a:rPr lang="en-US" sz="1220" dirty="0">
                 <a:solidFill>
                   <a:srgbClr val="17364A"/>
                 </a:solidFill>
@@ -12804,9 +12804,9 @@
                 <a:ea typeface="Aptos" pitchFamily="34" charset="-122"/>
                 <a:cs typeface="Aptos" pitchFamily="34" charset="-120"/>
               </a:rPr>
-              <a:t>Use the assignment to test whether you can explain the concept, apply it to a realistic public health situation, and identify what would need review before the work moves forward.</a:t>
-            </a:r>
-            <a:endParaRPr lang="en-US" sz="1320" dirty="0"/>
+              <a:t>Use the assignment to test whether you can explain the concept, apply it to a.</a:t>
+            </a:r>
+            <a:endParaRPr lang="en-US" sz="1220" dirty="0"/>
           </a:p>
         </p:txBody>
       </p:sp>
@@ -13097,8 +13097,8 @@
         </p:nvSpPr>
         <p:spPr>
           <a:xfrm>
-            <a:off x="868680" y="1508760"/>
-            <a:ext cx="6309360" cy="4160520"/>
+            <a:off x="822960" y="1463040"/>
+            <a:ext cx="6565392" cy="4343400"/>
           </a:xfrm>
           <a:prstGeom prst="rect">
             <a:avLst/>
@@ -13116,7 +13116,7 @@
               <a:buNone/>
             </a:pPr>
             <a:r>
-              <a:rPr lang="en-US" sz="2100" dirty="0">
+              <a:rPr lang="en-US" sz="1920" dirty="0">
                 <a:solidFill>
                   <a:srgbClr val="003A63"/>
                 </a:solidFill>
@@ -13124,16 +13124,16 @@
                 <a:ea typeface="Aptos" pitchFamily="34" charset="-122"/>
                 <a:cs typeface="Aptos" pitchFamily="34" charset="-120"/>
               </a:rPr>
-              <a:t>• CDC Electronic Case Reporting resources: https://www.cdc.gov/ecr/php/index.html</a:t>
-            </a:r>
-            <a:endParaRPr lang="en-US" sz="2100" dirty="0"/>
-          </a:p>
-          <a:p>
-            <a:pPr indent="0" marL="0">
-              <a:buNone/>
-            </a:pPr>
-            <a:r>
-              <a:rPr lang="en-US" sz="2100" dirty="0">
+              <a:t>• CDC Electronic Case Reporting resources:.</a:t>
+            </a:r>
+            <a:endParaRPr lang="en-US" sz="1920" dirty="0"/>
+          </a:p>
+          <a:p>
+            <a:pPr indent="0" marL="0">
+              <a:buNone/>
+            </a:pPr>
+            <a:r>
+              <a:rPr lang="en-US" sz="1920" dirty="0">
                 <a:solidFill>
                   <a:srgbClr val="003A63"/>
                 </a:solidFill>
@@ -13141,16 +13141,16 @@
                 <a:ea typeface="Aptos" pitchFamily="34" charset="-122"/>
                 <a:cs typeface="Aptos" pitchFamily="34" charset="-120"/>
               </a:rPr>
-              <a:t>• AIMS eCR triggering documentation: https://ecr.aimsplatform.org/ehr-implementers/triggering/</a:t>
-            </a:r>
-            <a:endParaRPr lang="en-US" sz="2100" dirty="0"/>
-          </a:p>
-          <a:p>
-            <a:pPr indent="0" marL="0">
-              <a:buNone/>
-            </a:pPr>
-            <a:r>
-              <a:rPr lang="en-US" sz="2100" dirty="0">
+              <a:t>• AIMS eCR triggering documentation:.</a:t>
+            </a:r>
+            <a:endParaRPr lang="en-US" sz="1920" dirty="0"/>
+          </a:p>
+          <a:p>
+            <a:pPr indent="0" marL="0">
+              <a:buNone/>
+            </a:pPr>
+            <a:r>
+              <a:rPr lang="en-US" sz="1920" dirty="0">
                 <a:solidFill>
                   <a:srgbClr val="003A63"/>
                 </a:solidFill>
@@ -13160,7 +13160,7 @@
               </a:rPr>
               <a:t>• HL7 eCR FHIR Implementation Guide: https://hl7.org/fhir/us/ecr/</a:t>
             </a:r>
-            <a:endParaRPr lang="en-US" sz="2100" dirty="0"/>
+            <a:endParaRPr lang="en-US" sz="1920" dirty="0"/>
           </a:p>
         </p:txBody>
       </p:sp>
@@ -13172,12 +13172,12 @@
         </p:nvSpPr>
         <p:spPr>
           <a:xfrm>
-            <a:off x="7635240" y="1325880"/>
-            <a:ext cx="3474720" cy="1207008"/>
+            <a:off x="7543800" y="1325880"/>
+            <a:ext cx="3611880" cy="1261872"/>
           </a:xfrm>
           <a:prstGeom prst="roundRect">
             <a:avLst>
-              <a:gd name="adj" fmla="val 9091"/>
+              <a:gd name="adj" fmla="val 8696"/>
             </a:avLst>
           </a:prstGeom>
           <a:solidFill>
@@ -13199,8 +13199,8 @@
         </p:nvSpPr>
         <p:spPr>
           <a:xfrm>
-            <a:off x="7799832" y="1472184"/>
-            <a:ext cx="3145536" cy="256032"/>
+            <a:off x="7708392" y="1453896"/>
+            <a:ext cx="3282696" cy="228600"/>
           </a:xfrm>
           <a:prstGeom prst="rect">
             <a:avLst/>
@@ -13216,7 +13216,7 @@
               <a:buNone/>
             </a:pPr>
             <a:r>
-              <a:rPr lang="en-US" sz="1300" b="1" dirty="0">
+              <a:rPr lang="en-US" sz="1220" b="1" dirty="0">
                 <a:solidFill>
                   <a:srgbClr val="0068B7"/>
                 </a:solidFill>
@@ -13226,7 +13226,7 @@
               </a:rPr>
               <a:t>Implementation cue</a:t>
             </a:r>
-            <a:endParaRPr lang="en-US" sz="1300" dirty="0"/>
+            <a:endParaRPr lang="en-US" sz="1220" dirty="0"/>
           </a:p>
         </p:txBody>
       </p:sp>
@@ -13238,8 +13238,8 @@
         </p:nvSpPr>
         <p:spPr>
           <a:xfrm>
-            <a:off x="7799832" y="1801368"/>
-            <a:ext cx="3145536" cy="640080"/>
+            <a:off x="7708392" y="1764792"/>
+            <a:ext cx="3282696" cy="749808"/>
           </a:xfrm>
           <a:prstGeom prst="rect">
             <a:avLst/>
@@ -13257,7 +13257,7 @@
               <a:buNone/>
             </a:pPr>
             <a:r>
-              <a:rPr lang="en-US" sz="1320" dirty="0">
+              <a:rPr lang="en-US" sz="1220" dirty="0">
                 <a:solidFill>
                   <a:srgbClr val="17364A"/>
                 </a:solidFill>
@@ -13267,7 +13267,7 @@
               </a:rPr>
               <a:t>CDC Electronic Case Reporting resources: https://www.cdc.gov/ecr/php/index.html</a:t>
             </a:r>
-            <a:endParaRPr lang="en-US" sz="1320" dirty="0"/>
+            <a:endParaRPr lang="en-US" sz="1220" dirty="0"/>
           </a:p>
         </p:txBody>
       </p:sp>
@@ -13279,12 +13279,12 @@
         </p:nvSpPr>
         <p:spPr>
           <a:xfrm>
-            <a:off x="7635240" y="2670048"/>
-            <a:ext cx="3474720" cy="1377086"/>
+            <a:off x="7543800" y="2724912"/>
+            <a:ext cx="3611880" cy="1527048"/>
           </a:xfrm>
           <a:prstGeom prst="roundRect">
             <a:avLst>
-              <a:gd name="adj" fmla="val 7968"/>
+              <a:gd name="adj" fmla="val 7186"/>
             </a:avLst>
           </a:prstGeom>
           <a:solidFill>
@@ -13306,8 +13306,8 @@
         </p:nvSpPr>
         <p:spPr>
           <a:xfrm>
-            <a:off x="7799832" y="2816352"/>
-            <a:ext cx="3145536" cy="256032"/>
+            <a:off x="7708392" y="2852928"/>
+            <a:ext cx="3282696" cy="228600"/>
           </a:xfrm>
           <a:prstGeom prst="rect">
             <a:avLst/>
@@ -13323,7 +13323,7 @@
               <a:buNone/>
             </a:pPr>
             <a:r>
-              <a:rPr lang="en-US" sz="1300" b="1" dirty="0">
+              <a:rPr lang="en-US" sz="1220" b="1" dirty="0">
                 <a:solidFill>
                   <a:srgbClr val="0068B7"/>
                 </a:solidFill>
@@ -13333,7 +13333,7 @@
               </a:rPr>
               <a:t>Concept checkpoints</a:t>
             </a:r>
-            <a:endParaRPr lang="en-US" sz="1300" dirty="0"/>
+            <a:endParaRPr lang="en-US" sz="1220" dirty="0"/>
           </a:p>
         </p:txBody>
       </p:sp>
@@ -13345,8 +13345,8 @@
         </p:nvSpPr>
         <p:spPr>
           <a:xfrm>
-            <a:off x="7818120" y="3182112"/>
-            <a:ext cx="3090672" cy="718718"/>
+            <a:off x="7726680" y="3182112"/>
+            <a:ext cx="3227832" cy="960120"/>
           </a:xfrm>
           <a:prstGeom prst="rect">
             <a:avLst/>
@@ -13364,7 +13364,7 @@
               <a:buNone/>
             </a:pPr>
             <a:r>
-              <a:rPr lang="en-US" sz="1220" dirty="0">
+              <a:rPr lang="en-US" sz="1140" dirty="0">
                 <a:solidFill>
                   <a:srgbClr val="17364A"/>
                 </a:solidFill>
@@ -13374,14 +13374,14 @@
               </a:rPr>
               <a:t>CDC Electronic Case Reporting resources:.</a:t>
             </a:r>
-            <a:endParaRPr lang="en-US" sz="1220" dirty="0"/>
-          </a:p>
-          <a:p>
-            <a:pPr indent="0" marL="0">
-              <a:buNone/>
-            </a:pPr>
-            <a:r>
-              <a:rPr lang="en-US" sz="1220" dirty="0">
+            <a:endParaRPr lang="en-US" sz="1140" dirty="0"/>
+          </a:p>
+          <a:p>
+            <a:pPr indent="0" marL="0">
+              <a:buNone/>
+            </a:pPr>
+            <a:r>
+              <a:rPr lang="en-US" sz="1140" dirty="0">
                 <a:solidFill>
                   <a:srgbClr val="17364A"/>
                 </a:solidFill>
@@ -13391,14 +13391,14 @@
               </a:rPr>
               <a:t>AIMS eCR triggering documentation:.</a:t>
             </a:r>
-            <a:endParaRPr lang="en-US" sz="1220" dirty="0"/>
-          </a:p>
-          <a:p>
-            <a:pPr indent="0" marL="0">
-              <a:buNone/>
-            </a:pPr>
-            <a:r>
-              <a:rPr lang="en-US" sz="1220" dirty="0">
+            <a:endParaRPr lang="en-US" sz="1140" dirty="0"/>
+          </a:p>
+          <a:p>
+            <a:pPr indent="0" marL="0">
+              <a:buNone/>
+            </a:pPr>
+            <a:r>
+              <a:rPr lang="en-US" sz="1140" dirty="0">
                 <a:solidFill>
                   <a:srgbClr val="17364A"/>
                 </a:solidFill>
@@ -13406,9 +13406,9 @@
                 <a:ea typeface="Aptos" pitchFamily="34" charset="-122"/>
                 <a:cs typeface="Aptos" pitchFamily="34" charset="-120"/>
               </a:rPr>
-              <a:t>HL7 eCR FHIR Implementation Guide: https://hl7.org/fhir/us/ecr/</a:t>
-            </a:r>
-            <a:endParaRPr lang="en-US" sz="1220" dirty="0"/>
+              <a:t>HL7 eCR FHIR Implementation Guide:.</a:t>
+            </a:r>
+            <a:endParaRPr lang="en-US" sz="1140" dirty="0"/>
           </a:p>
         </p:txBody>
       </p:sp>
@@ -13420,12 +13420,12 @@
         </p:nvSpPr>
         <p:spPr>
           <a:xfrm>
-            <a:off x="7635240" y="4184294"/>
-            <a:ext cx="3474720" cy="1466698"/>
+            <a:off x="7543800" y="4389120"/>
+            <a:ext cx="3611880" cy="1261872"/>
           </a:xfrm>
           <a:prstGeom prst="roundRect">
             <a:avLst>
-              <a:gd name="adj" fmla="val 7481"/>
+              <a:gd name="adj" fmla="val 8696"/>
             </a:avLst>
           </a:prstGeom>
           <a:solidFill>
@@ -13447,8 +13447,8 @@
         </p:nvSpPr>
         <p:spPr>
           <a:xfrm>
-            <a:off x="7799832" y="4330598"/>
-            <a:ext cx="3145536" cy="256032"/>
+            <a:off x="7708392" y="4517136"/>
+            <a:ext cx="3282696" cy="228600"/>
           </a:xfrm>
           <a:prstGeom prst="rect">
             <a:avLst/>
@@ -13464,7 +13464,7 @@
               <a:buNone/>
             </a:pPr>
             <a:r>
-              <a:rPr lang="en-US" sz="1300" b="1" dirty="0">
+              <a:rPr lang="en-US" sz="1220" b="1" dirty="0">
                 <a:solidFill>
                   <a:srgbClr val="0068B7"/>
                 </a:solidFill>
@@ -13474,7 +13474,7 @@
               </a:rPr>
               <a:t>Next action</a:t>
             </a:r>
-            <a:endParaRPr lang="en-US" sz="1300" dirty="0"/>
+            <a:endParaRPr lang="en-US" sz="1220" dirty="0"/>
           </a:p>
         </p:txBody>
       </p:sp>
@@ -13486,8 +13486,8 @@
         </p:nvSpPr>
         <p:spPr>
           <a:xfrm>
-            <a:off x="7799832" y="4659782"/>
-            <a:ext cx="3145536" cy="899770"/>
+            <a:off x="7708392" y="4828032"/>
+            <a:ext cx="3282696" cy="749808"/>
           </a:xfrm>
           <a:prstGeom prst="rect">
             <a:avLst/>
@@ -13505,7 +13505,7 @@
               <a:buNone/>
             </a:pPr>
             <a:r>
-              <a:rPr lang="en-US" sz="1320" dirty="0">
+              <a:rPr lang="en-US" sz="1220" dirty="0">
                 <a:solidFill>
                   <a:srgbClr val="17364A"/>
                 </a:solidFill>
@@ -13513,9 +13513,9 @@
                 <a:ea typeface="Aptos" pitchFamily="34" charset="-122"/>
                 <a:cs typeface="Aptos" pitchFamily="34" charset="-120"/>
               </a:rPr>
-              <a:t>Use the concept to clarify workflow changes, dependencies, staffing, procurement requirements, training needs, and implementation checkpoints.</a:t>
-            </a:r>
-            <a:endParaRPr lang="en-US" sz="1320" dirty="0"/>
+              <a:t>Use the concept to clarify workflow changes, dependencies, staffing, procurement.</a:t>
+            </a:r>
+            <a:endParaRPr lang="en-US" sz="1220" dirty="0"/>
           </a:p>
         </p:txBody>
       </p:sp>
@@ -13833,7 +13833,7 @@
                 <a:ea typeface="Aptos" pitchFamily="34" charset="-122"/>
                 <a:cs typeface="Aptos" pitchFamily="34" charset="-120"/>
               </a:rPr>
-              <a:t>• Play 13: Monitor and Evaluate AI Systems - This lesson informs Play 13 by helping learners.</a:t>
+              <a:t>• Play 13: Monitor and Evaluate AI Systems - This lesson informs Play 13 by.</a:t>
             </a:r>
             <a:endParaRPr lang="en-US" sz="1900" dirty="0"/>
           </a:p>
@@ -13850,7 +13850,7 @@
                 <a:ea typeface="Aptos" pitchFamily="34" charset="-122"/>
                 <a:cs typeface="Aptos" pitchFamily="34" charset="-120"/>
               </a:rPr>
-              <a:t>• Play 1: Vision &amp; Guardrails - This lesson informs Play 1 by helping learners connect the.</a:t>
+              <a:t>• Play 1: Vision &amp; Guardrails - This lesson informs Play 1 by helping learners.</a:t>
             </a:r>
             <a:endParaRPr lang="en-US" sz="1900" dirty="0"/>
           </a:p>
@@ -13867,7 +13867,7 @@
                 <a:ea typeface="Aptos" pitchFamily="34" charset="-122"/>
                 <a:cs typeface="Aptos" pitchFamily="34" charset="-120"/>
               </a:rPr>
-              <a:t>• Play 12: Execute Governance and Oversight - This lesson informs Play 12 by helping learners.</a:t>
+              <a:t>• Play 12: Execute Governance and Oversight - This lesson informs Play 12 by.</a:t>
             </a:r>
             <a:endParaRPr lang="en-US" sz="1900" dirty="0"/>
           </a:p>
@@ -13884,7 +13884,7 @@
                 <a:ea typeface="Aptos" pitchFamily="34" charset="-122"/>
                 <a:cs typeface="Aptos" pitchFamily="34" charset="-120"/>
               </a:rPr>
-              <a:t>• Play 7: Prioritize Use Cases - This lesson informs Play 7 by helping learners connect the.</a:t>
+              <a:t>• Play 7: Prioritize Use Cases - This lesson informs Play 7 by helping.</a:t>
             </a:r>
             <a:endParaRPr lang="en-US" sz="1900" dirty="0"/>
           </a:p>
@@ -13925,8 +13925,8 @@
         </p:nvSpPr>
         <p:spPr>
           <a:xfrm>
-            <a:off x="8211312" y="1563624"/>
-            <a:ext cx="2734056" cy="256032"/>
+            <a:off x="8211312" y="1545336"/>
+            <a:ext cx="2734056" cy="228600"/>
           </a:xfrm>
           <a:prstGeom prst="rect">
             <a:avLst/>
@@ -13942,7 +13942,7 @@
               <a:buNone/>
             </a:pPr>
             <a:r>
-              <a:rPr lang="en-US" sz="1300" b="1" dirty="0">
+              <a:rPr lang="en-US" sz="1220" b="1" dirty="0">
                 <a:solidFill>
                   <a:srgbClr val="0068B7"/>
                 </a:solidFill>
@@ -13952,7 +13952,7 @@
               </a:rPr>
               <a:t>Apply the lesson</a:t>
             </a:r>
-            <a:endParaRPr lang="en-US" sz="1300" dirty="0"/>
+            <a:endParaRPr lang="en-US" sz="1220" dirty="0"/>
           </a:p>
         </p:txBody>
       </p:sp>
@@ -13964,8 +13964,8 @@
         </p:nvSpPr>
         <p:spPr>
           <a:xfrm>
-            <a:off x="8211312" y="1892808"/>
-            <a:ext cx="2734056" cy="1536192"/>
+            <a:off x="8211312" y="1856232"/>
+            <a:ext cx="2734056" cy="1591056"/>
           </a:xfrm>
           <a:prstGeom prst="rect">
             <a:avLst/>
@@ -13983,7 +13983,7 @@
               <a:buNone/>
             </a:pPr>
             <a:r>
-              <a:rPr lang="en-US" sz="1320" dirty="0">
+              <a:rPr lang="en-US" sz="1220" dirty="0">
                 <a:solidFill>
                   <a:srgbClr val="17364A"/>
                 </a:solidFill>
@@ -13991,9 +13991,9 @@
                 <a:ea typeface="Aptos" pitchFamily="34" charset="-122"/>
                 <a:cs typeface="Aptos" pitchFamily="34" charset="-120"/>
               </a:rPr>
-              <a:t>Use the related plays to identify decisions, participants, timing, approvals, and documentation needed for responsible implementation.</a:t>
-            </a:r>
-            <a:endParaRPr lang="en-US" sz="1320" dirty="0"/>
+              <a:t>Use the related plays to identify decisions, participants, timing, approvals,.</a:t>
+            </a:r>
+            <a:endParaRPr lang="en-US" sz="1220" dirty="0"/>
           </a:p>
         </p:txBody>
       </p:sp>
@@ -14032,8 +14032,8 @@
         </p:nvSpPr>
         <p:spPr>
           <a:xfrm>
-            <a:off x="8211312" y="3941064"/>
-            <a:ext cx="2734056" cy="256032"/>
+            <a:off x="8211312" y="3922776"/>
+            <a:ext cx="2734056" cy="228600"/>
           </a:xfrm>
           <a:prstGeom prst="rect">
             <a:avLst/>
@@ -14049,7 +14049,7 @@
               <a:buNone/>
             </a:pPr>
             <a:r>
-              <a:rPr lang="en-US" sz="1300" b="1" dirty="0">
+              <a:rPr lang="en-US" sz="1220" b="1" dirty="0">
                 <a:solidFill>
                   <a:srgbClr val="0068B7"/>
                 </a:solidFill>
@@ -14059,7 +14059,7 @@
               </a:rPr>
               <a:t>Use the play links to</a:t>
             </a:r>
-            <a:endParaRPr lang="en-US" sz="1300" dirty="0"/>
+            <a:endParaRPr lang="en-US" sz="1220" dirty="0"/>
           </a:p>
         </p:txBody>
       </p:sp>
@@ -14071,8 +14071,8 @@
         </p:nvSpPr>
         <p:spPr>
           <a:xfrm>
-            <a:off x="8229600" y="4306824"/>
-            <a:ext cx="2679192" cy="941832"/>
+            <a:off x="8229600" y="4251960"/>
+            <a:ext cx="2679192" cy="1033272"/>
           </a:xfrm>
           <a:prstGeom prst="rect">
             <a:avLst/>
@@ -14090,7 +14090,7 @@
               <a:buNone/>
             </a:pPr>
             <a:r>
-              <a:rPr lang="en-US" sz="1220" dirty="0">
+              <a:rPr lang="en-US" sz="1140" dirty="0">
                 <a:solidFill>
                   <a:srgbClr val="17364A"/>
                 </a:solidFill>
@@ -14100,14 +14100,14 @@
               </a:rPr>
               <a:t>Locate the decision point in the playbook sequence.</a:t>
             </a:r>
-            <a:endParaRPr lang="en-US" sz="1220" dirty="0"/>
-          </a:p>
-          <a:p>
-            <a:pPr indent="0" marL="0">
-              <a:buNone/>
-            </a:pPr>
-            <a:r>
-              <a:rPr lang="en-US" sz="1220" dirty="0">
+            <a:endParaRPr lang="en-US" sz="1140" dirty="0"/>
+          </a:p>
+          <a:p>
+            <a:pPr indent="0" marL="0">
+              <a:buNone/>
+            </a:pPr>
+            <a:r>
+              <a:rPr lang="en-US" sz="1140" dirty="0">
                 <a:solidFill>
                   <a:srgbClr val="17364A"/>
                 </a:solidFill>
@@ -14117,14 +14117,14 @@
               </a:rPr>
               <a:t>Identify who should participate in the work.</a:t>
             </a:r>
-            <a:endParaRPr lang="en-US" sz="1220" dirty="0"/>
-          </a:p>
-          <a:p>
-            <a:pPr indent="0" marL="0">
-              <a:buNone/>
-            </a:pPr>
-            <a:r>
-              <a:rPr lang="en-US" sz="1220" dirty="0">
+            <a:endParaRPr lang="en-US" sz="1140" dirty="0"/>
+          </a:p>
+          <a:p>
+            <a:pPr indent="0" marL="0">
+              <a:buNone/>
+            </a:pPr>
+            <a:r>
+              <a:rPr lang="en-US" sz="1140" dirty="0">
                 <a:solidFill>
                   <a:srgbClr val="17364A"/>
                 </a:solidFill>
@@ -14132,9 +14132,9 @@
                 <a:ea typeface="Aptos" pitchFamily="34" charset="-122"/>
                 <a:cs typeface="Aptos" pitchFamily="34" charset="-120"/>
               </a:rPr>
-              <a:t>Document the review, approval, or implementation step.</a:t>
-            </a:r>
-            <a:endParaRPr lang="en-US" sz="1220" dirty="0"/>
+              <a:t>Document the review, approval, or implementation.</a:t>
+            </a:r>
+            <a:endParaRPr lang="en-US" sz="1140" dirty="0"/>
           </a:p>
         </p:txBody>
       </p:sp>
@@ -14452,7 +14452,7 @@
                 <a:ea typeface="Aptos" pitchFamily="34" charset="-122"/>
                 <a:cs typeface="Aptos" pitchFamily="34" charset="-120"/>
               </a:rPr>
-              <a:t>• Tool 44: Performance Monitoring Dashboard (Dashboard) - Use this tool to complete or.</a:t>
+              <a:t>• Tool 44: Performance Monitoring Dashboard (Dashboard) - Use this tool to.</a:t>
             </a:r>
             <a:endParaRPr lang="en-US" sz="1850" dirty="0"/>
           </a:p>
@@ -14469,7 +14469,7 @@
                 <a:ea typeface="Aptos" pitchFamily="34" charset="-122"/>
                 <a:cs typeface="Aptos" pitchFamily="34" charset="-120"/>
               </a:rPr>
-              <a:t>• Tool 45: Continuous Improvement Log (Log) - Use Continuous Improvement Log to translate this.</a:t>
+              <a:t>• Tool 45: Continuous Improvement Log (Log) - Use Continuous Improvement Log.</a:t>
             </a:r>
             <a:endParaRPr lang="en-US" sz="1850" dirty="0"/>
           </a:p>
@@ -14486,7 +14486,7 @@
                 <a:ea typeface="Aptos" pitchFamily="34" charset="-122"/>
                 <a:cs typeface="Aptos" pitchFamily="34" charset="-120"/>
               </a:rPr>
-              <a:t>• Tool 48: AI Evaluation &amp; Outcomes Reporting (Template) - Use AI Evaluation &amp; Outcomes.</a:t>
+              <a:t>• Tool 48: AI Evaluation &amp; Outcomes Reporting (Template) - Use AI Evaluation &amp;.</a:t>
             </a:r>
             <a:endParaRPr lang="en-US" sz="1850" dirty="0"/>
           </a:p>
@@ -14503,7 +14503,7 @@
                 <a:ea typeface="Aptos" pitchFamily="34" charset="-122"/>
                 <a:cs typeface="Aptos" pitchFamily="34" charset="-120"/>
               </a:rPr>
-              <a:t>• Tool 4: AI Policy Landscape Scan (Worksheet) - Use AI Policy Landscape Scan to translate this.</a:t>
+              <a:t>• Tool 4: AI Policy Landscape Scan (Worksheet) - Use AI Policy Landscape Scan.</a:t>
             </a:r>
             <a:endParaRPr lang="en-US" sz="1850" dirty="0"/>
           </a:p>
@@ -14544,8 +14544,8 @@
         </p:nvSpPr>
         <p:spPr>
           <a:xfrm>
-            <a:off x="8211312" y="1563624"/>
-            <a:ext cx="2734056" cy="256032"/>
+            <a:off x="8211312" y="1545336"/>
+            <a:ext cx="2734056" cy="228600"/>
           </a:xfrm>
           <a:prstGeom prst="rect">
             <a:avLst/>
@@ -14561,7 +14561,7 @@
               <a:buNone/>
             </a:pPr>
             <a:r>
-              <a:rPr lang="en-US" sz="1300" b="1" dirty="0">
+              <a:rPr lang="en-US" sz="1220" b="1" dirty="0">
                 <a:solidFill>
                   <a:srgbClr val="0068B7"/>
                 </a:solidFill>
@@ -14571,7 +14571,7 @@
               </a:rPr>
               <a:t>Use the tools</a:t>
             </a:r>
-            <a:endParaRPr lang="en-US" sz="1300" dirty="0"/>
+            <a:endParaRPr lang="en-US" sz="1220" dirty="0"/>
           </a:p>
         </p:txBody>
       </p:sp>
@@ -14583,8 +14583,8 @@
         </p:nvSpPr>
         <p:spPr>
           <a:xfrm>
-            <a:off x="8211312" y="1892808"/>
-            <a:ext cx="2734056" cy="1536192"/>
+            <a:off x="8211312" y="1856232"/>
+            <a:ext cx="2734056" cy="1591056"/>
           </a:xfrm>
           <a:prstGeom prst="rect">
             <a:avLst/>
@@ -14602,7 +14602,7 @@
               <a:buNone/>
             </a:pPr>
             <a:r>
-              <a:rPr lang="en-US" sz="1320" dirty="0">
+              <a:rPr lang="en-US" sz="1220" dirty="0">
                 <a:solidFill>
                   <a:srgbClr val="17364A"/>
                 </a:solidFill>
@@ -14610,9 +14610,9 @@
                 <a:ea typeface="Aptos" pitchFamily="34" charset="-122"/>
                 <a:cs typeface="Aptos" pitchFamily="34" charset="-120"/>
               </a:rPr>
-              <a:t>Use linked tools when your department needs a structured worksheet, template, checklist, review process, or documentation artifact.</a:t>
-            </a:r>
-            <a:endParaRPr lang="en-US" sz="1320" dirty="0"/>
+              <a:t>Use linked tools when your department needs a structured worksheet, template,.</a:t>
+            </a:r>
+            <a:endParaRPr lang="en-US" sz="1220" dirty="0"/>
           </a:p>
         </p:txBody>
       </p:sp>
@@ -14651,8 +14651,8 @@
         </p:nvSpPr>
         <p:spPr>
           <a:xfrm>
-            <a:off x="8211312" y="3941064"/>
-            <a:ext cx="2734056" cy="256032"/>
+            <a:off x="8211312" y="3922776"/>
+            <a:ext cx="2734056" cy="228600"/>
           </a:xfrm>
           <a:prstGeom prst="rect">
             <a:avLst/>
@@ -14668,7 +14668,7 @@
               <a:buNone/>
             </a:pPr>
             <a:r>
-              <a:rPr lang="en-US" sz="1300" b="1" dirty="0">
+              <a:rPr lang="en-US" sz="1220" b="1" dirty="0">
                 <a:solidFill>
                   <a:srgbClr val="0068B7"/>
                 </a:solidFill>
@@ -14678,7 +14678,7 @@
               </a:rPr>
               <a:t>Tool selection cues</a:t>
             </a:r>
-            <a:endParaRPr lang="en-US" sz="1300" dirty="0"/>
+            <a:endParaRPr lang="en-US" sz="1220" dirty="0"/>
           </a:p>
         </p:txBody>
       </p:sp>
@@ -14690,8 +14690,8 @@
         </p:nvSpPr>
         <p:spPr>
           <a:xfrm>
-            <a:off x="8229600" y="4306824"/>
-            <a:ext cx="2679192" cy="941832"/>
+            <a:off x="8229600" y="4251960"/>
+            <a:ext cx="2679192" cy="1033272"/>
           </a:xfrm>
           <a:prstGeom prst="rect">
             <a:avLst/>
@@ -14709,7 +14709,7 @@
               <a:buNone/>
             </a:pPr>
             <a:r>
-              <a:rPr lang="en-US" sz="1220" dirty="0">
+              <a:rPr lang="en-US" sz="1140" dirty="0">
                 <a:solidFill>
                   <a:srgbClr val="17364A"/>
                 </a:solidFill>
@@ -14719,14 +14719,14 @@
               </a:rPr>
               <a:t>Use a tool when no comparable local process exists.</a:t>
             </a:r>
-            <a:endParaRPr lang="en-US" sz="1220" dirty="0"/>
-          </a:p>
-          <a:p>
-            <a:pPr indent="0" marL="0">
-              <a:buNone/>
-            </a:pPr>
-            <a:r>
-              <a:rPr lang="en-US" sz="1220" dirty="0">
+            <a:endParaRPr lang="en-US" sz="1140" dirty="0"/>
+          </a:p>
+          <a:p>
+            <a:pPr indent="0" marL="0">
+              <a:buNone/>
+            </a:pPr>
+            <a:r>
+              <a:rPr lang="en-US" sz="1140" dirty="0">
                 <a:solidFill>
                   <a:srgbClr val="17364A"/>
                 </a:solidFill>
@@ -14734,16 +14734,16 @@
                 <a:ea typeface="Aptos" pitchFamily="34" charset="-122"/>
                 <a:cs typeface="Aptos" pitchFamily="34" charset="-120"/>
               </a:rPr>
-              <a:t>Adapt existing department templates when they already fit the.</a:t>
-            </a:r>
-            <a:endParaRPr lang="en-US" sz="1220" dirty="0"/>
-          </a:p>
-          <a:p>
-            <a:pPr indent="0" marL="0">
-              <a:buNone/>
-            </a:pPr>
-            <a:r>
-              <a:rPr lang="en-US" sz="1220" dirty="0">
+              <a:t>Adapt existing department templates when they.</a:t>
+            </a:r>
+            <a:endParaRPr lang="en-US" sz="1140" dirty="0"/>
+          </a:p>
+          <a:p>
+            <a:pPr indent="0" marL="0">
+              <a:buNone/>
+            </a:pPr>
+            <a:r>
+              <a:rPr lang="en-US" sz="1140" dirty="0">
                 <a:solidFill>
                   <a:srgbClr val="17364A"/>
                 </a:solidFill>
@@ -14751,9 +14751,9 @@
                 <a:ea typeface="Aptos" pitchFamily="34" charset="-122"/>
                 <a:cs typeface="Aptos" pitchFamily="34" charset="-120"/>
               </a:rPr>
-              <a:t>Save the completed artifact as evidence of the decision.</a:t>
-            </a:r>
-            <a:endParaRPr lang="en-US" sz="1220" dirty="0"/>
+              <a:t>Save the completed artifact as evidence of the.</a:t>
+            </a:r>
+            <a:endParaRPr lang="en-US" sz="1140" dirty="0"/>
           </a:p>
         </p:txBody>
       </p:sp>
@@ -15044,8 +15044,8 @@
         </p:nvSpPr>
         <p:spPr>
           <a:xfrm>
-            <a:off x="868680" y="1508760"/>
-            <a:ext cx="6309360" cy="4160520"/>
+            <a:off x="822960" y="1463040"/>
+            <a:ext cx="6565392" cy="4343400"/>
           </a:xfrm>
           <a:prstGeom prst="rect">
             <a:avLst/>
@@ -15063,7 +15063,7 @@
               <a:buNone/>
             </a:pPr>
             <a:r>
-              <a:rPr lang="en-US" sz="2100" dirty="0">
+              <a:rPr lang="en-US" sz="1920" dirty="0">
                 <a:solidFill>
                   <a:srgbClr val="003A63"/>
                 </a:solidFill>
@@ -15073,14 +15073,14 @@
               </a:rPr>
               <a:t>• Describe the basic eCR workflow from EHR trigger to public health action.</a:t>
             </a:r>
-            <a:endParaRPr lang="en-US" sz="2100" dirty="0"/>
-          </a:p>
-          <a:p>
-            <a:pPr indent="0" marL="0">
-              <a:buNone/>
-            </a:pPr>
-            <a:r>
-              <a:rPr lang="en-US" sz="2100" dirty="0">
+            <a:endParaRPr lang="en-US" sz="1920" dirty="0"/>
+          </a:p>
+          <a:p>
+            <a:pPr indent="0" marL="0">
+              <a:buNone/>
+            </a:pPr>
+            <a:r>
+              <a:rPr lang="en-US" sz="1920" dirty="0">
                 <a:solidFill>
                   <a:srgbClr val="003A63"/>
                 </a:solidFill>
@@ -15090,14 +15090,14 @@
               </a:rPr>
               <a:t>• Explain the roles of eICR, Reportability Response, eRSD, and RCTC.</a:t>
             </a:r>
-            <a:endParaRPr lang="en-US" sz="2100" dirty="0"/>
-          </a:p>
-          <a:p>
-            <a:pPr indent="0" marL="0">
-              <a:buNone/>
-            </a:pPr>
-            <a:r>
-              <a:rPr lang="en-US" sz="2100" dirty="0">
+            <a:endParaRPr lang="en-US" sz="1920" dirty="0"/>
+          </a:p>
+          <a:p>
+            <a:pPr indent="0" marL="0">
+              <a:buNone/>
+            </a:pPr>
+            <a:r>
+              <a:rPr lang="en-US" sz="1920" dirty="0">
                 <a:solidFill>
                   <a:srgbClr val="003A63"/>
                 </a:solidFill>
@@ -15105,9 +15105,9 @@
                 <a:ea typeface="Aptos" pitchFamily="34" charset="-122"/>
                 <a:cs typeface="Aptos" pitchFamily="34" charset="-120"/>
               </a:rPr>
-              <a:t>• Identify eCR data quality, routing, and onboarding issues that can affect AI use.</a:t>
-            </a:r>
-            <a:endParaRPr lang="en-US" sz="2100" dirty="0"/>
+              <a:t>• Identify eCR data quality, routing, and onboarding issues that can affect AI.</a:t>
+            </a:r>
+            <a:endParaRPr lang="en-US" sz="1920" dirty="0"/>
           </a:p>
         </p:txBody>
       </p:sp>
@@ -15119,12 +15119,12 @@
         </p:nvSpPr>
         <p:spPr>
           <a:xfrm>
-            <a:off x="7635240" y="1325880"/>
-            <a:ext cx="3474720" cy="1207008"/>
+            <a:off x="7543800" y="1325880"/>
+            <a:ext cx="3611880" cy="1261872"/>
           </a:xfrm>
           <a:prstGeom prst="roundRect">
             <a:avLst>
-              <a:gd name="adj" fmla="val 9091"/>
+              <a:gd name="adj" fmla="val 8696"/>
             </a:avLst>
           </a:prstGeom>
           <a:solidFill>
@@ -15146,8 +15146,8 @@
         </p:nvSpPr>
         <p:spPr>
           <a:xfrm>
-            <a:off x="7799832" y="1472184"/>
-            <a:ext cx="3145536" cy="256032"/>
+            <a:off x="7708392" y="1453896"/>
+            <a:ext cx="3282696" cy="228600"/>
           </a:xfrm>
           <a:prstGeom prst="rect">
             <a:avLst/>
@@ -15163,7 +15163,7 @@
               <a:buNone/>
             </a:pPr>
             <a:r>
-              <a:rPr lang="en-US" sz="1300" b="1" dirty="0">
+              <a:rPr lang="en-US" sz="1220" b="1" dirty="0">
                 <a:solidFill>
                   <a:srgbClr val="0068B7"/>
                 </a:solidFill>
@@ -15173,7 +15173,7 @@
               </a:rPr>
               <a:t>Implementation cue</a:t>
             </a:r>
-            <a:endParaRPr lang="en-US" sz="1300" dirty="0"/>
+            <a:endParaRPr lang="en-US" sz="1220" dirty="0"/>
           </a:p>
         </p:txBody>
       </p:sp>
@@ -15185,8 +15185,8 @@
         </p:nvSpPr>
         <p:spPr>
           <a:xfrm>
-            <a:off x="7799832" y="1801368"/>
-            <a:ext cx="3145536" cy="640080"/>
+            <a:off x="7708392" y="1764792"/>
+            <a:ext cx="3282696" cy="749808"/>
           </a:xfrm>
           <a:prstGeom prst="rect">
             <a:avLst/>
@@ -15204,7 +15204,7 @@
               <a:buNone/>
             </a:pPr>
             <a:r>
-              <a:rPr lang="en-US" sz="1320" dirty="0">
+              <a:rPr lang="en-US" sz="1220" dirty="0">
                 <a:solidFill>
                   <a:srgbClr val="17364A"/>
                 </a:solidFill>
@@ -15214,7 +15214,7 @@
               </a:rPr>
               <a:t>Describe the basic eCR workflow from EHR trigger to public health action.</a:t>
             </a:r>
-            <a:endParaRPr lang="en-US" sz="1320" dirty="0"/>
+            <a:endParaRPr lang="en-US" sz="1220" dirty="0"/>
           </a:p>
         </p:txBody>
       </p:sp>
@@ -15226,12 +15226,12 @@
         </p:nvSpPr>
         <p:spPr>
           <a:xfrm>
-            <a:off x="7635240" y="2670048"/>
-            <a:ext cx="3474720" cy="1377086"/>
+            <a:off x="7543800" y="2724912"/>
+            <a:ext cx="3611880" cy="1527048"/>
           </a:xfrm>
           <a:prstGeom prst="roundRect">
             <a:avLst>
-              <a:gd name="adj" fmla="val 7968"/>
+              <a:gd name="adj" fmla="val 7186"/>
             </a:avLst>
           </a:prstGeom>
           <a:solidFill>
@@ -15253,8 +15253,8 @@
         </p:nvSpPr>
         <p:spPr>
           <a:xfrm>
-            <a:off x="7799832" y="2816352"/>
-            <a:ext cx="3145536" cy="256032"/>
+            <a:off x="7708392" y="2852928"/>
+            <a:ext cx="3282696" cy="228600"/>
           </a:xfrm>
           <a:prstGeom prst="rect">
             <a:avLst/>
@@ -15270,7 +15270,7 @@
               <a:buNone/>
             </a:pPr>
             <a:r>
-              <a:rPr lang="en-US" sz="1300" b="1" dirty="0">
+              <a:rPr lang="en-US" sz="1220" b="1" dirty="0">
                 <a:solidFill>
                   <a:srgbClr val="0068B7"/>
                 </a:solidFill>
@@ -15280,7 +15280,7 @@
               </a:rPr>
               <a:t>Concept checkpoints</a:t>
             </a:r>
-            <a:endParaRPr lang="en-US" sz="1300" dirty="0"/>
+            <a:endParaRPr lang="en-US" sz="1220" dirty="0"/>
           </a:p>
         </p:txBody>
       </p:sp>
@@ -15292,8 +15292,8 @@
         </p:nvSpPr>
         <p:spPr>
           <a:xfrm>
-            <a:off x="7818120" y="3182112"/>
-            <a:ext cx="3090672" cy="718718"/>
+            <a:off x="7726680" y="3182112"/>
+            <a:ext cx="3227832" cy="960120"/>
           </a:xfrm>
           <a:prstGeom prst="rect">
             <a:avLst/>
@@ -15311,7 +15311,7 @@
               <a:buNone/>
             </a:pPr>
             <a:r>
-              <a:rPr lang="en-US" sz="1220" dirty="0">
+              <a:rPr lang="en-US" sz="1140" dirty="0">
                 <a:solidFill>
                   <a:srgbClr val="17364A"/>
                 </a:solidFill>
@@ -15319,16 +15319,16 @@
                 <a:ea typeface="Aptos" pitchFamily="34" charset="-122"/>
                 <a:cs typeface="Aptos" pitchFamily="34" charset="-120"/>
               </a:rPr>
-              <a:t>Assess where AI may support eCR workflows and where human review.</a:t>
-            </a:r>
-            <a:endParaRPr lang="en-US" sz="1220" dirty="0"/>
-          </a:p>
-          <a:p>
-            <a:pPr indent="0" marL="0">
-              <a:buNone/>
-            </a:pPr>
-            <a:r>
-              <a:rPr lang="en-US" sz="1220" dirty="0">
+              <a:t>Assess where AI may support eCR workflows and.</a:t>
+            </a:r>
+            <a:endParaRPr lang="en-US" sz="1140" dirty="0"/>
+          </a:p>
+          <a:p>
+            <a:pPr indent="0" marL="0">
+              <a:buNone/>
+            </a:pPr>
+            <a:r>
+              <a:rPr lang="en-US" sz="1140" dirty="0">
                 <a:solidFill>
                   <a:srgbClr val="17364A"/>
                 </a:solidFill>
@@ -15338,7 +15338,7 @@
               </a:rPr>
               <a:t>Produce an AI-readiness review for an eCR workflow.</a:t>
             </a:r>
-            <a:endParaRPr lang="en-US" sz="1220" dirty="0"/>
+            <a:endParaRPr lang="en-US" sz="1140" dirty="0"/>
           </a:p>
         </p:txBody>
       </p:sp>
@@ -15350,12 +15350,12 @@
         </p:nvSpPr>
         <p:spPr>
           <a:xfrm>
-            <a:off x="7635240" y="4184294"/>
-            <a:ext cx="3474720" cy="1466698"/>
+            <a:off x="7543800" y="4389120"/>
+            <a:ext cx="3611880" cy="1261872"/>
           </a:xfrm>
           <a:prstGeom prst="roundRect">
             <a:avLst>
-              <a:gd name="adj" fmla="val 7481"/>
+              <a:gd name="adj" fmla="val 8696"/>
             </a:avLst>
           </a:prstGeom>
           <a:solidFill>
@@ -15377,8 +15377,8 @@
         </p:nvSpPr>
         <p:spPr>
           <a:xfrm>
-            <a:off x="7799832" y="4330598"/>
-            <a:ext cx="3145536" cy="256032"/>
+            <a:off x="7708392" y="4517136"/>
+            <a:ext cx="3282696" cy="228600"/>
           </a:xfrm>
           <a:prstGeom prst="rect">
             <a:avLst/>
@@ -15394,7 +15394,7 @@
               <a:buNone/>
             </a:pPr>
             <a:r>
-              <a:rPr lang="en-US" sz="1300" b="1" dirty="0">
+              <a:rPr lang="en-US" sz="1220" b="1" dirty="0">
                 <a:solidFill>
                   <a:srgbClr val="0068B7"/>
                 </a:solidFill>
@@ -15404,7 +15404,7 @@
               </a:rPr>
               <a:t>Next action</a:t>
             </a:r>
-            <a:endParaRPr lang="en-US" sz="1300" dirty="0"/>
+            <a:endParaRPr lang="en-US" sz="1220" dirty="0"/>
           </a:p>
         </p:txBody>
       </p:sp>
@@ -15416,8 +15416,8 @@
         </p:nvSpPr>
         <p:spPr>
           <a:xfrm>
-            <a:off x="7799832" y="4659782"/>
-            <a:ext cx="3145536" cy="899770"/>
+            <a:off x="7708392" y="4828032"/>
+            <a:ext cx="3282696" cy="749808"/>
           </a:xfrm>
           <a:prstGeom prst="rect">
             <a:avLst/>
@@ -15435,7 +15435,7 @@
               <a:buNone/>
             </a:pPr>
             <a:r>
-              <a:rPr lang="en-US" sz="1320" dirty="0">
+              <a:rPr lang="en-US" sz="1220" dirty="0">
                 <a:solidFill>
                   <a:srgbClr val="17364A"/>
                 </a:solidFill>
@@ -15443,9 +15443,9 @@
                 <a:ea typeface="Aptos" pitchFamily="34" charset="-122"/>
                 <a:cs typeface="Aptos" pitchFamily="34" charset="-120"/>
               </a:rPr>
-              <a:t>Use the assignment to test whether you can explain the concept, apply it to a realistic public health situation, and identify what would need review before the work moves forward.</a:t>
-            </a:r>
-            <a:endParaRPr lang="en-US" sz="1320" dirty="0"/>
+              <a:t>Use the assignment to test whether you can explain the concept, apply it to a.</a:t>
+            </a:r>
+            <a:endParaRPr lang="en-US" sz="1220" dirty="0"/>
           </a:p>
         </p:txBody>
       </p:sp>
@@ -15736,8 +15736,8 @@
         </p:nvSpPr>
         <p:spPr>
           <a:xfrm>
-            <a:off x="868680" y="1508760"/>
-            <a:ext cx="6309360" cy="4160520"/>
+            <a:off x="822960" y="1463040"/>
+            <a:ext cx="6565392" cy="4343400"/>
           </a:xfrm>
           <a:prstGeom prst="rect">
             <a:avLst/>
@@ -15755,7 +15755,7 @@
               <a:buNone/>
             </a:pPr>
             <a:r>
-              <a:rPr lang="en-US" sz="2100" dirty="0">
+              <a:rPr lang="en-US" sz="1920" dirty="0">
                 <a:solidFill>
                   <a:srgbClr val="003A63"/>
                 </a:solidFill>
@@ -15763,16 +15763,16 @@
                 <a:ea typeface="Aptos" pitchFamily="34" charset="-122"/>
                 <a:cs typeface="Aptos" pitchFamily="34" charset="-120"/>
               </a:rPr>
-              <a:t>• Electronic case reporting is one of the clearest examples of public health automation.</a:t>
-            </a:r>
-            <a:endParaRPr lang="en-US" sz="2100" dirty="0"/>
-          </a:p>
-          <a:p>
-            <a:pPr indent="0" marL="0">
-              <a:buNone/>
-            </a:pPr>
-            <a:r>
-              <a:rPr lang="en-US" sz="2100" dirty="0">
+              <a:t>• Electronic case reporting is one of the clearest examples of public health.</a:t>
+            </a:r>
+            <a:endParaRPr lang="en-US" sz="1920" dirty="0"/>
+          </a:p>
+          <a:p>
+            <a:pPr indent="0" marL="0">
+              <a:buNone/>
+            </a:pPr>
+            <a:r>
+              <a:rPr lang="en-US" sz="1920" dirty="0">
                 <a:solidFill>
                   <a:srgbClr val="003A63"/>
                 </a:solidFill>
@@ -15780,16 +15780,16 @@
                 <a:ea typeface="Aptos" pitchFamily="34" charset="-122"/>
                 <a:cs typeface="Aptos" pitchFamily="34" charset="-120"/>
               </a:rPr>
-              <a:t>• It uses data from electronic health records and reporting logic to support more timely case.</a:t>
-            </a:r>
-            <a:endParaRPr lang="en-US" sz="2100" dirty="0"/>
-          </a:p>
-          <a:p>
-            <a:pPr indent="0" marL="0">
-              <a:buNone/>
-            </a:pPr>
-            <a:r>
-              <a:rPr lang="en-US" sz="2100" dirty="0">
+              <a:t>• It uses data from electronic health records and reporting logic to support.</a:t>
+            </a:r>
+            <a:endParaRPr lang="en-US" sz="1920" dirty="0"/>
+          </a:p>
+          <a:p>
+            <a:pPr indent="0" marL="0">
+              <a:buNone/>
+            </a:pPr>
+            <a:r>
+              <a:rPr lang="en-US" sz="1920" dirty="0">
                 <a:solidFill>
                   <a:srgbClr val="003A63"/>
                 </a:solidFill>
@@ -15797,9 +15797,9 @@
                 <a:ea typeface="Aptos" pitchFamily="34" charset="-122"/>
                 <a:cs typeface="Aptos" pitchFamily="34" charset="-120"/>
               </a:rPr>
-              <a:t>• This module teaches learners how eCR works technically and how AI might support eCR-related.</a:t>
-            </a:r>
-            <a:endParaRPr lang="en-US" sz="2100" dirty="0"/>
+              <a:t>• This module teaches learners how eCR works technically and how AI might.</a:t>
+            </a:r>
+            <a:endParaRPr lang="en-US" sz="1920" dirty="0"/>
           </a:p>
         </p:txBody>
       </p:sp>
@@ -15811,12 +15811,12 @@
         </p:nvSpPr>
         <p:spPr>
           <a:xfrm>
-            <a:off x="7635240" y="1325880"/>
-            <a:ext cx="3474720" cy="1207008"/>
+            <a:off x="7543800" y="1325880"/>
+            <a:ext cx="3611880" cy="1261872"/>
           </a:xfrm>
           <a:prstGeom prst="roundRect">
             <a:avLst>
-              <a:gd name="adj" fmla="val 9091"/>
+              <a:gd name="adj" fmla="val 8696"/>
             </a:avLst>
           </a:prstGeom>
           <a:solidFill>
@@ -15838,8 +15838,8 @@
         </p:nvSpPr>
         <p:spPr>
           <a:xfrm>
-            <a:off x="7799832" y="1472184"/>
-            <a:ext cx="3145536" cy="256032"/>
+            <a:off x="7708392" y="1453896"/>
+            <a:ext cx="3282696" cy="228600"/>
           </a:xfrm>
           <a:prstGeom prst="rect">
             <a:avLst/>
@@ -15855,7 +15855,7 @@
               <a:buNone/>
             </a:pPr>
             <a:r>
-              <a:rPr lang="en-US" sz="1300" b="1" dirty="0">
+              <a:rPr lang="en-US" sz="1220" b="1" dirty="0">
                 <a:solidFill>
                   <a:srgbClr val="0068B7"/>
                 </a:solidFill>
@@ -15865,7 +15865,7 @@
               </a:rPr>
               <a:t>Implementation cue</a:t>
             </a:r>
-            <a:endParaRPr lang="en-US" sz="1300" dirty="0"/>
+            <a:endParaRPr lang="en-US" sz="1220" dirty="0"/>
           </a:p>
         </p:txBody>
       </p:sp>
@@ -15877,8 +15877,8 @@
         </p:nvSpPr>
         <p:spPr>
           <a:xfrm>
-            <a:off x="7799832" y="1801368"/>
-            <a:ext cx="3145536" cy="640080"/>
+            <a:off x="7708392" y="1764792"/>
+            <a:ext cx="3282696" cy="749808"/>
           </a:xfrm>
           <a:prstGeom prst="rect">
             <a:avLst/>
@@ -15896,7 +15896,7 @@
               <a:buNone/>
             </a:pPr>
             <a:r>
-              <a:rPr lang="en-US" sz="1320" dirty="0">
+              <a:rPr lang="en-US" sz="1220" dirty="0">
                 <a:solidFill>
                   <a:srgbClr val="17364A"/>
                 </a:solidFill>
@@ -15904,9 +15904,9 @@
                 <a:ea typeface="Aptos" pitchFamily="34" charset="-122"/>
                 <a:cs typeface="Aptos" pitchFamily="34" charset="-120"/>
               </a:rPr>
-              <a:t>Electronic case reporting is one of the clearest examples of public health automation.</a:t>
-            </a:r>
-            <a:endParaRPr lang="en-US" sz="1320" dirty="0"/>
+              <a:t>Electronic case reporting is one of the clearest examples of public health.</a:t>
+            </a:r>
+            <a:endParaRPr lang="en-US" sz="1220" dirty="0"/>
           </a:p>
         </p:txBody>
       </p:sp>
@@ -15918,12 +15918,12 @@
         </p:nvSpPr>
         <p:spPr>
           <a:xfrm>
-            <a:off x="7635240" y="2670048"/>
-            <a:ext cx="3474720" cy="1377086"/>
+            <a:off x="7543800" y="2724912"/>
+            <a:ext cx="3611880" cy="1527048"/>
           </a:xfrm>
           <a:prstGeom prst="roundRect">
             <a:avLst>
-              <a:gd name="adj" fmla="val 7968"/>
+              <a:gd name="adj" fmla="val 7186"/>
             </a:avLst>
           </a:prstGeom>
           <a:solidFill>
@@ -15945,24 +15945,26 @@
         </p:nvSpPr>
         <p:spPr>
           <a:xfrm>
-            <a:off x="7799832" y="2798064"/>
-            <a:ext cx="3145536" cy="237744"/>
-          </a:xfrm>
-          <a:prstGeom prst="rect">
-            <a:avLst/>
-          </a:prstGeom>
-          <a:noFill/>
-          <a:ln/>
-        </p:spPr>
-        <p:txBody>
-          <a:bodyPr wrap="square" lIns="0" tIns="0" rIns="0" bIns="0" rtlCol="0" anchor="ctr"/>
-          <a:lstStyle/>
-          <a:p>
-            <a:pPr indent="0" marL="0">
-              <a:buNone/>
-            </a:pPr>
-            <a:r>
-              <a:rPr lang="en-US" sz="1250" b="1" dirty="0">
+            <a:off x="7708392" y="2852928"/>
+            <a:ext cx="3282696" cy="219456"/>
+          </a:xfrm>
+          <a:prstGeom prst="rect">
+            <a:avLst/>
+          </a:prstGeom>
+          <a:noFill/>
+          <a:ln/>
+        </p:spPr>
+        <p:txBody>
+          <a:bodyPr wrap="square" lIns="0" tIns="0" rIns="0" bIns="0" rtlCol="0" anchor="ctr">
+            <a:normAutofit/>
+          </a:bodyPr>
+          <a:lstStyle/>
+          <a:p>
+            <a:pPr indent="0" marL="0">
+              <a:buNone/>
+            </a:pPr>
+            <a:r>
+              <a:rPr lang="en-US" sz="1160" b="1" dirty="0">
                 <a:solidFill>
                   <a:srgbClr val="0068B7"/>
                 </a:solidFill>
@@ -15972,7 +15974,7 @@
               </a:rPr>
               <a:t>Implementation path</a:t>
             </a:r>
-            <a:endParaRPr lang="en-US" sz="1250" dirty="0"/>
+            <a:endParaRPr lang="en-US" sz="1160" dirty="0"/>
           </a:p>
         </p:txBody>
       </p:sp>
@@ -15984,7 +15986,7 @@
         </p:nvSpPr>
         <p:spPr>
           <a:xfrm>
-            <a:off x="8763000" y="3351276"/>
+            <a:off x="8717280" y="3406140"/>
             <a:ext cx="164592" cy="0"/>
           </a:xfrm>
           <a:prstGeom prst="line">
@@ -16007,8 +16009,8 @@
         </p:nvSpPr>
         <p:spPr>
           <a:xfrm>
-            <a:off x="7872984" y="3200400"/>
-            <a:ext cx="890016" cy="301752"/>
+            <a:off x="7781544" y="3255264"/>
+            <a:ext cx="935736" cy="301752"/>
           </a:xfrm>
           <a:prstGeom prst="roundRect">
             <a:avLst>
@@ -16034,8 +16036,8 @@
         </p:nvSpPr>
         <p:spPr>
           <a:xfrm>
-            <a:off x="7909560" y="3273552"/>
-            <a:ext cx="816864" cy="146304"/>
+            <a:off x="7818120" y="3328416"/>
+            <a:ext cx="862584" cy="146304"/>
           </a:xfrm>
           <a:prstGeom prst="rect">
             <a:avLst/>
@@ -16075,7 +16077,7 @@
         </p:nvSpPr>
         <p:spPr>
           <a:xfrm>
-            <a:off x="9817608" y="3351276"/>
+            <a:off x="9817608" y="3406140"/>
             <a:ext cx="164592" cy="0"/>
           </a:xfrm>
           <a:prstGeom prst="line">
@@ -16098,8 +16100,8 @@
         </p:nvSpPr>
         <p:spPr>
           <a:xfrm>
-            <a:off x="8927592" y="3200400"/>
-            <a:ext cx="890016" cy="301752"/>
+            <a:off x="8881872" y="3255264"/>
+            <a:ext cx="935736" cy="301752"/>
           </a:xfrm>
           <a:prstGeom prst="roundRect">
             <a:avLst>
@@ -16125,8 +16127,8 @@
         </p:nvSpPr>
         <p:spPr>
           <a:xfrm>
-            <a:off x="8964168" y="3273552"/>
-            <a:ext cx="816864" cy="146304"/>
+            <a:off x="8918448" y="3328416"/>
+            <a:ext cx="862584" cy="146304"/>
           </a:xfrm>
           <a:prstGeom prst="rect">
             <a:avLst/>
@@ -16166,8 +16168,8 @@
         </p:nvSpPr>
         <p:spPr>
           <a:xfrm>
-            <a:off x="9982200" y="3200400"/>
-            <a:ext cx="890016" cy="301752"/>
+            <a:off x="9982200" y="3255264"/>
+            <a:ext cx="935736" cy="301752"/>
           </a:xfrm>
           <a:prstGeom prst="roundRect">
             <a:avLst>
@@ -16193,8 +16195,8 @@
         </p:nvSpPr>
         <p:spPr>
           <a:xfrm>
-            <a:off x="10018776" y="3273552"/>
-            <a:ext cx="816864" cy="146304"/>
+            <a:off x="10018776" y="3328416"/>
+            <a:ext cx="862584" cy="146304"/>
           </a:xfrm>
           <a:prstGeom prst="rect">
             <a:avLst/>
@@ -16234,8 +16236,8 @@
         </p:nvSpPr>
         <p:spPr>
           <a:xfrm>
-            <a:off x="7854696" y="3694176"/>
-            <a:ext cx="3035808" cy="206654"/>
+            <a:off x="7763256" y="3749040"/>
+            <a:ext cx="3172968" cy="356616"/>
           </a:xfrm>
           <a:prstGeom prst="rect">
             <a:avLst/>
@@ -16253,7 +16255,7 @@
               <a:buNone/>
             </a:pPr>
             <a:r>
-              <a:rPr lang="en-US" sz="1120" dirty="0">
+              <a:rPr lang="en-US" sz="1040" dirty="0">
                 <a:solidFill>
                   <a:srgbClr val="17364A"/>
                 </a:solidFill>
@@ -16261,9 +16263,9 @@
                 <a:ea typeface="Aptos" pitchFamily="34" charset="-122"/>
                 <a:cs typeface="Aptos" pitchFamily="34" charset="-120"/>
               </a:rPr>
-              <a:t>Implementation work should make dependencies, approvals, training, and sustainment visible before launch.</a:t>
-            </a:r>
-            <a:endParaRPr lang="en-US" sz="1120" dirty="0"/>
+              <a:t>Implementation work should make dependencies, approvals, training, and.</a:t>
+            </a:r>
+            <a:endParaRPr lang="en-US" sz="1040" dirty="0"/>
           </a:p>
         </p:txBody>
       </p:sp>
@@ -16275,12 +16277,12 @@
         </p:nvSpPr>
         <p:spPr>
           <a:xfrm>
-            <a:off x="7635240" y="4184294"/>
-            <a:ext cx="3474720" cy="1466698"/>
+            <a:off x="7543800" y="4389120"/>
+            <a:ext cx="3611880" cy="1261872"/>
           </a:xfrm>
           <a:prstGeom prst="roundRect">
             <a:avLst>
-              <a:gd name="adj" fmla="val 7481"/>
+              <a:gd name="adj" fmla="val 8696"/>
             </a:avLst>
           </a:prstGeom>
           <a:solidFill>
@@ -16302,8 +16304,8 @@
         </p:nvSpPr>
         <p:spPr>
           <a:xfrm>
-            <a:off x="7799832" y="4330598"/>
-            <a:ext cx="3145536" cy="256032"/>
+            <a:off x="7708392" y="4517136"/>
+            <a:ext cx="3282696" cy="228600"/>
           </a:xfrm>
           <a:prstGeom prst="rect">
             <a:avLst/>
@@ -16319,7 +16321,7 @@
               <a:buNone/>
             </a:pPr>
             <a:r>
-              <a:rPr lang="en-US" sz="1300" b="1" dirty="0">
+              <a:rPr lang="en-US" sz="1220" b="1" dirty="0">
                 <a:solidFill>
                   <a:srgbClr val="0068B7"/>
                 </a:solidFill>
@@ -16329,7 +16331,7 @@
               </a:rPr>
               <a:t>Next action</a:t>
             </a:r>
-            <a:endParaRPr lang="en-US" sz="1300" dirty="0"/>
+            <a:endParaRPr lang="en-US" sz="1220" dirty="0"/>
           </a:p>
         </p:txBody>
       </p:sp>
@@ -16341,8 +16343,8 @@
         </p:nvSpPr>
         <p:spPr>
           <a:xfrm>
-            <a:off x="7799832" y="4659782"/>
-            <a:ext cx="3145536" cy="899770"/>
+            <a:off x="7708392" y="4828032"/>
+            <a:ext cx="3282696" cy="749808"/>
           </a:xfrm>
           <a:prstGeom prst="rect">
             <a:avLst/>
@@ -16360,7 +16362,7 @@
               <a:buNone/>
             </a:pPr>
             <a:r>
-              <a:rPr lang="en-US" sz="1320" dirty="0">
+              <a:rPr lang="en-US" sz="1220" dirty="0">
                 <a:solidFill>
                   <a:srgbClr val="17364A"/>
                 </a:solidFill>
@@ -16368,9 +16370,9 @@
                 <a:ea typeface="Aptos" pitchFamily="34" charset="-122"/>
                 <a:cs typeface="Aptos" pitchFamily="34" charset="-120"/>
               </a:rPr>
-              <a:t>Use the concept to clarify workflow changes, dependencies, staffing, procurement requirements, training needs, and implementation checkpoints.</a:t>
-            </a:r>
-            <a:endParaRPr lang="en-US" sz="1320" dirty="0"/>
+              <a:t>Use the concept to clarify workflow changes, dependencies, staffing, procurement.</a:t>
+            </a:r>
+            <a:endParaRPr lang="en-US" sz="1220" dirty="0"/>
           </a:p>
         </p:txBody>
       </p:sp>
@@ -16661,8 +16663,8 @@
         </p:nvSpPr>
         <p:spPr>
           <a:xfrm>
-            <a:off x="868680" y="1508760"/>
-            <a:ext cx="6309360" cy="4160520"/>
+            <a:off x="822960" y="1463040"/>
+            <a:ext cx="6565392" cy="4343400"/>
           </a:xfrm>
           <a:prstGeom prst="rect">
             <a:avLst/>
@@ -16680,7 +16682,7 @@
               <a:buNone/>
             </a:pPr>
             <a:r>
-              <a:rPr lang="en-US" sz="2100" dirty="0">
+              <a:rPr lang="en-US" sz="1920" dirty="0">
                 <a:solidFill>
                   <a:srgbClr val="003A63"/>
                 </a:solidFill>
@@ -16690,14 +16692,14 @@
               </a:rPr>
               <a:t>• This national-level module is intended for training and planning purposes.</a:t>
             </a:r>
-            <a:endParaRPr lang="en-US" sz="2100" dirty="0"/>
-          </a:p>
-          <a:p>
-            <a:pPr indent="0" marL="0">
-              <a:buNone/>
-            </a:pPr>
-            <a:r>
-              <a:rPr lang="en-US" sz="2100" dirty="0">
+            <a:endParaRPr lang="en-US" sz="1920" dirty="0"/>
+          </a:p>
+          <a:p>
+            <a:pPr indent="0" marL="0">
+              <a:buNone/>
+            </a:pPr>
+            <a:r>
+              <a:rPr lang="en-US" sz="1920" dirty="0">
                 <a:solidFill>
                   <a:srgbClr val="003A63"/>
                 </a:solidFill>
@@ -16705,16 +16707,16 @@
                 <a:ea typeface="Aptos" pitchFamily="34" charset="-122"/>
                 <a:cs typeface="Aptos" pitchFamily="34" charset="-120"/>
               </a:rPr>
-              <a:t>• It does not replace legal, privacy, procurement, civil rights, records, or agency policy review.</a:t>
-            </a:r>
-            <a:endParaRPr lang="en-US" sz="2100" dirty="0"/>
-          </a:p>
-          <a:p>
-            <a:pPr indent="0" marL="0">
-              <a:buNone/>
-            </a:pPr>
-            <a:r>
-              <a:rPr lang="en-US" sz="2100" dirty="0">
+              <a:t>• It does not replace legal, privacy, procurement, civil rights, records, or.</a:t>
+            </a:r>
+            <a:endParaRPr lang="en-US" sz="1920" dirty="0"/>
+          </a:p>
+          <a:p>
+            <a:pPr indent="0" marL="0">
+              <a:buNone/>
+            </a:pPr>
+            <a:r>
+              <a:rPr lang="en-US" sz="1920" dirty="0">
                 <a:solidFill>
                   <a:srgbClr val="003A63"/>
                 </a:solidFill>
@@ -16722,9 +16724,9 @@
                 <a:ea typeface="Aptos" pitchFamily="34" charset="-122"/>
                 <a:cs typeface="Aptos" pitchFamily="34" charset="-120"/>
               </a:rPr>
-              <a:t>• Learners should confirm applicable requirements in their own jurisdiction and organization.</a:t>
-            </a:r>
-            <a:endParaRPr lang="en-US" sz="2100" dirty="0"/>
+              <a:t>• Learners should confirm applicable requirements in their own jurisdiction.</a:t>
+            </a:r>
+            <a:endParaRPr lang="en-US" sz="1920" dirty="0"/>
           </a:p>
         </p:txBody>
       </p:sp>
@@ -16736,12 +16738,12 @@
         </p:nvSpPr>
         <p:spPr>
           <a:xfrm>
-            <a:off x="7635240" y="1325880"/>
-            <a:ext cx="3474720" cy="1207008"/>
+            <a:off x="7543800" y="1325880"/>
+            <a:ext cx="3611880" cy="1261872"/>
           </a:xfrm>
           <a:prstGeom prst="roundRect">
             <a:avLst>
-              <a:gd name="adj" fmla="val 9091"/>
+              <a:gd name="adj" fmla="val 8696"/>
             </a:avLst>
           </a:prstGeom>
           <a:solidFill>
@@ -16763,8 +16765,8 @@
         </p:nvSpPr>
         <p:spPr>
           <a:xfrm>
-            <a:off x="7799832" y="1472184"/>
-            <a:ext cx="3145536" cy="256032"/>
+            <a:off x="7708392" y="1453896"/>
+            <a:ext cx="3282696" cy="228600"/>
           </a:xfrm>
           <a:prstGeom prst="rect">
             <a:avLst/>
@@ -16780,7 +16782,7 @@
               <a:buNone/>
             </a:pPr>
             <a:r>
-              <a:rPr lang="en-US" sz="1300" b="1" dirty="0">
+              <a:rPr lang="en-US" sz="1220" b="1" dirty="0">
                 <a:solidFill>
                   <a:srgbClr val="0068B7"/>
                 </a:solidFill>
@@ -16790,7 +16792,7 @@
               </a:rPr>
               <a:t>Governance lens</a:t>
             </a:r>
-            <a:endParaRPr lang="en-US" sz="1300" dirty="0"/>
+            <a:endParaRPr lang="en-US" sz="1220" dirty="0"/>
           </a:p>
         </p:txBody>
       </p:sp>
@@ -16802,8 +16804,8 @@
         </p:nvSpPr>
         <p:spPr>
           <a:xfrm>
-            <a:off x="7799832" y="1801368"/>
-            <a:ext cx="3145536" cy="640080"/>
+            <a:off x="7708392" y="1764792"/>
+            <a:ext cx="3282696" cy="749808"/>
           </a:xfrm>
           <a:prstGeom prst="rect">
             <a:avLst/>
@@ -16821,7 +16823,7 @@
               <a:buNone/>
             </a:pPr>
             <a:r>
-              <a:rPr lang="en-US" sz="1320" dirty="0">
+              <a:rPr lang="en-US" sz="1220" dirty="0">
                 <a:solidFill>
                   <a:srgbClr val="17364A"/>
                 </a:solidFill>
@@ -16831,7 +16833,7 @@
               </a:rPr>
               <a:t>This national-level module is intended for training and planning purposes.</a:t>
             </a:r>
-            <a:endParaRPr lang="en-US" sz="1320" dirty="0"/>
+            <a:endParaRPr lang="en-US" sz="1220" dirty="0"/>
           </a:p>
         </p:txBody>
       </p:sp>
@@ -16843,12 +16845,12 @@
         </p:nvSpPr>
         <p:spPr>
           <a:xfrm>
-            <a:off x="7635240" y="2670048"/>
-            <a:ext cx="3474720" cy="1377086"/>
+            <a:off x="7543800" y="2724912"/>
+            <a:ext cx="3611880" cy="1527048"/>
           </a:xfrm>
           <a:prstGeom prst="roundRect">
             <a:avLst>
-              <a:gd name="adj" fmla="val 7968"/>
+              <a:gd name="adj" fmla="val 7186"/>
             </a:avLst>
           </a:prstGeom>
           <a:solidFill>
@@ -16870,24 +16872,26 @@
         </p:nvSpPr>
         <p:spPr>
           <a:xfrm>
-            <a:off x="7799832" y="2798064"/>
-            <a:ext cx="3145536" cy="237744"/>
-          </a:xfrm>
-          <a:prstGeom prst="rect">
-            <a:avLst/>
-          </a:prstGeom>
-          <a:noFill/>
-          <a:ln/>
-        </p:spPr>
-        <p:txBody>
-          <a:bodyPr wrap="square" lIns="0" tIns="0" rIns="0" bIns="0" rtlCol="0" anchor="ctr"/>
-          <a:lstStyle/>
-          <a:p>
-            <a:pPr indent="0" marL="0">
-              <a:buNone/>
-            </a:pPr>
-            <a:r>
-              <a:rPr lang="en-US" sz="1250" b="1" dirty="0">
+            <a:off x="7708392" y="2852928"/>
+            <a:ext cx="3282696" cy="219456"/>
+          </a:xfrm>
+          <a:prstGeom prst="rect">
+            <a:avLst/>
+          </a:prstGeom>
+          <a:noFill/>
+          <a:ln/>
+        </p:spPr>
+        <p:txBody>
+          <a:bodyPr wrap="square" lIns="0" tIns="0" rIns="0" bIns="0" rtlCol="0" anchor="ctr">
+            <a:normAutofit/>
+          </a:bodyPr>
+          <a:lstStyle/>
+          <a:p>
+            <a:pPr indent="0" marL="0">
+              <a:buNone/>
+            </a:pPr>
+            <a:r>
+              <a:rPr lang="en-US" sz="1160" b="1" dirty="0">
                 <a:solidFill>
                   <a:srgbClr val="0068B7"/>
                 </a:solidFill>
@@ -16897,7 +16901,7 @@
               </a:rPr>
               <a:t>Governance pathway</a:t>
             </a:r>
-            <a:endParaRPr lang="en-US" sz="1250" dirty="0"/>
+            <a:endParaRPr lang="en-US" sz="1160" dirty="0"/>
           </a:p>
         </p:txBody>
       </p:sp>
@@ -16909,7 +16913,7 @@
         </p:nvSpPr>
         <p:spPr>
           <a:xfrm>
-            <a:off x="8763000" y="3351276"/>
+            <a:off x="8717280" y="3406140"/>
             <a:ext cx="164592" cy="0"/>
           </a:xfrm>
           <a:prstGeom prst="line">
@@ -16932,8 +16936,8 @@
         </p:nvSpPr>
         <p:spPr>
           <a:xfrm>
-            <a:off x="7872984" y="3200400"/>
-            <a:ext cx="890016" cy="301752"/>
+            <a:off x="7781544" y="3255264"/>
+            <a:ext cx="935736" cy="301752"/>
           </a:xfrm>
           <a:prstGeom prst="roundRect">
             <a:avLst>
@@ -16959,8 +16963,8 @@
         </p:nvSpPr>
         <p:spPr>
           <a:xfrm>
-            <a:off x="7909560" y="3273552"/>
-            <a:ext cx="816864" cy="146304"/>
+            <a:off x="7818120" y="3328416"/>
+            <a:ext cx="862584" cy="146304"/>
           </a:xfrm>
           <a:prstGeom prst="rect">
             <a:avLst/>
@@ -17000,7 +17004,7 @@
         </p:nvSpPr>
         <p:spPr>
           <a:xfrm>
-            <a:off x="9817608" y="3351276"/>
+            <a:off x="9817608" y="3406140"/>
             <a:ext cx="164592" cy="0"/>
           </a:xfrm>
           <a:prstGeom prst="line">
@@ -17023,8 +17027,8 @@
         </p:nvSpPr>
         <p:spPr>
           <a:xfrm>
-            <a:off x="8927592" y="3200400"/>
-            <a:ext cx="890016" cy="301752"/>
+            <a:off x="8881872" y="3255264"/>
+            <a:ext cx="935736" cy="301752"/>
           </a:xfrm>
           <a:prstGeom prst="roundRect">
             <a:avLst>
@@ -17050,8 +17054,8 @@
         </p:nvSpPr>
         <p:spPr>
           <a:xfrm>
-            <a:off x="8964168" y="3273552"/>
-            <a:ext cx="816864" cy="146304"/>
+            <a:off x="8918448" y="3328416"/>
+            <a:ext cx="862584" cy="146304"/>
           </a:xfrm>
           <a:prstGeom prst="rect">
             <a:avLst/>
@@ -17091,8 +17095,8 @@
         </p:nvSpPr>
         <p:spPr>
           <a:xfrm>
-            <a:off x="9982200" y="3200400"/>
-            <a:ext cx="890016" cy="301752"/>
+            <a:off x="9982200" y="3255264"/>
+            <a:ext cx="935736" cy="301752"/>
           </a:xfrm>
           <a:prstGeom prst="roundRect">
             <a:avLst>
@@ -17118,8 +17122,8 @@
         </p:nvSpPr>
         <p:spPr>
           <a:xfrm>
-            <a:off x="10018776" y="3273552"/>
-            <a:ext cx="816864" cy="146304"/>
+            <a:off x="10018776" y="3328416"/>
+            <a:ext cx="862584" cy="146304"/>
           </a:xfrm>
           <a:prstGeom prst="rect">
             <a:avLst/>
@@ -17159,8 +17163,8 @@
         </p:nvSpPr>
         <p:spPr>
           <a:xfrm>
-            <a:off x="7854696" y="3694176"/>
-            <a:ext cx="3035808" cy="206654"/>
+            <a:off x="7763256" y="3749040"/>
+            <a:ext cx="3172968" cy="356616"/>
           </a:xfrm>
           <a:prstGeom prst="rect">
             <a:avLst/>
@@ -17178,7 +17182,7 @@
               <a:buNone/>
             </a:pPr>
             <a:r>
-              <a:rPr lang="en-US" sz="1120" dirty="0">
+              <a:rPr lang="en-US" sz="1040" dirty="0">
                 <a:solidFill>
                   <a:srgbClr val="17364A"/>
                 </a:solidFill>
@@ -17186,9 +17190,9 @@
                 <a:ea typeface="Aptos" pitchFamily="34" charset="-122"/>
                 <a:cs typeface="Aptos" pitchFamily="34" charset="-120"/>
               </a:rPr>
-              <a:t>A proposed AI use should move through documented review before it becomes an operational workflow.</a:t>
-            </a:r>
-            <a:endParaRPr lang="en-US" sz="1120" dirty="0"/>
+              <a:t>A proposed AI use should move through documented review before it.</a:t>
+            </a:r>
+            <a:endParaRPr lang="en-US" sz="1040" dirty="0"/>
           </a:p>
         </p:txBody>
       </p:sp>
@@ -17200,12 +17204,12 @@
         </p:nvSpPr>
         <p:spPr>
           <a:xfrm>
-            <a:off x="7635240" y="4184294"/>
-            <a:ext cx="3474720" cy="1466698"/>
+            <a:off x="7543800" y="4389120"/>
+            <a:ext cx="3611880" cy="1261872"/>
           </a:xfrm>
           <a:prstGeom prst="roundRect">
             <a:avLst>
-              <a:gd name="adj" fmla="val 7481"/>
+              <a:gd name="adj" fmla="val 8696"/>
             </a:avLst>
           </a:prstGeom>
           <a:solidFill>
@@ -17227,8 +17231,8 @@
         </p:nvSpPr>
         <p:spPr>
           <a:xfrm>
-            <a:off x="7799832" y="4330598"/>
-            <a:ext cx="3145536" cy="256032"/>
+            <a:off x="7708392" y="4517136"/>
+            <a:ext cx="3282696" cy="228600"/>
           </a:xfrm>
           <a:prstGeom prst="rect">
             <a:avLst/>
@@ -17244,7 +17248,7 @@
               <a:buNone/>
             </a:pPr>
             <a:r>
-              <a:rPr lang="en-US" sz="1300" b="1" dirty="0">
+              <a:rPr lang="en-US" sz="1220" b="1" dirty="0">
                 <a:solidFill>
                   <a:srgbClr val="0068B7"/>
                 </a:solidFill>
@@ -17254,7 +17258,7 @@
               </a:rPr>
               <a:t>What to document</a:t>
             </a:r>
-            <a:endParaRPr lang="en-US" sz="1300" dirty="0"/>
+            <a:endParaRPr lang="en-US" sz="1220" dirty="0"/>
           </a:p>
         </p:txBody>
       </p:sp>
@@ -17266,8 +17270,8 @@
         </p:nvSpPr>
         <p:spPr>
           <a:xfrm>
-            <a:off x="7799832" y="4659782"/>
-            <a:ext cx="3145536" cy="899770"/>
+            <a:off x="7708392" y="4828032"/>
+            <a:ext cx="3282696" cy="749808"/>
           </a:xfrm>
           <a:prstGeom prst="rect">
             <a:avLst/>
@@ -17285,7 +17289,7 @@
               <a:buNone/>
             </a:pPr>
             <a:r>
-              <a:rPr lang="en-US" sz="1320" dirty="0">
+              <a:rPr lang="en-US" sz="1220" dirty="0">
                 <a:solidFill>
                   <a:srgbClr val="17364A"/>
                 </a:solidFill>
@@ -17293,9 +17297,9 @@
                 <a:ea typeface="Aptos" pitchFamily="34" charset="-122"/>
                 <a:cs typeface="Aptos" pitchFamily="34" charset="-120"/>
               </a:rPr>
-              <a:t>Translate this concept into clear decision rights, review steps, documentation expectations, and escalation paths before an AI-supported workflow is approved.</a:t>
-            </a:r>
-            <a:endParaRPr lang="en-US" sz="1320" dirty="0"/>
+              <a:t>Translate this concept into clear decision rights, review steps, documentation.</a:t>
+            </a:r>
+            <a:endParaRPr lang="en-US" sz="1220" dirty="0"/>
           </a:p>
         </p:txBody>
       </p:sp>
@@ -17586,8 +17590,8 @@
         </p:nvSpPr>
         <p:spPr>
           <a:xfrm>
-            <a:off x="868680" y="1508760"/>
-            <a:ext cx="6309360" cy="4160520"/>
+            <a:off x="822960" y="1463040"/>
+            <a:ext cx="6565392" cy="4343400"/>
           </a:xfrm>
           <a:prstGeom prst="rect">
             <a:avLst/>
@@ -17605,7 +17609,7 @@
               <a:buNone/>
             </a:pPr>
             <a:r>
-              <a:rPr lang="en-US" sz="2100" dirty="0">
+              <a:rPr lang="en-US" sz="1920" dirty="0">
                 <a:solidFill>
                   <a:srgbClr val="003A63"/>
                 </a:solidFill>
@@ -17613,16 +17617,16 @@
                 <a:ea typeface="Aptos" pitchFamily="34" charset="-122"/>
                 <a:cs typeface="Aptos" pitchFamily="34" charset="-120"/>
               </a:rPr>
-              <a:t>• eCR matters for AI because it brings structured, timely, clinically relevant information into.</a:t>
-            </a:r>
-            <a:endParaRPr lang="en-US" sz="2100" dirty="0"/>
-          </a:p>
-          <a:p>
-            <a:pPr indent="0" marL="0">
-              <a:buNone/>
-            </a:pPr>
-            <a:r>
-              <a:rPr lang="en-US" sz="2100" dirty="0">
+              <a:t>• eCR matters for AI because it brings structured, timely, clinically relevant.</a:t>
+            </a:r>
+            <a:endParaRPr lang="en-US" sz="1920" dirty="0"/>
+          </a:p>
+          <a:p>
+            <a:pPr indent="0" marL="0">
+              <a:buNone/>
+            </a:pPr>
+            <a:r>
+              <a:rPr lang="en-US" sz="1920" dirty="0">
                 <a:solidFill>
                   <a:srgbClr val="003A63"/>
                 </a:solidFill>
@@ -17630,16 +17634,16 @@
                 <a:ea typeface="Aptos" pitchFamily="34" charset="-122"/>
                 <a:cs typeface="Aptos" pitchFamily="34" charset="-120"/>
               </a:rPr>
-              <a:t>• It can reduce manual reporting burden and improve the speed of public health awareness.</a:t>
-            </a:r>
-            <a:endParaRPr lang="en-US" sz="2100" dirty="0"/>
-          </a:p>
-          <a:p>
-            <a:pPr indent="0" marL="0">
-              <a:buNone/>
-            </a:pPr>
-            <a:r>
-              <a:rPr lang="en-US" sz="2100" dirty="0">
+              <a:t>• It can reduce manual reporting burden and improve the speed of public health.</a:t>
+            </a:r>
+            <a:endParaRPr lang="en-US" sz="1920" dirty="0"/>
+          </a:p>
+          <a:p>
+            <a:pPr indent="0" marL="0">
+              <a:buNone/>
+            </a:pPr>
+            <a:r>
+              <a:rPr lang="en-US" sz="1920" dirty="0">
                 <a:solidFill>
                   <a:srgbClr val="003A63"/>
                 </a:solidFill>
@@ -17649,7 +17653,7 @@
               </a:rPr>
               <a:t>• However, eCR is not simply a data feed.</a:t>
             </a:r>
-            <a:endParaRPr lang="en-US" sz="2100" dirty="0"/>
+            <a:endParaRPr lang="en-US" sz="1920" dirty="0"/>
           </a:p>
         </p:txBody>
       </p:sp>
@@ -17661,12 +17665,12 @@
         </p:nvSpPr>
         <p:spPr>
           <a:xfrm>
-            <a:off x="7635240" y="1325880"/>
-            <a:ext cx="3474720" cy="1255471"/>
+            <a:off x="7543800" y="1325880"/>
+            <a:ext cx="3611880" cy="1261872"/>
           </a:xfrm>
           <a:prstGeom prst="roundRect">
             <a:avLst>
-              <a:gd name="adj" fmla="val 8740"/>
+              <a:gd name="adj" fmla="val 8696"/>
             </a:avLst>
           </a:prstGeom>
           <a:solidFill>
@@ -17688,8 +17692,8 @@
         </p:nvSpPr>
         <p:spPr>
           <a:xfrm>
-            <a:off x="7799832" y="1472184"/>
-            <a:ext cx="3145536" cy="256032"/>
+            <a:off x="7708392" y="1453896"/>
+            <a:ext cx="3282696" cy="228600"/>
           </a:xfrm>
           <a:prstGeom prst="rect">
             <a:avLst/>
@@ -17705,7 +17709,7 @@
               <a:buNone/>
             </a:pPr>
             <a:r>
-              <a:rPr lang="en-US" sz="1300" b="1" dirty="0">
+              <a:rPr lang="en-US" sz="1220" b="1" dirty="0">
                 <a:solidFill>
                   <a:srgbClr val="0068B7"/>
                 </a:solidFill>
@@ -17715,7 +17719,7 @@
               </a:rPr>
               <a:t>Implementation cue</a:t>
             </a:r>
-            <a:endParaRPr lang="en-US" sz="1300" dirty="0"/>
+            <a:endParaRPr lang="en-US" sz="1220" dirty="0"/>
           </a:p>
         </p:txBody>
       </p:sp>
@@ -17727,8 +17731,8 @@
         </p:nvSpPr>
         <p:spPr>
           <a:xfrm>
-            <a:off x="7799832" y="1801368"/>
-            <a:ext cx="3145536" cy="688543"/>
+            <a:off x="7708392" y="1764792"/>
+            <a:ext cx="3282696" cy="749808"/>
           </a:xfrm>
           <a:prstGeom prst="rect">
             <a:avLst/>
@@ -17746,7 +17750,7 @@
               <a:buNone/>
             </a:pPr>
             <a:r>
-              <a:rPr lang="en-US" sz="1320" dirty="0">
+              <a:rPr lang="en-US" sz="1220" dirty="0">
                 <a:solidFill>
                   <a:srgbClr val="17364A"/>
                 </a:solidFill>
@@ -17754,9 +17758,9 @@
                 <a:ea typeface="Aptos" pitchFamily="34" charset="-122"/>
                 <a:cs typeface="Aptos" pitchFamily="34" charset="-120"/>
               </a:rPr>
-              <a:t>eCR matters for AI because it brings structured, timely, clinically relevant information into public.</a:t>
-            </a:r>
-            <a:endParaRPr lang="en-US" sz="1320" dirty="0"/>
+              <a:t>eCR matters for AI because it brings structured, timely, clinically relevant.</a:t>
+            </a:r>
+            <a:endParaRPr lang="en-US" sz="1220" dirty="0"/>
           </a:p>
         </p:txBody>
       </p:sp>
@@ -17768,12 +17772,12 @@
         </p:nvSpPr>
         <p:spPr>
           <a:xfrm>
-            <a:off x="7635240" y="2718511"/>
-            <a:ext cx="3474720" cy="1328623"/>
+            <a:off x="7543800" y="2724912"/>
+            <a:ext cx="3611880" cy="1527048"/>
           </a:xfrm>
           <a:prstGeom prst="roundRect">
             <a:avLst>
-              <a:gd name="adj" fmla="val 8259"/>
+              <a:gd name="adj" fmla="val 7186"/>
             </a:avLst>
           </a:prstGeom>
           <a:solidFill>
@@ -17795,24 +17799,26 @@
         </p:nvSpPr>
         <p:spPr>
           <a:xfrm>
-            <a:off x="7799832" y="2846527"/>
-            <a:ext cx="3145536" cy="237744"/>
-          </a:xfrm>
-          <a:prstGeom prst="rect">
-            <a:avLst/>
-          </a:prstGeom>
-          <a:noFill/>
-          <a:ln/>
-        </p:spPr>
-        <p:txBody>
-          <a:bodyPr wrap="square" lIns="0" tIns="0" rIns="0" bIns="0" rtlCol="0" anchor="ctr"/>
-          <a:lstStyle/>
-          <a:p>
-            <a:pPr indent="0" marL="0">
-              <a:buNone/>
-            </a:pPr>
-            <a:r>
-              <a:rPr lang="en-US" sz="1250" b="1" dirty="0">
+            <a:off x="7708392" y="2852928"/>
+            <a:ext cx="3282696" cy="219456"/>
+          </a:xfrm>
+          <a:prstGeom prst="rect">
+            <a:avLst/>
+          </a:prstGeom>
+          <a:noFill/>
+          <a:ln/>
+        </p:spPr>
+        <p:txBody>
+          <a:bodyPr wrap="square" lIns="0" tIns="0" rIns="0" bIns="0" rtlCol="0" anchor="ctr">
+            <a:normAutofit/>
+          </a:bodyPr>
+          <a:lstStyle/>
+          <a:p>
+            <a:pPr indent="0" marL="0">
+              <a:buNone/>
+            </a:pPr>
+            <a:r>
+              <a:rPr lang="en-US" sz="1160" b="1" dirty="0">
                 <a:solidFill>
                   <a:srgbClr val="0068B7"/>
                 </a:solidFill>
@@ -17822,7 +17828,7 @@
               </a:rPr>
               <a:t>Implementation path</a:t>
             </a:r>
-            <a:endParaRPr lang="en-US" sz="1250" dirty="0"/>
+            <a:endParaRPr lang="en-US" sz="1160" dirty="0"/>
           </a:p>
         </p:txBody>
       </p:sp>
@@ -17834,7 +17840,7 @@
         </p:nvSpPr>
         <p:spPr>
           <a:xfrm>
-            <a:off x="8763000" y="3399739"/>
+            <a:off x="8717280" y="3406140"/>
             <a:ext cx="164592" cy="0"/>
           </a:xfrm>
           <a:prstGeom prst="line">
@@ -17857,8 +17863,8 @@
         </p:nvSpPr>
         <p:spPr>
           <a:xfrm>
-            <a:off x="7872984" y="3248863"/>
-            <a:ext cx="890016" cy="301752"/>
+            <a:off x="7781544" y="3255264"/>
+            <a:ext cx="935736" cy="301752"/>
           </a:xfrm>
           <a:prstGeom prst="roundRect">
             <a:avLst>
@@ -17884,8 +17890,8 @@
         </p:nvSpPr>
         <p:spPr>
           <a:xfrm>
-            <a:off x="7909560" y="3322015"/>
-            <a:ext cx="816864" cy="146304"/>
+            <a:off x="7818120" y="3328416"/>
+            <a:ext cx="862584" cy="146304"/>
           </a:xfrm>
           <a:prstGeom prst="rect">
             <a:avLst/>
@@ -17925,7 +17931,7 @@
         </p:nvSpPr>
         <p:spPr>
           <a:xfrm>
-            <a:off x="9817608" y="3399739"/>
+            <a:off x="9817608" y="3406140"/>
             <a:ext cx="164592" cy="0"/>
           </a:xfrm>
           <a:prstGeom prst="line">
@@ -17948,8 +17954,8 @@
         </p:nvSpPr>
         <p:spPr>
           <a:xfrm>
-            <a:off x="8927592" y="3248863"/>
-            <a:ext cx="890016" cy="301752"/>
+            <a:off x="8881872" y="3255264"/>
+            <a:ext cx="935736" cy="301752"/>
           </a:xfrm>
           <a:prstGeom prst="roundRect">
             <a:avLst>
@@ -17975,8 +17981,8 @@
         </p:nvSpPr>
         <p:spPr>
           <a:xfrm>
-            <a:off x="8964168" y="3322015"/>
-            <a:ext cx="816864" cy="146304"/>
+            <a:off x="8918448" y="3328416"/>
+            <a:ext cx="862584" cy="146304"/>
           </a:xfrm>
           <a:prstGeom prst="rect">
             <a:avLst/>
@@ -18016,8 +18022,8 @@
         </p:nvSpPr>
         <p:spPr>
           <a:xfrm>
-            <a:off x="9982200" y="3248863"/>
-            <a:ext cx="890016" cy="301752"/>
+            <a:off x="9982200" y="3255264"/>
+            <a:ext cx="935736" cy="301752"/>
           </a:xfrm>
           <a:prstGeom prst="roundRect">
             <a:avLst>
@@ -18043,8 +18049,8 @@
         </p:nvSpPr>
         <p:spPr>
           <a:xfrm>
-            <a:off x="10018776" y="3322015"/>
-            <a:ext cx="816864" cy="146304"/>
+            <a:off x="10018776" y="3328416"/>
+            <a:ext cx="862584" cy="146304"/>
           </a:xfrm>
           <a:prstGeom prst="rect">
             <a:avLst/>
@@ -18084,8 +18090,8 @@
         </p:nvSpPr>
         <p:spPr>
           <a:xfrm>
-            <a:off x="7854696" y="3742639"/>
-            <a:ext cx="3035808" cy="158191"/>
+            <a:off x="7763256" y="3749040"/>
+            <a:ext cx="3172968" cy="356616"/>
           </a:xfrm>
           <a:prstGeom prst="rect">
             <a:avLst/>
@@ -18103,7 +18109,7 @@
               <a:buNone/>
             </a:pPr>
             <a:r>
-              <a:rPr lang="en-US" sz="1120" dirty="0">
+              <a:rPr lang="en-US" sz="1040" dirty="0">
                 <a:solidFill>
                   <a:srgbClr val="17364A"/>
                 </a:solidFill>
@@ -18111,9 +18117,9 @@
                 <a:ea typeface="Aptos" pitchFamily="34" charset="-122"/>
                 <a:cs typeface="Aptos" pitchFamily="34" charset="-120"/>
               </a:rPr>
-              <a:t>Implementation work should make dependencies, approvals, training, and sustainment visible before launch.</a:t>
-            </a:r>
-            <a:endParaRPr lang="en-US" sz="1120" dirty="0"/>
+              <a:t>Implementation work should make dependencies, approvals, training, and.</a:t>
+            </a:r>
+            <a:endParaRPr lang="en-US" sz="1040" dirty="0"/>
           </a:p>
         </p:txBody>
       </p:sp>
@@ -18125,12 +18131,12 @@
         </p:nvSpPr>
         <p:spPr>
           <a:xfrm>
-            <a:off x="7635240" y="4184294"/>
-            <a:ext cx="3474720" cy="1466698"/>
+            <a:off x="7543800" y="4389120"/>
+            <a:ext cx="3611880" cy="1261872"/>
           </a:xfrm>
           <a:prstGeom prst="roundRect">
             <a:avLst>
-              <a:gd name="adj" fmla="val 7481"/>
+              <a:gd name="adj" fmla="val 8696"/>
             </a:avLst>
           </a:prstGeom>
           <a:solidFill>
@@ -18152,8 +18158,8 @@
         </p:nvSpPr>
         <p:spPr>
           <a:xfrm>
-            <a:off x="7799832" y="4330598"/>
-            <a:ext cx="3145536" cy="256032"/>
+            <a:off x="7708392" y="4517136"/>
+            <a:ext cx="3282696" cy="228600"/>
           </a:xfrm>
           <a:prstGeom prst="rect">
             <a:avLst/>
@@ -18169,7 +18175,7 @@
               <a:buNone/>
             </a:pPr>
             <a:r>
-              <a:rPr lang="en-US" sz="1300" b="1" dirty="0">
+              <a:rPr lang="en-US" sz="1220" b="1" dirty="0">
                 <a:solidFill>
                   <a:srgbClr val="0068B7"/>
                 </a:solidFill>
@@ -18179,7 +18185,7 @@
               </a:rPr>
               <a:t>Next action</a:t>
             </a:r>
-            <a:endParaRPr lang="en-US" sz="1300" dirty="0"/>
+            <a:endParaRPr lang="en-US" sz="1220" dirty="0"/>
           </a:p>
         </p:txBody>
       </p:sp>
@@ -18191,8 +18197,8 @@
         </p:nvSpPr>
         <p:spPr>
           <a:xfrm>
-            <a:off x="7799832" y="4659782"/>
-            <a:ext cx="3145536" cy="899770"/>
+            <a:off x="7708392" y="4828032"/>
+            <a:ext cx="3282696" cy="749808"/>
           </a:xfrm>
           <a:prstGeom prst="rect">
             <a:avLst/>
@@ -18210,7 +18216,7 @@
               <a:buNone/>
             </a:pPr>
             <a:r>
-              <a:rPr lang="en-US" sz="1320" dirty="0">
+              <a:rPr lang="en-US" sz="1220" dirty="0">
                 <a:solidFill>
                   <a:srgbClr val="17364A"/>
                 </a:solidFill>
@@ -18218,9 +18224,9 @@
                 <a:ea typeface="Aptos" pitchFamily="34" charset="-122"/>
                 <a:cs typeface="Aptos" pitchFamily="34" charset="-120"/>
               </a:rPr>
-              <a:t>Use the concept to clarify workflow changes, dependencies, staffing, procurement requirements, training needs, and implementation checkpoints.</a:t>
-            </a:r>
-            <a:endParaRPr lang="en-US" sz="1320" dirty="0"/>
+              <a:t>Use the concept to clarify workflow changes, dependencies, staffing, procurement.</a:t>
+            </a:r>
+            <a:endParaRPr lang="en-US" sz="1220" dirty="0"/>
           </a:p>
         </p:txBody>
       </p:sp>
@@ -18511,8 +18517,8 @@
         </p:nvSpPr>
         <p:spPr>
           <a:xfrm>
-            <a:off x="868680" y="1508760"/>
-            <a:ext cx="6309360" cy="4160520"/>
+            <a:off x="822960" y="1463040"/>
+            <a:ext cx="6565392" cy="4343400"/>
           </a:xfrm>
           <a:prstGeom prst="rect">
             <a:avLst/>
@@ -18530,7 +18536,7 @@
               <a:buNone/>
             </a:pPr>
             <a:r>
-              <a:rPr lang="en-US" sz="2100" dirty="0">
+              <a:rPr lang="en-US" sz="1920" dirty="0">
                 <a:solidFill>
                   <a:srgbClr val="003A63"/>
                 </a:solidFill>
@@ -18540,14 +18546,14 @@
               </a:rPr>
               <a:t>• Electronic case reporting.</a:t>
             </a:r>
-            <a:endParaRPr lang="en-US" sz="2100" dirty="0"/>
-          </a:p>
-          <a:p>
-            <a:pPr indent="0" marL="0">
-              <a:buNone/>
-            </a:pPr>
-            <a:r>
-              <a:rPr lang="en-US" sz="2100" dirty="0">
+            <a:endParaRPr lang="en-US" sz="1920" dirty="0"/>
+          </a:p>
+          <a:p>
+            <a:pPr indent="0" marL="0">
+              <a:buNone/>
+            </a:pPr>
+            <a:r>
+              <a:rPr lang="en-US" sz="1920" dirty="0">
                 <a:solidFill>
                   <a:srgbClr val="003A63"/>
                 </a:solidFill>
@@ -18555,16 +18561,16 @@
                 <a:ea typeface="Aptos" pitchFamily="34" charset="-122"/>
                 <a:cs typeface="Aptos" pitchFamily="34" charset="-120"/>
               </a:rPr>
-              <a:t>• Electronic case reporting is the automated exchange of case report information from healthcare.</a:t>
-            </a:r>
-            <a:endParaRPr lang="en-US" sz="2100" dirty="0"/>
-          </a:p>
-          <a:p>
-            <a:pPr indent="0" marL="0">
-              <a:buNone/>
-            </a:pPr>
-            <a:r>
-              <a:rPr lang="en-US" sz="2100" dirty="0">
+              <a:t>• Electronic case reporting is the automated exchange of case report.</a:t>
+            </a:r>
+            <a:endParaRPr lang="en-US" sz="1920" dirty="0"/>
+          </a:p>
+          <a:p>
+            <a:pPr indent="0" marL="0">
+              <a:buNone/>
+            </a:pPr>
+            <a:r>
+              <a:rPr lang="en-US" sz="1920" dirty="0">
                 <a:solidFill>
                   <a:srgbClr val="003A63"/>
                 </a:solidFill>
@@ -18572,9 +18578,9 @@
                 <a:ea typeface="Aptos" pitchFamily="34" charset="-122"/>
                 <a:cs typeface="Aptos" pitchFamily="34" charset="-120"/>
               </a:rPr>
-              <a:t>• It is designed to improve timeliness, completeness, and consistency in reportable condition.</a:t>
-            </a:r>
-            <a:endParaRPr lang="en-US" sz="2100" dirty="0"/>
+              <a:t>• It is designed to improve timeliness, completeness, and consistency in.</a:t>
+            </a:r>
+            <a:endParaRPr lang="en-US" sz="1920" dirty="0"/>
           </a:p>
         </p:txBody>
       </p:sp>
@@ -18586,12 +18592,12 @@
         </p:nvSpPr>
         <p:spPr>
           <a:xfrm>
-            <a:off x="7635240" y="1325880"/>
-            <a:ext cx="3474720" cy="1207008"/>
+            <a:off x="7543800" y="1325880"/>
+            <a:ext cx="3611880" cy="1261872"/>
           </a:xfrm>
           <a:prstGeom prst="roundRect">
             <a:avLst>
-              <a:gd name="adj" fmla="val 9091"/>
+              <a:gd name="adj" fmla="val 8696"/>
             </a:avLst>
           </a:prstGeom>
           <a:solidFill>
@@ -18613,8 +18619,8 @@
         </p:nvSpPr>
         <p:spPr>
           <a:xfrm>
-            <a:off x="7799832" y="1472184"/>
-            <a:ext cx="3145536" cy="256032"/>
+            <a:off x="7708392" y="1453896"/>
+            <a:ext cx="3282696" cy="228600"/>
           </a:xfrm>
           <a:prstGeom prst="rect">
             <a:avLst/>
@@ -18630,7 +18636,7 @@
               <a:buNone/>
             </a:pPr>
             <a:r>
-              <a:rPr lang="en-US" sz="1300" b="1" dirty="0">
+              <a:rPr lang="en-US" sz="1220" b="1" dirty="0">
                 <a:solidFill>
                   <a:srgbClr val="0068B7"/>
                 </a:solidFill>
@@ -18640,7 +18646,7 @@
               </a:rPr>
               <a:t>Implementation cue</a:t>
             </a:r>
-            <a:endParaRPr lang="en-US" sz="1300" dirty="0"/>
+            <a:endParaRPr lang="en-US" sz="1220" dirty="0"/>
           </a:p>
         </p:txBody>
       </p:sp>
@@ -18652,8 +18658,8 @@
         </p:nvSpPr>
         <p:spPr>
           <a:xfrm>
-            <a:off x="7799832" y="1801368"/>
-            <a:ext cx="3145536" cy="640080"/>
+            <a:off x="7708392" y="1764792"/>
+            <a:ext cx="3282696" cy="749808"/>
           </a:xfrm>
           <a:prstGeom prst="rect">
             <a:avLst/>
@@ -18671,7 +18677,7 @@
               <a:buNone/>
             </a:pPr>
             <a:r>
-              <a:rPr lang="en-US" sz="1320" dirty="0">
+              <a:rPr lang="en-US" sz="1220" dirty="0">
                 <a:solidFill>
                   <a:srgbClr val="17364A"/>
                 </a:solidFill>
@@ -18681,7 +18687,7 @@
               </a:rPr>
               <a:t>Electronic case reporting.</a:t>
             </a:r>
-            <a:endParaRPr lang="en-US" sz="1320" dirty="0"/>
+            <a:endParaRPr lang="en-US" sz="1220" dirty="0"/>
           </a:p>
         </p:txBody>
       </p:sp>
@@ -18693,12 +18699,12 @@
         </p:nvSpPr>
         <p:spPr>
           <a:xfrm>
-            <a:off x="7635240" y="2670048"/>
-            <a:ext cx="3474720" cy="1377086"/>
+            <a:off x="7543800" y="2724912"/>
+            <a:ext cx="3611880" cy="1527048"/>
           </a:xfrm>
           <a:prstGeom prst="roundRect">
             <a:avLst>
-              <a:gd name="adj" fmla="val 7968"/>
+              <a:gd name="adj" fmla="val 7186"/>
             </a:avLst>
           </a:prstGeom>
           <a:solidFill>
@@ -18720,8 +18726,8 @@
         </p:nvSpPr>
         <p:spPr>
           <a:xfrm>
-            <a:off x="7799832" y="2816352"/>
-            <a:ext cx="3145536" cy="256032"/>
+            <a:off x="7708392" y="2852928"/>
+            <a:ext cx="3282696" cy="228600"/>
           </a:xfrm>
           <a:prstGeom prst="rect">
             <a:avLst/>
@@ -18737,7 +18743,7 @@
               <a:buNone/>
             </a:pPr>
             <a:r>
-              <a:rPr lang="en-US" sz="1300" b="1" dirty="0">
+              <a:rPr lang="en-US" sz="1220" b="1" dirty="0">
                 <a:solidFill>
                   <a:srgbClr val="0068B7"/>
                 </a:solidFill>
@@ -18747,7 +18753,7 @@
               </a:rPr>
               <a:t>Concept checkpoints</a:t>
             </a:r>
-            <a:endParaRPr lang="en-US" sz="1300" dirty="0"/>
+            <a:endParaRPr lang="en-US" sz="1220" dirty="0"/>
           </a:p>
         </p:txBody>
       </p:sp>
@@ -18759,8 +18765,8 @@
         </p:nvSpPr>
         <p:spPr>
           <a:xfrm>
-            <a:off x="7818120" y="3182112"/>
-            <a:ext cx="3090672" cy="718718"/>
+            <a:off x="7726680" y="3182112"/>
+            <a:ext cx="3227832" cy="960120"/>
           </a:xfrm>
           <a:prstGeom prst="rect">
             <a:avLst/>
@@ -18778,7 +18784,7 @@
               <a:buNone/>
             </a:pPr>
             <a:r>
-              <a:rPr lang="en-US" sz="1220" dirty="0">
+              <a:rPr lang="en-US" sz="1140" dirty="0">
                 <a:solidFill>
                   <a:srgbClr val="17364A"/>
                 </a:solidFill>
@@ -18786,16 +18792,16 @@
                 <a:ea typeface="Aptos" pitchFamily="34" charset="-122"/>
                 <a:cs typeface="Aptos" pitchFamily="34" charset="-120"/>
               </a:rPr>
-              <a:t>Electronic case reporting is the automated exchange of case report.</a:t>
-            </a:r>
-            <a:endParaRPr lang="en-US" sz="1220" dirty="0"/>
-          </a:p>
-          <a:p>
-            <a:pPr indent="0" marL="0">
-              <a:buNone/>
-            </a:pPr>
-            <a:r>
-              <a:rPr lang="en-US" sz="1220" dirty="0">
+              <a:t>Electronic case reporting is the automated.</a:t>
+            </a:r>
+            <a:endParaRPr lang="en-US" sz="1140" dirty="0"/>
+          </a:p>
+          <a:p>
+            <a:pPr indent="0" marL="0">
+              <a:buNone/>
+            </a:pPr>
+            <a:r>
+              <a:rPr lang="en-US" sz="1140" dirty="0">
                 <a:solidFill>
                   <a:srgbClr val="17364A"/>
                 </a:solidFill>
@@ -18805,14 +18811,14 @@
               </a:rPr>
               <a:t>eICR.</a:t>
             </a:r>
-            <a:endParaRPr lang="en-US" sz="1220" dirty="0"/>
-          </a:p>
-          <a:p>
-            <a:pPr indent="0" marL="0">
-              <a:buNone/>
-            </a:pPr>
-            <a:r>
-              <a:rPr lang="en-US" sz="1220" dirty="0">
+            <a:endParaRPr lang="en-US" sz="1140" dirty="0"/>
+          </a:p>
+          <a:p>
+            <a:pPr indent="0" marL="0">
+              <a:buNone/>
+            </a:pPr>
+            <a:r>
+              <a:rPr lang="en-US" sz="1140" dirty="0">
                 <a:solidFill>
                   <a:srgbClr val="17364A"/>
                 </a:solidFill>
@@ -18820,9 +18826,9 @@
                 <a:ea typeface="Aptos" pitchFamily="34" charset="-122"/>
                 <a:cs typeface="Aptos" pitchFamily="34" charset="-120"/>
               </a:rPr>
-              <a:t>The electronic initial case report is the structured report sent.</a:t>
-            </a:r>
-            <a:endParaRPr lang="en-US" sz="1220" dirty="0"/>
+              <a:t>The electronic initial case report is the.</a:t>
+            </a:r>
+            <a:endParaRPr lang="en-US" sz="1140" dirty="0"/>
           </a:p>
         </p:txBody>
       </p:sp>
@@ -18834,12 +18840,12 @@
         </p:nvSpPr>
         <p:spPr>
           <a:xfrm>
-            <a:off x="7635240" y="4184294"/>
-            <a:ext cx="3474720" cy="1466698"/>
+            <a:off x="7543800" y="4389120"/>
+            <a:ext cx="3611880" cy="1261872"/>
           </a:xfrm>
           <a:prstGeom prst="roundRect">
             <a:avLst>
-              <a:gd name="adj" fmla="val 7481"/>
+              <a:gd name="adj" fmla="val 8696"/>
             </a:avLst>
           </a:prstGeom>
           <a:solidFill>
@@ -18861,8 +18867,8 @@
         </p:nvSpPr>
         <p:spPr>
           <a:xfrm>
-            <a:off x="7799832" y="4330598"/>
-            <a:ext cx="3145536" cy="256032"/>
+            <a:off x="7708392" y="4517136"/>
+            <a:ext cx="3282696" cy="228600"/>
           </a:xfrm>
           <a:prstGeom prst="rect">
             <a:avLst/>
@@ -18878,7 +18884,7 @@
               <a:buNone/>
             </a:pPr>
             <a:r>
-              <a:rPr lang="en-US" sz="1300" b="1" dirty="0">
+              <a:rPr lang="en-US" sz="1220" b="1" dirty="0">
                 <a:solidFill>
                   <a:srgbClr val="0068B7"/>
                 </a:solidFill>
@@ -18888,7 +18894,7 @@
               </a:rPr>
               <a:t>Next action</a:t>
             </a:r>
-            <a:endParaRPr lang="en-US" sz="1300" dirty="0"/>
+            <a:endParaRPr lang="en-US" sz="1220" dirty="0"/>
           </a:p>
         </p:txBody>
       </p:sp>
@@ -18900,8 +18906,8 @@
         </p:nvSpPr>
         <p:spPr>
           <a:xfrm>
-            <a:off x="7799832" y="4659782"/>
-            <a:ext cx="3145536" cy="899770"/>
+            <a:off x="7708392" y="4828032"/>
+            <a:ext cx="3282696" cy="749808"/>
           </a:xfrm>
           <a:prstGeom prst="rect">
             <a:avLst/>
@@ -18919,7 +18925,7 @@
               <a:buNone/>
             </a:pPr>
             <a:r>
-              <a:rPr lang="en-US" sz="1320" dirty="0">
+              <a:rPr lang="en-US" sz="1220" dirty="0">
                 <a:solidFill>
                   <a:srgbClr val="17364A"/>
                 </a:solidFill>
@@ -18927,9 +18933,9 @@
                 <a:ea typeface="Aptos" pitchFamily="34" charset="-122"/>
                 <a:cs typeface="Aptos" pitchFamily="34" charset="-120"/>
               </a:rPr>
-              <a:t>Use the concept to clarify workflow changes, dependencies, staffing, procurement requirements, training needs, and implementation checkpoints.</a:t>
-            </a:r>
-            <a:endParaRPr lang="en-US" sz="1320" dirty="0"/>
+              <a:t>Use the concept to clarify workflow changes, dependencies, staffing, procurement.</a:t>
+            </a:r>
+            <a:endParaRPr lang="en-US" sz="1220" dirty="0"/>
           </a:p>
         </p:txBody>
       </p:sp>

--- a/downloads/presentations/modules/arc-230.pptx
+++ b/downloads/presentations/modules/arc-230.pptx
@@ -12415,7 +12415,7 @@
                 <a:ea typeface="Aptos" pitchFamily="34" charset="-122"/>
                 <a:cs typeface="Aptos" pitchFamily="34" charset="-120"/>
               </a:rPr>
-              <a:t>• 1. What is eCR?</a:t>
+              <a:t>1. What is eCR?</a:t>
             </a:r>
             <a:endParaRPr lang="en-US" sz="1920" dirty="0"/>
           </a:p>
@@ -12432,7 +12432,7 @@
                 <a:ea typeface="Aptos" pitchFamily="34" charset="-122"/>
                 <a:cs typeface="Aptos" pitchFamily="34" charset="-120"/>
               </a:rPr>
-              <a:t>• 2. What is an eICR?</a:t>
+              <a:t>2. What is an eICR?</a:t>
             </a:r>
             <a:endParaRPr lang="en-US" sz="1920" dirty="0"/>
           </a:p>
@@ -12449,7 +12449,7 @@
                 <a:ea typeface="Aptos" pitchFamily="34" charset="-122"/>
                 <a:cs typeface="Aptos" pitchFamily="34" charset="-120"/>
               </a:rPr>
-              <a:t>• 3. What do eRSD and RCTC support?</a:t>
+              <a:t>3. What do eRSD and RCTC support?</a:t>
             </a:r>
             <a:endParaRPr lang="en-US" sz="1920" dirty="0"/>
           </a:p>
@@ -12556,7 +12556,7 @@
                 <a:ea typeface="Aptos" pitchFamily="34" charset="-122"/>
                 <a:cs typeface="Aptos" pitchFamily="34" charset="-120"/>
               </a:rPr>
-              <a:t>1. What is eCR?</a:t>
+              <a:t>What is eCR?</a:t>
             </a:r>
             <a:endParaRPr lang="en-US" sz="1220" dirty="0"/>
           </a:p>
@@ -12663,41 +12663,7 @@
                 <a:ea typeface="Aptos" pitchFamily="34" charset="-122"/>
                 <a:cs typeface="Aptos" pitchFamily="34" charset="-120"/>
               </a:rPr>
-              <a:t>1.</a:t>
-            </a:r>
-            <a:endParaRPr lang="en-US" sz="1140" dirty="0"/>
-          </a:p>
-          <a:p>
-            <a:pPr indent="0" marL="0">
-              <a:buNone/>
-            </a:pPr>
-            <a:r>
-              <a:rPr lang="en-US" sz="1140" dirty="0">
-                <a:solidFill>
-                  <a:srgbClr val="17364A"/>
-                </a:solidFill>
-                <a:latin typeface="Aptos" pitchFamily="34" charset="0"/>
-                <a:ea typeface="Aptos" pitchFamily="34" charset="-122"/>
-                <a:cs typeface="Aptos" pitchFamily="34" charset="-120"/>
-              </a:rPr>
               <a:t>What is eCR?</a:t>
-            </a:r>
-            <a:endParaRPr lang="en-US" sz="1140" dirty="0"/>
-          </a:p>
-          <a:p>
-            <a:pPr indent="0" marL="0">
-              <a:buNone/>
-            </a:pPr>
-            <a:r>
-              <a:rPr lang="en-US" sz="1140" dirty="0">
-                <a:solidFill>
-                  <a:srgbClr val="17364A"/>
-                </a:solidFill>
-                <a:latin typeface="Aptos" pitchFamily="34" charset="0"/>
-                <a:ea typeface="Aptos" pitchFamily="34" charset="-122"/>
-                <a:cs typeface="Aptos" pitchFamily="34" charset="-120"/>
-              </a:rPr>
-              <a:t>2.</a:t>
             </a:r>
             <a:endParaRPr lang="en-US" sz="1140" dirty="0"/>
           </a:p>
